--- a/blocks/C_drive_visualization/M09_differential_drive/M09_Differential_Drive_구동.pptx
+++ b/blocks/C_drive_visualization/M09_differential_drive/M09_Differential_Drive_구동.pptx
@@ -44,6 +44,9 @@
     <p:sldId id="292" r:id="rId44"/>
     <p:sldId id="293" r:id="rId45"/>
     <p:sldId id="294" r:id="rId46"/>
+    <p:sldId id="295" r:id="rId47"/>
+    <p:sldId id="296" r:id="rId48"/>
+    <p:sldId id="297" r:id="rId49"/>
   </p:sldIdLst>
   <p:sldSz cx="12191999" cy="6858000" type="screen4x3"/>
   <p:notesSz cx="6858000" cy="9144000"/>
@@ -630,7 +633,7 @@
           <a:lstStyle/>
           <a:p>
             <a:r>
-              <a:t>[설명] ~/agv_ws/src/agv_gazebo/models/agv/model.sdf의 전체 파일을 2/21 구간으로 작성한다.</a:t>
+              <a:t>[설명] ~/agv_ws/src/agv_gazebo/models/agv/model.sdf의 전체 파일을 2/24 구간으로 작성한다.</a:t>
             </a:r>
           </a:p>
           <a:p>
@@ -720,7 +723,7 @@
           <a:lstStyle/>
           <a:p>
             <a:r>
-              <a:t>[설명] ~/agv_ws/src/agv_gazebo/models/agv/model.sdf의 전체 파일을 3/21 구간으로 작성한다.</a:t>
+              <a:t>[설명] ~/agv_ws/src/agv_gazebo/models/agv/model.sdf의 전체 파일을 3/24 구간으로 작성한다.</a:t>
             </a:r>
           </a:p>
           <a:p>
@@ -810,7 +813,7 @@
           <a:lstStyle/>
           <a:p>
             <a:r>
-              <a:t>[설명] ~/agv_ws/src/agv_gazebo/models/agv/model.sdf의 전체 파일을 4/21 구간으로 작성한다.</a:t>
+              <a:t>[설명] ~/agv_ws/src/agv_gazebo/models/agv/model.sdf의 전체 파일을 4/24 구간으로 작성한다.</a:t>
             </a:r>
           </a:p>
           <a:p>
@@ -900,7 +903,7 @@
           <a:lstStyle/>
           <a:p>
             <a:r>
-              <a:t>[설명] ~/agv_ws/src/agv_gazebo/models/agv/model.sdf의 전체 파일을 5/21 구간으로 작성한다.</a:t>
+              <a:t>[설명] ~/agv_ws/src/agv_gazebo/models/agv/model.sdf의 전체 파일을 5/24 구간으로 작성한다.</a:t>
             </a:r>
           </a:p>
           <a:p>
@@ -990,7 +993,7 @@
           <a:lstStyle/>
           <a:p>
             <a:r>
-              <a:t>[설명] ~/agv_ws/src/agv_gazebo/models/agv/model.sdf의 전체 파일을 6/21 구간으로 작성한다.</a:t>
+              <a:t>[설명] ~/agv_ws/src/agv_gazebo/models/agv/model.sdf의 전체 파일을 6/24 구간으로 작성한다.</a:t>
             </a:r>
           </a:p>
           <a:p>
@@ -1080,7 +1083,7 @@
           <a:lstStyle/>
           <a:p>
             <a:r>
-              <a:t>[설명] ~/agv_ws/src/agv_gazebo/models/agv/model.sdf의 전체 파일을 7/21 구간으로 작성한다.</a:t>
+              <a:t>[설명] ~/agv_ws/src/agv_gazebo/models/agv/model.sdf의 전체 파일을 7/24 구간으로 작성한다.</a:t>
             </a:r>
           </a:p>
           <a:p>
@@ -1170,7 +1173,7 @@
           <a:lstStyle/>
           <a:p>
             <a:r>
-              <a:t>[설명] ~/agv_ws/src/agv_gazebo/models/agv/model.sdf의 전체 파일을 8/21 구간으로 작성한다.</a:t>
+              <a:t>[설명] ~/agv_ws/src/agv_gazebo/models/agv/model.sdf의 전체 파일을 8/24 구간으로 작성한다.</a:t>
             </a:r>
           </a:p>
           <a:p>
@@ -1260,7 +1263,7 @@
           <a:lstStyle/>
           <a:p>
             <a:r>
-              <a:t>[설명] ~/agv_ws/src/agv_gazebo/models/agv/model.sdf의 전체 파일을 9/21 구간으로 작성한다.</a:t>
+              <a:t>[설명] ~/agv_ws/src/agv_gazebo/models/agv/model.sdf의 전체 파일을 9/24 구간으로 작성한다.</a:t>
             </a:r>
           </a:p>
           <a:p>
@@ -1350,7 +1353,7 @@
           <a:lstStyle/>
           <a:p>
             <a:r>
-              <a:t>[설명] ~/agv_ws/src/agv_gazebo/models/agv/model.sdf의 전체 파일을 10/21 구간으로 작성한다.</a:t>
+              <a:t>[설명] ~/agv_ws/src/agv_gazebo/models/agv/model.sdf의 전체 파일을 10/24 구간으로 작성한다.</a:t>
             </a:r>
           </a:p>
           <a:p>
@@ -1440,7 +1443,7 @@
           <a:lstStyle/>
           <a:p>
             <a:r>
-              <a:t>[설명] ~/agv_ws/src/agv_gazebo/models/agv/model.sdf의 전체 파일을 11/21 구간으로 작성한다.</a:t>
+              <a:t>[설명] ~/agv_ws/src/agv_gazebo/models/agv/model.sdf의 전체 파일을 11/24 구간으로 작성한다.</a:t>
             </a:r>
           </a:p>
           <a:p>
@@ -1620,7 +1623,7 @@
           <a:lstStyle/>
           <a:p>
             <a:r>
-              <a:t>[설명] ~/agv_ws/src/agv_gazebo/models/agv/model.sdf의 전체 파일을 12/21 구간으로 작성한다.</a:t>
+              <a:t>[설명] ~/agv_ws/src/agv_gazebo/models/agv/model.sdf의 전체 파일을 12/24 구간으로 작성한다.</a:t>
             </a:r>
           </a:p>
           <a:p>
@@ -1710,7 +1713,7 @@
           <a:lstStyle/>
           <a:p>
             <a:r>
-              <a:t>[설명] ~/agv_ws/src/agv_gazebo/models/agv/model.sdf의 전체 파일을 13/21 구간으로 작성한다.</a:t>
+              <a:t>[설명] ~/agv_ws/src/agv_gazebo/models/agv/model.sdf의 전체 파일을 13/24 구간으로 작성한다.</a:t>
             </a:r>
           </a:p>
           <a:p>
@@ -1800,7 +1803,7 @@
           <a:lstStyle/>
           <a:p>
             <a:r>
-              <a:t>[설명] ~/agv_ws/src/agv_gazebo/models/agv/model.sdf의 전체 파일을 14/21 구간으로 작성한다.</a:t>
+              <a:t>[설명] ~/agv_ws/src/agv_gazebo/models/agv/model.sdf의 전체 파일을 14/24 구간으로 작성한다.</a:t>
             </a:r>
           </a:p>
           <a:p>
@@ -1890,7 +1893,7 @@
           <a:lstStyle/>
           <a:p>
             <a:r>
-              <a:t>[설명] ~/agv_ws/src/agv_gazebo/models/agv/model.sdf의 전체 파일을 15/21 구간으로 작성한다.</a:t>
+              <a:t>[설명] ~/agv_ws/src/agv_gazebo/models/agv/model.sdf의 전체 파일을 15/24 구간으로 작성한다.</a:t>
             </a:r>
           </a:p>
           <a:p>
@@ -1980,7 +1983,7 @@
           <a:lstStyle/>
           <a:p>
             <a:r>
-              <a:t>[설명] ~/agv_ws/src/agv_gazebo/models/agv/model.sdf의 전체 파일을 16/21 구간으로 작성한다.</a:t>
+              <a:t>[설명] ~/agv_ws/src/agv_gazebo/models/agv/model.sdf의 전체 파일을 16/24 구간으로 작성한다.</a:t>
             </a:r>
           </a:p>
           <a:p>
@@ -2070,7 +2073,7 @@
           <a:lstStyle/>
           <a:p>
             <a:r>
-              <a:t>[설명] ~/agv_ws/src/agv_gazebo/models/agv/model.sdf의 전체 파일을 17/21 구간으로 작성한다.</a:t>
+              <a:t>[설명] ~/agv_ws/src/agv_gazebo/models/agv/model.sdf의 전체 파일을 17/24 구간으로 작성한다.</a:t>
             </a:r>
           </a:p>
           <a:p>
@@ -2160,7 +2163,7 @@
           <a:lstStyle/>
           <a:p>
             <a:r>
-              <a:t>[설명] ~/agv_ws/src/agv_gazebo/models/agv/model.sdf의 전체 파일을 18/21 구간으로 작성한다.</a:t>
+              <a:t>[설명] ~/agv_ws/src/agv_gazebo/models/agv/model.sdf의 전체 파일을 18/24 구간으로 작성한다.</a:t>
             </a:r>
           </a:p>
           <a:p>
@@ -2250,7 +2253,7 @@
           <a:lstStyle/>
           <a:p>
             <a:r>
-              <a:t>[설명] ~/agv_ws/src/agv_gazebo/models/agv/model.sdf의 전체 파일을 19/21 구간으로 작성한다.</a:t>
+              <a:t>[설명] ~/agv_ws/src/agv_gazebo/models/agv/model.sdf의 전체 파일을 19/24 구간으로 작성한다.</a:t>
             </a:r>
           </a:p>
           <a:p>
@@ -2340,7 +2343,7 @@
           <a:lstStyle/>
           <a:p>
             <a:r>
-              <a:t>[설명] ~/agv_ws/src/agv_gazebo/models/agv/model.sdf의 전체 파일을 20/21 구간으로 작성한다.</a:t>
+              <a:t>[설명] ~/agv_ws/src/agv_gazebo/models/agv/model.sdf의 전체 파일을 20/24 구간으로 작성한다.</a:t>
             </a:r>
           </a:p>
           <a:p>
@@ -2430,7 +2433,7 @@
           <a:lstStyle/>
           <a:p>
             <a:r>
-              <a:t>[설명] ~/agv_ws/src/agv_gazebo/models/agv/model.sdf의 전체 파일을 21/21 구간으로 작성한다.</a:t>
+              <a:t>[설명] ~/agv_ws/src/agv_gazebo/models/agv/model.sdf의 전체 파일을 21/24 구간으로 작성한다.</a:t>
             </a:r>
           </a:p>
           <a:p>
@@ -2610,12 +2613,12 @@
           <a:lstStyle/>
           <a:p>
             <a:r>
-              <a:t>[설명] ~/agv_ws/src/agv_control/agv_control/cmd_test_node.py의 전체 파일을 1/3 구간으로 작성한다.</a:t>
-            </a:r>
-          </a:p>
-          <a:p>
-            <a:r>
-              <a:t>[실행] nano ~/agv_ws/src/agv_control/agv_control/cmd_test_node.py</a:t>
+              <a:t>[설명] ~/agv_ws/src/agv_gazebo/models/agv/model.sdf의 전체 파일을 22/24 구간으로 작성한다.</a:t>
+            </a:r>
+          </a:p>
+          <a:p>
+            <a:r>
+              <a:t>[실행] nano ~/agv_ws/src/agv_gazebo/models/agv/model.sdf</a:t>
             </a:r>
           </a:p>
           <a:p>
@@ -2700,12 +2703,12 @@
           <a:lstStyle/>
           <a:p>
             <a:r>
-              <a:t>[설명] ~/agv_ws/src/agv_control/agv_control/cmd_test_node.py의 전체 파일을 2/3 구간으로 작성한다.</a:t>
-            </a:r>
-          </a:p>
-          <a:p>
-            <a:r>
-              <a:t>[실행] nano ~/agv_ws/src/agv_control/agv_control/cmd_test_node.py</a:t>
+              <a:t>[설명] ~/agv_ws/src/agv_gazebo/models/agv/model.sdf의 전체 파일을 23/24 구간으로 작성한다.</a:t>
+            </a:r>
+          </a:p>
+          <a:p>
+            <a:r>
+              <a:t>[실행] nano ~/agv_ws/src/agv_gazebo/models/agv/model.sdf</a:t>
             </a:r>
           </a:p>
           <a:p>
@@ -2790,12 +2793,12 @@
           <a:lstStyle/>
           <a:p>
             <a:r>
-              <a:t>[설명] ~/agv_ws/src/agv_control/agv_control/cmd_test_node.py의 전체 파일을 3/3 구간으로 작성한다.</a:t>
-            </a:r>
-          </a:p>
-          <a:p>
-            <a:r>
-              <a:t>[실행] nano ~/agv_ws/src/agv_control/agv_control/cmd_test_node.py</a:t>
+              <a:t>[설명] ~/agv_ws/src/agv_gazebo/models/agv/model.sdf의 전체 파일을 24/24 구간으로 작성한다.</a:t>
+            </a:r>
+          </a:p>
+          <a:p>
+            <a:r>
+              <a:t>[실행] nano ~/agv_ws/src/agv_gazebo/models/agv/model.sdf</a:t>
             </a:r>
           </a:p>
           <a:p>
@@ -2880,22 +2883,17 @@
           <a:lstStyle/>
           <a:p>
             <a:r>
-              <a:t>[설명] build/source/run을 생략 없이 실행한다.</a:t>
-            </a:r>
-          </a:p>
-          <a:p>
-            <a:r>
-              <a:t>[실행] ros2 launch agv_gazebo gazebo.launch.py</a:t>
-            </a:r>
-          </a:p>
-          <a:p>
-            <a:r>
-              <a:t># 새 터미널: ros2 run agv_control cmd_test_node</a:t>
-            </a:r>
-          </a:p>
-          <a:p>
-            <a:r>
-              <a:t>[확인] /cmd_vel에서 odom과 바퀴 구동 topic으로 이어지는 경로를 확인한다.</a:t>
+              <a:t>[설명] ~/agv_ws/src/agv_control/agv_control/cmd_test_node.py의 전체 파일을 1/3 구간으로 작성한다.</a:t>
+            </a:r>
+          </a:p>
+          <a:p>
+            <a:r>
+              <a:t>[실행] nano ~/agv_ws/src/agv_control/agv_control/cmd_test_node.py</a:t>
+            </a:r>
+          </a:p>
+          <a:p>
+            <a:r>
+              <a:t>[확인] 코드를 저장하고 다음 코드 슬라이드 또는 build 단계로 이동한다.</a:t>
             </a:r>
           </a:p>
           <a:p>
@@ -2905,7 +2903,7 @@
           </a:p>
           <a:p>
             <a:r>
-              <a:t>[오류] 오류가 나면 현재 폴더, source, 파일 경로를 먼저 확인한다.</a:t>
+              <a:t>[오류] 들여쓰기·XML 태그·따옴표가 슬라이드와 정확히 같은지 확인한다.</a:t>
             </a:r>
           </a:p>
         </p:txBody>
@@ -2975,17 +2973,17 @@
           <a:lstStyle/>
           <a:p>
             <a:r>
-              <a:t>[설명] 실제 Ubuntu/ROS 2 환경에서 생성한 검증 화면이다.</a:t>
-            </a:r>
-          </a:p>
-          <a:p>
-            <a:r>
-              <a:t>[실행] 슬라이드의 명령 또는 파일 작성 단계를 진행한다.</a:t>
-            </a:r>
-          </a:p>
-          <a:p>
-            <a:r>
-              <a:t>[확인] 캡처의 명령과 다음 슬라이드의 검증 명령을 비교한다.</a:t>
+              <a:t>[설명] ~/agv_ws/src/agv_control/agv_control/cmd_test_node.py의 전체 파일을 2/3 구간으로 작성한다.</a:t>
+            </a:r>
+          </a:p>
+          <a:p>
+            <a:r>
+              <a:t>[실행] nano ~/agv_ws/src/agv_control/agv_control/cmd_test_node.py</a:t>
+            </a:r>
+          </a:p>
+          <a:p>
+            <a:r>
+              <a:t>[확인] 코드를 저장하고 다음 코드 슬라이드 또는 build 단계로 이동한다.</a:t>
             </a:r>
           </a:p>
           <a:p>
@@ -2995,7 +2993,7 @@
           </a:p>
           <a:p>
             <a:r>
-              <a:t>[오류] 오류가 나면 현재 폴더, source, 파일 경로를 먼저 확인한다.</a:t>
+              <a:t>[오류] 들여쓰기·XML 태그·따옴표가 슬라이드와 정확히 같은지 확인한다.</a:t>
             </a:r>
           </a:p>
         </p:txBody>
@@ -3065,22 +3063,17 @@
           <a:lstStyle/>
           <a:p>
             <a:r>
-              <a:t>[설명] 검증 명령은 GUI 결과와 별도로 실행해 재현 가능한 완료 기준을 만든다.</a:t>
-            </a:r>
-          </a:p>
-          <a:p>
-            <a:r>
-              <a:t>[실행] ros2 topic info /cmd_vel</a:t>
-            </a:r>
-          </a:p>
-          <a:p>
-            <a:r>
-              <a:t>ros2 topic echo /odom --once</a:t>
-            </a:r>
-          </a:p>
-          <a:p>
-            <a:r>
-              <a:t>[확인] /cmd_vel에서 odom과 바퀴 구동 topic으로 이어지는 경로를 확인한다.</a:t>
+              <a:t>[설명] ~/agv_ws/src/agv_control/agv_control/cmd_test_node.py의 전체 파일을 3/3 구간으로 작성한다.</a:t>
+            </a:r>
+          </a:p>
+          <a:p>
+            <a:r>
+              <a:t>[실행] nano ~/agv_ws/src/agv_control/agv_control/cmd_test_node.py</a:t>
+            </a:r>
+          </a:p>
+          <a:p>
+            <a:r>
+              <a:t>[확인] 코드를 저장하고 다음 코드 슬라이드 또는 build 단계로 이동한다.</a:t>
             </a:r>
           </a:p>
           <a:p>
@@ -3090,7 +3083,7 @@
           </a:p>
           <a:p>
             <a:r>
-              <a:t>[오류] 오류가 나면 현재 폴더, source, 파일 경로를 먼저 확인한다.</a:t>
+              <a:t>[오류] 들여쓰기·XML 태그·따옴표가 슬라이드와 정확히 같은지 확인한다.</a:t>
             </a:r>
           </a:p>
         </p:txBody>
@@ -3160,17 +3153,22 @@
           <a:lstStyle/>
           <a:p>
             <a:r>
-              <a:t>[설명] 오류를 대신 해결하지 말고 증상부터 우선 확인 순서대로 교육생이 실행하게 한다.</a:t>
-            </a:r>
-          </a:p>
-          <a:p>
-            <a:r>
-              <a:t>[실행] 슬라이드의 명령 또는 파일 작성 단계를 진행한다.</a:t>
-            </a:r>
-          </a:p>
-          <a:p>
-            <a:r>
-              <a:t>[확인] 수정 뒤 첫 검증 명령을 다시 실행한다.</a:t>
+              <a:t>[설명] build/source/run을 생략 없이 실행한다.</a:t>
+            </a:r>
+          </a:p>
+          <a:p>
+            <a:r>
+              <a:t>[실행] ros2 launch agv_gazebo gazebo.launch.py</a:t>
+            </a:r>
+          </a:p>
+          <a:p>
+            <a:r>
+              <a:t># 새 터미널: ros2 run agv_control cmd_test_node</a:t>
+            </a:r>
+          </a:p>
+          <a:p>
+            <a:r>
+              <a:t>[확인] /cmd_vel에서 odom과 바퀴 구동 topic으로 이어지는 경로를 확인한다.</a:t>
             </a:r>
           </a:p>
           <a:p>
@@ -3180,7 +3178,7 @@
           </a:p>
           <a:p>
             <a:r>
-              <a:t>[오류] 슬라이드의 두 대표 오류를 먼저 사용한다.</a:t>
+              <a:t>[오류] 오류가 나면 현재 폴더, source, 파일 경로를 먼저 확인한다.</a:t>
             </a:r>
           </a:p>
         </p:txBody>
@@ -3250,7 +3248,7 @@
           <a:lstStyle/>
           <a:p>
             <a:r>
-              <a:t>[설명] 교육생이 직접 한 값만 바꿔 원인과 결과를 연결하게 한다.</a:t>
+              <a:t>[설명] 실제 Ubuntu/ROS 2 환경에서 생성한 검증 화면이다.</a:t>
             </a:r>
           </a:p>
           <a:p>
@@ -3260,7 +3258,7 @@
           </a:p>
           <a:p>
             <a:r>
-              <a:t>[확인] 원래 값과 변경 값을 모두 기록한다.</a:t>
+              <a:t>[확인] 캡처의 명령과 다음 슬라이드의 검증 명령을 비교한다.</a:t>
             </a:r>
           </a:p>
           <a:p>
@@ -3340,17 +3338,22 @@
           <a:lstStyle/>
           <a:p>
             <a:r>
-              <a:t>[설명] 교육생이 Complete·캡처·로그를 저장했는지 확인하고 다음 모듈의 시작 상태를 읽는다.</a:t>
-            </a:r>
-          </a:p>
-          <a:p>
-            <a:r>
-              <a:t>[실행] 슬라이드의 명령 또는 파일 작성 단계를 진행한다.</a:t>
-            </a:r>
-          </a:p>
-          <a:p>
-            <a:r>
-              <a:t>[확인] M10 ros_gz_bridge 시작 조건을 말할 수 있다.</a:t>
+              <a:t>[설명] 검증 명령은 GUI 결과와 별도로 실행해 재현 가능한 완료 기준을 만든다.</a:t>
+            </a:r>
+          </a:p>
+          <a:p>
+            <a:r>
+              <a:t>[실행] ros2 topic info /cmd_vel</a:t>
+            </a:r>
+          </a:p>
+          <a:p>
+            <a:r>
+              <a:t>ros2 topic echo /odom --once</a:t>
+            </a:r>
+          </a:p>
+          <a:p>
+            <a:r>
+              <a:t>[확인] /cmd_vel에서 odom과 바퀴 구동 topic으로 이어지는 경로를 확인한다.</a:t>
             </a:r>
           </a:p>
           <a:p>
@@ -3430,7 +3433,7 @@
           <a:lstStyle/>
           <a:p>
             <a:r>
-              <a:t>[설명] 공식 문서는 버전 차이와 확장 학습을 확인할 때 사용한다.</a:t>
+              <a:t>[설명] 오류를 대신 해결하지 말고 증상부터 우선 확인 순서대로 교육생이 실행하게 한다.</a:t>
             </a:r>
           </a:p>
           <a:p>
@@ -3440,7 +3443,7 @@
           </a:p>
           <a:p>
             <a:r>
-              <a:t>[확인] 학습자는 본문만으로 현재 모듈을 완료한 상태여야 한다.</a:t>
+              <a:t>[확인] 수정 뒤 첫 검증 명령을 다시 실행한다.</a:t>
             </a:r>
           </a:p>
           <a:p>
@@ -3450,7 +3453,7 @@
           </a:p>
           <a:p>
             <a:r>
-              <a:t>[오류] 오류가 나면 현재 폴더, source, 파일 경로를 먼저 확인한다.</a:t>
+              <a:t>[오류] 슬라이드의 두 대표 오류를 먼저 사용한다.</a:t>
             </a:r>
           </a:p>
         </p:txBody>
@@ -3565,6 +3568,276 @@
 </p:notes>
 </file>
 
+<file path=ppt/notesSlides/notesSlide40.xml><?xml version="1.0" encoding="utf-8"?>
+<p:notes xmlns:a="http://schemas.openxmlformats.org/drawingml/2006/main" xmlns:p="http://schemas.openxmlformats.org/presentationml/2006/main" xmlns:r="http://schemas.openxmlformats.org/officeDocument/2006/relationships">
+  <p:cSld>
+    <p:spTree>
+      <p:nvGrpSpPr>
+        <p:cNvPr id="1" name=""/>
+        <p:cNvGrpSpPr/>
+        <p:nvPr/>
+      </p:nvGrpSpPr>
+      <p:grpSpPr>
+        <a:xfrm>
+          <a:off x="0" y="0"/>
+          <a:ext cx="0" cy="0"/>
+          <a:chOff x="0" y="0"/>
+          <a:chExt cx="0" cy="0"/>
+        </a:xfrm>
+      </p:grpSpPr>
+      <p:sp>
+        <p:nvSpPr>
+          <p:cNvPr id="2" name="Slide Image Placeholder 1"/>
+          <p:cNvSpPr>
+            <a:spLocks noGrp="1"/>
+          </p:cNvSpPr>
+          <p:nvPr>
+            <p:ph type="sldImg" idx="2"/>
+          </p:nvPr>
+        </p:nvSpPr>
+        <p:spPr/>
+      </p:sp>
+      <p:sp>
+        <p:nvSpPr>
+          <p:cNvPr id="3" name="Notes Placeholder 2"/>
+          <p:cNvSpPr>
+            <a:spLocks noGrp="1"/>
+          </p:cNvSpPr>
+          <p:nvPr>
+            <p:ph type="body" idx="3" sz="quarter"/>
+          </p:nvPr>
+        </p:nvSpPr>
+        <p:spPr/>
+        <p:txBody>
+          <a:bodyPr/>
+          <a:lstStyle/>
+          <a:p>
+            <a:r>
+              <a:t>[설명] 교육생이 직접 한 값만 바꿔 원인과 결과를 연결하게 한다.</a:t>
+            </a:r>
+          </a:p>
+          <a:p>
+            <a:r>
+              <a:t>[실행] 슬라이드의 명령 또는 파일 작성 단계를 진행한다.</a:t>
+            </a:r>
+          </a:p>
+          <a:p>
+            <a:r>
+              <a:t>[확인] 원래 값과 변경 값을 모두 기록한다.</a:t>
+            </a:r>
+          </a:p>
+          <a:p>
+            <a:r>
+              <a:t>[멈춤] 교육생이 현재 체크포인트를 통과할 때까지 기다린다.</a:t>
+            </a:r>
+          </a:p>
+          <a:p>
+            <a:r>
+              <a:t>[오류] 오류가 나면 현재 폴더, source, 파일 경로를 먼저 확인한다.</a:t>
+            </a:r>
+          </a:p>
+        </p:txBody>
+      </p:sp>
+      <p:sp>
+        <p:nvSpPr>
+          <p:cNvPr id="4" name="Slide Number Placeholder 3"/>
+          <p:cNvSpPr>
+            <a:spLocks noGrp="1"/>
+          </p:cNvSpPr>
+          <p:nvPr>
+            <p:ph type="sldNum" idx="5" sz="quarter"/>
+          </p:nvPr>
+        </p:nvSpPr>
+        <p:spPr/>
+      </p:sp>
+    </p:spTree>
+  </p:cSld>
+  <p:clrMapOvr>
+    <a:masterClrMapping/>
+  </p:clrMapOvr>
+</p:notes>
+</file>
+
+<file path=ppt/notesSlides/notesSlide41.xml><?xml version="1.0" encoding="utf-8"?>
+<p:notes xmlns:a="http://schemas.openxmlformats.org/drawingml/2006/main" xmlns:p="http://schemas.openxmlformats.org/presentationml/2006/main" xmlns:r="http://schemas.openxmlformats.org/officeDocument/2006/relationships">
+  <p:cSld>
+    <p:spTree>
+      <p:nvGrpSpPr>
+        <p:cNvPr id="1" name=""/>
+        <p:cNvGrpSpPr/>
+        <p:nvPr/>
+      </p:nvGrpSpPr>
+      <p:grpSpPr>
+        <a:xfrm>
+          <a:off x="0" y="0"/>
+          <a:ext cx="0" cy="0"/>
+          <a:chOff x="0" y="0"/>
+          <a:chExt cx="0" cy="0"/>
+        </a:xfrm>
+      </p:grpSpPr>
+      <p:sp>
+        <p:nvSpPr>
+          <p:cNvPr id="2" name="Slide Image Placeholder 1"/>
+          <p:cNvSpPr>
+            <a:spLocks noGrp="1"/>
+          </p:cNvSpPr>
+          <p:nvPr>
+            <p:ph type="sldImg" idx="2"/>
+          </p:nvPr>
+        </p:nvSpPr>
+        <p:spPr/>
+      </p:sp>
+      <p:sp>
+        <p:nvSpPr>
+          <p:cNvPr id="3" name="Notes Placeholder 2"/>
+          <p:cNvSpPr>
+            <a:spLocks noGrp="1"/>
+          </p:cNvSpPr>
+          <p:nvPr>
+            <p:ph type="body" idx="3" sz="quarter"/>
+          </p:nvPr>
+        </p:nvSpPr>
+        <p:spPr/>
+        <p:txBody>
+          <a:bodyPr/>
+          <a:lstStyle/>
+          <a:p>
+            <a:r>
+              <a:t>[설명] 교육생이 Complete·캡처·로그를 저장했는지 확인하고 다음 모듈의 시작 상태를 읽는다.</a:t>
+            </a:r>
+          </a:p>
+          <a:p>
+            <a:r>
+              <a:t>[실행] 슬라이드의 명령 또는 파일 작성 단계를 진행한다.</a:t>
+            </a:r>
+          </a:p>
+          <a:p>
+            <a:r>
+              <a:t>[확인] M10 ros_gz_bridge 시작 조건을 말할 수 있다.</a:t>
+            </a:r>
+          </a:p>
+          <a:p>
+            <a:r>
+              <a:t>[멈춤] 교육생이 현재 체크포인트를 통과할 때까지 기다린다.</a:t>
+            </a:r>
+          </a:p>
+          <a:p>
+            <a:r>
+              <a:t>[오류] 오류가 나면 현재 폴더, source, 파일 경로를 먼저 확인한다.</a:t>
+            </a:r>
+          </a:p>
+        </p:txBody>
+      </p:sp>
+      <p:sp>
+        <p:nvSpPr>
+          <p:cNvPr id="4" name="Slide Number Placeholder 3"/>
+          <p:cNvSpPr>
+            <a:spLocks noGrp="1"/>
+          </p:cNvSpPr>
+          <p:nvPr>
+            <p:ph type="sldNum" idx="5" sz="quarter"/>
+          </p:nvPr>
+        </p:nvSpPr>
+        <p:spPr/>
+      </p:sp>
+    </p:spTree>
+  </p:cSld>
+  <p:clrMapOvr>
+    <a:masterClrMapping/>
+  </p:clrMapOvr>
+</p:notes>
+</file>
+
+<file path=ppt/notesSlides/notesSlide42.xml><?xml version="1.0" encoding="utf-8"?>
+<p:notes xmlns:a="http://schemas.openxmlformats.org/drawingml/2006/main" xmlns:p="http://schemas.openxmlformats.org/presentationml/2006/main" xmlns:r="http://schemas.openxmlformats.org/officeDocument/2006/relationships">
+  <p:cSld>
+    <p:spTree>
+      <p:nvGrpSpPr>
+        <p:cNvPr id="1" name=""/>
+        <p:cNvGrpSpPr/>
+        <p:nvPr/>
+      </p:nvGrpSpPr>
+      <p:grpSpPr>
+        <a:xfrm>
+          <a:off x="0" y="0"/>
+          <a:ext cx="0" cy="0"/>
+          <a:chOff x="0" y="0"/>
+          <a:chExt cx="0" cy="0"/>
+        </a:xfrm>
+      </p:grpSpPr>
+      <p:sp>
+        <p:nvSpPr>
+          <p:cNvPr id="2" name="Slide Image Placeholder 1"/>
+          <p:cNvSpPr>
+            <a:spLocks noGrp="1"/>
+          </p:cNvSpPr>
+          <p:nvPr>
+            <p:ph type="sldImg" idx="2"/>
+          </p:nvPr>
+        </p:nvSpPr>
+        <p:spPr/>
+      </p:sp>
+      <p:sp>
+        <p:nvSpPr>
+          <p:cNvPr id="3" name="Notes Placeholder 2"/>
+          <p:cNvSpPr>
+            <a:spLocks noGrp="1"/>
+          </p:cNvSpPr>
+          <p:nvPr>
+            <p:ph type="body" idx="3" sz="quarter"/>
+          </p:nvPr>
+        </p:nvSpPr>
+        <p:spPr/>
+        <p:txBody>
+          <a:bodyPr/>
+          <a:lstStyle/>
+          <a:p>
+            <a:r>
+              <a:t>[설명] 공식 문서는 버전 차이와 확장 학습을 확인할 때 사용한다.</a:t>
+            </a:r>
+          </a:p>
+          <a:p>
+            <a:r>
+              <a:t>[실행] 슬라이드의 명령 또는 파일 작성 단계를 진행한다.</a:t>
+            </a:r>
+          </a:p>
+          <a:p>
+            <a:r>
+              <a:t>[확인] 학습자는 본문만으로 현재 모듈을 완료한 상태여야 한다.</a:t>
+            </a:r>
+          </a:p>
+          <a:p>
+            <a:r>
+              <a:t>[멈춤] 교육생이 현재 체크포인트를 통과할 때까지 기다린다.</a:t>
+            </a:r>
+          </a:p>
+          <a:p>
+            <a:r>
+              <a:t>[오류] 오류가 나면 현재 폴더, source, 파일 경로를 먼저 확인한다.</a:t>
+            </a:r>
+          </a:p>
+        </p:txBody>
+      </p:sp>
+      <p:sp>
+        <p:nvSpPr>
+          <p:cNvPr id="4" name="Slide Number Placeholder 3"/>
+          <p:cNvSpPr>
+            <a:spLocks noGrp="1"/>
+          </p:cNvSpPr>
+          <p:nvPr>
+            <p:ph type="sldNum" idx="5" sz="quarter"/>
+          </p:nvPr>
+        </p:nvSpPr>
+        <p:spPr/>
+      </p:sp>
+    </p:spTree>
+  </p:cSld>
+  <p:clrMapOvr>
+    <a:masterClrMapping/>
+  </p:clrMapOvr>
+</p:notes>
+</file>
+
 <file path=ppt/notesSlides/notesSlide5.xml><?xml version="1.0" encoding="utf-8"?>
 <p:notes xmlns:a="http://schemas.openxmlformats.org/drawingml/2006/main" xmlns:p="http://schemas.openxmlformats.org/presentationml/2006/main" xmlns:r="http://schemas.openxmlformats.org/officeDocument/2006/relationships">
   <p:cSld>
@@ -3985,7 +4258,7 @@
           <a:lstStyle/>
           <a:p>
             <a:r>
-              <a:t>[설명] ~/agv_ws/src/agv_gazebo/models/agv/model.sdf의 전체 파일을 1/21 구간으로 작성한다.</a:t>
+              <a:t>[설명] ~/agv_ws/src/agv_gazebo/models/agv/model.sdf의 전체 파일을 1/24 구간으로 작성한다.</a:t>
             </a:r>
           </a:p>
           <a:p>
@@ -7378,7 +7651,7 @@
               </a:defRPr>
             </a:pPr>
             <a:r>
-              <a:t>파일을 계속 작성하고 저장한다 (2/21)</a:t>
+              <a:t>파일을 계속 작성하고 저장한다 (2/24)</a:t>
             </a:r>
           </a:p>
         </p:txBody>
@@ -7553,7 +7826,7 @@
               </a:defRPr>
             </a:pPr>
             <a:r>
-              <a:t>현재 단계 4/24    |    현재 폴더 ~/agv_ws    |    현재 터미널</a:t>
+              <a:t>현재 단계 4/27    |    현재 폴더 ~/agv_ws    |    현재 터미널</a:t>
             </a:r>
           </a:p>
         </p:txBody>
@@ -7566,8 +7839,8 @@
         </p:nvSpPr>
         <p:spPr>
           <a:xfrm>
-            <a:off x="658368" y="1682496"/>
-            <a:ext cx="10972800" cy="347472"/>
+            <a:off x="658368" y="1627632"/>
+            <a:ext cx="10972800" cy="256032"/>
           </a:xfrm>
           <a:prstGeom prst="rect">
             <a:avLst/>
@@ -7584,7 +7857,7 @@
               <a:spcAft>
                 <a:spcPts val="0"/>
               </a:spcAft>
-              <a:defRPr sz="1700" b="1">
+              <a:defRPr sz="1500" b="1">
                 <a:solidFill>
                   <a:srgbClr val="122C4E"/>
                 </a:solidFill>
@@ -7605,8 +7878,8 @@
         </p:nvSpPr>
         <p:spPr>
           <a:xfrm>
-            <a:off x="658368" y="2103120"/>
-            <a:ext cx="10972800" cy="493776"/>
+            <a:off x="658368" y="1956816"/>
+            <a:ext cx="10972800" cy="603504"/>
           </a:xfrm>
           <a:prstGeom prst="rect">
             <a:avLst/>
@@ -7650,7 +7923,11 @@
               </a:defRPr>
             </a:pPr>
             <a:r>
-              <a:t>파일 생성/열기: mkdir -p ~/agv_ws/src/agv_gazebo/models/agv    &amp;&amp;    nano ~/agv_ws/src/agv_gazebo/models/agv/model.sdf</a:t>
+              <a:t>파일 생성: mkdir -p ~/agv_ws/src/agv_gazebo/models/agv</a:t>
+            </a:r>
+            <a:br/>
+            <a:r>
+              <a:t>파일 열기: nano ~/agv_ws/src/agv_gazebo/models/agv/model.sdf</a:t>
             </a:r>
           </a:p>
         </p:txBody>
@@ -7663,8 +7940,8 @@
         </p:nvSpPr>
         <p:spPr>
           <a:xfrm>
-            <a:off x="658368" y="2761488"/>
-            <a:ext cx="10972800" cy="3383280"/>
+            <a:off x="658368" y="2706624"/>
+            <a:ext cx="10972800" cy="3364992"/>
           </a:xfrm>
           <a:prstGeom prst="rect">
             <a:avLst/>
@@ -7708,6 +7985,14 @@
               </a:defRPr>
             </a:pPr>
             <a:r>
+              <a:t>      </a:t>
+            </a:r>
+            <a:br/>
+            <a:r>
+              <a:t>      &lt;inertial&gt;</a:t>
+            </a:r>
+            <a:br/>
+            <a:r>
               <a:t>        &lt;mass&gt;12.0&lt;/mass&gt;</a:t>
             </a:r>
             <a:br/>
@@ -7745,22 +8030,6 @@
             <a:br/>
             <a:r>
               <a:t>      &lt;visual name="body"&gt;</a:t>
-            </a:r>
-            <a:br/>
-            <a:r>
-              <a:t>        &lt;geometry&gt;</a:t>
-            </a:r>
-            <a:br/>
-            <a:r>
-              <a:t>          &lt;box&gt;</a:t>
-            </a:r>
-            <a:br/>
-            <a:r>
-              <a:t>            &lt;size&gt;0.60 0.42 0.16&lt;/size&gt;</a:t>
-            </a:r>
-            <a:br/>
-            <a:r>
-              <a:t>          &lt;/box&gt;</a:t>
             </a:r>
           </a:p>
         </p:txBody>
@@ -7773,7 +8042,7 @@
         </p:nvSpPr>
         <p:spPr>
           <a:xfrm>
-            <a:off x="749808" y="6199632"/>
+            <a:off x="749808" y="6181344"/>
             <a:ext cx="10789920" cy="201168"/>
           </a:xfrm>
           <a:prstGeom prst="rect">
@@ -7799,7 +8068,7 @@
               </a:defRPr>
             </a:pPr>
             <a:r>
-              <a:t>파일 전체 2/21 · 이 슬라이드 다음에 같은 파일의 나머지 줄이 이어집니다.</a:t>
+              <a:t>파일 전체 2/24 · 이 슬라이드 다음에 같은 파일의 나머지 줄이 이어집니다.</a:t>
             </a:r>
           </a:p>
         </p:txBody>
@@ -7856,7 +8125,7 @@
               </a:defRPr>
             </a:pPr>
             <a:r>
-              <a:t>파일을 계속 작성하고 저장한다 (3/21)</a:t>
+              <a:t>파일을 계속 작성하고 저장한다 (3/24)</a:t>
             </a:r>
           </a:p>
         </p:txBody>
@@ -8031,7 +8300,7 @@
               </a:defRPr>
             </a:pPr>
             <a:r>
-              <a:t>현재 단계 5/24    |    현재 폴더 ~/agv_ws    |    현재 터미널</a:t>
+              <a:t>현재 단계 5/27    |    현재 폴더 ~/agv_ws    |    현재 터미널</a:t>
             </a:r>
           </a:p>
         </p:txBody>
@@ -8044,8 +8313,8 @@
         </p:nvSpPr>
         <p:spPr>
           <a:xfrm>
-            <a:off x="658368" y="1682496"/>
-            <a:ext cx="10972800" cy="347472"/>
+            <a:off x="658368" y="1627632"/>
+            <a:ext cx="10972800" cy="256032"/>
           </a:xfrm>
           <a:prstGeom prst="rect">
             <a:avLst/>
@@ -8062,7 +8331,7 @@
               <a:spcAft>
                 <a:spcPts val="0"/>
               </a:spcAft>
-              <a:defRPr sz="1700" b="1">
+              <a:defRPr sz="1500" b="1">
                 <a:solidFill>
                   <a:srgbClr val="122C4E"/>
                 </a:solidFill>
@@ -8083,8 +8352,8 @@
         </p:nvSpPr>
         <p:spPr>
           <a:xfrm>
-            <a:off x="658368" y="2103120"/>
-            <a:ext cx="10972800" cy="493776"/>
+            <a:off x="658368" y="1956816"/>
+            <a:ext cx="10972800" cy="603504"/>
           </a:xfrm>
           <a:prstGeom prst="rect">
             <a:avLst/>
@@ -8128,7 +8397,11 @@
               </a:defRPr>
             </a:pPr>
             <a:r>
-              <a:t>파일 생성/열기: mkdir -p ~/agv_ws/src/agv_gazebo/models/agv    &amp;&amp;    nano ~/agv_ws/src/agv_gazebo/models/agv/model.sdf</a:t>
+              <a:t>파일 생성: mkdir -p ~/agv_ws/src/agv_gazebo/models/agv</a:t>
+            </a:r>
+            <a:br/>
+            <a:r>
+              <a:t>파일 열기: nano ~/agv_ws/src/agv_gazebo/models/agv/model.sdf</a:t>
             </a:r>
           </a:p>
         </p:txBody>
@@ -8141,8 +8414,8 @@
         </p:nvSpPr>
         <p:spPr>
           <a:xfrm>
-            <a:off x="658368" y="2761488"/>
-            <a:ext cx="10972800" cy="3383280"/>
+            <a:off x="658368" y="2706624"/>
+            <a:ext cx="10972800" cy="3364992"/>
           </a:xfrm>
           <a:prstGeom prst="rect">
             <a:avLst/>
@@ -8186,6 +8459,22 @@
               </a:defRPr>
             </a:pPr>
             <a:r>
+              <a:t>        &lt;geometry&gt;</a:t>
+            </a:r>
+            <a:br/>
+            <a:r>
+              <a:t>          &lt;box&gt;</a:t>
+            </a:r>
+            <a:br/>
+            <a:r>
+              <a:t>            &lt;size&gt;0.60 0.42 0.16&lt;/size&gt;</a:t>
+            </a:r>
+            <a:br/>
+            <a:r>
+              <a:t>          &lt;/box&gt;</a:t>
+            </a:r>
+            <a:br/>
+            <a:r>
               <a:t>        &lt;/geometry&gt;</a:t>
             </a:r>
             <a:br/>
@@ -8215,30 +8504,6 @@
             <a:br/>
             <a:r>
               <a:t>      &lt;collision name="body_collision"&gt;</a:t>
-            </a:r>
-            <a:br/>
-            <a:r>
-              <a:t>        &lt;geometry&gt;</a:t>
-            </a:r>
-            <a:br/>
-            <a:r>
-              <a:t>          &lt;box&gt;</a:t>
-            </a:r>
-            <a:br/>
-            <a:r>
-              <a:t>            &lt;size&gt;0.60 0.42 0.16&lt;/size&gt;</a:t>
-            </a:r>
-            <a:br/>
-            <a:r>
-              <a:t>          &lt;/box&gt;</a:t>
-            </a:r>
-            <a:br/>
-            <a:r>
-              <a:t>        &lt;/geometry&gt;</a:t>
-            </a:r>
-            <a:br/>
-            <a:r>
-              <a:t>      &lt;/collision&gt;</a:t>
             </a:r>
           </a:p>
         </p:txBody>
@@ -8251,7 +8516,7 @@
         </p:nvSpPr>
         <p:spPr>
           <a:xfrm>
-            <a:off x="749808" y="6199632"/>
+            <a:off x="749808" y="6181344"/>
             <a:ext cx="10789920" cy="201168"/>
           </a:xfrm>
           <a:prstGeom prst="rect">
@@ -8277,7 +8542,7 @@
               </a:defRPr>
             </a:pPr>
             <a:r>
-              <a:t>파일 전체 3/21 · 이 슬라이드 다음에 같은 파일의 나머지 줄이 이어집니다.</a:t>
+              <a:t>파일 전체 3/24 · 이 슬라이드 다음에 같은 파일의 나머지 줄이 이어집니다.</a:t>
             </a:r>
           </a:p>
         </p:txBody>
@@ -8334,7 +8599,7 @@
               </a:defRPr>
             </a:pPr>
             <a:r>
-              <a:t>파일을 계속 작성하고 저장한다 (4/21)</a:t>
+              <a:t>파일을 계속 작성하고 저장한다 (4/24)</a:t>
             </a:r>
           </a:p>
         </p:txBody>
@@ -8509,7 +8774,7 @@
               </a:defRPr>
             </a:pPr>
             <a:r>
-              <a:t>현재 단계 6/24    |    현재 폴더 ~/agv_ws    |    현재 터미널</a:t>
+              <a:t>현재 단계 6/27    |    현재 폴더 ~/agv_ws    |    현재 터미널</a:t>
             </a:r>
           </a:p>
         </p:txBody>
@@ -8522,8 +8787,8 @@
         </p:nvSpPr>
         <p:spPr>
           <a:xfrm>
-            <a:off x="658368" y="1682496"/>
-            <a:ext cx="10972800" cy="347472"/>
+            <a:off x="658368" y="1627632"/>
+            <a:ext cx="10972800" cy="256032"/>
           </a:xfrm>
           <a:prstGeom prst="rect">
             <a:avLst/>
@@ -8540,7 +8805,7 @@
               <a:spcAft>
                 <a:spcPts val="0"/>
               </a:spcAft>
-              <a:defRPr sz="1700" b="1">
+              <a:defRPr sz="1500" b="1">
                 <a:solidFill>
                   <a:srgbClr val="122C4E"/>
                 </a:solidFill>
@@ -8561,8 +8826,8 @@
         </p:nvSpPr>
         <p:spPr>
           <a:xfrm>
-            <a:off x="658368" y="2103120"/>
-            <a:ext cx="10972800" cy="493776"/>
+            <a:off x="658368" y="1956816"/>
+            <a:ext cx="10972800" cy="603504"/>
           </a:xfrm>
           <a:prstGeom prst="rect">
             <a:avLst/>
@@ -8606,7 +8871,11 @@
               </a:defRPr>
             </a:pPr>
             <a:r>
-              <a:t>파일 생성/열기: mkdir -p ~/agv_ws/src/agv_gazebo/models/agv    &amp;&amp;    nano ~/agv_ws/src/agv_gazebo/models/agv/model.sdf</a:t>
+              <a:t>파일 생성: mkdir -p ~/agv_ws/src/agv_gazebo/models/agv</a:t>
+            </a:r>
+            <a:br/>
+            <a:r>
+              <a:t>파일 열기: nano ~/agv_ws/src/agv_gazebo/models/agv/model.sdf</a:t>
             </a:r>
           </a:p>
         </p:txBody>
@@ -8619,8 +8888,8 @@
         </p:nvSpPr>
         <p:spPr>
           <a:xfrm>
-            <a:off x="658368" y="2761488"/>
-            <a:ext cx="10972800" cy="3383280"/>
+            <a:off x="658368" y="2706624"/>
+            <a:ext cx="10972800" cy="3364992"/>
           </a:xfrm>
           <a:prstGeom prst="rect">
             <a:avLst/>
@@ -8664,6 +8933,30 @@
               </a:defRPr>
             </a:pPr>
             <a:r>
+              <a:t>        &lt;geometry&gt;</a:t>
+            </a:r>
+            <a:br/>
+            <a:r>
+              <a:t>          &lt;box&gt;</a:t>
+            </a:r>
+            <a:br/>
+            <a:r>
+              <a:t>            &lt;size&gt;0.60 0.42 0.16&lt;/size&gt;</a:t>
+            </a:r>
+            <a:br/>
+            <a:r>
+              <a:t>          &lt;/box&gt;</a:t>
+            </a:r>
+            <a:br/>
+            <a:r>
+              <a:t>        &lt;/geometry&gt;</a:t>
+            </a:r>
+            <a:br/>
+            <a:r>
+              <a:t>      &lt;/collision&gt;</a:t>
+            </a:r>
+            <a:br/>
+            <a:r>
               <a:t>      </a:t>
             </a:r>
             <a:br/>
@@ -8685,38 +8978,6 @@
             <a:br/>
             <a:r>
               <a:t>        &lt;update_rate&gt;100&lt;/update_rate&gt;</a:t>
-            </a:r>
-            <a:br/>
-            <a:r>
-              <a:t>        &lt;imu&gt;</a:t>
-            </a:r>
-            <a:br/>
-            <a:r>
-              <a:t>          &lt;angular_velocity&gt;</a:t>
-            </a:r>
-            <a:br/>
-            <a:r>
-              <a:t>            &lt;x&gt;</a:t>
-            </a:r>
-            <a:br/>
-            <a:r>
-              <a:t>              &lt;noise type="gaussian"&gt;</a:t>
-            </a:r>
-            <a:br/>
-            <a:r>
-              <a:t>                &lt;mean&gt;0&lt;/mean&gt;</a:t>
-            </a:r>
-            <a:br/>
-            <a:r>
-              <a:t>                &lt;stddev&gt;0.001&lt;/stddev&gt;</a:t>
-            </a:r>
-            <a:br/>
-            <a:r>
-              <a:t>              &lt;/noise&gt;</a:t>
-            </a:r>
-            <a:br/>
-            <a:r>
-              <a:t>            &lt;/x&gt;</a:t>
             </a:r>
           </a:p>
         </p:txBody>
@@ -8729,7 +8990,7 @@
         </p:nvSpPr>
         <p:spPr>
           <a:xfrm>
-            <a:off x="749808" y="6199632"/>
+            <a:off x="749808" y="6181344"/>
             <a:ext cx="10789920" cy="201168"/>
           </a:xfrm>
           <a:prstGeom prst="rect">
@@ -8755,7 +9016,7 @@
               </a:defRPr>
             </a:pPr>
             <a:r>
-              <a:t>파일 전체 4/21 · 이 슬라이드 다음에 같은 파일의 나머지 줄이 이어집니다.</a:t>
+              <a:t>파일 전체 4/24 · 이 슬라이드 다음에 같은 파일의 나머지 줄이 이어집니다.</a:t>
             </a:r>
           </a:p>
         </p:txBody>
@@ -8812,7 +9073,7 @@
               </a:defRPr>
             </a:pPr>
             <a:r>
-              <a:t>파일을 계속 작성하고 저장한다 (5/21)</a:t>
+              <a:t>파일을 계속 작성하고 저장한다 (5/24)</a:t>
             </a:r>
           </a:p>
         </p:txBody>
@@ -8987,7 +9248,7 @@
               </a:defRPr>
             </a:pPr>
             <a:r>
-              <a:t>현재 단계 7/24    |    현재 폴더 ~/agv_ws    |    현재 터미널</a:t>
+              <a:t>현재 단계 7/27    |    현재 폴더 ~/agv_ws    |    현재 터미널</a:t>
             </a:r>
           </a:p>
         </p:txBody>
@@ -9000,8 +9261,8 @@
         </p:nvSpPr>
         <p:spPr>
           <a:xfrm>
-            <a:off x="658368" y="1682496"/>
-            <a:ext cx="10972800" cy="347472"/>
+            <a:off x="658368" y="1627632"/>
+            <a:ext cx="10972800" cy="256032"/>
           </a:xfrm>
           <a:prstGeom prst="rect">
             <a:avLst/>
@@ -9018,7 +9279,7 @@
               <a:spcAft>
                 <a:spcPts val="0"/>
               </a:spcAft>
-              <a:defRPr sz="1700" b="1">
+              <a:defRPr sz="1500" b="1">
                 <a:solidFill>
                   <a:srgbClr val="122C4E"/>
                 </a:solidFill>
@@ -9039,8 +9300,8 @@
         </p:nvSpPr>
         <p:spPr>
           <a:xfrm>
-            <a:off x="658368" y="2103120"/>
-            <a:ext cx="10972800" cy="493776"/>
+            <a:off x="658368" y="1956816"/>
+            <a:ext cx="10972800" cy="603504"/>
           </a:xfrm>
           <a:prstGeom prst="rect">
             <a:avLst/>
@@ -9084,7 +9345,11 @@
               </a:defRPr>
             </a:pPr>
             <a:r>
-              <a:t>파일 생성/열기: mkdir -p ~/agv_ws/src/agv_gazebo/models/agv    &amp;&amp;    nano ~/agv_ws/src/agv_gazebo/models/agv/model.sdf</a:t>
+              <a:t>파일 생성: mkdir -p ~/agv_ws/src/agv_gazebo/models/agv</a:t>
+            </a:r>
+            <a:br/>
+            <a:r>
+              <a:t>파일 열기: nano ~/agv_ws/src/agv_gazebo/models/agv/model.sdf</a:t>
             </a:r>
           </a:p>
         </p:txBody>
@@ -9097,8 +9362,8 @@
         </p:nvSpPr>
         <p:spPr>
           <a:xfrm>
-            <a:off x="658368" y="2761488"/>
-            <a:ext cx="10972800" cy="3383280"/>
+            <a:off x="658368" y="2706624"/>
+            <a:ext cx="10972800" cy="3364992"/>
           </a:xfrm>
           <a:prstGeom prst="rect">
             <a:avLst/>
@@ -9142,6 +9407,38 @@
               </a:defRPr>
             </a:pPr>
             <a:r>
+              <a:t>        &lt;imu&gt;</a:t>
+            </a:r>
+            <a:br/>
+            <a:r>
+              <a:t>          &lt;angular_velocity&gt;</a:t>
+            </a:r>
+            <a:br/>
+            <a:r>
+              <a:t>            &lt;x&gt;</a:t>
+            </a:r>
+            <a:br/>
+            <a:r>
+              <a:t>              &lt;noise type="gaussian"&gt;</a:t>
+            </a:r>
+            <a:br/>
+            <a:r>
+              <a:t>                &lt;mean&gt;0&lt;/mean&gt;</a:t>
+            </a:r>
+            <a:br/>
+            <a:r>
+              <a:t>                &lt;stddev&gt;0.001&lt;/stddev&gt;</a:t>
+            </a:r>
+            <a:br/>
+            <a:r>
+              <a:t>              &lt;/noise&gt;</a:t>
+            </a:r>
+            <a:br/>
+            <a:r>
+              <a:t>            &lt;/x&gt;</a:t>
+            </a:r>
+            <a:br/>
+            <a:r>
               <a:t>          &lt;/angular_velocity&gt;</a:t>
             </a:r>
             <a:br/>
@@ -9155,46 +9452,6 @@
             <a:br/>
             <a:r>
               <a:t>      </a:t>
-            </a:r>
-            <a:br/>
-            <a:r>
-              <a:t>    </a:t>
-            </a:r>
-            <a:br/>
-            <a:r>
-              <a:t>    &lt;/link&gt;</a:t>
-            </a:r>
-            <a:br/>
-            <a:r>
-              <a:t>    </a:t>
-            </a:r>
-            <a:br/>
-            <a:r>
-              <a:t>    </a:t>
-            </a:r>
-            <a:br/>
-            <a:r>
-              <a:t>    &lt;link name="left_wheel_link"&gt;</a:t>
-            </a:r>
-            <a:br/>
-            <a:r>
-              <a:t>      &lt;pose relative_to="base_link"&gt;0 0.19 -0.08 1.5708 0 0&lt;/pose&gt;</a:t>
-            </a:r>
-            <a:br/>
-            <a:r>
-              <a:t>      &lt;inertial&gt;</a:t>
-            </a:r>
-            <a:br/>
-            <a:r>
-              <a:t>        &lt;mass&gt;0.6&lt;/mass&gt;</a:t>
-            </a:r>
-            <a:br/>
-            <a:r>
-              <a:t>        &lt;inertia&gt;</a:t>
-            </a:r>
-            <a:br/>
-            <a:r>
-              <a:t>          &lt;ixx&gt;0.002&lt;/ixx&gt;</a:t>
             </a:r>
           </a:p>
         </p:txBody>
@@ -9207,7 +9464,7 @@
         </p:nvSpPr>
         <p:spPr>
           <a:xfrm>
-            <a:off x="749808" y="6199632"/>
+            <a:off x="749808" y="6181344"/>
             <a:ext cx="10789920" cy="201168"/>
           </a:xfrm>
           <a:prstGeom prst="rect">
@@ -9233,7 +9490,7 @@
               </a:defRPr>
             </a:pPr>
             <a:r>
-              <a:t>파일 전체 5/21 · 이 슬라이드 다음에 같은 파일의 나머지 줄이 이어집니다.</a:t>
+              <a:t>파일 전체 5/24 · 이 슬라이드 다음에 같은 파일의 나머지 줄이 이어집니다.</a:t>
             </a:r>
           </a:p>
         </p:txBody>
@@ -9290,7 +9547,7 @@
               </a:defRPr>
             </a:pPr>
             <a:r>
-              <a:t>파일을 계속 작성하고 저장한다 (6/21)</a:t>
+              <a:t>파일을 계속 작성하고 저장한다 (6/24)</a:t>
             </a:r>
           </a:p>
         </p:txBody>
@@ -9465,7 +9722,7 @@
               </a:defRPr>
             </a:pPr>
             <a:r>
-              <a:t>현재 단계 8/24    |    현재 폴더 ~/agv_ws    |    현재 터미널</a:t>
+              <a:t>현재 단계 8/27    |    현재 폴더 ~/agv_ws    |    현재 터미널</a:t>
             </a:r>
           </a:p>
         </p:txBody>
@@ -9478,8 +9735,8 @@
         </p:nvSpPr>
         <p:spPr>
           <a:xfrm>
-            <a:off x="658368" y="1682496"/>
-            <a:ext cx="10972800" cy="347472"/>
+            <a:off x="658368" y="1627632"/>
+            <a:ext cx="10972800" cy="256032"/>
           </a:xfrm>
           <a:prstGeom prst="rect">
             <a:avLst/>
@@ -9496,7 +9753,7 @@
               <a:spcAft>
                 <a:spcPts val="0"/>
               </a:spcAft>
-              <a:defRPr sz="1700" b="1">
+              <a:defRPr sz="1500" b="1">
                 <a:solidFill>
                   <a:srgbClr val="122C4E"/>
                 </a:solidFill>
@@ -9517,8 +9774,8 @@
         </p:nvSpPr>
         <p:spPr>
           <a:xfrm>
-            <a:off x="658368" y="2103120"/>
-            <a:ext cx="10972800" cy="493776"/>
+            <a:off x="658368" y="1956816"/>
+            <a:ext cx="10972800" cy="603504"/>
           </a:xfrm>
           <a:prstGeom prst="rect">
             <a:avLst/>
@@ -9562,7 +9819,11 @@
               </a:defRPr>
             </a:pPr>
             <a:r>
-              <a:t>파일 생성/열기: mkdir -p ~/agv_ws/src/agv_gazebo/models/agv    &amp;&amp;    nano ~/agv_ws/src/agv_gazebo/models/agv/model.sdf</a:t>
+              <a:t>파일 생성: mkdir -p ~/agv_ws/src/agv_gazebo/models/agv</a:t>
+            </a:r>
+            <a:br/>
+            <a:r>
+              <a:t>파일 열기: nano ~/agv_ws/src/agv_gazebo/models/agv/model.sdf</a:t>
             </a:r>
           </a:p>
         </p:txBody>
@@ -9575,8 +9836,8 @@
         </p:nvSpPr>
         <p:spPr>
           <a:xfrm>
-            <a:off x="658368" y="2761488"/>
-            <a:ext cx="10972800" cy="3383280"/>
+            <a:off x="658368" y="2706624"/>
+            <a:ext cx="10972800" cy="3364992"/>
           </a:xfrm>
           <a:prstGeom prst="rect">
             <a:avLst/>
@@ -9620,59 +9881,51 @@
               </a:defRPr>
             </a:pPr>
             <a:r>
+              <a:t>    </a:t>
+            </a:r>
+            <a:br/>
+            <a:r>
+              <a:t>    &lt;/link&gt;</a:t>
+            </a:r>
+            <a:br/>
+            <a:r>
+              <a:t>    </a:t>
+            </a:r>
+            <a:br/>
+            <a:r>
+              <a:t>    </a:t>
+            </a:r>
+            <a:br/>
+            <a:r>
+              <a:t>    &lt;link name="left_wheel_link"&gt;</a:t>
+            </a:r>
+            <a:br/>
+            <a:r>
+              <a:t>      &lt;pose relative_to="base_link"&gt;0 0.19 -0.08 1.5708 0 0&lt;/pose&gt;</a:t>
+            </a:r>
+            <a:br/>
+            <a:r>
+              <a:t>      &lt;inertial&gt;</a:t>
+            </a:r>
+            <a:br/>
+            <a:r>
+              <a:t>        &lt;mass&gt;0.6&lt;/mass&gt;</a:t>
+            </a:r>
+            <a:br/>
+            <a:r>
+              <a:t>        &lt;inertia&gt;</a:t>
+            </a:r>
+            <a:br/>
+            <a:r>
+              <a:t>          &lt;ixx&gt;0.002&lt;/ixx&gt;</a:t>
+            </a:r>
+            <a:br/>
+            <a:r>
               <a:t>          &lt;iyy&gt;0.002&lt;/iyy&gt;</a:t>
             </a:r>
             <a:br/>
             <a:r>
               <a:t>          &lt;izz&gt;0.001&lt;/izz&gt;</a:t>
-            </a:r>
-            <a:br/>
-            <a:r>
-              <a:t>        &lt;/inertia&gt;</a:t>
-            </a:r>
-            <a:br/>
-            <a:r>
-              <a:t>      &lt;/inertial&gt;</a:t>
-            </a:r>
-            <a:br/>
-            <a:r>
-              <a:t>      &lt;visual name="wheel"&gt;</a:t>
-            </a:r>
-            <a:br/>
-            <a:r>
-              <a:t>        &lt;geometry&gt;</a:t>
-            </a:r>
-            <a:br/>
-            <a:r>
-              <a:t>          &lt;cylinder&gt;</a:t>
-            </a:r>
-            <a:br/>
-            <a:r>
-              <a:t>            &lt;radius&gt;0.08&lt;/radius&gt;</a:t>
-            </a:r>
-            <a:br/>
-            <a:r>
-              <a:t>            &lt;length&gt;0.05&lt;/length&gt;</a:t>
-            </a:r>
-            <a:br/>
-            <a:r>
-              <a:t>          &lt;/cylinder&gt;</a:t>
-            </a:r>
-            <a:br/>
-            <a:r>
-              <a:t>        &lt;/geometry&gt;</a:t>
-            </a:r>
-            <a:br/>
-            <a:r>
-              <a:t>      &lt;/visual&gt;</a:t>
-            </a:r>
-            <a:br/>
-            <a:r>
-              <a:t>      &lt;collision name="wheel_collision"&gt;</a:t>
-            </a:r>
-            <a:br/>
-            <a:r>
-              <a:t>        &lt;geometry&gt;</a:t>
             </a:r>
           </a:p>
         </p:txBody>
@@ -9685,7 +9938,7 @@
         </p:nvSpPr>
         <p:spPr>
           <a:xfrm>
-            <a:off x="749808" y="6199632"/>
+            <a:off x="749808" y="6181344"/>
             <a:ext cx="10789920" cy="201168"/>
           </a:xfrm>
           <a:prstGeom prst="rect">
@@ -9711,7 +9964,7 @@
               </a:defRPr>
             </a:pPr>
             <a:r>
-              <a:t>파일 전체 6/21 · 이 슬라이드 다음에 같은 파일의 나머지 줄이 이어집니다.</a:t>
+              <a:t>파일 전체 6/24 · 이 슬라이드 다음에 같은 파일의 나머지 줄이 이어집니다.</a:t>
             </a:r>
           </a:p>
         </p:txBody>
@@ -9768,7 +10021,7 @@
               </a:defRPr>
             </a:pPr>
             <a:r>
-              <a:t>파일을 계속 작성하고 저장한다 (7/21)</a:t>
+              <a:t>파일을 계속 작성하고 저장한다 (7/24)</a:t>
             </a:r>
           </a:p>
         </p:txBody>
@@ -9943,7 +10196,7 @@
               </a:defRPr>
             </a:pPr>
             <a:r>
-              <a:t>현재 단계 9/24    |    현재 폴더 ~/agv_ws    |    현재 터미널</a:t>
+              <a:t>현재 단계 9/27    |    현재 폴더 ~/agv_ws    |    현재 터미널</a:t>
             </a:r>
           </a:p>
         </p:txBody>
@@ -9956,8 +10209,8 @@
         </p:nvSpPr>
         <p:spPr>
           <a:xfrm>
-            <a:off x="658368" y="1682496"/>
-            <a:ext cx="10972800" cy="347472"/>
+            <a:off x="658368" y="1627632"/>
+            <a:ext cx="10972800" cy="256032"/>
           </a:xfrm>
           <a:prstGeom prst="rect">
             <a:avLst/>
@@ -9974,7 +10227,7 @@
               <a:spcAft>
                 <a:spcPts val="0"/>
               </a:spcAft>
-              <a:defRPr sz="1700" b="1">
+              <a:defRPr sz="1500" b="1">
                 <a:solidFill>
                   <a:srgbClr val="122C4E"/>
                 </a:solidFill>
@@ -9995,8 +10248,8 @@
         </p:nvSpPr>
         <p:spPr>
           <a:xfrm>
-            <a:off x="658368" y="2103120"/>
-            <a:ext cx="10972800" cy="493776"/>
+            <a:off x="658368" y="1956816"/>
+            <a:ext cx="10972800" cy="603504"/>
           </a:xfrm>
           <a:prstGeom prst="rect">
             <a:avLst/>
@@ -10040,7 +10293,11 @@
               </a:defRPr>
             </a:pPr>
             <a:r>
-              <a:t>파일 생성/열기: mkdir -p ~/agv_ws/src/agv_gazebo/models/agv    &amp;&amp;    nano ~/agv_ws/src/agv_gazebo/models/agv/model.sdf</a:t>
+              <a:t>파일 생성: mkdir -p ~/agv_ws/src/agv_gazebo/models/agv</a:t>
+            </a:r>
+            <a:br/>
+            <a:r>
+              <a:t>파일 열기: nano ~/agv_ws/src/agv_gazebo/models/agv/model.sdf</a:t>
             </a:r>
           </a:p>
         </p:txBody>
@@ -10053,8 +10310,8 @@
         </p:nvSpPr>
         <p:spPr>
           <a:xfrm>
-            <a:off x="658368" y="2761488"/>
-            <a:ext cx="10972800" cy="3383280"/>
+            <a:off x="658368" y="2706624"/>
+            <a:ext cx="10972800" cy="3364992"/>
           </a:xfrm>
           <a:prstGeom prst="rect">
             <a:avLst/>
@@ -10098,6 +10355,22 @@
               </a:defRPr>
             </a:pPr>
             <a:r>
+              <a:t>        &lt;/inertia&gt;</a:t>
+            </a:r>
+            <a:br/>
+            <a:r>
+              <a:t>      &lt;/inertial&gt;</a:t>
+            </a:r>
+            <a:br/>
+            <a:r>
+              <a:t>      &lt;visual name="wheel"&gt;</a:t>
+            </a:r>
+            <a:br/>
+            <a:r>
+              <a:t>        &lt;geometry&gt;</a:t>
+            </a:r>
+            <a:br/>
+            <a:r>
               <a:t>          &lt;cylinder&gt;</a:t>
             </a:r>
             <a:br/>
@@ -10118,39 +10391,15 @@
             </a:r>
             <a:br/>
             <a:r>
-              <a:t>        &lt;surface&gt;</a:t>
-            </a:r>
-            <a:br/>
-            <a:r>
-              <a:t>          &lt;friction&gt;</a:t>
-            </a:r>
-            <a:br/>
-            <a:r>
-              <a:t>            &lt;ode&gt;</a:t>
-            </a:r>
-            <a:br/>
-            <a:r>
-              <a:t>              &lt;mu&gt;1.0&lt;/mu&gt;</a:t>
-            </a:r>
-            <a:br/>
-            <a:r>
-              <a:t>              &lt;mu2&gt;1.0&lt;/mu2&gt;</a:t>
-            </a:r>
-            <a:br/>
-            <a:r>
-              <a:t>            &lt;/ode&gt;</a:t>
-            </a:r>
-            <a:br/>
-            <a:r>
-              <a:t>          &lt;/friction&gt;</a:t>
-            </a:r>
-            <a:br/>
-            <a:r>
-              <a:t>        &lt;/surface&gt;</a:t>
-            </a:r>
-            <a:br/>
-            <a:r>
-              <a:t>      &lt;/collision&gt;</a:t>
+              <a:t>      &lt;/visual&gt;</a:t>
+            </a:r>
+            <a:br/>
+            <a:r>
+              <a:t>      &lt;collision name="wheel_collision"&gt;</a:t>
+            </a:r>
+            <a:br/>
+            <a:r>
+              <a:t>        &lt;geometry&gt;</a:t>
             </a:r>
           </a:p>
         </p:txBody>
@@ -10163,7 +10412,7 @@
         </p:nvSpPr>
         <p:spPr>
           <a:xfrm>
-            <a:off x="749808" y="6199632"/>
+            <a:off x="749808" y="6181344"/>
             <a:ext cx="10789920" cy="201168"/>
           </a:xfrm>
           <a:prstGeom prst="rect">
@@ -10189,7 +10438,7 @@
               </a:defRPr>
             </a:pPr>
             <a:r>
-              <a:t>파일 전체 7/21 · 이 슬라이드 다음에 같은 파일의 나머지 줄이 이어집니다.</a:t>
+              <a:t>파일 전체 7/24 · 이 슬라이드 다음에 같은 파일의 나머지 줄이 이어집니다.</a:t>
             </a:r>
           </a:p>
         </p:txBody>
@@ -10246,7 +10495,7 @@
               </a:defRPr>
             </a:pPr>
             <a:r>
-              <a:t>파일을 계속 작성하고 저장한다 (8/21)</a:t>
+              <a:t>파일을 계속 작성하고 저장한다 (8/24)</a:t>
             </a:r>
           </a:p>
         </p:txBody>
@@ -10421,7 +10670,7 @@
               </a:defRPr>
             </a:pPr>
             <a:r>
-              <a:t>현재 단계 10/24    |    현재 폴더 ~/agv_ws    |    현재 터미널</a:t>
+              <a:t>현재 단계 10/27    |    현재 폴더 ~/agv_ws    |    현재 터미널</a:t>
             </a:r>
           </a:p>
         </p:txBody>
@@ -10434,8 +10683,8 @@
         </p:nvSpPr>
         <p:spPr>
           <a:xfrm>
-            <a:off x="658368" y="1682496"/>
-            <a:ext cx="10972800" cy="347472"/>
+            <a:off x="658368" y="1627632"/>
+            <a:ext cx="10972800" cy="256032"/>
           </a:xfrm>
           <a:prstGeom prst="rect">
             <a:avLst/>
@@ -10452,7 +10701,7 @@
               <a:spcAft>
                 <a:spcPts val="0"/>
               </a:spcAft>
-              <a:defRPr sz="1700" b="1">
+              <a:defRPr sz="1500" b="1">
                 <a:solidFill>
                   <a:srgbClr val="122C4E"/>
                 </a:solidFill>
@@ -10473,8 +10722,8 @@
         </p:nvSpPr>
         <p:spPr>
           <a:xfrm>
-            <a:off x="658368" y="2103120"/>
-            <a:ext cx="10972800" cy="493776"/>
+            <a:off x="658368" y="1956816"/>
+            <a:ext cx="10972800" cy="603504"/>
           </a:xfrm>
           <a:prstGeom prst="rect">
             <a:avLst/>
@@ -10518,7 +10767,11 @@
               </a:defRPr>
             </a:pPr>
             <a:r>
-              <a:t>파일 생성/열기: mkdir -p ~/agv_ws/src/agv_gazebo/models/agv    &amp;&amp;    nano ~/agv_ws/src/agv_gazebo/models/agv/model.sdf</a:t>
+              <a:t>파일 생성: mkdir -p ~/agv_ws/src/agv_gazebo/models/agv</a:t>
+            </a:r>
+            <a:br/>
+            <a:r>
+              <a:t>파일 열기: nano ~/agv_ws/src/agv_gazebo/models/agv/model.sdf</a:t>
             </a:r>
           </a:p>
         </p:txBody>
@@ -10531,8 +10784,8 @@
         </p:nvSpPr>
         <p:spPr>
           <a:xfrm>
-            <a:off x="658368" y="2761488"/>
-            <a:ext cx="10972800" cy="3383280"/>
+            <a:off x="658368" y="2706624"/>
+            <a:ext cx="10972800" cy="3364992"/>
           </a:xfrm>
           <a:prstGeom prst="rect">
             <a:avLst/>
@@ -10576,59 +10829,51 @@
               </a:defRPr>
             </a:pPr>
             <a:r>
-              <a:t>    &lt;/link&gt;</a:t>
-            </a:r>
-            <a:br/>
-            <a:r>
-              <a:t>    </a:t>
-            </a:r>
-            <a:br/>
-            <a:r>
-              <a:t>    </a:t>
-            </a:r>
-            <a:br/>
-            <a:r>
-              <a:t>    &lt;link name="right_wheel_link"&gt;</a:t>
-            </a:r>
-            <a:br/>
-            <a:r>
-              <a:t>      &lt;pose relative_to="base_link"&gt;0 -0.19 -0.08 1.5708 0 0&lt;/pose&gt;</a:t>
-            </a:r>
-            <a:br/>
-            <a:r>
-              <a:t>      &lt;inertial&gt;</a:t>
-            </a:r>
-            <a:br/>
-            <a:r>
-              <a:t>        &lt;mass&gt;0.6&lt;/mass&gt;</a:t>
-            </a:r>
-            <a:br/>
-            <a:r>
-              <a:t>        &lt;inertia&gt;</a:t>
-            </a:r>
-            <a:br/>
-            <a:r>
-              <a:t>          &lt;ixx&gt;0.002&lt;/ixx&gt;</a:t>
-            </a:r>
-            <a:br/>
-            <a:r>
-              <a:t>          &lt;iyy&gt;0.002&lt;/iyy&gt;</a:t>
-            </a:r>
-            <a:br/>
-            <a:r>
-              <a:t>          &lt;izz&gt;0.001&lt;/izz&gt;</a:t>
-            </a:r>
-            <a:br/>
-            <a:r>
-              <a:t>        &lt;/inertia&gt;</a:t>
-            </a:r>
-            <a:br/>
-            <a:r>
-              <a:t>      &lt;/inertial&gt;</a:t>
-            </a:r>
-            <a:br/>
-            <a:r>
-              <a:t>      &lt;visual name="wheel"&gt;</a:t>
+              <a:t>          &lt;cylinder&gt;</a:t>
+            </a:r>
+            <a:br/>
+            <a:r>
+              <a:t>            &lt;radius&gt;0.08&lt;/radius&gt;</a:t>
+            </a:r>
+            <a:br/>
+            <a:r>
+              <a:t>            &lt;length&gt;0.05&lt;/length&gt;</a:t>
+            </a:r>
+            <a:br/>
+            <a:r>
+              <a:t>          &lt;/cylinder&gt;</a:t>
+            </a:r>
+            <a:br/>
+            <a:r>
+              <a:t>        &lt;/geometry&gt;</a:t>
+            </a:r>
+            <a:br/>
+            <a:r>
+              <a:t>        &lt;surface&gt;</a:t>
+            </a:r>
+            <a:br/>
+            <a:r>
+              <a:t>          &lt;friction&gt;</a:t>
+            </a:r>
+            <a:br/>
+            <a:r>
+              <a:t>            &lt;ode&gt;</a:t>
+            </a:r>
+            <a:br/>
+            <a:r>
+              <a:t>              &lt;mu&gt;1.0&lt;/mu&gt;</a:t>
+            </a:r>
+            <a:br/>
+            <a:r>
+              <a:t>              &lt;mu2&gt;1.0&lt;/mu2&gt;</a:t>
+            </a:r>
+            <a:br/>
+            <a:r>
+              <a:t>            &lt;/ode&gt;</a:t>
+            </a:r>
+            <a:br/>
+            <a:r>
+              <a:t>          &lt;/friction&gt;</a:t>
             </a:r>
           </a:p>
         </p:txBody>
@@ -10641,7 +10886,7 @@
         </p:nvSpPr>
         <p:spPr>
           <a:xfrm>
-            <a:off x="749808" y="6199632"/>
+            <a:off x="749808" y="6181344"/>
             <a:ext cx="10789920" cy="201168"/>
           </a:xfrm>
           <a:prstGeom prst="rect">
@@ -10667,7 +10912,7 @@
               </a:defRPr>
             </a:pPr>
             <a:r>
-              <a:t>파일 전체 8/21 · 이 슬라이드 다음에 같은 파일의 나머지 줄이 이어집니다.</a:t>
+              <a:t>파일 전체 8/24 · 이 슬라이드 다음에 같은 파일의 나머지 줄이 이어집니다.</a:t>
             </a:r>
           </a:p>
         </p:txBody>
@@ -10724,7 +10969,7 @@
               </a:defRPr>
             </a:pPr>
             <a:r>
-              <a:t>파일을 계속 작성하고 저장한다 (9/21)</a:t>
+              <a:t>파일을 계속 작성하고 저장한다 (9/24)</a:t>
             </a:r>
           </a:p>
         </p:txBody>
@@ -10899,7 +11144,7 @@
               </a:defRPr>
             </a:pPr>
             <a:r>
-              <a:t>현재 단계 11/24    |    현재 폴더 ~/agv_ws    |    현재 터미널</a:t>
+              <a:t>현재 단계 11/27    |    현재 폴더 ~/agv_ws    |    현재 터미널</a:t>
             </a:r>
           </a:p>
         </p:txBody>
@@ -10912,8 +11157,8 @@
         </p:nvSpPr>
         <p:spPr>
           <a:xfrm>
-            <a:off x="658368" y="1682496"/>
-            <a:ext cx="10972800" cy="347472"/>
+            <a:off x="658368" y="1627632"/>
+            <a:ext cx="10972800" cy="256032"/>
           </a:xfrm>
           <a:prstGeom prst="rect">
             <a:avLst/>
@@ -10930,7 +11175,7 @@
               <a:spcAft>
                 <a:spcPts val="0"/>
               </a:spcAft>
-              <a:defRPr sz="1700" b="1">
+              <a:defRPr sz="1500" b="1">
                 <a:solidFill>
                   <a:srgbClr val="122C4E"/>
                 </a:solidFill>
@@ -10951,8 +11196,8 @@
         </p:nvSpPr>
         <p:spPr>
           <a:xfrm>
-            <a:off x="658368" y="2103120"/>
-            <a:ext cx="10972800" cy="493776"/>
+            <a:off x="658368" y="1956816"/>
+            <a:ext cx="10972800" cy="603504"/>
           </a:xfrm>
           <a:prstGeom prst="rect">
             <a:avLst/>
@@ -10996,7 +11241,11 @@
               </a:defRPr>
             </a:pPr>
             <a:r>
-              <a:t>파일 생성/열기: mkdir -p ~/agv_ws/src/agv_gazebo/models/agv    &amp;&amp;    nano ~/agv_ws/src/agv_gazebo/models/agv/model.sdf</a:t>
+              <a:t>파일 생성: mkdir -p ~/agv_ws/src/agv_gazebo/models/agv</a:t>
+            </a:r>
+            <a:br/>
+            <a:r>
+              <a:t>파일 열기: nano ~/agv_ws/src/agv_gazebo/models/agv/model.sdf</a:t>
             </a:r>
           </a:p>
         </p:txBody>
@@ -11009,8 +11258,8 @@
         </p:nvSpPr>
         <p:spPr>
           <a:xfrm>
-            <a:off x="658368" y="2761488"/>
-            <a:ext cx="10972800" cy="3383280"/>
+            <a:off x="658368" y="2706624"/>
+            <a:ext cx="10972800" cy="3364992"/>
           </a:xfrm>
           <a:prstGeom prst="rect">
             <a:avLst/>
@@ -11054,59 +11303,51 @@
               </a:defRPr>
             </a:pPr>
             <a:r>
-              <a:t>        &lt;geometry&gt;</a:t>
-            </a:r>
-            <a:br/>
-            <a:r>
-              <a:t>          &lt;cylinder&gt;</a:t>
-            </a:r>
-            <a:br/>
-            <a:r>
-              <a:t>            &lt;radius&gt;0.08&lt;/radius&gt;</a:t>
-            </a:r>
-            <a:br/>
-            <a:r>
-              <a:t>            &lt;length&gt;0.05&lt;/length&gt;</a:t>
-            </a:r>
-            <a:br/>
-            <a:r>
-              <a:t>          &lt;/cylinder&gt;</a:t>
-            </a:r>
-            <a:br/>
-            <a:r>
-              <a:t>        &lt;/geometry&gt;</a:t>
-            </a:r>
-            <a:br/>
-            <a:r>
-              <a:t>      &lt;/visual&gt;</a:t>
-            </a:r>
-            <a:br/>
-            <a:r>
-              <a:t>      &lt;collision name="wheel_collision"&gt;</a:t>
-            </a:r>
-            <a:br/>
-            <a:r>
-              <a:t>        &lt;geometry&gt;</a:t>
-            </a:r>
-            <a:br/>
-            <a:r>
-              <a:t>          &lt;cylinder&gt;</a:t>
-            </a:r>
-            <a:br/>
-            <a:r>
-              <a:t>            &lt;radius&gt;0.08&lt;/radius&gt;</a:t>
-            </a:r>
-            <a:br/>
-            <a:r>
-              <a:t>            &lt;length&gt;0.05&lt;/length&gt;</a:t>
-            </a:r>
-            <a:br/>
-            <a:r>
-              <a:t>          &lt;/cylinder&gt;</a:t>
-            </a:r>
-            <a:br/>
-            <a:r>
-              <a:t>        &lt;/geometry&gt;</a:t>
+              <a:t>        &lt;/surface&gt;</a:t>
+            </a:r>
+            <a:br/>
+            <a:r>
+              <a:t>      &lt;/collision&gt;</a:t>
+            </a:r>
+            <a:br/>
+            <a:r>
+              <a:t>    &lt;/link&gt;</a:t>
+            </a:r>
+            <a:br/>
+            <a:r>
+              <a:t>    </a:t>
+            </a:r>
+            <a:br/>
+            <a:r>
+              <a:t>    </a:t>
+            </a:r>
+            <a:br/>
+            <a:r>
+              <a:t>    &lt;link name="right_wheel_link"&gt;</a:t>
+            </a:r>
+            <a:br/>
+            <a:r>
+              <a:t>      &lt;pose relative_to="base_link"&gt;0 -0.19 -0.08 1.5708 0 0&lt;/pose&gt;</a:t>
+            </a:r>
+            <a:br/>
+            <a:r>
+              <a:t>      &lt;inertial&gt;</a:t>
+            </a:r>
+            <a:br/>
+            <a:r>
+              <a:t>        &lt;mass&gt;0.6&lt;/mass&gt;</a:t>
+            </a:r>
+            <a:br/>
+            <a:r>
+              <a:t>        &lt;inertia&gt;</a:t>
+            </a:r>
+            <a:br/>
+            <a:r>
+              <a:t>          &lt;ixx&gt;0.002&lt;/ixx&gt;</a:t>
+            </a:r>
+            <a:br/>
+            <a:r>
+              <a:t>          &lt;iyy&gt;0.002&lt;/iyy&gt;</a:t>
             </a:r>
           </a:p>
         </p:txBody>
@@ -11119,7 +11360,7 @@
         </p:nvSpPr>
         <p:spPr>
           <a:xfrm>
-            <a:off x="749808" y="6199632"/>
+            <a:off x="749808" y="6181344"/>
             <a:ext cx="10789920" cy="201168"/>
           </a:xfrm>
           <a:prstGeom prst="rect">
@@ -11145,7 +11386,7 @@
               </a:defRPr>
             </a:pPr>
             <a:r>
-              <a:t>파일 전체 9/21 · 이 슬라이드 다음에 같은 파일의 나머지 줄이 이어집니다.</a:t>
+              <a:t>파일 전체 9/24 · 이 슬라이드 다음에 같은 파일의 나머지 줄이 이어집니다.</a:t>
             </a:r>
           </a:p>
         </p:txBody>
@@ -11202,7 +11443,7 @@
               </a:defRPr>
             </a:pPr>
             <a:r>
-              <a:t>파일을 계속 작성하고 저장한다 (10/21)</a:t>
+              <a:t>파일을 계속 작성하고 저장한다 (10/24)</a:t>
             </a:r>
           </a:p>
         </p:txBody>
@@ -11377,7 +11618,7 @@
               </a:defRPr>
             </a:pPr>
             <a:r>
-              <a:t>현재 단계 12/24    |    현재 폴더 ~/agv_ws    |    현재 터미널</a:t>
+              <a:t>현재 단계 12/27    |    현재 폴더 ~/agv_ws    |    현재 터미널</a:t>
             </a:r>
           </a:p>
         </p:txBody>
@@ -11390,8 +11631,8 @@
         </p:nvSpPr>
         <p:spPr>
           <a:xfrm>
-            <a:off x="658368" y="1682496"/>
-            <a:ext cx="10972800" cy="347472"/>
+            <a:off x="658368" y="1627632"/>
+            <a:ext cx="10972800" cy="256032"/>
           </a:xfrm>
           <a:prstGeom prst="rect">
             <a:avLst/>
@@ -11408,7 +11649,7 @@
               <a:spcAft>
                 <a:spcPts val="0"/>
               </a:spcAft>
-              <a:defRPr sz="1700" b="1">
+              <a:defRPr sz="1500" b="1">
                 <a:solidFill>
                   <a:srgbClr val="122C4E"/>
                 </a:solidFill>
@@ -11429,8 +11670,8 @@
         </p:nvSpPr>
         <p:spPr>
           <a:xfrm>
-            <a:off x="658368" y="2103120"/>
-            <a:ext cx="10972800" cy="493776"/>
+            <a:off x="658368" y="1956816"/>
+            <a:ext cx="10972800" cy="603504"/>
           </a:xfrm>
           <a:prstGeom prst="rect">
             <a:avLst/>
@@ -11474,7 +11715,11 @@
               </a:defRPr>
             </a:pPr>
             <a:r>
-              <a:t>파일 생성/열기: mkdir -p ~/agv_ws/src/agv_gazebo/models/agv    &amp;&amp;    nano ~/agv_ws/src/agv_gazebo/models/agv/model.sdf</a:t>
+              <a:t>파일 생성: mkdir -p ~/agv_ws/src/agv_gazebo/models/agv</a:t>
+            </a:r>
+            <a:br/>
+            <a:r>
+              <a:t>파일 열기: nano ~/agv_ws/src/agv_gazebo/models/agv/model.sdf</a:t>
             </a:r>
           </a:p>
         </p:txBody>
@@ -11487,8 +11732,8 @@
         </p:nvSpPr>
         <p:spPr>
           <a:xfrm>
-            <a:off x="658368" y="2761488"/>
-            <a:ext cx="10972800" cy="3383280"/>
+            <a:off x="658368" y="2706624"/>
+            <a:ext cx="10972800" cy="3364992"/>
           </a:xfrm>
           <a:prstGeom prst="rect">
             <a:avLst/>
@@ -11532,59 +11777,51 @@
               </a:defRPr>
             </a:pPr>
             <a:r>
-              <a:t>        &lt;surface&gt;</a:t>
-            </a:r>
-            <a:br/>
-            <a:r>
-              <a:t>          &lt;friction&gt;</a:t>
-            </a:r>
-            <a:br/>
-            <a:r>
-              <a:t>            &lt;ode&gt;</a:t>
-            </a:r>
-            <a:br/>
-            <a:r>
-              <a:t>              &lt;mu&gt;1.0&lt;/mu&gt;</a:t>
-            </a:r>
-            <a:br/>
-            <a:r>
-              <a:t>              &lt;mu2&gt;1.0&lt;/mu2&gt;</a:t>
-            </a:r>
-            <a:br/>
-            <a:r>
-              <a:t>            &lt;/ode&gt;</a:t>
-            </a:r>
-            <a:br/>
-            <a:r>
-              <a:t>          &lt;/friction&gt;</a:t>
-            </a:r>
-            <a:br/>
-            <a:r>
-              <a:t>        &lt;/surface&gt;</a:t>
-            </a:r>
-            <a:br/>
-            <a:r>
-              <a:t>      &lt;/collision&gt;</a:t>
-            </a:r>
-            <a:br/>
-            <a:r>
-              <a:t>    &lt;/link&gt;</a:t>
-            </a:r>
-            <a:br/>
-            <a:r>
-              <a:t>    </a:t>
-            </a:r>
-            <a:br/>
-            <a:r>
-              <a:t>    </a:t>
-            </a:r>
-            <a:br/>
-            <a:r>
-              <a:t>    &lt;joint name="left_wheel_joint" type="revolute"&gt;</a:t>
-            </a:r>
-            <a:br/>
-            <a:r>
-              <a:t>      &lt;parent&gt;base_link&lt;/parent&gt;</a:t>
+              <a:t>          &lt;izz&gt;0.001&lt;/izz&gt;</a:t>
+            </a:r>
+            <a:br/>
+            <a:r>
+              <a:t>        &lt;/inertia&gt;</a:t>
+            </a:r>
+            <a:br/>
+            <a:r>
+              <a:t>      &lt;/inertial&gt;</a:t>
+            </a:r>
+            <a:br/>
+            <a:r>
+              <a:t>      &lt;visual name="wheel"&gt;</a:t>
+            </a:r>
+            <a:br/>
+            <a:r>
+              <a:t>        &lt;geometry&gt;</a:t>
+            </a:r>
+            <a:br/>
+            <a:r>
+              <a:t>          &lt;cylinder&gt;</a:t>
+            </a:r>
+            <a:br/>
+            <a:r>
+              <a:t>            &lt;radius&gt;0.08&lt;/radius&gt;</a:t>
+            </a:r>
+            <a:br/>
+            <a:r>
+              <a:t>            &lt;length&gt;0.05&lt;/length&gt;</a:t>
+            </a:r>
+            <a:br/>
+            <a:r>
+              <a:t>          &lt;/cylinder&gt;</a:t>
+            </a:r>
+            <a:br/>
+            <a:r>
+              <a:t>        &lt;/geometry&gt;</a:t>
+            </a:r>
+            <a:br/>
+            <a:r>
+              <a:t>      &lt;/visual&gt;</a:t>
+            </a:r>
+            <a:br/>
+            <a:r>
+              <a:t>      &lt;collision name="wheel_collision"&gt;</a:t>
             </a:r>
           </a:p>
         </p:txBody>
@@ -11597,7 +11834,7 @@
         </p:nvSpPr>
         <p:spPr>
           <a:xfrm>
-            <a:off x="749808" y="6199632"/>
+            <a:off x="749808" y="6181344"/>
             <a:ext cx="10789920" cy="201168"/>
           </a:xfrm>
           <a:prstGeom prst="rect">
@@ -11623,7 +11860,7 @@
               </a:defRPr>
             </a:pPr>
             <a:r>
-              <a:t>파일 전체 10/21 · 이 슬라이드 다음에 같은 파일의 나머지 줄이 이어집니다.</a:t>
+              <a:t>파일 전체 10/24 · 이 슬라이드 다음에 같은 파일의 나머지 줄이 이어집니다.</a:t>
             </a:r>
           </a:p>
         </p:txBody>
@@ -11680,7 +11917,7 @@
               </a:defRPr>
             </a:pPr>
             <a:r>
-              <a:t>파일을 계속 작성하고 저장한다 (11/21)</a:t>
+              <a:t>파일을 계속 작성하고 저장한다 (11/24)</a:t>
             </a:r>
           </a:p>
         </p:txBody>
@@ -11855,7 +12092,7 @@
               </a:defRPr>
             </a:pPr>
             <a:r>
-              <a:t>현재 단계 13/24    |    현재 폴더 ~/agv_ws    |    현재 터미널</a:t>
+              <a:t>현재 단계 13/27    |    현재 폴더 ~/agv_ws    |    현재 터미널</a:t>
             </a:r>
           </a:p>
         </p:txBody>
@@ -11868,8 +12105,8 @@
         </p:nvSpPr>
         <p:spPr>
           <a:xfrm>
-            <a:off x="658368" y="1682496"/>
-            <a:ext cx="10972800" cy="347472"/>
+            <a:off x="658368" y="1627632"/>
+            <a:ext cx="10972800" cy="256032"/>
           </a:xfrm>
           <a:prstGeom prst="rect">
             <a:avLst/>
@@ -11886,7 +12123,7 @@
               <a:spcAft>
                 <a:spcPts val="0"/>
               </a:spcAft>
-              <a:defRPr sz="1700" b="1">
+              <a:defRPr sz="1500" b="1">
                 <a:solidFill>
                   <a:srgbClr val="122C4E"/>
                 </a:solidFill>
@@ -11907,8 +12144,8 @@
         </p:nvSpPr>
         <p:spPr>
           <a:xfrm>
-            <a:off x="658368" y="2103120"/>
-            <a:ext cx="10972800" cy="493776"/>
+            <a:off x="658368" y="1956816"/>
+            <a:ext cx="10972800" cy="603504"/>
           </a:xfrm>
           <a:prstGeom prst="rect">
             <a:avLst/>
@@ -11952,7 +12189,11 @@
               </a:defRPr>
             </a:pPr>
             <a:r>
-              <a:t>파일 생성/열기: mkdir -p ~/agv_ws/src/agv_gazebo/models/agv    &amp;&amp;    nano ~/agv_ws/src/agv_gazebo/models/agv/model.sdf</a:t>
+              <a:t>파일 생성: mkdir -p ~/agv_ws/src/agv_gazebo/models/agv</a:t>
+            </a:r>
+            <a:br/>
+            <a:r>
+              <a:t>파일 열기: nano ~/agv_ws/src/agv_gazebo/models/agv/model.sdf</a:t>
             </a:r>
           </a:p>
         </p:txBody>
@@ -11965,8 +12206,8 @@
         </p:nvSpPr>
         <p:spPr>
           <a:xfrm>
-            <a:off x="658368" y="2761488"/>
-            <a:ext cx="10972800" cy="3383280"/>
+            <a:off x="658368" y="2706624"/>
+            <a:ext cx="10972800" cy="3364992"/>
           </a:xfrm>
           <a:prstGeom prst="rect">
             <a:avLst/>
@@ -12010,59 +12251,51 @@
               </a:defRPr>
             </a:pPr>
             <a:r>
-              <a:t>      &lt;child&gt;left_wheel_link&lt;/child&gt;</a:t>
-            </a:r>
-            <a:br/>
-            <a:r>
-              <a:t>      &lt;axis&gt;</a:t>
-            </a:r>
-            <a:br/>
-            <a:r>
-              <a:t>        &lt;xyz&gt;0 1 0&lt;/xyz&gt;</a:t>
-            </a:r>
-            <a:br/>
-            <a:r>
-              <a:t>        &lt;limit&gt;</a:t>
-            </a:r>
-            <a:br/>
-            <a:r>
-              <a:t>          &lt;lower&gt;-1e16&lt;/lower&gt;</a:t>
-            </a:r>
-            <a:br/>
-            <a:r>
-              <a:t>          &lt;upper&gt;1e16&lt;/upper&gt;</a:t>
-            </a:r>
-            <a:br/>
-            <a:r>
-              <a:t>        &lt;/limit&gt;</a:t>
-            </a:r>
-            <a:br/>
-            <a:r>
-              <a:t>      &lt;/axis&gt;</a:t>
-            </a:r>
-            <a:br/>
-            <a:r>
-              <a:t>    &lt;/joint&gt;</a:t>
-            </a:r>
-            <a:br/>
-            <a:r>
-              <a:t>    </a:t>
-            </a:r>
-            <a:br/>
-            <a:r>
-              <a:t>    </a:t>
-            </a:r>
-            <a:br/>
-            <a:r>
-              <a:t>    &lt;joint name="right_wheel_joint" type="revolute"&gt;</a:t>
-            </a:r>
-            <a:br/>
-            <a:r>
-              <a:t>      &lt;parent&gt;base_link&lt;/parent&gt;</a:t>
-            </a:r>
-            <a:br/>
-            <a:r>
-              <a:t>      &lt;child&gt;right_wheel_link&lt;/child&gt;</a:t>
+              <a:t>        &lt;geometry&gt;</a:t>
+            </a:r>
+            <a:br/>
+            <a:r>
+              <a:t>          &lt;cylinder&gt;</a:t>
+            </a:r>
+            <a:br/>
+            <a:r>
+              <a:t>            &lt;radius&gt;0.08&lt;/radius&gt;</a:t>
+            </a:r>
+            <a:br/>
+            <a:r>
+              <a:t>            &lt;length&gt;0.05&lt;/length&gt;</a:t>
+            </a:r>
+            <a:br/>
+            <a:r>
+              <a:t>          &lt;/cylinder&gt;</a:t>
+            </a:r>
+            <a:br/>
+            <a:r>
+              <a:t>        &lt;/geometry&gt;</a:t>
+            </a:r>
+            <a:br/>
+            <a:r>
+              <a:t>        &lt;surface&gt;</a:t>
+            </a:r>
+            <a:br/>
+            <a:r>
+              <a:t>          &lt;friction&gt;</a:t>
+            </a:r>
+            <a:br/>
+            <a:r>
+              <a:t>            &lt;ode&gt;</a:t>
+            </a:r>
+            <a:br/>
+            <a:r>
+              <a:t>              &lt;mu&gt;1.0&lt;/mu&gt;</a:t>
+            </a:r>
+            <a:br/>
+            <a:r>
+              <a:t>              &lt;mu2&gt;1.0&lt;/mu2&gt;</a:t>
+            </a:r>
+            <a:br/>
+            <a:r>
+              <a:t>            &lt;/ode&gt;</a:t>
             </a:r>
           </a:p>
         </p:txBody>
@@ -12075,7 +12308,7 @@
         </p:nvSpPr>
         <p:spPr>
           <a:xfrm>
-            <a:off x="749808" y="6199632"/>
+            <a:off x="749808" y="6181344"/>
             <a:ext cx="10789920" cy="201168"/>
           </a:xfrm>
           <a:prstGeom prst="rect">
@@ -12101,7 +12334,7 @@
               </a:defRPr>
             </a:pPr>
             <a:r>
-              <a:t>파일 전체 11/21 · 이 슬라이드 다음에 같은 파일의 나머지 줄이 이어집니다.</a:t>
+              <a:t>파일 전체 11/24 · 이 슬라이드 다음에 같은 파일의 나머지 줄이 이어집니다.</a:t>
             </a:r>
           </a:p>
         </p:txBody>
@@ -12619,7 +12852,7 @@
               </a:defRPr>
             </a:pPr>
             <a:r>
-              <a:t>파일을 계속 작성하고 저장한다 (12/21)</a:t>
+              <a:t>파일을 계속 작성하고 저장한다 (12/24)</a:t>
             </a:r>
           </a:p>
         </p:txBody>
@@ -12794,7 +13027,7 @@
               </a:defRPr>
             </a:pPr>
             <a:r>
-              <a:t>현재 단계 14/24    |    현재 폴더 ~/agv_ws    |    현재 터미널</a:t>
+              <a:t>현재 단계 14/27    |    현재 폴더 ~/agv_ws    |    현재 터미널</a:t>
             </a:r>
           </a:p>
         </p:txBody>
@@ -12807,8 +13040,8 @@
         </p:nvSpPr>
         <p:spPr>
           <a:xfrm>
-            <a:off x="658368" y="1682496"/>
-            <a:ext cx="10972800" cy="347472"/>
+            <a:off x="658368" y="1627632"/>
+            <a:ext cx="10972800" cy="256032"/>
           </a:xfrm>
           <a:prstGeom prst="rect">
             <a:avLst/>
@@ -12825,7 +13058,7 @@
               <a:spcAft>
                 <a:spcPts val="0"/>
               </a:spcAft>
-              <a:defRPr sz="1700" b="1">
+              <a:defRPr sz="1500" b="1">
                 <a:solidFill>
                   <a:srgbClr val="122C4E"/>
                 </a:solidFill>
@@ -12846,8 +13079,8 @@
         </p:nvSpPr>
         <p:spPr>
           <a:xfrm>
-            <a:off x="658368" y="2103120"/>
-            <a:ext cx="10972800" cy="493776"/>
+            <a:off x="658368" y="1956816"/>
+            <a:ext cx="10972800" cy="603504"/>
           </a:xfrm>
           <a:prstGeom prst="rect">
             <a:avLst/>
@@ -12891,7 +13124,11 @@
               </a:defRPr>
             </a:pPr>
             <a:r>
-              <a:t>파일 생성/열기: mkdir -p ~/agv_ws/src/agv_gazebo/models/agv    &amp;&amp;    nano ~/agv_ws/src/agv_gazebo/models/agv/model.sdf</a:t>
+              <a:t>파일 생성: mkdir -p ~/agv_ws/src/agv_gazebo/models/agv</a:t>
+            </a:r>
+            <a:br/>
+            <a:r>
+              <a:t>파일 열기: nano ~/agv_ws/src/agv_gazebo/models/agv/model.sdf</a:t>
             </a:r>
           </a:p>
         </p:txBody>
@@ -12904,8 +13141,8 @@
         </p:nvSpPr>
         <p:spPr>
           <a:xfrm>
-            <a:off x="658368" y="2761488"/>
-            <a:ext cx="10972800" cy="3383280"/>
+            <a:off x="658368" y="2706624"/>
+            <a:ext cx="10972800" cy="3364992"/>
           </a:xfrm>
           <a:prstGeom prst="rect">
             <a:avLst/>
@@ -12949,6 +13186,42 @@
               </a:defRPr>
             </a:pPr>
             <a:r>
+              <a:t>          &lt;/friction&gt;</a:t>
+            </a:r>
+            <a:br/>
+            <a:r>
+              <a:t>        &lt;/surface&gt;</a:t>
+            </a:r>
+            <a:br/>
+            <a:r>
+              <a:t>      &lt;/collision&gt;</a:t>
+            </a:r>
+            <a:br/>
+            <a:r>
+              <a:t>    &lt;/link&gt;</a:t>
+            </a:r>
+            <a:br/>
+            <a:r>
+              <a:t>    </a:t>
+            </a:r>
+            <a:br/>
+            <a:r>
+              <a:t>    </a:t>
+            </a:r>
+            <a:br/>
+            <a:r>
+              <a:t>    &lt;joint name="left_wheel_joint" type="revolute"&gt;</a:t>
+            </a:r>
+            <a:br/>
+            <a:r>
+              <a:t>      &lt;parent&gt;base_link&lt;/parent&gt;</a:t>
+            </a:r>
+            <a:br/>
+            <a:r>
+              <a:t>      &lt;child&gt;left_wheel_link&lt;/child&gt;</a:t>
+            </a:r>
+            <a:br/>
+            <a:r>
               <a:t>      &lt;axis&gt;</a:t>
             </a:r>
             <a:br/>
@@ -12958,50 +13231,6 @@
             <a:br/>
             <a:r>
               <a:t>        &lt;limit&gt;</a:t>
-            </a:r>
-            <a:br/>
-            <a:r>
-              <a:t>          &lt;lower&gt;-1e16&lt;/lower&gt;</a:t>
-            </a:r>
-            <a:br/>
-            <a:r>
-              <a:t>          &lt;upper&gt;1e16&lt;/upper&gt;</a:t>
-            </a:r>
-            <a:br/>
-            <a:r>
-              <a:t>        &lt;/limit&gt;</a:t>
-            </a:r>
-            <a:br/>
-            <a:r>
-              <a:t>      &lt;/axis&gt;</a:t>
-            </a:r>
-            <a:br/>
-            <a:r>
-              <a:t>    &lt;/joint&gt;</a:t>
-            </a:r>
-            <a:br/>
-            <a:r>
-              <a:t>    </a:t>
-            </a:r>
-            <a:br/>
-            <a:r>
-              <a:t>    </a:t>
-            </a:r>
-            <a:br/>
-            <a:r>
-              <a:t>    &lt;link name="caster_link"&gt;</a:t>
-            </a:r>
-            <a:br/>
-            <a:r>
-              <a:t>      &lt;pose relative_to="base_link"&gt;-0.24 0 -0.12 0 0 0&lt;/pose&gt;</a:t>
-            </a:r>
-            <a:br/>
-            <a:r>
-              <a:t>      &lt;inertial&gt;</a:t>
-            </a:r>
-            <a:br/>
-            <a:r>
-              <a:t>        &lt;mass&gt;0.15&lt;/mass&gt;</a:t>
             </a:r>
           </a:p>
         </p:txBody>
@@ -13014,7 +13243,7 @@
         </p:nvSpPr>
         <p:spPr>
           <a:xfrm>
-            <a:off x="749808" y="6199632"/>
+            <a:off x="749808" y="6181344"/>
             <a:ext cx="10789920" cy="201168"/>
           </a:xfrm>
           <a:prstGeom prst="rect">
@@ -13040,7 +13269,7 @@
               </a:defRPr>
             </a:pPr>
             <a:r>
-              <a:t>파일 전체 12/21 · 이 슬라이드 다음에 같은 파일의 나머지 줄이 이어집니다.</a:t>
+              <a:t>파일 전체 12/24 · 이 슬라이드 다음에 같은 파일의 나머지 줄이 이어집니다.</a:t>
             </a:r>
           </a:p>
         </p:txBody>
@@ -13097,7 +13326,7 @@
               </a:defRPr>
             </a:pPr>
             <a:r>
-              <a:t>파일을 계속 작성하고 저장한다 (13/21)</a:t>
+              <a:t>파일을 계속 작성하고 저장한다 (13/24)</a:t>
             </a:r>
           </a:p>
         </p:txBody>
@@ -13272,7 +13501,7 @@
               </a:defRPr>
             </a:pPr>
             <a:r>
-              <a:t>현재 단계 15/24    |    현재 폴더 ~/agv_ws    |    현재 터미널</a:t>
+              <a:t>현재 단계 15/27    |    현재 폴더 ~/agv_ws    |    현재 터미널</a:t>
             </a:r>
           </a:p>
         </p:txBody>
@@ -13285,8 +13514,8 @@
         </p:nvSpPr>
         <p:spPr>
           <a:xfrm>
-            <a:off x="658368" y="1682496"/>
-            <a:ext cx="10972800" cy="347472"/>
+            <a:off x="658368" y="1627632"/>
+            <a:ext cx="10972800" cy="256032"/>
           </a:xfrm>
           <a:prstGeom prst="rect">
             <a:avLst/>
@@ -13303,7 +13532,7 @@
               <a:spcAft>
                 <a:spcPts val="0"/>
               </a:spcAft>
-              <a:defRPr sz="1700" b="1">
+              <a:defRPr sz="1500" b="1">
                 <a:solidFill>
                   <a:srgbClr val="122C4E"/>
                 </a:solidFill>
@@ -13324,8 +13553,8 @@
         </p:nvSpPr>
         <p:spPr>
           <a:xfrm>
-            <a:off x="658368" y="2103120"/>
-            <a:ext cx="10972800" cy="493776"/>
+            <a:off x="658368" y="1956816"/>
+            <a:ext cx="10972800" cy="603504"/>
           </a:xfrm>
           <a:prstGeom prst="rect">
             <a:avLst/>
@@ -13369,7 +13598,11 @@
               </a:defRPr>
             </a:pPr>
             <a:r>
-              <a:t>파일 생성/열기: mkdir -p ~/agv_ws/src/agv_gazebo/models/agv    &amp;&amp;    nano ~/agv_ws/src/agv_gazebo/models/agv/model.sdf</a:t>
+              <a:t>파일 생성: mkdir -p ~/agv_ws/src/agv_gazebo/models/agv</a:t>
+            </a:r>
+            <a:br/>
+            <a:r>
+              <a:t>파일 열기: nano ~/agv_ws/src/agv_gazebo/models/agv/model.sdf</a:t>
             </a:r>
           </a:p>
         </p:txBody>
@@ -13382,8 +13615,8 @@
         </p:nvSpPr>
         <p:spPr>
           <a:xfrm>
-            <a:off x="658368" y="2761488"/>
-            <a:ext cx="10972800" cy="3383280"/>
+            <a:off x="658368" y="2706624"/>
+            <a:ext cx="10972800" cy="3364992"/>
           </a:xfrm>
           <a:prstGeom prst="rect">
             <a:avLst/>
@@ -13427,59 +13660,51 @@
               </a:defRPr>
             </a:pPr>
             <a:r>
-              <a:t>        &lt;inertia&gt;</a:t>
-            </a:r>
-            <a:br/>
-            <a:r>
-              <a:t>          &lt;ixx&gt;0.0001&lt;/ixx&gt;</a:t>
-            </a:r>
-            <a:br/>
-            <a:r>
-              <a:t>          &lt;iyy&gt;0.0001&lt;/iyy&gt;</a:t>
-            </a:r>
-            <a:br/>
-            <a:r>
-              <a:t>          &lt;izz&gt;0.0001&lt;/izz&gt;</a:t>
-            </a:r>
-            <a:br/>
-            <a:r>
-              <a:t>        &lt;/inertia&gt;</a:t>
-            </a:r>
-            <a:br/>
-            <a:r>
-              <a:t>      &lt;/inertial&gt;</a:t>
-            </a:r>
-            <a:br/>
-            <a:r>
-              <a:t>      &lt;visual name="caster"&gt;</a:t>
-            </a:r>
-            <a:br/>
-            <a:r>
-              <a:t>        &lt;geometry&gt;</a:t>
-            </a:r>
-            <a:br/>
-            <a:r>
-              <a:t>          &lt;sphere&gt;</a:t>
-            </a:r>
-            <a:br/>
-            <a:r>
-              <a:t>            &lt;radius&gt;0.04&lt;/radius&gt;</a:t>
-            </a:r>
-            <a:br/>
-            <a:r>
-              <a:t>          &lt;/sphere&gt;</a:t>
-            </a:r>
-            <a:br/>
-            <a:r>
-              <a:t>        &lt;/geometry&gt;</a:t>
-            </a:r>
-            <a:br/>
-            <a:r>
-              <a:t>      &lt;/visual&gt;</a:t>
-            </a:r>
-            <a:br/>
-            <a:r>
-              <a:t>      &lt;collision name="caster_collision"&gt;</a:t>
+              <a:t>          &lt;lower&gt;-1e16&lt;/lower&gt;</a:t>
+            </a:r>
+            <a:br/>
+            <a:r>
+              <a:t>          &lt;upper&gt;1e16&lt;/upper&gt;</a:t>
+            </a:r>
+            <a:br/>
+            <a:r>
+              <a:t>        &lt;/limit&gt;</a:t>
+            </a:r>
+            <a:br/>
+            <a:r>
+              <a:t>      &lt;/axis&gt;</a:t>
+            </a:r>
+            <a:br/>
+            <a:r>
+              <a:t>    &lt;/joint&gt;</a:t>
+            </a:r>
+            <a:br/>
+            <a:r>
+              <a:t>    </a:t>
+            </a:r>
+            <a:br/>
+            <a:r>
+              <a:t>    </a:t>
+            </a:r>
+            <a:br/>
+            <a:r>
+              <a:t>    &lt;joint name="right_wheel_joint" type="revolute"&gt;</a:t>
+            </a:r>
+            <a:br/>
+            <a:r>
+              <a:t>      &lt;parent&gt;base_link&lt;/parent&gt;</a:t>
+            </a:r>
+            <a:br/>
+            <a:r>
+              <a:t>      &lt;child&gt;right_wheel_link&lt;/child&gt;</a:t>
+            </a:r>
+            <a:br/>
+            <a:r>
+              <a:t>      &lt;axis&gt;</a:t>
+            </a:r>
+            <a:br/>
+            <a:r>
+              <a:t>        &lt;xyz&gt;0 1 0&lt;/xyz&gt;</a:t>
             </a:r>
           </a:p>
         </p:txBody>
@@ -13492,7 +13717,7 @@
         </p:nvSpPr>
         <p:spPr>
           <a:xfrm>
-            <a:off x="749808" y="6199632"/>
+            <a:off x="749808" y="6181344"/>
             <a:ext cx="10789920" cy="201168"/>
           </a:xfrm>
           <a:prstGeom prst="rect">
@@ -13518,7 +13743,7 @@
               </a:defRPr>
             </a:pPr>
             <a:r>
-              <a:t>파일 전체 13/21 · 이 슬라이드 다음에 같은 파일의 나머지 줄이 이어집니다.</a:t>
+              <a:t>파일 전체 13/24 · 이 슬라이드 다음에 같은 파일의 나머지 줄이 이어집니다.</a:t>
             </a:r>
           </a:p>
         </p:txBody>
@@ -13575,7 +13800,7 @@
               </a:defRPr>
             </a:pPr>
             <a:r>
-              <a:t>파일을 계속 작성하고 저장한다 (14/21)</a:t>
+              <a:t>파일을 계속 작성하고 저장한다 (14/24)</a:t>
             </a:r>
           </a:p>
         </p:txBody>
@@ -13750,7 +13975,7 @@
               </a:defRPr>
             </a:pPr>
             <a:r>
-              <a:t>현재 단계 16/24    |    현재 폴더 ~/agv_ws    |    현재 터미널</a:t>
+              <a:t>현재 단계 16/27    |    현재 폴더 ~/agv_ws    |    현재 터미널</a:t>
             </a:r>
           </a:p>
         </p:txBody>
@@ -13763,8 +13988,8 @@
         </p:nvSpPr>
         <p:spPr>
           <a:xfrm>
-            <a:off x="658368" y="1682496"/>
-            <a:ext cx="10972800" cy="347472"/>
+            <a:off x="658368" y="1627632"/>
+            <a:ext cx="10972800" cy="256032"/>
           </a:xfrm>
           <a:prstGeom prst="rect">
             <a:avLst/>
@@ -13781,7 +14006,7 @@
               <a:spcAft>
                 <a:spcPts val="0"/>
               </a:spcAft>
-              <a:defRPr sz="1700" b="1">
+              <a:defRPr sz="1500" b="1">
                 <a:solidFill>
                   <a:srgbClr val="122C4E"/>
                 </a:solidFill>
@@ -13802,8 +14027,8 @@
         </p:nvSpPr>
         <p:spPr>
           <a:xfrm>
-            <a:off x="658368" y="2103120"/>
-            <a:ext cx="10972800" cy="493776"/>
+            <a:off x="658368" y="1956816"/>
+            <a:ext cx="10972800" cy="603504"/>
           </a:xfrm>
           <a:prstGeom prst="rect">
             <a:avLst/>
@@ -13847,7 +14072,11 @@
               </a:defRPr>
             </a:pPr>
             <a:r>
-              <a:t>파일 생성/열기: mkdir -p ~/agv_ws/src/agv_gazebo/models/agv    &amp;&amp;    nano ~/agv_ws/src/agv_gazebo/models/agv/model.sdf</a:t>
+              <a:t>파일 생성: mkdir -p ~/agv_ws/src/agv_gazebo/models/agv</a:t>
+            </a:r>
+            <a:br/>
+            <a:r>
+              <a:t>파일 열기: nano ~/agv_ws/src/agv_gazebo/models/agv/model.sdf</a:t>
             </a:r>
           </a:p>
         </p:txBody>
@@ -13860,8 +14089,8 @@
         </p:nvSpPr>
         <p:spPr>
           <a:xfrm>
-            <a:off x="658368" y="2761488"/>
-            <a:ext cx="10972800" cy="3383280"/>
+            <a:off x="658368" y="2706624"/>
+            <a:ext cx="10972800" cy="3364992"/>
           </a:xfrm>
           <a:prstGeom prst="rect">
             <a:avLst/>
@@ -13905,31 +14134,27 @@
               </a:defRPr>
             </a:pPr>
             <a:r>
-              <a:t>        &lt;geometry&gt;</a:t>
-            </a:r>
-            <a:br/>
-            <a:r>
-              <a:t>          &lt;sphere&gt;</a:t>
-            </a:r>
-            <a:br/>
-            <a:r>
-              <a:t>            &lt;radius&gt;0.04&lt;/radius&gt;</a:t>
-            </a:r>
-            <a:br/>
-            <a:r>
-              <a:t>          &lt;/sphere&gt;</a:t>
-            </a:r>
-            <a:br/>
-            <a:r>
-              <a:t>        &lt;/geometry&gt;</a:t>
-            </a:r>
-            <a:br/>
-            <a:r>
-              <a:t>      &lt;/collision&gt;</a:t>
-            </a:r>
-            <a:br/>
-            <a:r>
-              <a:t>    &lt;/link&gt;</a:t>
+              <a:t>        &lt;limit&gt;</a:t>
+            </a:r>
+            <a:br/>
+            <a:r>
+              <a:t>          &lt;lower&gt;-1e16&lt;/lower&gt;</a:t>
+            </a:r>
+            <a:br/>
+            <a:r>
+              <a:t>          &lt;upper&gt;1e16&lt;/upper&gt;</a:t>
+            </a:r>
+            <a:br/>
+            <a:r>
+              <a:t>        &lt;/limit&gt;</a:t>
+            </a:r>
+            <a:br/>
+            <a:r>
+              <a:t>      &lt;/axis&gt;</a:t>
+            </a:r>
+            <a:br/>
+            <a:r>
+              <a:t>    &lt;/joint&gt;</a:t>
             </a:r>
             <a:br/>
             <a:r>
@@ -13941,23 +14166,19 @@
             </a:r>
             <a:br/>
             <a:r>
-              <a:t>    &lt;joint name="caster_joint" type="fixed"&gt;</a:t>
-            </a:r>
-            <a:br/>
-            <a:r>
-              <a:t>      &lt;parent&gt;base_link&lt;/parent&gt;</a:t>
-            </a:r>
-            <a:br/>
-            <a:r>
-              <a:t>      &lt;child&gt;caster_link&lt;/child&gt;</a:t>
-            </a:r>
-            <a:br/>
-            <a:r>
-              <a:t>    &lt;/joint&gt;</a:t>
-            </a:r>
-            <a:br/>
-            <a:r>
-              <a:t>    </a:t>
+              <a:t>    &lt;link name="caster_link"&gt;</a:t>
+            </a:r>
+            <a:br/>
+            <a:r>
+              <a:t>      &lt;pose relative_to="base_link"&gt;-0.24 0 -0.12 0 0 0&lt;/pose&gt;</a:t>
+            </a:r>
+            <a:br/>
+            <a:r>
+              <a:t>      &lt;inertial&gt;</a:t>
+            </a:r>
+            <a:br/>
+            <a:r>
+              <a:t>        &lt;mass&gt;0.15&lt;/mass&gt;</a:t>
             </a:r>
           </a:p>
         </p:txBody>
@@ -13970,7 +14191,7 @@
         </p:nvSpPr>
         <p:spPr>
           <a:xfrm>
-            <a:off x="749808" y="6199632"/>
+            <a:off x="749808" y="6181344"/>
             <a:ext cx="10789920" cy="201168"/>
           </a:xfrm>
           <a:prstGeom prst="rect">
@@ -13996,7 +14217,7 @@
               </a:defRPr>
             </a:pPr>
             <a:r>
-              <a:t>파일 전체 14/21 · 이 슬라이드 다음에 같은 파일의 나머지 줄이 이어집니다.</a:t>
+              <a:t>파일 전체 14/24 · 이 슬라이드 다음에 같은 파일의 나머지 줄이 이어집니다.</a:t>
             </a:r>
           </a:p>
         </p:txBody>
@@ -14053,7 +14274,7 @@
               </a:defRPr>
             </a:pPr>
             <a:r>
-              <a:t>파일을 계속 작성하고 저장한다 (15/21)</a:t>
+              <a:t>파일을 계속 작성하고 저장한다 (15/24)</a:t>
             </a:r>
           </a:p>
         </p:txBody>
@@ -14228,7 +14449,7 @@
               </a:defRPr>
             </a:pPr>
             <a:r>
-              <a:t>현재 단계 17/24    |    현재 폴더 ~/agv_ws    |    현재 터미널</a:t>
+              <a:t>현재 단계 17/27    |    현재 폴더 ~/agv_ws    |    현재 터미널</a:t>
             </a:r>
           </a:p>
         </p:txBody>
@@ -14241,8 +14462,8 @@
         </p:nvSpPr>
         <p:spPr>
           <a:xfrm>
-            <a:off x="658368" y="1682496"/>
-            <a:ext cx="10972800" cy="347472"/>
+            <a:off x="658368" y="1627632"/>
+            <a:ext cx="10972800" cy="256032"/>
           </a:xfrm>
           <a:prstGeom prst="rect">
             <a:avLst/>
@@ -14259,7 +14480,7 @@
               <a:spcAft>
                 <a:spcPts val="0"/>
               </a:spcAft>
-              <a:defRPr sz="1700" b="1">
+              <a:defRPr sz="1500" b="1">
                 <a:solidFill>
                   <a:srgbClr val="122C4E"/>
                 </a:solidFill>
@@ -14280,8 +14501,8 @@
         </p:nvSpPr>
         <p:spPr>
           <a:xfrm>
-            <a:off x="658368" y="2103120"/>
-            <a:ext cx="10972800" cy="493776"/>
+            <a:off x="658368" y="1956816"/>
+            <a:ext cx="10972800" cy="603504"/>
           </a:xfrm>
           <a:prstGeom prst="rect">
             <a:avLst/>
@@ -14325,7 +14546,11 @@
               </a:defRPr>
             </a:pPr>
             <a:r>
-              <a:t>파일 생성/열기: mkdir -p ~/agv_ws/src/agv_gazebo/models/agv    &amp;&amp;    nano ~/agv_ws/src/agv_gazebo/models/agv/model.sdf</a:t>
+              <a:t>파일 생성: mkdir -p ~/agv_ws/src/agv_gazebo/models/agv</a:t>
+            </a:r>
+            <a:br/>
+            <a:r>
+              <a:t>파일 열기: nano ~/agv_ws/src/agv_gazebo/models/agv/model.sdf</a:t>
             </a:r>
           </a:p>
         </p:txBody>
@@ -14338,8 +14563,8 @@
         </p:nvSpPr>
         <p:spPr>
           <a:xfrm>
-            <a:off x="658368" y="2761488"/>
-            <a:ext cx="10972800" cy="3383280"/>
+            <a:off x="658368" y="2706624"/>
+            <a:ext cx="10972800" cy="3364992"/>
           </a:xfrm>
           <a:prstGeom prst="rect">
             <a:avLst/>
@@ -14383,19 +14608,31 @@
               </a:defRPr>
             </a:pPr>
             <a:r>
-              <a:t>    </a:t>
-            </a:r>
-            <a:br/>
-            <a:r>
-              <a:t>    &lt;link name="lidar_link"&gt;</a:t>
-            </a:r>
-            <a:br/>
-            <a:r>
-              <a:t>      &lt;pose relative_to="base_link"&gt;0.12 0 0.13 0 0 0&lt;/pose&gt;</a:t>
-            </a:r>
-            <a:br/>
-            <a:r>
-              <a:t>      &lt;visual name="housing"&gt;</a:t>
+              <a:t>        &lt;inertia&gt;</a:t>
+            </a:r>
+            <a:br/>
+            <a:r>
+              <a:t>          &lt;ixx&gt;0.0001&lt;/ixx&gt;</a:t>
+            </a:r>
+            <a:br/>
+            <a:r>
+              <a:t>          &lt;iyy&gt;0.0001&lt;/iyy&gt;</a:t>
+            </a:r>
+            <a:br/>
+            <a:r>
+              <a:t>          &lt;izz&gt;0.0001&lt;/izz&gt;</a:t>
+            </a:r>
+            <a:br/>
+            <a:r>
+              <a:t>        &lt;/inertia&gt;</a:t>
+            </a:r>
+            <a:br/>
+            <a:r>
+              <a:t>      &lt;/inertial&gt;</a:t>
+            </a:r>
+            <a:br/>
+            <a:r>
+              <a:t>      &lt;visual name="caster"&gt;</a:t>
             </a:r>
             <a:br/>
             <a:r>
@@ -14403,39 +14640,19 @@
             </a:r>
             <a:br/>
             <a:r>
-              <a:t>          &lt;cylinder&gt;</a:t>
-            </a:r>
-            <a:br/>
-            <a:r>
-              <a:t>            &lt;radius&gt;0.045&lt;/radius&gt;</a:t>
-            </a:r>
-            <a:br/>
-            <a:r>
-              <a:t>            &lt;length&gt;0.05&lt;/length&gt;</a:t>
-            </a:r>
-            <a:br/>
-            <a:r>
-              <a:t>          &lt;/cylinder&gt;</a:t>
+              <a:t>          &lt;sphere&gt;</a:t>
+            </a:r>
+            <a:br/>
+            <a:r>
+              <a:t>            &lt;radius&gt;0.04&lt;/radius&gt;</a:t>
+            </a:r>
+            <a:br/>
+            <a:r>
+              <a:t>          &lt;/sphere&gt;</a:t>
             </a:r>
             <a:br/>
             <a:r>
               <a:t>        &lt;/geometry&gt;</a:t>
-            </a:r>
-            <a:br/>
-            <a:r>
-              <a:t>      &lt;/visual&gt;</a:t>
-            </a:r>
-            <a:br/>
-            <a:r>
-              <a:t>      &lt;sensor name="lidar" type="gpu_lidar"&gt;</a:t>
-            </a:r>
-            <a:br/>
-            <a:r>
-              <a:t>        &lt;topic&gt;/scan&lt;/topic&gt;</a:t>
-            </a:r>
-            <a:br/>
-            <a:r>
-              <a:t>        &lt;always_on&gt;true&lt;/always_on&gt;</a:t>
             </a:r>
           </a:p>
         </p:txBody>
@@ -14448,7 +14665,7 @@
         </p:nvSpPr>
         <p:spPr>
           <a:xfrm>
-            <a:off x="749808" y="6199632"/>
+            <a:off x="749808" y="6181344"/>
             <a:ext cx="10789920" cy="201168"/>
           </a:xfrm>
           <a:prstGeom prst="rect">
@@ -14474,7 +14691,7 @@
               </a:defRPr>
             </a:pPr>
             <a:r>
-              <a:t>파일 전체 15/21 · 이 슬라이드 다음에 같은 파일의 나머지 줄이 이어집니다.</a:t>
+              <a:t>파일 전체 15/24 · 이 슬라이드 다음에 같은 파일의 나머지 줄이 이어집니다.</a:t>
             </a:r>
           </a:p>
         </p:txBody>
@@ -14531,7 +14748,7 @@
               </a:defRPr>
             </a:pPr>
             <a:r>
-              <a:t>파일을 계속 작성하고 저장한다 (16/21)</a:t>
+              <a:t>파일을 계속 작성하고 저장한다 (16/24)</a:t>
             </a:r>
           </a:p>
         </p:txBody>
@@ -14706,7 +14923,7 @@
               </a:defRPr>
             </a:pPr>
             <a:r>
-              <a:t>현재 단계 18/24    |    현재 폴더 ~/agv_ws    |    현재 터미널</a:t>
+              <a:t>현재 단계 18/27    |    현재 폴더 ~/agv_ws    |    현재 터미널</a:t>
             </a:r>
           </a:p>
         </p:txBody>
@@ -14719,8 +14936,8 @@
         </p:nvSpPr>
         <p:spPr>
           <a:xfrm>
-            <a:off x="658368" y="1682496"/>
-            <a:ext cx="10972800" cy="347472"/>
+            <a:off x="658368" y="1627632"/>
+            <a:ext cx="10972800" cy="256032"/>
           </a:xfrm>
           <a:prstGeom prst="rect">
             <a:avLst/>
@@ -14737,7 +14954,7 @@
               <a:spcAft>
                 <a:spcPts val="0"/>
               </a:spcAft>
-              <a:defRPr sz="1700" b="1">
+              <a:defRPr sz="1500" b="1">
                 <a:solidFill>
                   <a:srgbClr val="122C4E"/>
                 </a:solidFill>
@@ -14758,8 +14975,8 @@
         </p:nvSpPr>
         <p:spPr>
           <a:xfrm>
-            <a:off x="658368" y="2103120"/>
-            <a:ext cx="10972800" cy="493776"/>
+            <a:off x="658368" y="1956816"/>
+            <a:ext cx="10972800" cy="603504"/>
           </a:xfrm>
           <a:prstGeom prst="rect">
             <a:avLst/>
@@ -14803,7 +15020,11 @@
               </a:defRPr>
             </a:pPr>
             <a:r>
-              <a:t>파일 생성/열기: mkdir -p ~/agv_ws/src/agv_gazebo/models/agv    &amp;&amp;    nano ~/agv_ws/src/agv_gazebo/models/agv/model.sdf</a:t>
+              <a:t>파일 생성: mkdir -p ~/agv_ws/src/agv_gazebo/models/agv</a:t>
+            </a:r>
+            <a:br/>
+            <a:r>
+              <a:t>파일 열기: nano ~/agv_ws/src/agv_gazebo/models/agv/model.sdf</a:t>
             </a:r>
           </a:p>
         </p:txBody>
@@ -14816,8 +15037,8 @@
         </p:nvSpPr>
         <p:spPr>
           <a:xfrm>
-            <a:off x="658368" y="2761488"/>
-            <a:ext cx="10972800" cy="3383280"/>
+            <a:off x="658368" y="2706624"/>
+            <a:ext cx="10972800" cy="3364992"/>
           </a:xfrm>
           <a:prstGeom prst="rect">
             <a:avLst/>
@@ -14861,59 +15082,51 @@
               </a:defRPr>
             </a:pPr>
             <a:r>
-              <a:t>        &lt;update_rate&gt;10&lt;/update_rate&gt;</a:t>
-            </a:r>
-            <a:br/>
-            <a:r>
-              <a:t>        &lt;visualize&gt;false&lt;/visualize&gt;</a:t>
-            </a:r>
-            <a:br/>
-            <a:r>
-              <a:t>        &lt;lidar&gt;</a:t>
-            </a:r>
-            <a:br/>
-            <a:r>
-              <a:t>          &lt;scan&gt;</a:t>
-            </a:r>
-            <a:br/>
-            <a:r>
-              <a:t>            &lt;horizontal&gt;</a:t>
-            </a:r>
-            <a:br/>
-            <a:r>
-              <a:t>              &lt;samples&gt;720&lt;/samples&gt;</a:t>
-            </a:r>
-            <a:br/>
-            <a:r>
-              <a:t>              &lt;resolution&gt;1&lt;/resolution&gt;</a:t>
-            </a:r>
-            <a:br/>
-            <a:r>
-              <a:t>              &lt;min_angle&gt;-3.14159&lt;/min_angle&gt;</a:t>
-            </a:r>
-            <a:br/>
-            <a:r>
-              <a:t>              &lt;max_angle&gt;3.14159&lt;/max_angle&gt;</a:t>
-            </a:r>
-            <a:br/>
-            <a:r>
-              <a:t>            &lt;/horizontal&gt;</a:t>
-            </a:r>
-            <a:br/>
-            <a:r>
-              <a:t>          &lt;/scan&gt;</a:t>
-            </a:r>
-            <a:br/>
-            <a:r>
-              <a:t>          &lt;range&gt;</a:t>
-            </a:r>
-            <a:br/>
-            <a:r>
-              <a:t>            &lt;min&gt;0.12&lt;/min&gt;</a:t>
-            </a:r>
-            <a:br/>
-            <a:r>
-              <a:t>            &lt;max&gt;12.0&lt;/max&gt;</a:t>
+              <a:t>      &lt;/visual&gt;</a:t>
+            </a:r>
+            <a:br/>
+            <a:r>
+              <a:t>      &lt;collision name="caster_collision"&gt;</a:t>
+            </a:r>
+            <a:br/>
+            <a:r>
+              <a:t>        &lt;geometry&gt;</a:t>
+            </a:r>
+            <a:br/>
+            <a:r>
+              <a:t>          &lt;sphere&gt;</a:t>
+            </a:r>
+            <a:br/>
+            <a:r>
+              <a:t>            &lt;radius&gt;0.04&lt;/radius&gt;</a:t>
+            </a:r>
+            <a:br/>
+            <a:r>
+              <a:t>          &lt;/sphere&gt;</a:t>
+            </a:r>
+            <a:br/>
+            <a:r>
+              <a:t>        &lt;/geometry&gt;</a:t>
+            </a:r>
+            <a:br/>
+            <a:r>
+              <a:t>      &lt;/collision&gt;</a:t>
+            </a:r>
+            <a:br/>
+            <a:r>
+              <a:t>    &lt;/link&gt;</a:t>
+            </a:r>
+            <a:br/>
+            <a:r>
+              <a:t>    </a:t>
+            </a:r>
+            <a:br/>
+            <a:r>
+              <a:t>    </a:t>
+            </a:r>
+            <a:br/>
+            <a:r>
+              <a:t>    &lt;joint name="caster_joint" type="fixed"&gt;</a:t>
             </a:r>
           </a:p>
         </p:txBody>
@@ -14926,7 +15139,7 @@
         </p:nvSpPr>
         <p:spPr>
           <a:xfrm>
-            <a:off x="749808" y="6199632"/>
+            <a:off x="749808" y="6181344"/>
             <a:ext cx="10789920" cy="201168"/>
           </a:xfrm>
           <a:prstGeom prst="rect">
@@ -14952,7 +15165,7 @@
               </a:defRPr>
             </a:pPr>
             <a:r>
-              <a:t>파일 전체 16/21 · 이 슬라이드 다음에 같은 파일의 나머지 줄이 이어집니다.</a:t>
+              <a:t>파일 전체 16/24 · 이 슬라이드 다음에 같은 파일의 나머지 줄이 이어집니다.</a:t>
             </a:r>
           </a:p>
         </p:txBody>
@@ -15009,7 +15222,7 @@
               </a:defRPr>
             </a:pPr>
             <a:r>
-              <a:t>파일을 계속 작성하고 저장한다 (17/21)</a:t>
+              <a:t>파일을 계속 작성하고 저장한다 (17/24)</a:t>
             </a:r>
           </a:p>
         </p:txBody>
@@ -15184,7 +15397,7 @@
               </a:defRPr>
             </a:pPr>
             <a:r>
-              <a:t>현재 단계 19/24    |    현재 폴더 ~/agv_ws    |    현재 터미널</a:t>
+              <a:t>현재 단계 19/27    |    현재 폴더 ~/agv_ws    |    현재 터미널</a:t>
             </a:r>
           </a:p>
         </p:txBody>
@@ -15197,8 +15410,8 @@
         </p:nvSpPr>
         <p:spPr>
           <a:xfrm>
-            <a:off x="658368" y="1682496"/>
-            <a:ext cx="10972800" cy="347472"/>
+            <a:off x="658368" y="1627632"/>
+            <a:ext cx="10972800" cy="256032"/>
           </a:xfrm>
           <a:prstGeom prst="rect">
             <a:avLst/>
@@ -15215,7 +15428,7 @@
               <a:spcAft>
                 <a:spcPts val="0"/>
               </a:spcAft>
-              <a:defRPr sz="1700" b="1">
+              <a:defRPr sz="1500" b="1">
                 <a:solidFill>
                   <a:srgbClr val="122C4E"/>
                 </a:solidFill>
@@ -15236,8 +15449,8 @@
         </p:nvSpPr>
         <p:spPr>
           <a:xfrm>
-            <a:off x="658368" y="2103120"/>
-            <a:ext cx="10972800" cy="493776"/>
+            <a:off x="658368" y="1956816"/>
+            <a:ext cx="10972800" cy="603504"/>
           </a:xfrm>
           <a:prstGeom prst="rect">
             <a:avLst/>
@@ -15281,7 +15494,11 @@
               </a:defRPr>
             </a:pPr>
             <a:r>
-              <a:t>파일 생성/열기: mkdir -p ~/agv_ws/src/agv_gazebo/models/agv    &amp;&amp;    nano ~/agv_ws/src/agv_gazebo/models/agv/model.sdf</a:t>
+              <a:t>파일 생성: mkdir -p ~/agv_ws/src/agv_gazebo/models/agv</a:t>
+            </a:r>
+            <a:br/>
+            <a:r>
+              <a:t>파일 열기: nano ~/agv_ws/src/agv_gazebo/models/agv/model.sdf</a:t>
             </a:r>
           </a:p>
         </p:txBody>
@@ -15294,8 +15511,8 @@
         </p:nvSpPr>
         <p:spPr>
           <a:xfrm>
-            <a:off x="658368" y="2761488"/>
-            <a:ext cx="10972800" cy="3383280"/>
+            <a:off x="658368" y="2706624"/>
+            <a:ext cx="10972800" cy="3364992"/>
           </a:xfrm>
           <a:prstGeom prst="rect">
             <a:avLst/>
@@ -15339,23 +15556,15 @@
               </a:defRPr>
             </a:pPr>
             <a:r>
-              <a:t>            &lt;resolution&gt;0.01&lt;/resolution&gt;</a:t>
-            </a:r>
-            <a:br/>
-            <a:r>
-              <a:t>          &lt;/range&gt;</a:t>
-            </a:r>
-            <a:br/>
-            <a:r>
-              <a:t>        &lt;/lidar&gt;</a:t>
-            </a:r>
-            <a:br/>
-            <a:r>
-              <a:t>      &lt;/sensor&gt;</a:t>
-            </a:r>
-            <a:br/>
-            <a:r>
-              <a:t>    &lt;/link&gt;</a:t>
+              <a:t>      &lt;parent&gt;base_link&lt;/parent&gt;</a:t>
+            </a:r>
+            <a:br/>
+            <a:r>
+              <a:t>      &lt;child&gt;caster_link&lt;/child&gt;</a:t>
+            </a:r>
+            <a:br/>
+            <a:r>
+              <a:t>    &lt;/joint&gt;</a:t>
             </a:r>
             <a:br/>
             <a:r>
@@ -15367,31 +15576,31 @@
             </a:r>
             <a:br/>
             <a:r>
-              <a:t>    &lt;joint name="lidar_joint" type="fixed"&gt;</a:t>
-            </a:r>
-            <a:br/>
-            <a:r>
-              <a:t>      &lt;parent&gt;base_link&lt;/parent&gt;</a:t>
-            </a:r>
-            <a:br/>
-            <a:r>
-              <a:t>      &lt;child&gt;lidar_link&lt;/child&gt;</a:t>
-            </a:r>
-            <a:br/>
-            <a:r>
-              <a:t>    &lt;/joint&gt;</a:t>
-            </a:r>
-            <a:br/>
-            <a:r>
-              <a:t>    </a:t>
-            </a:r>
-            <a:br/>
-            <a:r>
-              <a:t>    </a:t>
-            </a:r>
-            <a:br/>
-            <a:r>
-              <a:t>    &lt;link name="camera_link"&gt;</a:t>
+              <a:t>    &lt;link name="lidar_link"&gt;</a:t>
+            </a:r>
+            <a:br/>
+            <a:r>
+              <a:t>      &lt;pose relative_to="base_link"&gt;0.12 0 0.13 0 0 0&lt;/pose&gt;</a:t>
+            </a:r>
+            <a:br/>
+            <a:r>
+              <a:t>      &lt;visual name="housing"&gt;</a:t>
+            </a:r>
+            <a:br/>
+            <a:r>
+              <a:t>        &lt;geometry&gt;</a:t>
+            </a:r>
+            <a:br/>
+            <a:r>
+              <a:t>          &lt;cylinder&gt;</a:t>
+            </a:r>
+            <a:br/>
+            <a:r>
+              <a:t>            &lt;radius&gt;0.045&lt;/radius&gt;</a:t>
+            </a:r>
+            <a:br/>
+            <a:r>
+              <a:t>            &lt;length&gt;0.05&lt;/length&gt;</a:t>
             </a:r>
           </a:p>
         </p:txBody>
@@ -15404,7 +15613,7 @@
         </p:nvSpPr>
         <p:spPr>
           <a:xfrm>
-            <a:off x="749808" y="6199632"/>
+            <a:off x="749808" y="6181344"/>
             <a:ext cx="10789920" cy="201168"/>
           </a:xfrm>
           <a:prstGeom prst="rect">
@@ -15430,7 +15639,7 @@
               </a:defRPr>
             </a:pPr>
             <a:r>
-              <a:t>파일 전체 17/21 · 이 슬라이드 다음에 같은 파일의 나머지 줄이 이어집니다.</a:t>
+              <a:t>파일 전체 17/24 · 이 슬라이드 다음에 같은 파일의 나머지 줄이 이어집니다.</a:t>
             </a:r>
           </a:p>
         </p:txBody>
@@ -15487,7 +15696,7 @@
               </a:defRPr>
             </a:pPr>
             <a:r>
-              <a:t>파일을 계속 작성하고 저장한다 (18/21)</a:t>
+              <a:t>파일을 계속 작성하고 저장한다 (18/24)</a:t>
             </a:r>
           </a:p>
         </p:txBody>
@@ -15662,7 +15871,7 @@
               </a:defRPr>
             </a:pPr>
             <a:r>
-              <a:t>현재 단계 20/24    |    현재 폴더 ~/agv_ws    |    현재 터미널</a:t>
+              <a:t>현재 단계 20/27    |    현재 폴더 ~/agv_ws    |    현재 터미널</a:t>
             </a:r>
           </a:p>
         </p:txBody>
@@ -15675,8 +15884,8 @@
         </p:nvSpPr>
         <p:spPr>
           <a:xfrm>
-            <a:off x="658368" y="1682496"/>
-            <a:ext cx="10972800" cy="347472"/>
+            <a:off x="658368" y="1627632"/>
+            <a:ext cx="10972800" cy="256032"/>
           </a:xfrm>
           <a:prstGeom prst="rect">
             <a:avLst/>
@@ -15693,7 +15902,7 @@
               <a:spcAft>
                 <a:spcPts val="0"/>
               </a:spcAft>
-              <a:defRPr sz="1700" b="1">
+              <a:defRPr sz="1500" b="1">
                 <a:solidFill>
                   <a:srgbClr val="122C4E"/>
                 </a:solidFill>
@@ -15714,8 +15923,8 @@
         </p:nvSpPr>
         <p:spPr>
           <a:xfrm>
-            <a:off x="658368" y="2103120"/>
-            <a:ext cx="10972800" cy="493776"/>
+            <a:off x="658368" y="1956816"/>
+            <a:ext cx="10972800" cy="603504"/>
           </a:xfrm>
           <a:prstGeom prst="rect">
             <a:avLst/>
@@ -15759,7 +15968,11 @@
               </a:defRPr>
             </a:pPr>
             <a:r>
-              <a:t>파일 생성/열기: mkdir -p ~/agv_ws/src/agv_gazebo/models/agv    &amp;&amp;    nano ~/agv_ws/src/agv_gazebo/models/agv/model.sdf</a:t>
+              <a:t>파일 생성: mkdir -p ~/agv_ws/src/agv_gazebo/models/agv</a:t>
+            </a:r>
+            <a:br/>
+            <a:r>
+              <a:t>파일 열기: nano ~/agv_ws/src/agv_gazebo/models/agv/model.sdf</a:t>
             </a:r>
           </a:p>
         </p:txBody>
@@ -15772,8 +15985,8 @@
         </p:nvSpPr>
         <p:spPr>
           <a:xfrm>
-            <a:off x="658368" y="2761488"/>
-            <a:ext cx="10972800" cy="3383280"/>
+            <a:off x="658368" y="2706624"/>
+            <a:ext cx="10972800" cy="3364992"/>
           </a:xfrm>
           <a:prstGeom prst="rect">
             <a:avLst/>
@@ -15817,27 +16030,7 @@
               </a:defRPr>
             </a:pPr>
             <a:r>
-              <a:t>      &lt;pose relative_to="base_link"&gt;0.30 0 0.10 0 0 0&lt;/pose&gt;</a:t>
-            </a:r>
-            <a:br/>
-            <a:r>
-              <a:t>      &lt;visual name="housing"&gt;</a:t>
-            </a:r>
-            <a:br/>
-            <a:r>
-              <a:t>        &lt;geometry&gt;</a:t>
-            </a:r>
-            <a:br/>
-            <a:r>
-              <a:t>          &lt;box&gt;</a:t>
-            </a:r>
-            <a:br/>
-            <a:r>
-              <a:t>            &lt;size&gt;0.05 0.08 0.05&lt;/size&gt;</a:t>
-            </a:r>
-            <a:br/>
-            <a:r>
-              <a:t>          &lt;/box&gt;</a:t>
+              <a:t>          &lt;/cylinder&gt;</a:t>
             </a:r>
             <a:br/>
             <a:r>
@@ -15849,11 +16042,11 @@
             </a:r>
             <a:br/>
             <a:r>
-              <a:t>      &lt;sensor name="camera" type="camera"&gt;</a:t>
-            </a:r>
-            <a:br/>
-            <a:r>
-              <a:t>        &lt;topic&gt;/camera/image_raw&lt;/topic&gt;</a:t>
+              <a:t>      &lt;sensor name="lidar" type="gpu_lidar"&gt;</a:t>
+            </a:r>
+            <a:br/>
+            <a:r>
+              <a:t>        &lt;topic&gt;/scan&lt;/topic&gt;</a:t>
             </a:r>
             <a:br/>
             <a:r>
@@ -15861,15 +16054,27 @@
             </a:r>
             <a:br/>
             <a:r>
-              <a:t>        &lt;update_rate&gt;15&lt;/update_rate&gt;</a:t>
-            </a:r>
-            <a:br/>
-            <a:r>
-              <a:t>        &lt;camera&gt;</a:t>
-            </a:r>
-            <a:br/>
-            <a:r>
-              <a:t>          &lt;horizontal_fov&gt;1.047&lt;/horizontal_fov&gt;</a:t>
+              <a:t>        &lt;update_rate&gt;10&lt;/update_rate&gt;</a:t>
+            </a:r>
+            <a:br/>
+            <a:r>
+              <a:t>        &lt;visualize&gt;false&lt;/visualize&gt;</a:t>
+            </a:r>
+            <a:br/>
+            <a:r>
+              <a:t>        &lt;lidar&gt;</a:t>
+            </a:r>
+            <a:br/>
+            <a:r>
+              <a:t>          &lt;scan&gt;</a:t>
+            </a:r>
+            <a:br/>
+            <a:r>
+              <a:t>            &lt;horizontal&gt;</a:t>
+            </a:r>
+            <a:br/>
+            <a:r>
+              <a:t>              &lt;samples&gt;720&lt;/samples&gt;</a:t>
             </a:r>
           </a:p>
         </p:txBody>
@@ -15882,7 +16087,7 @@
         </p:nvSpPr>
         <p:spPr>
           <a:xfrm>
-            <a:off x="749808" y="6199632"/>
+            <a:off x="749808" y="6181344"/>
             <a:ext cx="10789920" cy="201168"/>
           </a:xfrm>
           <a:prstGeom prst="rect">
@@ -15908,7 +16113,7 @@
               </a:defRPr>
             </a:pPr>
             <a:r>
-              <a:t>파일 전체 18/21 · 이 슬라이드 다음에 같은 파일의 나머지 줄이 이어집니다.</a:t>
+              <a:t>파일 전체 18/24 · 이 슬라이드 다음에 같은 파일의 나머지 줄이 이어집니다.</a:t>
             </a:r>
           </a:p>
         </p:txBody>
@@ -15965,7 +16170,7 @@
               </a:defRPr>
             </a:pPr>
             <a:r>
-              <a:t>파일을 계속 작성하고 저장한다 (19/21)</a:t>
+              <a:t>파일을 계속 작성하고 저장한다 (19/24)</a:t>
             </a:r>
           </a:p>
         </p:txBody>
@@ -16140,7 +16345,7 @@
               </a:defRPr>
             </a:pPr>
             <a:r>
-              <a:t>현재 단계 21/24    |    현재 폴더 ~/agv_ws    |    현재 터미널</a:t>
+              <a:t>현재 단계 21/27    |    현재 폴더 ~/agv_ws    |    현재 터미널</a:t>
             </a:r>
           </a:p>
         </p:txBody>
@@ -16153,8 +16358,8 @@
         </p:nvSpPr>
         <p:spPr>
           <a:xfrm>
-            <a:off x="658368" y="1682496"/>
-            <a:ext cx="10972800" cy="347472"/>
+            <a:off x="658368" y="1627632"/>
+            <a:ext cx="10972800" cy="256032"/>
           </a:xfrm>
           <a:prstGeom prst="rect">
             <a:avLst/>
@@ -16171,7 +16376,7 @@
               <a:spcAft>
                 <a:spcPts val="0"/>
               </a:spcAft>
-              <a:defRPr sz="1700" b="1">
+              <a:defRPr sz="1500" b="1">
                 <a:solidFill>
                   <a:srgbClr val="122C4E"/>
                 </a:solidFill>
@@ -16192,8 +16397,8 @@
         </p:nvSpPr>
         <p:spPr>
           <a:xfrm>
-            <a:off x="658368" y="2103120"/>
-            <a:ext cx="10972800" cy="493776"/>
+            <a:off x="658368" y="1956816"/>
+            <a:ext cx="10972800" cy="603504"/>
           </a:xfrm>
           <a:prstGeom prst="rect">
             <a:avLst/>
@@ -16237,7 +16442,11 @@
               </a:defRPr>
             </a:pPr>
             <a:r>
-              <a:t>파일 생성/열기: mkdir -p ~/agv_ws/src/agv_gazebo/models/agv    &amp;&amp;    nano ~/agv_ws/src/agv_gazebo/models/agv/model.sdf</a:t>
+              <a:t>파일 생성: mkdir -p ~/agv_ws/src/agv_gazebo/models/agv</a:t>
+            </a:r>
+            <a:br/>
+            <a:r>
+              <a:t>파일 열기: nano ~/agv_ws/src/agv_gazebo/models/agv/model.sdf</a:t>
             </a:r>
           </a:p>
         </p:txBody>
@@ -16250,8 +16459,8 @@
         </p:nvSpPr>
         <p:spPr>
           <a:xfrm>
-            <a:off x="658368" y="2761488"/>
-            <a:ext cx="10972800" cy="3383280"/>
+            <a:off x="658368" y="2706624"/>
+            <a:ext cx="10972800" cy="3364992"/>
           </a:xfrm>
           <a:prstGeom prst="rect">
             <a:avLst/>
@@ -16295,59 +16504,51 @@
               </a:defRPr>
             </a:pPr>
             <a:r>
-              <a:t>          &lt;image&gt;</a:t>
-            </a:r>
-            <a:br/>
-            <a:r>
-              <a:t>            &lt;width&gt;640&lt;/width&gt;</a:t>
-            </a:r>
-            <a:br/>
-            <a:r>
-              <a:t>            &lt;height&gt;480&lt;/height&gt;</a:t>
-            </a:r>
-            <a:br/>
-            <a:r>
-              <a:t>            &lt;format&gt;R8G8B8&lt;/format&gt;</a:t>
-            </a:r>
-            <a:br/>
-            <a:r>
-              <a:t>          &lt;/image&gt;</a:t>
-            </a:r>
-            <a:br/>
-            <a:r>
-              <a:t>          &lt;clip&gt;</a:t>
-            </a:r>
-            <a:br/>
-            <a:r>
-              <a:t>            &lt;near&gt;0.1&lt;/near&gt;</a:t>
-            </a:r>
-            <a:br/>
-            <a:r>
-              <a:t>            &lt;far&gt;20&lt;/far&gt;</a:t>
-            </a:r>
-            <a:br/>
-            <a:r>
-              <a:t>          &lt;/clip&gt;</a:t>
-            </a:r>
-            <a:br/>
-            <a:r>
-              <a:t>        &lt;/camera&gt;</a:t>
+              <a:t>              &lt;resolution&gt;1&lt;/resolution&gt;</a:t>
+            </a:r>
+            <a:br/>
+            <a:r>
+              <a:t>              &lt;min_angle&gt;-3.14159&lt;/min_angle&gt;</a:t>
+            </a:r>
+            <a:br/>
+            <a:r>
+              <a:t>              &lt;max_angle&gt;3.14159&lt;/max_angle&gt;</a:t>
+            </a:r>
+            <a:br/>
+            <a:r>
+              <a:t>            &lt;/horizontal&gt;</a:t>
+            </a:r>
+            <a:br/>
+            <a:r>
+              <a:t>          &lt;/scan&gt;</a:t>
+            </a:r>
+            <a:br/>
+            <a:r>
+              <a:t>          &lt;range&gt;</a:t>
+            </a:r>
+            <a:br/>
+            <a:r>
+              <a:t>            &lt;min&gt;0.12&lt;/min&gt;</a:t>
+            </a:r>
+            <a:br/>
+            <a:r>
+              <a:t>            &lt;max&gt;12.0&lt;/max&gt;</a:t>
+            </a:r>
+            <a:br/>
+            <a:r>
+              <a:t>            &lt;resolution&gt;0.01&lt;/resolution&gt;</a:t>
+            </a:r>
+            <a:br/>
+            <a:r>
+              <a:t>          &lt;/range&gt;</a:t>
+            </a:r>
+            <a:br/>
+            <a:r>
+              <a:t>        &lt;/lidar&gt;</a:t>
             </a:r>
             <a:br/>
             <a:r>
               <a:t>      &lt;/sensor&gt;</a:t>
-            </a:r>
-            <a:br/>
-            <a:r>
-              <a:t>    &lt;/link&gt;</a:t>
-            </a:r>
-            <a:br/>
-            <a:r>
-              <a:t>    </a:t>
-            </a:r>
-            <a:br/>
-            <a:r>
-              <a:t>    </a:t>
             </a:r>
           </a:p>
         </p:txBody>
@@ -16360,7 +16561,7 @@
         </p:nvSpPr>
         <p:spPr>
           <a:xfrm>
-            <a:off x="749808" y="6199632"/>
+            <a:off x="749808" y="6181344"/>
             <a:ext cx="10789920" cy="201168"/>
           </a:xfrm>
           <a:prstGeom prst="rect">
@@ -16386,7 +16587,7 @@
               </a:defRPr>
             </a:pPr>
             <a:r>
-              <a:t>파일 전체 19/21 · 이 슬라이드 다음에 같은 파일의 나머지 줄이 이어집니다.</a:t>
+              <a:t>파일 전체 19/24 · 이 슬라이드 다음에 같은 파일의 나머지 줄이 이어집니다.</a:t>
             </a:r>
           </a:p>
         </p:txBody>
@@ -16443,7 +16644,7 @@
               </a:defRPr>
             </a:pPr>
             <a:r>
-              <a:t>파일을 계속 작성하고 저장한다 (20/21)</a:t>
+              <a:t>파일을 계속 작성하고 저장한다 (20/24)</a:t>
             </a:r>
           </a:p>
         </p:txBody>
@@ -16618,7 +16819,7 @@
               </a:defRPr>
             </a:pPr>
             <a:r>
-              <a:t>현재 단계 22/24    |    현재 폴더 ~/agv_ws    |    현재 터미널</a:t>
+              <a:t>현재 단계 22/27    |    현재 폴더 ~/agv_ws    |    현재 터미널</a:t>
             </a:r>
           </a:p>
         </p:txBody>
@@ -16631,8 +16832,8 @@
         </p:nvSpPr>
         <p:spPr>
           <a:xfrm>
-            <a:off x="658368" y="1682496"/>
-            <a:ext cx="10972800" cy="347472"/>
+            <a:off x="658368" y="1627632"/>
+            <a:ext cx="10972800" cy="256032"/>
           </a:xfrm>
           <a:prstGeom prst="rect">
             <a:avLst/>
@@ -16649,7 +16850,7 @@
               <a:spcAft>
                 <a:spcPts val="0"/>
               </a:spcAft>
-              <a:defRPr sz="1700" b="1">
+              <a:defRPr sz="1500" b="1">
                 <a:solidFill>
                   <a:srgbClr val="122C4E"/>
                 </a:solidFill>
@@ -16670,8 +16871,8 @@
         </p:nvSpPr>
         <p:spPr>
           <a:xfrm>
-            <a:off x="658368" y="2103120"/>
-            <a:ext cx="10972800" cy="493776"/>
+            <a:off x="658368" y="1956816"/>
+            <a:ext cx="10972800" cy="603504"/>
           </a:xfrm>
           <a:prstGeom prst="rect">
             <a:avLst/>
@@ -16715,7 +16916,11 @@
               </a:defRPr>
             </a:pPr>
             <a:r>
-              <a:t>파일 생성/열기: mkdir -p ~/agv_ws/src/agv_gazebo/models/agv    &amp;&amp;    nano ~/agv_ws/src/agv_gazebo/models/agv/model.sdf</a:t>
+              <a:t>파일 생성: mkdir -p ~/agv_ws/src/agv_gazebo/models/agv</a:t>
+            </a:r>
+            <a:br/>
+            <a:r>
+              <a:t>파일 열기: nano ~/agv_ws/src/agv_gazebo/models/agv/model.sdf</a:t>
             </a:r>
           </a:p>
         </p:txBody>
@@ -16728,8 +16933,8 @@
         </p:nvSpPr>
         <p:spPr>
           <a:xfrm>
-            <a:off x="658368" y="2761488"/>
-            <a:ext cx="10972800" cy="3383280"/>
+            <a:off x="658368" y="2706624"/>
+            <a:ext cx="10972800" cy="3364992"/>
           </a:xfrm>
           <a:prstGeom prst="rect">
             <a:avLst/>
@@ -16773,7 +16978,19 @@
               </a:defRPr>
             </a:pPr>
             <a:r>
-              <a:t>    &lt;joint name="camera_joint" type="fixed"&gt;</a:t>
+              <a:t>    &lt;/link&gt;</a:t>
+            </a:r>
+            <a:br/>
+            <a:r>
+              <a:t>    </a:t>
+            </a:r>
+            <a:br/>
+            <a:r>
+              <a:t>    </a:t>
+            </a:r>
+            <a:br/>
+            <a:r>
+              <a:t>    &lt;joint name="lidar_joint" type="fixed"&gt;</a:t>
             </a:r>
             <a:br/>
             <a:r>
@@ -16781,7 +16998,7 @@
             </a:r>
             <a:br/>
             <a:r>
-              <a:t>      &lt;child&gt;camera_link&lt;/child&gt;</a:t>
+              <a:t>      &lt;child&gt;lidar_link&lt;/child&gt;</a:t>
             </a:r>
             <a:br/>
             <a:r>
@@ -16797,35 +17014,15 @@
             </a:r>
             <a:br/>
             <a:r>
-              <a:t>    &lt;plugin filename="gz-sim-diff-drive-system" name="gz::sim::systems::DiffDrive"&gt;</a:t>
-            </a:r>
-            <a:br/>
-            <a:r>
-              <a:t>      &lt;left_joint&gt;left_wheel_joint&lt;/left_joint&gt;</a:t>
-            </a:r>
-            <a:br/>
-            <a:r>
-              <a:t>      &lt;right_joint&gt;right_wheel_joint&lt;/right_joint&gt;</a:t>
-            </a:r>
-            <a:br/>
-            <a:r>
-              <a:t>      &lt;wheel_separation&gt;0.38&lt;/wheel_separation&gt;</a:t>
-            </a:r>
-            <a:br/>
-            <a:r>
-              <a:t>      &lt;wheel_radius&gt;0.08&lt;/wheel_radius&gt;</a:t>
-            </a:r>
-            <a:br/>
-            <a:r>
-              <a:t>      &lt;topic&gt;/cmd_vel&lt;/topic&gt;</a:t>
-            </a:r>
-            <a:br/>
-            <a:r>
-              <a:t>      &lt;odom_topic&gt;/odom&lt;/odom_topic&gt;</a:t>
-            </a:r>
-            <a:br/>
-            <a:r>
-              <a:t>      &lt;frame_id&gt;odom&lt;/frame_id&gt;</a:t>
+              <a:t>    &lt;link name="camera_link"&gt;</a:t>
+            </a:r>
+            <a:br/>
+            <a:r>
+              <a:t>      &lt;pose relative_to="base_link"&gt;0.30 0 0.10 0 0 0&lt;/pose&gt;</a:t>
+            </a:r>
+            <a:br/>
+            <a:r>
+              <a:t>      &lt;visual name="housing"&gt;</a:t>
             </a:r>
           </a:p>
         </p:txBody>
@@ -16838,7 +17035,7 @@
         </p:nvSpPr>
         <p:spPr>
           <a:xfrm>
-            <a:off x="749808" y="6199632"/>
+            <a:off x="749808" y="6181344"/>
             <a:ext cx="10789920" cy="201168"/>
           </a:xfrm>
           <a:prstGeom prst="rect">
@@ -16864,7 +17061,7 @@
               </a:defRPr>
             </a:pPr>
             <a:r>
-              <a:t>파일 전체 20/21 · 이 슬라이드 다음에 같은 파일의 나머지 줄이 이어집니다.</a:t>
+              <a:t>파일 전체 20/24 · 이 슬라이드 다음에 같은 파일의 나머지 줄이 이어집니다.</a:t>
             </a:r>
           </a:p>
         </p:txBody>
@@ -16921,7 +17118,7 @@
               </a:defRPr>
             </a:pPr>
             <a:r>
-              <a:t>파일을 계속 작성하고 저장한다 (21/21)</a:t>
+              <a:t>파일을 계속 작성하고 저장한다 (21/24)</a:t>
             </a:r>
           </a:p>
         </p:txBody>
@@ -17096,7 +17293,7 @@
               </a:defRPr>
             </a:pPr>
             <a:r>
-              <a:t>현재 단계 23/24    |    현재 폴더 ~/agv_ws    |    현재 터미널</a:t>
+              <a:t>현재 단계 23/27    |    현재 폴더 ~/agv_ws    |    현재 터미널</a:t>
             </a:r>
           </a:p>
         </p:txBody>
@@ -17109,8 +17306,8 @@
         </p:nvSpPr>
         <p:spPr>
           <a:xfrm>
-            <a:off x="658368" y="1682496"/>
-            <a:ext cx="10972800" cy="347472"/>
+            <a:off x="658368" y="1627632"/>
+            <a:ext cx="10972800" cy="256032"/>
           </a:xfrm>
           <a:prstGeom prst="rect">
             <a:avLst/>
@@ -17127,7 +17324,7 @@
               <a:spcAft>
                 <a:spcPts val="0"/>
               </a:spcAft>
-              <a:defRPr sz="1700" b="1">
+              <a:defRPr sz="1500" b="1">
                 <a:solidFill>
                   <a:srgbClr val="122C4E"/>
                 </a:solidFill>
@@ -17148,8 +17345,8 @@
         </p:nvSpPr>
         <p:spPr>
           <a:xfrm>
-            <a:off x="658368" y="2103120"/>
-            <a:ext cx="10972800" cy="493776"/>
+            <a:off x="658368" y="1956816"/>
+            <a:ext cx="10972800" cy="603504"/>
           </a:xfrm>
           <a:prstGeom prst="rect">
             <a:avLst/>
@@ -17193,7 +17390,11 @@
               </a:defRPr>
             </a:pPr>
             <a:r>
-              <a:t>파일 생성/열기: mkdir -p ~/agv_ws/src/agv_gazebo/models/agv    &amp;&amp;    nano ~/agv_ws/src/agv_gazebo/models/agv/model.sdf</a:t>
+              <a:t>파일 생성: mkdir -p ~/agv_ws/src/agv_gazebo/models/agv</a:t>
+            </a:r>
+            <a:br/>
+            <a:r>
+              <a:t>파일 열기: nano ~/agv_ws/src/agv_gazebo/models/agv/model.sdf</a:t>
             </a:r>
           </a:p>
         </p:txBody>
@@ -17206,8 +17407,8 @@
         </p:nvSpPr>
         <p:spPr>
           <a:xfrm>
-            <a:off x="658368" y="2761488"/>
-            <a:ext cx="10972800" cy="3383280"/>
+            <a:off x="658368" y="2706624"/>
+            <a:ext cx="10972800" cy="3364992"/>
           </a:xfrm>
           <a:prstGeom prst="rect">
             <a:avLst/>
@@ -17251,32 +17452,51 @@
               </a:defRPr>
             </a:pPr>
             <a:r>
-              <a:t>      &lt;child_frame_id&gt;base_link&lt;/child_frame_id&gt;</a:t>
-            </a:r>
-            <a:br/>
-            <a:r>
-              <a:t>    &lt;/plugin&gt;</a:t>
-            </a:r>
-            <a:br/>
-            <a:r>
-              <a:t>    </a:t>
-            </a:r>
-            <a:br/>
-            <a:r>
-              <a:t>  </a:t>
-            </a:r>
-            <a:br/>
-            <a:r>
-              <a:t>  &lt;/model&gt;</a:t>
-            </a:r>
-            <a:br/>
-            <a:r>
-              <a:t>  </a:t>
-            </a:r>
-            <a:br/>
-            <a:br/>
-            <a:r>
-              <a:t>&lt;/sdf&gt;</a:t>
+              <a:t>        &lt;geometry&gt;</a:t>
+            </a:r>
+            <a:br/>
+            <a:r>
+              <a:t>          &lt;box&gt;</a:t>
+            </a:r>
+            <a:br/>
+            <a:r>
+              <a:t>            &lt;size&gt;0.05 0.08 0.05&lt;/size&gt;</a:t>
+            </a:r>
+            <a:br/>
+            <a:r>
+              <a:t>          &lt;/box&gt;</a:t>
+            </a:r>
+            <a:br/>
+            <a:r>
+              <a:t>        &lt;/geometry&gt;</a:t>
+            </a:r>
+            <a:br/>
+            <a:r>
+              <a:t>      &lt;/visual&gt;</a:t>
+            </a:r>
+            <a:br/>
+            <a:r>
+              <a:t>      &lt;sensor name="camera" type="camera"&gt;</a:t>
+            </a:r>
+            <a:br/>
+            <a:r>
+              <a:t>        &lt;topic&gt;/camera/image_raw&lt;/topic&gt;</a:t>
+            </a:r>
+            <a:br/>
+            <a:r>
+              <a:t>        &lt;always_on&gt;true&lt;/always_on&gt;</a:t>
+            </a:r>
+            <a:br/>
+            <a:r>
+              <a:t>        &lt;update_rate&gt;15&lt;/update_rate&gt;</a:t>
+            </a:r>
+            <a:br/>
+            <a:r>
+              <a:t>        &lt;camera&gt;</a:t>
+            </a:r>
+            <a:br/>
+            <a:r>
+              <a:t>          &lt;horizontal_fov&gt;1.047&lt;/horizontal_fov&gt;</a:t>
             </a:r>
           </a:p>
         </p:txBody>
@@ -17289,7 +17509,7 @@
         </p:nvSpPr>
         <p:spPr>
           <a:xfrm>
-            <a:off x="749808" y="6199632"/>
+            <a:off x="749808" y="6181344"/>
             <a:ext cx="10789920" cy="201168"/>
           </a:xfrm>
           <a:prstGeom prst="rect">
@@ -17315,7 +17535,7 @@
               </a:defRPr>
             </a:pPr>
             <a:r>
-              <a:t>파일 전체 21/21 · 이 슬라이드 다음에 같은 파일의 나머지 줄이 이어집니다.</a:t>
+              <a:t>파일 전체 21/24 · 이 슬라이드 다음에 같은 파일의 나머지 줄이 이어집니다.</a:t>
             </a:r>
           </a:p>
         </p:txBody>
@@ -17791,7 +18011,7 @@
               </a:defRPr>
             </a:pPr>
             <a:r>
-              <a:t>파일을 새로 만들고 저장한다 (1/3)</a:t>
+              <a:t>파일을 계속 작성하고 저장한다 (22/24)</a:t>
             </a:r>
           </a:p>
         </p:txBody>
@@ -17830,7 +18050,7 @@
               </a:defRPr>
             </a:pPr>
             <a:r>
-              <a:t>~/agv_ws/src/agv_control/agv_control/cmd_test_node.py</a:t>
+              <a:t>~/agv_ws/src/agv_gazebo/models/agv/model.sdf</a:t>
             </a:r>
           </a:p>
         </p:txBody>
@@ -17979,8 +18199,8 @@
         </p:nvSpPr>
         <p:spPr>
           <a:xfrm>
-            <a:off x="658368" y="1682496"/>
-            <a:ext cx="10972800" cy="347472"/>
+            <a:off x="658368" y="1627632"/>
+            <a:ext cx="10972800" cy="256032"/>
           </a:xfrm>
           <a:prstGeom prst="rect">
             <a:avLst/>
@@ -17997,7 +18217,7 @@
               <a:spcAft>
                 <a:spcPts val="0"/>
               </a:spcAft>
-              <a:defRPr sz="1700" b="1">
+              <a:defRPr sz="1500" b="1">
                 <a:solidFill>
                   <a:srgbClr val="122C4E"/>
                 </a:solidFill>
@@ -18018,8 +18238,8 @@
         </p:nvSpPr>
         <p:spPr>
           <a:xfrm>
-            <a:off x="658368" y="2103120"/>
-            <a:ext cx="10972800" cy="493776"/>
+            <a:off x="658368" y="1956816"/>
+            <a:ext cx="10972800" cy="603504"/>
           </a:xfrm>
           <a:prstGeom prst="rect">
             <a:avLst/>
@@ -18063,7 +18283,11 @@
               </a:defRPr>
             </a:pPr>
             <a:r>
-              <a:t>파일 생성/열기: mkdir -p ~/agv_ws/src/agv_control/agv_control    &amp;&amp;    nano ~/agv_ws/src/agv_control/agv_control/cmd_test_node.py</a:t>
+              <a:t>파일 생성: mkdir -p ~/agv_ws/src/agv_gazebo/models/agv</a:t>
+            </a:r>
+            <a:br/>
+            <a:r>
+              <a:t>파일 열기: nano ~/agv_ws/src/agv_gazebo/models/agv/model.sdf</a:t>
             </a:r>
           </a:p>
         </p:txBody>
@@ -18076,8 +18300,8 @@
         </p:nvSpPr>
         <p:spPr>
           <a:xfrm>
-            <a:off x="658368" y="2761488"/>
-            <a:ext cx="10972800" cy="3383280"/>
+            <a:off x="658368" y="2706624"/>
+            <a:ext cx="10972800" cy="3364992"/>
           </a:xfrm>
           <a:prstGeom prst="rect">
             <a:avLst/>
@@ -18121,51 +18345,52 @@
               </a:defRPr>
             </a:pPr>
             <a:r>
-              <a:t>import rclpy</a:t>
-            </a:r>
-            <a:br/>
-            <a:r>
-              <a:t>from rclpy.node import Node</a:t>
-            </a:r>
-            <a:br/>
-            <a:r>
-              <a:t>from geometry_msgs.msg import Twist</a:t>
-            </a:r>
-            <a:br/>
-            <a:br/>
-            <a:r>
-              <a:t>class CmdTestNode(Node):</a:t>
-            </a:r>
-            <a:br/>
-            <a:br/>
-            <a:r>
-              <a:t>    def __init__(self):</a:t>
-            </a:r>
-            <a:br/>
-            <a:r>
-              <a:t>        super().__init__('cmd_test_node')</a:t>
-            </a:r>
-            <a:br/>
-            <a:r>
-              <a:t>        self.declare_parameter('linear_speed', 0.15)</a:t>
-            </a:r>
-            <a:br/>
-            <a:r>
-              <a:t>        self.declare_parameter('angular_speed', 0.0)</a:t>
-            </a:r>
-            <a:br/>
-            <a:r>
-              <a:t>        self.publisher = self.create_publisher(Twist, '/cmd_vel', 10)</a:t>
-            </a:r>
-            <a:br/>
-            <a:r>
-              <a:t>        self.remaining = 30</a:t>
-            </a:r>
-            <a:br/>
-            <a:r>
-              <a:t>        self.create_timer(0.1, self.publish_once)</a:t>
-            </a:r>
-            <a:br/>
+              <a:t>          &lt;image&gt;</a:t>
+            </a:r>
+            <a:br/>
+            <a:r>
+              <a:t>            &lt;width&gt;640&lt;/width&gt;</a:t>
+            </a:r>
+            <a:br/>
+            <a:r>
+              <a:t>            &lt;height&gt;480&lt;/height&gt;</a:t>
+            </a:r>
+            <a:br/>
+            <a:r>
+              <a:t>            &lt;format&gt;R8G8B8&lt;/format&gt;</a:t>
+            </a:r>
+            <a:br/>
+            <a:r>
+              <a:t>          &lt;/image&gt;</a:t>
+            </a:r>
+            <a:br/>
+            <a:r>
+              <a:t>          &lt;clip&gt;</a:t>
+            </a:r>
+            <a:br/>
+            <a:r>
+              <a:t>            &lt;near&gt;0.1&lt;/near&gt;</a:t>
+            </a:r>
+            <a:br/>
+            <a:r>
+              <a:t>            &lt;far&gt;20&lt;/far&gt;</a:t>
+            </a:r>
+            <a:br/>
+            <a:r>
+              <a:t>          &lt;/clip&gt;</a:t>
+            </a:r>
+            <a:br/>
+            <a:r>
+              <a:t>        &lt;/camera&gt;</a:t>
+            </a:r>
+            <a:br/>
+            <a:r>
+              <a:t>      &lt;/sensor&gt;</a:t>
+            </a:r>
+            <a:br/>
+            <a:r>
+              <a:t>    &lt;/link&gt;</a:t>
+            </a:r>
           </a:p>
         </p:txBody>
       </p:sp>
@@ -18177,7 +18402,7 @@
         </p:nvSpPr>
         <p:spPr>
           <a:xfrm>
-            <a:off x="749808" y="6199632"/>
+            <a:off x="749808" y="6181344"/>
             <a:ext cx="10789920" cy="201168"/>
           </a:xfrm>
           <a:prstGeom prst="rect">
@@ -18203,7 +18428,7 @@
               </a:defRPr>
             </a:pPr>
             <a:r>
-              <a:t>파일 전체 1/3 · 이 슬라이드 다음에 같은 파일의 나머지 줄이 이어집니다.</a:t>
+              <a:t>파일 전체 22/24 · 이 슬라이드 다음에 같은 파일의 나머지 줄이 이어집니다.</a:t>
             </a:r>
           </a:p>
         </p:txBody>
@@ -18260,7 +18485,7 @@
               </a:defRPr>
             </a:pPr>
             <a:r>
-              <a:t>파일을 계속 작성하고 저장한다 (2/3)</a:t>
+              <a:t>파일을 계속 작성하고 저장한다 (23/24)</a:t>
             </a:r>
           </a:p>
         </p:txBody>
@@ -18299,7 +18524,7 @@
               </a:defRPr>
             </a:pPr>
             <a:r>
-              <a:t>~/agv_ws/src/agv_control/agv_control/cmd_test_node.py</a:t>
+              <a:t>~/agv_ws/src/agv_gazebo/models/agv/model.sdf</a:t>
             </a:r>
           </a:p>
         </p:txBody>
@@ -18448,8 +18673,8 @@
         </p:nvSpPr>
         <p:spPr>
           <a:xfrm>
-            <a:off x="658368" y="1682496"/>
-            <a:ext cx="10972800" cy="347472"/>
+            <a:off x="658368" y="1627632"/>
+            <a:ext cx="10972800" cy="256032"/>
           </a:xfrm>
           <a:prstGeom prst="rect">
             <a:avLst/>
@@ -18466,7 +18691,7 @@
               <a:spcAft>
                 <a:spcPts val="0"/>
               </a:spcAft>
-              <a:defRPr sz="1700" b="1">
+              <a:defRPr sz="1500" b="1">
                 <a:solidFill>
                   <a:srgbClr val="122C4E"/>
                 </a:solidFill>
@@ -18487,8 +18712,8 @@
         </p:nvSpPr>
         <p:spPr>
           <a:xfrm>
-            <a:off x="658368" y="2103120"/>
-            <a:ext cx="10972800" cy="493776"/>
+            <a:off x="658368" y="1956816"/>
+            <a:ext cx="10972800" cy="603504"/>
           </a:xfrm>
           <a:prstGeom prst="rect">
             <a:avLst/>
@@ -18532,7 +18757,11 @@
               </a:defRPr>
             </a:pPr>
             <a:r>
-              <a:t>파일 생성/열기: mkdir -p ~/agv_ws/src/agv_control/agv_control    &amp;&amp;    nano ~/agv_ws/src/agv_control/agv_control/cmd_test_node.py</a:t>
+              <a:t>파일 생성: mkdir -p ~/agv_ws/src/agv_gazebo/models/agv</a:t>
+            </a:r>
+            <a:br/>
+            <a:r>
+              <a:t>파일 열기: nano ~/agv_ws/src/agv_gazebo/models/agv/model.sdf</a:t>
             </a:r>
           </a:p>
         </p:txBody>
@@ -18545,8 +18774,8 @@
         </p:nvSpPr>
         <p:spPr>
           <a:xfrm>
-            <a:off x="658368" y="2761488"/>
-            <a:ext cx="10972800" cy="3383280"/>
+            <a:off x="658368" y="2706624"/>
+            <a:ext cx="10972800" cy="3364992"/>
           </a:xfrm>
           <a:prstGeom prst="rect">
             <a:avLst/>
@@ -18590,56 +18819,51 @@
               </a:defRPr>
             </a:pPr>
             <a:r>
-              <a:t>    def publish_once(self):</a:t>
-            </a:r>
-            <a:br/>
-            <a:r>
-              <a:t>        command = Twist()</a:t>
-            </a:r>
-            <a:br/>
-            <a:r>
-              <a:t>        if self.remaining &gt; 0:</a:t>
-            </a:r>
-            <a:br/>
-            <a:r>
-              <a:t>            command.linear.x = self.get_parameter('linear_speed').value</a:t>
-            </a:r>
-            <a:br/>
-            <a:r>
-              <a:t>            command.angular.z = self.get_parameter('angular_speed').value</a:t>
-            </a:r>
-            <a:br/>
-            <a:r>
-              <a:t>            self.remaining -= 1</a:t>
-            </a:r>
-            <a:br/>
-            <a:r>
-              <a:t>        self.publisher.publish(command)</a:t>
-            </a:r>
-            <a:br/>
-            <a:r>
-              <a:t>        if self.remaining == 0:</a:t>
-            </a:r>
-            <a:br/>
-            <a:r>
-              <a:t>            self.get_logger().info('test command finished; publishing zero Twist')</a:t>
-            </a:r>
-            <a:br/>
-            <a:r>
-              <a:t>            self.remaining = -1</a:t>
-            </a:r>
-            <a:br/>
-            <a:br/>
-            <a:r>
-              <a:t>def main():</a:t>
-            </a:r>
-            <a:br/>
-            <a:r>
-              <a:t>    rclpy.init()</a:t>
-            </a:r>
-            <a:br/>
-            <a:r>
-              <a:t>    node = CmdTestNode()</a:t>
+              <a:t>    </a:t>
+            </a:r>
+            <a:br/>
+            <a:r>
+              <a:t>    </a:t>
+            </a:r>
+            <a:br/>
+            <a:r>
+              <a:t>    &lt;joint name="camera_joint" type="fixed"&gt;</a:t>
+            </a:r>
+            <a:br/>
+            <a:r>
+              <a:t>      &lt;parent&gt;base_link&lt;/parent&gt;</a:t>
+            </a:r>
+            <a:br/>
+            <a:r>
+              <a:t>      &lt;child&gt;camera_link&lt;/child&gt;</a:t>
+            </a:r>
+            <a:br/>
+            <a:r>
+              <a:t>    &lt;/joint&gt;</a:t>
+            </a:r>
+            <a:br/>
+            <a:r>
+              <a:t>    </a:t>
+            </a:r>
+            <a:br/>
+            <a:r>
+              <a:t>    </a:t>
+            </a:r>
+            <a:br/>
+            <a:r>
+              <a:t>    &lt;plugin filename="gz-sim-diff-drive-system" name="gz::sim::systems::DiffDrive"&gt;</a:t>
+            </a:r>
+            <a:br/>
+            <a:r>
+              <a:t>      &lt;left_joint&gt;left_wheel_joint&lt;/left_joint&gt;</a:t>
+            </a:r>
+            <a:br/>
+            <a:r>
+              <a:t>      &lt;right_joint&gt;right_wheel_joint&lt;/right_joint&gt;</a:t>
+            </a:r>
+            <a:br/>
+            <a:r>
+              <a:t>      &lt;wheel_separation&gt;0.38&lt;/wheel_separation&gt;</a:t>
             </a:r>
           </a:p>
         </p:txBody>
@@ -18652,7 +18876,7 @@
         </p:nvSpPr>
         <p:spPr>
           <a:xfrm>
-            <a:off x="749808" y="6199632"/>
+            <a:off x="749808" y="6181344"/>
             <a:ext cx="10789920" cy="201168"/>
           </a:xfrm>
           <a:prstGeom prst="rect">
@@ -18678,7 +18902,7 @@
               </a:defRPr>
             </a:pPr>
             <a:r>
-              <a:t>파일 전체 2/3 · 이 슬라이드 다음에 같은 파일의 나머지 줄이 이어집니다.</a:t>
+              <a:t>파일 전체 23/24 · 이 슬라이드 다음에 같은 파일의 나머지 줄이 이어집니다.</a:t>
             </a:r>
           </a:p>
         </p:txBody>
@@ -18735,7 +18959,7 @@
               </a:defRPr>
             </a:pPr>
             <a:r>
-              <a:t>파일을 계속 작성하고 저장한다 (3/3)</a:t>
+              <a:t>파일을 계속 작성하고 저장한다 (24/24)</a:t>
             </a:r>
           </a:p>
         </p:txBody>
@@ -18774,7 +18998,7 @@
               </a:defRPr>
             </a:pPr>
             <a:r>
-              <a:t>~/agv_ws/src/agv_control/agv_control/cmd_test_node.py</a:t>
+              <a:t>~/agv_ws/src/agv_gazebo/models/agv/model.sdf</a:t>
             </a:r>
           </a:p>
         </p:txBody>
@@ -18923,8 +19147,8 @@
         </p:nvSpPr>
         <p:spPr>
           <a:xfrm>
-            <a:off x="658368" y="1682496"/>
-            <a:ext cx="10972800" cy="347472"/>
+            <a:off x="658368" y="1627632"/>
+            <a:ext cx="10972800" cy="256032"/>
           </a:xfrm>
           <a:prstGeom prst="rect">
             <a:avLst/>
@@ -18941,7 +19165,7 @@
               <a:spcAft>
                 <a:spcPts val="0"/>
               </a:spcAft>
-              <a:defRPr sz="1700" b="1">
+              <a:defRPr sz="1500" b="1">
                 <a:solidFill>
                   <a:srgbClr val="122C4E"/>
                 </a:solidFill>
@@ -18962,8 +19186,8 @@
         </p:nvSpPr>
         <p:spPr>
           <a:xfrm>
-            <a:off x="658368" y="2103120"/>
-            <a:ext cx="10972800" cy="493776"/>
+            <a:off x="658368" y="1956816"/>
+            <a:ext cx="10972800" cy="603504"/>
           </a:xfrm>
           <a:prstGeom prst="rect">
             <a:avLst/>
@@ -19007,7 +19231,11 @@
               </a:defRPr>
             </a:pPr>
             <a:r>
-              <a:t>파일 생성/열기: mkdir -p ~/agv_ws/src/agv_control/agv_control    &amp;&amp;    nano ~/agv_ws/src/agv_control/agv_control/cmd_test_node.py</a:t>
+              <a:t>파일 생성: mkdir -p ~/agv_ws/src/agv_gazebo/models/agv</a:t>
+            </a:r>
+            <a:br/>
+            <a:r>
+              <a:t>파일 열기: nano ~/agv_ws/src/agv_gazebo/models/agv/model.sdf</a:t>
             </a:r>
           </a:p>
         </p:txBody>
@@ -19020,8 +19248,8 @@
         </p:nvSpPr>
         <p:spPr>
           <a:xfrm>
-            <a:off x="658368" y="2761488"/>
-            <a:ext cx="10972800" cy="3383280"/>
+            <a:off x="658368" y="2706624"/>
+            <a:ext cx="10972800" cy="3364992"/>
           </a:xfrm>
           <a:prstGeom prst="rect">
             <a:avLst/>
@@ -19065,35 +19293,48 @@
               </a:defRPr>
             </a:pPr>
             <a:r>
-              <a:t>    try:</a:t>
-            </a:r>
-            <a:br/>
-            <a:r>
-              <a:t>        rclpy.spin(node)</a:t>
-            </a:r>
-            <a:br/>
-            <a:r>
-              <a:t>    except KeyboardInterrupt:</a:t>
-            </a:r>
-            <a:br/>
-            <a:r>
-              <a:t>        pass</a:t>
-            </a:r>
-            <a:br/>
-            <a:r>
-              <a:t>    finally:</a:t>
-            </a:r>
-            <a:br/>
-            <a:r>
-              <a:t>        node.destroy_node()</a:t>
-            </a:r>
-            <a:br/>
-            <a:r>
-              <a:t>        if rclpy.ok():</a:t>
-            </a:r>
-            <a:br/>
-            <a:r>
-              <a:t>            rclpy.shutdown()</a:t>
+              <a:t>      &lt;wheel_radius&gt;0.08&lt;/wheel_radius&gt;</a:t>
+            </a:r>
+            <a:br/>
+            <a:r>
+              <a:t>      &lt;topic&gt;/cmd_vel&lt;/topic&gt;</a:t>
+            </a:r>
+            <a:br/>
+            <a:r>
+              <a:t>      &lt;odom_topic&gt;/odom&lt;/odom_topic&gt;</a:t>
+            </a:r>
+            <a:br/>
+            <a:r>
+              <a:t>      &lt;frame_id&gt;odom&lt;/frame_id&gt;</a:t>
+            </a:r>
+            <a:br/>
+            <a:r>
+              <a:t>      &lt;child_frame_id&gt;base_link&lt;/child_frame_id&gt;</a:t>
+            </a:r>
+            <a:br/>
+            <a:r>
+              <a:t>    &lt;/plugin&gt;</a:t>
+            </a:r>
+            <a:br/>
+            <a:r>
+              <a:t>    </a:t>
+            </a:r>
+            <a:br/>
+            <a:r>
+              <a:t>  </a:t>
+            </a:r>
+            <a:br/>
+            <a:r>
+              <a:t>  &lt;/model&gt;</a:t>
+            </a:r>
+            <a:br/>
+            <a:r>
+              <a:t>  </a:t>
+            </a:r>
+            <a:br/>
+            <a:br/>
+            <a:r>
+              <a:t>&lt;/sdf&gt;</a:t>
             </a:r>
           </a:p>
         </p:txBody>
@@ -19106,7 +19347,7 @@
         </p:nvSpPr>
         <p:spPr>
           <a:xfrm>
-            <a:off x="749808" y="6199632"/>
+            <a:off x="749808" y="6181344"/>
             <a:ext cx="10789920" cy="201168"/>
           </a:xfrm>
           <a:prstGeom prst="rect">
@@ -19132,7 +19373,7 @@
               </a:defRPr>
             </a:pPr>
             <a:r>
-              <a:t>파일 전체 3/3 · 이 슬라이드 다음에 같은 파일의 나머지 줄이 이어집니다.</a:t>
+              <a:t>파일 전체 24/24 · 이 슬라이드 다음에 같은 파일의 나머지 줄이 이어집니다.</a:t>
             </a:r>
           </a:p>
         </p:txBody>
@@ -19189,7 +19430,7 @@
               </a:defRPr>
             </a:pPr>
             <a:r>
-              <a:t>build → source → run 순서로 실행한다</a:t>
+              <a:t>파일을 새로 만들고 저장한다 (1/3)</a:t>
             </a:r>
           </a:p>
         </p:txBody>
@@ -19228,7 +19469,7 @@
               </a:defRPr>
             </a:pPr>
             <a:r>
-              <a:t>새 파일 또는 수정 파일은 build와 source 뒤에만 실행 이름·설정에 반영됩니다.</a:t>
+              <a:t>~/agv_ws/src/agv_control/agv_control/cmd_test_node.py</a:t>
             </a:r>
           </a:p>
         </p:txBody>
@@ -19364,23 +19605,124 @@
               </a:defRPr>
             </a:pPr>
             <a:r>
-              <a:t>현재 단계 실행    |    현재 폴더 ~/agv_ws    |    현재 터미널</a:t>
-            </a:r>
-          </a:p>
-        </p:txBody>
-      </p:sp>
-      <p:sp>
-        <p:nvSpPr>
-          <p:cNvPr id="7" name="Rounded Rectangle 6"/>
+              <a:t>현재 단계 27/30    |    현재 폴더 ~/agv_ws    |    현재 터미널</a:t>
+            </a:r>
+          </a:p>
+        </p:txBody>
+      </p:sp>
+      <p:sp>
+        <p:nvSpPr>
+          <p:cNvPr id="7" name="TextBox 6"/>
+          <p:cNvSpPr txBox="1"/>
+          <p:nvPr/>
+        </p:nvSpPr>
+        <p:spPr>
+          <a:xfrm>
+            <a:off x="658368" y="1627632"/>
+            <a:ext cx="10972800" cy="256032"/>
+          </a:xfrm>
+          <a:prstGeom prst="rect">
+            <a:avLst/>
+          </a:prstGeom>
+          <a:noFill/>
+        </p:spPr>
+        <p:txBody>
+          <a:bodyPr wrap="square" lIns="73152" rIns="73152" tIns="36576" bIns="36576">
+            <a:spAutoFit/>
+          </a:bodyPr>
+          <a:lstStyle/>
+          <a:p>
+            <a:pPr algn="l">
+              <a:spcAft>
+                <a:spcPts val="0"/>
+              </a:spcAft>
+              <a:defRPr sz="1500" b="1">
+                <a:solidFill>
+                  <a:srgbClr val="122C4E"/>
+                </a:solidFill>
+                <a:latin typeface="Noto Sans CJK KR"/>
+              </a:defRPr>
+            </a:pPr>
+            <a:r>
+              <a:t>이번 단계: 파일의 전체 내용을 중간 생략 없이 작성합니다. 아래 줄 범위를 끝까지 입력하세요.</a:t>
+            </a:r>
+          </a:p>
+        </p:txBody>
+      </p:sp>
+      <p:sp>
+        <p:nvSpPr>
+          <p:cNvPr id="8" name="Rectangle 7"/>
           <p:cNvSpPr/>
           <p:nvPr/>
         </p:nvSpPr>
         <p:spPr>
           <a:xfrm>
-            <a:off x="658368" y="1700784"/>
-            <a:ext cx="10972800" cy="3182112"/>
-          </a:xfrm>
-          <a:prstGeom prst="roundRect">
+            <a:off x="658368" y="1956816"/>
+            <a:ext cx="10972800" cy="603504"/>
+          </a:xfrm>
+          <a:prstGeom prst="rect">
+            <a:avLst/>
+          </a:prstGeom>
+          <a:solidFill>
+            <a:srgbClr val="F4F7FB"/>
+          </a:solidFill>
+          <a:ln>
+            <a:solidFill>
+              <a:srgbClr val="F4F7FB"/>
+            </a:solidFill>
+          </a:ln>
+        </p:spPr>
+        <p:style>
+          <a:lnRef idx="1">
+            <a:schemeClr val="accent1"/>
+          </a:lnRef>
+          <a:fillRef idx="3">
+            <a:schemeClr val="accent1"/>
+          </a:fillRef>
+          <a:effectRef idx="2">
+            <a:schemeClr val="accent1"/>
+          </a:effectRef>
+          <a:fontRef idx="minor">
+            <a:schemeClr val="lt1"/>
+          </a:fontRef>
+        </p:style>
+        <p:txBody>
+          <a:bodyPr rtlCol="0" anchor="ctr" wrap="square" lIns="73152" rIns="73152" tIns="36576" bIns="36576"/>
+          <a:lstStyle/>
+          <a:p>
+            <a:pPr algn="l">
+              <a:spcAft>
+                <a:spcPts val="0"/>
+              </a:spcAft>
+              <a:defRPr sz="1400" b="0">
+                <a:solidFill>
+                  <a:srgbClr val="122C4E"/>
+                </a:solidFill>
+                <a:latin typeface="DejaVu Sans Mono"/>
+              </a:defRPr>
+            </a:pPr>
+            <a:r>
+              <a:t>파일 생성: mkdir -p ~/agv_ws/src/agv_control/agv_control</a:t>
+            </a:r>
+            <a:br/>
+            <a:r>
+              <a:t>파일 열기: nano ~/agv_ws/src/agv_control/agv_control/cmd_test_node.py</a:t>
+            </a:r>
+          </a:p>
+        </p:txBody>
+      </p:sp>
+      <p:sp>
+        <p:nvSpPr>
+          <p:cNvPr id="9" name="Rectangle 8"/>
+          <p:cNvSpPr/>
+          <p:nvPr/>
+        </p:nvSpPr>
+        <p:spPr>
+          <a:xfrm>
+            <a:off x="658368" y="2706624"/>
+            <a:ext cx="10972800" cy="3364992"/>
+          </a:xfrm>
+          <a:prstGeom prst="rect">
             <a:avLst/>
           </a:prstGeom>
           <a:solidFill>
@@ -19407,14 +19749,14 @@
           </a:fontRef>
         </p:style>
         <p:txBody>
-          <a:bodyPr rtlCol="0" anchor="ctr" wrap="square" lIns="73152" rIns="73152" tIns="36576" bIns="36576"/>
-          <a:lstStyle/>
-          <a:p>
-            <a:pPr algn="l">
-              <a:spcAft>
-                <a:spcPts val="0"/>
-              </a:spcAft>
-              <a:defRPr sz="1600" b="0">
+          <a:bodyPr rtlCol="0" anchor="ctr" wrap="square" lIns="164592" rIns="164592" tIns="109728" bIns="36576"/>
+          <a:lstStyle/>
+          <a:p>
+            <a:pPr algn="l">
+              <a:spcAft>
+                <a:spcPts val="0"/>
+              </a:spcAft>
+              <a:defRPr sz="1400" b="0">
                 <a:solidFill>
                   <a:srgbClr val="FFFFFF"/>
                 </a:solidFill>
@@ -19422,25 +19764,59 @@
               </a:defRPr>
             </a:pPr>
             <a:r>
-              <a:t>ros2 launch agv_gazebo gazebo.launch.py</a:t>
-            </a:r>
-            <a:br/>
-            <a:r>
-              <a:t># 새 터미널: ros2 run agv_control cmd_test_node</a:t>
-            </a:r>
-          </a:p>
-        </p:txBody>
-      </p:sp>
-      <p:sp>
-        <p:nvSpPr>
-          <p:cNvPr id="8" name="TextBox 7"/>
+              <a:t>import rclpy</a:t>
+            </a:r>
+            <a:br/>
+            <a:r>
+              <a:t>from rclpy.node import Node</a:t>
+            </a:r>
+            <a:br/>
+            <a:r>
+              <a:t>from geometry_msgs.msg import Twist</a:t>
+            </a:r>
+            <a:br/>
+            <a:br/>
+            <a:r>
+              <a:t>class CmdTestNode(Node):</a:t>
+            </a:r>
+            <a:br/>
+            <a:br/>
+            <a:r>
+              <a:t>    def __init__(self):</a:t>
+            </a:r>
+            <a:br/>
+            <a:r>
+              <a:t>        super().__init__('cmd_test_node')</a:t>
+            </a:r>
+            <a:br/>
+            <a:r>
+              <a:t>        self.declare_parameter('linear_speed', 0.15)</a:t>
+            </a:r>
+            <a:br/>
+            <a:r>
+              <a:t>        self.declare_parameter('angular_speed', 0.0)</a:t>
+            </a:r>
+            <a:br/>
+            <a:r>
+              <a:t>        self.publisher = self.create_publisher(Twist, '/cmd_vel', 10)</a:t>
+            </a:r>
+            <a:br/>
+            <a:r>
+              <a:t>        self.remaining = 30</a:t>
+            </a:r>
+          </a:p>
+        </p:txBody>
+      </p:sp>
+      <p:sp>
+        <p:nvSpPr>
+          <p:cNvPr id="10" name="TextBox 9"/>
           <p:cNvSpPr txBox="1"/>
           <p:nvPr/>
         </p:nvSpPr>
         <p:spPr>
           <a:xfrm>
-            <a:off x="786384" y="5239512"/>
-            <a:ext cx="1261872" cy="237744"/>
+            <a:off x="749808" y="6181344"/>
+            <a:ext cx="10789920" cy="201168"/>
           </a:xfrm>
           <a:prstGeom prst="rect">
             <a:avLst/>
@@ -19457,54 +19833,15 @@
               <a:spcAft>
                 <a:spcPts val="0"/>
               </a:spcAft>
-              <a:defRPr sz="1800" b="1">
-                <a:solidFill>
-                  <a:srgbClr val="2A8B5A"/>
-                </a:solidFill>
-                <a:latin typeface="Noto Sans CJK KR"/>
-              </a:defRPr>
-            </a:pPr>
-            <a:r>
-              <a:t>확인 기준</a:t>
-            </a:r>
-          </a:p>
-        </p:txBody>
-      </p:sp>
-      <p:sp>
-        <p:nvSpPr>
-          <p:cNvPr id="9" name="TextBox 8"/>
-          <p:cNvSpPr txBox="1"/>
-          <p:nvPr/>
-        </p:nvSpPr>
-        <p:spPr>
-          <a:xfrm>
-            <a:off x="786384" y="5532120"/>
-            <a:ext cx="10469880" cy="420624"/>
-          </a:xfrm>
-          <a:prstGeom prst="rect">
-            <a:avLst/>
-          </a:prstGeom>
-          <a:noFill/>
-        </p:spPr>
-        <p:txBody>
-          <a:bodyPr wrap="square" lIns="73152" rIns="73152" tIns="36576" bIns="36576">
-            <a:spAutoFit/>
-          </a:bodyPr>
-          <a:lstStyle/>
-          <a:p>
-            <a:pPr algn="l">
-              <a:spcAft>
-                <a:spcPts val="0"/>
-              </a:spcAft>
-              <a:defRPr sz="1800" b="0">
-                <a:solidFill>
-                  <a:srgbClr val="122C4E"/>
-                </a:solidFill>
-                <a:latin typeface="Noto Sans CJK KR"/>
-              </a:defRPr>
-            </a:pPr>
-            <a:r>
-              <a:t>/cmd_vel에서 odom과 바퀴 구동 topic으로 이어지는 경로를 확인한다.</a:t>
+              <a:defRPr sz="1000" b="0">
+                <a:solidFill>
+                  <a:srgbClr val="5C6672"/>
+                </a:solidFill>
+                <a:latin typeface="Noto Sans CJK KR"/>
+              </a:defRPr>
+            </a:pPr>
+            <a:r>
+              <a:t>파일 전체 1/3 · 이 슬라이드 다음에 같은 파일의 나머지 줄이 이어집니다.</a:t>
             </a:r>
           </a:p>
         </p:txBody>
@@ -19561,7 +19898,7 @@
               </a:defRPr>
             </a:pPr>
             <a:r>
-              <a:t>정상 결과: 실제 환경에서 확인한 출력</a:t>
+              <a:t>파일을 계속 작성하고 저장한다 (2/3)</a:t>
             </a:r>
           </a:p>
         </p:txBody>
@@ -19600,7 +19937,7 @@
               </a:defRPr>
             </a:pPr>
             <a:r>
-              <a:t>실제 ROS 2 환경의 파일·패키지·구성 검증 로그</a:t>
+              <a:t>~/agv_ws/src/agv_control/agv_control/cmd_test_node.py</a:t>
             </a:r>
           </a:p>
         </p:txBody>
@@ -19683,30 +20020,64 @@
           </a:p>
         </p:txBody>
       </p:sp>
-      <p:pic>
-        <p:nvPicPr>
-          <p:cNvPr id="6" name="Picture 5" descr="validation_terminal.png"/>
-          <p:cNvPicPr>
-            <a:picLocks noChangeAspect="1"/>
-          </p:cNvPicPr>
-          <p:nvPr/>
-        </p:nvPicPr>
-        <p:blipFill>
-          <a:blip r:embed="rId2"/>
-          <a:stretch>
-            <a:fillRect/>
-          </a:stretch>
-        </p:blipFill>
-        <p:spPr>
-          <a:xfrm>
-            <a:off x="790956" y="1884338"/>
-            <a:ext cx="10607040" cy="3738546"/>
-          </a:xfrm>
-          <a:prstGeom prst="rect">
-            <a:avLst/>
-          </a:prstGeom>
-        </p:spPr>
-      </p:pic>
+      <p:sp>
+        <p:nvSpPr>
+          <p:cNvPr id="6" name="Rectangle 5"/>
+          <p:cNvSpPr/>
+          <p:nvPr/>
+        </p:nvSpPr>
+        <p:spPr>
+          <a:xfrm>
+            <a:off x="566928" y="1188720"/>
+            <a:ext cx="11064240" cy="347472"/>
+          </a:xfrm>
+          <a:prstGeom prst="rect">
+            <a:avLst/>
+          </a:prstGeom>
+          <a:solidFill>
+            <a:srgbClr val="F4F7FB"/>
+          </a:solidFill>
+          <a:ln>
+            <a:solidFill>
+              <a:srgbClr val="F4F7FB"/>
+            </a:solidFill>
+          </a:ln>
+        </p:spPr>
+        <p:style>
+          <a:lnRef idx="1">
+            <a:schemeClr val="accent1"/>
+          </a:lnRef>
+          <a:fillRef idx="3">
+            <a:schemeClr val="accent1"/>
+          </a:fillRef>
+          <a:effectRef idx="2">
+            <a:schemeClr val="accent1"/>
+          </a:effectRef>
+          <a:fontRef idx="minor">
+            <a:schemeClr val="lt1"/>
+          </a:fontRef>
+        </p:style>
+        <p:txBody>
+          <a:bodyPr rtlCol="0" anchor="ctr" wrap="square" lIns="73152" rIns="73152" tIns="36576" bIns="36576"/>
+          <a:lstStyle/>
+          <a:p>
+            <a:pPr algn="l">
+              <a:spcAft>
+                <a:spcPts val="0"/>
+              </a:spcAft>
+              <a:defRPr sz="1300" b="1">
+                <a:solidFill>
+                  <a:srgbClr val="122C4E"/>
+                </a:solidFill>
+                <a:latin typeface="Noto Sans CJK KR"/>
+              </a:defRPr>
+            </a:pPr>
+            <a:r>
+              <a:t>현재 단계 28/30    |    현재 폴더 ~/agv_ws    |    현재 터미널</a:t>
+            </a:r>
+          </a:p>
+        </p:txBody>
+      </p:sp>
       <p:sp>
         <p:nvSpPr>
           <p:cNvPr id="7" name="TextBox 6"/>
@@ -19715,8 +20086,8 @@
         </p:nvSpPr>
         <p:spPr>
           <a:xfrm>
-            <a:off x="777240" y="6217920"/>
-            <a:ext cx="10607040" cy="182880"/>
+            <a:off x="658368" y="1627632"/>
+            <a:ext cx="10972800" cy="256032"/>
           </a:xfrm>
           <a:prstGeom prst="rect">
             <a:avLst/>
@@ -19729,19 +20100,219 @@
           </a:bodyPr>
           <a:lstStyle/>
           <a:p>
-            <a:pPr algn="ctr">
-              <a:spcAft>
-                <a:spcPts val="0"/>
-              </a:spcAft>
-              <a:defRPr sz="1100" b="1">
-                <a:solidFill>
-                  <a:srgbClr val="2A8B5A"/>
-                </a:solidFill>
-                <a:latin typeface="Noto Sans CJK KR"/>
-              </a:defRPr>
-            </a:pPr>
-            <a:r>
-              <a:t>① 명령/설정  ② 정상 출력 또는 화면  ③ 다음 검증 명령으로 재확인</a:t>
+            <a:pPr algn="l">
+              <a:spcAft>
+                <a:spcPts val="0"/>
+              </a:spcAft>
+              <a:defRPr sz="1500" b="1">
+                <a:solidFill>
+                  <a:srgbClr val="122C4E"/>
+                </a:solidFill>
+                <a:latin typeface="Noto Sans CJK KR"/>
+              </a:defRPr>
+            </a:pPr>
+            <a:r>
+              <a:t>이번 단계: 파일의 전체 내용을 중간 생략 없이 작성합니다. 아래 줄 범위를 끝까지 입력하세요.</a:t>
+            </a:r>
+          </a:p>
+        </p:txBody>
+      </p:sp>
+      <p:sp>
+        <p:nvSpPr>
+          <p:cNvPr id="8" name="Rectangle 7"/>
+          <p:cNvSpPr/>
+          <p:nvPr/>
+        </p:nvSpPr>
+        <p:spPr>
+          <a:xfrm>
+            <a:off x="658368" y="1956816"/>
+            <a:ext cx="10972800" cy="603504"/>
+          </a:xfrm>
+          <a:prstGeom prst="rect">
+            <a:avLst/>
+          </a:prstGeom>
+          <a:solidFill>
+            <a:srgbClr val="F4F7FB"/>
+          </a:solidFill>
+          <a:ln>
+            <a:solidFill>
+              <a:srgbClr val="F4F7FB"/>
+            </a:solidFill>
+          </a:ln>
+        </p:spPr>
+        <p:style>
+          <a:lnRef idx="1">
+            <a:schemeClr val="accent1"/>
+          </a:lnRef>
+          <a:fillRef idx="3">
+            <a:schemeClr val="accent1"/>
+          </a:fillRef>
+          <a:effectRef idx="2">
+            <a:schemeClr val="accent1"/>
+          </a:effectRef>
+          <a:fontRef idx="minor">
+            <a:schemeClr val="lt1"/>
+          </a:fontRef>
+        </p:style>
+        <p:txBody>
+          <a:bodyPr rtlCol="0" anchor="ctr" wrap="square" lIns="73152" rIns="73152" tIns="36576" bIns="36576"/>
+          <a:lstStyle/>
+          <a:p>
+            <a:pPr algn="l">
+              <a:spcAft>
+                <a:spcPts val="0"/>
+              </a:spcAft>
+              <a:defRPr sz="1400" b="0">
+                <a:solidFill>
+                  <a:srgbClr val="122C4E"/>
+                </a:solidFill>
+                <a:latin typeface="DejaVu Sans Mono"/>
+              </a:defRPr>
+            </a:pPr>
+            <a:r>
+              <a:t>파일 생성: mkdir -p ~/agv_ws/src/agv_control/agv_control</a:t>
+            </a:r>
+            <a:br/>
+            <a:r>
+              <a:t>파일 열기: nano ~/agv_ws/src/agv_control/agv_control/cmd_test_node.py</a:t>
+            </a:r>
+          </a:p>
+        </p:txBody>
+      </p:sp>
+      <p:sp>
+        <p:nvSpPr>
+          <p:cNvPr id="9" name="Rectangle 8"/>
+          <p:cNvSpPr/>
+          <p:nvPr/>
+        </p:nvSpPr>
+        <p:spPr>
+          <a:xfrm>
+            <a:off x="658368" y="2706624"/>
+            <a:ext cx="10972800" cy="3364992"/>
+          </a:xfrm>
+          <a:prstGeom prst="rect">
+            <a:avLst/>
+          </a:prstGeom>
+          <a:solidFill>
+            <a:srgbClr val="1D232D"/>
+          </a:solidFill>
+          <a:ln>
+            <a:solidFill>
+              <a:srgbClr val="1D232D"/>
+            </a:solidFill>
+          </a:ln>
+        </p:spPr>
+        <p:style>
+          <a:lnRef idx="1">
+            <a:schemeClr val="accent1"/>
+          </a:lnRef>
+          <a:fillRef idx="3">
+            <a:schemeClr val="accent1"/>
+          </a:fillRef>
+          <a:effectRef idx="2">
+            <a:schemeClr val="accent1"/>
+          </a:effectRef>
+          <a:fontRef idx="minor">
+            <a:schemeClr val="lt1"/>
+          </a:fontRef>
+        </p:style>
+        <p:txBody>
+          <a:bodyPr rtlCol="0" anchor="ctr" wrap="square" lIns="164592" rIns="164592" tIns="109728" bIns="36576"/>
+          <a:lstStyle/>
+          <a:p>
+            <a:pPr algn="l">
+              <a:spcAft>
+                <a:spcPts val="0"/>
+              </a:spcAft>
+              <a:defRPr sz="1400" b="0">
+                <a:solidFill>
+                  <a:srgbClr val="FFFFFF"/>
+                </a:solidFill>
+                <a:latin typeface="DejaVu Sans Mono"/>
+              </a:defRPr>
+            </a:pPr>
+            <a:r>
+              <a:t>        self.create_timer(0.1, self.publish_once)</a:t>
+            </a:r>
+            <a:br/>
+            <a:br/>
+            <a:r>
+              <a:t>    def publish_once(self):</a:t>
+            </a:r>
+            <a:br/>
+            <a:r>
+              <a:t>        command = Twist()</a:t>
+            </a:r>
+            <a:br/>
+            <a:r>
+              <a:t>        if self.remaining &gt; 0:</a:t>
+            </a:r>
+            <a:br/>
+            <a:r>
+              <a:t>            command.linear.x = self.get_parameter('linear_speed').value</a:t>
+            </a:r>
+            <a:br/>
+            <a:r>
+              <a:t>            command.angular.z = self.get_parameter('angular_speed').value</a:t>
+            </a:r>
+            <a:br/>
+            <a:r>
+              <a:t>            self.remaining -= 1</a:t>
+            </a:r>
+            <a:br/>
+            <a:r>
+              <a:t>        self.publisher.publish(command)</a:t>
+            </a:r>
+            <a:br/>
+            <a:r>
+              <a:t>        if self.remaining == 0:</a:t>
+            </a:r>
+            <a:br/>
+            <a:r>
+              <a:t>            self.get_logger().info('test command finished; publishing zero Twist')</a:t>
+            </a:r>
+            <a:br/>
+            <a:r>
+              <a:t>            self.remaining = -1</a:t>
+            </a:r>
+          </a:p>
+        </p:txBody>
+      </p:sp>
+      <p:sp>
+        <p:nvSpPr>
+          <p:cNvPr id="10" name="TextBox 9"/>
+          <p:cNvSpPr txBox="1"/>
+          <p:nvPr/>
+        </p:nvSpPr>
+        <p:spPr>
+          <a:xfrm>
+            <a:off x="749808" y="6181344"/>
+            <a:ext cx="10789920" cy="201168"/>
+          </a:xfrm>
+          <a:prstGeom prst="rect">
+            <a:avLst/>
+          </a:prstGeom>
+          <a:noFill/>
+        </p:spPr>
+        <p:txBody>
+          <a:bodyPr wrap="square" lIns="73152" rIns="73152" tIns="36576" bIns="36576">
+            <a:spAutoFit/>
+          </a:bodyPr>
+          <a:lstStyle/>
+          <a:p>
+            <a:pPr algn="l">
+              <a:spcAft>
+                <a:spcPts val="0"/>
+              </a:spcAft>
+              <a:defRPr sz="1000" b="0">
+                <a:solidFill>
+                  <a:srgbClr val="5C6672"/>
+                </a:solidFill>
+                <a:latin typeface="Noto Sans CJK KR"/>
+              </a:defRPr>
+            </a:pPr>
+            <a:r>
+              <a:t>파일 전체 2/3 · 이 슬라이드 다음에 같은 파일의 나머지 줄이 이어집니다.</a:t>
             </a:r>
           </a:p>
         </p:txBody>
@@ -19798,7 +20369,7 @@
               </a:defRPr>
             </a:pPr>
             <a:r>
-              <a:t>객관적 검증 명령으로 완료를 확인한다</a:t>
+              <a:t>파일을 계속 작성하고 저장한다 (3/3)</a:t>
             </a:r>
           </a:p>
         </p:txBody>
@@ -19837,7 +20408,7 @@
               </a:defRPr>
             </a:pPr>
             <a:r>
-              <a:t>화면만 보지 말고 topic·frame·파일·parameter를 다시 확인합니다.</a:t>
+              <a:t>~/agv_ws/src/agv_control/agv_control/cmd_test_node.py</a:t>
             </a:r>
           </a:p>
         </p:txBody>
@@ -19973,23 +20544,124 @@
               </a:defRPr>
             </a:pPr>
             <a:r>
-              <a:t>현재 단계 검증    |    현재 폴더 ~/agv_ws    |    현재 터미널</a:t>
-            </a:r>
-          </a:p>
-        </p:txBody>
-      </p:sp>
-      <p:sp>
-        <p:nvSpPr>
-          <p:cNvPr id="7" name="Rounded Rectangle 6"/>
+              <a:t>현재 단계 29/30    |    현재 폴더 ~/agv_ws    |    현재 터미널</a:t>
+            </a:r>
+          </a:p>
+        </p:txBody>
+      </p:sp>
+      <p:sp>
+        <p:nvSpPr>
+          <p:cNvPr id="7" name="TextBox 6"/>
+          <p:cNvSpPr txBox="1"/>
+          <p:nvPr/>
+        </p:nvSpPr>
+        <p:spPr>
+          <a:xfrm>
+            <a:off x="658368" y="1627632"/>
+            <a:ext cx="10972800" cy="256032"/>
+          </a:xfrm>
+          <a:prstGeom prst="rect">
+            <a:avLst/>
+          </a:prstGeom>
+          <a:noFill/>
+        </p:spPr>
+        <p:txBody>
+          <a:bodyPr wrap="square" lIns="73152" rIns="73152" tIns="36576" bIns="36576">
+            <a:spAutoFit/>
+          </a:bodyPr>
+          <a:lstStyle/>
+          <a:p>
+            <a:pPr algn="l">
+              <a:spcAft>
+                <a:spcPts val="0"/>
+              </a:spcAft>
+              <a:defRPr sz="1500" b="1">
+                <a:solidFill>
+                  <a:srgbClr val="122C4E"/>
+                </a:solidFill>
+                <a:latin typeface="Noto Sans CJK KR"/>
+              </a:defRPr>
+            </a:pPr>
+            <a:r>
+              <a:t>이번 단계: 파일의 전체 내용을 중간 생략 없이 작성합니다. 아래 줄 범위를 끝까지 입력하세요.</a:t>
+            </a:r>
+          </a:p>
+        </p:txBody>
+      </p:sp>
+      <p:sp>
+        <p:nvSpPr>
+          <p:cNvPr id="8" name="Rectangle 7"/>
           <p:cNvSpPr/>
           <p:nvPr/>
         </p:nvSpPr>
         <p:spPr>
           <a:xfrm>
-            <a:off x="658368" y="1755648"/>
-            <a:ext cx="10972800" cy="2148840"/>
-          </a:xfrm>
-          <a:prstGeom prst="roundRect">
+            <a:off x="658368" y="1956816"/>
+            <a:ext cx="10972800" cy="603504"/>
+          </a:xfrm>
+          <a:prstGeom prst="rect">
+            <a:avLst/>
+          </a:prstGeom>
+          <a:solidFill>
+            <a:srgbClr val="F4F7FB"/>
+          </a:solidFill>
+          <a:ln>
+            <a:solidFill>
+              <a:srgbClr val="F4F7FB"/>
+            </a:solidFill>
+          </a:ln>
+        </p:spPr>
+        <p:style>
+          <a:lnRef idx="1">
+            <a:schemeClr val="accent1"/>
+          </a:lnRef>
+          <a:fillRef idx="3">
+            <a:schemeClr val="accent1"/>
+          </a:fillRef>
+          <a:effectRef idx="2">
+            <a:schemeClr val="accent1"/>
+          </a:effectRef>
+          <a:fontRef idx="minor">
+            <a:schemeClr val="lt1"/>
+          </a:fontRef>
+        </p:style>
+        <p:txBody>
+          <a:bodyPr rtlCol="0" anchor="ctr" wrap="square" lIns="73152" rIns="73152" tIns="36576" bIns="36576"/>
+          <a:lstStyle/>
+          <a:p>
+            <a:pPr algn="l">
+              <a:spcAft>
+                <a:spcPts val="0"/>
+              </a:spcAft>
+              <a:defRPr sz="1400" b="0">
+                <a:solidFill>
+                  <a:srgbClr val="122C4E"/>
+                </a:solidFill>
+                <a:latin typeface="DejaVu Sans Mono"/>
+              </a:defRPr>
+            </a:pPr>
+            <a:r>
+              <a:t>파일 생성: mkdir -p ~/agv_ws/src/agv_control/agv_control</a:t>
+            </a:r>
+            <a:br/>
+            <a:r>
+              <a:t>파일 열기: nano ~/agv_ws/src/agv_control/agv_control/cmd_test_node.py</a:t>
+            </a:r>
+          </a:p>
+        </p:txBody>
+      </p:sp>
+      <p:sp>
+        <p:nvSpPr>
+          <p:cNvPr id="9" name="Rectangle 8"/>
+          <p:cNvSpPr/>
+          <p:nvPr/>
+        </p:nvSpPr>
+        <p:spPr>
+          <a:xfrm>
+            <a:off x="658368" y="2706624"/>
+            <a:ext cx="10972800" cy="3364992"/>
+          </a:xfrm>
+          <a:prstGeom prst="rect">
             <a:avLst/>
           </a:prstGeom>
           <a:solidFill>
@@ -20016,110 +20688,77 @@
           </a:fontRef>
         </p:style>
         <p:txBody>
-          <a:bodyPr rtlCol="0" anchor="ctr" wrap="square" lIns="73152" rIns="73152" tIns="36576" bIns="36576"/>
-          <a:lstStyle/>
-          <a:p>
-            <a:pPr algn="l">
-              <a:spcAft>
-                <a:spcPts val="0"/>
-              </a:spcAft>
-              <a:defRPr sz="1600" b="0">
+          <a:bodyPr rtlCol="0" anchor="ctr" wrap="square" lIns="164592" rIns="164592" tIns="109728" bIns="36576"/>
+          <a:lstStyle/>
+          <a:p>
+            <a:pPr algn="l">
+              <a:spcAft>
+                <a:spcPts val="0"/>
+              </a:spcAft>
+              <a:defRPr sz="1400" b="0">
                 <a:solidFill>
                   <a:srgbClr val="FFFFFF"/>
                 </a:solidFill>
                 <a:latin typeface="DejaVu Sans Mono"/>
               </a:defRPr>
             </a:pPr>
-            <a:r>
-              <a:t>ros2 topic info /cmd_vel</a:t>
-            </a:r>
-            <a:br/>
-            <a:r>
-              <a:t>ros2 topic echo /odom --once</a:t>
-            </a:r>
-          </a:p>
-        </p:txBody>
-      </p:sp>
-      <p:sp>
-        <p:nvSpPr>
-          <p:cNvPr id="8" name="Rounded Rectangle 7"/>
-          <p:cNvSpPr/>
-          <p:nvPr/>
-        </p:nvSpPr>
-        <p:spPr>
-          <a:xfrm>
-            <a:off x="658368" y="4206240"/>
-            <a:ext cx="10972800" cy="1554480"/>
-          </a:xfrm>
-          <a:prstGeom prst="roundRect">
-            <a:avLst/>
-          </a:prstGeom>
-          <a:solidFill>
-            <a:srgbClr val="F4F7FB"/>
-          </a:solidFill>
-          <a:ln>
-            <a:solidFill>
-              <a:srgbClr val="D1DFD5"/>
-            </a:solidFill>
-          </a:ln>
-        </p:spPr>
-        <p:style>
-          <a:lnRef idx="1">
-            <a:schemeClr val="accent1"/>
-          </a:lnRef>
-          <a:fillRef idx="3">
-            <a:schemeClr val="accent1"/>
-          </a:fillRef>
-          <a:effectRef idx="2">
-            <a:schemeClr val="accent1"/>
-          </a:effectRef>
-          <a:fontRef idx="minor">
-            <a:schemeClr val="lt1"/>
-          </a:fontRef>
-        </p:style>
-        <p:txBody>
-          <a:bodyPr rtlCol="0" anchor="ctr" wrap="square" lIns="73152" rIns="73152" tIns="36576" bIns="36576"/>
-          <a:lstStyle/>
-          <a:p>
-            <a:pPr algn="l">
-              <a:spcAft>
-                <a:spcPts val="0"/>
-              </a:spcAft>
-              <a:defRPr sz="1800" b="1">
-                <a:solidFill>
-                  <a:srgbClr val="2A8B5A"/>
-                </a:solidFill>
-                <a:latin typeface="Noto Sans CJK KR"/>
-              </a:defRPr>
-            </a:pPr>
-            <a:r>
-              <a:t>완료 체크</a:t>
-            </a:r>
-            <a:br/>
-            <a:r>
-              <a:t>□ 명령이 오류 없이 실행된다.</a:t>
-            </a:r>
-            <a:br/>
-            <a:r>
-              <a:t>□ 기대한 파일·topic·frame·parameter 이름이 보인다.</a:t>
-            </a:r>
-            <a:br/>
-            <a:r>
-              <a:t>□ 값의 단위와 방향을 한 문장으로 설명할 수 있다.</a:t>
-            </a:r>
-          </a:p>
-        </p:txBody>
-      </p:sp>
-      <p:sp>
-        <p:nvSpPr>
-          <p:cNvPr id="9" name="TextBox 8"/>
+            <a:br/>
+            <a:r>
+              <a:t>def main():</a:t>
+            </a:r>
+            <a:br/>
+            <a:r>
+              <a:t>    rclpy.init()</a:t>
+            </a:r>
+            <a:br/>
+            <a:r>
+              <a:t>    node = CmdTestNode()</a:t>
+            </a:r>
+            <a:br/>
+            <a:r>
+              <a:t>    try:</a:t>
+            </a:r>
+            <a:br/>
+            <a:r>
+              <a:t>        rclpy.spin(node)</a:t>
+            </a:r>
+            <a:br/>
+            <a:r>
+              <a:t>    except KeyboardInterrupt:</a:t>
+            </a:r>
+            <a:br/>
+            <a:r>
+              <a:t>        pass</a:t>
+            </a:r>
+            <a:br/>
+            <a:r>
+              <a:t>    finally:</a:t>
+            </a:r>
+            <a:br/>
+            <a:r>
+              <a:t>        node.destroy_node()</a:t>
+            </a:r>
+            <a:br/>
+            <a:r>
+              <a:t>        if rclpy.ok():</a:t>
+            </a:r>
+            <a:br/>
+            <a:r>
+              <a:t>            rclpy.shutdown()</a:t>
+            </a:r>
+          </a:p>
+        </p:txBody>
+      </p:sp>
+      <p:sp>
+        <p:nvSpPr>
+          <p:cNvPr id="10" name="TextBox 9"/>
           <p:cNvSpPr txBox="1"/>
           <p:nvPr/>
         </p:nvSpPr>
         <p:spPr>
           <a:xfrm>
-            <a:off x="731520" y="5989320"/>
-            <a:ext cx="10789920" cy="237744"/>
+            <a:off x="749808" y="6181344"/>
+            <a:ext cx="10789920" cy="201168"/>
           </a:xfrm>
           <a:prstGeom prst="rect">
             <a:avLst/>
@@ -20136,15 +20775,15 @@
               <a:spcAft>
                 <a:spcPts val="0"/>
               </a:spcAft>
-              <a:defRPr sz="1500" b="1">
-                <a:solidFill>
-                  <a:srgbClr val="122C4E"/>
-                </a:solidFill>
-                <a:latin typeface="Noto Sans CJK KR"/>
-              </a:defRPr>
-            </a:pPr>
-            <a:r>
-              <a:t>완료 조건: /cmd_vel에서 odom과 바퀴 구동 topic으로 이어지는 경로를 확인한다.</a:t>
+              <a:defRPr sz="1000" b="0">
+                <a:solidFill>
+                  <a:srgbClr val="5C6672"/>
+                </a:solidFill>
+                <a:latin typeface="Noto Sans CJK KR"/>
+              </a:defRPr>
+            </a:pPr>
+            <a:r>
+              <a:t>파일 전체 3/3 · 이 슬라이드 다음에 같은 파일의 나머지 줄이 이어집니다.</a:t>
             </a:r>
           </a:p>
         </p:txBody>
@@ -20201,7 +20840,7 @@
               </a:defRPr>
             </a:pPr>
             <a:r>
-              <a:t>막히면: 증상 → 우선 확인 → 재검증</a:t>
+              <a:t>build → source → run 순서로 실행한다</a:t>
             </a:r>
           </a:p>
         </p:txBody>
@@ -20240,7 +20879,7 @@
               </a:defRPr>
             </a:pPr>
             <a:r>
-              <a:t>오류 메시지를 숨기지 않고 같은 순서로 점검합니다.</a:t>
+              <a:t>새 파일 또는 수정 파일은 build와 source 뒤에만 실행 이름·설정에 반영됩니다.</a:t>
             </a:r>
           </a:p>
         </p:txBody>
@@ -20376,7 +21015,7 @@
               </a:defRPr>
             </a:pPr>
             <a:r>
-              <a:t>현재 단계 오류 대응    |    현재 폴더 ~/agv_ws    |    현재 터미널</a:t>
+              <a:t>현재 단계 실행    |    현재 폴더 ~/agv_ws    |    현재 터미널</a:t>
             </a:r>
           </a:p>
         </p:txBody>
@@ -20389,18 +21028,18 @@
         </p:nvSpPr>
         <p:spPr>
           <a:xfrm>
-            <a:off x="694944" y="1755648"/>
-            <a:ext cx="10972800" cy="1115568"/>
+            <a:off x="658368" y="1700784"/>
+            <a:ext cx="10972800" cy="3182112"/>
           </a:xfrm>
           <a:prstGeom prst="roundRect">
             <a:avLst/>
           </a:prstGeom>
           <a:solidFill>
-            <a:srgbClr val="FFF7F4"/>
+            <a:srgbClr val="1D232D"/>
           </a:solidFill>
           <a:ln>
             <a:solidFill>
-              <a:srgbClr val="EDBEB4"/>
+              <a:srgbClr val="1D232D"/>
             </a:solidFill>
           </a:ln>
         </p:spPr>
@@ -20419,10 +21058,27 @@
           </a:fontRef>
         </p:style>
         <p:txBody>
-          <a:bodyPr rtlCol="0" anchor="ctr"/>
-          <a:lstStyle/>
-          <a:p>
-            <a:pPr algn="ctr"/>
+          <a:bodyPr rtlCol="0" anchor="ctr" wrap="square" lIns="73152" rIns="73152" tIns="36576" bIns="36576"/>
+          <a:lstStyle/>
+          <a:p>
+            <a:pPr algn="l">
+              <a:spcAft>
+                <a:spcPts val="0"/>
+              </a:spcAft>
+              <a:defRPr sz="1600" b="0">
+                <a:solidFill>
+                  <a:srgbClr val="FFFFFF"/>
+                </a:solidFill>
+                <a:latin typeface="DejaVu Sans Mono"/>
+              </a:defRPr>
+            </a:pPr>
+            <a:r>
+              <a:t>ros2 launch agv_gazebo gazebo.launch.py</a:t>
+            </a:r>
+            <a:br/>
+            <a:r>
+              <a:t># 새 터미널: ros2 run agv_control cmd_test_node</a:t>
+            </a:r>
           </a:p>
         </p:txBody>
       </p:sp>
@@ -20434,8 +21090,8 @@
         </p:nvSpPr>
         <p:spPr>
           <a:xfrm>
-            <a:off x="896112" y="1901952"/>
-            <a:ext cx="2926080" cy="274320"/>
+            <a:off x="786384" y="5239512"/>
+            <a:ext cx="1261872" cy="237744"/>
           </a:xfrm>
           <a:prstGeom prst="rect">
             <a:avLst/>
@@ -20454,13 +21110,13 @@
               </a:spcAft>
               <a:defRPr sz="1800" b="1">
                 <a:solidFill>
-                  <a:srgbClr val="BE3B3B"/>
-                </a:solidFill>
-                <a:latin typeface="Noto Sans CJK KR"/>
-              </a:defRPr>
-            </a:pPr>
-            <a:r>
-              <a:t>증상 1: 바퀴는 도는데 이동 안 함</a:t>
+                  <a:srgbClr val="2A8B5A"/>
+                </a:solidFill>
+                <a:latin typeface="Noto Sans CJK KR"/>
+              </a:defRPr>
+            </a:pPr>
+            <a:r>
+              <a:t>확인 기준</a:t>
             </a:r>
           </a:p>
         </p:txBody>
@@ -20473,8 +21129,8 @@
         </p:nvSpPr>
         <p:spPr>
           <a:xfrm>
-            <a:off x="3794760" y="1883664"/>
-            <a:ext cx="7543800" cy="621792"/>
+            <a:off x="786384" y="5532120"/>
+            <a:ext cx="10469880" cy="420624"/>
           </a:xfrm>
           <a:prstGeom prst="rect">
             <a:avLst/>
@@ -20491,7 +21147,7 @@
               <a:spcAft>
                 <a:spcPts val="0"/>
               </a:spcAft>
-              <a:defRPr sz="1600" b="0">
+              <a:defRPr sz="1800" b="0">
                 <a:solidFill>
                   <a:srgbClr val="122C4E"/>
                 </a:solidFill>
@@ -20499,177 +21155,7 @@
               </a:defRPr>
             </a:pPr>
             <a:r>
-              <a:t>우선 확인: joint axis·friction·contact·wheel radius를 확인한다.</a:t>
-            </a:r>
-            <a:br/>
-            <a:r>
-              <a:t>수정 후: ros2 topic info /cmd_vel</a:t>
-            </a:r>
-          </a:p>
-        </p:txBody>
-      </p:sp>
-      <p:sp>
-        <p:nvSpPr>
-          <p:cNvPr id="10" name="Rounded Rectangle 9"/>
-          <p:cNvSpPr/>
-          <p:nvPr/>
-        </p:nvSpPr>
-        <p:spPr>
-          <a:xfrm>
-            <a:off x="694944" y="3172968"/>
-            <a:ext cx="10972800" cy="1115568"/>
-          </a:xfrm>
-          <a:prstGeom prst="roundRect">
-            <a:avLst/>
-          </a:prstGeom>
-          <a:solidFill>
-            <a:srgbClr val="FFF7F4"/>
-          </a:solidFill>
-          <a:ln>
-            <a:solidFill>
-              <a:srgbClr val="EDBEB4"/>
-            </a:solidFill>
-          </a:ln>
-        </p:spPr>
-        <p:style>
-          <a:lnRef idx="1">
-            <a:schemeClr val="accent1"/>
-          </a:lnRef>
-          <a:fillRef idx="3">
-            <a:schemeClr val="accent1"/>
-          </a:fillRef>
-          <a:effectRef idx="2">
-            <a:schemeClr val="accent1"/>
-          </a:effectRef>
-          <a:fontRef idx="minor">
-            <a:schemeClr val="lt1"/>
-          </a:fontRef>
-        </p:style>
-        <p:txBody>
-          <a:bodyPr rtlCol="0" anchor="ctr"/>
-          <a:lstStyle/>
-          <a:p>
-            <a:pPr algn="ctr"/>
-          </a:p>
-        </p:txBody>
-      </p:sp>
-      <p:sp>
-        <p:nvSpPr>
-          <p:cNvPr id="11" name="TextBox 10"/>
-          <p:cNvSpPr txBox="1"/>
-          <p:nvPr/>
-        </p:nvSpPr>
-        <p:spPr>
-          <a:xfrm>
-            <a:off x="896112" y="3319272"/>
-            <a:ext cx="2926080" cy="274320"/>
-          </a:xfrm>
-          <a:prstGeom prst="rect">
-            <a:avLst/>
-          </a:prstGeom>
-          <a:noFill/>
-        </p:spPr>
-        <p:txBody>
-          <a:bodyPr wrap="square" lIns="73152" rIns="73152" tIns="36576" bIns="36576">
-            <a:spAutoFit/>
-          </a:bodyPr>
-          <a:lstStyle/>
-          <a:p>
-            <a:pPr algn="l">
-              <a:spcAft>
-                <a:spcPts val="0"/>
-              </a:spcAft>
-              <a:defRPr sz="1800" b="1">
-                <a:solidFill>
-                  <a:srgbClr val="BE3B3B"/>
-                </a:solidFill>
-                <a:latin typeface="Noto Sans CJK KR"/>
-              </a:defRPr>
-            </a:pPr>
-            <a:r>
-              <a:t>증상 2: 회전 방향이 반대</a:t>
-            </a:r>
-          </a:p>
-        </p:txBody>
-      </p:sp>
-      <p:sp>
-        <p:nvSpPr>
-          <p:cNvPr id="12" name="TextBox 11"/>
-          <p:cNvSpPr txBox="1"/>
-          <p:nvPr/>
-        </p:nvSpPr>
-        <p:spPr>
-          <a:xfrm>
-            <a:off x="3794760" y="3300984"/>
-            <a:ext cx="7543800" cy="621792"/>
-          </a:xfrm>
-          <a:prstGeom prst="rect">
-            <a:avLst/>
-          </a:prstGeom>
-          <a:noFill/>
-        </p:spPr>
-        <p:txBody>
-          <a:bodyPr wrap="square" lIns="73152" rIns="73152" tIns="36576" bIns="36576">
-            <a:spAutoFit/>
-          </a:bodyPr>
-          <a:lstStyle/>
-          <a:p>
-            <a:pPr algn="l">
-              <a:spcAft>
-                <a:spcPts val="0"/>
-              </a:spcAft>
-              <a:defRPr sz="1600" b="0">
-                <a:solidFill>
-                  <a:srgbClr val="122C4E"/>
-                </a:solidFill>
-                <a:latin typeface="Noto Sans CJK KR"/>
-              </a:defRPr>
-            </a:pPr>
-            <a:r>
-              <a:t>우선 확인: left/right joint와 angular.z 부호를 확인한다.</a:t>
-            </a:r>
-            <a:br/>
-            <a:r>
-              <a:t>수정 후: ros2 topic info /cmd_vel</a:t>
-            </a:r>
-          </a:p>
-        </p:txBody>
-      </p:sp>
-      <p:sp>
-        <p:nvSpPr>
-          <p:cNvPr id="13" name="TextBox 12"/>
-          <p:cNvSpPr txBox="1"/>
-          <p:nvPr/>
-        </p:nvSpPr>
-        <p:spPr>
-          <a:xfrm>
-            <a:off x="822960" y="5102352"/>
-            <a:ext cx="10607040" cy="402336"/>
-          </a:xfrm>
-          <a:prstGeom prst="rect">
-            <a:avLst/>
-          </a:prstGeom>
-          <a:noFill/>
-        </p:spPr>
-        <p:txBody>
-          <a:bodyPr wrap="square" lIns="73152" rIns="73152" tIns="36576" bIns="36576">
-            <a:spAutoFit/>
-          </a:bodyPr>
-          <a:lstStyle/>
-          <a:p>
-            <a:pPr algn="ctr">
-              <a:spcAft>
-                <a:spcPts val="0"/>
-              </a:spcAft>
-              <a:defRPr sz="1800" b="1">
-                <a:solidFill>
-                  <a:srgbClr val="DB7E22"/>
-                </a:solidFill>
-                <a:latin typeface="Noto Sans CJK KR"/>
-              </a:defRPr>
-            </a:pPr>
-            <a:r>
-              <a:t>공통 순서: ① 현재 폴더 ② source ③ 파일 경로 ④ 이름/타입/단위 ⑤ build·source 후 재실행</a:t>
+              <a:t>/cmd_vel에서 odom과 바퀴 구동 topic으로 이어지는 경로를 확인한다.</a:t>
             </a:r>
           </a:p>
         </p:txBody>
@@ -20726,7 +21212,7 @@
               </a:defRPr>
             </a:pPr>
             <a:r>
-              <a:t>미니 실습: 값 하나를 바꾸고 결과를 비교한다</a:t>
+              <a:t>정상 결과: 실제 환경에서 확인한 출력</a:t>
             </a:r>
           </a:p>
         </p:txBody>
@@ -20765,7 +21251,7 @@
               </a:defRPr>
             </a:pPr>
             <a:r>
-              <a:t>정상 결과를 만든 뒤에는 한 번에 하나의 값만 바꿉니다.</a:t>
+              <a:t>실제 ROS 2 환경의 파일·패키지·구성 검증 로그</a:t>
             </a:r>
           </a:p>
         </p:txBody>
@@ -20848,132 +21334,40 @@
           </a:p>
         </p:txBody>
       </p:sp>
-      <p:sp>
-        <p:nvSpPr>
-          <p:cNvPr id="6" name="Rectangle 5"/>
-          <p:cNvSpPr/>
-          <p:nvPr/>
-        </p:nvSpPr>
-        <p:spPr>
-          <a:xfrm>
-            <a:off x="566928" y="1188720"/>
-            <a:ext cx="11064240" cy="347472"/>
-          </a:xfrm>
-          <a:prstGeom prst="rect">
-            <a:avLst/>
-          </a:prstGeom>
-          <a:solidFill>
-            <a:srgbClr val="F4F7FB"/>
-          </a:solidFill>
-          <a:ln>
-            <a:solidFill>
-              <a:srgbClr val="F4F7FB"/>
-            </a:solidFill>
-          </a:ln>
-        </p:spPr>
-        <p:style>
-          <a:lnRef idx="1">
-            <a:schemeClr val="accent1"/>
-          </a:lnRef>
-          <a:fillRef idx="3">
-            <a:schemeClr val="accent1"/>
-          </a:fillRef>
-          <a:effectRef idx="2">
-            <a:schemeClr val="accent1"/>
-          </a:effectRef>
-          <a:fontRef idx="minor">
-            <a:schemeClr val="lt1"/>
-          </a:fontRef>
-        </p:style>
-        <p:txBody>
-          <a:bodyPr rtlCol="0" anchor="ctr" wrap="square" lIns="73152" rIns="73152" tIns="36576" bIns="36576"/>
-          <a:lstStyle/>
-          <a:p>
-            <a:pPr algn="l">
-              <a:spcAft>
-                <a:spcPts val="0"/>
-              </a:spcAft>
-              <a:defRPr sz="1300" b="1">
-                <a:solidFill>
-                  <a:srgbClr val="122C4E"/>
-                </a:solidFill>
-                <a:latin typeface="Noto Sans CJK KR"/>
-              </a:defRPr>
-            </a:pPr>
-            <a:r>
-              <a:t>현재 단계 미니 실습    |    현재 폴더 ~/agv_ws    |    현재 터미널</a:t>
-            </a:r>
-          </a:p>
-        </p:txBody>
-      </p:sp>
-      <p:sp>
-        <p:nvSpPr>
-          <p:cNvPr id="7" name="Rounded Rectangle 6"/>
-          <p:cNvSpPr/>
-          <p:nvPr/>
-        </p:nvSpPr>
-        <p:spPr>
-          <a:xfrm>
-            <a:off x="749808" y="1874519"/>
-            <a:ext cx="10652760" cy="1993392"/>
-          </a:xfrm>
-          <a:prstGeom prst="roundRect">
-            <a:avLst/>
-          </a:prstGeom>
-          <a:solidFill>
-            <a:srgbClr val="FFF8EB"/>
-          </a:solidFill>
-          <a:ln>
-            <a:solidFill>
-              <a:srgbClr val="ECC680"/>
-            </a:solidFill>
-          </a:ln>
-        </p:spPr>
-        <p:style>
-          <a:lnRef idx="1">
-            <a:schemeClr val="accent1"/>
-          </a:lnRef>
-          <a:fillRef idx="3">
-            <a:schemeClr val="accent1"/>
-          </a:fillRef>
-          <a:effectRef idx="2">
-            <a:schemeClr val="accent1"/>
-          </a:effectRef>
-          <a:fontRef idx="minor">
-            <a:schemeClr val="lt1"/>
-          </a:fontRef>
-        </p:style>
-        <p:txBody>
-          <a:bodyPr rtlCol="0" anchor="ctr" wrap="square" lIns="73152" rIns="73152" tIns="36576" bIns="36576"/>
-          <a:lstStyle/>
-          <a:p>
-            <a:pPr algn="ctr">
-              <a:spcAft>
-                <a:spcPts val="0"/>
-              </a:spcAft>
-              <a:defRPr sz="2300" b="1">
-                <a:solidFill>
-                  <a:srgbClr val="122C4E"/>
-                </a:solidFill>
-                <a:latin typeface="Noto Sans CJK KR"/>
-              </a:defRPr>
-            </a:pPr>
-            <a:r>
-              <a:t>0.15 m/s 직진, 0.4 rad/s 회전, 둘 다 비영 값인 곡선을 각각 2초씩 시험해 경로를 비교한다.</a:t>
-            </a:r>
-          </a:p>
-        </p:txBody>
-      </p:sp>
-      <p:sp>
-        <p:nvSpPr>
-          <p:cNvPr id="8" name="TextBox 7"/>
+      <p:pic>
+        <p:nvPicPr>
+          <p:cNvPr id="6" name="Picture 5" descr="validation_terminal.png"/>
+          <p:cNvPicPr>
+            <a:picLocks noChangeAspect="1"/>
+          </p:cNvPicPr>
+          <p:nvPr/>
+        </p:nvPicPr>
+        <p:blipFill>
+          <a:blip r:embed="rId2"/>
+          <a:stretch>
+            <a:fillRect/>
+          </a:stretch>
+        </p:blipFill>
+        <p:spPr>
+          <a:xfrm>
+            <a:off x="790956" y="1884338"/>
+            <a:ext cx="10607040" cy="3738546"/>
+          </a:xfrm>
+          <a:prstGeom prst="rect">
+            <a:avLst/>
+          </a:prstGeom>
+        </p:spPr>
+      </p:pic>
+      <p:sp>
+        <p:nvSpPr>
+          <p:cNvPr id="7" name="TextBox 6"/>
           <p:cNvSpPr txBox="1"/>
           <p:nvPr/>
         </p:nvSpPr>
         <p:spPr>
           <a:xfrm>
-            <a:off x="877824" y="4590288"/>
-            <a:ext cx="10241280" cy="594360"/>
+            <a:off x="777240" y="6217920"/>
+            <a:ext cx="10607040" cy="182880"/>
           </a:xfrm>
           <a:prstGeom prst="rect">
             <a:avLst/>
@@ -20990,15 +21384,15 @@
               <a:spcAft>
                 <a:spcPts val="0"/>
               </a:spcAft>
-              <a:defRPr sz="1900" b="1">
-                <a:solidFill>
-                  <a:srgbClr val="DB7E22"/>
-                </a:solidFill>
-                <a:latin typeface="Noto Sans CJK KR"/>
-              </a:defRPr>
-            </a:pPr>
-            <a:r>
-              <a:t>기록할 것: 바꾼 값(단위) · 기대한 변화 · 실제 출력/화면 · 원래 값으로 되돌린 결과</a:t>
+              <a:defRPr sz="1100" b="1">
+                <a:solidFill>
+                  <a:srgbClr val="2A8B5A"/>
+                </a:solidFill>
+                <a:latin typeface="Noto Sans CJK KR"/>
+              </a:defRPr>
+            </a:pPr>
+            <a:r>
+              <a:t>① 명령/설정  ② 정상 출력 또는 화면  ③ 다음 검증 명령으로 재확인</a:t>
             </a:r>
           </a:p>
         </p:txBody>
@@ -21055,7 +21449,7 @@
               </a:defRPr>
             </a:pPr>
             <a:r>
-              <a:t>체크포인트를 저장하고 다음 모듈로 넘긴다</a:t>
+              <a:t>객관적 검증 명령으로 완료를 확인한다</a:t>
             </a:r>
           </a:p>
         </p:txBody>
@@ -21094,7 +21488,7 @@
               </a:defRPr>
             </a:pPr>
             <a:r>
-              <a:t>현재 Complete는 다음 Starter의 기준선입니다.</a:t>
+              <a:t>화면만 보지 말고 topic·frame·파일·parameter를 다시 확인합니다.</a:t>
             </a:r>
           </a:p>
         </p:txBody>
@@ -21230,7 +21624,7 @@
               </a:defRPr>
             </a:pPr>
             <a:r>
-              <a:t>현재 단계 체크포인트    |    현재 폴더 ~/agv_ws    |    현재 터미널</a:t>
+              <a:t>현재 단계 검증    |    현재 폴더 ~/agv_ws    |    현재 터미널</a:t>
             </a:r>
           </a:p>
         </p:txBody>
@@ -21243,8 +21637,70 @@
         </p:nvSpPr>
         <p:spPr>
           <a:xfrm>
-            <a:off x="685800" y="1737360"/>
-            <a:ext cx="10972800" cy="3611880"/>
+            <a:off x="658368" y="1755648"/>
+            <a:ext cx="10972800" cy="2148840"/>
+          </a:xfrm>
+          <a:prstGeom prst="roundRect">
+            <a:avLst/>
+          </a:prstGeom>
+          <a:solidFill>
+            <a:srgbClr val="1D232D"/>
+          </a:solidFill>
+          <a:ln>
+            <a:solidFill>
+              <a:srgbClr val="1D232D"/>
+            </a:solidFill>
+          </a:ln>
+        </p:spPr>
+        <p:style>
+          <a:lnRef idx="1">
+            <a:schemeClr val="accent1"/>
+          </a:lnRef>
+          <a:fillRef idx="3">
+            <a:schemeClr val="accent1"/>
+          </a:fillRef>
+          <a:effectRef idx="2">
+            <a:schemeClr val="accent1"/>
+          </a:effectRef>
+          <a:fontRef idx="minor">
+            <a:schemeClr val="lt1"/>
+          </a:fontRef>
+        </p:style>
+        <p:txBody>
+          <a:bodyPr rtlCol="0" anchor="ctr" wrap="square" lIns="73152" rIns="73152" tIns="36576" bIns="36576"/>
+          <a:lstStyle/>
+          <a:p>
+            <a:pPr algn="l">
+              <a:spcAft>
+                <a:spcPts val="0"/>
+              </a:spcAft>
+              <a:defRPr sz="1600" b="0">
+                <a:solidFill>
+                  <a:srgbClr val="FFFFFF"/>
+                </a:solidFill>
+                <a:latin typeface="DejaVu Sans Mono"/>
+              </a:defRPr>
+            </a:pPr>
+            <a:r>
+              <a:t>ros2 topic info /cmd_vel</a:t>
+            </a:r>
+            <a:br/>
+            <a:r>
+              <a:t>ros2 topic echo /odom --once</a:t>
+            </a:r>
+          </a:p>
+        </p:txBody>
+      </p:sp>
+      <p:sp>
+        <p:nvSpPr>
+          <p:cNvPr id="8" name="Rounded Rectangle 7"/>
+          <p:cNvSpPr/>
+          <p:nvPr/>
+        </p:nvSpPr>
+        <p:spPr>
+          <a:xfrm>
+            <a:off x="658368" y="4206240"/>
+            <a:ext cx="10972800" cy="1554480"/>
           </a:xfrm>
           <a:prstGeom prst="roundRect">
             <a:avLst/>
@@ -21254,7 +21710,7 @@
           </a:solidFill>
           <a:ln>
             <a:solidFill>
-              <a:srgbClr val="D2DCE8"/>
+              <a:srgbClr val="D1DFD5"/>
             </a:solidFill>
           </a:ln>
         </p:spPr>
@@ -21273,112 +21729,34 @@
           </a:fontRef>
         </p:style>
         <p:txBody>
-          <a:bodyPr rtlCol="0" anchor="ctr"/>
-          <a:lstStyle/>
-          <a:p>
-            <a:pPr algn="ctr"/>
-          </a:p>
-        </p:txBody>
-      </p:sp>
-      <p:sp>
-        <p:nvSpPr>
-          <p:cNvPr id="8" name="TextBox 7"/>
-          <p:cNvSpPr txBox="1"/>
-          <p:nvPr/>
-        </p:nvSpPr>
-        <p:spPr>
-          <a:xfrm>
-            <a:off x="896112" y="1993392"/>
-            <a:ext cx="10332720" cy="2971800"/>
-          </a:xfrm>
-          <a:prstGeom prst="rect">
-            <a:avLst/>
-          </a:prstGeom>
-          <a:noFill/>
-        </p:spPr>
-        <p:txBody>
-          <a:bodyPr wrap="square" lIns="109728" rIns="109728">
-            <a:spAutoFit/>
-          </a:bodyPr>
-          <a:lstStyle/>
-          <a:p>
-            <a:pPr>
-              <a:spcAft>
-                <a:spcPts val="800"/>
-              </a:spcAft>
-              <a:defRPr sz="1800">
-                <a:solidFill>
-                  <a:srgbClr val="122C4E"/>
-                </a:solidFill>
-                <a:latin typeface="Noto Sans CJK KR"/>
-              </a:defRPr>
-            </a:pPr>
-            <a:r>
-              <a:t>• □ 완료 화면: /cmd_vel에서 odom과 바퀴 구동 topic으로 이어지는 경로를 확인한다.</a:t>
-            </a:r>
-          </a:p>
-          <a:p>
-            <a:pPr>
-              <a:spcAft>
-                <a:spcPts val="800"/>
-              </a:spcAft>
-              <a:defRPr sz="1800">
-                <a:solidFill>
-                  <a:srgbClr val="122C4E"/>
-                </a:solidFill>
-                <a:latin typeface="Noto Sans CJK KR"/>
-              </a:defRPr>
-            </a:pPr>
-            <a:r>
-              <a:t>• □ Complete 파일: blocks/C_drive_visualization/M09_differential_drive/complete/</a:t>
-            </a:r>
-          </a:p>
-          <a:p>
-            <a:pPr>
-              <a:spcAft>
-                <a:spcPts val="800"/>
-              </a:spcAft>
-              <a:defRPr sz="1800">
-                <a:solidFill>
-                  <a:srgbClr val="122C4E"/>
-                </a:solidFill>
-                <a:latin typeface="Noto Sans CJK KR"/>
-              </a:defRPr>
-            </a:pPr>
-            <a:r>
-              <a:t>• □ 정상 로그·캡처: logs/validation.log, screenshots/validation_terminal.png</a:t>
-            </a:r>
-          </a:p>
-          <a:p>
-            <a:pPr>
-              <a:spcAft>
-                <a:spcPts val="800"/>
-              </a:spcAft>
-              <a:defRPr sz="1800">
-                <a:solidFill>
-                  <a:srgbClr val="122C4E"/>
-                </a:solidFill>
-                <a:latin typeface="Noto Sans CJK KR"/>
-              </a:defRPr>
-            </a:pPr>
-            <a:r>
-              <a:t>• □ 버전 식별: CHECKSUM_or_TAG.txt의 SHA-256 manifest</a:t>
-            </a:r>
-          </a:p>
-          <a:p>
-            <a:pPr>
-              <a:spcAft>
-                <a:spcPts val="800"/>
-              </a:spcAft>
-              <a:defRPr sz="1800">
-                <a:solidFill>
-                  <a:srgbClr val="122C4E"/>
-                </a:solidFill>
-                <a:latin typeface="Noto Sans CJK KR"/>
-              </a:defRPr>
-            </a:pPr>
-            <a:r>
-              <a:t>• □ 다음 시작 조건: M10 ros_gz_bridge</a:t>
+          <a:bodyPr rtlCol="0" anchor="ctr" wrap="square" lIns="73152" rIns="73152" tIns="36576" bIns="36576"/>
+          <a:lstStyle/>
+          <a:p>
+            <a:pPr algn="l">
+              <a:spcAft>
+                <a:spcPts val="0"/>
+              </a:spcAft>
+              <a:defRPr sz="1800" b="1">
+                <a:solidFill>
+                  <a:srgbClr val="2A8B5A"/>
+                </a:solidFill>
+                <a:latin typeface="Noto Sans CJK KR"/>
+              </a:defRPr>
+            </a:pPr>
+            <a:r>
+              <a:t>완료 체크</a:t>
+            </a:r>
+            <a:br/>
+            <a:r>
+              <a:t>□ 명령이 오류 없이 실행된다.</a:t>
+            </a:r>
+            <a:br/>
+            <a:r>
+              <a:t>□ 기대한 파일·topic·frame·parameter 이름이 보인다.</a:t>
+            </a:r>
+            <a:br/>
+            <a:r>
+              <a:t>□ 값의 단위와 방향을 한 문장으로 설명할 수 있다.</a:t>
             </a:r>
           </a:p>
         </p:txBody>
@@ -21391,8 +21769,8 @@
         </p:nvSpPr>
         <p:spPr>
           <a:xfrm>
-            <a:off x="868680" y="5596128"/>
-            <a:ext cx="10515600" cy="338328"/>
+            <a:off x="731520" y="5989320"/>
+            <a:ext cx="10789920" cy="237744"/>
           </a:xfrm>
           <a:prstGeom prst="rect">
             <a:avLst/>
@@ -21405,19 +21783,19 @@
           </a:bodyPr>
           <a:lstStyle/>
           <a:p>
-            <a:pPr algn="ctr">
-              <a:spcAft>
-                <a:spcPts val="0"/>
-              </a:spcAft>
-              <a:defRPr sz="1700" b="1">
-                <a:solidFill>
-                  <a:srgbClr val="2A8B5A"/>
-                </a:solidFill>
-                <a:latin typeface="Noto Sans CJK KR"/>
-              </a:defRPr>
-            </a:pPr>
-            <a:r>
-              <a:t>다음 모듈을 시작하기 전, 이 슬라이드의 Complete와 다음 모듈의 Starter를 비교합니다.</a:t>
+            <a:pPr algn="l">
+              <a:spcAft>
+                <a:spcPts val="0"/>
+              </a:spcAft>
+              <a:defRPr sz="1500" b="1">
+                <a:solidFill>
+                  <a:srgbClr val="122C4E"/>
+                </a:solidFill>
+                <a:latin typeface="Noto Sans CJK KR"/>
+              </a:defRPr>
+            </a:pPr>
+            <a:r>
+              <a:t>완료 조건: /cmd_vel에서 odom과 바퀴 구동 topic으로 이어지는 경로를 확인한다.</a:t>
             </a:r>
           </a:p>
         </p:txBody>
@@ -21474,7 +21852,7 @@
               </a:defRPr>
             </a:pPr>
             <a:r>
-              <a:t>공식 참고 자료</a:t>
+              <a:t>막히면: 증상 → 우선 확인 → 재검증</a:t>
             </a:r>
           </a:p>
         </p:txBody>
@@ -21513,7 +21891,7 @@
               </a:defRPr>
             </a:pPr>
             <a:r>
-              <a:t>본문 단계는 링크를 열지 않아도 완료할 수 있으며, 링크는 개념을 더 확인할 때만 사용합니다.</a:t>
+              <a:t>오류 메시지를 숨기지 않고 같은 순서로 점검합니다.</a:t>
             </a:r>
           </a:p>
         </p:txBody>
@@ -21598,16 +21976,16 @@
       </p:sp>
       <p:sp>
         <p:nvSpPr>
-          <p:cNvPr id="6" name="Rounded Rectangle 5"/>
+          <p:cNvPr id="6" name="Rectangle 5"/>
           <p:cNvSpPr/>
           <p:nvPr/>
         </p:nvSpPr>
         <p:spPr>
           <a:xfrm>
-            <a:off x="658368" y="1554480"/>
-            <a:ext cx="10972800" cy="4526280"/>
-          </a:xfrm>
-          <a:prstGeom prst="roundRect">
+            <a:off x="566928" y="1188720"/>
+            <a:ext cx="11064240" cy="347472"/>
+          </a:xfrm>
+          <a:prstGeom prst="rect">
             <a:avLst/>
           </a:prstGeom>
           <a:solidFill>
@@ -21615,7 +21993,7 @@
           </a:solidFill>
           <a:ln>
             <a:solidFill>
-              <a:srgbClr val="D7DFE9"/>
+              <a:srgbClr val="F4F7FB"/>
             </a:solidFill>
           </a:ln>
         </p:spPr>
@@ -21634,6 +22012,64 @@
           </a:fontRef>
         </p:style>
         <p:txBody>
+          <a:bodyPr rtlCol="0" anchor="ctr" wrap="square" lIns="73152" rIns="73152" tIns="36576" bIns="36576"/>
+          <a:lstStyle/>
+          <a:p>
+            <a:pPr algn="l">
+              <a:spcAft>
+                <a:spcPts val="0"/>
+              </a:spcAft>
+              <a:defRPr sz="1300" b="1">
+                <a:solidFill>
+                  <a:srgbClr val="122C4E"/>
+                </a:solidFill>
+                <a:latin typeface="Noto Sans CJK KR"/>
+              </a:defRPr>
+            </a:pPr>
+            <a:r>
+              <a:t>현재 단계 오류 대응    |    현재 폴더 ~/agv_ws    |    현재 터미널</a:t>
+            </a:r>
+          </a:p>
+        </p:txBody>
+      </p:sp>
+      <p:sp>
+        <p:nvSpPr>
+          <p:cNvPr id="7" name="Rounded Rectangle 6"/>
+          <p:cNvSpPr/>
+          <p:nvPr/>
+        </p:nvSpPr>
+        <p:spPr>
+          <a:xfrm>
+            <a:off x="694944" y="1755648"/>
+            <a:ext cx="10972800" cy="1115568"/>
+          </a:xfrm>
+          <a:prstGeom prst="roundRect">
+            <a:avLst/>
+          </a:prstGeom>
+          <a:solidFill>
+            <a:srgbClr val="FFF7F4"/>
+          </a:solidFill>
+          <a:ln>
+            <a:solidFill>
+              <a:srgbClr val="EDBEB4"/>
+            </a:solidFill>
+          </a:ln>
+        </p:spPr>
+        <p:style>
+          <a:lnRef idx="1">
+            <a:schemeClr val="accent1"/>
+          </a:lnRef>
+          <a:fillRef idx="3">
+            <a:schemeClr val="accent1"/>
+          </a:fillRef>
+          <a:effectRef idx="2">
+            <a:schemeClr val="accent1"/>
+          </a:effectRef>
+          <a:fontRef idx="minor">
+            <a:schemeClr val="lt1"/>
+          </a:fontRef>
+        </p:style>
+        <p:txBody>
           <a:bodyPr rtlCol="0" anchor="ctr"/>
           <a:lstStyle/>
           <a:p>
@@ -21643,14 +22079,14 @@
       </p:sp>
       <p:sp>
         <p:nvSpPr>
-          <p:cNvPr id="7" name="TextBox 6"/>
+          <p:cNvPr id="8" name="TextBox 7"/>
           <p:cNvSpPr txBox="1"/>
           <p:nvPr/>
         </p:nvSpPr>
         <p:spPr>
           <a:xfrm>
-            <a:off x="914400" y="1810512"/>
-            <a:ext cx="3840480" cy="256032"/>
+            <a:off x="896112" y="1901952"/>
+            <a:ext cx="2926080" cy="274320"/>
           </a:xfrm>
           <a:prstGeom prst="rect">
             <a:avLst/>
@@ -21667,29 +22103,29 @@
               <a:spcAft>
                 <a:spcPts val="0"/>
               </a:spcAft>
-              <a:defRPr sz="1700" b="1">
-                <a:solidFill>
-                  <a:srgbClr val="122C4E"/>
-                </a:solidFill>
-                <a:latin typeface="Noto Sans CJK KR"/>
-              </a:defRPr>
-            </a:pPr>
-            <a:r>
-              <a:t>ROS 2 Jazzy — Gazebo Simulation</a:t>
-            </a:r>
-          </a:p>
-        </p:txBody>
-      </p:sp>
-      <p:sp>
-        <p:nvSpPr>
-          <p:cNvPr id="8" name="TextBox 7"/>
+              <a:defRPr sz="1800" b="1">
+                <a:solidFill>
+                  <a:srgbClr val="BE3B3B"/>
+                </a:solidFill>
+                <a:latin typeface="Noto Sans CJK KR"/>
+              </a:defRPr>
+            </a:pPr>
+            <a:r>
+              <a:t>증상 1: 바퀴는 도는데 이동 안 함</a:t>
+            </a:r>
+          </a:p>
+        </p:txBody>
+      </p:sp>
+      <p:sp>
+        <p:nvSpPr>
+          <p:cNvPr id="9" name="TextBox 8"/>
           <p:cNvSpPr txBox="1"/>
           <p:nvPr/>
         </p:nvSpPr>
         <p:spPr>
           <a:xfrm>
-            <a:off x="914400" y="2121408"/>
-            <a:ext cx="9966960" cy="256032"/>
+            <a:off x="3794760" y="1883664"/>
+            <a:ext cx="7543800" cy="621792"/>
           </a:xfrm>
           <a:prstGeom prst="rect">
             <a:avLst/>
@@ -21706,29 +22142,78 @@
               <a:spcAft>
                 <a:spcPts val="0"/>
               </a:spcAft>
-              <a:defRPr sz="1200" b="0">
-                <a:solidFill>
-                  <a:srgbClr val="225B9B"/>
-                </a:solidFill>
-                <a:latin typeface="DejaVu Sans Mono"/>
-              </a:defRPr>
-            </a:pPr>
-            <a:r>
-              <a:t>https://docs.ros.org/en/jazzy/Tutorials/Advanced/Simulators/Gazebo/Simulation-Gazebo.html</a:t>
-            </a:r>
-          </a:p>
-        </p:txBody>
-      </p:sp>
-      <p:sp>
-        <p:nvSpPr>
-          <p:cNvPr id="9" name="TextBox 8"/>
+              <a:defRPr sz="1600" b="0">
+                <a:solidFill>
+                  <a:srgbClr val="122C4E"/>
+                </a:solidFill>
+                <a:latin typeface="Noto Sans CJK KR"/>
+              </a:defRPr>
+            </a:pPr>
+            <a:r>
+              <a:t>우선 확인: joint axis·friction·contact·wheel radius를 확인한다.</a:t>
+            </a:r>
+            <a:br/>
+            <a:r>
+              <a:t>수정 후: ros2 topic info /cmd_vel</a:t>
+            </a:r>
+          </a:p>
+        </p:txBody>
+      </p:sp>
+      <p:sp>
+        <p:nvSpPr>
+          <p:cNvPr id="10" name="Rounded Rectangle 9"/>
+          <p:cNvSpPr/>
+          <p:nvPr/>
+        </p:nvSpPr>
+        <p:spPr>
+          <a:xfrm>
+            <a:off x="694944" y="3172968"/>
+            <a:ext cx="10972800" cy="1115568"/>
+          </a:xfrm>
+          <a:prstGeom prst="roundRect">
+            <a:avLst/>
+          </a:prstGeom>
+          <a:solidFill>
+            <a:srgbClr val="FFF7F4"/>
+          </a:solidFill>
+          <a:ln>
+            <a:solidFill>
+              <a:srgbClr val="EDBEB4"/>
+            </a:solidFill>
+          </a:ln>
+        </p:spPr>
+        <p:style>
+          <a:lnRef idx="1">
+            <a:schemeClr val="accent1"/>
+          </a:lnRef>
+          <a:fillRef idx="3">
+            <a:schemeClr val="accent1"/>
+          </a:fillRef>
+          <a:effectRef idx="2">
+            <a:schemeClr val="accent1"/>
+          </a:effectRef>
+          <a:fontRef idx="minor">
+            <a:schemeClr val="lt1"/>
+          </a:fontRef>
+        </p:style>
+        <p:txBody>
+          <a:bodyPr rtlCol="0" anchor="ctr"/>
+          <a:lstStyle/>
+          <a:p>
+            <a:pPr algn="ctr"/>
+          </a:p>
+        </p:txBody>
+      </p:sp>
+      <p:sp>
+        <p:nvSpPr>
+          <p:cNvPr id="11" name="TextBox 10"/>
           <p:cNvSpPr txBox="1"/>
           <p:nvPr/>
         </p:nvSpPr>
         <p:spPr>
           <a:xfrm>
-            <a:off x="914400" y="2816352"/>
-            <a:ext cx="3840480" cy="256032"/>
+            <a:off x="896112" y="3319272"/>
+            <a:ext cx="2926080" cy="274320"/>
           </a:xfrm>
           <a:prstGeom prst="rect">
             <a:avLst/>
@@ -21745,29 +22230,29 @@
               <a:spcAft>
                 <a:spcPts val="0"/>
               </a:spcAft>
-              <a:defRPr sz="1700" b="1">
-                <a:solidFill>
-                  <a:srgbClr val="122C4E"/>
-                </a:solidFill>
-                <a:latin typeface="Noto Sans CJK KR"/>
-              </a:defRPr>
-            </a:pPr>
-            <a:r>
-              <a:t>ROS 2 Jazzy — URDF / robot_state_publisher</a:t>
-            </a:r>
-          </a:p>
-        </p:txBody>
-      </p:sp>
-      <p:sp>
-        <p:nvSpPr>
-          <p:cNvPr id="10" name="TextBox 9"/>
+              <a:defRPr sz="1800" b="1">
+                <a:solidFill>
+                  <a:srgbClr val="BE3B3B"/>
+                </a:solidFill>
+                <a:latin typeface="Noto Sans CJK KR"/>
+              </a:defRPr>
+            </a:pPr>
+            <a:r>
+              <a:t>증상 2: 회전 방향이 반대</a:t>
+            </a:r>
+          </a:p>
+        </p:txBody>
+      </p:sp>
+      <p:sp>
+        <p:nvSpPr>
+          <p:cNvPr id="12" name="TextBox 11"/>
           <p:cNvSpPr txBox="1"/>
           <p:nvPr/>
         </p:nvSpPr>
         <p:spPr>
           <a:xfrm>
-            <a:off x="914400" y="3127248"/>
-            <a:ext cx="9966960" cy="256032"/>
+            <a:off x="3794760" y="3300984"/>
+            <a:ext cx="7543800" cy="621792"/>
           </a:xfrm>
           <a:prstGeom prst="rect">
             <a:avLst/>
@@ -21784,29 +22269,33 @@
               <a:spcAft>
                 <a:spcPts val="0"/>
               </a:spcAft>
-              <a:defRPr sz="1200" b="0">
-                <a:solidFill>
-                  <a:srgbClr val="225B9B"/>
-                </a:solidFill>
-                <a:latin typeface="DejaVu Sans Mono"/>
-              </a:defRPr>
-            </a:pPr>
-            <a:r>
-              <a:t>https://docs.ros.org/en/jazzy/Tutorials/Intermediate/URDF/Using-URDF-with-Robot-State-Publisher-py.html</a:t>
-            </a:r>
-          </a:p>
-        </p:txBody>
-      </p:sp>
-      <p:sp>
-        <p:nvSpPr>
-          <p:cNvPr id="11" name="TextBox 10"/>
+              <a:defRPr sz="1600" b="0">
+                <a:solidFill>
+                  <a:srgbClr val="122C4E"/>
+                </a:solidFill>
+                <a:latin typeface="Noto Sans CJK KR"/>
+              </a:defRPr>
+            </a:pPr>
+            <a:r>
+              <a:t>우선 확인: left/right joint와 angular.z 부호를 확인한다.</a:t>
+            </a:r>
+            <a:br/>
+            <a:r>
+              <a:t>수정 후: ros2 topic info /cmd_vel</a:t>
+            </a:r>
+          </a:p>
+        </p:txBody>
+      </p:sp>
+      <p:sp>
+        <p:nvSpPr>
+          <p:cNvPr id="13" name="TextBox 12"/>
           <p:cNvSpPr txBox="1"/>
           <p:nvPr/>
         </p:nvSpPr>
         <p:spPr>
           <a:xfrm>
-            <a:off x="914400" y="3822191"/>
-            <a:ext cx="3840480" cy="256032"/>
+            <a:off x="822960" y="5102352"/>
+            <a:ext cx="10607040" cy="402336"/>
           </a:xfrm>
           <a:prstGeom prst="rect">
             <a:avLst/>
@@ -21819,136 +22308,19 @@
           </a:bodyPr>
           <a:lstStyle/>
           <a:p>
-            <a:pPr algn="l">
-              <a:spcAft>
-                <a:spcPts val="0"/>
-              </a:spcAft>
-              <a:defRPr sz="1700" b="1">
-                <a:solidFill>
-                  <a:srgbClr val="122C4E"/>
-                </a:solidFill>
-                <a:latin typeface="Noto Sans CJK KR"/>
-              </a:defRPr>
-            </a:pPr>
-            <a:r>
-              <a:t>Gazebo — ROS 2 Integration / ros_gz_bridge</a:t>
-            </a:r>
-          </a:p>
-        </p:txBody>
-      </p:sp>
-      <p:sp>
-        <p:nvSpPr>
-          <p:cNvPr id="12" name="TextBox 11"/>
-          <p:cNvSpPr txBox="1"/>
-          <p:nvPr/>
-        </p:nvSpPr>
-        <p:spPr>
-          <a:xfrm>
-            <a:off x="914400" y="4133087"/>
-            <a:ext cx="9966960" cy="256032"/>
-          </a:xfrm>
-          <a:prstGeom prst="rect">
-            <a:avLst/>
-          </a:prstGeom>
-          <a:noFill/>
-        </p:spPr>
-        <p:txBody>
-          <a:bodyPr wrap="square" lIns="73152" rIns="73152" tIns="36576" bIns="36576">
-            <a:spAutoFit/>
-          </a:bodyPr>
-          <a:lstStyle/>
-          <a:p>
-            <a:pPr algn="l">
-              <a:spcAft>
-                <a:spcPts val="0"/>
-              </a:spcAft>
-              <a:defRPr sz="1200" b="0">
-                <a:solidFill>
-                  <a:srgbClr val="225B9B"/>
-                </a:solidFill>
-                <a:latin typeface="DejaVu Sans Mono"/>
-              </a:defRPr>
-            </a:pPr>
-            <a:r>
-              <a:t>https://gazebosim.org/docs/latest/ros2_integration/</a:t>
-            </a:r>
-          </a:p>
-        </p:txBody>
-      </p:sp>
-      <p:sp>
-        <p:nvSpPr>
-          <p:cNvPr id="13" name="TextBox 12"/>
-          <p:cNvSpPr txBox="1"/>
-          <p:nvPr/>
-        </p:nvSpPr>
-        <p:spPr>
-          <a:xfrm>
-            <a:off x="914400" y="4828032"/>
-            <a:ext cx="3840480" cy="256032"/>
-          </a:xfrm>
-          <a:prstGeom prst="rect">
-            <a:avLst/>
-          </a:prstGeom>
-          <a:noFill/>
-        </p:spPr>
-        <p:txBody>
-          <a:bodyPr wrap="square" lIns="73152" rIns="73152" tIns="36576" bIns="36576">
-            <a:spAutoFit/>
-          </a:bodyPr>
-          <a:lstStyle/>
-          <a:p>
-            <a:pPr algn="l">
-              <a:spcAft>
-                <a:spcPts val="0"/>
-              </a:spcAft>
-              <a:defRPr sz="1700" b="1">
-                <a:solidFill>
-                  <a:srgbClr val="122C4E"/>
-                </a:solidFill>
-                <a:latin typeface="Noto Sans CJK KR"/>
-              </a:defRPr>
-            </a:pPr>
-            <a:r>
-              <a:t>ROS 2 Jazzy — rosbag2 Recording and Playback</a:t>
-            </a:r>
-          </a:p>
-        </p:txBody>
-      </p:sp>
-      <p:sp>
-        <p:nvSpPr>
-          <p:cNvPr id="14" name="TextBox 13"/>
-          <p:cNvSpPr txBox="1"/>
-          <p:nvPr/>
-        </p:nvSpPr>
-        <p:spPr>
-          <a:xfrm>
-            <a:off x="914400" y="5138928"/>
-            <a:ext cx="9966960" cy="256032"/>
-          </a:xfrm>
-          <a:prstGeom prst="rect">
-            <a:avLst/>
-          </a:prstGeom>
-          <a:noFill/>
-        </p:spPr>
-        <p:txBody>
-          <a:bodyPr wrap="square" lIns="73152" rIns="73152" tIns="36576" bIns="36576">
-            <a:spAutoFit/>
-          </a:bodyPr>
-          <a:lstStyle/>
-          <a:p>
-            <a:pPr algn="l">
-              <a:spcAft>
-                <a:spcPts val="0"/>
-              </a:spcAft>
-              <a:defRPr sz="1200" b="0">
-                <a:solidFill>
-                  <a:srgbClr val="225B9B"/>
-                </a:solidFill>
-                <a:latin typeface="DejaVu Sans Mono"/>
-              </a:defRPr>
-            </a:pPr>
-            <a:r>
-              <a:t>https://docs.ros.org/en/jazzy/Tutorials/Beginner-CLI-Tools/Recording-And-Playing-Back-Data/Recording-And-Playing-Back-Data.html</a:t>
+            <a:pPr algn="ctr">
+              <a:spcAft>
+                <a:spcPts val="0"/>
+              </a:spcAft>
+              <a:defRPr sz="1800" b="1">
+                <a:solidFill>
+                  <a:srgbClr val="DB7E22"/>
+                </a:solidFill>
+                <a:latin typeface="Noto Sans CJK KR"/>
+              </a:defRPr>
+            </a:pPr>
+            <a:r>
+              <a:t>공통 순서: ① 현재 폴더 ② source ③ 파일 경로 ④ 이름/타입/단위 ⑤ build·source 후 재실행</a:t>
             </a:r>
           </a:p>
         </p:txBody>
@@ -22294,6 +22666,1285 @@
 </p:sld>
 </file>
 
+<file path=ppt/slides/slide40.xml><?xml version="1.0" encoding="utf-8"?>
+<p:sld xmlns:a="http://schemas.openxmlformats.org/drawingml/2006/main" xmlns:p="http://schemas.openxmlformats.org/presentationml/2006/main" xmlns:r="http://schemas.openxmlformats.org/officeDocument/2006/relationships">
+  <p:cSld>
+    <p:spTree>
+      <p:nvGrpSpPr>
+        <p:cNvPr id="1" name=""/>
+        <p:cNvGrpSpPr/>
+        <p:nvPr/>
+      </p:nvGrpSpPr>
+      <p:grpSpPr/>
+      <p:sp>
+        <p:nvSpPr>
+          <p:cNvPr id="2" name="TextBox 1"/>
+          <p:cNvSpPr txBox="1"/>
+          <p:nvPr/>
+        </p:nvSpPr>
+        <p:spPr>
+          <a:xfrm>
+            <a:off x="566928" y="347472"/>
+            <a:ext cx="10881360" cy="438912"/>
+          </a:xfrm>
+          <a:prstGeom prst="rect">
+            <a:avLst/>
+          </a:prstGeom>
+          <a:noFill/>
+        </p:spPr>
+        <p:txBody>
+          <a:bodyPr wrap="square" lIns="73152" rIns="73152" tIns="36576" bIns="36576">
+            <a:spAutoFit/>
+          </a:bodyPr>
+          <a:lstStyle/>
+          <a:p>
+            <a:pPr algn="l">
+              <a:spcAft>
+                <a:spcPts val="0"/>
+              </a:spcAft>
+              <a:defRPr sz="3200" b="1">
+                <a:solidFill>
+                  <a:srgbClr val="122C4E"/>
+                </a:solidFill>
+                <a:latin typeface="Noto Sans CJK KR"/>
+              </a:defRPr>
+            </a:pPr>
+            <a:r>
+              <a:t>미니 실습: 값 하나를 바꾸고 결과를 비교한다</a:t>
+            </a:r>
+          </a:p>
+        </p:txBody>
+      </p:sp>
+      <p:sp>
+        <p:nvSpPr>
+          <p:cNvPr id="3" name="TextBox 2"/>
+          <p:cNvSpPr txBox="1"/>
+          <p:nvPr/>
+        </p:nvSpPr>
+        <p:spPr>
+          <a:xfrm>
+            <a:off x="603504" y="859536"/>
+            <a:ext cx="10698480" cy="292608"/>
+          </a:xfrm>
+          <a:prstGeom prst="rect">
+            <a:avLst/>
+          </a:prstGeom>
+          <a:noFill/>
+        </p:spPr>
+        <p:txBody>
+          <a:bodyPr wrap="square" lIns="73152" rIns="73152" tIns="36576" bIns="36576">
+            <a:spAutoFit/>
+          </a:bodyPr>
+          <a:lstStyle/>
+          <a:p>
+            <a:pPr algn="l">
+              <a:spcAft>
+                <a:spcPts val="0"/>
+              </a:spcAft>
+              <a:defRPr sz="1700" b="0">
+                <a:solidFill>
+                  <a:srgbClr val="5C6672"/>
+                </a:solidFill>
+                <a:latin typeface="Noto Sans CJK KR"/>
+              </a:defRPr>
+            </a:pPr>
+            <a:r>
+              <a:t>정상 결과를 만든 뒤에는 한 번에 하나의 값만 바꿉니다.</a:t>
+            </a:r>
+          </a:p>
+        </p:txBody>
+      </p:sp>
+      <p:sp>
+        <p:nvSpPr>
+          <p:cNvPr id="4" name="TextBox 3"/>
+          <p:cNvSpPr txBox="1"/>
+          <p:nvPr/>
+        </p:nvSpPr>
+        <p:spPr>
+          <a:xfrm>
+            <a:off x="530352" y="6510528"/>
+            <a:ext cx="7772400" cy="201168"/>
+          </a:xfrm>
+          <a:prstGeom prst="rect">
+            <a:avLst/>
+          </a:prstGeom>
+          <a:noFill/>
+        </p:spPr>
+        <p:txBody>
+          <a:bodyPr wrap="square" lIns="73152" rIns="73152" tIns="36576" bIns="36576">
+            <a:spAutoFit/>
+          </a:bodyPr>
+          <a:lstStyle/>
+          <a:p>
+            <a:pPr algn="l">
+              <a:spcAft>
+                <a:spcPts val="0"/>
+              </a:spcAft>
+              <a:defRPr sz="1000" b="0">
+                <a:solidFill>
+                  <a:srgbClr val="5C6672"/>
+                </a:solidFill>
+                <a:latin typeface="Noto Sans CJK KR"/>
+              </a:defRPr>
+            </a:pPr>
+            <a:r>
+              <a:t>ROS 2 Jazzy · Gazebo Harmonic · M09 · 따라 하기형 AGV 실습</a:t>
+            </a:r>
+          </a:p>
+        </p:txBody>
+      </p:sp>
+      <p:sp>
+        <p:nvSpPr>
+          <p:cNvPr id="5" name="TextBox 4"/>
+          <p:cNvSpPr txBox="1"/>
+          <p:nvPr/>
+        </p:nvSpPr>
+        <p:spPr>
+          <a:xfrm>
+            <a:off x="9144000" y="6510528"/>
+            <a:ext cx="2468880" cy="201168"/>
+          </a:xfrm>
+          <a:prstGeom prst="rect">
+            <a:avLst/>
+          </a:prstGeom>
+          <a:noFill/>
+        </p:spPr>
+        <p:txBody>
+          <a:bodyPr wrap="square" lIns="73152" rIns="73152" tIns="36576" bIns="36576">
+            <a:spAutoFit/>
+          </a:bodyPr>
+          <a:lstStyle/>
+          <a:p>
+            <a:pPr algn="r">
+              <a:spcAft>
+                <a:spcPts val="0"/>
+              </a:spcAft>
+              <a:defRPr sz="1000" b="0">
+                <a:solidFill>
+                  <a:srgbClr val="5C6672"/>
+                </a:solidFill>
+                <a:latin typeface="Noto Sans CJK KR"/>
+              </a:defRPr>
+            </a:pPr>
+            <a:r>
+              <a:t>명령·파일 경로는 슬라이드에서 복사 가능</a:t>
+            </a:r>
+          </a:p>
+        </p:txBody>
+      </p:sp>
+      <p:sp>
+        <p:nvSpPr>
+          <p:cNvPr id="6" name="Rectangle 5"/>
+          <p:cNvSpPr/>
+          <p:nvPr/>
+        </p:nvSpPr>
+        <p:spPr>
+          <a:xfrm>
+            <a:off x="566928" y="1188720"/>
+            <a:ext cx="11064240" cy="347472"/>
+          </a:xfrm>
+          <a:prstGeom prst="rect">
+            <a:avLst/>
+          </a:prstGeom>
+          <a:solidFill>
+            <a:srgbClr val="F4F7FB"/>
+          </a:solidFill>
+          <a:ln>
+            <a:solidFill>
+              <a:srgbClr val="F4F7FB"/>
+            </a:solidFill>
+          </a:ln>
+        </p:spPr>
+        <p:style>
+          <a:lnRef idx="1">
+            <a:schemeClr val="accent1"/>
+          </a:lnRef>
+          <a:fillRef idx="3">
+            <a:schemeClr val="accent1"/>
+          </a:fillRef>
+          <a:effectRef idx="2">
+            <a:schemeClr val="accent1"/>
+          </a:effectRef>
+          <a:fontRef idx="minor">
+            <a:schemeClr val="lt1"/>
+          </a:fontRef>
+        </p:style>
+        <p:txBody>
+          <a:bodyPr rtlCol="0" anchor="ctr" wrap="square" lIns="73152" rIns="73152" tIns="36576" bIns="36576"/>
+          <a:lstStyle/>
+          <a:p>
+            <a:pPr algn="l">
+              <a:spcAft>
+                <a:spcPts val="0"/>
+              </a:spcAft>
+              <a:defRPr sz="1300" b="1">
+                <a:solidFill>
+                  <a:srgbClr val="122C4E"/>
+                </a:solidFill>
+                <a:latin typeface="Noto Sans CJK KR"/>
+              </a:defRPr>
+            </a:pPr>
+            <a:r>
+              <a:t>현재 단계 미니 실습    |    현재 폴더 ~/agv_ws    |    현재 터미널</a:t>
+            </a:r>
+          </a:p>
+        </p:txBody>
+      </p:sp>
+      <p:sp>
+        <p:nvSpPr>
+          <p:cNvPr id="7" name="Rounded Rectangle 6"/>
+          <p:cNvSpPr/>
+          <p:nvPr/>
+        </p:nvSpPr>
+        <p:spPr>
+          <a:xfrm>
+            <a:off x="749808" y="1874519"/>
+            <a:ext cx="10652760" cy="1993392"/>
+          </a:xfrm>
+          <a:prstGeom prst="roundRect">
+            <a:avLst/>
+          </a:prstGeom>
+          <a:solidFill>
+            <a:srgbClr val="FFF8EB"/>
+          </a:solidFill>
+          <a:ln>
+            <a:solidFill>
+              <a:srgbClr val="ECC680"/>
+            </a:solidFill>
+          </a:ln>
+        </p:spPr>
+        <p:style>
+          <a:lnRef idx="1">
+            <a:schemeClr val="accent1"/>
+          </a:lnRef>
+          <a:fillRef idx="3">
+            <a:schemeClr val="accent1"/>
+          </a:fillRef>
+          <a:effectRef idx="2">
+            <a:schemeClr val="accent1"/>
+          </a:effectRef>
+          <a:fontRef idx="minor">
+            <a:schemeClr val="lt1"/>
+          </a:fontRef>
+        </p:style>
+        <p:txBody>
+          <a:bodyPr rtlCol="0" anchor="ctr" wrap="square" lIns="73152" rIns="73152" tIns="36576" bIns="36576"/>
+          <a:lstStyle/>
+          <a:p>
+            <a:pPr algn="ctr">
+              <a:spcAft>
+                <a:spcPts val="0"/>
+              </a:spcAft>
+              <a:defRPr sz="2300" b="1">
+                <a:solidFill>
+                  <a:srgbClr val="122C4E"/>
+                </a:solidFill>
+                <a:latin typeface="Noto Sans CJK KR"/>
+              </a:defRPr>
+            </a:pPr>
+            <a:r>
+              <a:t>0.15 m/s 직진, 0.4 rad/s 회전, 둘 다 비영 값인 곡선을 각각 2초씩 시험해 경로를 비교한다.</a:t>
+            </a:r>
+          </a:p>
+        </p:txBody>
+      </p:sp>
+      <p:sp>
+        <p:nvSpPr>
+          <p:cNvPr id="8" name="TextBox 7"/>
+          <p:cNvSpPr txBox="1"/>
+          <p:nvPr/>
+        </p:nvSpPr>
+        <p:spPr>
+          <a:xfrm>
+            <a:off x="877824" y="4590288"/>
+            <a:ext cx="10241280" cy="594360"/>
+          </a:xfrm>
+          <a:prstGeom prst="rect">
+            <a:avLst/>
+          </a:prstGeom>
+          <a:noFill/>
+        </p:spPr>
+        <p:txBody>
+          <a:bodyPr wrap="square" lIns="73152" rIns="73152" tIns="36576" bIns="36576">
+            <a:spAutoFit/>
+          </a:bodyPr>
+          <a:lstStyle/>
+          <a:p>
+            <a:pPr algn="ctr">
+              <a:spcAft>
+                <a:spcPts val="0"/>
+              </a:spcAft>
+              <a:defRPr sz="1900" b="1">
+                <a:solidFill>
+                  <a:srgbClr val="DB7E22"/>
+                </a:solidFill>
+                <a:latin typeface="Noto Sans CJK KR"/>
+              </a:defRPr>
+            </a:pPr>
+            <a:r>
+              <a:t>기록할 것: 바꾼 값(단위) · 기대한 변화 · 실제 출력/화면 · 원래 값으로 되돌린 결과</a:t>
+            </a:r>
+          </a:p>
+        </p:txBody>
+      </p:sp>
+    </p:spTree>
+  </p:cSld>
+  <p:clrMapOvr>
+    <a:masterClrMapping/>
+  </p:clrMapOvr>
+</p:sld>
+</file>
+
+<file path=ppt/slides/slide41.xml><?xml version="1.0" encoding="utf-8"?>
+<p:sld xmlns:a="http://schemas.openxmlformats.org/drawingml/2006/main" xmlns:p="http://schemas.openxmlformats.org/presentationml/2006/main" xmlns:r="http://schemas.openxmlformats.org/officeDocument/2006/relationships">
+  <p:cSld>
+    <p:spTree>
+      <p:nvGrpSpPr>
+        <p:cNvPr id="1" name=""/>
+        <p:cNvGrpSpPr/>
+        <p:nvPr/>
+      </p:nvGrpSpPr>
+      <p:grpSpPr/>
+      <p:sp>
+        <p:nvSpPr>
+          <p:cNvPr id="2" name="TextBox 1"/>
+          <p:cNvSpPr txBox="1"/>
+          <p:nvPr/>
+        </p:nvSpPr>
+        <p:spPr>
+          <a:xfrm>
+            <a:off x="566928" y="347472"/>
+            <a:ext cx="10881360" cy="438912"/>
+          </a:xfrm>
+          <a:prstGeom prst="rect">
+            <a:avLst/>
+          </a:prstGeom>
+          <a:noFill/>
+        </p:spPr>
+        <p:txBody>
+          <a:bodyPr wrap="square" lIns="73152" rIns="73152" tIns="36576" bIns="36576">
+            <a:spAutoFit/>
+          </a:bodyPr>
+          <a:lstStyle/>
+          <a:p>
+            <a:pPr algn="l">
+              <a:spcAft>
+                <a:spcPts val="0"/>
+              </a:spcAft>
+              <a:defRPr sz="3200" b="1">
+                <a:solidFill>
+                  <a:srgbClr val="122C4E"/>
+                </a:solidFill>
+                <a:latin typeface="Noto Sans CJK KR"/>
+              </a:defRPr>
+            </a:pPr>
+            <a:r>
+              <a:t>체크포인트를 저장하고 다음 모듈로 넘긴다</a:t>
+            </a:r>
+          </a:p>
+        </p:txBody>
+      </p:sp>
+      <p:sp>
+        <p:nvSpPr>
+          <p:cNvPr id="3" name="TextBox 2"/>
+          <p:cNvSpPr txBox="1"/>
+          <p:nvPr/>
+        </p:nvSpPr>
+        <p:spPr>
+          <a:xfrm>
+            <a:off x="603504" y="859536"/>
+            <a:ext cx="10698480" cy="292608"/>
+          </a:xfrm>
+          <a:prstGeom prst="rect">
+            <a:avLst/>
+          </a:prstGeom>
+          <a:noFill/>
+        </p:spPr>
+        <p:txBody>
+          <a:bodyPr wrap="square" lIns="73152" rIns="73152" tIns="36576" bIns="36576">
+            <a:spAutoFit/>
+          </a:bodyPr>
+          <a:lstStyle/>
+          <a:p>
+            <a:pPr algn="l">
+              <a:spcAft>
+                <a:spcPts val="0"/>
+              </a:spcAft>
+              <a:defRPr sz="1700" b="0">
+                <a:solidFill>
+                  <a:srgbClr val="5C6672"/>
+                </a:solidFill>
+                <a:latin typeface="Noto Sans CJK KR"/>
+              </a:defRPr>
+            </a:pPr>
+            <a:r>
+              <a:t>현재 Complete는 다음 Starter의 기준선입니다.</a:t>
+            </a:r>
+          </a:p>
+        </p:txBody>
+      </p:sp>
+      <p:sp>
+        <p:nvSpPr>
+          <p:cNvPr id="4" name="TextBox 3"/>
+          <p:cNvSpPr txBox="1"/>
+          <p:nvPr/>
+        </p:nvSpPr>
+        <p:spPr>
+          <a:xfrm>
+            <a:off x="530352" y="6510528"/>
+            <a:ext cx="7772400" cy="201168"/>
+          </a:xfrm>
+          <a:prstGeom prst="rect">
+            <a:avLst/>
+          </a:prstGeom>
+          <a:noFill/>
+        </p:spPr>
+        <p:txBody>
+          <a:bodyPr wrap="square" lIns="73152" rIns="73152" tIns="36576" bIns="36576">
+            <a:spAutoFit/>
+          </a:bodyPr>
+          <a:lstStyle/>
+          <a:p>
+            <a:pPr algn="l">
+              <a:spcAft>
+                <a:spcPts val="0"/>
+              </a:spcAft>
+              <a:defRPr sz="1000" b="0">
+                <a:solidFill>
+                  <a:srgbClr val="5C6672"/>
+                </a:solidFill>
+                <a:latin typeface="Noto Sans CJK KR"/>
+              </a:defRPr>
+            </a:pPr>
+            <a:r>
+              <a:t>ROS 2 Jazzy · Gazebo Harmonic · M09 · 따라 하기형 AGV 실습</a:t>
+            </a:r>
+          </a:p>
+        </p:txBody>
+      </p:sp>
+      <p:sp>
+        <p:nvSpPr>
+          <p:cNvPr id="5" name="TextBox 4"/>
+          <p:cNvSpPr txBox="1"/>
+          <p:nvPr/>
+        </p:nvSpPr>
+        <p:spPr>
+          <a:xfrm>
+            <a:off x="9144000" y="6510528"/>
+            <a:ext cx="2468880" cy="201168"/>
+          </a:xfrm>
+          <a:prstGeom prst="rect">
+            <a:avLst/>
+          </a:prstGeom>
+          <a:noFill/>
+        </p:spPr>
+        <p:txBody>
+          <a:bodyPr wrap="square" lIns="73152" rIns="73152" tIns="36576" bIns="36576">
+            <a:spAutoFit/>
+          </a:bodyPr>
+          <a:lstStyle/>
+          <a:p>
+            <a:pPr algn="r">
+              <a:spcAft>
+                <a:spcPts val="0"/>
+              </a:spcAft>
+              <a:defRPr sz="1000" b="0">
+                <a:solidFill>
+                  <a:srgbClr val="5C6672"/>
+                </a:solidFill>
+                <a:latin typeface="Noto Sans CJK KR"/>
+              </a:defRPr>
+            </a:pPr>
+            <a:r>
+              <a:t>명령·파일 경로는 슬라이드에서 복사 가능</a:t>
+            </a:r>
+          </a:p>
+        </p:txBody>
+      </p:sp>
+      <p:sp>
+        <p:nvSpPr>
+          <p:cNvPr id="6" name="Rectangle 5"/>
+          <p:cNvSpPr/>
+          <p:nvPr/>
+        </p:nvSpPr>
+        <p:spPr>
+          <a:xfrm>
+            <a:off x="566928" y="1188720"/>
+            <a:ext cx="11064240" cy="347472"/>
+          </a:xfrm>
+          <a:prstGeom prst="rect">
+            <a:avLst/>
+          </a:prstGeom>
+          <a:solidFill>
+            <a:srgbClr val="F4F7FB"/>
+          </a:solidFill>
+          <a:ln>
+            <a:solidFill>
+              <a:srgbClr val="F4F7FB"/>
+            </a:solidFill>
+          </a:ln>
+        </p:spPr>
+        <p:style>
+          <a:lnRef idx="1">
+            <a:schemeClr val="accent1"/>
+          </a:lnRef>
+          <a:fillRef idx="3">
+            <a:schemeClr val="accent1"/>
+          </a:fillRef>
+          <a:effectRef idx="2">
+            <a:schemeClr val="accent1"/>
+          </a:effectRef>
+          <a:fontRef idx="minor">
+            <a:schemeClr val="lt1"/>
+          </a:fontRef>
+        </p:style>
+        <p:txBody>
+          <a:bodyPr rtlCol="0" anchor="ctr" wrap="square" lIns="73152" rIns="73152" tIns="36576" bIns="36576"/>
+          <a:lstStyle/>
+          <a:p>
+            <a:pPr algn="l">
+              <a:spcAft>
+                <a:spcPts val="0"/>
+              </a:spcAft>
+              <a:defRPr sz="1300" b="1">
+                <a:solidFill>
+                  <a:srgbClr val="122C4E"/>
+                </a:solidFill>
+                <a:latin typeface="Noto Sans CJK KR"/>
+              </a:defRPr>
+            </a:pPr>
+            <a:r>
+              <a:t>현재 단계 체크포인트    |    현재 폴더 ~/agv_ws    |    현재 터미널</a:t>
+            </a:r>
+          </a:p>
+        </p:txBody>
+      </p:sp>
+      <p:sp>
+        <p:nvSpPr>
+          <p:cNvPr id="7" name="Rounded Rectangle 6"/>
+          <p:cNvSpPr/>
+          <p:nvPr/>
+        </p:nvSpPr>
+        <p:spPr>
+          <a:xfrm>
+            <a:off x="685800" y="1737360"/>
+            <a:ext cx="10972800" cy="3611880"/>
+          </a:xfrm>
+          <a:prstGeom prst="roundRect">
+            <a:avLst/>
+          </a:prstGeom>
+          <a:solidFill>
+            <a:srgbClr val="F4F7FB"/>
+          </a:solidFill>
+          <a:ln>
+            <a:solidFill>
+              <a:srgbClr val="D2DCE8"/>
+            </a:solidFill>
+          </a:ln>
+        </p:spPr>
+        <p:style>
+          <a:lnRef idx="1">
+            <a:schemeClr val="accent1"/>
+          </a:lnRef>
+          <a:fillRef idx="3">
+            <a:schemeClr val="accent1"/>
+          </a:fillRef>
+          <a:effectRef idx="2">
+            <a:schemeClr val="accent1"/>
+          </a:effectRef>
+          <a:fontRef idx="minor">
+            <a:schemeClr val="lt1"/>
+          </a:fontRef>
+        </p:style>
+        <p:txBody>
+          <a:bodyPr rtlCol="0" anchor="ctr"/>
+          <a:lstStyle/>
+          <a:p>
+            <a:pPr algn="ctr"/>
+          </a:p>
+        </p:txBody>
+      </p:sp>
+      <p:sp>
+        <p:nvSpPr>
+          <p:cNvPr id="8" name="TextBox 7"/>
+          <p:cNvSpPr txBox="1"/>
+          <p:nvPr/>
+        </p:nvSpPr>
+        <p:spPr>
+          <a:xfrm>
+            <a:off x="896112" y="1993392"/>
+            <a:ext cx="10332720" cy="2971800"/>
+          </a:xfrm>
+          <a:prstGeom prst="rect">
+            <a:avLst/>
+          </a:prstGeom>
+          <a:noFill/>
+        </p:spPr>
+        <p:txBody>
+          <a:bodyPr wrap="square" lIns="109728" rIns="109728">
+            <a:spAutoFit/>
+          </a:bodyPr>
+          <a:lstStyle/>
+          <a:p>
+            <a:pPr>
+              <a:spcAft>
+                <a:spcPts val="800"/>
+              </a:spcAft>
+              <a:defRPr sz="1800">
+                <a:solidFill>
+                  <a:srgbClr val="122C4E"/>
+                </a:solidFill>
+                <a:latin typeface="Noto Sans CJK KR"/>
+              </a:defRPr>
+            </a:pPr>
+            <a:r>
+              <a:t>• □ 완료 화면: /cmd_vel에서 odom과 바퀴 구동 topic으로 이어지는 경로를 확인한다.</a:t>
+            </a:r>
+          </a:p>
+          <a:p>
+            <a:pPr>
+              <a:spcAft>
+                <a:spcPts val="800"/>
+              </a:spcAft>
+              <a:defRPr sz="1800">
+                <a:solidFill>
+                  <a:srgbClr val="122C4E"/>
+                </a:solidFill>
+                <a:latin typeface="Noto Sans CJK KR"/>
+              </a:defRPr>
+            </a:pPr>
+            <a:r>
+              <a:t>• □ Complete 파일: blocks/C_drive_visualization/M09_differential_drive/complete/</a:t>
+            </a:r>
+          </a:p>
+          <a:p>
+            <a:pPr>
+              <a:spcAft>
+                <a:spcPts val="800"/>
+              </a:spcAft>
+              <a:defRPr sz="1800">
+                <a:solidFill>
+                  <a:srgbClr val="122C4E"/>
+                </a:solidFill>
+                <a:latin typeface="Noto Sans CJK KR"/>
+              </a:defRPr>
+            </a:pPr>
+            <a:r>
+              <a:t>• □ 정상 로그·캡처: logs/validation.log, screenshots/validation_terminal.png</a:t>
+            </a:r>
+          </a:p>
+          <a:p>
+            <a:pPr>
+              <a:spcAft>
+                <a:spcPts val="800"/>
+              </a:spcAft>
+              <a:defRPr sz="1800">
+                <a:solidFill>
+                  <a:srgbClr val="122C4E"/>
+                </a:solidFill>
+                <a:latin typeface="Noto Sans CJK KR"/>
+              </a:defRPr>
+            </a:pPr>
+            <a:r>
+              <a:t>• □ 버전 식별: CHECKSUM_or_TAG.txt의 SHA-256 manifest</a:t>
+            </a:r>
+          </a:p>
+          <a:p>
+            <a:pPr>
+              <a:spcAft>
+                <a:spcPts val="800"/>
+              </a:spcAft>
+              <a:defRPr sz="1800">
+                <a:solidFill>
+                  <a:srgbClr val="122C4E"/>
+                </a:solidFill>
+                <a:latin typeface="Noto Sans CJK KR"/>
+              </a:defRPr>
+            </a:pPr>
+            <a:r>
+              <a:t>• □ 다음 시작 조건: M10 ros_gz_bridge</a:t>
+            </a:r>
+          </a:p>
+        </p:txBody>
+      </p:sp>
+      <p:sp>
+        <p:nvSpPr>
+          <p:cNvPr id="9" name="TextBox 8"/>
+          <p:cNvSpPr txBox="1"/>
+          <p:nvPr/>
+        </p:nvSpPr>
+        <p:spPr>
+          <a:xfrm>
+            <a:off x="868680" y="5596128"/>
+            <a:ext cx="10515600" cy="338328"/>
+          </a:xfrm>
+          <a:prstGeom prst="rect">
+            <a:avLst/>
+          </a:prstGeom>
+          <a:noFill/>
+        </p:spPr>
+        <p:txBody>
+          <a:bodyPr wrap="square" lIns="73152" rIns="73152" tIns="36576" bIns="36576">
+            <a:spAutoFit/>
+          </a:bodyPr>
+          <a:lstStyle/>
+          <a:p>
+            <a:pPr algn="ctr">
+              <a:spcAft>
+                <a:spcPts val="0"/>
+              </a:spcAft>
+              <a:defRPr sz="1700" b="1">
+                <a:solidFill>
+                  <a:srgbClr val="2A8B5A"/>
+                </a:solidFill>
+                <a:latin typeface="Noto Sans CJK KR"/>
+              </a:defRPr>
+            </a:pPr>
+            <a:r>
+              <a:t>다음 모듈을 시작하기 전, 이 슬라이드의 Complete와 다음 모듈의 Starter를 비교합니다.</a:t>
+            </a:r>
+          </a:p>
+        </p:txBody>
+      </p:sp>
+    </p:spTree>
+  </p:cSld>
+  <p:clrMapOvr>
+    <a:masterClrMapping/>
+  </p:clrMapOvr>
+</p:sld>
+</file>
+
+<file path=ppt/slides/slide42.xml><?xml version="1.0" encoding="utf-8"?>
+<p:sld xmlns:a="http://schemas.openxmlformats.org/drawingml/2006/main" xmlns:p="http://schemas.openxmlformats.org/presentationml/2006/main" xmlns:r="http://schemas.openxmlformats.org/officeDocument/2006/relationships">
+  <p:cSld>
+    <p:spTree>
+      <p:nvGrpSpPr>
+        <p:cNvPr id="1" name=""/>
+        <p:cNvGrpSpPr/>
+        <p:nvPr/>
+      </p:nvGrpSpPr>
+      <p:grpSpPr/>
+      <p:sp>
+        <p:nvSpPr>
+          <p:cNvPr id="2" name="TextBox 1"/>
+          <p:cNvSpPr txBox="1"/>
+          <p:nvPr/>
+        </p:nvSpPr>
+        <p:spPr>
+          <a:xfrm>
+            <a:off x="566928" y="347472"/>
+            <a:ext cx="10881360" cy="438912"/>
+          </a:xfrm>
+          <a:prstGeom prst="rect">
+            <a:avLst/>
+          </a:prstGeom>
+          <a:noFill/>
+        </p:spPr>
+        <p:txBody>
+          <a:bodyPr wrap="square" lIns="73152" rIns="73152" tIns="36576" bIns="36576">
+            <a:spAutoFit/>
+          </a:bodyPr>
+          <a:lstStyle/>
+          <a:p>
+            <a:pPr algn="l">
+              <a:spcAft>
+                <a:spcPts val="0"/>
+              </a:spcAft>
+              <a:defRPr sz="3200" b="1">
+                <a:solidFill>
+                  <a:srgbClr val="122C4E"/>
+                </a:solidFill>
+                <a:latin typeface="Noto Sans CJK KR"/>
+              </a:defRPr>
+            </a:pPr>
+            <a:r>
+              <a:t>공식 참고 자료</a:t>
+            </a:r>
+          </a:p>
+        </p:txBody>
+      </p:sp>
+      <p:sp>
+        <p:nvSpPr>
+          <p:cNvPr id="3" name="TextBox 2"/>
+          <p:cNvSpPr txBox="1"/>
+          <p:nvPr/>
+        </p:nvSpPr>
+        <p:spPr>
+          <a:xfrm>
+            <a:off x="603504" y="859536"/>
+            <a:ext cx="10698480" cy="292608"/>
+          </a:xfrm>
+          <a:prstGeom prst="rect">
+            <a:avLst/>
+          </a:prstGeom>
+          <a:noFill/>
+        </p:spPr>
+        <p:txBody>
+          <a:bodyPr wrap="square" lIns="73152" rIns="73152" tIns="36576" bIns="36576">
+            <a:spAutoFit/>
+          </a:bodyPr>
+          <a:lstStyle/>
+          <a:p>
+            <a:pPr algn="l">
+              <a:spcAft>
+                <a:spcPts val="0"/>
+              </a:spcAft>
+              <a:defRPr sz="1700" b="0">
+                <a:solidFill>
+                  <a:srgbClr val="5C6672"/>
+                </a:solidFill>
+                <a:latin typeface="Noto Sans CJK KR"/>
+              </a:defRPr>
+            </a:pPr>
+            <a:r>
+              <a:t>본문 단계는 링크를 열지 않아도 완료할 수 있으며, 링크는 개념을 더 확인할 때만 사용합니다.</a:t>
+            </a:r>
+          </a:p>
+        </p:txBody>
+      </p:sp>
+      <p:sp>
+        <p:nvSpPr>
+          <p:cNvPr id="4" name="TextBox 3"/>
+          <p:cNvSpPr txBox="1"/>
+          <p:nvPr/>
+        </p:nvSpPr>
+        <p:spPr>
+          <a:xfrm>
+            <a:off x="530352" y="6510528"/>
+            <a:ext cx="7772400" cy="201168"/>
+          </a:xfrm>
+          <a:prstGeom prst="rect">
+            <a:avLst/>
+          </a:prstGeom>
+          <a:noFill/>
+        </p:spPr>
+        <p:txBody>
+          <a:bodyPr wrap="square" lIns="73152" rIns="73152" tIns="36576" bIns="36576">
+            <a:spAutoFit/>
+          </a:bodyPr>
+          <a:lstStyle/>
+          <a:p>
+            <a:pPr algn="l">
+              <a:spcAft>
+                <a:spcPts val="0"/>
+              </a:spcAft>
+              <a:defRPr sz="1000" b="0">
+                <a:solidFill>
+                  <a:srgbClr val="5C6672"/>
+                </a:solidFill>
+                <a:latin typeface="Noto Sans CJK KR"/>
+              </a:defRPr>
+            </a:pPr>
+            <a:r>
+              <a:t>ROS 2 Jazzy · Gazebo Harmonic · M09 · 따라 하기형 AGV 실습</a:t>
+            </a:r>
+          </a:p>
+        </p:txBody>
+      </p:sp>
+      <p:sp>
+        <p:nvSpPr>
+          <p:cNvPr id="5" name="TextBox 4"/>
+          <p:cNvSpPr txBox="1"/>
+          <p:nvPr/>
+        </p:nvSpPr>
+        <p:spPr>
+          <a:xfrm>
+            <a:off x="9144000" y="6510528"/>
+            <a:ext cx="2468880" cy="201168"/>
+          </a:xfrm>
+          <a:prstGeom prst="rect">
+            <a:avLst/>
+          </a:prstGeom>
+          <a:noFill/>
+        </p:spPr>
+        <p:txBody>
+          <a:bodyPr wrap="square" lIns="73152" rIns="73152" tIns="36576" bIns="36576">
+            <a:spAutoFit/>
+          </a:bodyPr>
+          <a:lstStyle/>
+          <a:p>
+            <a:pPr algn="r">
+              <a:spcAft>
+                <a:spcPts val="0"/>
+              </a:spcAft>
+              <a:defRPr sz="1000" b="0">
+                <a:solidFill>
+                  <a:srgbClr val="5C6672"/>
+                </a:solidFill>
+                <a:latin typeface="Noto Sans CJK KR"/>
+              </a:defRPr>
+            </a:pPr>
+            <a:r>
+              <a:t>명령·파일 경로는 슬라이드에서 복사 가능</a:t>
+            </a:r>
+          </a:p>
+        </p:txBody>
+      </p:sp>
+      <p:sp>
+        <p:nvSpPr>
+          <p:cNvPr id="6" name="Rounded Rectangle 5"/>
+          <p:cNvSpPr/>
+          <p:nvPr/>
+        </p:nvSpPr>
+        <p:spPr>
+          <a:xfrm>
+            <a:off x="658368" y="1554480"/>
+            <a:ext cx="10972800" cy="4526280"/>
+          </a:xfrm>
+          <a:prstGeom prst="roundRect">
+            <a:avLst/>
+          </a:prstGeom>
+          <a:solidFill>
+            <a:srgbClr val="F4F7FB"/>
+          </a:solidFill>
+          <a:ln>
+            <a:solidFill>
+              <a:srgbClr val="D7DFE9"/>
+            </a:solidFill>
+          </a:ln>
+        </p:spPr>
+        <p:style>
+          <a:lnRef idx="1">
+            <a:schemeClr val="accent1"/>
+          </a:lnRef>
+          <a:fillRef idx="3">
+            <a:schemeClr val="accent1"/>
+          </a:fillRef>
+          <a:effectRef idx="2">
+            <a:schemeClr val="accent1"/>
+          </a:effectRef>
+          <a:fontRef idx="minor">
+            <a:schemeClr val="lt1"/>
+          </a:fontRef>
+        </p:style>
+        <p:txBody>
+          <a:bodyPr rtlCol="0" anchor="ctr"/>
+          <a:lstStyle/>
+          <a:p>
+            <a:pPr algn="ctr"/>
+          </a:p>
+        </p:txBody>
+      </p:sp>
+      <p:sp>
+        <p:nvSpPr>
+          <p:cNvPr id="7" name="TextBox 6"/>
+          <p:cNvSpPr txBox="1"/>
+          <p:nvPr/>
+        </p:nvSpPr>
+        <p:spPr>
+          <a:xfrm>
+            <a:off x="914400" y="1773936"/>
+            <a:ext cx="3840480" cy="256032"/>
+          </a:xfrm>
+          <a:prstGeom prst="rect">
+            <a:avLst/>
+          </a:prstGeom>
+          <a:noFill/>
+        </p:spPr>
+        <p:txBody>
+          <a:bodyPr wrap="square" lIns="73152" rIns="73152" tIns="36576" bIns="36576">
+            <a:spAutoFit/>
+          </a:bodyPr>
+          <a:lstStyle/>
+          <a:p>
+            <a:pPr algn="l">
+              <a:spcAft>
+                <a:spcPts val="0"/>
+              </a:spcAft>
+              <a:defRPr sz="1700" b="1">
+                <a:solidFill>
+                  <a:srgbClr val="122C4E"/>
+                </a:solidFill>
+                <a:latin typeface="Noto Sans CJK KR"/>
+              </a:defRPr>
+            </a:pPr>
+            <a:r>
+              <a:t>ROS 2 Jazzy — Gazebo Simulation</a:t>
+            </a:r>
+          </a:p>
+        </p:txBody>
+      </p:sp>
+      <p:sp>
+        <p:nvSpPr>
+          <p:cNvPr id="8" name="TextBox 7"/>
+          <p:cNvSpPr txBox="1"/>
+          <p:nvPr/>
+        </p:nvSpPr>
+        <p:spPr>
+          <a:xfrm>
+            <a:off x="914400" y="2048255"/>
+            <a:ext cx="9966960" cy="475488"/>
+          </a:xfrm>
+          <a:prstGeom prst="rect">
+            <a:avLst/>
+          </a:prstGeom>
+          <a:noFill/>
+        </p:spPr>
+        <p:txBody>
+          <a:bodyPr wrap="square" lIns="73152" rIns="73152" tIns="36576" bIns="36576">
+            <a:spAutoFit/>
+          </a:bodyPr>
+          <a:lstStyle/>
+          <a:p>
+            <a:pPr algn="l">
+              <a:spcAft>
+                <a:spcPts val="0"/>
+              </a:spcAft>
+              <a:defRPr sz="1000" b="0">
+                <a:solidFill>
+                  <a:srgbClr val="225B9B"/>
+                </a:solidFill>
+                <a:latin typeface="DejaVu Sans Mono"/>
+              </a:defRPr>
+            </a:pPr>
+            <a:r>
+              <a:t>https://docs.ros.org/en/jazzy/Tutorials/Advanced/Simulators/Gazebo/Simulation-Gazebo.html</a:t>
+            </a:r>
+          </a:p>
+        </p:txBody>
+      </p:sp>
+      <p:sp>
+        <p:nvSpPr>
+          <p:cNvPr id="9" name="TextBox 8"/>
+          <p:cNvSpPr txBox="1"/>
+          <p:nvPr/>
+        </p:nvSpPr>
+        <p:spPr>
+          <a:xfrm>
+            <a:off x="914400" y="2852928"/>
+            <a:ext cx="3840480" cy="256032"/>
+          </a:xfrm>
+          <a:prstGeom prst="rect">
+            <a:avLst/>
+          </a:prstGeom>
+          <a:noFill/>
+        </p:spPr>
+        <p:txBody>
+          <a:bodyPr wrap="square" lIns="73152" rIns="73152" tIns="36576" bIns="36576">
+            <a:spAutoFit/>
+          </a:bodyPr>
+          <a:lstStyle/>
+          <a:p>
+            <a:pPr algn="l">
+              <a:spcAft>
+                <a:spcPts val="0"/>
+              </a:spcAft>
+              <a:defRPr sz="1700" b="1">
+                <a:solidFill>
+                  <a:srgbClr val="122C4E"/>
+                </a:solidFill>
+                <a:latin typeface="Noto Sans CJK KR"/>
+              </a:defRPr>
+            </a:pPr>
+            <a:r>
+              <a:t>ROS 2 Jazzy — URDF / robot_state_publisher</a:t>
+            </a:r>
+          </a:p>
+        </p:txBody>
+      </p:sp>
+      <p:sp>
+        <p:nvSpPr>
+          <p:cNvPr id="10" name="TextBox 9"/>
+          <p:cNvSpPr txBox="1"/>
+          <p:nvPr/>
+        </p:nvSpPr>
+        <p:spPr>
+          <a:xfrm>
+            <a:off x="914400" y="3127248"/>
+            <a:ext cx="9966960" cy="475488"/>
+          </a:xfrm>
+          <a:prstGeom prst="rect">
+            <a:avLst/>
+          </a:prstGeom>
+          <a:noFill/>
+        </p:spPr>
+        <p:txBody>
+          <a:bodyPr wrap="square" lIns="73152" rIns="73152" tIns="36576" bIns="36576">
+            <a:spAutoFit/>
+          </a:bodyPr>
+          <a:lstStyle/>
+          <a:p>
+            <a:pPr algn="l">
+              <a:spcAft>
+                <a:spcPts val="0"/>
+              </a:spcAft>
+              <a:defRPr sz="1000" b="0">
+                <a:solidFill>
+                  <a:srgbClr val="225B9B"/>
+                </a:solidFill>
+                <a:latin typeface="DejaVu Sans Mono"/>
+              </a:defRPr>
+            </a:pPr>
+            <a:r>
+              <a:t>https://docs.ros.org/en/jazzy/Tutorials/Intermediate/URDF/Using-URDF-with-Robot-State-Publisher-py.html</a:t>
+            </a:r>
+          </a:p>
+        </p:txBody>
+      </p:sp>
+      <p:sp>
+        <p:nvSpPr>
+          <p:cNvPr id="11" name="TextBox 10"/>
+          <p:cNvSpPr txBox="1"/>
+          <p:nvPr/>
+        </p:nvSpPr>
+        <p:spPr>
+          <a:xfrm>
+            <a:off x="914400" y="3931920"/>
+            <a:ext cx="3840480" cy="256032"/>
+          </a:xfrm>
+          <a:prstGeom prst="rect">
+            <a:avLst/>
+          </a:prstGeom>
+          <a:noFill/>
+        </p:spPr>
+        <p:txBody>
+          <a:bodyPr wrap="square" lIns="73152" rIns="73152" tIns="36576" bIns="36576">
+            <a:spAutoFit/>
+          </a:bodyPr>
+          <a:lstStyle/>
+          <a:p>
+            <a:pPr algn="l">
+              <a:spcAft>
+                <a:spcPts val="0"/>
+              </a:spcAft>
+              <a:defRPr sz="1700" b="1">
+                <a:solidFill>
+                  <a:srgbClr val="122C4E"/>
+                </a:solidFill>
+                <a:latin typeface="Noto Sans CJK KR"/>
+              </a:defRPr>
+            </a:pPr>
+            <a:r>
+              <a:t>Gazebo — ROS 2 Integration / ros_gz_bridge</a:t>
+            </a:r>
+          </a:p>
+        </p:txBody>
+      </p:sp>
+      <p:sp>
+        <p:nvSpPr>
+          <p:cNvPr id="12" name="TextBox 11"/>
+          <p:cNvSpPr txBox="1"/>
+          <p:nvPr/>
+        </p:nvSpPr>
+        <p:spPr>
+          <a:xfrm>
+            <a:off x="914400" y="4206240"/>
+            <a:ext cx="9966960" cy="475488"/>
+          </a:xfrm>
+          <a:prstGeom prst="rect">
+            <a:avLst/>
+          </a:prstGeom>
+          <a:noFill/>
+        </p:spPr>
+        <p:txBody>
+          <a:bodyPr wrap="square" lIns="73152" rIns="73152" tIns="36576" bIns="36576">
+            <a:spAutoFit/>
+          </a:bodyPr>
+          <a:lstStyle/>
+          <a:p>
+            <a:pPr algn="l">
+              <a:spcAft>
+                <a:spcPts val="0"/>
+              </a:spcAft>
+              <a:defRPr sz="1000" b="0">
+                <a:solidFill>
+                  <a:srgbClr val="225B9B"/>
+                </a:solidFill>
+                <a:latin typeface="DejaVu Sans Mono"/>
+              </a:defRPr>
+            </a:pPr>
+            <a:r>
+              <a:t>https://gazebosim.org/docs/latest/ros2_integration/</a:t>
+            </a:r>
+          </a:p>
+        </p:txBody>
+      </p:sp>
+      <p:sp>
+        <p:nvSpPr>
+          <p:cNvPr id="13" name="TextBox 12"/>
+          <p:cNvSpPr txBox="1"/>
+          <p:nvPr/>
+        </p:nvSpPr>
+        <p:spPr>
+          <a:xfrm>
+            <a:off x="914400" y="5010912"/>
+            <a:ext cx="3840480" cy="256032"/>
+          </a:xfrm>
+          <a:prstGeom prst="rect">
+            <a:avLst/>
+          </a:prstGeom>
+          <a:noFill/>
+        </p:spPr>
+        <p:txBody>
+          <a:bodyPr wrap="square" lIns="73152" rIns="73152" tIns="36576" bIns="36576">
+            <a:spAutoFit/>
+          </a:bodyPr>
+          <a:lstStyle/>
+          <a:p>
+            <a:pPr algn="l">
+              <a:spcAft>
+                <a:spcPts val="0"/>
+              </a:spcAft>
+              <a:defRPr sz="1700" b="1">
+                <a:solidFill>
+                  <a:srgbClr val="122C4E"/>
+                </a:solidFill>
+                <a:latin typeface="Noto Sans CJK KR"/>
+              </a:defRPr>
+            </a:pPr>
+            <a:r>
+              <a:t>ROS 2 Jazzy — rosbag2 Recording and Playback</a:t>
+            </a:r>
+          </a:p>
+        </p:txBody>
+      </p:sp>
+      <p:sp>
+        <p:nvSpPr>
+          <p:cNvPr id="14" name="TextBox 13"/>
+          <p:cNvSpPr txBox="1"/>
+          <p:nvPr/>
+        </p:nvSpPr>
+        <p:spPr>
+          <a:xfrm>
+            <a:off x="914400" y="5285232"/>
+            <a:ext cx="9966960" cy="475488"/>
+          </a:xfrm>
+          <a:prstGeom prst="rect">
+            <a:avLst/>
+          </a:prstGeom>
+          <a:noFill/>
+        </p:spPr>
+        <p:txBody>
+          <a:bodyPr wrap="square" lIns="73152" rIns="73152" tIns="36576" bIns="36576">
+            <a:spAutoFit/>
+          </a:bodyPr>
+          <a:lstStyle/>
+          <a:p>
+            <a:pPr algn="l">
+              <a:spcAft>
+                <a:spcPts val="0"/>
+              </a:spcAft>
+              <a:defRPr sz="1000" b="0">
+                <a:solidFill>
+                  <a:srgbClr val="225B9B"/>
+                </a:solidFill>
+                <a:latin typeface="DejaVu Sans Mono"/>
+              </a:defRPr>
+            </a:pPr>
+            <a:r>
+              <a:t>https://docs.ros.org/en/jazzy/Tutorials/Beginner-CLI-Tools/Recording-And-Playing-Back-Data/Recording-And-Playing-Back-Data.html</a:t>
+            </a:r>
+          </a:p>
+        </p:txBody>
+      </p:sp>
+    </p:spTree>
+  </p:cSld>
+  <p:clrMapOvr>
+    <a:masterClrMapping/>
+  </p:clrMapOvr>
+</p:sld>
+</file>
+
 <file path=ppt/slides/slide5.xml><?xml version="1.0" encoding="utf-8"?>
 <p:sld xmlns:a="http://schemas.openxmlformats.org/drawingml/2006/main" xmlns:p="http://schemas.openxmlformats.org/presentationml/2006/main" xmlns:r="http://schemas.openxmlformats.org/officeDocument/2006/relationships">
   <p:cSld>
@@ -24079,7 +25730,7 @@
               </a:defRPr>
             </a:pPr>
             <a:r>
-              <a:t>파일을 새로 만들고 저장한다 (1/21)</a:t>
+              <a:t>파일을 새로 만들고 저장한다 (1/24)</a:t>
             </a:r>
           </a:p>
         </p:txBody>
@@ -24254,7 +25905,7 @@
               </a:defRPr>
             </a:pPr>
             <a:r>
-              <a:t>현재 단계 3/24    |    현재 폴더 ~/agv_ws    |    현재 터미널</a:t>
+              <a:t>현재 단계 3/27    |    현재 폴더 ~/agv_ws    |    현재 터미널</a:t>
             </a:r>
           </a:p>
         </p:txBody>
@@ -24267,8 +25918,8 @@
         </p:nvSpPr>
         <p:spPr>
           <a:xfrm>
-            <a:off x="658368" y="1682496"/>
-            <a:ext cx="10972800" cy="347472"/>
+            <a:off x="658368" y="1627632"/>
+            <a:ext cx="10972800" cy="256032"/>
           </a:xfrm>
           <a:prstGeom prst="rect">
             <a:avLst/>
@@ -24285,7 +25936,7 @@
               <a:spcAft>
                 <a:spcPts val="0"/>
               </a:spcAft>
-              <a:defRPr sz="1700" b="1">
+              <a:defRPr sz="1500" b="1">
                 <a:solidFill>
                   <a:srgbClr val="122C4E"/>
                 </a:solidFill>
@@ -24306,8 +25957,8 @@
         </p:nvSpPr>
         <p:spPr>
           <a:xfrm>
-            <a:off x="658368" y="2103120"/>
-            <a:ext cx="10972800" cy="493776"/>
+            <a:off x="658368" y="1956816"/>
+            <a:ext cx="10972800" cy="603504"/>
           </a:xfrm>
           <a:prstGeom prst="rect">
             <a:avLst/>
@@ -24351,7 +26002,11 @@
               </a:defRPr>
             </a:pPr>
             <a:r>
-              <a:t>파일 생성/열기: mkdir -p ~/agv_ws/src/agv_gazebo/models/agv    &amp;&amp;    nano ~/agv_ws/src/agv_gazebo/models/agv/model.sdf</a:t>
+              <a:t>파일 생성: mkdir -p ~/agv_ws/src/agv_gazebo/models/agv</a:t>
+            </a:r>
+            <a:br/>
+            <a:r>
+              <a:t>파일 열기: nano ~/agv_ws/src/agv_gazebo/models/agv/model.sdf</a:t>
             </a:r>
           </a:p>
         </p:txBody>
@@ -24364,8 +26019,8 @@
         </p:nvSpPr>
         <p:spPr>
           <a:xfrm>
-            <a:off x="658368" y="2761488"/>
-            <a:ext cx="10972800" cy="3383280"/>
+            <a:off x="658368" y="2706624"/>
+            <a:ext cx="10972800" cy="3364992"/>
           </a:xfrm>
           <a:prstGeom prst="rect">
             <a:avLst/>
@@ -24455,14 +26110,6 @@
             <a:r>
               <a:t>      </a:t>
             </a:r>
-            <a:br/>
-            <a:r>
-              <a:t>      </a:t>
-            </a:r>
-            <a:br/>
-            <a:r>
-              <a:t>      &lt;inertial&gt;</a:t>
-            </a:r>
           </a:p>
         </p:txBody>
       </p:sp>
@@ -24474,7 +26121,7 @@
         </p:nvSpPr>
         <p:spPr>
           <a:xfrm>
-            <a:off x="749808" y="6199632"/>
+            <a:off x="749808" y="6181344"/>
             <a:ext cx="10789920" cy="201168"/>
           </a:xfrm>
           <a:prstGeom prst="rect">
@@ -24500,7 +26147,7 @@
               </a:defRPr>
             </a:pPr>
             <a:r>
-              <a:t>파일 전체 1/21 · 이 슬라이드 다음에 같은 파일의 나머지 줄이 이어집니다.</a:t>
+              <a:t>파일 전체 1/24 · 이 슬라이드 다음에 같은 파일의 나머지 줄이 이어집니다.</a:t>
             </a:r>
           </a:p>
         </p:txBody>

--- a/blocks/C_drive_visualization/M09_differential_drive/M09_Differential_Drive_구동.pptx
+++ b/blocks/C_drive_visualization/M09_differential_drive/M09_Differential_Drive_구동.pptx
@@ -47,6 +47,7 @@
     <p:sldId id="295" r:id="rId47"/>
     <p:sldId id="296" r:id="rId48"/>
     <p:sldId id="297" r:id="rId49"/>
+    <p:sldId id="298" r:id="rId50"/>
   </p:sldIdLst>
   <p:sldSz cx="12191999" cy="6858000" type="screen4x3"/>
   <p:notesSz cx="6858000" cy="9144000"/>
@@ -633,12 +634,12 @@
           <a:lstStyle/>
           <a:p>
             <a:r>
-              <a:t>[설명] ~/agv_ws/src/agv_gazebo/models/agv/model.sdf의 전체 파일을 2/24 구간으로 작성한다.</a:t>
-            </a:r>
-          </a:p>
-          <a:p>
-            <a:r>
-              <a:t>[실행] nano ~/agv_ws/src/agv_gazebo/models/agv/model.sdf</a:t>
+              <a:t>[설명] ~/ros2_curri/agv_ws/src/agv_gazebo/models/agv/model.sdf의 전체 파일을 2/24 구간으로 작성한다.</a:t>
+            </a:r>
+          </a:p>
+          <a:p>
+            <a:r>
+              <a:t>[실행] nano ~/ros2_curri/agv_ws/src/agv_gazebo/models/agv/model.sdf</a:t>
             </a:r>
           </a:p>
           <a:p>
@@ -723,12 +724,12 @@
           <a:lstStyle/>
           <a:p>
             <a:r>
-              <a:t>[설명] ~/agv_ws/src/agv_gazebo/models/agv/model.sdf의 전체 파일을 3/24 구간으로 작성한다.</a:t>
-            </a:r>
-          </a:p>
-          <a:p>
-            <a:r>
-              <a:t>[실행] nano ~/agv_ws/src/agv_gazebo/models/agv/model.sdf</a:t>
+              <a:t>[설명] ~/ros2_curri/agv_ws/src/agv_gazebo/models/agv/model.sdf의 전체 파일을 3/24 구간으로 작성한다.</a:t>
+            </a:r>
+          </a:p>
+          <a:p>
+            <a:r>
+              <a:t>[실행] nano ~/ros2_curri/agv_ws/src/agv_gazebo/models/agv/model.sdf</a:t>
             </a:r>
           </a:p>
           <a:p>
@@ -813,12 +814,12 @@
           <a:lstStyle/>
           <a:p>
             <a:r>
-              <a:t>[설명] ~/agv_ws/src/agv_gazebo/models/agv/model.sdf의 전체 파일을 4/24 구간으로 작성한다.</a:t>
-            </a:r>
-          </a:p>
-          <a:p>
-            <a:r>
-              <a:t>[실행] nano ~/agv_ws/src/agv_gazebo/models/agv/model.sdf</a:t>
+              <a:t>[설명] ~/ros2_curri/agv_ws/src/agv_gazebo/models/agv/model.sdf의 전체 파일을 4/24 구간으로 작성한다.</a:t>
+            </a:r>
+          </a:p>
+          <a:p>
+            <a:r>
+              <a:t>[실행] nano ~/ros2_curri/agv_ws/src/agv_gazebo/models/agv/model.sdf</a:t>
             </a:r>
           </a:p>
           <a:p>
@@ -903,12 +904,12 @@
           <a:lstStyle/>
           <a:p>
             <a:r>
-              <a:t>[설명] ~/agv_ws/src/agv_gazebo/models/agv/model.sdf의 전체 파일을 5/24 구간으로 작성한다.</a:t>
-            </a:r>
-          </a:p>
-          <a:p>
-            <a:r>
-              <a:t>[실행] nano ~/agv_ws/src/agv_gazebo/models/agv/model.sdf</a:t>
+              <a:t>[설명] ~/ros2_curri/agv_ws/src/agv_gazebo/models/agv/model.sdf의 전체 파일을 5/24 구간으로 작성한다.</a:t>
+            </a:r>
+          </a:p>
+          <a:p>
+            <a:r>
+              <a:t>[실행] nano ~/ros2_curri/agv_ws/src/agv_gazebo/models/agv/model.sdf</a:t>
             </a:r>
           </a:p>
           <a:p>
@@ -993,12 +994,12 @@
           <a:lstStyle/>
           <a:p>
             <a:r>
-              <a:t>[설명] ~/agv_ws/src/agv_gazebo/models/agv/model.sdf의 전체 파일을 6/24 구간으로 작성한다.</a:t>
-            </a:r>
-          </a:p>
-          <a:p>
-            <a:r>
-              <a:t>[실행] nano ~/agv_ws/src/agv_gazebo/models/agv/model.sdf</a:t>
+              <a:t>[설명] ~/ros2_curri/agv_ws/src/agv_gazebo/models/agv/model.sdf의 전체 파일을 6/24 구간으로 작성한다.</a:t>
+            </a:r>
+          </a:p>
+          <a:p>
+            <a:r>
+              <a:t>[실행] nano ~/ros2_curri/agv_ws/src/agv_gazebo/models/agv/model.sdf</a:t>
             </a:r>
           </a:p>
           <a:p>
@@ -1083,12 +1084,12 @@
           <a:lstStyle/>
           <a:p>
             <a:r>
-              <a:t>[설명] ~/agv_ws/src/agv_gazebo/models/agv/model.sdf의 전체 파일을 7/24 구간으로 작성한다.</a:t>
-            </a:r>
-          </a:p>
-          <a:p>
-            <a:r>
-              <a:t>[실행] nano ~/agv_ws/src/agv_gazebo/models/agv/model.sdf</a:t>
+              <a:t>[설명] ~/ros2_curri/agv_ws/src/agv_gazebo/models/agv/model.sdf의 전체 파일을 7/24 구간으로 작성한다.</a:t>
+            </a:r>
+          </a:p>
+          <a:p>
+            <a:r>
+              <a:t>[실행] nano ~/ros2_curri/agv_ws/src/agv_gazebo/models/agv/model.sdf</a:t>
             </a:r>
           </a:p>
           <a:p>
@@ -1173,12 +1174,12 @@
           <a:lstStyle/>
           <a:p>
             <a:r>
-              <a:t>[설명] ~/agv_ws/src/agv_gazebo/models/agv/model.sdf의 전체 파일을 8/24 구간으로 작성한다.</a:t>
-            </a:r>
-          </a:p>
-          <a:p>
-            <a:r>
-              <a:t>[실행] nano ~/agv_ws/src/agv_gazebo/models/agv/model.sdf</a:t>
+              <a:t>[설명] ~/ros2_curri/agv_ws/src/agv_gazebo/models/agv/model.sdf의 전체 파일을 8/24 구간으로 작성한다.</a:t>
+            </a:r>
+          </a:p>
+          <a:p>
+            <a:r>
+              <a:t>[실행] nano ~/ros2_curri/agv_ws/src/agv_gazebo/models/agv/model.sdf</a:t>
             </a:r>
           </a:p>
           <a:p>
@@ -1263,12 +1264,12 @@
           <a:lstStyle/>
           <a:p>
             <a:r>
-              <a:t>[설명] ~/agv_ws/src/agv_gazebo/models/agv/model.sdf의 전체 파일을 9/24 구간으로 작성한다.</a:t>
-            </a:r>
-          </a:p>
-          <a:p>
-            <a:r>
-              <a:t>[실행] nano ~/agv_ws/src/agv_gazebo/models/agv/model.sdf</a:t>
+              <a:t>[설명] ~/ros2_curri/agv_ws/src/agv_gazebo/models/agv/model.sdf의 전체 파일을 9/24 구간으로 작성한다.</a:t>
+            </a:r>
+          </a:p>
+          <a:p>
+            <a:r>
+              <a:t>[실행] nano ~/ros2_curri/agv_ws/src/agv_gazebo/models/agv/model.sdf</a:t>
             </a:r>
           </a:p>
           <a:p>
@@ -1353,12 +1354,12 @@
           <a:lstStyle/>
           <a:p>
             <a:r>
-              <a:t>[설명] ~/agv_ws/src/agv_gazebo/models/agv/model.sdf의 전체 파일을 10/24 구간으로 작성한다.</a:t>
-            </a:r>
-          </a:p>
-          <a:p>
-            <a:r>
-              <a:t>[실행] nano ~/agv_ws/src/agv_gazebo/models/agv/model.sdf</a:t>
+              <a:t>[설명] ~/ros2_curri/agv_ws/src/agv_gazebo/models/agv/model.sdf의 전체 파일을 10/24 구간으로 작성한다.</a:t>
+            </a:r>
+          </a:p>
+          <a:p>
+            <a:r>
+              <a:t>[실행] nano ~/ros2_curri/agv_ws/src/agv_gazebo/models/agv/model.sdf</a:t>
             </a:r>
           </a:p>
           <a:p>
@@ -1443,12 +1444,12 @@
           <a:lstStyle/>
           <a:p>
             <a:r>
-              <a:t>[설명] ~/agv_ws/src/agv_gazebo/models/agv/model.sdf의 전체 파일을 11/24 구간으로 작성한다.</a:t>
-            </a:r>
-          </a:p>
-          <a:p>
-            <a:r>
-              <a:t>[실행] nano ~/agv_ws/src/agv_gazebo/models/agv/model.sdf</a:t>
+              <a:t>[설명] ~/ros2_curri/agv_ws/src/agv_gazebo/models/agv/model.sdf의 전체 파일을 11/24 구간으로 작성한다.</a:t>
+            </a:r>
+          </a:p>
+          <a:p>
+            <a:r>
+              <a:t>[실행] nano ~/ros2_curri/agv_ws/src/agv_gazebo/models/agv/model.sdf</a:t>
             </a:r>
           </a:p>
           <a:p>
@@ -1623,12 +1624,12 @@
           <a:lstStyle/>
           <a:p>
             <a:r>
-              <a:t>[설명] ~/agv_ws/src/agv_gazebo/models/agv/model.sdf의 전체 파일을 12/24 구간으로 작성한다.</a:t>
-            </a:r>
-          </a:p>
-          <a:p>
-            <a:r>
-              <a:t>[실행] nano ~/agv_ws/src/agv_gazebo/models/agv/model.sdf</a:t>
+              <a:t>[설명] ~/ros2_curri/agv_ws/src/agv_gazebo/models/agv/model.sdf의 전체 파일을 12/24 구간으로 작성한다.</a:t>
+            </a:r>
+          </a:p>
+          <a:p>
+            <a:r>
+              <a:t>[실행] nano ~/ros2_curri/agv_ws/src/agv_gazebo/models/agv/model.sdf</a:t>
             </a:r>
           </a:p>
           <a:p>
@@ -1713,12 +1714,12 @@
           <a:lstStyle/>
           <a:p>
             <a:r>
-              <a:t>[설명] ~/agv_ws/src/agv_gazebo/models/agv/model.sdf의 전체 파일을 13/24 구간으로 작성한다.</a:t>
-            </a:r>
-          </a:p>
-          <a:p>
-            <a:r>
-              <a:t>[실행] nano ~/agv_ws/src/agv_gazebo/models/agv/model.sdf</a:t>
+              <a:t>[설명] ~/ros2_curri/agv_ws/src/agv_gazebo/models/agv/model.sdf의 전체 파일을 13/24 구간으로 작성한다.</a:t>
+            </a:r>
+          </a:p>
+          <a:p>
+            <a:r>
+              <a:t>[실행] nano ~/ros2_curri/agv_ws/src/agv_gazebo/models/agv/model.sdf</a:t>
             </a:r>
           </a:p>
           <a:p>
@@ -1803,12 +1804,12 @@
           <a:lstStyle/>
           <a:p>
             <a:r>
-              <a:t>[설명] ~/agv_ws/src/agv_gazebo/models/agv/model.sdf의 전체 파일을 14/24 구간으로 작성한다.</a:t>
-            </a:r>
-          </a:p>
-          <a:p>
-            <a:r>
-              <a:t>[실행] nano ~/agv_ws/src/agv_gazebo/models/agv/model.sdf</a:t>
+              <a:t>[설명] ~/ros2_curri/agv_ws/src/agv_gazebo/models/agv/model.sdf의 전체 파일을 14/24 구간으로 작성한다.</a:t>
+            </a:r>
+          </a:p>
+          <a:p>
+            <a:r>
+              <a:t>[실행] nano ~/ros2_curri/agv_ws/src/agv_gazebo/models/agv/model.sdf</a:t>
             </a:r>
           </a:p>
           <a:p>
@@ -1893,12 +1894,12 @@
           <a:lstStyle/>
           <a:p>
             <a:r>
-              <a:t>[설명] ~/agv_ws/src/agv_gazebo/models/agv/model.sdf의 전체 파일을 15/24 구간으로 작성한다.</a:t>
-            </a:r>
-          </a:p>
-          <a:p>
-            <a:r>
-              <a:t>[실행] nano ~/agv_ws/src/agv_gazebo/models/agv/model.sdf</a:t>
+              <a:t>[설명] ~/ros2_curri/agv_ws/src/agv_gazebo/models/agv/model.sdf의 전체 파일을 15/24 구간으로 작성한다.</a:t>
+            </a:r>
+          </a:p>
+          <a:p>
+            <a:r>
+              <a:t>[실행] nano ~/ros2_curri/agv_ws/src/agv_gazebo/models/agv/model.sdf</a:t>
             </a:r>
           </a:p>
           <a:p>
@@ -1983,12 +1984,12 @@
           <a:lstStyle/>
           <a:p>
             <a:r>
-              <a:t>[설명] ~/agv_ws/src/agv_gazebo/models/agv/model.sdf의 전체 파일을 16/24 구간으로 작성한다.</a:t>
-            </a:r>
-          </a:p>
-          <a:p>
-            <a:r>
-              <a:t>[실행] nano ~/agv_ws/src/agv_gazebo/models/agv/model.sdf</a:t>
+              <a:t>[설명] ~/ros2_curri/agv_ws/src/agv_gazebo/models/agv/model.sdf의 전체 파일을 16/24 구간으로 작성한다.</a:t>
+            </a:r>
+          </a:p>
+          <a:p>
+            <a:r>
+              <a:t>[실행] nano ~/ros2_curri/agv_ws/src/agv_gazebo/models/agv/model.sdf</a:t>
             </a:r>
           </a:p>
           <a:p>
@@ -2073,12 +2074,12 @@
           <a:lstStyle/>
           <a:p>
             <a:r>
-              <a:t>[설명] ~/agv_ws/src/agv_gazebo/models/agv/model.sdf의 전체 파일을 17/24 구간으로 작성한다.</a:t>
-            </a:r>
-          </a:p>
-          <a:p>
-            <a:r>
-              <a:t>[실행] nano ~/agv_ws/src/agv_gazebo/models/agv/model.sdf</a:t>
+              <a:t>[설명] ~/ros2_curri/agv_ws/src/agv_gazebo/models/agv/model.sdf의 전체 파일을 17/24 구간으로 작성한다.</a:t>
+            </a:r>
+          </a:p>
+          <a:p>
+            <a:r>
+              <a:t>[실행] nano ~/ros2_curri/agv_ws/src/agv_gazebo/models/agv/model.sdf</a:t>
             </a:r>
           </a:p>
           <a:p>
@@ -2163,12 +2164,12 @@
           <a:lstStyle/>
           <a:p>
             <a:r>
-              <a:t>[설명] ~/agv_ws/src/agv_gazebo/models/agv/model.sdf의 전체 파일을 18/24 구간으로 작성한다.</a:t>
-            </a:r>
-          </a:p>
-          <a:p>
-            <a:r>
-              <a:t>[실행] nano ~/agv_ws/src/agv_gazebo/models/agv/model.sdf</a:t>
+              <a:t>[설명] ~/ros2_curri/agv_ws/src/agv_gazebo/models/agv/model.sdf의 전체 파일을 18/24 구간으로 작성한다.</a:t>
+            </a:r>
+          </a:p>
+          <a:p>
+            <a:r>
+              <a:t>[실행] nano ~/ros2_curri/agv_ws/src/agv_gazebo/models/agv/model.sdf</a:t>
             </a:r>
           </a:p>
           <a:p>
@@ -2253,12 +2254,12 @@
           <a:lstStyle/>
           <a:p>
             <a:r>
-              <a:t>[설명] ~/agv_ws/src/agv_gazebo/models/agv/model.sdf의 전체 파일을 19/24 구간으로 작성한다.</a:t>
-            </a:r>
-          </a:p>
-          <a:p>
-            <a:r>
-              <a:t>[실행] nano ~/agv_ws/src/agv_gazebo/models/agv/model.sdf</a:t>
+              <a:t>[설명] ~/ros2_curri/agv_ws/src/agv_gazebo/models/agv/model.sdf의 전체 파일을 19/24 구간으로 작성한다.</a:t>
+            </a:r>
+          </a:p>
+          <a:p>
+            <a:r>
+              <a:t>[실행] nano ~/ros2_curri/agv_ws/src/agv_gazebo/models/agv/model.sdf</a:t>
             </a:r>
           </a:p>
           <a:p>
@@ -2343,12 +2344,12 @@
           <a:lstStyle/>
           <a:p>
             <a:r>
-              <a:t>[설명] ~/agv_ws/src/agv_gazebo/models/agv/model.sdf의 전체 파일을 20/24 구간으로 작성한다.</a:t>
-            </a:r>
-          </a:p>
-          <a:p>
-            <a:r>
-              <a:t>[실행] nano ~/agv_ws/src/agv_gazebo/models/agv/model.sdf</a:t>
+              <a:t>[설명] ~/ros2_curri/agv_ws/src/agv_gazebo/models/agv/model.sdf의 전체 파일을 20/24 구간으로 작성한다.</a:t>
+            </a:r>
+          </a:p>
+          <a:p>
+            <a:r>
+              <a:t>[실행] nano ~/ros2_curri/agv_ws/src/agv_gazebo/models/agv/model.sdf</a:t>
             </a:r>
           </a:p>
           <a:p>
@@ -2433,12 +2434,12 @@
           <a:lstStyle/>
           <a:p>
             <a:r>
-              <a:t>[설명] ~/agv_ws/src/agv_gazebo/models/agv/model.sdf의 전체 파일을 21/24 구간으로 작성한다.</a:t>
-            </a:r>
-          </a:p>
-          <a:p>
-            <a:r>
-              <a:t>[실행] nano ~/agv_ws/src/agv_gazebo/models/agv/model.sdf</a:t>
+              <a:t>[설명] ~/ros2_curri/agv_ws/src/agv_gazebo/models/agv/model.sdf의 전체 파일을 21/24 구간으로 작성한다.</a:t>
+            </a:r>
+          </a:p>
+          <a:p>
+            <a:r>
+              <a:t>[실행] nano ~/ros2_curri/agv_ws/src/agv_gazebo/models/agv/model.sdf</a:t>
             </a:r>
           </a:p>
           <a:p>
@@ -2528,7 +2529,7 @@
           </a:p>
           <a:p>
             <a:r>
-              <a:t>[실행] pwd; source /opt/ros/jazzy/setup.bash; source ~/agv_ws/install/setup.bash</a:t>
+              <a:t>[실행] pwd; source /opt/ros/jazzy/setup.bash; source ~/ros2_curri/agv_ws/install/setup.bash</a:t>
             </a:r>
           </a:p>
           <a:p>
@@ -2613,12 +2614,12 @@
           <a:lstStyle/>
           <a:p>
             <a:r>
-              <a:t>[설명] ~/agv_ws/src/agv_gazebo/models/agv/model.sdf의 전체 파일을 22/24 구간으로 작성한다.</a:t>
-            </a:r>
-          </a:p>
-          <a:p>
-            <a:r>
-              <a:t>[실행] nano ~/agv_ws/src/agv_gazebo/models/agv/model.sdf</a:t>
+              <a:t>[설명] ~/ros2_curri/agv_ws/src/agv_gazebo/models/agv/model.sdf의 전체 파일을 22/24 구간으로 작성한다.</a:t>
+            </a:r>
+          </a:p>
+          <a:p>
+            <a:r>
+              <a:t>[실행] nano ~/ros2_curri/agv_ws/src/agv_gazebo/models/agv/model.sdf</a:t>
             </a:r>
           </a:p>
           <a:p>
@@ -2703,12 +2704,12 @@
           <a:lstStyle/>
           <a:p>
             <a:r>
-              <a:t>[설명] ~/agv_ws/src/agv_gazebo/models/agv/model.sdf의 전체 파일을 23/24 구간으로 작성한다.</a:t>
-            </a:r>
-          </a:p>
-          <a:p>
-            <a:r>
-              <a:t>[실행] nano ~/agv_ws/src/agv_gazebo/models/agv/model.sdf</a:t>
+              <a:t>[설명] ~/ros2_curri/agv_ws/src/agv_gazebo/models/agv/model.sdf의 전체 파일을 23/24 구간으로 작성한다.</a:t>
+            </a:r>
+          </a:p>
+          <a:p>
+            <a:r>
+              <a:t>[실행] nano ~/ros2_curri/agv_ws/src/agv_gazebo/models/agv/model.sdf</a:t>
             </a:r>
           </a:p>
           <a:p>
@@ -2793,12 +2794,12 @@
           <a:lstStyle/>
           <a:p>
             <a:r>
-              <a:t>[설명] ~/agv_ws/src/agv_gazebo/models/agv/model.sdf의 전체 파일을 24/24 구간으로 작성한다.</a:t>
-            </a:r>
-          </a:p>
-          <a:p>
-            <a:r>
-              <a:t>[실행] nano ~/agv_ws/src/agv_gazebo/models/agv/model.sdf</a:t>
+              <a:t>[설명] ~/ros2_curri/agv_ws/src/agv_gazebo/models/agv/model.sdf의 전체 파일을 24/24 구간으로 작성한다.</a:t>
+            </a:r>
+          </a:p>
+          <a:p>
+            <a:r>
+              <a:t>[실행] nano ~/ros2_curri/agv_ws/src/agv_gazebo/models/agv/model.sdf</a:t>
             </a:r>
           </a:p>
           <a:p>
@@ -2883,12 +2884,12 @@
           <a:lstStyle/>
           <a:p>
             <a:r>
-              <a:t>[설명] ~/agv_ws/src/agv_control/agv_control/cmd_test_node.py의 전체 파일을 1/3 구간으로 작성한다.</a:t>
-            </a:r>
-          </a:p>
-          <a:p>
-            <a:r>
-              <a:t>[실행] nano ~/agv_ws/src/agv_control/agv_control/cmd_test_node.py</a:t>
+              <a:t>[설명] ~/ros2_curri/agv_ws/src/agv_control/agv_control/cmd_test_node.py의 전체 파일을 1/3 구간으로 작성한다.</a:t>
+            </a:r>
+          </a:p>
+          <a:p>
+            <a:r>
+              <a:t>[실행] nano ~/ros2_curri/agv_ws/src/agv_control/agv_control/cmd_test_node.py</a:t>
             </a:r>
           </a:p>
           <a:p>
@@ -2973,12 +2974,12 @@
           <a:lstStyle/>
           <a:p>
             <a:r>
-              <a:t>[설명] ~/agv_ws/src/agv_control/agv_control/cmd_test_node.py의 전체 파일을 2/3 구간으로 작성한다.</a:t>
-            </a:r>
-          </a:p>
-          <a:p>
-            <a:r>
-              <a:t>[실행] nano ~/agv_ws/src/agv_control/agv_control/cmd_test_node.py</a:t>
+              <a:t>[설명] ~/ros2_curri/agv_ws/src/agv_control/agv_control/cmd_test_node.py의 전체 파일을 2/3 구간으로 작성한다.</a:t>
+            </a:r>
+          </a:p>
+          <a:p>
+            <a:r>
+              <a:t>[실행] nano ~/ros2_curri/agv_ws/src/agv_control/agv_control/cmd_test_node.py</a:t>
             </a:r>
           </a:p>
           <a:p>
@@ -3063,12 +3064,12 @@
           <a:lstStyle/>
           <a:p>
             <a:r>
-              <a:t>[설명] ~/agv_ws/src/agv_control/agv_control/cmd_test_node.py의 전체 파일을 3/3 구간으로 작성한다.</a:t>
-            </a:r>
-          </a:p>
-          <a:p>
-            <a:r>
-              <a:t>[실행] nano ~/agv_ws/src/agv_control/agv_control/cmd_test_node.py</a:t>
+              <a:t>[설명] ~/ros2_curri/agv_ws/src/agv_control/agv_control/cmd_test_node.py의 전체 파일을 3/3 구간으로 작성한다.</a:t>
+            </a:r>
+          </a:p>
+          <a:p>
+            <a:r>
+              <a:t>[실행] nano ~/ros2_curri/agv_ws/src/agv_control/agv_control/cmd_test_node.py</a:t>
             </a:r>
           </a:p>
           <a:p>
@@ -3338,22 +3339,17 @@
           <a:lstStyle/>
           <a:p>
             <a:r>
-              <a:t>[설명] 검증 명령은 GUI 결과와 별도로 실행해 재현 가능한 완료 기준을 만든다.</a:t>
-            </a:r>
-          </a:p>
-          <a:p>
-            <a:r>
-              <a:t>[실행] ros2 topic info /cmd_vel</a:t>
-            </a:r>
-          </a:p>
-          <a:p>
-            <a:r>
-              <a:t>ros2 topic echo /odom --once</a:t>
-            </a:r>
-          </a:p>
-          <a:p>
-            <a:r>
-              <a:t>[확인] /cmd_vel에서 odom과 바퀴 구동 topic으로 이어지는 경로를 확인한다.</a:t>
+              <a:t>[설명] 실제 Ubuntu/ROS 2 환경에서 생성한 검증 화면이다.</a:t>
+            </a:r>
+          </a:p>
+          <a:p>
+            <a:r>
+              <a:t>[실행] 슬라이드의 명령 또는 파일 작성 단계를 진행한다.</a:t>
+            </a:r>
+          </a:p>
+          <a:p>
+            <a:r>
+              <a:t>[확인] 캡처의 명령과 다음 슬라이드의 검증 명령을 비교한다.</a:t>
             </a:r>
           </a:p>
           <a:p>
@@ -3433,17 +3429,22 @@
           <a:lstStyle/>
           <a:p>
             <a:r>
-              <a:t>[설명] 오류를 대신 해결하지 말고 증상부터 우선 확인 순서대로 교육생이 실행하게 한다.</a:t>
-            </a:r>
-          </a:p>
-          <a:p>
-            <a:r>
-              <a:t>[실행] 슬라이드의 명령 또는 파일 작성 단계를 진행한다.</a:t>
-            </a:r>
-          </a:p>
-          <a:p>
-            <a:r>
-              <a:t>[확인] 수정 뒤 첫 검증 명령을 다시 실행한다.</a:t>
+              <a:t>[설명] 검증 명령은 GUI 결과와 별도로 실행해 재현 가능한 완료 기준을 만든다.</a:t>
+            </a:r>
+          </a:p>
+          <a:p>
+            <a:r>
+              <a:t>[실행] ros2 topic info /cmd_vel</a:t>
+            </a:r>
+          </a:p>
+          <a:p>
+            <a:r>
+              <a:t>ros2 topic echo /odom --once</a:t>
+            </a:r>
+          </a:p>
+          <a:p>
+            <a:r>
+              <a:t>[확인] /cmd_vel에서 odom과 바퀴 구동 topic으로 이어지는 경로를 확인한다.</a:t>
             </a:r>
           </a:p>
           <a:p>
@@ -3453,7 +3454,7 @@
           </a:p>
           <a:p>
             <a:r>
-              <a:t>[오류] 슬라이드의 두 대표 오류를 먼저 사용한다.</a:t>
+              <a:t>[오류] 오류가 나면 현재 폴더, source, 파일 경로를 먼저 확인한다.</a:t>
             </a:r>
           </a:p>
         </p:txBody>
@@ -3613,7 +3614,7 @@
           <a:lstStyle/>
           <a:p>
             <a:r>
-              <a:t>[설명] 교육생이 직접 한 값만 바꿔 원인과 결과를 연결하게 한다.</a:t>
+              <a:t>[설명] 오류를 대신 해결하지 말고 증상부터 우선 확인 순서대로 교육생이 실행하게 한다.</a:t>
             </a:r>
           </a:p>
           <a:p>
@@ -3623,7 +3624,7 @@
           </a:p>
           <a:p>
             <a:r>
-              <a:t>[확인] 원래 값과 변경 값을 모두 기록한다.</a:t>
+              <a:t>[확인] 수정 뒤 첫 검증 명령을 다시 실행한다.</a:t>
             </a:r>
           </a:p>
           <a:p>
@@ -3633,7 +3634,7 @@
           </a:p>
           <a:p>
             <a:r>
-              <a:t>[오류] 오류가 나면 현재 폴더, source, 파일 경로를 먼저 확인한다.</a:t>
+              <a:t>[오류] 슬라이드의 두 대표 오류를 먼저 사용한다.</a:t>
             </a:r>
           </a:p>
         </p:txBody>
@@ -3703,7 +3704,7 @@
           <a:lstStyle/>
           <a:p>
             <a:r>
-              <a:t>[설명] 교육생이 Complete·캡처·로그를 저장했는지 확인하고 다음 모듈의 시작 상태를 읽는다.</a:t>
+              <a:t>[설명] 교육생이 직접 한 값만 바꿔 원인과 결과를 연결하게 한다.</a:t>
             </a:r>
           </a:p>
           <a:p>
@@ -3713,7 +3714,7 @@
           </a:p>
           <a:p>
             <a:r>
-              <a:t>[확인] M10 ros_gz_bridge 시작 조건을 말할 수 있다.</a:t>
+              <a:t>[확인] 원래 값과 변경 값을 모두 기록한다.</a:t>
             </a:r>
           </a:p>
           <a:p>
@@ -3793,6 +3794,96 @@
           <a:lstStyle/>
           <a:p>
             <a:r>
+              <a:t>[설명] 교육생이 Complete·캡처·로그를 저장했는지 확인하고 다음 모듈의 시작 상태를 읽는다.</a:t>
+            </a:r>
+          </a:p>
+          <a:p>
+            <a:r>
+              <a:t>[실행] 슬라이드의 명령 또는 파일 작성 단계를 진행한다.</a:t>
+            </a:r>
+          </a:p>
+          <a:p>
+            <a:r>
+              <a:t>[확인] M10 ros_gz_bridge 시작 조건을 말할 수 있다.</a:t>
+            </a:r>
+          </a:p>
+          <a:p>
+            <a:r>
+              <a:t>[멈춤] 교육생이 현재 체크포인트를 통과할 때까지 기다린다.</a:t>
+            </a:r>
+          </a:p>
+          <a:p>
+            <a:r>
+              <a:t>[오류] 오류가 나면 현재 폴더, source, 파일 경로를 먼저 확인한다.</a:t>
+            </a:r>
+          </a:p>
+        </p:txBody>
+      </p:sp>
+      <p:sp>
+        <p:nvSpPr>
+          <p:cNvPr id="4" name="Slide Number Placeholder 3"/>
+          <p:cNvSpPr>
+            <a:spLocks noGrp="1"/>
+          </p:cNvSpPr>
+          <p:nvPr>
+            <p:ph type="sldNum" idx="5" sz="quarter"/>
+          </p:nvPr>
+        </p:nvSpPr>
+        <p:spPr/>
+      </p:sp>
+    </p:spTree>
+  </p:cSld>
+  <p:clrMapOvr>
+    <a:masterClrMapping/>
+  </p:clrMapOvr>
+</p:notes>
+</file>
+
+<file path=ppt/notesSlides/notesSlide43.xml><?xml version="1.0" encoding="utf-8"?>
+<p:notes xmlns:a="http://schemas.openxmlformats.org/drawingml/2006/main" xmlns:p="http://schemas.openxmlformats.org/presentationml/2006/main" xmlns:r="http://schemas.openxmlformats.org/officeDocument/2006/relationships">
+  <p:cSld>
+    <p:spTree>
+      <p:nvGrpSpPr>
+        <p:cNvPr id="1" name=""/>
+        <p:cNvGrpSpPr/>
+        <p:nvPr/>
+      </p:nvGrpSpPr>
+      <p:grpSpPr>
+        <a:xfrm>
+          <a:off x="0" y="0"/>
+          <a:ext cx="0" cy="0"/>
+          <a:chOff x="0" y="0"/>
+          <a:chExt cx="0" cy="0"/>
+        </a:xfrm>
+      </p:grpSpPr>
+      <p:sp>
+        <p:nvSpPr>
+          <p:cNvPr id="2" name="Slide Image Placeholder 1"/>
+          <p:cNvSpPr>
+            <a:spLocks noGrp="1"/>
+          </p:cNvSpPr>
+          <p:nvPr>
+            <p:ph type="sldImg" idx="2"/>
+          </p:nvPr>
+        </p:nvSpPr>
+        <p:spPr/>
+      </p:sp>
+      <p:sp>
+        <p:nvSpPr>
+          <p:cNvPr id="3" name="Notes Placeholder 2"/>
+          <p:cNvSpPr>
+            <a:spLocks noGrp="1"/>
+          </p:cNvSpPr>
+          <p:nvPr>
+            <p:ph type="body" idx="3" sz="quarter"/>
+          </p:nvPr>
+        </p:nvSpPr>
+        <p:spPr/>
+        <p:txBody>
+          <a:bodyPr/>
+          <a:lstStyle/>
+          <a:p>
+            <a:r>
               <a:t>[설명] 공식 문서는 버전 차이와 확장 학습을 확인할 때 사용한다.</a:t>
             </a:r>
           </a:p>
@@ -4258,12 +4349,12 @@
           <a:lstStyle/>
           <a:p>
             <a:r>
-              <a:t>[설명] ~/agv_ws/src/agv_gazebo/models/agv/model.sdf의 전체 파일을 1/24 구간으로 작성한다.</a:t>
-            </a:r>
-          </a:p>
-          <a:p>
-            <a:r>
-              <a:t>[실행] nano ~/agv_ws/src/agv_gazebo/models/agv/model.sdf</a:t>
+              <a:t>[설명] ~/ros2_curri/agv_ws/src/agv_gazebo/models/agv/model.sdf의 전체 파일을 1/24 구간으로 작성한다.</a:t>
+            </a:r>
+          </a:p>
+          <a:p>
+            <a:r>
+              <a:t>[실행] nano ~/ros2_curri/agv_ws/src/agv_gazebo/models/agv/model.sdf</a:t>
             </a:r>
           </a:p>
           <a:p>
@@ -7690,7 +7781,7 @@
               </a:defRPr>
             </a:pPr>
             <a:r>
-              <a:t>~/agv_ws/src/agv_gazebo/models/agv/model.sdf</a:t>
+              <a:t>~/ros2_curri/agv_ws/src/agv_gazebo/models/agv/model.sdf</a:t>
             </a:r>
           </a:p>
         </p:txBody>
@@ -7826,7 +7917,7 @@
               </a:defRPr>
             </a:pPr>
             <a:r>
-              <a:t>현재 단계 4/27    |    현재 폴더 ~/agv_ws    |    현재 터미널</a:t>
+              <a:t>현재 단계 4/27    |    현재 폴더 ~/ros2_curri/agv_ws    |    현재 터미널</a:t>
             </a:r>
           </a:p>
         </p:txBody>
@@ -7923,11 +8014,11 @@
               </a:defRPr>
             </a:pPr>
             <a:r>
-              <a:t>파일 생성: mkdir -p ~/agv_ws/src/agv_gazebo/models/agv</a:t>
-            </a:r>
-            <a:br/>
-            <a:r>
-              <a:t>파일 열기: nano ~/agv_ws/src/agv_gazebo/models/agv/model.sdf</a:t>
+              <a:t>파일 생성: mkdir -p ~/ros2_curri/agv_ws/src/agv_gazebo/models/agv</a:t>
+            </a:r>
+            <a:br/>
+            <a:r>
+              <a:t>파일 열기: nano ~/ros2_curri/agv_ws/src/agv_gazebo/models/agv/model.sdf</a:t>
             </a:r>
           </a:p>
         </p:txBody>
@@ -8164,7 +8255,7 @@
               </a:defRPr>
             </a:pPr>
             <a:r>
-              <a:t>~/agv_ws/src/agv_gazebo/models/agv/model.sdf</a:t>
+              <a:t>~/ros2_curri/agv_ws/src/agv_gazebo/models/agv/model.sdf</a:t>
             </a:r>
           </a:p>
         </p:txBody>
@@ -8300,7 +8391,7 @@
               </a:defRPr>
             </a:pPr>
             <a:r>
-              <a:t>현재 단계 5/27    |    현재 폴더 ~/agv_ws    |    현재 터미널</a:t>
+              <a:t>현재 단계 5/27    |    현재 폴더 ~/ros2_curri/agv_ws    |    현재 터미널</a:t>
             </a:r>
           </a:p>
         </p:txBody>
@@ -8397,11 +8488,11 @@
               </a:defRPr>
             </a:pPr>
             <a:r>
-              <a:t>파일 생성: mkdir -p ~/agv_ws/src/agv_gazebo/models/agv</a:t>
-            </a:r>
-            <a:br/>
-            <a:r>
-              <a:t>파일 열기: nano ~/agv_ws/src/agv_gazebo/models/agv/model.sdf</a:t>
+              <a:t>파일 생성: mkdir -p ~/ros2_curri/agv_ws/src/agv_gazebo/models/agv</a:t>
+            </a:r>
+            <a:br/>
+            <a:r>
+              <a:t>파일 열기: nano ~/ros2_curri/agv_ws/src/agv_gazebo/models/agv/model.sdf</a:t>
             </a:r>
           </a:p>
         </p:txBody>
@@ -8638,7 +8729,7 @@
               </a:defRPr>
             </a:pPr>
             <a:r>
-              <a:t>~/agv_ws/src/agv_gazebo/models/agv/model.sdf</a:t>
+              <a:t>~/ros2_curri/agv_ws/src/agv_gazebo/models/agv/model.sdf</a:t>
             </a:r>
           </a:p>
         </p:txBody>
@@ -8774,7 +8865,7 @@
               </a:defRPr>
             </a:pPr>
             <a:r>
-              <a:t>현재 단계 6/27    |    현재 폴더 ~/agv_ws    |    현재 터미널</a:t>
+              <a:t>현재 단계 6/27    |    현재 폴더 ~/ros2_curri/agv_ws    |    현재 터미널</a:t>
             </a:r>
           </a:p>
         </p:txBody>
@@ -8871,11 +8962,11 @@
               </a:defRPr>
             </a:pPr>
             <a:r>
-              <a:t>파일 생성: mkdir -p ~/agv_ws/src/agv_gazebo/models/agv</a:t>
-            </a:r>
-            <a:br/>
-            <a:r>
-              <a:t>파일 열기: nano ~/agv_ws/src/agv_gazebo/models/agv/model.sdf</a:t>
+              <a:t>파일 생성: mkdir -p ~/ros2_curri/agv_ws/src/agv_gazebo/models/agv</a:t>
+            </a:r>
+            <a:br/>
+            <a:r>
+              <a:t>파일 열기: nano ~/ros2_curri/agv_ws/src/agv_gazebo/models/agv/model.sdf</a:t>
             </a:r>
           </a:p>
         </p:txBody>
@@ -9112,7 +9203,7 @@
               </a:defRPr>
             </a:pPr>
             <a:r>
-              <a:t>~/agv_ws/src/agv_gazebo/models/agv/model.sdf</a:t>
+              <a:t>~/ros2_curri/agv_ws/src/agv_gazebo/models/agv/model.sdf</a:t>
             </a:r>
           </a:p>
         </p:txBody>
@@ -9248,7 +9339,7 @@
               </a:defRPr>
             </a:pPr>
             <a:r>
-              <a:t>현재 단계 7/27    |    현재 폴더 ~/agv_ws    |    현재 터미널</a:t>
+              <a:t>현재 단계 7/27    |    현재 폴더 ~/ros2_curri/agv_ws    |    현재 터미널</a:t>
             </a:r>
           </a:p>
         </p:txBody>
@@ -9345,11 +9436,11 @@
               </a:defRPr>
             </a:pPr>
             <a:r>
-              <a:t>파일 생성: mkdir -p ~/agv_ws/src/agv_gazebo/models/agv</a:t>
-            </a:r>
-            <a:br/>
-            <a:r>
-              <a:t>파일 열기: nano ~/agv_ws/src/agv_gazebo/models/agv/model.sdf</a:t>
+              <a:t>파일 생성: mkdir -p ~/ros2_curri/agv_ws/src/agv_gazebo/models/agv</a:t>
+            </a:r>
+            <a:br/>
+            <a:r>
+              <a:t>파일 열기: nano ~/ros2_curri/agv_ws/src/agv_gazebo/models/agv/model.sdf</a:t>
             </a:r>
           </a:p>
         </p:txBody>
@@ -9586,7 +9677,7 @@
               </a:defRPr>
             </a:pPr>
             <a:r>
-              <a:t>~/agv_ws/src/agv_gazebo/models/agv/model.sdf</a:t>
+              <a:t>~/ros2_curri/agv_ws/src/agv_gazebo/models/agv/model.sdf</a:t>
             </a:r>
           </a:p>
         </p:txBody>
@@ -9722,7 +9813,7 @@
               </a:defRPr>
             </a:pPr>
             <a:r>
-              <a:t>현재 단계 8/27    |    현재 폴더 ~/agv_ws    |    현재 터미널</a:t>
+              <a:t>현재 단계 8/27    |    현재 폴더 ~/ros2_curri/agv_ws    |    현재 터미널</a:t>
             </a:r>
           </a:p>
         </p:txBody>
@@ -9819,11 +9910,11 @@
               </a:defRPr>
             </a:pPr>
             <a:r>
-              <a:t>파일 생성: mkdir -p ~/agv_ws/src/agv_gazebo/models/agv</a:t>
-            </a:r>
-            <a:br/>
-            <a:r>
-              <a:t>파일 열기: nano ~/agv_ws/src/agv_gazebo/models/agv/model.sdf</a:t>
+              <a:t>파일 생성: mkdir -p ~/ros2_curri/agv_ws/src/agv_gazebo/models/agv</a:t>
+            </a:r>
+            <a:br/>
+            <a:r>
+              <a:t>파일 열기: nano ~/ros2_curri/agv_ws/src/agv_gazebo/models/agv/model.sdf</a:t>
             </a:r>
           </a:p>
         </p:txBody>
@@ -10060,7 +10151,7 @@
               </a:defRPr>
             </a:pPr>
             <a:r>
-              <a:t>~/agv_ws/src/agv_gazebo/models/agv/model.sdf</a:t>
+              <a:t>~/ros2_curri/agv_ws/src/agv_gazebo/models/agv/model.sdf</a:t>
             </a:r>
           </a:p>
         </p:txBody>
@@ -10196,7 +10287,7 @@
               </a:defRPr>
             </a:pPr>
             <a:r>
-              <a:t>현재 단계 9/27    |    현재 폴더 ~/agv_ws    |    현재 터미널</a:t>
+              <a:t>현재 단계 9/27    |    현재 폴더 ~/ros2_curri/agv_ws    |    현재 터미널</a:t>
             </a:r>
           </a:p>
         </p:txBody>
@@ -10293,11 +10384,11 @@
               </a:defRPr>
             </a:pPr>
             <a:r>
-              <a:t>파일 생성: mkdir -p ~/agv_ws/src/agv_gazebo/models/agv</a:t>
-            </a:r>
-            <a:br/>
-            <a:r>
-              <a:t>파일 열기: nano ~/agv_ws/src/agv_gazebo/models/agv/model.sdf</a:t>
+              <a:t>파일 생성: mkdir -p ~/ros2_curri/agv_ws/src/agv_gazebo/models/agv</a:t>
+            </a:r>
+            <a:br/>
+            <a:r>
+              <a:t>파일 열기: nano ~/ros2_curri/agv_ws/src/agv_gazebo/models/agv/model.sdf</a:t>
             </a:r>
           </a:p>
         </p:txBody>
@@ -10534,7 +10625,7 @@
               </a:defRPr>
             </a:pPr>
             <a:r>
-              <a:t>~/agv_ws/src/agv_gazebo/models/agv/model.sdf</a:t>
+              <a:t>~/ros2_curri/agv_ws/src/agv_gazebo/models/agv/model.sdf</a:t>
             </a:r>
           </a:p>
         </p:txBody>
@@ -10670,7 +10761,7 @@
               </a:defRPr>
             </a:pPr>
             <a:r>
-              <a:t>현재 단계 10/27    |    현재 폴더 ~/agv_ws    |    현재 터미널</a:t>
+              <a:t>현재 단계 10/27    |    현재 폴더 ~/ros2_curri/agv_ws    |    현재 터미널</a:t>
             </a:r>
           </a:p>
         </p:txBody>
@@ -10767,11 +10858,11 @@
               </a:defRPr>
             </a:pPr>
             <a:r>
-              <a:t>파일 생성: mkdir -p ~/agv_ws/src/agv_gazebo/models/agv</a:t>
-            </a:r>
-            <a:br/>
-            <a:r>
-              <a:t>파일 열기: nano ~/agv_ws/src/agv_gazebo/models/agv/model.sdf</a:t>
+              <a:t>파일 생성: mkdir -p ~/ros2_curri/agv_ws/src/agv_gazebo/models/agv</a:t>
+            </a:r>
+            <a:br/>
+            <a:r>
+              <a:t>파일 열기: nano ~/ros2_curri/agv_ws/src/agv_gazebo/models/agv/model.sdf</a:t>
             </a:r>
           </a:p>
         </p:txBody>
@@ -11008,7 +11099,7 @@
               </a:defRPr>
             </a:pPr>
             <a:r>
-              <a:t>~/agv_ws/src/agv_gazebo/models/agv/model.sdf</a:t>
+              <a:t>~/ros2_curri/agv_ws/src/agv_gazebo/models/agv/model.sdf</a:t>
             </a:r>
           </a:p>
         </p:txBody>
@@ -11144,7 +11235,7 @@
               </a:defRPr>
             </a:pPr>
             <a:r>
-              <a:t>현재 단계 11/27    |    현재 폴더 ~/agv_ws    |    현재 터미널</a:t>
+              <a:t>현재 단계 11/27    |    현재 폴더 ~/ros2_curri/agv_ws    |    현재 터미널</a:t>
             </a:r>
           </a:p>
         </p:txBody>
@@ -11241,11 +11332,11 @@
               </a:defRPr>
             </a:pPr>
             <a:r>
-              <a:t>파일 생성: mkdir -p ~/agv_ws/src/agv_gazebo/models/agv</a:t>
-            </a:r>
-            <a:br/>
-            <a:r>
-              <a:t>파일 열기: nano ~/agv_ws/src/agv_gazebo/models/agv/model.sdf</a:t>
+              <a:t>파일 생성: mkdir -p ~/ros2_curri/agv_ws/src/agv_gazebo/models/agv</a:t>
+            </a:r>
+            <a:br/>
+            <a:r>
+              <a:t>파일 열기: nano ~/ros2_curri/agv_ws/src/agv_gazebo/models/agv/model.sdf</a:t>
             </a:r>
           </a:p>
         </p:txBody>
@@ -11482,7 +11573,7 @@
               </a:defRPr>
             </a:pPr>
             <a:r>
-              <a:t>~/agv_ws/src/agv_gazebo/models/agv/model.sdf</a:t>
+              <a:t>~/ros2_curri/agv_ws/src/agv_gazebo/models/agv/model.sdf</a:t>
             </a:r>
           </a:p>
         </p:txBody>
@@ -11618,7 +11709,7 @@
               </a:defRPr>
             </a:pPr>
             <a:r>
-              <a:t>현재 단계 12/27    |    현재 폴더 ~/agv_ws    |    현재 터미널</a:t>
+              <a:t>현재 단계 12/27    |    현재 폴더 ~/ros2_curri/agv_ws    |    현재 터미널</a:t>
             </a:r>
           </a:p>
         </p:txBody>
@@ -11715,11 +11806,11 @@
               </a:defRPr>
             </a:pPr>
             <a:r>
-              <a:t>파일 생성: mkdir -p ~/agv_ws/src/agv_gazebo/models/agv</a:t>
-            </a:r>
-            <a:br/>
-            <a:r>
-              <a:t>파일 열기: nano ~/agv_ws/src/agv_gazebo/models/agv/model.sdf</a:t>
+              <a:t>파일 생성: mkdir -p ~/ros2_curri/agv_ws/src/agv_gazebo/models/agv</a:t>
+            </a:r>
+            <a:br/>
+            <a:r>
+              <a:t>파일 열기: nano ~/ros2_curri/agv_ws/src/agv_gazebo/models/agv/model.sdf</a:t>
             </a:r>
           </a:p>
         </p:txBody>
@@ -11956,7 +12047,7 @@
               </a:defRPr>
             </a:pPr>
             <a:r>
-              <a:t>~/agv_ws/src/agv_gazebo/models/agv/model.sdf</a:t>
+              <a:t>~/ros2_curri/agv_ws/src/agv_gazebo/models/agv/model.sdf</a:t>
             </a:r>
           </a:p>
         </p:txBody>
@@ -12092,7 +12183,7 @@
               </a:defRPr>
             </a:pPr>
             <a:r>
-              <a:t>현재 단계 13/27    |    현재 폴더 ~/agv_ws    |    현재 터미널</a:t>
+              <a:t>현재 단계 13/27    |    현재 폴더 ~/ros2_curri/agv_ws    |    현재 터미널</a:t>
             </a:r>
           </a:p>
         </p:txBody>
@@ -12189,11 +12280,11 @@
               </a:defRPr>
             </a:pPr>
             <a:r>
-              <a:t>파일 생성: mkdir -p ~/agv_ws/src/agv_gazebo/models/agv</a:t>
-            </a:r>
-            <a:br/>
-            <a:r>
-              <a:t>파일 열기: nano ~/agv_ws/src/agv_gazebo/models/agv/model.sdf</a:t>
+              <a:t>파일 생성: mkdir -p ~/ros2_curri/agv_ws/src/agv_gazebo/models/agv</a:t>
+            </a:r>
+            <a:br/>
+            <a:r>
+              <a:t>파일 열기: nano ~/ros2_curri/agv_ws/src/agv_gazebo/models/agv/model.sdf</a:t>
             </a:r>
           </a:p>
         </p:txBody>
@@ -12891,7 +12982,7 @@
               </a:defRPr>
             </a:pPr>
             <a:r>
-              <a:t>~/agv_ws/src/agv_gazebo/models/agv/model.sdf</a:t>
+              <a:t>~/ros2_curri/agv_ws/src/agv_gazebo/models/agv/model.sdf</a:t>
             </a:r>
           </a:p>
         </p:txBody>
@@ -13027,7 +13118,7 @@
               </a:defRPr>
             </a:pPr>
             <a:r>
-              <a:t>현재 단계 14/27    |    현재 폴더 ~/agv_ws    |    현재 터미널</a:t>
+              <a:t>현재 단계 14/27    |    현재 폴더 ~/ros2_curri/agv_ws    |    현재 터미널</a:t>
             </a:r>
           </a:p>
         </p:txBody>
@@ -13124,11 +13215,11 @@
               </a:defRPr>
             </a:pPr>
             <a:r>
-              <a:t>파일 생성: mkdir -p ~/agv_ws/src/agv_gazebo/models/agv</a:t>
-            </a:r>
-            <a:br/>
-            <a:r>
-              <a:t>파일 열기: nano ~/agv_ws/src/agv_gazebo/models/agv/model.sdf</a:t>
+              <a:t>파일 생성: mkdir -p ~/ros2_curri/agv_ws/src/agv_gazebo/models/agv</a:t>
+            </a:r>
+            <a:br/>
+            <a:r>
+              <a:t>파일 열기: nano ~/ros2_curri/agv_ws/src/agv_gazebo/models/agv/model.sdf</a:t>
             </a:r>
           </a:p>
         </p:txBody>
@@ -13365,7 +13456,7 @@
               </a:defRPr>
             </a:pPr>
             <a:r>
-              <a:t>~/agv_ws/src/agv_gazebo/models/agv/model.sdf</a:t>
+              <a:t>~/ros2_curri/agv_ws/src/agv_gazebo/models/agv/model.sdf</a:t>
             </a:r>
           </a:p>
         </p:txBody>
@@ -13501,7 +13592,7 @@
               </a:defRPr>
             </a:pPr>
             <a:r>
-              <a:t>현재 단계 15/27    |    현재 폴더 ~/agv_ws    |    현재 터미널</a:t>
+              <a:t>현재 단계 15/27    |    현재 폴더 ~/ros2_curri/agv_ws    |    현재 터미널</a:t>
             </a:r>
           </a:p>
         </p:txBody>
@@ -13598,11 +13689,11 @@
               </a:defRPr>
             </a:pPr>
             <a:r>
-              <a:t>파일 생성: mkdir -p ~/agv_ws/src/agv_gazebo/models/agv</a:t>
-            </a:r>
-            <a:br/>
-            <a:r>
-              <a:t>파일 열기: nano ~/agv_ws/src/agv_gazebo/models/agv/model.sdf</a:t>
+              <a:t>파일 생성: mkdir -p ~/ros2_curri/agv_ws/src/agv_gazebo/models/agv</a:t>
+            </a:r>
+            <a:br/>
+            <a:r>
+              <a:t>파일 열기: nano ~/ros2_curri/agv_ws/src/agv_gazebo/models/agv/model.sdf</a:t>
             </a:r>
           </a:p>
         </p:txBody>
@@ -13839,7 +13930,7 @@
               </a:defRPr>
             </a:pPr>
             <a:r>
-              <a:t>~/agv_ws/src/agv_gazebo/models/agv/model.sdf</a:t>
+              <a:t>~/ros2_curri/agv_ws/src/agv_gazebo/models/agv/model.sdf</a:t>
             </a:r>
           </a:p>
         </p:txBody>
@@ -13975,7 +14066,7 @@
               </a:defRPr>
             </a:pPr>
             <a:r>
-              <a:t>현재 단계 16/27    |    현재 폴더 ~/agv_ws    |    현재 터미널</a:t>
+              <a:t>현재 단계 16/27    |    현재 폴더 ~/ros2_curri/agv_ws    |    현재 터미널</a:t>
             </a:r>
           </a:p>
         </p:txBody>
@@ -14072,11 +14163,11 @@
               </a:defRPr>
             </a:pPr>
             <a:r>
-              <a:t>파일 생성: mkdir -p ~/agv_ws/src/agv_gazebo/models/agv</a:t>
-            </a:r>
-            <a:br/>
-            <a:r>
-              <a:t>파일 열기: nano ~/agv_ws/src/agv_gazebo/models/agv/model.sdf</a:t>
+              <a:t>파일 생성: mkdir -p ~/ros2_curri/agv_ws/src/agv_gazebo/models/agv</a:t>
+            </a:r>
+            <a:br/>
+            <a:r>
+              <a:t>파일 열기: nano ~/ros2_curri/agv_ws/src/agv_gazebo/models/agv/model.sdf</a:t>
             </a:r>
           </a:p>
         </p:txBody>
@@ -14313,7 +14404,7 @@
               </a:defRPr>
             </a:pPr>
             <a:r>
-              <a:t>~/agv_ws/src/agv_gazebo/models/agv/model.sdf</a:t>
+              <a:t>~/ros2_curri/agv_ws/src/agv_gazebo/models/agv/model.sdf</a:t>
             </a:r>
           </a:p>
         </p:txBody>
@@ -14449,7 +14540,7 @@
               </a:defRPr>
             </a:pPr>
             <a:r>
-              <a:t>현재 단계 17/27    |    현재 폴더 ~/agv_ws    |    현재 터미널</a:t>
+              <a:t>현재 단계 17/27    |    현재 폴더 ~/ros2_curri/agv_ws    |    현재 터미널</a:t>
             </a:r>
           </a:p>
         </p:txBody>
@@ -14546,11 +14637,11 @@
               </a:defRPr>
             </a:pPr>
             <a:r>
-              <a:t>파일 생성: mkdir -p ~/agv_ws/src/agv_gazebo/models/agv</a:t>
-            </a:r>
-            <a:br/>
-            <a:r>
-              <a:t>파일 열기: nano ~/agv_ws/src/agv_gazebo/models/agv/model.sdf</a:t>
+              <a:t>파일 생성: mkdir -p ~/ros2_curri/agv_ws/src/agv_gazebo/models/agv</a:t>
+            </a:r>
+            <a:br/>
+            <a:r>
+              <a:t>파일 열기: nano ~/ros2_curri/agv_ws/src/agv_gazebo/models/agv/model.sdf</a:t>
             </a:r>
           </a:p>
         </p:txBody>
@@ -14787,7 +14878,7 @@
               </a:defRPr>
             </a:pPr>
             <a:r>
-              <a:t>~/agv_ws/src/agv_gazebo/models/agv/model.sdf</a:t>
+              <a:t>~/ros2_curri/agv_ws/src/agv_gazebo/models/agv/model.sdf</a:t>
             </a:r>
           </a:p>
         </p:txBody>
@@ -14923,7 +15014,7 @@
               </a:defRPr>
             </a:pPr>
             <a:r>
-              <a:t>현재 단계 18/27    |    현재 폴더 ~/agv_ws    |    현재 터미널</a:t>
+              <a:t>현재 단계 18/27    |    현재 폴더 ~/ros2_curri/agv_ws    |    현재 터미널</a:t>
             </a:r>
           </a:p>
         </p:txBody>
@@ -15020,11 +15111,11 @@
               </a:defRPr>
             </a:pPr>
             <a:r>
-              <a:t>파일 생성: mkdir -p ~/agv_ws/src/agv_gazebo/models/agv</a:t>
-            </a:r>
-            <a:br/>
-            <a:r>
-              <a:t>파일 열기: nano ~/agv_ws/src/agv_gazebo/models/agv/model.sdf</a:t>
+              <a:t>파일 생성: mkdir -p ~/ros2_curri/agv_ws/src/agv_gazebo/models/agv</a:t>
+            </a:r>
+            <a:br/>
+            <a:r>
+              <a:t>파일 열기: nano ~/ros2_curri/agv_ws/src/agv_gazebo/models/agv/model.sdf</a:t>
             </a:r>
           </a:p>
         </p:txBody>
@@ -15261,7 +15352,7 @@
               </a:defRPr>
             </a:pPr>
             <a:r>
-              <a:t>~/agv_ws/src/agv_gazebo/models/agv/model.sdf</a:t>
+              <a:t>~/ros2_curri/agv_ws/src/agv_gazebo/models/agv/model.sdf</a:t>
             </a:r>
           </a:p>
         </p:txBody>
@@ -15397,7 +15488,7 @@
               </a:defRPr>
             </a:pPr>
             <a:r>
-              <a:t>현재 단계 19/27    |    현재 폴더 ~/agv_ws    |    현재 터미널</a:t>
+              <a:t>현재 단계 19/27    |    현재 폴더 ~/ros2_curri/agv_ws    |    현재 터미널</a:t>
             </a:r>
           </a:p>
         </p:txBody>
@@ -15494,11 +15585,11 @@
               </a:defRPr>
             </a:pPr>
             <a:r>
-              <a:t>파일 생성: mkdir -p ~/agv_ws/src/agv_gazebo/models/agv</a:t>
-            </a:r>
-            <a:br/>
-            <a:r>
-              <a:t>파일 열기: nano ~/agv_ws/src/agv_gazebo/models/agv/model.sdf</a:t>
+              <a:t>파일 생성: mkdir -p ~/ros2_curri/agv_ws/src/agv_gazebo/models/agv</a:t>
+            </a:r>
+            <a:br/>
+            <a:r>
+              <a:t>파일 열기: nano ~/ros2_curri/agv_ws/src/agv_gazebo/models/agv/model.sdf</a:t>
             </a:r>
           </a:p>
         </p:txBody>
@@ -15735,7 +15826,7 @@
               </a:defRPr>
             </a:pPr>
             <a:r>
-              <a:t>~/agv_ws/src/agv_gazebo/models/agv/model.sdf</a:t>
+              <a:t>~/ros2_curri/agv_ws/src/agv_gazebo/models/agv/model.sdf</a:t>
             </a:r>
           </a:p>
         </p:txBody>
@@ -15871,7 +15962,7 @@
               </a:defRPr>
             </a:pPr>
             <a:r>
-              <a:t>현재 단계 20/27    |    현재 폴더 ~/agv_ws    |    현재 터미널</a:t>
+              <a:t>현재 단계 20/27    |    현재 폴더 ~/ros2_curri/agv_ws    |    현재 터미널</a:t>
             </a:r>
           </a:p>
         </p:txBody>
@@ -15968,11 +16059,11 @@
               </a:defRPr>
             </a:pPr>
             <a:r>
-              <a:t>파일 생성: mkdir -p ~/agv_ws/src/agv_gazebo/models/agv</a:t>
-            </a:r>
-            <a:br/>
-            <a:r>
-              <a:t>파일 열기: nano ~/agv_ws/src/agv_gazebo/models/agv/model.sdf</a:t>
+              <a:t>파일 생성: mkdir -p ~/ros2_curri/agv_ws/src/agv_gazebo/models/agv</a:t>
+            </a:r>
+            <a:br/>
+            <a:r>
+              <a:t>파일 열기: nano ~/ros2_curri/agv_ws/src/agv_gazebo/models/agv/model.sdf</a:t>
             </a:r>
           </a:p>
         </p:txBody>
@@ -16209,7 +16300,7 @@
               </a:defRPr>
             </a:pPr>
             <a:r>
-              <a:t>~/agv_ws/src/agv_gazebo/models/agv/model.sdf</a:t>
+              <a:t>~/ros2_curri/agv_ws/src/agv_gazebo/models/agv/model.sdf</a:t>
             </a:r>
           </a:p>
         </p:txBody>
@@ -16345,7 +16436,7 @@
               </a:defRPr>
             </a:pPr>
             <a:r>
-              <a:t>현재 단계 21/27    |    현재 폴더 ~/agv_ws    |    현재 터미널</a:t>
+              <a:t>현재 단계 21/27    |    현재 폴더 ~/ros2_curri/agv_ws    |    현재 터미널</a:t>
             </a:r>
           </a:p>
         </p:txBody>
@@ -16442,11 +16533,11 @@
               </a:defRPr>
             </a:pPr>
             <a:r>
-              <a:t>파일 생성: mkdir -p ~/agv_ws/src/agv_gazebo/models/agv</a:t>
-            </a:r>
-            <a:br/>
-            <a:r>
-              <a:t>파일 열기: nano ~/agv_ws/src/agv_gazebo/models/agv/model.sdf</a:t>
+              <a:t>파일 생성: mkdir -p ~/ros2_curri/agv_ws/src/agv_gazebo/models/agv</a:t>
+            </a:r>
+            <a:br/>
+            <a:r>
+              <a:t>파일 열기: nano ~/ros2_curri/agv_ws/src/agv_gazebo/models/agv/model.sdf</a:t>
             </a:r>
           </a:p>
         </p:txBody>
@@ -16683,7 +16774,7 @@
               </a:defRPr>
             </a:pPr>
             <a:r>
-              <a:t>~/agv_ws/src/agv_gazebo/models/agv/model.sdf</a:t>
+              <a:t>~/ros2_curri/agv_ws/src/agv_gazebo/models/agv/model.sdf</a:t>
             </a:r>
           </a:p>
         </p:txBody>
@@ -16819,7 +16910,7 @@
               </a:defRPr>
             </a:pPr>
             <a:r>
-              <a:t>현재 단계 22/27    |    현재 폴더 ~/agv_ws    |    현재 터미널</a:t>
+              <a:t>현재 단계 22/27    |    현재 폴더 ~/ros2_curri/agv_ws    |    현재 터미널</a:t>
             </a:r>
           </a:p>
         </p:txBody>
@@ -16916,11 +17007,11 @@
               </a:defRPr>
             </a:pPr>
             <a:r>
-              <a:t>파일 생성: mkdir -p ~/agv_ws/src/agv_gazebo/models/agv</a:t>
-            </a:r>
-            <a:br/>
-            <a:r>
-              <a:t>파일 열기: nano ~/agv_ws/src/agv_gazebo/models/agv/model.sdf</a:t>
+              <a:t>파일 생성: mkdir -p ~/ros2_curri/agv_ws/src/agv_gazebo/models/agv</a:t>
+            </a:r>
+            <a:br/>
+            <a:r>
+              <a:t>파일 열기: nano ~/ros2_curri/agv_ws/src/agv_gazebo/models/agv/model.sdf</a:t>
             </a:r>
           </a:p>
         </p:txBody>
@@ -17157,7 +17248,7 @@
               </a:defRPr>
             </a:pPr>
             <a:r>
-              <a:t>~/agv_ws/src/agv_gazebo/models/agv/model.sdf</a:t>
+              <a:t>~/ros2_curri/agv_ws/src/agv_gazebo/models/agv/model.sdf</a:t>
             </a:r>
           </a:p>
         </p:txBody>
@@ -17293,7 +17384,7 @@
               </a:defRPr>
             </a:pPr>
             <a:r>
-              <a:t>현재 단계 23/27    |    현재 폴더 ~/agv_ws    |    현재 터미널</a:t>
+              <a:t>현재 단계 23/27    |    현재 폴더 ~/ros2_curri/agv_ws    |    현재 터미널</a:t>
             </a:r>
           </a:p>
         </p:txBody>
@@ -17390,11 +17481,11 @@
               </a:defRPr>
             </a:pPr>
             <a:r>
-              <a:t>파일 생성: mkdir -p ~/agv_ws/src/agv_gazebo/models/agv</a:t>
-            </a:r>
-            <a:br/>
-            <a:r>
-              <a:t>파일 열기: nano ~/agv_ws/src/agv_gazebo/models/agv/model.sdf</a:t>
+              <a:t>파일 생성: mkdir -p ~/ros2_curri/agv_ws/src/agv_gazebo/models/agv</a:t>
+            </a:r>
+            <a:br/>
+            <a:r>
+              <a:t>파일 열기: nano ~/ros2_curri/agv_ws/src/agv_gazebo/models/agv/model.sdf</a:t>
             </a:r>
           </a:p>
         </p:txBody>
@@ -17767,7 +17858,7 @@
               </a:defRPr>
             </a:pPr>
             <a:r>
-              <a:t>현재 단계 시작    |    현재 폴더 ~/agv_ws    |    현재 터미널</a:t>
+              <a:t>현재 단계 시작    |    현재 폴더 ~/ros2_curri/agv_ws    |    현재 터미널</a:t>
             </a:r>
           </a:p>
         </p:txBody>
@@ -17883,7 +17974,7 @@
               </a:defRPr>
             </a:pPr>
             <a:r>
-              <a:t>• 현재 폴더: ~/agv_ws</a:t>
+              <a:t>• 현재 폴더: ~/ros2_curri/agv_ws</a:t>
             </a:r>
           </a:p>
           <a:p>
@@ -17954,7 +18045,7 @@
               </a:defRPr>
             </a:pPr>
             <a:r>
-              <a:t>확인: pwd가 ~/agv_ws이고, 이전 모듈의 완료 조건을 한 문장으로 설명할 수 있으면 시작합니다.</a:t>
+              <a:t>확인: pwd가 ~/ros2_curri/agv_ws이고, 이전 모듈의 완료 조건을 한 문장으로 설명할 수 있으면 시작합니다.</a:t>
             </a:r>
           </a:p>
         </p:txBody>
@@ -18050,7 +18141,7 @@
               </a:defRPr>
             </a:pPr>
             <a:r>
-              <a:t>~/agv_ws/src/agv_gazebo/models/agv/model.sdf</a:t>
+              <a:t>~/ros2_curri/agv_ws/src/agv_gazebo/models/agv/model.sdf</a:t>
             </a:r>
           </a:p>
         </p:txBody>
@@ -18186,7 +18277,7 @@
               </a:defRPr>
             </a:pPr>
             <a:r>
-              <a:t>현재 단계 24/27    |    현재 폴더 ~/agv_ws    |    현재 터미널</a:t>
+              <a:t>현재 단계 24/27    |    현재 폴더 ~/ros2_curri/agv_ws    |    현재 터미널</a:t>
             </a:r>
           </a:p>
         </p:txBody>
@@ -18283,11 +18374,11 @@
               </a:defRPr>
             </a:pPr>
             <a:r>
-              <a:t>파일 생성: mkdir -p ~/agv_ws/src/agv_gazebo/models/agv</a:t>
-            </a:r>
-            <a:br/>
-            <a:r>
-              <a:t>파일 열기: nano ~/agv_ws/src/agv_gazebo/models/agv/model.sdf</a:t>
+              <a:t>파일 생성: mkdir -p ~/ros2_curri/agv_ws/src/agv_gazebo/models/agv</a:t>
+            </a:r>
+            <a:br/>
+            <a:r>
+              <a:t>파일 열기: nano ~/ros2_curri/agv_ws/src/agv_gazebo/models/agv/model.sdf</a:t>
             </a:r>
           </a:p>
         </p:txBody>
@@ -18524,7 +18615,7 @@
               </a:defRPr>
             </a:pPr>
             <a:r>
-              <a:t>~/agv_ws/src/agv_gazebo/models/agv/model.sdf</a:t>
+              <a:t>~/ros2_curri/agv_ws/src/agv_gazebo/models/agv/model.sdf</a:t>
             </a:r>
           </a:p>
         </p:txBody>
@@ -18660,7 +18751,7 @@
               </a:defRPr>
             </a:pPr>
             <a:r>
-              <a:t>현재 단계 25/27    |    현재 폴더 ~/agv_ws    |    현재 터미널</a:t>
+              <a:t>현재 단계 25/27    |    현재 폴더 ~/ros2_curri/agv_ws    |    현재 터미널</a:t>
             </a:r>
           </a:p>
         </p:txBody>
@@ -18757,11 +18848,11 @@
               </a:defRPr>
             </a:pPr>
             <a:r>
-              <a:t>파일 생성: mkdir -p ~/agv_ws/src/agv_gazebo/models/agv</a:t>
-            </a:r>
-            <a:br/>
-            <a:r>
-              <a:t>파일 열기: nano ~/agv_ws/src/agv_gazebo/models/agv/model.sdf</a:t>
+              <a:t>파일 생성: mkdir -p ~/ros2_curri/agv_ws/src/agv_gazebo/models/agv</a:t>
+            </a:r>
+            <a:br/>
+            <a:r>
+              <a:t>파일 열기: nano ~/ros2_curri/agv_ws/src/agv_gazebo/models/agv/model.sdf</a:t>
             </a:r>
           </a:p>
         </p:txBody>
@@ -18998,7 +19089,7 @@
               </a:defRPr>
             </a:pPr>
             <a:r>
-              <a:t>~/agv_ws/src/agv_gazebo/models/agv/model.sdf</a:t>
+              <a:t>~/ros2_curri/agv_ws/src/agv_gazebo/models/agv/model.sdf</a:t>
             </a:r>
           </a:p>
         </p:txBody>
@@ -19134,7 +19225,7 @@
               </a:defRPr>
             </a:pPr>
             <a:r>
-              <a:t>현재 단계 26/27    |    현재 폴더 ~/agv_ws    |    현재 터미널</a:t>
+              <a:t>현재 단계 26/27    |    현재 폴더 ~/ros2_curri/agv_ws    |    현재 터미널</a:t>
             </a:r>
           </a:p>
         </p:txBody>
@@ -19231,11 +19322,11 @@
               </a:defRPr>
             </a:pPr>
             <a:r>
-              <a:t>파일 생성: mkdir -p ~/agv_ws/src/agv_gazebo/models/agv</a:t>
-            </a:r>
-            <a:br/>
-            <a:r>
-              <a:t>파일 열기: nano ~/agv_ws/src/agv_gazebo/models/agv/model.sdf</a:t>
+              <a:t>파일 생성: mkdir -p ~/ros2_curri/agv_ws/src/agv_gazebo/models/agv</a:t>
+            </a:r>
+            <a:br/>
+            <a:r>
+              <a:t>파일 열기: nano ~/ros2_curri/agv_ws/src/agv_gazebo/models/agv/model.sdf</a:t>
             </a:r>
           </a:p>
         </p:txBody>
@@ -19469,7 +19560,7 @@
               </a:defRPr>
             </a:pPr>
             <a:r>
-              <a:t>~/agv_ws/src/agv_control/agv_control/cmd_test_node.py</a:t>
+              <a:t>~/ros2_curri/agv_ws/src/agv_control/agv_control/cmd_test_node.py</a:t>
             </a:r>
           </a:p>
         </p:txBody>
@@ -19605,7 +19696,7 @@
               </a:defRPr>
             </a:pPr>
             <a:r>
-              <a:t>현재 단계 27/30    |    현재 폴더 ~/agv_ws    |    현재 터미널</a:t>
+              <a:t>현재 단계 27/30    |    현재 폴더 ~/ros2_curri/agv_ws    |    현재 터미널</a:t>
             </a:r>
           </a:p>
         </p:txBody>
@@ -19702,11 +19793,11 @@
               </a:defRPr>
             </a:pPr>
             <a:r>
-              <a:t>파일 생성: mkdir -p ~/agv_ws/src/agv_control/agv_control</a:t>
-            </a:r>
-            <a:br/>
-            <a:r>
-              <a:t>파일 열기: nano ~/agv_ws/src/agv_control/agv_control/cmd_test_node.py</a:t>
+              <a:t>파일 생성: mkdir -p ~/ros2_curri/agv_ws/src/agv_control/agv_control</a:t>
+            </a:r>
+            <a:br/>
+            <a:r>
+              <a:t>파일 열기: nano ~/ros2_curri/agv_ws/src/agv_control/agv_control/cmd_test_node.py</a:t>
             </a:r>
           </a:p>
         </p:txBody>
@@ -19937,7 +20028,7 @@
               </a:defRPr>
             </a:pPr>
             <a:r>
-              <a:t>~/agv_ws/src/agv_control/agv_control/cmd_test_node.py</a:t>
+              <a:t>~/ros2_curri/agv_ws/src/agv_control/agv_control/cmd_test_node.py</a:t>
             </a:r>
           </a:p>
         </p:txBody>
@@ -20073,7 +20164,7 @@
               </a:defRPr>
             </a:pPr>
             <a:r>
-              <a:t>현재 단계 28/30    |    현재 폴더 ~/agv_ws    |    현재 터미널</a:t>
+              <a:t>현재 단계 28/30    |    현재 폴더 ~/ros2_curri/agv_ws    |    현재 터미널</a:t>
             </a:r>
           </a:p>
         </p:txBody>
@@ -20170,11 +20261,11 @@
               </a:defRPr>
             </a:pPr>
             <a:r>
-              <a:t>파일 생성: mkdir -p ~/agv_ws/src/agv_control/agv_control</a:t>
-            </a:r>
-            <a:br/>
-            <a:r>
-              <a:t>파일 열기: nano ~/agv_ws/src/agv_control/agv_control/cmd_test_node.py</a:t>
+              <a:t>파일 생성: mkdir -p ~/ros2_curri/agv_ws/src/agv_control/agv_control</a:t>
+            </a:r>
+            <a:br/>
+            <a:r>
+              <a:t>파일 열기: nano ~/ros2_curri/agv_ws/src/agv_control/agv_control/cmd_test_node.py</a:t>
             </a:r>
           </a:p>
         </p:txBody>
@@ -20408,7 +20499,7 @@
               </a:defRPr>
             </a:pPr>
             <a:r>
-              <a:t>~/agv_ws/src/agv_control/agv_control/cmd_test_node.py</a:t>
+              <a:t>~/ros2_curri/agv_ws/src/agv_control/agv_control/cmd_test_node.py</a:t>
             </a:r>
           </a:p>
         </p:txBody>
@@ -20544,7 +20635,7 @@
               </a:defRPr>
             </a:pPr>
             <a:r>
-              <a:t>현재 단계 29/30    |    현재 폴더 ~/agv_ws    |    현재 터미널</a:t>
+              <a:t>현재 단계 29/30    |    현재 폴더 ~/ros2_curri/agv_ws    |    현재 터미널</a:t>
             </a:r>
           </a:p>
         </p:txBody>
@@ -20641,11 +20732,11 @@
               </a:defRPr>
             </a:pPr>
             <a:r>
-              <a:t>파일 생성: mkdir -p ~/agv_ws/src/agv_control/agv_control</a:t>
-            </a:r>
-            <a:br/>
-            <a:r>
-              <a:t>파일 열기: nano ~/agv_ws/src/agv_control/agv_control/cmd_test_node.py</a:t>
+              <a:t>파일 생성: mkdir -p ~/ros2_curri/agv_ws/src/agv_control/agv_control</a:t>
+            </a:r>
+            <a:br/>
+            <a:r>
+              <a:t>파일 열기: nano ~/ros2_curri/agv_ws/src/agv_control/agv_control/cmd_test_node.py</a:t>
             </a:r>
           </a:p>
         </p:txBody>
@@ -21015,7 +21106,7 @@
               </a:defRPr>
             </a:pPr>
             <a:r>
-              <a:t>현재 단계 실행    |    현재 폴더 ~/agv_ws    |    현재 터미널</a:t>
+              <a:t>현재 단계 실행    |    현재 폴더 ~/ros2_curri/agv_ws    |    현재 터미널</a:t>
             </a:r>
           </a:p>
         </p:txBody>
@@ -21449,7 +21540,7 @@
               </a:defRPr>
             </a:pPr>
             <a:r>
-              <a:t>객관적 검증 명령으로 완료를 확인한다</a:t>
+              <a:t>정상 결과: 실제 환경에서 확인한 출력</a:t>
             </a:r>
           </a:p>
         </p:txBody>
@@ -21488,7 +21579,7 @@
               </a:defRPr>
             </a:pPr>
             <a:r>
-              <a:t>화면만 보지 말고 topic·frame·파일·parameter를 다시 확인합니다.</a:t>
+              <a:t>실제 Gazebo Sim: World 안의 AGV와 장애물·목표물 배치</a:t>
             </a:r>
           </a:p>
         </p:txBody>
@@ -21571,206 +21662,40 @@
           </a:p>
         </p:txBody>
       </p:sp>
-      <p:sp>
-        <p:nvSpPr>
-          <p:cNvPr id="6" name="Rectangle 5"/>
-          <p:cNvSpPr/>
-          <p:nvPr/>
-        </p:nvSpPr>
-        <p:spPr>
-          <a:xfrm>
-            <a:off x="566928" y="1188720"/>
-            <a:ext cx="11064240" cy="347472"/>
-          </a:xfrm>
-          <a:prstGeom prst="rect">
-            <a:avLst/>
-          </a:prstGeom>
-          <a:solidFill>
-            <a:srgbClr val="F4F7FB"/>
-          </a:solidFill>
-          <a:ln>
-            <a:solidFill>
-              <a:srgbClr val="F4F7FB"/>
-            </a:solidFill>
-          </a:ln>
-        </p:spPr>
-        <p:style>
-          <a:lnRef idx="1">
-            <a:schemeClr val="accent1"/>
-          </a:lnRef>
-          <a:fillRef idx="3">
-            <a:schemeClr val="accent1"/>
-          </a:fillRef>
-          <a:effectRef idx="2">
-            <a:schemeClr val="accent1"/>
-          </a:effectRef>
-          <a:fontRef idx="minor">
-            <a:schemeClr val="lt1"/>
-          </a:fontRef>
-        </p:style>
-        <p:txBody>
-          <a:bodyPr rtlCol="0" anchor="ctr" wrap="square" lIns="73152" rIns="73152" tIns="36576" bIns="36576"/>
-          <a:lstStyle/>
-          <a:p>
-            <a:pPr algn="l">
-              <a:spcAft>
-                <a:spcPts val="0"/>
-              </a:spcAft>
-              <a:defRPr sz="1300" b="1">
-                <a:solidFill>
-                  <a:srgbClr val="122C4E"/>
-                </a:solidFill>
-                <a:latin typeface="Noto Sans CJK KR"/>
-              </a:defRPr>
-            </a:pPr>
-            <a:r>
-              <a:t>현재 단계 검증    |    현재 폴더 ~/agv_ws    |    현재 터미널</a:t>
-            </a:r>
-          </a:p>
-        </p:txBody>
-      </p:sp>
-      <p:sp>
-        <p:nvSpPr>
-          <p:cNvPr id="7" name="Rounded Rectangle 6"/>
-          <p:cNvSpPr/>
-          <p:nvPr/>
-        </p:nvSpPr>
-        <p:spPr>
-          <a:xfrm>
-            <a:off x="658368" y="1755648"/>
-            <a:ext cx="10972800" cy="2148840"/>
-          </a:xfrm>
-          <a:prstGeom prst="roundRect">
-            <a:avLst/>
-          </a:prstGeom>
-          <a:solidFill>
-            <a:srgbClr val="1D232D"/>
-          </a:solidFill>
-          <a:ln>
-            <a:solidFill>
-              <a:srgbClr val="1D232D"/>
-            </a:solidFill>
-          </a:ln>
-        </p:spPr>
-        <p:style>
-          <a:lnRef idx="1">
-            <a:schemeClr val="accent1"/>
-          </a:lnRef>
-          <a:fillRef idx="3">
-            <a:schemeClr val="accent1"/>
-          </a:fillRef>
-          <a:effectRef idx="2">
-            <a:schemeClr val="accent1"/>
-          </a:effectRef>
-          <a:fontRef idx="minor">
-            <a:schemeClr val="lt1"/>
-          </a:fontRef>
-        </p:style>
-        <p:txBody>
-          <a:bodyPr rtlCol="0" anchor="ctr" wrap="square" lIns="73152" rIns="73152" tIns="36576" bIns="36576"/>
-          <a:lstStyle/>
-          <a:p>
-            <a:pPr algn="l">
-              <a:spcAft>
-                <a:spcPts val="0"/>
-              </a:spcAft>
-              <a:defRPr sz="1600" b="0">
-                <a:solidFill>
-                  <a:srgbClr val="FFFFFF"/>
-                </a:solidFill>
-                <a:latin typeface="DejaVu Sans Mono"/>
-              </a:defRPr>
-            </a:pPr>
-            <a:r>
-              <a:t>ros2 topic info /cmd_vel</a:t>
-            </a:r>
-            <a:br/>
-            <a:r>
-              <a:t>ros2 topic echo /odom --once</a:t>
-            </a:r>
-          </a:p>
-        </p:txBody>
-      </p:sp>
-      <p:sp>
-        <p:nvSpPr>
-          <p:cNvPr id="8" name="Rounded Rectangle 7"/>
-          <p:cNvSpPr/>
-          <p:nvPr/>
-        </p:nvSpPr>
-        <p:spPr>
-          <a:xfrm>
-            <a:off x="658368" y="4206240"/>
-            <a:ext cx="10972800" cy="1554480"/>
-          </a:xfrm>
-          <a:prstGeom prst="roundRect">
-            <a:avLst/>
-          </a:prstGeom>
-          <a:solidFill>
-            <a:srgbClr val="F4F7FB"/>
-          </a:solidFill>
-          <a:ln>
-            <a:solidFill>
-              <a:srgbClr val="D1DFD5"/>
-            </a:solidFill>
-          </a:ln>
-        </p:spPr>
-        <p:style>
-          <a:lnRef idx="1">
-            <a:schemeClr val="accent1"/>
-          </a:lnRef>
-          <a:fillRef idx="3">
-            <a:schemeClr val="accent1"/>
-          </a:fillRef>
-          <a:effectRef idx="2">
-            <a:schemeClr val="accent1"/>
-          </a:effectRef>
-          <a:fontRef idx="minor">
-            <a:schemeClr val="lt1"/>
-          </a:fontRef>
-        </p:style>
-        <p:txBody>
-          <a:bodyPr rtlCol="0" anchor="ctr" wrap="square" lIns="73152" rIns="73152" tIns="36576" bIns="36576"/>
-          <a:lstStyle/>
-          <a:p>
-            <a:pPr algn="l">
-              <a:spcAft>
-                <a:spcPts val="0"/>
-              </a:spcAft>
-              <a:defRPr sz="1800" b="1">
-                <a:solidFill>
-                  <a:srgbClr val="2A8B5A"/>
-                </a:solidFill>
-                <a:latin typeface="Noto Sans CJK KR"/>
-              </a:defRPr>
-            </a:pPr>
-            <a:r>
-              <a:t>완료 체크</a:t>
-            </a:r>
-            <a:br/>
-            <a:r>
-              <a:t>□ 명령이 오류 없이 실행된다.</a:t>
-            </a:r>
-            <a:br/>
-            <a:r>
-              <a:t>□ 기대한 파일·topic·frame·parameter 이름이 보인다.</a:t>
-            </a:r>
-            <a:br/>
-            <a:r>
-              <a:t>□ 값의 단위와 방향을 한 문장으로 설명할 수 있다.</a:t>
-            </a:r>
-          </a:p>
-        </p:txBody>
-      </p:sp>
-      <p:sp>
-        <p:nvSpPr>
-          <p:cNvPr id="9" name="TextBox 8"/>
+      <p:pic>
+        <p:nvPicPr>
+          <p:cNvPr id="6" name="Picture 5" descr="01_gazebo_drive_actual.png"/>
+          <p:cNvPicPr>
+            <a:picLocks noChangeAspect="1"/>
+          </p:cNvPicPr>
+          <p:nvPr/>
+        </p:nvPicPr>
+        <p:blipFill>
+          <a:blip r:embed="rId2"/>
+          <a:stretch>
+            <a:fillRect/>
+          </a:stretch>
+        </p:blipFill>
+        <p:spPr>
+          <a:xfrm>
+            <a:off x="3253884" y="1353312"/>
+            <a:ext cx="5681183" cy="4800600"/>
+          </a:xfrm>
+          <a:prstGeom prst="rect">
+            <a:avLst/>
+          </a:prstGeom>
+        </p:spPr>
+      </p:pic>
+      <p:sp>
+        <p:nvSpPr>
+          <p:cNvPr id="7" name="TextBox 6"/>
           <p:cNvSpPr txBox="1"/>
           <p:nvPr/>
         </p:nvSpPr>
         <p:spPr>
           <a:xfrm>
-            <a:off x="731520" y="5989320"/>
-            <a:ext cx="10789920" cy="237744"/>
+            <a:off x="777240" y="6217920"/>
+            <a:ext cx="10607040" cy="182880"/>
           </a:xfrm>
           <a:prstGeom prst="rect">
             <a:avLst/>
@@ -21783,19 +21708,19 @@
           </a:bodyPr>
           <a:lstStyle/>
           <a:p>
-            <a:pPr algn="l">
-              <a:spcAft>
-                <a:spcPts val="0"/>
-              </a:spcAft>
-              <a:defRPr sz="1500" b="1">
-                <a:solidFill>
-                  <a:srgbClr val="122C4E"/>
-                </a:solidFill>
-                <a:latin typeface="Noto Sans CJK KR"/>
-              </a:defRPr>
-            </a:pPr>
-            <a:r>
-              <a:t>완료 조건: /cmd_vel에서 odom과 바퀴 구동 topic으로 이어지는 경로를 확인한다.</a:t>
+            <a:pPr algn="ctr">
+              <a:spcAft>
+                <a:spcPts val="0"/>
+              </a:spcAft>
+              <a:defRPr sz="1100" b="1">
+                <a:solidFill>
+                  <a:srgbClr val="2A8B5A"/>
+                </a:solidFill>
+                <a:latin typeface="Noto Sans CJK KR"/>
+              </a:defRPr>
+            </a:pPr>
+            <a:r>
+              <a:t>① 명령/설정  ② 정상 출력 또는 화면  ③ 다음 검증 명령으로 재확인</a:t>
             </a:r>
           </a:p>
         </p:txBody>
@@ -21852,7 +21777,7 @@
               </a:defRPr>
             </a:pPr>
             <a:r>
-              <a:t>막히면: 증상 → 우선 확인 → 재검증</a:t>
+              <a:t>객관적 검증 명령으로 완료를 확인한다</a:t>
             </a:r>
           </a:p>
         </p:txBody>
@@ -21891,7 +21816,7 @@
               </a:defRPr>
             </a:pPr>
             <a:r>
-              <a:t>오류 메시지를 숨기지 않고 같은 순서로 점검합니다.</a:t>
+              <a:t>화면만 보지 말고 topic·frame·파일·parameter를 다시 확인합니다.</a:t>
             </a:r>
           </a:p>
         </p:txBody>
@@ -22027,7 +21952,7 @@
               </a:defRPr>
             </a:pPr>
             <a:r>
-              <a:t>현재 단계 오류 대응    |    현재 폴더 ~/agv_ws    |    현재 터미널</a:t>
+              <a:t>현재 단계 검증    |    현재 폴더 ~/ros2_curri/agv_ws    |    현재 터미널</a:t>
             </a:r>
           </a:p>
         </p:txBody>
@@ -22040,18 +21965,18 @@
         </p:nvSpPr>
         <p:spPr>
           <a:xfrm>
-            <a:off x="694944" y="1755648"/>
-            <a:ext cx="10972800" cy="1115568"/>
+            <a:off x="658368" y="1755648"/>
+            <a:ext cx="10972800" cy="2148840"/>
           </a:xfrm>
           <a:prstGeom prst="roundRect">
             <a:avLst/>
           </a:prstGeom>
           <a:solidFill>
-            <a:srgbClr val="FFF7F4"/>
+            <a:srgbClr val="1D232D"/>
           </a:solidFill>
           <a:ln>
             <a:solidFill>
-              <a:srgbClr val="EDBEB4"/>
+              <a:srgbClr val="1D232D"/>
             </a:solidFill>
           </a:ln>
         </p:spPr>
@@ -22070,72 +21995,7 @@
           </a:fontRef>
         </p:style>
         <p:txBody>
-          <a:bodyPr rtlCol="0" anchor="ctr"/>
-          <a:lstStyle/>
-          <a:p>
-            <a:pPr algn="ctr"/>
-          </a:p>
-        </p:txBody>
-      </p:sp>
-      <p:sp>
-        <p:nvSpPr>
-          <p:cNvPr id="8" name="TextBox 7"/>
-          <p:cNvSpPr txBox="1"/>
-          <p:nvPr/>
-        </p:nvSpPr>
-        <p:spPr>
-          <a:xfrm>
-            <a:off x="896112" y="1901952"/>
-            <a:ext cx="2926080" cy="274320"/>
-          </a:xfrm>
-          <a:prstGeom prst="rect">
-            <a:avLst/>
-          </a:prstGeom>
-          <a:noFill/>
-        </p:spPr>
-        <p:txBody>
-          <a:bodyPr wrap="square" lIns="73152" rIns="73152" tIns="36576" bIns="36576">
-            <a:spAutoFit/>
-          </a:bodyPr>
-          <a:lstStyle/>
-          <a:p>
-            <a:pPr algn="l">
-              <a:spcAft>
-                <a:spcPts val="0"/>
-              </a:spcAft>
-              <a:defRPr sz="1800" b="1">
-                <a:solidFill>
-                  <a:srgbClr val="BE3B3B"/>
-                </a:solidFill>
-                <a:latin typeface="Noto Sans CJK KR"/>
-              </a:defRPr>
-            </a:pPr>
-            <a:r>
-              <a:t>증상 1: 바퀴는 도는데 이동 안 함</a:t>
-            </a:r>
-          </a:p>
-        </p:txBody>
-      </p:sp>
-      <p:sp>
-        <p:nvSpPr>
-          <p:cNvPr id="9" name="TextBox 8"/>
-          <p:cNvSpPr txBox="1"/>
-          <p:nvPr/>
-        </p:nvSpPr>
-        <p:spPr>
-          <a:xfrm>
-            <a:off x="3794760" y="1883664"/>
-            <a:ext cx="7543800" cy="621792"/>
-          </a:xfrm>
-          <a:prstGeom prst="rect">
-            <a:avLst/>
-          </a:prstGeom>
-          <a:noFill/>
-        </p:spPr>
-        <p:txBody>
-          <a:bodyPr wrap="square" lIns="73152" rIns="73152" tIns="36576" bIns="36576">
-            <a:spAutoFit/>
-          </a:bodyPr>
+          <a:bodyPr rtlCol="0" anchor="ctr" wrap="square" lIns="73152" rIns="73152" tIns="36576" bIns="36576"/>
           <a:lstStyle/>
           <a:p>
             <a:pPr algn="l">
@@ -22144,41 +22004,41 @@
               </a:spcAft>
               <a:defRPr sz="1600" b="0">
                 <a:solidFill>
-                  <a:srgbClr val="122C4E"/>
-                </a:solidFill>
-                <a:latin typeface="Noto Sans CJK KR"/>
-              </a:defRPr>
-            </a:pPr>
-            <a:r>
-              <a:t>우선 확인: joint axis·friction·contact·wheel radius를 확인한다.</a:t>
-            </a:r>
-            <a:br/>
-            <a:r>
-              <a:t>수정 후: ros2 topic info /cmd_vel</a:t>
-            </a:r>
-          </a:p>
-        </p:txBody>
-      </p:sp>
-      <p:sp>
-        <p:nvSpPr>
-          <p:cNvPr id="10" name="Rounded Rectangle 9"/>
+                  <a:srgbClr val="FFFFFF"/>
+                </a:solidFill>
+                <a:latin typeface="DejaVu Sans Mono"/>
+              </a:defRPr>
+            </a:pPr>
+            <a:r>
+              <a:t>ros2 topic info /cmd_vel</a:t>
+            </a:r>
+            <a:br/>
+            <a:r>
+              <a:t>ros2 topic echo /odom --once</a:t>
+            </a:r>
+          </a:p>
+        </p:txBody>
+      </p:sp>
+      <p:sp>
+        <p:nvSpPr>
+          <p:cNvPr id="8" name="Rounded Rectangle 7"/>
           <p:cNvSpPr/>
           <p:nvPr/>
         </p:nvSpPr>
         <p:spPr>
           <a:xfrm>
-            <a:off x="694944" y="3172968"/>
-            <a:ext cx="10972800" cy="1115568"/>
+            <a:off x="658368" y="4206240"/>
+            <a:ext cx="10972800" cy="1554480"/>
           </a:xfrm>
           <a:prstGeom prst="roundRect">
             <a:avLst/>
           </a:prstGeom>
           <a:solidFill>
-            <a:srgbClr val="FFF7F4"/>
+            <a:srgbClr val="F4F7FB"/>
           </a:solidFill>
           <a:ln>
             <a:solidFill>
-              <a:srgbClr val="EDBEB4"/>
+              <a:srgbClr val="D1DFD5"/>
             </a:solidFill>
           </a:ln>
         </p:spPr>
@@ -22197,23 +22057,48 @@
           </a:fontRef>
         </p:style>
         <p:txBody>
-          <a:bodyPr rtlCol="0" anchor="ctr"/>
-          <a:lstStyle/>
-          <a:p>
-            <a:pPr algn="ctr"/>
-          </a:p>
-        </p:txBody>
-      </p:sp>
-      <p:sp>
-        <p:nvSpPr>
-          <p:cNvPr id="11" name="TextBox 10"/>
+          <a:bodyPr rtlCol="0" anchor="ctr" wrap="square" lIns="73152" rIns="73152" tIns="36576" bIns="36576"/>
+          <a:lstStyle/>
+          <a:p>
+            <a:pPr algn="l">
+              <a:spcAft>
+                <a:spcPts val="0"/>
+              </a:spcAft>
+              <a:defRPr sz="1800" b="1">
+                <a:solidFill>
+                  <a:srgbClr val="2A8B5A"/>
+                </a:solidFill>
+                <a:latin typeface="Noto Sans CJK KR"/>
+              </a:defRPr>
+            </a:pPr>
+            <a:r>
+              <a:t>완료 체크</a:t>
+            </a:r>
+            <a:br/>
+            <a:r>
+              <a:t>□ 명령이 오류 없이 실행된다.</a:t>
+            </a:r>
+            <a:br/>
+            <a:r>
+              <a:t>□ 기대한 파일·topic·frame·parameter 이름이 보인다.</a:t>
+            </a:r>
+            <a:br/>
+            <a:r>
+              <a:t>□ 값의 단위와 방향을 한 문장으로 설명할 수 있다.</a:t>
+            </a:r>
+          </a:p>
+        </p:txBody>
+      </p:sp>
+      <p:sp>
+        <p:nvSpPr>
+          <p:cNvPr id="9" name="TextBox 8"/>
           <p:cNvSpPr txBox="1"/>
           <p:nvPr/>
         </p:nvSpPr>
         <p:spPr>
           <a:xfrm>
-            <a:off x="896112" y="3319272"/>
-            <a:ext cx="2926080" cy="274320"/>
+            <a:off x="731520" y="5989320"/>
+            <a:ext cx="10789920" cy="237744"/>
           </a:xfrm>
           <a:prstGeom prst="rect">
             <a:avLst/>
@@ -22230,46 +22115,7 @@
               <a:spcAft>
                 <a:spcPts val="0"/>
               </a:spcAft>
-              <a:defRPr sz="1800" b="1">
-                <a:solidFill>
-                  <a:srgbClr val="BE3B3B"/>
-                </a:solidFill>
-                <a:latin typeface="Noto Sans CJK KR"/>
-              </a:defRPr>
-            </a:pPr>
-            <a:r>
-              <a:t>증상 2: 회전 방향이 반대</a:t>
-            </a:r>
-          </a:p>
-        </p:txBody>
-      </p:sp>
-      <p:sp>
-        <p:nvSpPr>
-          <p:cNvPr id="12" name="TextBox 11"/>
-          <p:cNvSpPr txBox="1"/>
-          <p:nvPr/>
-        </p:nvSpPr>
-        <p:spPr>
-          <a:xfrm>
-            <a:off x="3794760" y="3300984"/>
-            <a:ext cx="7543800" cy="621792"/>
-          </a:xfrm>
-          <a:prstGeom prst="rect">
-            <a:avLst/>
-          </a:prstGeom>
-          <a:noFill/>
-        </p:spPr>
-        <p:txBody>
-          <a:bodyPr wrap="square" lIns="73152" rIns="73152" tIns="36576" bIns="36576">
-            <a:spAutoFit/>
-          </a:bodyPr>
-          <a:lstStyle/>
-          <a:p>
-            <a:pPr algn="l">
-              <a:spcAft>
-                <a:spcPts val="0"/>
-              </a:spcAft>
-              <a:defRPr sz="1600" b="0">
+              <a:defRPr sz="1500" b="1">
                 <a:solidFill>
                   <a:srgbClr val="122C4E"/>
                 </a:solidFill>
@@ -22277,50 +22123,7 @@
               </a:defRPr>
             </a:pPr>
             <a:r>
-              <a:t>우선 확인: left/right joint와 angular.z 부호를 확인한다.</a:t>
-            </a:r>
-            <a:br/>
-            <a:r>
-              <a:t>수정 후: ros2 topic info /cmd_vel</a:t>
-            </a:r>
-          </a:p>
-        </p:txBody>
-      </p:sp>
-      <p:sp>
-        <p:nvSpPr>
-          <p:cNvPr id="13" name="TextBox 12"/>
-          <p:cNvSpPr txBox="1"/>
-          <p:nvPr/>
-        </p:nvSpPr>
-        <p:spPr>
-          <a:xfrm>
-            <a:off x="822960" y="5102352"/>
-            <a:ext cx="10607040" cy="402336"/>
-          </a:xfrm>
-          <a:prstGeom prst="rect">
-            <a:avLst/>
-          </a:prstGeom>
-          <a:noFill/>
-        </p:spPr>
-        <p:txBody>
-          <a:bodyPr wrap="square" lIns="73152" rIns="73152" tIns="36576" bIns="36576">
-            <a:spAutoFit/>
-          </a:bodyPr>
-          <a:lstStyle/>
-          <a:p>
-            <a:pPr algn="ctr">
-              <a:spcAft>
-                <a:spcPts val="0"/>
-              </a:spcAft>
-              <a:defRPr sz="1800" b="1">
-                <a:solidFill>
-                  <a:srgbClr val="DB7E22"/>
-                </a:solidFill>
-                <a:latin typeface="Noto Sans CJK KR"/>
-              </a:defRPr>
-            </a:pPr>
-            <a:r>
-              <a:t>공통 순서: ① 현재 폴더 ② source ③ 파일 경로 ④ 이름/타입/단위 ⑤ build·source 후 재실행</a:t>
+              <a:t>완료 조건: /cmd_vel에서 odom과 바퀴 구동 topic으로 이어지는 경로를 확인한다.</a:t>
             </a:r>
           </a:p>
         </p:txBody>
@@ -22710,7 +22513,7 @@
               </a:defRPr>
             </a:pPr>
             <a:r>
-              <a:t>미니 실습: 값 하나를 바꾸고 결과를 비교한다</a:t>
+              <a:t>막히면: 증상 → 우선 확인 → 재검증</a:t>
             </a:r>
           </a:p>
         </p:txBody>
@@ -22749,7 +22552,7 @@
               </a:defRPr>
             </a:pPr>
             <a:r>
-              <a:t>정상 결과를 만든 뒤에는 한 번에 하나의 값만 바꿉니다.</a:t>
+              <a:t>오류 메시지를 숨기지 않고 같은 순서로 점검합니다.</a:t>
             </a:r>
           </a:p>
         </p:txBody>
@@ -22885,7 +22688,7 @@
               </a:defRPr>
             </a:pPr>
             <a:r>
-              <a:t>현재 단계 미니 실습    |    현재 폴더 ~/agv_ws    |    현재 터미널</a:t>
+              <a:t>현재 단계 오류 대응    |    현재 폴더 ~/ros2_curri/agv_ws    |    현재 터미널</a:t>
             </a:r>
           </a:p>
         </p:txBody>
@@ -22898,18 +22701,18 @@
         </p:nvSpPr>
         <p:spPr>
           <a:xfrm>
-            <a:off x="749808" y="1874519"/>
-            <a:ext cx="10652760" cy="1993392"/>
+            <a:off x="694944" y="1755648"/>
+            <a:ext cx="10972800" cy="1115568"/>
           </a:xfrm>
           <a:prstGeom prst="roundRect">
             <a:avLst/>
           </a:prstGeom>
           <a:solidFill>
-            <a:srgbClr val="FFF8EB"/>
+            <a:srgbClr val="FFF7F4"/>
           </a:solidFill>
           <a:ln>
             <a:solidFill>
-              <a:srgbClr val="ECC680"/>
+              <a:srgbClr val="EDBEB4"/>
             </a:solidFill>
           </a:ln>
         </p:spPr>
@@ -22928,23 +22731,10 @@
           </a:fontRef>
         </p:style>
         <p:txBody>
-          <a:bodyPr rtlCol="0" anchor="ctr" wrap="square" lIns="73152" rIns="73152" tIns="36576" bIns="36576"/>
-          <a:lstStyle/>
-          <a:p>
-            <a:pPr algn="ctr">
-              <a:spcAft>
-                <a:spcPts val="0"/>
-              </a:spcAft>
-              <a:defRPr sz="2300" b="1">
-                <a:solidFill>
-                  <a:srgbClr val="122C4E"/>
-                </a:solidFill>
-                <a:latin typeface="Noto Sans CJK KR"/>
-              </a:defRPr>
-            </a:pPr>
-            <a:r>
-              <a:t>0.15 m/s 직진, 0.4 rad/s 회전, 둘 다 비영 값인 곡선을 각각 2초씩 시험해 경로를 비교한다.</a:t>
-            </a:r>
+          <a:bodyPr rtlCol="0" anchor="ctr"/>
+          <a:lstStyle/>
+          <a:p>
+            <a:pPr algn="ctr"/>
           </a:p>
         </p:txBody>
       </p:sp>
@@ -22956,8 +22746,8 @@
         </p:nvSpPr>
         <p:spPr>
           <a:xfrm>
-            <a:off x="877824" y="4590288"/>
-            <a:ext cx="10241280" cy="594360"/>
+            <a:off x="896112" y="1901952"/>
+            <a:ext cx="2926080" cy="274320"/>
           </a:xfrm>
           <a:prstGeom prst="rect">
             <a:avLst/>
@@ -22970,11 +22760,220 @@
           </a:bodyPr>
           <a:lstStyle/>
           <a:p>
+            <a:pPr algn="l">
+              <a:spcAft>
+                <a:spcPts val="0"/>
+              </a:spcAft>
+              <a:defRPr sz="1800" b="1">
+                <a:solidFill>
+                  <a:srgbClr val="BE3B3B"/>
+                </a:solidFill>
+                <a:latin typeface="Noto Sans CJK KR"/>
+              </a:defRPr>
+            </a:pPr>
+            <a:r>
+              <a:t>증상 1: 바퀴는 도는데 이동 안 함</a:t>
+            </a:r>
+          </a:p>
+        </p:txBody>
+      </p:sp>
+      <p:sp>
+        <p:nvSpPr>
+          <p:cNvPr id="9" name="TextBox 8"/>
+          <p:cNvSpPr txBox="1"/>
+          <p:nvPr/>
+        </p:nvSpPr>
+        <p:spPr>
+          <a:xfrm>
+            <a:off x="3794760" y="1883664"/>
+            <a:ext cx="7543800" cy="621792"/>
+          </a:xfrm>
+          <a:prstGeom prst="rect">
+            <a:avLst/>
+          </a:prstGeom>
+          <a:noFill/>
+        </p:spPr>
+        <p:txBody>
+          <a:bodyPr wrap="square" lIns="73152" rIns="73152" tIns="36576" bIns="36576">
+            <a:spAutoFit/>
+          </a:bodyPr>
+          <a:lstStyle/>
+          <a:p>
+            <a:pPr algn="l">
+              <a:spcAft>
+                <a:spcPts val="0"/>
+              </a:spcAft>
+              <a:defRPr sz="1600" b="0">
+                <a:solidFill>
+                  <a:srgbClr val="122C4E"/>
+                </a:solidFill>
+                <a:latin typeface="Noto Sans CJK KR"/>
+              </a:defRPr>
+            </a:pPr>
+            <a:r>
+              <a:t>우선 확인: joint axis·friction·contact·wheel radius를 확인한다.</a:t>
+            </a:r>
+            <a:br/>
+            <a:r>
+              <a:t>수정 후: ros2 topic info /cmd_vel</a:t>
+            </a:r>
+          </a:p>
+        </p:txBody>
+      </p:sp>
+      <p:sp>
+        <p:nvSpPr>
+          <p:cNvPr id="10" name="Rounded Rectangle 9"/>
+          <p:cNvSpPr/>
+          <p:nvPr/>
+        </p:nvSpPr>
+        <p:spPr>
+          <a:xfrm>
+            <a:off x="694944" y="3172968"/>
+            <a:ext cx="10972800" cy="1115568"/>
+          </a:xfrm>
+          <a:prstGeom prst="roundRect">
+            <a:avLst/>
+          </a:prstGeom>
+          <a:solidFill>
+            <a:srgbClr val="FFF7F4"/>
+          </a:solidFill>
+          <a:ln>
+            <a:solidFill>
+              <a:srgbClr val="EDBEB4"/>
+            </a:solidFill>
+          </a:ln>
+        </p:spPr>
+        <p:style>
+          <a:lnRef idx="1">
+            <a:schemeClr val="accent1"/>
+          </a:lnRef>
+          <a:fillRef idx="3">
+            <a:schemeClr val="accent1"/>
+          </a:fillRef>
+          <a:effectRef idx="2">
+            <a:schemeClr val="accent1"/>
+          </a:effectRef>
+          <a:fontRef idx="minor">
+            <a:schemeClr val="lt1"/>
+          </a:fontRef>
+        </p:style>
+        <p:txBody>
+          <a:bodyPr rtlCol="0" anchor="ctr"/>
+          <a:lstStyle/>
+          <a:p>
+            <a:pPr algn="ctr"/>
+          </a:p>
+        </p:txBody>
+      </p:sp>
+      <p:sp>
+        <p:nvSpPr>
+          <p:cNvPr id="11" name="TextBox 10"/>
+          <p:cNvSpPr txBox="1"/>
+          <p:nvPr/>
+        </p:nvSpPr>
+        <p:spPr>
+          <a:xfrm>
+            <a:off x="896112" y="3319272"/>
+            <a:ext cx="2926080" cy="274320"/>
+          </a:xfrm>
+          <a:prstGeom prst="rect">
+            <a:avLst/>
+          </a:prstGeom>
+          <a:noFill/>
+        </p:spPr>
+        <p:txBody>
+          <a:bodyPr wrap="square" lIns="73152" rIns="73152" tIns="36576" bIns="36576">
+            <a:spAutoFit/>
+          </a:bodyPr>
+          <a:lstStyle/>
+          <a:p>
+            <a:pPr algn="l">
+              <a:spcAft>
+                <a:spcPts val="0"/>
+              </a:spcAft>
+              <a:defRPr sz="1800" b="1">
+                <a:solidFill>
+                  <a:srgbClr val="BE3B3B"/>
+                </a:solidFill>
+                <a:latin typeface="Noto Sans CJK KR"/>
+              </a:defRPr>
+            </a:pPr>
+            <a:r>
+              <a:t>증상 2: 회전 방향이 반대</a:t>
+            </a:r>
+          </a:p>
+        </p:txBody>
+      </p:sp>
+      <p:sp>
+        <p:nvSpPr>
+          <p:cNvPr id="12" name="TextBox 11"/>
+          <p:cNvSpPr txBox="1"/>
+          <p:nvPr/>
+        </p:nvSpPr>
+        <p:spPr>
+          <a:xfrm>
+            <a:off x="3794760" y="3300984"/>
+            <a:ext cx="7543800" cy="621792"/>
+          </a:xfrm>
+          <a:prstGeom prst="rect">
+            <a:avLst/>
+          </a:prstGeom>
+          <a:noFill/>
+        </p:spPr>
+        <p:txBody>
+          <a:bodyPr wrap="square" lIns="73152" rIns="73152" tIns="36576" bIns="36576">
+            <a:spAutoFit/>
+          </a:bodyPr>
+          <a:lstStyle/>
+          <a:p>
+            <a:pPr algn="l">
+              <a:spcAft>
+                <a:spcPts val="0"/>
+              </a:spcAft>
+              <a:defRPr sz="1600" b="0">
+                <a:solidFill>
+                  <a:srgbClr val="122C4E"/>
+                </a:solidFill>
+                <a:latin typeface="Noto Sans CJK KR"/>
+              </a:defRPr>
+            </a:pPr>
+            <a:r>
+              <a:t>우선 확인: left/right joint와 angular.z 부호를 확인한다.</a:t>
+            </a:r>
+            <a:br/>
+            <a:r>
+              <a:t>수정 후: ros2 topic info /cmd_vel</a:t>
+            </a:r>
+          </a:p>
+        </p:txBody>
+      </p:sp>
+      <p:sp>
+        <p:nvSpPr>
+          <p:cNvPr id="13" name="TextBox 12"/>
+          <p:cNvSpPr txBox="1"/>
+          <p:nvPr/>
+        </p:nvSpPr>
+        <p:spPr>
+          <a:xfrm>
+            <a:off x="822960" y="5102352"/>
+            <a:ext cx="10607040" cy="402336"/>
+          </a:xfrm>
+          <a:prstGeom prst="rect">
+            <a:avLst/>
+          </a:prstGeom>
+          <a:noFill/>
+        </p:spPr>
+        <p:txBody>
+          <a:bodyPr wrap="square" lIns="73152" rIns="73152" tIns="36576" bIns="36576">
+            <a:spAutoFit/>
+          </a:bodyPr>
+          <a:lstStyle/>
+          <a:p>
             <a:pPr algn="ctr">
               <a:spcAft>
                 <a:spcPts val="0"/>
               </a:spcAft>
-              <a:defRPr sz="1900" b="1">
+              <a:defRPr sz="1800" b="1">
                 <a:solidFill>
                   <a:srgbClr val="DB7E22"/>
                 </a:solidFill>
@@ -22982,7 +22981,7 @@
               </a:defRPr>
             </a:pPr>
             <a:r>
-              <a:t>기록할 것: 바꾼 값(단위) · 기대한 변화 · 실제 출력/화면 · 원래 값으로 되돌린 결과</a:t>
+              <a:t>공통 순서: ① 현재 폴더 ② source ③ 파일 경로 ④ 이름/타입/단위 ⑤ build·source 후 재실행</a:t>
             </a:r>
           </a:p>
         </p:txBody>
@@ -23039,7 +23038,7 @@
               </a:defRPr>
             </a:pPr>
             <a:r>
-              <a:t>체크포인트를 저장하고 다음 모듈로 넘긴다</a:t>
+              <a:t>미니 실습: 값 하나를 바꾸고 결과를 비교한다</a:t>
             </a:r>
           </a:p>
         </p:txBody>
@@ -23078,7 +23077,7 @@
               </a:defRPr>
             </a:pPr>
             <a:r>
-              <a:t>현재 Complete는 다음 Starter의 기준선입니다.</a:t>
+              <a:t>정상 결과를 만든 뒤에는 한 번에 하나의 값만 바꿉니다.</a:t>
             </a:r>
           </a:p>
         </p:txBody>
@@ -23214,7 +23213,7 @@
               </a:defRPr>
             </a:pPr>
             <a:r>
-              <a:t>현재 단계 체크포인트    |    현재 폴더 ~/agv_ws    |    현재 터미널</a:t>
+              <a:t>현재 단계 미니 실습    |    현재 폴더 ~/ros2_curri/agv_ws    |    현재 터미널</a:t>
             </a:r>
           </a:p>
         </p:txBody>
@@ -23227,18 +23226,18 @@
         </p:nvSpPr>
         <p:spPr>
           <a:xfrm>
-            <a:off x="685800" y="1737360"/>
-            <a:ext cx="10972800" cy="3611880"/>
+            <a:off x="749808" y="1874519"/>
+            <a:ext cx="10652760" cy="1993392"/>
           </a:xfrm>
           <a:prstGeom prst="roundRect">
             <a:avLst/>
           </a:prstGeom>
           <a:solidFill>
-            <a:srgbClr val="F4F7FB"/>
+            <a:srgbClr val="FFF8EB"/>
           </a:solidFill>
           <a:ln>
             <a:solidFill>
-              <a:srgbClr val="D2DCE8"/>
+              <a:srgbClr val="ECC680"/>
             </a:solidFill>
           </a:ln>
         </p:spPr>
@@ -23257,10 +23256,23 @@
           </a:fontRef>
         </p:style>
         <p:txBody>
-          <a:bodyPr rtlCol="0" anchor="ctr"/>
-          <a:lstStyle/>
-          <a:p>
-            <a:pPr algn="ctr"/>
+          <a:bodyPr rtlCol="0" anchor="ctr" wrap="square" lIns="73152" rIns="73152" tIns="36576" bIns="36576"/>
+          <a:lstStyle/>
+          <a:p>
+            <a:pPr algn="ctr">
+              <a:spcAft>
+                <a:spcPts val="0"/>
+              </a:spcAft>
+              <a:defRPr sz="2300" b="1">
+                <a:solidFill>
+                  <a:srgbClr val="122C4E"/>
+                </a:solidFill>
+                <a:latin typeface="Noto Sans CJK KR"/>
+              </a:defRPr>
+            </a:pPr>
+            <a:r>
+              <a:t>0.15 m/s 직진, 0.4 rad/s 회전, 둘 다 비영 값인 곡선을 각각 2초씩 시험해 경로를 비교한다.</a:t>
+            </a:r>
           </a:p>
         </p:txBody>
       </p:sp>
@@ -23272,111 +23284,8 @@
         </p:nvSpPr>
         <p:spPr>
           <a:xfrm>
-            <a:off x="896112" y="1993392"/>
-            <a:ext cx="10332720" cy="2971800"/>
-          </a:xfrm>
-          <a:prstGeom prst="rect">
-            <a:avLst/>
-          </a:prstGeom>
-          <a:noFill/>
-        </p:spPr>
-        <p:txBody>
-          <a:bodyPr wrap="square" lIns="109728" rIns="109728">
-            <a:spAutoFit/>
-          </a:bodyPr>
-          <a:lstStyle/>
-          <a:p>
-            <a:pPr>
-              <a:spcAft>
-                <a:spcPts val="800"/>
-              </a:spcAft>
-              <a:defRPr sz="1800">
-                <a:solidFill>
-                  <a:srgbClr val="122C4E"/>
-                </a:solidFill>
-                <a:latin typeface="Noto Sans CJK KR"/>
-              </a:defRPr>
-            </a:pPr>
-            <a:r>
-              <a:t>• □ 완료 화면: /cmd_vel에서 odom과 바퀴 구동 topic으로 이어지는 경로를 확인한다.</a:t>
-            </a:r>
-          </a:p>
-          <a:p>
-            <a:pPr>
-              <a:spcAft>
-                <a:spcPts val="800"/>
-              </a:spcAft>
-              <a:defRPr sz="1800">
-                <a:solidFill>
-                  <a:srgbClr val="122C4E"/>
-                </a:solidFill>
-                <a:latin typeface="Noto Sans CJK KR"/>
-              </a:defRPr>
-            </a:pPr>
-            <a:r>
-              <a:t>• □ Complete 파일: blocks/C_drive_visualization/M09_differential_drive/complete/</a:t>
-            </a:r>
-          </a:p>
-          <a:p>
-            <a:pPr>
-              <a:spcAft>
-                <a:spcPts val="800"/>
-              </a:spcAft>
-              <a:defRPr sz="1800">
-                <a:solidFill>
-                  <a:srgbClr val="122C4E"/>
-                </a:solidFill>
-                <a:latin typeface="Noto Sans CJK KR"/>
-              </a:defRPr>
-            </a:pPr>
-            <a:r>
-              <a:t>• □ 정상 로그·캡처: logs/validation.log, screenshots/validation_terminal.png</a:t>
-            </a:r>
-          </a:p>
-          <a:p>
-            <a:pPr>
-              <a:spcAft>
-                <a:spcPts val="800"/>
-              </a:spcAft>
-              <a:defRPr sz="1800">
-                <a:solidFill>
-                  <a:srgbClr val="122C4E"/>
-                </a:solidFill>
-                <a:latin typeface="Noto Sans CJK KR"/>
-              </a:defRPr>
-            </a:pPr>
-            <a:r>
-              <a:t>• □ 버전 식별: CHECKSUM_or_TAG.txt의 SHA-256 manifest</a:t>
-            </a:r>
-          </a:p>
-          <a:p>
-            <a:pPr>
-              <a:spcAft>
-                <a:spcPts val="800"/>
-              </a:spcAft>
-              <a:defRPr sz="1800">
-                <a:solidFill>
-                  <a:srgbClr val="122C4E"/>
-                </a:solidFill>
-                <a:latin typeface="Noto Sans CJK KR"/>
-              </a:defRPr>
-            </a:pPr>
-            <a:r>
-              <a:t>• □ 다음 시작 조건: M10 ros_gz_bridge</a:t>
-            </a:r>
-          </a:p>
-        </p:txBody>
-      </p:sp>
-      <p:sp>
-        <p:nvSpPr>
-          <p:cNvPr id="9" name="TextBox 8"/>
-          <p:cNvSpPr txBox="1"/>
-          <p:nvPr/>
-        </p:nvSpPr>
-        <p:spPr>
-          <a:xfrm>
-            <a:off x="868680" y="5596128"/>
-            <a:ext cx="10515600" cy="338328"/>
+            <a:off x="877824" y="4590288"/>
+            <a:ext cx="10241280" cy="594360"/>
           </a:xfrm>
           <a:prstGeom prst="rect">
             <a:avLst/>
@@ -23393,15 +23302,15 @@
               <a:spcAft>
                 <a:spcPts val="0"/>
               </a:spcAft>
-              <a:defRPr sz="1700" b="1">
-                <a:solidFill>
-                  <a:srgbClr val="2A8B5A"/>
-                </a:solidFill>
-                <a:latin typeface="Noto Sans CJK KR"/>
-              </a:defRPr>
-            </a:pPr>
-            <a:r>
-              <a:t>다음 모듈을 시작하기 전, 이 슬라이드의 Complete와 다음 모듈의 Starter를 비교합니다.</a:t>
+              <a:defRPr sz="1900" b="1">
+                <a:solidFill>
+                  <a:srgbClr val="DB7E22"/>
+                </a:solidFill>
+                <a:latin typeface="Noto Sans CJK KR"/>
+              </a:defRPr>
+            </a:pPr>
+            <a:r>
+              <a:t>기록할 것: 바꾼 값(단위) · 기대한 변화 · 실제 출력/화면 · 원래 값으로 되돌린 결과</a:t>
             </a:r>
           </a:p>
         </p:txBody>
@@ -23458,6 +23367,425 @@
               </a:defRPr>
             </a:pPr>
             <a:r>
+              <a:t>체크포인트를 저장하고 다음 모듈로 넘긴다</a:t>
+            </a:r>
+          </a:p>
+        </p:txBody>
+      </p:sp>
+      <p:sp>
+        <p:nvSpPr>
+          <p:cNvPr id="3" name="TextBox 2"/>
+          <p:cNvSpPr txBox="1"/>
+          <p:nvPr/>
+        </p:nvSpPr>
+        <p:spPr>
+          <a:xfrm>
+            <a:off x="603504" y="859536"/>
+            <a:ext cx="10698480" cy="292608"/>
+          </a:xfrm>
+          <a:prstGeom prst="rect">
+            <a:avLst/>
+          </a:prstGeom>
+          <a:noFill/>
+        </p:spPr>
+        <p:txBody>
+          <a:bodyPr wrap="square" lIns="73152" rIns="73152" tIns="36576" bIns="36576">
+            <a:spAutoFit/>
+          </a:bodyPr>
+          <a:lstStyle/>
+          <a:p>
+            <a:pPr algn="l">
+              <a:spcAft>
+                <a:spcPts val="0"/>
+              </a:spcAft>
+              <a:defRPr sz="1700" b="0">
+                <a:solidFill>
+                  <a:srgbClr val="5C6672"/>
+                </a:solidFill>
+                <a:latin typeface="Noto Sans CJK KR"/>
+              </a:defRPr>
+            </a:pPr>
+            <a:r>
+              <a:t>현재 Complete는 다음 Starter의 기준선입니다.</a:t>
+            </a:r>
+          </a:p>
+        </p:txBody>
+      </p:sp>
+      <p:sp>
+        <p:nvSpPr>
+          <p:cNvPr id="4" name="TextBox 3"/>
+          <p:cNvSpPr txBox="1"/>
+          <p:nvPr/>
+        </p:nvSpPr>
+        <p:spPr>
+          <a:xfrm>
+            <a:off x="530352" y="6510528"/>
+            <a:ext cx="7772400" cy="201168"/>
+          </a:xfrm>
+          <a:prstGeom prst="rect">
+            <a:avLst/>
+          </a:prstGeom>
+          <a:noFill/>
+        </p:spPr>
+        <p:txBody>
+          <a:bodyPr wrap="square" lIns="73152" rIns="73152" tIns="36576" bIns="36576">
+            <a:spAutoFit/>
+          </a:bodyPr>
+          <a:lstStyle/>
+          <a:p>
+            <a:pPr algn="l">
+              <a:spcAft>
+                <a:spcPts val="0"/>
+              </a:spcAft>
+              <a:defRPr sz="1000" b="0">
+                <a:solidFill>
+                  <a:srgbClr val="5C6672"/>
+                </a:solidFill>
+                <a:latin typeface="Noto Sans CJK KR"/>
+              </a:defRPr>
+            </a:pPr>
+            <a:r>
+              <a:t>ROS 2 Jazzy · Gazebo Harmonic · M09 · 따라 하기형 AGV 실습</a:t>
+            </a:r>
+          </a:p>
+        </p:txBody>
+      </p:sp>
+      <p:sp>
+        <p:nvSpPr>
+          <p:cNvPr id="5" name="TextBox 4"/>
+          <p:cNvSpPr txBox="1"/>
+          <p:nvPr/>
+        </p:nvSpPr>
+        <p:spPr>
+          <a:xfrm>
+            <a:off x="9144000" y="6510528"/>
+            <a:ext cx="2468880" cy="201168"/>
+          </a:xfrm>
+          <a:prstGeom prst="rect">
+            <a:avLst/>
+          </a:prstGeom>
+          <a:noFill/>
+        </p:spPr>
+        <p:txBody>
+          <a:bodyPr wrap="square" lIns="73152" rIns="73152" tIns="36576" bIns="36576">
+            <a:spAutoFit/>
+          </a:bodyPr>
+          <a:lstStyle/>
+          <a:p>
+            <a:pPr algn="r">
+              <a:spcAft>
+                <a:spcPts val="0"/>
+              </a:spcAft>
+              <a:defRPr sz="1000" b="0">
+                <a:solidFill>
+                  <a:srgbClr val="5C6672"/>
+                </a:solidFill>
+                <a:latin typeface="Noto Sans CJK KR"/>
+              </a:defRPr>
+            </a:pPr>
+            <a:r>
+              <a:t>명령·파일 경로는 슬라이드에서 복사 가능</a:t>
+            </a:r>
+          </a:p>
+        </p:txBody>
+      </p:sp>
+      <p:sp>
+        <p:nvSpPr>
+          <p:cNvPr id="6" name="Rectangle 5"/>
+          <p:cNvSpPr/>
+          <p:nvPr/>
+        </p:nvSpPr>
+        <p:spPr>
+          <a:xfrm>
+            <a:off x="566928" y="1188720"/>
+            <a:ext cx="11064240" cy="347472"/>
+          </a:xfrm>
+          <a:prstGeom prst="rect">
+            <a:avLst/>
+          </a:prstGeom>
+          <a:solidFill>
+            <a:srgbClr val="F4F7FB"/>
+          </a:solidFill>
+          <a:ln>
+            <a:solidFill>
+              <a:srgbClr val="F4F7FB"/>
+            </a:solidFill>
+          </a:ln>
+        </p:spPr>
+        <p:style>
+          <a:lnRef idx="1">
+            <a:schemeClr val="accent1"/>
+          </a:lnRef>
+          <a:fillRef idx="3">
+            <a:schemeClr val="accent1"/>
+          </a:fillRef>
+          <a:effectRef idx="2">
+            <a:schemeClr val="accent1"/>
+          </a:effectRef>
+          <a:fontRef idx="minor">
+            <a:schemeClr val="lt1"/>
+          </a:fontRef>
+        </p:style>
+        <p:txBody>
+          <a:bodyPr rtlCol="0" anchor="ctr" wrap="square" lIns="73152" rIns="73152" tIns="36576" bIns="36576"/>
+          <a:lstStyle/>
+          <a:p>
+            <a:pPr algn="l">
+              <a:spcAft>
+                <a:spcPts val="0"/>
+              </a:spcAft>
+              <a:defRPr sz="1300" b="1">
+                <a:solidFill>
+                  <a:srgbClr val="122C4E"/>
+                </a:solidFill>
+                <a:latin typeface="Noto Sans CJK KR"/>
+              </a:defRPr>
+            </a:pPr>
+            <a:r>
+              <a:t>현재 단계 체크포인트    |    현재 폴더 ~/ros2_curri/agv_ws    |    현재 터미널</a:t>
+            </a:r>
+          </a:p>
+        </p:txBody>
+      </p:sp>
+      <p:sp>
+        <p:nvSpPr>
+          <p:cNvPr id="7" name="Rounded Rectangle 6"/>
+          <p:cNvSpPr/>
+          <p:nvPr/>
+        </p:nvSpPr>
+        <p:spPr>
+          <a:xfrm>
+            <a:off x="685800" y="1737360"/>
+            <a:ext cx="10972800" cy="3611880"/>
+          </a:xfrm>
+          <a:prstGeom prst="roundRect">
+            <a:avLst/>
+          </a:prstGeom>
+          <a:solidFill>
+            <a:srgbClr val="F4F7FB"/>
+          </a:solidFill>
+          <a:ln>
+            <a:solidFill>
+              <a:srgbClr val="D2DCE8"/>
+            </a:solidFill>
+          </a:ln>
+        </p:spPr>
+        <p:style>
+          <a:lnRef idx="1">
+            <a:schemeClr val="accent1"/>
+          </a:lnRef>
+          <a:fillRef idx="3">
+            <a:schemeClr val="accent1"/>
+          </a:fillRef>
+          <a:effectRef idx="2">
+            <a:schemeClr val="accent1"/>
+          </a:effectRef>
+          <a:fontRef idx="minor">
+            <a:schemeClr val="lt1"/>
+          </a:fontRef>
+        </p:style>
+        <p:txBody>
+          <a:bodyPr rtlCol="0" anchor="ctr"/>
+          <a:lstStyle/>
+          <a:p>
+            <a:pPr algn="ctr"/>
+          </a:p>
+        </p:txBody>
+      </p:sp>
+      <p:sp>
+        <p:nvSpPr>
+          <p:cNvPr id="8" name="TextBox 7"/>
+          <p:cNvSpPr txBox="1"/>
+          <p:nvPr/>
+        </p:nvSpPr>
+        <p:spPr>
+          <a:xfrm>
+            <a:off x="896112" y="1993392"/>
+            <a:ext cx="10332720" cy="2971800"/>
+          </a:xfrm>
+          <a:prstGeom prst="rect">
+            <a:avLst/>
+          </a:prstGeom>
+          <a:noFill/>
+        </p:spPr>
+        <p:txBody>
+          <a:bodyPr wrap="square" lIns="109728" rIns="109728">
+            <a:spAutoFit/>
+          </a:bodyPr>
+          <a:lstStyle/>
+          <a:p>
+            <a:pPr>
+              <a:spcAft>
+                <a:spcPts val="800"/>
+              </a:spcAft>
+              <a:defRPr sz="1800">
+                <a:solidFill>
+                  <a:srgbClr val="122C4E"/>
+                </a:solidFill>
+                <a:latin typeface="Noto Sans CJK KR"/>
+              </a:defRPr>
+            </a:pPr>
+            <a:r>
+              <a:t>• □ 완료 화면: /cmd_vel에서 odom과 바퀴 구동 topic으로 이어지는 경로를 확인한다.</a:t>
+            </a:r>
+          </a:p>
+          <a:p>
+            <a:pPr>
+              <a:spcAft>
+                <a:spcPts val="800"/>
+              </a:spcAft>
+              <a:defRPr sz="1800">
+                <a:solidFill>
+                  <a:srgbClr val="122C4E"/>
+                </a:solidFill>
+                <a:latin typeface="Noto Sans CJK KR"/>
+              </a:defRPr>
+            </a:pPr>
+            <a:r>
+              <a:t>• □ Complete 파일: blocks/C_drive_visualization/M09_differential_drive/complete/</a:t>
+            </a:r>
+          </a:p>
+          <a:p>
+            <a:pPr>
+              <a:spcAft>
+                <a:spcPts val="800"/>
+              </a:spcAft>
+              <a:defRPr sz="1800">
+                <a:solidFill>
+                  <a:srgbClr val="122C4E"/>
+                </a:solidFill>
+                <a:latin typeface="Noto Sans CJK KR"/>
+              </a:defRPr>
+            </a:pPr>
+            <a:r>
+              <a:t>• □ 정상 로그·캡처: logs/validation.log, screenshots/validation_terminal.png</a:t>
+            </a:r>
+          </a:p>
+          <a:p>
+            <a:pPr>
+              <a:spcAft>
+                <a:spcPts val="800"/>
+              </a:spcAft>
+              <a:defRPr sz="1800">
+                <a:solidFill>
+                  <a:srgbClr val="122C4E"/>
+                </a:solidFill>
+                <a:latin typeface="Noto Sans CJK KR"/>
+              </a:defRPr>
+            </a:pPr>
+            <a:r>
+              <a:t>• □ 버전 식별: CHECKSUM_or_TAG.txt의 SHA-256 manifest</a:t>
+            </a:r>
+          </a:p>
+          <a:p>
+            <a:pPr>
+              <a:spcAft>
+                <a:spcPts val="800"/>
+              </a:spcAft>
+              <a:defRPr sz="1800">
+                <a:solidFill>
+                  <a:srgbClr val="122C4E"/>
+                </a:solidFill>
+                <a:latin typeface="Noto Sans CJK KR"/>
+              </a:defRPr>
+            </a:pPr>
+            <a:r>
+              <a:t>• □ 다음 시작 조건: M10 ros_gz_bridge</a:t>
+            </a:r>
+          </a:p>
+        </p:txBody>
+      </p:sp>
+      <p:sp>
+        <p:nvSpPr>
+          <p:cNvPr id="9" name="TextBox 8"/>
+          <p:cNvSpPr txBox="1"/>
+          <p:nvPr/>
+        </p:nvSpPr>
+        <p:spPr>
+          <a:xfrm>
+            <a:off x="868680" y="5596128"/>
+            <a:ext cx="10515600" cy="338328"/>
+          </a:xfrm>
+          <a:prstGeom prst="rect">
+            <a:avLst/>
+          </a:prstGeom>
+          <a:noFill/>
+        </p:spPr>
+        <p:txBody>
+          <a:bodyPr wrap="square" lIns="73152" rIns="73152" tIns="36576" bIns="36576">
+            <a:spAutoFit/>
+          </a:bodyPr>
+          <a:lstStyle/>
+          <a:p>
+            <a:pPr algn="ctr">
+              <a:spcAft>
+                <a:spcPts val="0"/>
+              </a:spcAft>
+              <a:defRPr sz="1700" b="1">
+                <a:solidFill>
+                  <a:srgbClr val="2A8B5A"/>
+                </a:solidFill>
+                <a:latin typeface="Noto Sans CJK KR"/>
+              </a:defRPr>
+            </a:pPr>
+            <a:r>
+              <a:t>다음 모듈을 시작하기 전, 이 슬라이드의 Complete와 다음 모듈의 Starter를 비교합니다.</a:t>
+            </a:r>
+          </a:p>
+        </p:txBody>
+      </p:sp>
+    </p:spTree>
+  </p:cSld>
+  <p:clrMapOvr>
+    <a:masterClrMapping/>
+  </p:clrMapOvr>
+</p:sld>
+</file>
+
+<file path=ppt/slides/slide43.xml><?xml version="1.0" encoding="utf-8"?>
+<p:sld xmlns:a="http://schemas.openxmlformats.org/drawingml/2006/main" xmlns:p="http://schemas.openxmlformats.org/presentationml/2006/main" xmlns:r="http://schemas.openxmlformats.org/officeDocument/2006/relationships">
+  <p:cSld>
+    <p:spTree>
+      <p:nvGrpSpPr>
+        <p:cNvPr id="1" name=""/>
+        <p:cNvGrpSpPr/>
+        <p:nvPr/>
+      </p:nvGrpSpPr>
+      <p:grpSpPr/>
+      <p:sp>
+        <p:nvSpPr>
+          <p:cNvPr id="2" name="TextBox 1"/>
+          <p:cNvSpPr txBox="1"/>
+          <p:nvPr/>
+        </p:nvSpPr>
+        <p:spPr>
+          <a:xfrm>
+            <a:off x="566928" y="347472"/>
+            <a:ext cx="10881360" cy="438912"/>
+          </a:xfrm>
+          <a:prstGeom prst="rect">
+            <a:avLst/>
+          </a:prstGeom>
+          <a:noFill/>
+        </p:spPr>
+        <p:txBody>
+          <a:bodyPr wrap="square" lIns="73152" rIns="73152" tIns="36576" bIns="36576">
+            <a:spAutoFit/>
+          </a:bodyPr>
+          <a:lstStyle/>
+          <a:p>
+            <a:pPr algn="l">
+              <a:spcAft>
+                <a:spcPts val="0"/>
+              </a:spcAft>
+              <a:defRPr sz="3200" b="1">
+                <a:solidFill>
+                  <a:srgbClr val="122C4E"/>
+                </a:solidFill>
+                <a:latin typeface="Noto Sans CJK KR"/>
+              </a:defRPr>
+            </a:pPr>
+            <a:r>
               <a:t>공식 참고 자료</a:t>
             </a:r>
           </a:p>
@@ -24722,7 +25050,7 @@
               </a:defRPr>
             </a:pPr>
             <a:r>
-              <a:t>~/agv_ws/src/</a:t>
+              <a:t>~/ros2_curri/agv_ws/src/</a:t>
             </a:r>
             <a:br/>
             <a:r>
@@ -25001,7 +25329,7 @@
               </a:defRPr>
             </a:pPr>
             <a:r>
-              <a:t>현재 단계 1/2    |    현재 폴더 ~/agv_ws    |    현재 터미널</a:t>
+              <a:t>현재 단계 1/2    |    현재 폴더 ~/ros2_curri/agv_ws    |    현재 터미널</a:t>
             </a:r>
           </a:p>
         </p:txBody>
@@ -25451,7 +25779,7 @@
               </a:defRPr>
             </a:pPr>
             <a:r>
-              <a:t>현재 단계 2/2    |    현재 폴더 ~/agv_ws    |    현재 터미널</a:t>
+              <a:t>현재 단계 2/2    |    현재 폴더 ~/ros2_curri/agv_ws    |    현재 터미널</a:t>
             </a:r>
           </a:p>
         </p:txBody>
@@ -25769,7 +26097,7 @@
               </a:defRPr>
             </a:pPr>
             <a:r>
-              <a:t>~/agv_ws/src/agv_gazebo/models/agv/model.sdf</a:t>
+              <a:t>~/ros2_curri/agv_ws/src/agv_gazebo/models/agv/model.sdf</a:t>
             </a:r>
           </a:p>
         </p:txBody>
@@ -25905,7 +26233,7 @@
               </a:defRPr>
             </a:pPr>
             <a:r>
-              <a:t>현재 단계 3/27    |    현재 폴더 ~/agv_ws    |    현재 터미널</a:t>
+              <a:t>현재 단계 3/27    |    현재 폴더 ~/ros2_curri/agv_ws    |    현재 터미널</a:t>
             </a:r>
           </a:p>
         </p:txBody>
@@ -26002,11 +26330,11 @@
               </a:defRPr>
             </a:pPr>
             <a:r>
-              <a:t>파일 생성: mkdir -p ~/agv_ws/src/agv_gazebo/models/agv</a:t>
-            </a:r>
-            <a:br/>
-            <a:r>
-              <a:t>파일 열기: nano ~/agv_ws/src/agv_gazebo/models/agv/model.sdf</a:t>
+              <a:t>파일 생성: mkdir -p ~/ros2_curri/agv_ws/src/agv_gazebo/models/agv</a:t>
+            </a:r>
+            <a:br/>
+            <a:r>
+              <a:t>파일 열기: nano ~/ros2_curri/agv_ws/src/agv_gazebo/models/agv/model.sdf</a:t>
             </a:r>
           </a:p>
         </p:txBody>

--- a/blocks/C_drive_visualization/M09_differential_drive/M09_Differential_Drive_구동.pptx
+++ b/blocks/C_drive_visualization/M09_differential_drive/M09_Differential_Drive_구동.pptx
@@ -48,6 +48,7 @@
     <p:sldId id="296" r:id="rId48"/>
     <p:sldId id="297" r:id="rId49"/>
     <p:sldId id="298" r:id="rId50"/>
+    <p:sldId id="299" r:id="rId51"/>
   </p:sldIdLst>
   <p:sldSz cx="12191999" cy="6858000" type="screen4x3"/>
   <p:notesSz cx="6858000" cy="9144000"/>
@@ -634,7 +635,7 @@
           <a:lstStyle/>
           <a:p>
             <a:r>
-              <a:t>[설명] ~/ros2_curri/agv_ws/src/agv_gazebo/models/agv/model.sdf의 전체 파일을 2/24 구간으로 작성한다.</a:t>
+              <a:t>[설명] ~/ros2_curri/agv_ws/src/agv_gazebo/models/agv/model.sdf의 전체 파일을 1/24 구간으로 작성한다.</a:t>
             </a:r>
           </a:p>
           <a:p>
@@ -724,7 +725,7 @@
           <a:lstStyle/>
           <a:p>
             <a:r>
-              <a:t>[설명] ~/ros2_curri/agv_ws/src/agv_gazebo/models/agv/model.sdf의 전체 파일을 3/24 구간으로 작성한다.</a:t>
+              <a:t>[설명] ~/ros2_curri/agv_ws/src/agv_gazebo/models/agv/model.sdf의 전체 파일을 2/24 구간으로 작성한다.</a:t>
             </a:r>
           </a:p>
           <a:p>
@@ -814,7 +815,7 @@
           <a:lstStyle/>
           <a:p>
             <a:r>
-              <a:t>[설명] ~/ros2_curri/agv_ws/src/agv_gazebo/models/agv/model.sdf의 전체 파일을 4/24 구간으로 작성한다.</a:t>
+              <a:t>[설명] ~/ros2_curri/agv_ws/src/agv_gazebo/models/agv/model.sdf의 전체 파일을 3/24 구간으로 작성한다.</a:t>
             </a:r>
           </a:p>
           <a:p>
@@ -904,7 +905,7 @@
           <a:lstStyle/>
           <a:p>
             <a:r>
-              <a:t>[설명] ~/ros2_curri/agv_ws/src/agv_gazebo/models/agv/model.sdf의 전체 파일을 5/24 구간으로 작성한다.</a:t>
+              <a:t>[설명] ~/ros2_curri/agv_ws/src/agv_gazebo/models/agv/model.sdf의 전체 파일을 4/24 구간으로 작성한다.</a:t>
             </a:r>
           </a:p>
           <a:p>
@@ -994,7 +995,7 @@
           <a:lstStyle/>
           <a:p>
             <a:r>
-              <a:t>[설명] ~/ros2_curri/agv_ws/src/agv_gazebo/models/agv/model.sdf의 전체 파일을 6/24 구간으로 작성한다.</a:t>
+              <a:t>[설명] ~/ros2_curri/agv_ws/src/agv_gazebo/models/agv/model.sdf의 전체 파일을 5/24 구간으로 작성한다.</a:t>
             </a:r>
           </a:p>
           <a:p>
@@ -1084,7 +1085,7 @@
           <a:lstStyle/>
           <a:p>
             <a:r>
-              <a:t>[설명] ~/ros2_curri/agv_ws/src/agv_gazebo/models/agv/model.sdf의 전체 파일을 7/24 구간으로 작성한다.</a:t>
+              <a:t>[설명] ~/ros2_curri/agv_ws/src/agv_gazebo/models/agv/model.sdf의 전체 파일을 6/24 구간으로 작성한다.</a:t>
             </a:r>
           </a:p>
           <a:p>
@@ -1174,7 +1175,7 @@
           <a:lstStyle/>
           <a:p>
             <a:r>
-              <a:t>[설명] ~/ros2_curri/agv_ws/src/agv_gazebo/models/agv/model.sdf의 전체 파일을 8/24 구간으로 작성한다.</a:t>
+              <a:t>[설명] ~/ros2_curri/agv_ws/src/agv_gazebo/models/agv/model.sdf의 전체 파일을 7/24 구간으로 작성한다.</a:t>
             </a:r>
           </a:p>
           <a:p>
@@ -1264,7 +1265,7 @@
           <a:lstStyle/>
           <a:p>
             <a:r>
-              <a:t>[설명] ~/ros2_curri/agv_ws/src/agv_gazebo/models/agv/model.sdf의 전체 파일을 9/24 구간으로 작성한다.</a:t>
+              <a:t>[설명] ~/ros2_curri/agv_ws/src/agv_gazebo/models/agv/model.sdf의 전체 파일을 8/24 구간으로 작성한다.</a:t>
             </a:r>
           </a:p>
           <a:p>
@@ -1354,7 +1355,7 @@
           <a:lstStyle/>
           <a:p>
             <a:r>
-              <a:t>[설명] ~/ros2_curri/agv_ws/src/agv_gazebo/models/agv/model.sdf의 전체 파일을 10/24 구간으로 작성한다.</a:t>
+              <a:t>[설명] ~/ros2_curri/agv_ws/src/agv_gazebo/models/agv/model.sdf의 전체 파일을 9/24 구간으로 작성한다.</a:t>
             </a:r>
           </a:p>
           <a:p>
@@ -1444,7 +1445,7 @@
           <a:lstStyle/>
           <a:p>
             <a:r>
-              <a:t>[설명] ~/ros2_curri/agv_ws/src/agv_gazebo/models/agv/model.sdf의 전체 파일을 11/24 구간으로 작성한다.</a:t>
+              <a:t>[설명] ~/ros2_curri/agv_ws/src/agv_gazebo/models/agv/model.sdf의 전체 파일을 10/24 구간으로 작성한다.</a:t>
             </a:r>
           </a:p>
           <a:p>
@@ -1624,7 +1625,7 @@
           <a:lstStyle/>
           <a:p>
             <a:r>
-              <a:t>[설명] ~/ros2_curri/agv_ws/src/agv_gazebo/models/agv/model.sdf의 전체 파일을 12/24 구간으로 작성한다.</a:t>
+              <a:t>[설명] ~/ros2_curri/agv_ws/src/agv_gazebo/models/agv/model.sdf의 전체 파일을 11/24 구간으로 작성한다.</a:t>
             </a:r>
           </a:p>
           <a:p>
@@ -1714,7 +1715,7 @@
           <a:lstStyle/>
           <a:p>
             <a:r>
-              <a:t>[설명] ~/ros2_curri/agv_ws/src/agv_gazebo/models/agv/model.sdf의 전체 파일을 13/24 구간으로 작성한다.</a:t>
+              <a:t>[설명] ~/ros2_curri/agv_ws/src/agv_gazebo/models/agv/model.sdf의 전체 파일을 12/24 구간으로 작성한다.</a:t>
             </a:r>
           </a:p>
           <a:p>
@@ -1804,7 +1805,7 @@
           <a:lstStyle/>
           <a:p>
             <a:r>
-              <a:t>[설명] ~/ros2_curri/agv_ws/src/agv_gazebo/models/agv/model.sdf의 전체 파일을 14/24 구간으로 작성한다.</a:t>
+              <a:t>[설명] ~/ros2_curri/agv_ws/src/agv_gazebo/models/agv/model.sdf의 전체 파일을 13/24 구간으로 작성한다.</a:t>
             </a:r>
           </a:p>
           <a:p>
@@ -1894,7 +1895,7 @@
           <a:lstStyle/>
           <a:p>
             <a:r>
-              <a:t>[설명] ~/ros2_curri/agv_ws/src/agv_gazebo/models/agv/model.sdf의 전체 파일을 15/24 구간으로 작성한다.</a:t>
+              <a:t>[설명] ~/ros2_curri/agv_ws/src/agv_gazebo/models/agv/model.sdf의 전체 파일을 14/24 구간으로 작성한다.</a:t>
             </a:r>
           </a:p>
           <a:p>
@@ -1984,7 +1985,7 @@
           <a:lstStyle/>
           <a:p>
             <a:r>
-              <a:t>[설명] ~/ros2_curri/agv_ws/src/agv_gazebo/models/agv/model.sdf의 전체 파일을 16/24 구간으로 작성한다.</a:t>
+              <a:t>[설명] ~/ros2_curri/agv_ws/src/agv_gazebo/models/agv/model.sdf의 전체 파일을 15/24 구간으로 작성한다.</a:t>
             </a:r>
           </a:p>
           <a:p>
@@ -2074,7 +2075,7 @@
           <a:lstStyle/>
           <a:p>
             <a:r>
-              <a:t>[설명] ~/ros2_curri/agv_ws/src/agv_gazebo/models/agv/model.sdf의 전체 파일을 17/24 구간으로 작성한다.</a:t>
+              <a:t>[설명] ~/ros2_curri/agv_ws/src/agv_gazebo/models/agv/model.sdf의 전체 파일을 16/24 구간으로 작성한다.</a:t>
             </a:r>
           </a:p>
           <a:p>
@@ -2164,7 +2165,7 @@
           <a:lstStyle/>
           <a:p>
             <a:r>
-              <a:t>[설명] ~/ros2_curri/agv_ws/src/agv_gazebo/models/agv/model.sdf의 전체 파일을 18/24 구간으로 작성한다.</a:t>
+              <a:t>[설명] ~/ros2_curri/agv_ws/src/agv_gazebo/models/agv/model.sdf의 전체 파일을 17/24 구간으로 작성한다.</a:t>
             </a:r>
           </a:p>
           <a:p>
@@ -2254,7 +2255,7 @@
           <a:lstStyle/>
           <a:p>
             <a:r>
-              <a:t>[설명] ~/ros2_curri/agv_ws/src/agv_gazebo/models/agv/model.sdf의 전체 파일을 19/24 구간으로 작성한다.</a:t>
+              <a:t>[설명] ~/ros2_curri/agv_ws/src/agv_gazebo/models/agv/model.sdf의 전체 파일을 18/24 구간으로 작성한다.</a:t>
             </a:r>
           </a:p>
           <a:p>
@@ -2344,7 +2345,7 @@
           <a:lstStyle/>
           <a:p>
             <a:r>
-              <a:t>[설명] ~/ros2_curri/agv_ws/src/agv_gazebo/models/agv/model.sdf의 전체 파일을 20/24 구간으로 작성한다.</a:t>
+              <a:t>[설명] ~/ros2_curri/agv_ws/src/agv_gazebo/models/agv/model.sdf의 전체 파일을 19/24 구간으로 작성한다.</a:t>
             </a:r>
           </a:p>
           <a:p>
@@ -2434,7 +2435,7 @@
           <a:lstStyle/>
           <a:p>
             <a:r>
-              <a:t>[설명] ~/ros2_curri/agv_ws/src/agv_gazebo/models/agv/model.sdf의 전체 파일을 21/24 구간으로 작성한다.</a:t>
+              <a:t>[설명] ~/ros2_curri/agv_ws/src/agv_gazebo/models/agv/model.sdf의 전체 파일을 20/24 구간으로 작성한다.</a:t>
             </a:r>
           </a:p>
           <a:p>
@@ -2614,7 +2615,7 @@
           <a:lstStyle/>
           <a:p>
             <a:r>
-              <a:t>[설명] ~/ros2_curri/agv_ws/src/agv_gazebo/models/agv/model.sdf의 전체 파일을 22/24 구간으로 작성한다.</a:t>
+              <a:t>[설명] ~/ros2_curri/agv_ws/src/agv_gazebo/models/agv/model.sdf의 전체 파일을 21/24 구간으로 작성한다.</a:t>
             </a:r>
           </a:p>
           <a:p>
@@ -2704,7 +2705,7 @@
           <a:lstStyle/>
           <a:p>
             <a:r>
-              <a:t>[설명] ~/ros2_curri/agv_ws/src/agv_gazebo/models/agv/model.sdf의 전체 파일을 23/24 구간으로 작성한다.</a:t>
+              <a:t>[설명] ~/ros2_curri/agv_ws/src/agv_gazebo/models/agv/model.sdf의 전체 파일을 22/24 구간으로 작성한다.</a:t>
             </a:r>
           </a:p>
           <a:p>
@@ -2794,7 +2795,7 @@
           <a:lstStyle/>
           <a:p>
             <a:r>
-              <a:t>[설명] ~/ros2_curri/agv_ws/src/agv_gazebo/models/agv/model.sdf의 전체 파일을 24/24 구간으로 작성한다.</a:t>
+              <a:t>[설명] ~/ros2_curri/agv_ws/src/agv_gazebo/models/agv/model.sdf의 전체 파일을 23/24 구간으로 작성한다.</a:t>
             </a:r>
           </a:p>
           <a:p>
@@ -2884,12 +2885,12 @@
           <a:lstStyle/>
           <a:p>
             <a:r>
-              <a:t>[설명] ~/ros2_curri/agv_ws/src/agv_control/agv_control/cmd_test_node.py의 전체 파일을 1/3 구간으로 작성한다.</a:t>
-            </a:r>
-          </a:p>
-          <a:p>
-            <a:r>
-              <a:t>[실행] nano ~/ros2_curri/agv_ws/src/agv_control/agv_control/cmd_test_node.py</a:t>
+              <a:t>[설명] ~/ros2_curri/agv_ws/src/agv_gazebo/models/agv/model.sdf의 전체 파일을 24/24 구간으로 작성한다.</a:t>
+            </a:r>
+          </a:p>
+          <a:p>
+            <a:r>
+              <a:t>[실행] nano ~/ros2_curri/agv_ws/src/agv_gazebo/models/agv/model.sdf</a:t>
             </a:r>
           </a:p>
           <a:p>
@@ -2974,7 +2975,7 @@
           <a:lstStyle/>
           <a:p>
             <a:r>
-              <a:t>[설명] ~/ros2_curri/agv_ws/src/agv_control/agv_control/cmd_test_node.py의 전체 파일을 2/3 구간으로 작성한다.</a:t>
+              <a:t>[설명] ~/ros2_curri/agv_ws/src/agv_control/agv_control/cmd_test_node.py의 전체 파일을 1/3 구간으로 작성한다.</a:t>
             </a:r>
           </a:p>
           <a:p>
@@ -3064,7 +3065,7 @@
           <a:lstStyle/>
           <a:p>
             <a:r>
-              <a:t>[설명] ~/ros2_curri/agv_ws/src/agv_control/agv_control/cmd_test_node.py의 전체 파일을 3/3 구간으로 작성한다.</a:t>
+              <a:t>[설명] ~/ros2_curri/agv_ws/src/agv_control/agv_control/cmd_test_node.py의 전체 파일을 2/3 구간으로 작성한다.</a:t>
             </a:r>
           </a:p>
           <a:p>
@@ -3154,22 +3155,17 @@
           <a:lstStyle/>
           <a:p>
             <a:r>
-              <a:t>[설명] build/source/run을 생략 없이 실행한다.</a:t>
-            </a:r>
-          </a:p>
-          <a:p>
-            <a:r>
-              <a:t>[실행] ros2 launch agv_gazebo gazebo.launch.py</a:t>
-            </a:r>
-          </a:p>
-          <a:p>
-            <a:r>
-              <a:t># 새 터미널: ros2 run agv_control cmd_test_node</a:t>
-            </a:r>
-          </a:p>
-          <a:p>
-            <a:r>
-              <a:t>[확인] /cmd_vel에서 odom과 바퀴 구동 topic으로 이어지는 경로를 확인한다.</a:t>
+              <a:t>[설명] ~/ros2_curri/agv_ws/src/agv_control/agv_control/cmd_test_node.py의 전체 파일을 3/3 구간으로 작성한다.</a:t>
+            </a:r>
+          </a:p>
+          <a:p>
+            <a:r>
+              <a:t>[실행] nano ~/ros2_curri/agv_ws/src/agv_control/agv_control/cmd_test_node.py</a:t>
+            </a:r>
+          </a:p>
+          <a:p>
+            <a:r>
+              <a:t>[확인] 코드를 저장하고 다음 코드 슬라이드 또는 build 단계로 이동한다.</a:t>
             </a:r>
           </a:p>
           <a:p>
@@ -3179,7 +3175,7 @@
           </a:p>
           <a:p>
             <a:r>
-              <a:t>[오류] 오류가 나면 현재 폴더, source, 파일 경로를 먼저 확인한다.</a:t>
+              <a:t>[오류] 들여쓰기·XML 태그·따옴표가 슬라이드와 정확히 같은지 확인한다.</a:t>
             </a:r>
           </a:p>
         </p:txBody>
@@ -3249,17 +3245,22 @@
           <a:lstStyle/>
           <a:p>
             <a:r>
-              <a:t>[설명] 실제 Ubuntu/ROS 2 환경에서 생성한 검증 화면이다.</a:t>
-            </a:r>
-          </a:p>
-          <a:p>
-            <a:r>
-              <a:t>[실행] 슬라이드의 명령 또는 파일 작성 단계를 진행한다.</a:t>
-            </a:r>
-          </a:p>
-          <a:p>
-            <a:r>
-              <a:t>[확인] 캡처의 명령과 다음 슬라이드의 검증 명령을 비교한다.</a:t>
+              <a:t>[설명] build/source/run을 생략 없이 실행한다.</a:t>
+            </a:r>
+          </a:p>
+          <a:p>
+            <a:r>
+              <a:t>[실행] ros2 launch agv_gazebo gazebo.launch.py</a:t>
+            </a:r>
+          </a:p>
+          <a:p>
+            <a:r>
+              <a:t># 새 터미널: ros2 run agv_control cmd_test_node</a:t>
+            </a:r>
+          </a:p>
+          <a:p>
+            <a:r>
+              <a:t>[확인] /cmd_vel에서 odom과 바퀴 구동 topic으로 이어지는 경로를 확인한다.</a:t>
             </a:r>
           </a:p>
           <a:p>
@@ -3349,7 +3350,7 @@
           </a:p>
           <a:p>
             <a:r>
-              <a:t>[확인] 캡처의 명령과 다음 슬라이드의 검증 명령을 비교한다.</a:t>
+              <a:t>[확인] ① 명령/설정  ② 정상 출력 또는 화면  ③ 다음 검증 명령으로 재확인</a:t>
             </a:r>
           </a:p>
           <a:p>
@@ -3429,22 +3430,17 @@
           <a:lstStyle/>
           <a:p>
             <a:r>
-              <a:t>[설명] 검증 명령은 GUI 결과와 별도로 실행해 재현 가능한 완료 기준을 만든다.</a:t>
-            </a:r>
-          </a:p>
-          <a:p>
-            <a:r>
-              <a:t>[실행] ros2 topic info /cmd_vel</a:t>
-            </a:r>
-          </a:p>
-          <a:p>
-            <a:r>
-              <a:t>ros2 topic echo /odom --once</a:t>
-            </a:r>
-          </a:p>
-          <a:p>
-            <a:r>
-              <a:t>[확인] /cmd_vel에서 odom과 바퀴 구동 topic으로 이어지는 경로를 확인한다.</a:t>
+              <a:t>[설명] 실제 Ubuntu/ROS 2 환경에서 생성한 검증 화면이다.</a:t>
+            </a:r>
+          </a:p>
+          <a:p>
+            <a:r>
+              <a:t>[실행] 슬라이드의 명령 또는 파일 작성 단계를 진행한다.</a:t>
+            </a:r>
+          </a:p>
+          <a:p>
+            <a:r>
+              <a:t>[확인] 명령·설정과 화면의 topic·frame·결과 이름을 대조합니다.</a:t>
             </a:r>
           </a:p>
           <a:p>
@@ -3614,17 +3610,22 @@
           <a:lstStyle/>
           <a:p>
             <a:r>
-              <a:t>[설명] 오류를 대신 해결하지 말고 증상부터 우선 확인 순서대로 교육생이 실행하게 한다.</a:t>
-            </a:r>
-          </a:p>
-          <a:p>
-            <a:r>
-              <a:t>[실행] 슬라이드의 명령 또는 파일 작성 단계를 진행한다.</a:t>
-            </a:r>
-          </a:p>
-          <a:p>
-            <a:r>
-              <a:t>[확인] 수정 뒤 첫 검증 명령을 다시 실행한다.</a:t>
+              <a:t>[설명] 검증 명령은 GUI 결과와 별도로 실행해 재현 가능한 완료 기준을 만든다.</a:t>
+            </a:r>
+          </a:p>
+          <a:p>
+            <a:r>
+              <a:t>[실행] ros2 topic info /cmd_vel</a:t>
+            </a:r>
+          </a:p>
+          <a:p>
+            <a:r>
+              <a:t>ros2 topic echo /odom --once</a:t>
+            </a:r>
+          </a:p>
+          <a:p>
+            <a:r>
+              <a:t>[확인] /cmd_vel에서 odom과 바퀴 구동 topic으로 이어지는 경로를 확인한다.</a:t>
             </a:r>
           </a:p>
           <a:p>
@@ -3634,7 +3635,7 @@
           </a:p>
           <a:p>
             <a:r>
-              <a:t>[오류] 슬라이드의 두 대표 오류를 먼저 사용한다.</a:t>
+              <a:t>[오류] 오류가 나면 현재 폴더, source, 파일 경로를 먼저 확인한다.</a:t>
             </a:r>
           </a:p>
         </p:txBody>
@@ -3704,7 +3705,7 @@
           <a:lstStyle/>
           <a:p>
             <a:r>
-              <a:t>[설명] 교육생이 직접 한 값만 바꿔 원인과 결과를 연결하게 한다.</a:t>
+              <a:t>[설명] 오류를 대신 해결하지 말고 증상부터 우선 확인 순서대로 교육생이 실행하게 한다.</a:t>
             </a:r>
           </a:p>
           <a:p>
@@ -3714,7 +3715,7 @@
           </a:p>
           <a:p>
             <a:r>
-              <a:t>[확인] 원래 값과 변경 값을 모두 기록한다.</a:t>
+              <a:t>[확인] 수정 뒤 첫 검증 명령을 다시 실행한다.</a:t>
             </a:r>
           </a:p>
           <a:p>
@@ -3724,7 +3725,7 @@
           </a:p>
           <a:p>
             <a:r>
-              <a:t>[오류] 오류가 나면 현재 폴더, source, 파일 경로를 먼저 확인한다.</a:t>
+              <a:t>[오류] 슬라이드의 두 대표 오류를 먼저 사용한다.</a:t>
             </a:r>
           </a:p>
         </p:txBody>
@@ -3794,7 +3795,7 @@
           <a:lstStyle/>
           <a:p>
             <a:r>
-              <a:t>[설명] 교육생이 Complete·캡처·로그를 저장했는지 확인하고 다음 모듈의 시작 상태를 읽는다.</a:t>
+              <a:t>[설명] 교육생이 직접 한 값만 바꿔 원인과 결과를 연결하게 한다.</a:t>
             </a:r>
           </a:p>
           <a:p>
@@ -3804,7 +3805,7 @@
           </a:p>
           <a:p>
             <a:r>
-              <a:t>[확인] M10 ros_gz_bridge 시작 조건을 말할 수 있다.</a:t>
+              <a:t>[확인] 원래 값과 변경 값을 모두 기록한다.</a:t>
             </a:r>
           </a:p>
           <a:p>
@@ -3884,6 +3885,96 @@
           <a:lstStyle/>
           <a:p>
             <a:r>
+              <a:t>[설명] 교육생이 Complete·캡처·로그를 저장했는지 확인하고 다음 모듈의 시작 상태를 읽는다.</a:t>
+            </a:r>
+          </a:p>
+          <a:p>
+            <a:r>
+              <a:t>[실행] 슬라이드의 명령 또는 파일 작성 단계를 진행한다.</a:t>
+            </a:r>
+          </a:p>
+          <a:p>
+            <a:r>
+              <a:t>[확인] M10 ros_gz_bridge 시작 조건을 말할 수 있다.</a:t>
+            </a:r>
+          </a:p>
+          <a:p>
+            <a:r>
+              <a:t>[멈춤] 교육생이 현재 체크포인트를 통과할 때까지 기다린다.</a:t>
+            </a:r>
+          </a:p>
+          <a:p>
+            <a:r>
+              <a:t>[오류] 오류가 나면 현재 폴더, source, 파일 경로를 먼저 확인한다.</a:t>
+            </a:r>
+          </a:p>
+        </p:txBody>
+      </p:sp>
+      <p:sp>
+        <p:nvSpPr>
+          <p:cNvPr id="4" name="Slide Number Placeholder 3"/>
+          <p:cNvSpPr>
+            <a:spLocks noGrp="1"/>
+          </p:cNvSpPr>
+          <p:nvPr>
+            <p:ph type="sldNum" idx="5" sz="quarter"/>
+          </p:nvPr>
+        </p:nvSpPr>
+        <p:spPr/>
+      </p:sp>
+    </p:spTree>
+  </p:cSld>
+  <p:clrMapOvr>
+    <a:masterClrMapping/>
+  </p:clrMapOvr>
+</p:notes>
+</file>
+
+<file path=ppt/notesSlides/notesSlide44.xml><?xml version="1.0" encoding="utf-8"?>
+<p:notes xmlns:a="http://schemas.openxmlformats.org/drawingml/2006/main" xmlns:p="http://schemas.openxmlformats.org/presentationml/2006/main" xmlns:r="http://schemas.openxmlformats.org/officeDocument/2006/relationships">
+  <p:cSld>
+    <p:spTree>
+      <p:nvGrpSpPr>
+        <p:cNvPr id="1" name=""/>
+        <p:cNvGrpSpPr/>
+        <p:nvPr/>
+      </p:nvGrpSpPr>
+      <p:grpSpPr>
+        <a:xfrm>
+          <a:off x="0" y="0"/>
+          <a:ext cx="0" cy="0"/>
+          <a:chOff x="0" y="0"/>
+          <a:chExt cx="0" cy="0"/>
+        </a:xfrm>
+      </p:grpSpPr>
+      <p:sp>
+        <p:nvSpPr>
+          <p:cNvPr id="2" name="Slide Image Placeholder 1"/>
+          <p:cNvSpPr>
+            <a:spLocks noGrp="1"/>
+          </p:cNvSpPr>
+          <p:nvPr>
+            <p:ph type="sldImg" idx="2"/>
+          </p:nvPr>
+        </p:nvSpPr>
+        <p:spPr/>
+      </p:sp>
+      <p:sp>
+        <p:nvSpPr>
+          <p:cNvPr id="3" name="Notes Placeholder 2"/>
+          <p:cNvSpPr>
+            <a:spLocks noGrp="1"/>
+          </p:cNvSpPr>
+          <p:nvPr>
+            <p:ph type="body" idx="3" sz="quarter"/>
+          </p:nvPr>
+        </p:nvSpPr>
+        <p:spPr/>
+        <p:txBody>
+          <a:bodyPr/>
+          <a:lstStyle/>
+          <a:p>
+            <a:r>
               <a:t>[설명] 공식 문서는 버전 차이와 확장 학습을 확인할 때 사용한다.</a:t>
             </a:r>
           </a:p>
@@ -4154,22 +4245,17 @@
           <a:lstStyle/>
           <a:p>
             <a:r>
-              <a:t>[설명] linear.x는 m/s이고 angular.z는 rad/s다.</a:t>
-            </a:r>
-          </a:p>
-          <a:p>
-            <a:r>
-              <a:t>[실행] ros2 topic pub --rate 10 /cmd_vel geometry_msgs/msg/Twist \</a:t>
-            </a:r>
-          </a:p>
-          <a:p>
-            <a:r>
-              <a:t>  "{linear: {x: 0.15}, angular: {z: 0.0}}"</a:t>
-            </a:r>
-          </a:p>
-          <a:p>
-            <a:r>
-              <a:t>[확인] 명령 출력에서 슬라이드의 확인 항목을 찾는다.</a:t>
+              <a:t>[설명] 파일을 코드 문법보다 먼저 역할·사용법·확인 화면으로 설명한다.</a:t>
+            </a:r>
+          </a:p>
+          <a:p>
+            <a:r>
+              <a:t>[실행] 슬라이드의 명령 또는 파일 작성 단계를 진행한다.</a:t>
+            </a:r>
+          </a:p>
+          <a:p>
+            <a:r>
+              <a:t>[확인] 교육생이 각 파일의 산출물과 확인 위치를 말할 수 있다.</a:t>
             </a:r>
           </a:p>
           <a:p>
@@ -4249,7 +4335,7 @@
           <a:lstStyle/>
           <a:p>
             <a:r>
-              <a:t>[설명] 제자리 회전은 linear.x=0, angular.z만 양수/음수로 바꾼다.</a:t>
+              <a:t>[설명] linear.x는 m/s이고 angular.z는 rad/s다.</a:t>
             </a:r>
           </a:p>
           <a:p>
@@ -4259,12 +4345,7 @@
           </a:p>
           <a:p>
             <a:r>
-              <a:t>  "{linear: {x: 0.0}, angular: {z: 0.4}}"</a:t>
-            </a:r>
-          </a:p>
-          <a:p>
-            <a:r>
-              <a:t>ros2 topic echo /odom --once</a:t>
+              <a:t>  "{linear: {x: 0.15}, angular: {z: 0.0}}"</a:t>
             </a:r>
           </a:p>
           <a:p>
@@ -4349,17 +4430,27 @@
           <a:lstStyle/>
           <a:p>
             <a:r>
-              <a:t>[설명] ~/ros2_curri/agv_ws/src/agv_gazebo/models/agv/model.sdf의 전체 파일을 1/24 구간으로 작성한다.</a:t>
-            </a:r>
-          </a:p>
-          <a:p>
-            <a:r>
-              <a:t>[실행] nano ~/ros2_curri/agv_ws/src/agv_gazebo/models/agv/model.sdf</a:t>
-            </a:r>
-          </a:p>
-          <a:p>
-            <a:r>
-              <a:t>[확인] 코드를 저장하고 다음 코드 슬라이드 또는 build 단계로 이동한다.</a:t>
+              <a:t>[설명] 제자리 회전은 linear.x=0, angular.z만 양수/음수로 바꾼다.</a:t>
+            </a:r>
+          </a:p>
+          <a:p>
+            <a:r>
+              <a:t>[실행] ros2 topic pub --rate 10 /cmd_vel geometry_msgs/msg/Twist \</a:t>
+            </a:r>
+          </a:p>
+          <a:p>
+            <a:r>
+              <a:t>  "{linear: {x: 0.0}, angular: {z: 0.4}}"</a:t>
+            </a:r>
+          </a:p>
+          <a:p>
+            <a:r>
+              <a:t>ros2 topic echo /odom --once</a:t>
+            </a:r>
+          </a:p>
+          <a:p>
+            <a:r>
+              <a:t>[확인] 명령 출력에서 슬라이드의 확인 항목을 찾는다.</a:t>
             </a:r>
           </a:p>
           <a:p>
@@ -4369,7 +4460,7 @@
           </a:p>
           <a:p>
             <a:r>
-              <a:t>[오류] 들여쓰기·XML 태그·따옴표가 슬라이드와 정확히 같은지 확인한다.</a:t>
+              <a:t>[오류] 오류가 나면 현재 폴더, source, 파일 경로를 먼저 확인한다.</a:t>
             </a:r>
           </a:p>
         </p:txBody>
@@ -7742,7 +7833,7 @@
               </a:defRPr>
             </a:pPr>
             <a:r>
-              <a:t>파일을 계속 작성하고 저장한다 (2/24)</a:t>
+              <a:t>파일을 새로 만들고 저장한다 (1/24)</a:t>
             </a:r>
           </a:p>
         </p:txBody>
@@ -7917,7 +8008,7 @@
               </a:defRPr>
             </a:pPr>
             <a:r>
-              <a:t>현재 단계 4/27    |    현재 폴더 ~/ros2_curri/agv_ws    |    현재 터미널</a:t>
+              <a:t>현재 단계 3/27    |    현재 폴더 ~/ros2_curri/agv_ws    |    현재 터미널</a:t>
             </a:r>
           </a:p>
         </p:txBody>
@@ -8076,51 +8167,51 @@
               </a:defRPr>
             </a:pPr>
             <a:r>
+              <a:t>&lt;?xml version="1.0" ?&gt;</a:t>
+            </a:r>
+            <a:br/>
+            <a:r>
+              <a:t>&lt;sdf version="1.10"&gt;</a:t>
+            </a:r>
+            <a:br/>
+            <a:r>
+              <a:t>  </a:t>
+            </a:r>
+            <a:br/>
+            <a:r>
+              <a:t>  </a:t>
+            </a:r>
+            <a:br/>
+            <a:r>
+              <a:t>  &lt;model name="agv"&gt;</a:t>
+            </a:r>
+            <a:br/>
+            <a:r>
+              <a:t>    </a:t>
+            </a:r>
+            <a:br/>
+            <a:r>
+              <a:t>    </a:t>
+            </a:r>
+            <a:br/>
+            <a:r>
+              <a:t>    &lt;link name="base_link"&gt;</a:t>
+            </a:r>
+            <a:br/>
+            <a:r>
               <a:t>      </a:t>
             </a:r>
             <a:br/>
             <a:r>
-              <a:t>      &lt;inertial&gt;</a:t>
-            </a:r>
-            <a:br/>
-            <a:r>
-              <a:t>        &lt;mass&gt;12.0&lt;/mass&gt;</a:t>
-            </a:r>
-            <a:br/>
-            <a:r>
-              <a:t>        &lt;inertia&gt;</a:t>
-            </a:r>
-            <a:br/>
-            <a:r>
-              <a:t>          &lt;ixx&gt;0.20&lt;/ixx&gt;</a:t>
-            </a:r>
-            <a:br/>
-            <a:r>
-              <a:t>          &lt;iyy&gt;0.40&lt;/iyy&gt;</a:t>
-            </a:r>
-            <a:br/>
-            <a:r>
-              <a:t>          &lt;izz&gt;0.50&lt;/izz&gt;</a:t>
-            </a:r>
-            <a:br/>
-            <a:r>
-              <a:t>        &lt;/inertia&gt;</a:t>
-            </a:r>
-            <a:br/>
-            <a:r>
-              <a:t>      &lt;/inertial&gt;</a:t>
-            </a:r>
-            <a:br/>
-            <a:r>
               <a:t>      </a:t>
             </a:r>
             <a:br/>
             <a:r>
+              <a:t>      &lt;pose&gt;0 0 0.16 0 0 0&lt;/pose&gt;</a:t>
+            </a:r>
+            <a:br/>
+            <a:r>
               <a:t>      </a:t>
-            </a:r>
-            <a:br/>
-            <a:r>
-              <a:t>      &lt;visual name="body"&gt;</a:t>
             </a:r>
           </a:p>
         </p:txBody>
@@ -8159,7 +8250,7 @@
               </a:defRPr>
             </a:pPr>
             <a:r>
-              <a:t>파일 전체 2/24 · 이 슬라이드 다음에 같은 파일의 나머지 줄이 이어집니다.</a:t>
+              <a:t>파일 전체 1/24 · 이 슬라이드 다음에 같은 파일의 나머지 줄이 이어집니다.</a:t>
             </a:r>
           </a:p>
         </p:txBody>
@@ -8216,7 +8307,7 @@
               </a:defRPr>
             </a:pPr>
             <a:r>
-              <a:t>파일을 계속 작성하고 저장한다 (3/24)</a:t>
+              <a:t>파일을 계속 작성하고 저장한다 (2/24)</a:t>
             </a:r>
           </a:p>
         </p:txBody>
@@ -8391,7 +8482,7 @@
               </a:defRPr>
             </a:pPr>
             <a:r>
-              <a:t>현재 단계 5/27    |    현재 폴더 ~/ros2_curri/agv_ws    |    현재 터미널</a:t>
+              <a:t>현재 단계 4/27    |    현재 폴더 ~/ros2_curri/agv_ws    |    현재 터미널</a:t>
             </a:r>
           </a:p>
         </p:txBody>
@@ -8550,51 +8641,51 @@
               </a:defRPr>
             </a:pPr>
             <a:r>
-              <a:t>        &lt;geometry&gt;</a:t>
-            </a:r>
-            <a:br/>
-            <a:r>
-              <a:t>          &lt;box&gt;</a:t>
-            </a:r>
-            <a:br/>
-            <a:r>
-              <a:t>            &lt;size&gt;0.60 0.42 0.16&lt;/size&gt;</a:t>
-            </a:r>
-            <a:br/>
-            <a:r>
-              <a:t>          &lt;/box&gt;</a:t>
-            </a:r>
-            <a:br/>
-            <a:r>
-              <a:t>        &lt;/geometry&gt;</a:t>
-            </a:r>
-            <a:br/>
-            <a:r>
-              <a:t>        &lt;material&gt;</a:t>
-            </a:r>
-            <a:br/>
-            <a:r>
-              <a:t>          &lt;diffuse&gt;0.1 0.35 0.8 1&lt;/diffuse&gt;</a:t>
-            </a:r>
-            <a:br/>
-            <a:r>
-              <a:t>        &lt;/material&gt;</a:t>
-            </a:r>
-            <a:br/>
-            <a:r>
-              <a:t>      &lt;/visual&gt;</a:t>
-            </a:r>
-            <a:br/>
-            <a:r>
               <a:t>      </a:t>
             </a:r>
             <a:br/>
             <a:r>
+              <a:t>      &lt;inertial&gt;</a:t>
+            </a:r>
+            <a:br/>
+            <a:r>
+              <a:t>        &lt;mass&gt;12.0&lt;/mass&gt;</a:t>
+            </a:r>
+            <a:br/>
+            <a:r>
+              <a:t>        &lt;inertia&gt;</a:t>
+            </a:r>
+            <a:br/>
+            <a:r>
+              <a:t>          &lt;ixx&gt;0.20&lt;/ixx&gt;</a:t>
+            </a:r>
+            <a:br/>
+            <a:r>
+              <a:t>          &lt;iyy&gt;0.40&lt;/iyy&gt;</a:t>
+            </a:r>
+            <a:br/>
+            <a:r>
+              <a:t>          &lt;izz&gt;0.50&lt;/izz&gt;</a:t>
+            </a:r>
+            <a:br/>
+            <a:r>
+              <a:t>        &lt;/inertia&gt;</a:t>
+            </a:r>
+            <a:br/>
+            <a:r>
+              <a:t>      &lt;/inertial&gt;</a:t>
+            </a:r>
+            <a:br/>
+            <a:r>
               <a:t>      </a:t>
             </a:r>
             <a:br/>
             <a:r>
-              <a:t>      &lt;collision name="body_collision"&gt;</a:t>
+              <a:t>      </a:t>
+            </a:r>
+            <a:br/>
+            <a:r>
+              <a:t>      &lt;visual name="body"&gt;</a:t>
             </a:r>
           </a:p>
         </p:txBody>
@@ -8633,7 +8724,7 @@
               </a:defRPr>
             </a:pPr>
             <a:r>
-              <a:t>파일 전체 3/24 · 이 슬라이드 다음에 같은 파일의 나머지 줄이 이어집니다.</a:t>
+              <a:t>파일 전체 2/24 · 이 슬라이드 다음에 같은 파일의 나머지 줄이 이어집니다.</a:t>
             </a:r>
           </a:p>
         </p:txBody>
@@ -8690,7 +8781,7 @@
               </a:defRPr>
             </a:pPr>
             <a:r>
-              <a:t>파일을 계속 작성하고 저장한다 (4/24)</a:t>
+              <a:t>파일을 계속 작성하고 저장한다 (3/24)</a:t>
             </a:r>
           </a:p>
         </p:txBody>
@@ -8865,7 +8956,7 @@
               </a:defRPr>
             </a:pPr>
             <a:r>
-              <a:t>현재 단계 6/27    |    현재 폴더 ~/ros2_curri/agv_ws    |    현재 터미널</a:t>
+              <a:t>현재 단계 5/27    |    현재 폴더 ~/ros2_curri/agv_ws    |    현재 터미널</a:t>
             </a:r>
           </a:p>
         </p:txBody>
@@ -9044,7 +9135,19 @@
             </a:r>
             <a:br/>
             <a:r>
-              <a:t>      &lt;/collision&gt;</a:t>
+              <a:t>        &lt;material&gt;</a:t>
+            </a:r>
+            <a:br/>
+            <a:r>
+              <a:t>          &lt;diffuse&gt;0.1 0.35 0.8 1&lt;/diffuse&gt;</a:t>
+            </a:r>
+            <a:br/>
+            <a:r>
+              <a:t>        &lt;/material&gt;</a:t>
+            </a:r>
+            <a:br/>
+            <a:r>
+              <a:t>      &lt;/visual&gt;</a:t>
             </a:r>
             <a:br/>
             <a:r>
@@ -9056,19 +9159,7 @@
             </a:r>
             <a:br/>
             <a:r>
-              <a:t>      &lt;sensor name="imu" type="imu"&gt;</a:t>
-            </a:r>
-            <a:br/>
-            <a:r>
-              <a:t>        &lt;topic&gt;/imu/data&lt;/topic&gt;</a:t>
-            </a:r>
-            <a:br/>
-            <a:r>
-              <a:t>        &lt;always_on&gt;true&lt;/always_on&gt;</a:t>
-            </a:r>
-            <a:br/>
-            <a:r>
-              <a:t>        &lt;update_rate&gt;100&lt;/update_rate&gt;</a:t>
+              <a:t>      &lt;collision name="body_collision"&gt;</a:t>
             </a:r>
           </a:p>
         </p:txBody>
@@ -9107,7 +9198,7 @@
               </a:defRPr>
             </a:pPr>
             <a:r>
-              <a:t>파일 전체 4/24 · 이 슬라이드 다음에 같은 파일의 나머지 줄이 이어집니다.</a:t>
+              <a:t>파일 전체 3/24 · 이 슬라이드 다음에 같은 파일의 나머지 줄이 이어집니다.</a:t>
             </a:r>
           </a:p>
         </p:txBody>
@@ -9164,7 +9255,7 @@
               </a:defRPr>
             </a:pPr>
             <a:r>
-              <a:t>파일을 계속 작성하고 저장한다 (5/24)</a:t>
+              <a:t>파일을 계속 작성하고 저장한다 (4/24)</a:t>
             </a:r>
           </a:p>
         </p:txBody>
@@ -9339,7 +9430,7 @@
               </a:defRPr>
             </a:pPr>
             <a:r>
-              <a:t>현재 단계 7/27    |    현재 폴더 ~/ros2_curri/agv_ws    |    현재 터미널</a:t>
+              <a:t>현재 단계 6/27    |    현재 폴더 ~/ros2_curri/agv_ws    |    현재 터미널</a:t>
             </a:r>
           </a:p>
         </p:txBody>
@@ -9498,51 +9589,51 @@
               </a:defRPr>
             </a:pPr>
             <a:r>
-              <a:t>        &lt;imu&gt;</a:t>
-            </a:r>
-            <a:br/>
-            <a:r>
-              <a:t>          &lt;angular_velocity&gt;</a:t>
-            </a:r>
-            <a:br/>
-            <a:r>
-              <a:t>            &lt;x&gt;</a:t>
-            </a:r>
-            <a:br/>
-            <a:r>
-              <a:t>              &lt;noise type="gaussian"&gt;</a:t>
-            </a:r>
-            <a:br/>
-            <a:r>
-              <a:t>                &lt;mean&gt;0&lt;/mean&gt;</a:t>
-            </a:r>
-            <a:br/>
-            <a:r>
-              <a:t>                &lt;stddev&gt;0.001&lt;/stddev&gt;</a:t>
-            </a:r>
-            <a:br/>
-            <a:r>
-              <a:t>              &lt;/noise&gt;</a:t>
-            </a:r>
-            <a:br/>
-            <a:r>
-              <a:t>            &lt;/x&gt;</a:t>
-            </a:r>
-            <a:br/>
-            <a:r>
-              <a:t>          &lt;/angular_velocity&gt;</a:t>
-            </a:r>
-            <a:br/>
-            <a:r>
-              <a:t>        &lt;/imu&gt;</a:t>
-            </a:r>
-            <a:br/>
-            <a:r>
-              <a:t>      &lt;/sensor&gt;</a:t>
+              <a:t>        &lt;geometry&gt;</a:t>
+            </a:r>
+            <a:br/>
+            <a:r>
+              <a:t>          &lt;box&gt;</a:t>
+            </a:r>
+            <a:br/>
+            <a:r>
+              <a:t>            &lt;size&gt;0.60 0.42 0.16&lt;/size&gt;</a:t>
+            </a:r>
+            <a:br/>
+            <a:r>
+              <a:t>          &lt;/box&gt;</a:t>
+            </a:r>
+            <a:br/>
+            <a:r>
+              <a:t>        &lt;/geometry&gt;</a:t>
+            </a:r>
+            <a:br/>
+            <a:r>
+              <a:t>      &lt;/collision&gt;</a:t>
             </a:r>
             <a:br/>
             <a:r>
               <a:t>      </a:t>
+            </a:r>
+            <a:br/>
+            <a:r>
+              <a:t>      </a:t>
+            </a:r>
+            <a:br/>
+            <a:r>
+              <a:t>      &lt;sensor name="imu" type="imu"&gt;</a:t>
+            </a:r>
+            <a:br/>
+            <a:r>
+              <a:t>        &lt;topic&gt;/imu/data&lt;/topic&gt;</a:t>
+            </a:r>
+            <a:br/>
+            <a:r>
+              <a:t>        &lt;always_on&gt;true&lt;/always_on&gt;</a:t>
+            </a:r>
+            <a:br/>
+            <a:r>
+              <a:t>        &lt;update_rate&gt;100&lt;/update_rate&gt;</a:t>
             </a:r>
           </a:p>
         </p:txBody>
@@ -9581,7 +9672,7 @@
               </a:defRPr>
             </a:pPr>
             <a:r>
-              <a:t>파일 전체 5/24 · 이 슬라이드 다음에 같은 파일의 나머지 줄이 이어집니다.</a:t>
+              <a:t>파일 전체 4/24 · 이 슬라이드 다음에 같은 파일의 나머지 줄이 이어집니다.</a:t>
             </a:r>
           </a:p>
         </p:txBody>
@@ -9638,7 +9729,7 @@
               </a:defRPr>
             </a:pPr>
             <a:r>
-              <a:t>파일을 계속 작성하고 저장한다 (6/24)</a:t>
+              <a:t>파일을 계속 작성하고 저장한다 (5/24)</a:t>
             </a:r>
           </a:p>
         </p:txBody>
@@ -9813,7 +9904,7 @@
               </a:defRPr>
             </a:pPr>
             <a:r>
-              <a:t>현재 단계 8/27    |    현재 폴더 ~/ros2_curri/agv_ws    |    현재 터미널</a:t>
+              <a:t>현재 단계 7/27    |    현재 폴더 ~/ros2_curri/agv_ws    |    현재 터미널</a:t>
             </a:r>
           </a:p>
         </p:txBody>
@@ -9972,51 +10063,51 @@
               </a:defRPr>
             </a:pPr>
             <a:r>
-              <a:t>    </a:t>
-            </a:r>
-            <a:br/>
-            <a:r>
-              <a:t>    &lt;/link&gt;</a:t>
-            </a:r>
-            <a:br/>
-            <a:r>
-              <a:t>    </a:t>
-            </a:r>
-            <a:br/>
-            <a:r>
-              <a:t>    </a:t>
-            </a:r>
-            <a:br/>
-            <a:r>
-              <a:t>    &lt;link name="left_wheel_link"&gt;</a:t>
-            </a:r>
-            <a:br/>
-            <a:r>
-              <a:t>      &lt;pose relative_to="base_link"&gt;0 0.19 -0.08 1.5708 0 0&lt;/pose&gt;</a:t>
-            </a:r>
-            <a:br/>
-            <a:r>
-              <a:t>      &lt;inertial&gt;</a:t>
-            </a:r>
-            <a:br/>
-            <a:r>
-              <a:t>        &lt;mass&gt;0.6&lt;/mass&gt;</a:t>
-            </a:r>
-            <a:br/>
-            <a:r>
-              <a:t>        &lt;inertia&gt;</a:t>
-            </a:r>
-            <a:br/>
-            <a:r>
-              <a:t>          &lt;ixx&gt;0.002&lt;/ixx&gt;</a:t>
-            </a:r>
-            <a:br/>
-            <a:r>
-              <a:t>          &lt;iyy&gt;0.002&lt;/iyy&gt;</a:t>
-            </a:r>
-            <a:br/>
-            <a:r>
-              <a:t>          &lt;izz&gt;0.001&lt;/izz&gt;</a:t>
+              <a:t>        &lt;imu&gt;</a:t>
+            </a:r>
+            <a:br/>
+            <a:r>
+              <a:t>          &lt;angular_velocity&gt;</a:t>
+            </a:r>
+            <a:br/>
+            <a:r>
+              <a:t>            &lt;x&gt;</a:t>
+            </a:r>
+            <a:br/>
+            <a:r>
+              <a:t>              &lt;noise type="gaussian"&gt;</a:t>
+            </a:r>
+            <a:br/>
+            <a:r>
+              <a:t>                &lt;mean&gt;0&lt;/mean&gt;</a:t>
+            </a:r>
+            <a:br/>
+            <a:r>
+              <a:t>                &lt;stddev&gt;0.001&lt;/stddev&gt;</a:t>
+            </a:r>
+            <a:br/>
+            <a:r>
+              <a:t>              &lt;/noise&gt;</a:t>
+            </a:r>
+            <a:br/>
+            <a:r>
+              <a:t>            &lt;/x&gt;</a:t>
+            </a:r>
+            <a:br/>
+            <a:r>
+              <a:t>          &lt;/angular_velocity&gt;</a:t>
+            </a:r>
+            <a:br/>
+            <a:r>
+              <a:t>        &lt;/imu&gt;</a:t>
+            </a:r>
+            <a:br/>
+            <a:r>
+              <a:t>      &lt;/sensor&gt;</a:t>
+            </a:r>
+            <a:br/>
+            <a:r>
+              <a:t>      </a:t>
             </a:r>
           </a:p>
         </p:txBody>
@@ -10055,7 +10146,7 @@
               </a:defRPr>
             </a:pPr>
             <a:r>
-              <a:t>파일 전체 6/24 · 이 슬라이드 다음에 같은 파일의 나머지 줄이 이어집니다.</a:t>
+              <a:t>파일 전체 5/24 · 이 슬라이드 다음에 같은 파일의 나머지 줄이 이어집니다.</a:t>
             </a:r>
           </a:p>
         </p:txBody>
@@ -10112,7 +10203,7 @@
               </a:defRPr>
             </a:pPr>
             <a:r>
-              <a:t>파일을 계속 작성하고 저장한다 (7/24)</a:t>
+              <a:t>파일을 계속 작성하고 저장한다 (6/24)</a:t>
             </a:r>
           </a:p>
         </p:txBody>
@@ -10287,7 +10378,7 @@
               </a:defRPr>
             </a:pPr>
             <a:r>
-              <a:t>현재 단계 9/27    |    현재 폴더 ~/ros2_curri/agv_ws    |    현재 터미널</a:t>
+              <a:t>현재 단계 8/27    |    현재 폴더 ~/ros2_curri/agv_ws    |    현재 터미널</a:t>
             </a:r>
           </a:p>
         </p:txBody>
@@ -10446,51 +10537,51 @@
               </a:defRPr>
             </a:pPr>
             <a:r>
-              <a:t>        &lt;/inertia&gt;</a:t>
-            </a:r>
-            <a:br/>
-            <a:r>
-              <a:t>      &lt;/inertial&gt;</a:t>
-            </a:r>
-            <a:br/>
-            <a:r>
-              <a:t>      &lt;visual name="wheel"&gt;</a:t>
-            </a:r>
-            <a:br/>
-            <a:r>
-              <a:t>        &lt;geometry&gt;</a:t>
-            </a:r>
-            <a:br/>
-            <a:r>
-              <a:t>          &lt;cylinder&gt;</a:t>
-            </a:r>
-            <a:br/>
-            <a:r>
-              <a:t>            &lt;radius&gt;0.08&lt;/radius&gt;</a:t>
-            </a:r>
-            <a:br/>
-            <a:r>
-              <a:t>            &lt;length&gt;0.05&lt;/length&gt;</a:t>
-            </a:r>
-            <a:br/>
-            <a:r>
-              <a:t>          &lt;/cylinder&gt;</a:t>
-            </a:r>
-            <a:br/>
-            <a:r>
-              <a:t>        &lt;/geometry&gt;</a:t>
-            </a:r>
-            <a:br/>
-            <a:r>
-              <a:t>      &lt;/visual&gt;</a:t>
-            </a:r>
-            <a:br/>
-            <a:r>
-              <a:t>      &lt;collision name="wheel_collision"&gt;</a:t>
-            </a:r>
-            <a:br/>
-            <a:r>
-              <a:t>        &lt;geometry&gt;</a:t>
+              <a:t>    </a:t>
+            </a:r>
+            <a:br/>
+            <a:r>
+              <a:t>    &lt;/link&gt;</a:t>
+            </a:r>
+            <a:br/>
+            <a:r>
+              <a:t>    </a:t>
+            </a:r>
+            <a:br/>
+            <a:r>
+              <a:t>    </a:t>
+            </a:r>
+            <a:br/>
+            <a:r>
+              <a:t>    &lt;link name="left_wheel_link"&gt;</a:t>
+            </a:r>
+            <a:br/>
+            <a:r>
+              <a:t>      &lt;pose relative_to="base_link"&gt;0 0.19 -0.08 1.5708 0 0&lt;/pose&gt;</a:t>
+            </a:r>
+            <a:br/>
+            <a:r>
+              <a:t>      &lt;inertial&gt;</a:t>
+            </a:r>
+            <a:br/>
+            <a:r>
+              <a:t>        &lt;mass&gt;0.6&lt;/mass&gt;</a:t>
+            </a:r>
+            <a:br/>
+            <a:r>
+              <a:t>        &lt;inertia&gt;</a:t>
+            </a:r>
+            <a:br/>
+            <a:r>
+              <a:t>          &lt;ixx&gt;0.002&lt;/ixx&gt;</a:t>
+            </a:r>
+            <a:br/>
+            <a:r>
+              <a:t>          &lt;iyy&gt;0.002&lt;/iyy&gt;</a:t>
+            </a:r>
+            <a:br/>
+            <a:r>
+              <a:t>          &lt;izz&gt;0.001&lt;/izz&gt;</a:t>
             </a:r>
           </a:p>
         </p:txBody>
@@ -10529,7 +10620,7 @@
               </a:defRPr>
             </a:pPr>
             <a:r>
-              <a:t>파일 전체 7/24 · 이 슬라이드 다음에 같은 파일의 나머지 줄이 이어집니다.</a:t>
+              <a:t>파일 전체 6/24 · 이 슬라이드 다음에 같은 파일의 나머지 줄이 이어집니다.</a:t>
             </a:r>
           </a:p>
         </p:txBody>
@@ -10586,7 +10677,7 @@
               </a:defRPr>
             </a:pPr>
             <a:r>
-              <a:t>파일을 계속 작성하고 저장한다 (8/24)</a:t>
+              <a:t>파일을 계속 작성하고 저장한다 (7/24)</a:t>
             </a:r>
           </a:p>
         </p:txBody>
@@ -10761,7 +10852,7 @@
               </a:defRPr>
             </a:pPr>
             <a:r>
-              <a:t>현재 단계 10/27    |    현재 폴더 ~/ros2_curri/agv_ws    |    현재 터미널</a:t>
+              <a:t>현재 단계 9/27    |    현재 폴더 ~/ros2_curri/agv_ws    |    현재 터미널</a:t>
             </a:r>
           </a:p>
         </p:txBody>
@@ -10920,6 +11011,22 @@
               </a:defRPr>
             </a:pPr>
             <a:r>
+              <a:t>        &lt;/inertia&gt;</a:t>
+            </a:r>
+            <a:br/>
+            <a:r>
+              <a:t>      &lt;/inertial&gt;</a:t>
+            </a:r>
+            <a:br/>
+            <a:r>
+              <a:t>      &lt;visual name="wheel"&gt;</a:t>
+            </a:r>
+            <a:br/>
+            <a:r>
+              <a:t>        &lt;geometry&gt;</a:t>
+            </a:r>
+            <a:br/>
+            <a:r>
               <a:t>          &lt;cylinder&gt;</a:t>
             </a:r>
             <a:br/>
@@ -10940,31 +11047,15 @@
             </a:r>
             <a:br/>
             <a:r>
-              <a:t>        &lt;surface&gt;</a:t>
-            </a:r>
-            <a:br/>
-            <a:r>
-              <a:t>          &lt;friction&gt;</a:t>
-            </a:r>
-            <a:br/>
-            <a:r>
-              <a:t>            &lt;ode&gt;</a:t>
-            </a:r>
-            <a:br/>
-            <a:r>
-              <a:t>              &lt;mu&gt;1.0&lt;/mu&gt;</a:t>
-            </a:r>
-            <a:br/>
-            <a:r>
-              <a:t>              &lt;mu2&gt;1.0&lt;/mu2&gt;</a:t>
-            </a:r>
-            <a:br/>
-            <a:r>
-              <a:t>            &lt;/ode&gt;</a:t>
-            </a:r>
-            <a:br/>
-            <a:r>
-              <a:t>          &lt;/friction&gt;</a:t>
+              <a:t>      &lt;/visual&gt;</a:t>
+            </a:r>
+            <a:br/>
+            <a:r>
+              <a:t>      &lt;collision name="wheel_collision"&gt;</a:t>
+            </a:r>
+            <a:br/>
+            <a:r>
+              <a:t>        &lt;geometry&gt;</a:t>
             </a:r>
           </a:p>
         </p:txBody>
@@ -11003,7 +11094,7 @@
               </a:defRPr>
             </a:pPr>
             <a:r>
-              <a:t>파일 전체 8/24 · 이 슬라이드 다음에 같은 파일의 나머지 줄이 이어집니다.</a:t>
+              <a:t>파일 전체 7/24 · 이 슬라이드 다음에 같은 파일의 나머지 줄이 이어집니다.</a:t>
             </a:r>
           </a:p>
         </p:txBody>
@@ -11060,7 +11151,7 @@
               </a:defRPr>
             </a:pPr>
             <a:r>
-              <a:t>파일을 계속 작성하고 저장한다 (9/24)</a:t>
+              <a:t>파일을 계속 작성하고 저장한다 (8/24)</a:t>
             </a:r>
           </a:p>
         </p:txBody>
@@ -11235,7 +11326,7 @@
               </a:defRPr>
             </a:pPr>
             <a:r>
-              <a:t>현재 단계 11/27    |    현재 폴더 ~/ros2_curri/agv_ws    |    현재 터미널</a:t>
+              <a:t>현재 단계 10/27    |    현재 폴더 ~/ros2_curri/agv_ws    |    현재 터미널</a:t>
             </a:r>
           </a:p>
         </p:txBody>
@@ -11394,51 +11485,51 @@
               </a:defRPr>
             </a:pPr>
             <a:r>
-              <a:t>        &lt;/surface&gt;</a:t>
-            </a:r>
-            <a:br/>
-            <a:r>
-              <a:t>      &lt;/collision&gt;</a:t>
-            </a:r>
-            <a:br/>
-            <a:r>
-              <a:t>    &lt;/link&gt;</a:t>
-            </a:r>
-            <a:br/>
-            <a:r>
-              <a:t>    </a:t>
-            </a:r>
-            <a:br/>
-            <a:r>
-              <a:t>    </a:t>
-            </a:r>
-            <a:br/>
-            <a:r>
-              <a:t>    &lt;link name="right_wheel_link"&gt;</a:t>
-            </a:r>
-            <a:br/>
-            <a:r>
-              <a:t>      &lt;pose relative_to="base_link"&gt;0 -0.19 -0.08 1.5708 0 0&lt;/pose&gt;</a:t>
-            </a:r>
-            <a:br/>
-            <a:r>
-              <a:t>      &lt;inertial&gt;</a:t>
-            </a:r>
-            <a:br/>
-            <a:r>
-              <a:t>        &lt;mass&gt;0.6&lt;/mass&gt;</a:t>
-            </a:r>
-            <a:br/>
-            <a:r>
-              <a:t>        &lt;inertia&gt;</a:t>
-            </a:r>
-            <a:br/>
-            <a:r>
-              <a:t>          &lt;ixx&gt;0.002&lt;/ixx&gt;</a:t>
-            </a:r>
-            <a:br/>
-            <a:r>
-              <a:t>          &lt;iyy&gt;0.002&lt;/iyy&gt;</a:t>
+              <a:t>          &lt;cylinder&gt;</a:t>
+            </a:r>
+            <a:br/>
+            <a:r>
+              <a:t>            &lt;radius&gt;0.08&lt;/radius&gt;</a:t>
+            </a:r>
+            <a:br/>
+            <a:r>
+              <a:t>            &lt;length&gt;0.05&lt;/length&gt;</a:t>
+            </a:r>
+            <a:br/>
+            <a:r>
+              <a:t>          &lt;/cylinder&gt;</a:t>
+            </a:r>
+            <a:br/>
+            <a:r>
+              <a:t>        &lt;/geometry&gt;</a:t>
+            </a:r>
+            <a:br/>
+            <a:r>
+              <a:t>        &lt;surface&gt;</a:t>
+            </a:r>
+            <a:br/>
+            <a:r>
+              <a:t>          &lt;friction&gt;</a:t>
+            </a:r>
+            <a:br/>
+            <a:r>
+              <a:t>            &lt;ode&gt;</a:t>
+            </a:r>
+            <a:br/>
+            <a:r>
+              <a:t>              &lt;mu&gt;1.0&lt;/mu&gt;</a:t>
+            </a:r>
+            <a:br/>
+            <a:r>
+              <a:t>              &lt;mu2&gt;1.0&lt;/mu2&gt;</a:t>
+            </a:r>
+            <a:br/>
+            <a:r>
+              <a:t>            &lt;/ode&gt;</a:t>
+            </a:r>
+            <a:br/>
+            <a:r>
+              <a:t>          &lt;/friction&gt;</a:t>
             </a:r>
           </a:p>
         </p:txBody>
@@ -11477,7 +11568,7 @@
               </a:defRPr>
             </a:pPr>
             <a:r>
-              <a:t>파일 전체 9/24 · 이 슬라이드 다음에 같은 파일의 나머지 줄이 이어집니다.</a:t>
+              <a:t>파일 전체 8/24 · 이 슬라이드 다음에 같은 파일의 나머지 줄이 이어집니다.</a:t>
             </a:r>
           </a:p>
         </p:txBody>
@@ -11534,7 +11625,7 @@
               </a:defRPr>
             </a:pPr>
             <a:r>
-              <a:t>파일을 계속 작성하고 저장한다 (10/24)</a:t>
+              <a:t>파일을 계속 작성하고 저장한다 (9/24)</a:t>
             </a:r>
           </a:p>
         </p:txBody>
@@ -11709,7 +11800,7 @@
               </a:defRPr>
             </a:pPr>
             <a:r>
-              <a:t>현재 단계 12/27    |    현재 폴더 ~/ros2_curri/agv_ws    |    현재 터미널</a:t>
+              <a:t>현재 단계 11/27    |    현재 폴더 ~/ros2_curri/agv_ws    |    현재 터미널</a:t>
             </a:r>
           </a:p>
         </p:txBody>
@@ -11868,51 +11959,51 @@
               </a:defRPr>
             </a:pPr>
             <a:r>
-              <a:t>          &lt;izz&gt;0.001&lt;/izz&gt;</a:t>
-            </a:r>
-            <a:br/>
-            <a:r>
-              <a:t>        &lt;/inertia&gt;</a:t>
-            </a:r>
-            <a:br/>
-            <a:r>
-              <a:t>      &lt;/inertial&gt;</a:t>
-            </a:r>
-            <a:br/>
-            <a:r>
-              <a:t>      &lt;visual name="wheel"&gt;</a:t>
-            </a:r>
-            <a:br/>
-            <a:r>
-              <a:t>        &lt;geometry&gt;</a:t>
-            </a:r>
-            <a:br/>
-            <a:r>
-              <a:t>          &lt;cylinder&gt;</a:t>
-            </a:r>
-            <a:br/>
-            <a:r>
-              <a:t>            &lt;radius&gt;0.08&lt;/radius&gt;</a:t>
-            </a:r>
-            <a:br/>
-            <a:r>
-              <a:t>            &lt;length&gt;0.05&lt;/length&gt;</a:t>
-            </a:r>
-            <a:br/>
-            <a:r>
-              <a:t>          &lt;/cylinder&gt;</a:t>
-            </a:r>
-            <a:br/>
-            <a:r>
-              <a:t>        &lt;/geometry&gt;</a:t>
-            </a:r>
-            <a:br/>
-            <a:r>
-              <a:t>      &lt;/visual&gt;</a:t>
-            </a:r>
-            <a:br/>
-            <a:r>
-              <a:t>      &lt;collision name="wheel_collision"&gt;</a:t>
+              <a:t>        &lt;/surface&gt;</a:t>
+            </a:r>
+            <a:br/>
+            <a:r>
+              <a:t>      &lt;/collision&gt;</a:t>
+            </a:r>
+            <a:br/>
+            <a:r>
+              <a:t>    &lt;/link&gt;</a:t>
+            </a:r>
+            <a:br/>
+            <a:r>
+              <a:t>    </a:t>
+            </a:r>
+            <a:br/>
+            <a:r>
+              <a:t>    </a:t>
+            </a:r>
+            <a:br/>
+            <a:r>
+              <a:t>    &lt;link name="right_wheel_link"&gt;</a:t>
+            </a:r>
+            <a:br/>
+            <a:r>
+              <a:t>      &lt;pose relative_to="base_link"&gt;0 -0.19 -0.08 1.5708 0 0&lt;/pose&gt;</a:t>
+            </a:r>
+            <a:br/>
+            <a:r>
+              <a:t>      &lt;inertial&gt;</a:t>
+            </a:r>
+            <a:br/>
+            <a:r>
+              <a:t>        &lt;mass&gt;0.6&lt;/mass&gt;</a:t>
+            </a:r>
+            <a:br/>
+            <a:r>
+              <a:t>        &lt;inertia&gt;</a:t>
+            </a:r>
+            <a:br/>
+            <a:r>
+              <a:t>          &lt;ixx&gt;0.002&lt;/ixx&gt;</a:t>
+            </a:r>
+            <a:br/>
+            <a:r>
+              <a:t>          &lt;iyy&gt;0.002&lt;/iyy&gt;</a:t>
             </a:r>
           </a:p>
         </p:txBody>
@@ -11951,7 +12042,7 @@
               </a:defRPr>
             </a:pPr>
             <a:r>
-              <a:t>파일 전체 10/24 · 이 슬라이드 다음에 같은 파일의 나머지 줄이 이어집니다.</a:t>
+              <a:t>파일 전체 9/24 · 이 슬라이드 다음에 같은 파일의 나머지 줄이 이어집니다.</a:t>
             </a:r>
           </a:p>
         </p:txBody>
@@ -12008,7 +12099,7 @@
               </a:defRPr>
             </a:pPr>
             <a:r>
-              <a:t>파일을 계속 작성하고 저장한다 (11/24)</a:t>
+              <a:t>파일을 계속 작성하고 저장한다 (10/24)</a:t>
             </a:r>
           </a:p>
         </p:txBody>
@@ -12183,7 +12274,7 @@
               </a:defRPr>
             </a:pPr>
             <a:r>
-              <a:t>현재 단계 13/27    |    현재 폴더 ~/ros2_curri/agv_ws    |    현재 터미널</a:t>
+              <a:t>현재 단계 12/27    |    현재 폴더 ~/ros2_curri/agv_ws    |    현재 터미널</a:t>
             </a:r>
           </a:p>
         </p:txBody>
@@ -12342,6 +12433,22 @@
               </a:defRPr>
             </a:pPr>
             <a:r>
+              <a:t>          &lt;izz&gt;0.001&lt;/izz&gt;</a:t>
+            </a:r>
+            <a:br/>
+            <a:r>
+              <a:t>        &lt;/inertia&gt;</a:t>
+            </a:r>
+            <a:br/>
+            <a:r>
+              <a:t>      &lt;/inertial&gt;</a:t>
+            </a:r>
+            <a:br/>
+            <a:r>
+              <a:t>      &lt;visual name="wheel"&gt;</a:t>
+            </a:r>
+            <a:br/>
+            <a:r>
               <a:t>        &lt;geometry&gt;</a:t>
             </a:r>
             <a:br/>
@@ -12366,27 +12473,11 @@
             </a:r>
             <a:br/>
             <a:r>
-              <a:t>        &lt;surface&gt;</a:t>
-            </a:r>
-            <a:br/>
-            <a:r>
-              <a:t>          &lt;friction&gt;</a:t>
-            </a:r>
-            <a:br/>
-            <a:r>
-              <a:t>            &lt;ode&gt;</a:t>
-            </a:r>
-            <a:br/>
-            <a:r>
-              <a:t>              &lt;mu&gt;1.0&lt;/mu&gt;</a:t>
-            </a:r>
-            <a:br/>
-            <a:r>
-              <a:t>              &lt;mu2&gt;1.0&lt;/mu2&gt;</a:t>
-            </a:r>
-            <a:br/>
-            <a:r>
-              <a:t>            &lt;/ode&gt;</a:t>
+              <a:t>      &lt;/visual&gt;</a:t>
+            </a:r>
+            <a:br/>
+            <a:r>
+              <a:t>      &lt;collision name="wheel_collision"&gt;</a:t>
             </a:r>
           </a:p>
         </p:txBody>
@@ -12425,7 +12516,7 @@
               </a:defRPr>
             </a:pPr>
             <a:r>
-              <a:t>파일 전체 11/24 · 이 슬라이드 다음에 같은 파일의 나머지 줄이 이어집니다.</a:t>
+              <a:t>파일 전체 10/24 · 이 슬라이드 다음에 같은 파일의 나머지 줄이 이어집니다.</a:t>
             </a:r>
           </a:p>
         </p:txBody>
@@ -12943,7 +13034,7 @@
               </a:defRPr>
             </a:pPr>
             <a:r>
-              <a:t>파일을 계속 작성하고 저장한다 (12/24)</a:t>
+              <a:t>파일을 계속 작성하고 저장한다 (11/24)</a:t>
             </a:r>
           </a:p>
         </p:txBody>
@@ -13118,7 +13209,7 @@
               </a:defRPr>
             </a:pPr>
             <a:r>
-              <a:t>현재 단계 14/27    |    현재 폴더 ~/ros2_curri/agv_ws    |    현재 터미널</a:t>
+              <a:t>현재 단계 13/27    |    현재 폴더 ~/ros2_curri/agv_ws    |    현재 터미널</a:t>
             </a:r>
           </a:p>
         </p:txBody>
@@ -13277,51 +13368,51 @@
               </a:defRPr>
             </a:pPr>
             <a:r>
-              <a:t>          &lt;/friction&gt;</a:t>
-            </a:r>
-            <a:br/>
-            <a:r>
-              <a:t>        &lt;/surface&gt;</a:t>
-            </a:r>
-            <a:br/>
-            <a:r>
-              <a:t>      &lt;/collision&gt;</a:t>
-            </a:r>
-            <a:br/>
-            <a:r>
-              <a:t>    &lt;/link&gt;</a:t>
-            </a:r>
-            <a:br/>
-            <a:r>
-              <a:t>    </a:t>
-            </a:r>
-            <a:br/>
-            <a:r>
-              <a:t>    </a:t>
-            </a:r>
-            <a:br/>
-            <a:r>
-              <a:t>    &lt;joint name="left_wheel_joint" type="revolute"&gt;</a:t>
-            </a:r>
-            <a:br/>
-            <a:r>
-              <a:t>      &lt;parent&gt;base_link&lt;/parent&gt;</a:t>
-            </a:r>
-            <a:br/>
-            <a:r>
-              <a:t>      &lt;child&gt;left_wheel_link&lt;/child&gt;</a:t>
-            </a:r>
-            <a:br/>
-            <a:r>
-              <a:t>      &lt;axis&gt;</a:t>
-            </a:r>
-            <a:br/>
-            <a:r>
-              <a:t>        &lt;xyz&gt;0 1 0&lt;/xyz&gt;</a:t>
-            </a:r>
-            <a:br/>
-            <a:r>
-              <a:t>        &lt;limit&gt;</a:t>
+              <a:t>        &lt;geometry&gt;</a:t>
+            </a:r>
+            <a:br/>
+            <a:r>
+              <a:t>          &lt;cylinder&gt;</a:t>
+            </a:r>
+            <a:br/>
+            <a:r>
+              <a:t>            &lt;radius&gt;0.08&lt;/radius&gt;</a:t>
+            </a:r>
+            <a:br/>
+            <a:r>
+              <a:t>            &lt;length&gt;0.05&lt;/length&gt;</a:t>
+            </a:r>
+            <a:br/>
+            <a:r>
+              <a:t>          &lt;/cylinder&gt;</a:t>
+            </a:r>
+            <a:br/>
+            <a:r>
+              <a:t>        &lt;/geometry&gt;</a:t>
+            </a:r>
+            <a:br/>
+            <a:r>
+              <a:t>        &lt;surface&gt;</a:t>
+            </a:r>
+            <a:br/>
+            <a:r>
+              <a:t>          &lt;friction&gt;</a:t>
+            </a:r>
+            <a:br/>
+            <a:r>
+              <a:t>            &lt;ode&gt;</a:t>
+            </a:r>
+            <a:br/>
+            <a:r>
+              <a:t>              &lt;mu&gt;1.0&lt;/mu&gt;</a:t>
+            </a:r>
+            <a:br/>
+            <a:r>
+              <a:t>              &lt;mu2&gt;1.0&lt;/mu2&gt;</a:t>
+            </a:r>
+            <a:br/>
+            <a:r>
+              <a:t>            &lt;/ode&gt;</a:t>
             </a:r>
           </a:p>
         </p:txBody>
@@ -13360,7 +13451,7 @@
               </a:defRPr>
             </a:pPr>
             <a:r>
-              <a:t>파일 전체 12/24 · 이 슬라이드 다음에 같은 파일의 나머지 줄이 이어집니다.</a:t>
+              <a:t>파일 전체 11/24 · 이 슬라이드 다음에 같은 파일의 나머지 줄이 이어집니다.</a:t>
             </a:r>
           </a:p>
         </p:txBody>
@@ -13417,7 +13508,7 @@
               </a:defRPr>
             </a:pPr>
             <a:r>
-              <a:t>파일을 계속 작성하고 저장한다 (13/24)</a:t>
+              <a:t>파일을 계속 작성하고 저장한다 (12/24)</a:t>
             </a:r>
           </a:p>
         </p:txBody>
@@ -13592,7 +13683,7 @@
               </a:defRPr>
             </a:pPr>
             <a:r>
-              <a:t>현재 단계 15/27    |    현재 폴더 ~/ros2_curri/agv_ws    |    현재 터미널</a:t>
+              <a:t>현재 단계 14/27    |    현재 폴더 ~/ros2_curri/agv_ws    |    현재 터미널</a:t>
             </a:r>
           </a:p>
         </p:txBody>
@@ -13751,23 +13842,19 @@
               </a:defRPr>
             </a:pPr>
             <a:r>
-              <a:t>          &lt;lower&gt;-1e16&lt;/lower&gt;</a:t>
-            </a:r>
-            <a:br/>
-            <a:r>
-              <a:t>          &lt;upper&gt;1e16&lt;/upper&gt;</a:t>
-            </a:r>
-            <a:br/>
-            <a:r>
-              <a:t>        &lt;/limit&gt;</a:t>
-            </a:r>
-            <a:br/>
-            <a:r>
-              <a:t>      &lt;/axis&gt;</a:t>
-            </a:r>
-            <a:br/>
-            <a:r>
-              <a:t>    &lt;/joint&gt;</a:t>
+              <a:t>          &lt;/friction&gt;</a:t>
+            </a:r>
+            <a:br/>
+            <a:r>
+              <a:t>        &lt;/surface&gt;</a:t>
+            </a:r>
+            <a:br/>
+            <a:r>
+              <a:t>      &lt;/collision&gt;</a:t>
+            </a:r>
+            <a:br/>
+            <a:r>
+              <a:t>    &lt;/link&gt;</a:t>
             </a:r>
             <a:br/>
             <a:r>
@@ -13779,7 +13866,7 @@
             </a:r>
             <a:br/>
             <a:r>
-              <a:t>    &lt;joint name="right_wheel_joint" type="revolute"&gt;</a:t>
+              <a:t>    &lt;joint name="left_wheel_joint" type="revolute"&gt;</a:t>
             </a:r>
             <a:br/>
             <a:r>
@@ -13787,7 +13874,7 @@
             </a:r>
             <a:br/>
             <a:r>
-              <a:t>      &lt;child&gt;right_wheel_link&lt;/child&gt;</a:t>
+              <a:t>      &lt;child&gt;left_wheel_link&lt;/child&gt;</a:t>
             </a:r>
             <a:br/>
             <a:r>
@@ -13796,6 +13883,10 @@
             <a:br/>
             <a:r>
               <a:t>        &lt;xyz&gt;0 1 0&lt;/xyz&gt;</a:t>
+            </a:r>
+            <a:br/>
+            <a:r>
+              <a:t>        &lt;limit&gt;</a:t>
             </a:r>
           </a:p>
         </p:txBody>
@@ -13834,7 +13925,7 @@
               </a:defRPr>
             </a:pPr>
             <a:r>
-              <a:t>파일 전체 13/24 · 이 슬라이드 다음에 같은 파일의 나머지 줄이 이어집니다.</a:t>
+              <a:t>파일 전체 12/24 · 이 슬라이드 다음에 같은 파일의 나머지 줄이 이어집니다.</a:t>
             </a:r>
           </a:p>
         </p:txBody>
@@ -13891,7 +13982,7 @@
               </a:defRPr>
             </a:pPr>
             <a:r>
-              <a:t>파일을 계속 작성하고 저장한다 (14/24)</a:t>
+              <a:t>파일을 계속 작성하고 저장한다 (13/24)</a:t>
             </a:r>
           </a:p>
         </p:txBody>
@@ -14066,7 +14157,7 @@
               </a:defRPr>
             </a:pPr>
             <a:r>
-              <a:t>현재 단계 16/27    |    현재 폴더 ~/ros2_curri/agv_ws    |    현재 터미널</a:t>
+              <a:t>현재 단계 15/27    |    현재 폴더 ~/ros2_curri/agv_ws    |    현재 터미널</a:t>
             </a:r>
           </a:p>
         </p:txBody>
@@ -14225,10 +14316,6 @@
               </a:defRPr>
             </a:pPr>
             <a:r>
-              <a:t>        &lt;limit&gt;</a:t>
-            </a:r>
-            <a:br/>
-            <a:r>
               <a:t>          &lt;lower&gt;-1e16&lt;/lower&gt;</a:t>
             </a:r>
             <a:br/>
@@ -14257,19 +14344,23 @@
             </a:r>
             <a:br/>
             <a:r>
-              <a:t>    &lt;link name="caster_link"&gt;</a:t>
-            </a:r>
-            <a:br/>
-            <a:r>
-              <a:t>      &lt;pose relative_to="base_link"&gt;-0.24 0 -0.12 0 0 0&lt;/pose&gt;</a:t>
-            </a:r>
-            <a:br/>
-            <a:r>
-              <a:t>      &lt;inertial&gt;</a:t>
-            </a:r>
-            <a:br/>
-            <a:r>
-              <a:t>        &lt;mass&gt;0.15&lt;/mass&gt;</a:t>
+              <a:t>    &lt;joint name="right_wheel_joint" type="revolute"&gt;</a:t>
+            </a:r>
+            <a:br/>
+            <a:r>
+              <a:t>      &lt;parent&gt;base_link&lt;/parent&gt;</a:t>
+            </a:r>
+            <a:br/>
+            <a:r>
+              <a:t>      &lt;child&gt;right_wheel_link&lt;/child&gt;</a:t>
+            </a:r>
+            <a:br/>
+            <a:r>
+              <a:t>      &lt;axis&gt;</a:t>
+            </a:r>
+            <a:br/>
+            <a:r>
+              <a:t>        &lt;xyz&gt;0 1 0&lt;/xyz&gt;</a:t>
             </a:r>
           </a:p>
         </p:txBody>
@@ -14308,7 +14399,7 @@
               </a:defRPr>
             </a:pPr>
             <a:r>
-              <a:t>파일 전체 14/24 · 이 슬라이드 다음에 같은 파일의 나머지 줄이 이어집니다.</a:t>
+              <a:t>파일 전체 13/24 · 이 슬라이드 다음에 같은 파일의 나머지 줄이 이어집니다.</a:t>
             </a:r>
           </a:p>
         </p:txBody>
@@ -14365,7 +14456,7 @@
               </a:defRPr>
             </a:pPr>
             <a:r>
-              <a:t>파일을 계속 작성하고 저장한다 (15/24)</a:t>
+              <a:t>파일을 계속 작성하고 저장한다 (14/24)</a:t>
             </a:r>
           </a:p>
         </p:txBody>
@@ -14540,7 +14631,7 @@
               </a:defRPr>
             </a:pPr>
             <a:r>
-              <a:t>현재 단계 17/27    |    현재 폴더 ~/ros2_curri/agv_ws    |    현재 터미널</a:t>
+              <a:t>현재 단계 16/27    |    현재 폴더 ~/ros2_curri/agv_ws    |    현재 터미널</a:t>
             </a:r>
           </a:p>
         </p:txBody>
@@ -14699,51 +14790,51 @@
               </a:defRPr>
             </a:pPr>
             <a:r>
-              <a:t>        &lt;inertia&gt;</a:t>
-            </a:r>
-            <a:br/>
-            <a:r>
-              <a:t>          &lt;ixx&gt;0.0001&lt;/ixx&gt;</a:t>
-            </a:r>
-            <a:br/>
-            <a:r>
-              <a:t>          &lt;iyy&gt;0.0001&lt;/iyy&gt;</a:t>
-            </a:r>
-            <a:br/>
-            <a:r>
-              <a:t>          &lt;izz&gt;0.0001&lt;/izz&gt;</a:t>
-            </a:r>
-            <a:br/>
-            <a:r>
-              <a:t>        &lt;/inertia&gt;</a:t>
-            </a:r>
-            <a:br/>
-            <a:r>
-              <a:t>      &lt;/inertial&gt;</a:t>
-            </a:r>
-            <a:br/>
-            <a:r>
-              <a:t>      &lt;visual name="caster"&gt;</a:t>
-            </a:r>
-            <a:br/>
-            <a:r>
-              <a:t>        &lt;geometry&gt;</a:t>
-            </a:r>
-            <a:br/>
-            <a:r>
-              <a:t>          &lt;sphere&gt;</a:t>
-            </a:r>
-            <a:br/>
-            <a:r>
-              <a:t>            &lt;radius&gt;0.04&lt;/radius&gt;</a:t>
-            </a:r>
-            <a:br/>
-            <a:r>
-              <a:t>          &lt;/sphere&gt;</a:t>
-            </a:r>
-            <a:br/>
-            <a:r>
-              <a:t>        &lt;/geometry&gt;</a:t>
+              <a:t>        &lt;limit&gt;</a:t>
+            </a:r>
+            <a:br/>
+            <a:r>
+              <a:t>          &lt;lower&gt;-1e16&lt;/lower&gt;</a:t>
+            </a:r>
+            <a:br/>
+            <a:r>
+              <a:t>          &lt;upper&gt;1e16&lt;/upper&gt;</a:t>
+            </a:r>
+            <a:br/>
+            <a:r>
+              <a:t>        &lt;/limit&gt;</a:t>
+            </a:r>
+            <a:br/>
+            <a:r>
+              <a:t>      &lt;/axis&gt;</a:t>
+            </a:r>
+            <a:br/>
+            <a:r>
+              <a:t>    &lt;/joint&gt;</a:t>
+            </a:r>
+            <a:br/>
+            <a:r>
+              <a:t>    </a:t>
+            </a:r>
+            <a:br/>
+            <a:r>
+              <a:t>    </a:t>
+            </a:r>
+            <a:br/>
+            <a:r>
+              <a:t>    &lt;link name="caster_link"&gt;</a:t>
+            </a:r>
+            <a:br/>
+            <a:r>
+              <a:t>      &lt;pose relative_to="base_link"&gt;-0.24 0 -0.12 0 0 0&lt;/pose&gt;</a:t>
+            </a:r>
+            <a:br/>
+            <a:r>
+              <a:t>      &lt;inertial&gt;</a:t>
+            </a:r>
+            <a:br/>
+            <a:r>
+              <a:t>        &lt;mass&gt;0.15&lt;/mass&gt;</a:t>
             </a:r>
           </a:p>
         </p:txBody>
@@ -14782,7 +14873,7 @@
               </a:defRPr>
             </a:pPr>
             <a:r>
-              <a:t>파일 전체 15/24 · 이 슬라이드 다음에 같은 파일의 나머지 줄이 이어집니다.</a:t>
+              <a:t>파일 전체 14/24 · 이 슬라이드 다음에 같은 파일의 나머지 줄이 이어집니다.</a:t>
             </a:r>
           </a:p>
         </p:txBody>
@@ -14839,7 +14930,7 @@
               </a:defRPr>
             </a:pPr>
             <a:r>
-              <a:t>파일을 계속 작성하고 저장한다 (16/24)</a:t>
+              <a:t>파일을 계속 작성하고 저장한다 (15/24)</a:t>
             </a:r>
           </a:p>
         </p:txBody>
@@ -15014,7 +15105,7 @@
               </a:defRPr>
             </a:pPr>
             <a:r>
-              <a:t>현재 단계 18/27    |    현재 폴더 ~/ros2_curri/agv_ws    |    현재 터미널</a:t>
+              <a:t>현재 단계 17/27    |    현재 폴더 ~/ros2_curri/agv_ws    |    현재 터미널</a:t>
             </a:r>
           </a:p>
         </p:txBody>
@@ -15173,11 +15264,31 @@
               </a:defRPr>
             </a:pPr>
             <a:r>
-              <a:t>      &lt;/visual&gt;</a:t>
-            </a:r>
-            <a:br/>
-            <a:r>
-              <a:t>      &lt;collision name="caster_collision"&gt;</a:t>
+              <a:t>        &lt;inertia&gt;</a:t>
+            </a:r>
+            <a:br/>
+            <a:r>
+              <a:t>          &lt;ixx&gt;0.0001&lt;/ixx&gt;</a:t>
+            </a:r>
+            <a:br/>
+            <a:r>
+              <a:t>          &lt;iyy&gt;0.0001&lt;/iyy&gt;</a:t>
+            </a:r>
+            <a:br/>
+            <a:r>
+              <a:t>          &lt;izz&gt;0.0001&lt;/izz&gt;</a:t>
+            </a:r>
+            <a:br/>
+            <a:r>
+              <a:t>        &lt;/inertia&gt;</a:t>
+            </a:r>
+            <a:br/>
+            <a:r>
+              <a:t>      &lt;/inertial&gt;</a:t>
+            </a:r>
+            <a:br/>
+            <a:r>
+              <a:t>      &lt;visual name="caster"&gt;</a:t>
             </a:r>
             <a:br/>
             <a:r>
@@ -15198,26 +15309,6 @@
             <a:br/>
             <a:r>
               <a:t>        &lt;/geometry&gt;</a:t>
-            </a:r>
-            <a:br/>
-            <a:r>
-              <a:t>      &lt;/collision&gt;</a:t>
-            </a:r>
-            <a:br/>
-            <a:r>
-              <a:t>    &lt;/link&gt;</a:t>
-            </a:r>
-            <a:br/>
-            <a:r>
-              <a:t>    </a:t>
-            </a:r>
-            <a:br/>
-            <a:r>
-              <a:t>    </a:t>
-            </a:r>
-            <a:br/>
-            <a:r>
-              <a:t>    &lt;joint name="caster_joint" type="fixed"&gt;</a:t>
             </a:r>
           </a:p>
         </p:txBody>
@@ -15256,7 +15347,7 @@
               </a:defRPr>
             </a:pPr>
             <a:r>
-              <a:t>파일 전체 16/24 · 이 슬라이드 다음에 같은 파일의 나머지 줄이 이어집니다.</a:t>
+              <a:t>파일 전체 15/24 · 이 슬라이드 다음에 같은 파일의 나머지 줄이 이어집니다.</a:t>
             </a:r>
           </a:p>
         </p:txBody>
@@ -15313,7 +15404,7 @@
               </a:defRPr>
             </a:pPr>
             <a:r>
-              <a:t>파일을 계속 작성하고 저장한다 (17/24)</a:t>
+              <a:t>파일을 계속 작성하고 저장한다 (16/24)</a:t>
             </a:r>
           </a:p>
         </p:txBody>
@@ -15488,7 +15579,7 @@
               </a:defRPr>
             </a:pPr>
             <a:r>
-              <a:t>현재 단계 19/27    |    현재 폴더 ~/ros2_curri/agv_ws    |    현재 터미널</a:t>
+              <a:t>현재 단계 18/27    |    현재 폴더 ~/ros2_curri/agv_ws    |    현재 터미널</a:t>
             </a:r>
           </a:p>
         </p:txBody>
@@ -15647,15 +15738,39 @@
               </a:defRPr>
             </a:pPr>
             <a:r>
-              <a:t>      &lt;parent&gt;base_link&lt;/parent&gt;</a:t>
-            </a:r>
-            <a:br/>
-            <a:r>
-              <a:t>      &lt;child&gt;caster_link&lt;/child&gt;</a:t>
-            </a:r>
-            <a:br/>
-            <a:r>
-              <a:t>    &lt;/joint&gt;</a:t>
+              <a:t>      &lt;/visual&gt;</a:t>
+            </a:r>
+            <a:br/>
+            <a:r>
+              <a:t>      &lt;collision name="caster_collision"&gt;</a:t>
+            </a:r>
+            <a:br/>
+            <a:r>
+              <a:t>        &lt;geometry&gt;</a:t>
+            </a:r>
+            <a:br/>
+            <a:r>
+              <a:t>          &lt;sphere&gt;</a:t>
+            </a:r>
+            <a:br/>
+            <a:r>
+              <a:t>            &lt;radius&gt;0.04&lt;/radius&gt;</a:t>
+            </a:r>
+            <a:br/>
+            <a:r>
+              <a:t>          &lt;/sphere&gt;</a:t>
+            </a:r>
+            <a:br/>
+            <a:r>
+              <a:t>        &lt;/geometry&gt;</a:t>
+            </a:r>
+            <a:br/>
+            <a:r>
+              <a:t>      &lt;/collision&gt;</a:t>
+            </a:r>
+            <a:br/>
+            <a:r>
+              <a:t>    &lt;/link&gt;</a:t>
             </a:r>
             <a:br/>
             <a:r>
@@ -15667,31 +15782,7 @@
             </a:r>
             <a:br/>
             <a:r>
-              <a:t>    &lt;link name="lidar_link"&gt;</a:t>
-            </a:r>
-            <a:br/>
-            <a:r>
-              <a:t>      &lt;pose relative_to="base_link"&gt;0.12 0 0.13 0 0 0&lt;/pose&gt;</a:t>
-            </a:r>
-            <a:br/>
-            <a:r>
-              <a:t>      &lt;visual name="housing"&gt;</a:t>
-            </a:r>
-            <a:br/>
-            <a:r>
-              <a:t>        &lt;geometry&gt;</a:t>
-            </a:r>
-            <a:br/>
-            <a:r>
-              <a:t>          &lt;cylinder&gt;</a:t>
-            </a:r>
-            <a:br/>
-            <a:r>
-              <a:t>            &lt;radius&gt;0.045&lt;/radius&gt;</a:t>
-            </a:r>
-            <a:br/>
-            <a:r>
-              <a:t>            &lt;length&gt;0.05&lt;/length&gt;</a:t>
+              <a:t>    &lt;joint name="caster_joint" type="fixed"&gt;</a:t>
             </a:r>
           </a:p>
         </p:txBody>
@@ -15730,7 +15821,7 @@
               </a:defRPr>
             </a:pPr>
             <a:r>
-              <a:t>파일 전체 17/24 · 이 슬라이드 다음에 같은 파일의 나머지 줄이 이어집니다.</a:t>
+              <a:t>파일 전체 16/24 · 이 슬라이드 다음에 같은 파일의 나머지 줄이 이어집니다.</a:t>
             </a:r>
           </a:p>
         </p:txBody>
@@ -15787,7 +15878,7 @@
               </a:defRPr>
             </a:pPr>
             <a:r>
-              <a:t>파일을 계속 작성하고 저장한다 (18/24)</a:t>
+              <a:t>파일을 계속 작성하고 저장한다 (17/24)</a:t>
             </a:r>
           </a:p>
         </p:txBody>
@@ -15962,7 +16053,7 @@
               </a:defRPr>
             </a:pPr>
             <a:r>
-              <a:t>현재 단계 20/27    |    현재 폴더 ~/ros2_curri/agv_ws    |    현재 터미널</a:t>
+              <a:t>현재 단계 19/27    |    현재 폴더 ~/ros2_curri/agv_ws    |    현재 터미널</a:t>
             </a:r>
           </a:p>
         </p:txBody>
@@ -16121,51 +16212,51 @@
               </a:defRPr>
             </a:pPr>
             <a:r>
-              <a:t>          &lt;/cylinder&gt;</a:t>
-            </a:r>
-            <a:br/>
-            <a:r>
-              <a:t>        &lt;/geometry&gt;</a:t>
-            </a:r>
-            <a:br/>
-            <a:r>
-              <a:t>      &lt;/visual&gt;</a:t>
-            </a:r>
-            <a:br/>
-            <a:r>
-              <a:t>      &lt;sensor name="lidar" type="gpu_lidar"&gt;</a:t>
-            </a:r>
-            <a:br/>
-            <a:r>
-              <a:t>        &lt;topic&gt;/scan&lt;/topic&gt;</a:t>
-            </a:r>
-            <a:br/>
-            <a:r>
-              <a:t>        &lt;always_on&gt;true&lt;/always_on&gt;</a:t>
-            </a:r>
-            <a:br/>
-            <a:r>
-              <a:t>        &lt;update_rate&gt;10&lt;/update_rate&gt;</a:t>
-            </a:r>
-            <a:br/>
-            <a:r>
-              <a:t>        &lt;visualize&gt;false&lt;/visualize&gt;</a:t>
-            </a:r>
-            <a:br/>
-            <a:r>
-              <a:t>        &lt;lidar&gt;</a:t>
-            </a:r>
-            <a:br/>
-            <a:r>
-              <a:t>          &lt;scan&gt;</a:t>
-            </a:r>
-            <a:br/>
-            <a:r>
-              <a:t>            &lt;horizontal&gt;</a:t>
-            </a:r>
-            <a:br/>
-            <a:r>
-              <a:t>              &lt;samples&gt;720&lt;/samples&gt;</a:t>
+              <a:t>      &lt;parent&gt;base_link&lt;/parent&gt;</a:t>
+            </a:r>
+            <a:br/>
+            <a:r>
+              <a:t>      &lt;child&gt;caster_link&lt;/child&gt;</a:t>
+            </a:r>
+            <a:br/>
+            <a:r>
+              <a:t>    &lt;/joint&gt;</a:t>
+            </a:r>
+            <a:br/>
+            <a:r>
+              <a:t>    </a:t>
+            </a:r>
+            <a:br/>
+            <a:r>
+              <a:t>    </a:t>
+            </a:r>
+            <a:br/>
+            <a:r>
+              <a:t>    &lt;link name="lidar_link"&gt;</a:t>
+            </a:r>
+            <a:br/>
+            <a:r>
+              <a:t>      &lt;pose relative_to="base_link"&gt;0.12 0 0.13 0 0 0&lt;/pose&gt;</a:t>
+            </a:r>
+            <a:br/>
+            <a:r>
+              <a:t>      &lt;visual name="housing"&gt;</a:t>
+            </a:r>
+            <a:br/>
+            <a:r>
+              <a:t>        &lt;geometry&gt;</a:t>
+            </a:r>
+            <a:br/>
+            <a:r>
+              <a:t>          &lt;cylinder&gt;</a:t>
+            </a:r>
+            <a:br/>
+            <a:r>
+              <a:t>            &lt;radius&gt;0.045&lt;/radius&gt;</a:t>
+            </a:r>
+            <a:br/>
+            <a:r>
+              <a:t>            &lt;length&gt;0.05&lt;/length&gt;</a:t>
             </a:r>
           </a:p>
         </p:txBody>
@@ -16204,7 +16295,7 @@
               </a:defRPr>
             </a:pPr>
             <a:r>
-              <a:t>파일 전체 18/24 · 이 슬라이드 다음에 같은 파일의 나머지 줄이 이어집니다.</a:t>
+              <a:t>파일 전체 17/24 · 이 슬라이드 다음에 같은 파일의 나머지 줄이 이어집니다.</a:t>
             </a:r>
           </a:p>
         </p:txBody>
@@ -16261,7 +16352,7 @@
               </a:defRPr>
             </a:pPr>
             <a:r>
-              <a:t>파일을 계속 작성하고 저장한다 (19/24)</a:t>
+              <a:t>파일을 계속 작성하고 저장한다 (18/24)</a:t>
             </a:r>
           </a:p>
         </p:txBody>
@@ -16436,7 +16527,7 @@
               </a:defRPr>
             </a:pPr>
             <a:r>
-              <a:t>현재 단계 21/27    |    현재 폴더 ~/ros2_curri/agv_ws    |    현재 터미널</a:t>
+              <a:t>현재 단계 20/27    |    현재 폴더 ~/ros2_curri/agv_ws    |    현재 터미널</a:t>
             </a:r>
           </a:p>
         </p:txBody>
@@ -16595,51 +16686,51 @@
               </a:defRPr>
             </a:pPr>
             <a:r>
-              <a:t>              &lt;resolution&gt;1&lt;/resolution&gt;</a:t>
-            </a:r>
-            <a:br/>
-            <a:r>
-              <a:t>              &lt;min_angle&gt;-3.14159&lt;/min_angle&gt;</a:t>
-            </a:r>
-            <a:br/>
-            <a:r>
-              <a:t>              &lt;max_angle&gt;3.14159&lt;/max_angle&gt;</a:t>
-            </a:r>
-            <a:br/>
-            <a:r>
-              <a:t>            &lt;/horizontal&gt;</a:t>
-            </a:r>
-            <a:br/>
-            <a:r>
-              <a:t>          &lt;/scan&gt;</a:t>
-            </a:r>
-            <a:br/>
-            <a:r>
-              <a:t>          &lt;range&gt;</a:t>
-            </a:r>
-            <a:br/>
-            <a:r>
-              <a:t>            &lt;min&gt;0.12&lt;/min&gt;</a:t>
-            </a:r>
-            <a:br/>
-            <a:r>
-              <a:t>            &lt;max&gt;12.0&lt;/max&gt;</a:t>
-            </a:r>
-            <a:br/>
-            <a:r>
-              <a:t>            &lt;resolution&gt;0.01&lt;/resolution&gt;</a:t>
-            </a:r>
-            <a:br/>
-            <a:r>
-              <a:t>          &lt;/range&gt;</a:t>
-            </a:r>
-            <a:br/>
-            <a:r>
-              <a:t>        &lt;/lidar&gt;</a:t>
-            </a:r>
-            <a:br/>
-            <a:r>
-              <a:t>      &lt;/sensor&gt;</a:t>
+              <a:t>          &lt;/cylinder&gt;</a:t>
+            </a:r>
+            <a:br/>
+            <a:r>
+              <a:t>        &lt;/geometry&gt;</a:t>
+            </a:r>
+            <a:br/>
+            <a:r>
+              <a:t>      &lt;/visual&gt;</a:t>
+            </a:r>
+            <a:br/>
+            <a:r>
+              <a:t>      &lt;sensor name="lidar" type="gpu_lidar"&gt;</a:t>
+            </a:r>
+            <a:br/>
+            <a:r>
+              <a:t>        &lt;topic&gt;/scan&lt;/topic&gt;</a:t>
+            </a:r>
+            <a:br/>
+            <a:r>
+              <a:t>        &lt;always_on&gt;true&lt;/always_on&gt;</a:t>
+            </a:r>
+            <a:br/>
+            <a:r>
+              <a:t>        &lt;update_rate&gt;10&lt;/update_rate&gt;</a:t>
+            </a:r>
+            <a:br/>
+            <a:r>
+              <a:t>        &lt;visualize&gt;false&lt;/visualize&gt;</a:t>
+            </a:r>
+            <a:br/>
+            <a:r>
+              <a:t>        &lt;lidar&gt;</a:t>
+            </a:r>
+            <a:br/>
+            <a:r>
+              <a:t>          &lt;scan&gt;</a:t>
+            </a:r>
+            <a:br/>
+            <a:r>
+              <a:t>            &lt;horizontal&gt;</a:t>
+            </a:r>
+            <a:br/>
+            <a:r>
+              <a:t>              &lt;samples&gt;720&lt;/samples&gt;</a:t>
             </a:r>
           </a:p>
         </p:txBody>
@@ -16678,7 +16769,7 @@
               </a:defRPr>
             </a:pPr>
             <a:r>
-              <a:t>파일 전체 19/24 · 이 슬라이드 다음에 같은 파일의 나머지 줄이 이어집니다.</a:t>
+              <a:t>파일 전체 18/24 · 이 슬라이드 다음에 같은 파일의 나머지 줄이 이어집니다.</a:t>
             </a:r>
           </a:p>
         </p:txBody>
@@ -16735,7 +16826,7 @@
               </a:defRPr>
             </a:pPr>
             <a:r>
-              <a:t>파일을 계속 작성하고 저장한다 (20/24)</a:t>
+              <a:t>파일을 계속 작성하고 저장한다 (19/24)</a:t>
             </a:r>
           </a:p>
         </p:txBody>
@@ -16910,7 +17001,7 @@
               </a:defRPr>
             </a:pPr>
             <a:r>
-              <a:t>현재 단계 22/27    |    현재 폴더 ~/ros2_curri/agv_ws    |    현재 터미널</a:t>
+              <a:t>현재 단계 21/27    |    현재 폴더 ~/ros2_curri/agv_ws    |    현재 터미널</a:t>
             </a:r>
           </a:p>
         </p:txBody>
@@ -17069,51 +17160,51 @@
               </a:defRPr>
             </a:pPr>
             <a:r>
-              <a:t>    &lt;/link&gt;</a:t>
-            </a:r>
-            <a:br/>
-            <a:r>
-              <a:t>    </a:t>
-            </a:r>
-            <a:br/>
-            <a:r>
-              <a:t>    </a:t>
-            </a:r>
-            <a:br/>
-            <a:r>
-              <a:t>    &lt;joint name="lidar_joint" type="fixed"&gt;</a:t>
-            </a:r>
-            <a:br/>
-            <a:r>
-              <a:t>      &lt;parent&gt;base_link&lt;/parent&gt;</a:t>
-            </a:r>
-            <a:br/>
-            <a:r>
-              <a:t>      &lt;child&gt;lidar_link&lt;/child&gt;</a:t>
-            </a:r>
-            <a:br/>
-            <a:r>
-              <a:t>    &lt;/joint&gt;</a:t>
-            </a:r>
-            <a:br/>
-            <a:r>
-              <a:t>    </a:t>
-            </a:r>
-            <a:br/>
-            <a:r>
-              <a:t>    </a:t>
-            </a:r>
-            <a:br/>
-            <a:r>
-              <a:t>    &lt;link name="camera_link"&gt;</a:t>
-            </a:r>
-            <a:br/>
-            <a:r>
-              <a:t>      &lt;pose relative_to="base_link"&gt;0.30 0 0.10 0 0 0&lt;/pose&gt;</a:t>
-            </a:r>
-            <a:br/>
-            <a:r>
-              <a:t>      &lt;visual name="housing"&gt;</a:t>
+              <a:t>              &lt;resolution&gt;1&lt;/resolution&gt;</a:t>
+            </a:r>
+            <a:br/>
+            <a:r>
+              <a:t>              &lt;min_angle&gt;-3.14159&lt;/min_angle&gt;</a:t>
+            </a:r>
+            <a:br/>
+            <a:r>
+              <a:t>              &lt;max_angle&gt;3.14159&lt;/max_angle&gt;</a:t>
+            </a:r>
+            <a:br/>
+            <a:r>
+              <a:t>            &lt;/horizontal&gt;</a:t>
+            </a:r>
+            <a:br/>
+            <a:r>
+              <a:t>          &lt;/scan&gt;</a:t>
+            </a:r>
+            <a:br/>
+            <a:r>
+              <a:t>          &lt;range&gt;</a:t>
+            </a:r>
+            <a:br/>
+            <a:r>
+              <a:t>            &lt;min&gt;0.12&lt;/min&gt;</a:t>
+            </a:r>
+            <a:br/>
+            <a:r>
+              <a:t>            &lt;max&gt;12.0&lt;/max&gt;</a:t>
+            </a:r>
+            <a:br/>
+            <a:r>
+              <a:t>            &lt;resolution&gt;0.01&lt;/resolution&gt;</a:t>
+            </a:r>
+            <a:br/>
+            <a:r>
+              <a:t>          &lt;/range&gt;</a:t>
+            </a:r>
+            <a:br/>
+            <a:r>
+              <a:t>        &lt;/lidar&gt;</a:t>
+            </a:r>
+            <a:br/>
+            <a:r>
+              <a:t>      &lt;/sensor&gt;</a:t>
             </a:r>
           </a:p>
         </p:txBody>
@@ -17152,7 +17243,7 @@
               </a:defRPr>
             </a:pPr>
             <a:r>
-              <a:t>파일 전체 20/24 · 이 슬라이드 다음에 같은 파일의 나머지 줄이 이어집니다.</a:t>
+              <a:t>파일 전체 19/24 · 이 슬라이드 다음에 같은 파일의 나머지 줄이 이어집니다.</a:t>
             </a:r>
           </a:p>
         </p:txBody>
@@ -17209,7 +17300,7 @@
               </a:defRPr>
             </a:pPr>
             <a:r>
-              <a:t>파일을 계속 작성하고 저장한다 (21/24)</a:t>
+              <a:t>파일을 계속 작성하고 저장한다 (20/24)</a:t>
             </a:r>
           </a:p>
         </p:txBody>
@@ -17384,7 +17475,7 @@
               </a:defRPr>
             </a:pPr>
             <a:r>
-              <a:t>현재 단계 23/27    |    현재 폴더 ~/ros2_curri/agv_ws    |    현재 터미널</a:t>
+              <a:t>현재 단계 22/27    |    현재 폴더 ~/ros2_curri/agv_ws    |    현재 터미널</a:t>
             </a:r>
           </a:p>
         </p:txBody>
@@ -17543,51 +17634,51 @@
               </a:defRPr>
             </a:pPr>
             <a:r>
-              <a:t>        &lt;geometry&gt;</a:t>
-            </a:r>
-            <a:br/>
-            <a:r>
-              <a:t>          &lt;box&gt;</a:t>
-            </a:r>
-            <a:br/>
-            <a:r>
-              <a:t>            &lt;size&gt;0.05 0.08 0.05&lt;/size&gt;</a:t>
-            </a:r>
-            <a:br/>
-            <a:r>
-              <a:t>          &lt;/box&gt;</a:t>
-            </a:r>
-            <a:br/>
-            <a:r>
-              <a:t>        &lt;/geometry&gt;</a:t>
-            </a:r>
-            <a:br/>
-            <a:r>
-              <a:t>      &lt;/visual&gt;</a:t>
-            </a:r>
-            <a:br/>
-            <a:r>
-              <a:t>      &lt;sensor name="camera" type="camera"&gt;</a:t>
-            </a:r>
-            <a:br/>
-            <a:r>
-              <a:t>        &lt;topic&gt;/camera/image_raw&lt;/topic&gt;</a:t>
-            </a:r>
-            <a:br/>
-            <a:r>
-              <a:t>        &lt;always_on&gt;true&lt;/always_on&gt;</a:t>
-            </a:r>
-            <a:br/>
-            <a:r>
-              <a:t>        &lt;update_rate&gt;15&lt;/update_rate&gt;</a:t>
-            </a:r>
-            <a:br/>
-            <a:r>
-              <a:t>        &lt;camera&gt;</a:t>
-            </a:r>
-            <a:br/>
-            <a:r>
-              <a:t>          &lt;horizontal_fov&gt;1.047&lt;/horizontal_fov&gt;</a:t>
+              <a:t>    &lt;/link&gt;</a:t>
+            </a:r>
+            <a:br/>
+            <a:r>
+              <a:t>    </a:t>
+            </a:r>
+            <a:br/>
+            <a:r>
+              <a:t>    </a:t>
+            </a:r>
+            <a:br/>
+            <a:r>
+              <a:t>    &lt;joint name="lidar_joint" type="fixed"&gt;</a:t>
+            </a:r>
+            <a:br/>
+            <a:r>
+              <a:t>      &lt;parent&gt;base_link&lt;/parent&gt;</a:t>
+            </a:r>
+            <a:br/>
+            <a:r>
+              <a:t>      &lt;child&gt;lidar_link&lt;/child&gt;</a:t>
+            </a:r>
+            <a:br/>
+            <a:r>
+              <a:t>    &lt;/joint&gt;</a:t>
+            </a:r>
+            <a:br/>
+            <a:r>
+              <a:t>    </a:t>
+            </a:r>
+            <a:br/>
+            <a:r>
+              <a:t>    </a:t>
+            </a:r>
+            <a:br/>
+            <a:r>
+              <a:t>    &lt;link name="camera_link"&gt;</a:t>
+            </a:r>
+            <a:br/>
+            <a:r>
+              <a:t>      &lt;pose relative_to="base_link"&gt;0.30 0 0.10 0 0 0&lt;/pose&gt;</a:t>
+            </a:r>
+            <a:br/>
+            <a:r>
+              <a:t>      &lt;visual name="housing"&gt;</a:t>
             </a:r>
           </a:p>
         </p:txBody>
@@ -17626,7 +17717,7 @@
               </a:defRPr>
             </a:pPr>
             <a:r>
-              <a:t>파일 전체 21/24 · 이 슬라이드 다음에 같은 파일의 나머지 줄이 이어집니다.</a:t>
+              <a:t>파일 전체 20/24 · 이 슬라이드 다음에 같은 파일의 나머지 줄이 이어집니다.</a:t>
             </a:r>
           </a:p>
         </p:txBody>
@@ -18102,7 +18193,7 @@
               </a:defRPr>
             </a:pPr>
             <a:r>
-              <a:t>파일을 계속 작성하고 저장한다 (22/24)</a:t>
+              <a:t>파일을 계속 작성하고 저장한다 (21/24)</a:t>
             </a:r>
           </a:p>
         </p:txBody>
@@ -18277,7 +18368,7 @@
               </a:defRPr>
             </a:pPr>
             <a:r>
-              <a:t>현재 단계 24/27    |    현재 폴더 ~/ros2_curri/agv_ws    |    현재 터미널</a:t>
+              <a:t>현재 단계 23/27    |    현재 폴더 ~/ros2_curri/agv_ws    |    현재 터미널</a:t>
             </a:r>
           </a:p>
         </p:txBody>
@@ -18436,51 +18527,51 @@
               </a:defRPr>
             </a:pPr>
             <a:r>
-              <a:t>          &lt;image&gt;</a:t>
-            </a:r>
-            <a:br/>
-            <a:r>
-              <a:t>            &lt;width&gt;640&lt;/width&gt;</a:t>
-            </a:r>
-            <a:br/>
-            <a:r>
-              <a:t>            &lt;height&gt;480&lt;/height&gt;</a:t>
-            </a:r>
-            <a:br/>
-            <a:r>
-              <a:t>            &lt;format&gt;R8G8B8&lt;/format&gt;</a:t>
-            </a:r>
-            <a:br/>
-            <a:r>
-              <a:t>          &lt;/image&gt;</a:t>
-            </a:r>
-            <a:br/>
-            <a:r>
-              <a:t>          &lt;clip&gt;</a:t>
-            </a:r>
-            <a:br/>
-            <a:r>
-              <a:t>            &lt;near&gt;0.1&lt;/near&gt;</a:t>
-            </a:r>
-            <a:br/>
-            <a:r>
-              <a:t>            &lt;far&gt;20&lt;/far&gt;</a:t>
-            </a:r>
-            <a:br/>
-            <a:r>
-              <a:t>          &lt;/clip&gt;</a:t>
-            </a:r>
-            <a:br/>
-            <a:r>
-              <a:t>        &lt;/camera&gt;</a:t>
-            </a:r>
-            <a:br/>
-            <a:r>
-              <a:t>      &lt;/sensor&gt;</a:t>
-            </a:r>
-            <a:br/>
-            <a:r>
-              <a:t>    &lt;/link&gt;</a:t>
+              <a:t>        &lt;geometry&gt;</a:t>
+            </a:r>
+            <a:br/>
+            <a:r>
+              <a:t>          &lt;box&gt;</a:t>
+            </a:r>
+            <a:br/>
+            <a:r>
+              <a:t>            &lt;size&gt;0.05 0.08 0.05&lt;/size&gt;</a:t>
+            </a:r>
+            <a:br/>
+            <a:r>
+              <a:t>          &lt;/box&gt;</a:t>
+            </a:r>
+            <a:br/>
+            <a:r>
+              <a:t>        &lt;/geometry&gt;</a:t>
+            </a:r>
+            <a:br/>
+            <a:r>
+              <a:t>      &lt;/visual&gt;</a:t>
+            </a:r>
+            <a:br/>
+            <a:r>
+              <a:t>      &lt;sensor name="camera" type="camera"&gt;</a:t>
+            </a:r>
+            <a:br/>
+            <a:r>
+              <a:t>        &lt;topic&gt;/camera/image_raw&lt;/topic&gt;</a:t>
+            </a:r>
+            <a:br/>
+            <a:r>
+              <a:t>        &lt;always_on&gt;true&lt;/always_on&gt;</a:t>
+            </a:r>
+            <a:br/>
+            <a:r>
+              <a:t>        &lt;update_rate&gt;15&lt;/update_rate&gt;</a:t>
+            </a:r>
+            <a:br/>
+            <a:r>
+              <a:t>        &lt;camera&gt;</a:t>
+            </a:r>
+            <a:br/>
+            <a:r>
+              <a:t>          &lt;horizontal_fov&gt;1.047&lt;/horizontal_fov&gt;</a:t>
             </a:r>
           </a:p>
         </p:txBody>
@@ -18519,7 +18610,7 @@
               </a:defRPr>
             </a:pPr>
             <a:r>
-              <a:t>파일 전체 22/24 · 이 슬라이드 다음에 같은 파일의 나머지 줄이 이어집니다.</a:t>
+              <a:t>파일 전체 21/24 · 이 슬라이드 다음에 같은 파일의 나머지 줄이 이어집니다.</a:t>
             </a:r>
           </a:p>
         </p:txBody>
@@ -18576,7 +18667,7 @@
               </a:defRPr>
             </a:pPr>
             <a:r>
-              <a:t>파일을 계속 작성하고 저장한다 (23/24)</a:t>
+              <a:t>파일을 계속 작성하고 저장한다 (22/24)</a:t>
             </a:r>
           </a:p>
         </p:txBody>
@@ -18751,7 +18842,7 @@
               </a:defRPr>
             </a:pPr>
             <a:r>
-              <a:t>현재 단계 25/27    |    현재 폴더 ~/ros2_curri/agv_ws    |    현재 터미널</a:t>
+              <a:t>현재 단계 24/27    |    현재 폴더 ~/ros2_curri/agv_ws    |    현재 터미널</a:t>
             </a:r>
           </a:p>
         </p:txBody>
@@ -18910,51 +19001,51 @@
               </a:defRPr>
             </a:pPr>
             <a:r>
-              <a:t>    </a:t>
-            </a:r>
-            <a:br/>
-            <a:r>
-              <a:t>    </a:t>
-            </a:r>
-            <a:br/>
-            <a:r>
-              <a:t>    &lt;joint name="camera_joint" type="fixed"&gt;</a:t>
-            </a:r>
-            <a:br/>
-            <a:r>
-              <a:t>      &lt;parent&gt;base_link&lt;/parent&gt;</a:t>
-            </a:r>
-            <a:br/>
-            <a:r>
-              <a:t>      &lt;child&gt;camera_link&lt;/child&gt;</a:t>
-            </a:r>
-            <a:br/>
-            <a:r>
-              <a:t>    &lt;/joint&gt;</a:t>
-            </a:r>
-            <a:br/>
-            <a:r>
-              <a:t>    </a:t>
-            </a:r>
-            <a:br/>
-            <a:r>
-              <a:t>    </a:t>
-            </a:r>
-            <a:br/>
-            <a:r>
-              <a:t>    &lt;plugin filename="gz-sim-diff-drive-system" name="gz::sim::systems::DiffDrive"&gt;</a:t>
-            </a:r>
-            <a:br/>
-            <a:r>
-              <a:t>      &lt;left_joint&gt;left_wheel_joint&lt;/left_joint&gt;</a:t>
-            </a:r>
-            <a:br/>
-            <a:r>
-              <a:t>      &lt;right_joint&gt;right_wheel_joint&lt;/right_joint&gt;</a:t>
-            </a:r>
-            <a:br/>
-            <a:r>
-              <a:t>      &lt;wheel_separation&gt;0.38&lt;/wheel_separation&gt;</a:t>
+              <a:t>          &lt;image&gt;</a:t>
+            </a:r>
+            <a:br/>
+            <a:r>
+              <a:t>            &lt;width&gt;640&lt;/width&gt;</a:t>
+            </a:r>
+            <a:br/>
+            <a:r>
+              <a:t>            &lt;height&gt;480&lt;/height&gt;</a:t>
+            </a:r>
+            <a:br/>
+            <a:r>
+              <a:t>            &lt;format&gt;R8G8B8&lt;/format&gt;</a:t>
+            </a:r>
+            <a:br/>
+            <a:r>
+              <a:t>          &lt;/image&gt;</a:t>
+            </a:r>
+            <a:br/>
+            <a:r>
+              <a:t>          &lt;clip&gt;</a:t>
+            </a:r>
+            <a:br/>
+            <a:r>
+              <a:t>            &lt;near&gt;0.1&lt;/near&gt;</a:t>
+            </a:r>
+            <a:br/>
+            <a:r>
+              <a:t>            &lt;far&gt;20&lt;/far&gt;</a:t>
+            </a:r>
+            <a:br/>
+            <a:r>
+              <a:t>          &lt;/clip&gt;</a:t>
+            </a:r>
+            <a:br/>
+            <a:r>
+              <a:t>        &lt;/camera&gt;</a:t>
+            </a:r>
+            <a:br/>
+            <a:r>
+              <a:t>      &lt;/sensor&gt;</a:t>
+            </a:r>
+            <a:br/>
+            <a:r>
+              <a:t>    &lt;/link&gt;</a:t>
             </a:r>
           </a:p>
         </p:txBody>
@@ -18993,7 +19084,7 @@
               </a:defRPr>
             </a:pPr>
             <a:r>
-              <a:t>파일 전체 23/24 · 이 슬라이드 다음에 같은 파일의 나머지 줄이 이어집니다.</a:t>
+              <a:t>파일 전체 22/24 · 이 슬라이드 다음에 같은 파일의 나머지 줄이 이어집니다.</a:t>
             </a:r>
           </a:p>
         </p:txBody>
@@ -19050,7 +19141,7 @@
               </a:defRPr>
             </a:pPr>
             <a:r>
-              <a:t>파일을 계속 작성하고 저장한다 (24/24)</a:t>
+              <a:t>파일을 계속 작성하고 저장한다 (23/24)</a:t>
             </a:r>
           </a:p>
         </p:txBody>
@@ -19225,7 +19316,7 @@
               </a:defRPr>
             </a:pPr>
             <a:r>
-              <a:t>현재 단계 26/27    |    현재 폴더 ~/ros2_curri/agv_ws    |    현재 터미널</a:t>
+              <a:t>현재 단계 25/27    |    현재 폴더 ~/ros2_curri/agv_ws    |    현재 터미널</a:t>
             </a:r>
           </a:p>
         </p:txBody>
@@ -19384,48 +19475,51 @@
               </a:defRPr>
             </a:pPr>
             <a:r>
-              <a:t>      &lt;wheel_radius&gt;0.08&lt;/wheel_radius&gt;</a:t>
-            </a:r>
-            <a:br/>
-            <a:r>
-              <a:t>      &lt;topic&gt;/cmd_vel&lt;/topic&gt;</a:t>
-            </a:r>
-            <a:br/>
-            <a:r>
-              <a:t>      &lt;odom_topic&gt;/odom&lt;/odom_topic&gt;</a:t>
-            </a:r>
-            <a:br/>
-            <a:r>
-              <a:t>      &lt;frame_id&gt;odom&lt;/frame_id&gt;</a:t>
-            </a:r>
-            <a:br/>
-            <a:r>
-              <a:t>      &lt;child_frame_id&gt;base_link&lt;/child_frame_id&gt;</a:t>
-            </a:r>
-            <a:br/>
-            <a:r>
-              <a:t>    &lt;/plugin&gt;</a:t>
-            </a:r>
-            <a:br/>
-            <a:r>
               <a:t>    </a:t>
             </a:r>
             <a:br/>
             <a:r>
-              <a:t>  </a:t>
-            </a:r>
-            <a:br/>
-            <a:r>
-              <a:t>  &lt;/model&gt;</a:t>
-            </a:r>
-            <a:br/>
-            <a:r>
-              <a:t>  </a:t>
-            </a:r>
-            <a:br/>
-            <a:br/>
-            <a:r>
-              <a:t>&lt;/sdf&gt;</a:t>
+              <a:t>    </a:t>
+            </a:r>
+            <a:br/>
+            <a:r>
+              <a:t>    &lt;joint name="camera_joint" type="fixed"&gt;</a:t>
+            </a:r>
+            <a:br/>
+            <a:r>
+              <a:t>      &lt;parent&gt;base_link&lt;/parent&gt;</a:t>
+            </a:r>
+            <a:br/>
+            <a:r>
+              <a:t>      &lt;child&gt;camera_link&lt;/child&gt;</a:t>
+            </a:r>
+            <a:br/>
+            <a:r>
+              <a:t>    &lt;/joint&gt;</a:t>
+            </a:r>
+            <a:br/>
+            <a:r>
+              <a:t>    </a:t>
+            </a:r>
+            <a:br/>
+            <a:r>
+              <a:t>    </a:t>
+            </a:r>
+            <a:br/>
+            <a:r>
+              <a:t>    &lt;plugin filename="gz-sim-diff-drive-system" name="gz::sim::systems::DiffDrive"&gt;</a:t>
+            </a:r>
+            <a:br/>
+            <a:r>
+              <a:t>      &lt;left_joint&gt;left_wheel_joint&lt;/left_joint&gt;</a:t>
+            </a:r>
+            <a:br/>
+            <a:r>
+              <a:t>      &lt;right_joint&gt;right_wheel_joint&lt;/right_joint&gt;</a:t>
+            </a:r>
+            <a:br/>
+            <a:r>
+              <a:t>      &lt;wheel_separation&gt;0.38&lt;/wheel_separation&gt;</a:t>
             </a:r>
           </a:p>
         </p:txBody>
@@ -19464,7 +19558,7 @@
               </a:defRPr>
             </a:pPr>
             <a:r>
-              <a:t>파일 전체 24/24 · 이 슬라이드 다음에 같은 파일의 나머지 줄이 이어집니다.</a:t>
+              <a:t>파일 전체 23/24 · 이 슬라이드 다음에 같은 파일의 나머지 줄이 이어집니다.</a:t>
             </a:r>
           </a:p>
         </p:txBody>
@@ -19521,7 +19615,7 @@
               </a:defRPr>
             </a:pPr>
             <a:r>
-              <a:t>파일을 새로 만들고 저장한다 (1/3)</a:t>
+              <a:t>파일을 계속 작성하고 저장한다 (24/24)</a:t>
             </a:r>
           </a:p>
         </p:txBody>
@@ -19560,7 +19654,7 @@
               </a:defRPr>
             </a:pPr>
             <a:r>
-              <a:t>~/ros2_curri/agv_ws/src/agv_control/agv_control/cmd_test_node.py</a:t>
+              <a:t>~/ros2_curri/agv_ws/src/agv_gazebo/models/agv/model.sdf</a:t>
             </a:r>
           </a:p>
         </p:txBody>
@@ -19696,7 +19790,7 @@
               </a:defRPr>
             </a:pPr>
             <a:r>
-              <a:t>현재 단계 27/30    |    현재 폴더 ~/ros2_curri/agv_ws    |    현재 터미널</a:t>
+              <a:t>현재 단계 26/27    |    현재 폴더 ~/ros2_curri/agv_ws    |    현재 터미널</a:t>
             </a:r>
           </a:p>
         </p:txBody>
@@ -19793,11 +19887,11 @@
               </a:defRPr>
             </a:pPr>
             <a:r>
-              <a:t>파일 생성: mkdir -p ~/ros2_curri/agv_ws/src/agv_control/agv_control</a:t>
-            </a:r>
-            <a:br/>
-            <a:r>
-              <a:t>파일 열기: nano ~/ros2_curri/agv_ws/src/agv_control/agv_control/cmd_test_node.py</a:t>
+              <a:t>파일 생성: mkdir -p ~/ros2_curri/agv_ws/src/agv_gazebo/models/agv</a:t>
+            </a:r>
+            <a:br/>
+            <a:r>
+              <a:t>파일 열기: nano ~/ros2_curri/agv_ws/src/agv_gazebo/models/agv/model.sdf</a:t>
             </a:r>
           </a:p>
         </p:txBody>
@@ -19855,45 +19949,48 @@
               </a:defRPr>
             </a:pPr>
             <a:r>
-              <a:t>import rclpy</a:t>
-            </a:r>
-            <a:br/>
-            <a:r>
-              <a:t>from rclpy.node import Node</a:t>
-            </a:r>
-            <a:br/>
-            <a:r>
-              <a:t>from geometry_msgs.msg import Twist</a:t>
-            </a:r>
-            <a:br/>
-            <a:br/>
-            <a:r>
-              <a:t>class CmdTestNode(Node):</a:t>
-            </a:r>
-            <a:br/>
-            <a:br/>
-            <a:r>
-              <a:t>    def __init__(self):</a:t>
-            </a:r>
-            <a:br/>
-            <a:r>
-              <a:t>        super().__init__('cmd_test_node')</a:t>
-            </a:r>
-            <a:br/>
-            <a:r>
-              <a:t>        self.declare_parameter('linear_speed', 0.15)</a:t>
-            </a:r>
-            <a:br/>
-            <a:r>
-              <a:t>        self.declare_parameter('angular_speed', 0.0)</a:t>
-            </a:r>
-            <a:br/>
-            <a:r>
-              <a:t>        self.publisher = self.create_publisher(Twist, '/cmd_vel', 10)</a:t>
-            </a:r>
-            <a:br/>
-            <a:r>
-              <a:t>        self.remaining = 30</a:t>
+              <a:t>      &lt;wheel_radius&gt;0.08&lt;/wheel_radius&gt;</a:t>
+            </a:r>
+            <a:br/>
+            <a:r>
+              <a:t>      &lt;topic&gt;/cmd_vel&lt;/topic&gt;</a:t>
+            </a:r>
+            <a:br/>
+            <a:r>
+              <a:t>      &lt;odom_topic&gt;/odom&lt;/odom_topic&gt;</a:t>
+            </a:r>
+            <a:br/>
+            <a:r>
+              <a:t>      &lt;frame_id&gt;odom&lt;/frame_id&gt;</a:t>
+            </a:r>
+            <a:br/>
+            <a:r>
+              <a:t>      &lt;child_frame_id&gt;base_link&lt;/child_frame_id&gt;</a:t>
+            </a:r>
+            <a:br/>
+            <a:r>
+              <a:t>    &lt;/plugin&gt;</a:t>
+            </a:r>
+            <a:br/>
+            <a:r>
+              <a:t>    </a:t>
+            </a:r>
+            <a:br/>
+            <a:r>
+              <a:t>  </a:t>
+            </a:r>
+            <a:br/>
+            <a:r>
+              <a:t>  &lt;/model&gt;</a:t>
+            </a:r>
+            <a:br/>
+            <a:r>
+              <a:t>  </a:t>
+            </a:r>
+            <a:br/>
+            <a:br/>
+            <a:r>
+              <a:t>&lt;/sdf&gt;</a:t>
             </a:r>
           </a:p>
         </p:txBody>
@@ -19932,7 +20029,7 @@
               </a:defRPr>
             </a:pPr>
             <a:r>
-              <a:t>파일 전체 1/3 · 이 슬라이드 다음에 같은 파일의 나머지 줄이 이어집니다.</a:t>
+              <a:t>파일 전체 24/24 · 이 슬라이드 다음에 같은 파일의 나머지 줄이 이어집니다.</a:t>
             </a:r>
           </a:p>
         </p:txBody>
@@ -19989,7 +20086,7 @@
               </a:defRPr>
             </a:pPr>
             <a:r>
-              <a:t>파일을 계속 작성하고 저장한다 (2/3)</a:t>
+              <a:t>파일을 새로 만들고 저장한다 (1/3)</a:t>
             </a:r>
           </a:p>
         </p:txBody>
@@ -20164,7 +20261,7 @@
               </a:defRPr>
             </a:pPr>
             <a:r>
-              <a:t>현재 단계 28/30    |    현재 폴더 ~/ros2_curri/agv_ws    |    현재 터미널</a:t>
+              <a:t>현재 단계 27/30    |    현재 폴더 ~/ros2_curri/agv_ws    |    현재 터미널</a:t>
             </a:r>
           </a:p>
         </p:txBody>
@@ -20323,48 +20420,45 @@
               </a:defRPr>
             </a:pPr>
             <a:r>
-              <a:t>        self.create_timer(0.1, self.publish_once)</a:t>
-            </a:r>
-            <a:br/>
-            <a:br/>
-            <a:r>
-              <a:t>    def publish_once(self):</a:t>
-            </a:r>
-            <a:br/>
-            <a:r>
-              <a:t>        command = Twist()</a:t>
-            </a:r>
-            <a:br/>
-            <a:r>
-              <a:t>        if self.remaining &gt; 0:</a:t>
-            </a:r>
-            <a:br/>
-            <a:r>
-              <a:t>            command.linear.x = self.get_parameter('linear_speed').value</a:t>
-            </a:r>
-            <a:br/>
-            <a:r>
-              <a:t>            command.angular.z = self.get_parameter('angular_speed').value</a:t>
-            </a:r>
-            <a:br/>
-            <a:r>
-              <a:t>            self.remaining -= 1</a:t>
-            </a:r>
-            <a:br/>
-            <a:r>
-              <a:t>        self.publisher.publish(command)</a:t>
-            </a:r>
-            <a:br/>
-            <a:r>
-              <a:t>        if self.remaining == 0:</a:t>
-            </a:r>
-            <a:br/>
-            <a:r>
-              <a:t>            self.get_logger().info('test command finished; publishing zero Twist')</a:t>
-            </a:r>
-            <a:br/>
-            <a:r>
-              <a:t>            self.remaining = -1</a:t>
+              <a:t>import rclpy</a:t>
+            </a:r>
+            <a:br/>
+            <a:r>
+              <a:t>from rclpy.node import Node</a:t>
+            </a:r>
+            <a:br/>
+            <a:r>
+              <a:t>from geometry_msgs.msg import Twist</a:t>
+            </a:r>
+            <a:br/>
+            <a:br/>
+            <a:r>
+              <a:t>class CmdTestNode(Node):</a:t>
+            </a:r>
+            <a:br/>
+            <a:br/>
+            <a:r>
+              <a:t>    def __init__(self):</a:t>
+            </a:r>
+            <a:br/>
+            <a:r>
+              <a:t>        super().__init__('cmd_test_node')</a:t>
+            </a:r>
+            <a:br/>
+            <a:r>
+              <a:t>        self.declare_parameter('linear_speed', 0.15)</a:t>
+            </a:r>
+            <a:br/>
+            <a:r>
+              <a:t>        self.declare_parameter('angular_speed', 0.0)</a:t>
+            </a:r>
+            <a:br/>
+            <a:r>
+              <a:t>        self.publisher = self.create_publisher(Twist, '/cmd_vel', 10)</a:t>
+            </a:r>
+            <a:br/>
+            <a:r>
+              <a:t>        self.remaining = 30</a:t>
             </a:r>
           </a:p>
         </p:txBody>
@@ -20403,7 +20497,7 @@
               </a:defRPr>
             </a:pPr>
             <a:r>
-              <a:t>파일 전체 2/3 · 이 슬라이드 다음에 같은 파일의 나머지 줄이 이어집니다.</a:t>
+              <a:t>파일 전체 1/3 · 이 슬라이드 다음에 같은 파일의 나머지 줄이 이어집니다.</a:t>
             </a:r>
           </a:p>
         </p:txBody>
@@ -20460,7 +20554,7 @@
               </a:defRPr>
             </a:pPr>
             <a:r>
-              <a:t>파일을 계속 작성하고 저장한다 (3/3)</a:t>
+              <a:t>파일을 계속 작성하고 저장한다 (2/3)</a:t>
             </a:r>
           </a:p>
         </p:txBody>
@@ -20635,7 +20729,7 @@
               </a:defRPr>
             </a:pPr>
             <a:r>
-              <a:t>현재 단계 29/30    |    현재 폴더 ~/ros2_curri/agv_ws    |    현재 터미널</a:t>
+              <a:t>현재 단계 28/30    |    현재 폴더 ~/ros2_curri/agv_ws    |    현재 터미널</a:t>
             </a:r>
           </a:p>
         </p:txBody>
@@ -20793,49 +20887,49 @@
                 <a:latin typeface="DejaVu Sans Mono"/>
               </a:defRPr>
             </a:pPr>
-            <a:br/>
-            <a:r>
-              <a:t>def main():</a:t>
-            </a:r>
-            <a:br/>
-            <a:r>
-              <a:t>    rclpy.init()</a:t>
-            </a:r>
-            <a:br/>
-            <a:r>
-              <a:t>    node = CmdTestNode()</a:t>
-            </a:r>
-            <a:br/>
-            <a:r>
-              <a:t>    try:</a:t>
-            </a:r>
-            <a:br/>
-            <a:r>
-              <a:t>        rclpy.spin(node)</a:t>
-            </a:r>
-            <a:br/>
-            <a:r>
-              <a:t>    except KeyboardInterrupt:</a:t>
-            </a:r>
-            <a:br/>
-            <a:r>
-              <a:t>        pass</a:t>
-            </a:r>
-            <a:br/>
-            <a:r>
-              <a:t>    finally:</a:t>
-            </a:r>
-            <a:br/>
-            <a:r>
-              <a:t>        node.destroy_node()</a:t>
-            </a:r>
-            <a:br/>
-            <a:r>
-              <a:t>        if rclpy.ok():</a:t>
-            </a:r>
-            <a:br/>
-            <a:r>
-              <a:t>            rclpy.shutdown()</a:t>
+            <a:r>
+              <a:t>        self.create_timer(0.1, self.publish_once)</a:t>
+            </a:r>
+            <a:br/>
+            <a:br/>
+            <a:r>
+              <a:t>    def publish_once(self):</a:t>
+            </a:r>
+            <a:br/>
+            <a:r>
+              <a:t>        command = Twist()</a:t>
+            </a:r>
+            <a:br/>
+            <a:r>
+              <a:t>        if self.remaining &gt; 0:</a:t>
+            </a:r>
+            <a:br/>
+            <a:r>
+              <a:t>            command.linear.x = self.get_parameter('linear_speed').value</a:t>
+            </a:r>
+            <a:br/>
+            <a:r>
+              <a:t>            command.angular.z = self.get_parameter('angular_speed').value</a:t>
+            </a:r>
+            <a:br/>
+            <a:r>
+              <a:t>            self.remaining -= 1</a:t>
+            </a:r>
+            <a:br/>
+            <a:r>
+              <a:t>        self.publisher.publish(command)</a:t>
+            </a:r>
+            <a:br/>
+            <a:r>
+              <a:t>        if self.remaining == 0:</a:t>
+            </a:r>
+            <a:br/>
+            <a:r>
+              <a:t>            self.get_logger().info('test command finished; publishing zero Twist')</a:t>
+            </a:r>
+            <a:br/>
+            <a:r>
+              <a:t>            self.remaining = -1</a:t>
             </a:r>
           </a:p>
         </p:txBody>
@@ -20874,7 +20968,7 @@
               </a:defRPr>
             </a:pPr>
             <a:r>
-              <a:t>파일 전체 3/3 · 이 슬라이드 다음에 같은 파일의 나머지 줄이 이어집니다.</a:t>
+              <a:t>파일 전체 2/3 · 이 슬라이드 다음에 같은 파일의 나머지 줄이 이어집니다.</a:t>
             </a:r>
           </a:p>
         </p:txBody>
@@ -20931,7 +21025,7 @@
               </a:defRPr>
             </a:pPr>
             <a:r>
-              <a:t>build → source → run 순서로 실행한다</a:t>
+              <a:t>파일을 계속 작성하고 저장한다 (3/3)</a:t>
             </a:r>
           </a:p>
         </p:txBody>
@@ -20970,7 +21064,7 @@
               </a:defRPr>
             </a:pPr>
             <a:r>
-              <a:t>새 파일 또는 수정 파일은 build와 source 뒤에만 실행 이름·설정에 반영됩니다.</a:t>
+              <a:t>~/ros2_curri/agv_ws/src/agv_control/agv_control/cmd_test_node.py</a:t>
             </a:r>
           </a:p>
         </p:txBody>
@@ -21106,23 +21200,124 @@
               </a:defRPr>
             </a:pPr>
             <a:r>
-              <a:t>현재 단계 실행    |    현재 폴더 ~/ros2_curri/agv_ws    |    현재 터미널</a:t>
-            </a:r>
-          </a:p>
-        </p:txBody>
-      </p:sp>
-      <p:sp>
-        <p:nvSpPr>
-          <p:cNvPr id="7" name="Rounded Rectangle 6"/>
+              <a:t>현재 단계 29/30    |    현재 폴더 ~/ros2_curri/agv_ws    |    현재 터미널</a:t>
+            </a:r>
+          </a:p>
+        </p:txBody>
+      </p:sp>
+      <p:sp>
+        <p:nvSpPr>
+          <p:cNvPr id="7" name="TextBox 6"/>
+          <p:cNvSpPr txBox="1"/>
+          <p:nvPr/>
+        </p:nvSpPr>
+        <p:spPr>
+          <a:xfrm>
+            <a:off x="658368" y="1627632"/>
+            <a:ext cx="10972800" cy="256032"/>
+          </a:xfrm>
+          <a:prstGeom prst="rect">
+            <a:avLst/>
+          </a:prstGeom>
+          <a:noFill/>
+        </p:spPr>
+        <p:txBody>
+          <a:bodyPr wrap="square" lIns="73152" rIns="73152" tIns="36576" bIns="36576">
+            <a:spAutoFit/>
+          </a:bodyPr>
+          <a:lstStyle/>
+          <a:p>
+            <a:pPr algn="l">
+              <a:spcAft>
+                <a:spcPts val="0"/>
+              </a:spcAft>
+              <a:defRPr sz="1500" b="1">
+                <a:solidFill>
+                  <a:srgbClr val="122C4E"/>
+                </a:solidFill>
+                <a:latin typeface="Noto Sans CJK KR"/>
+              </a:defRPr>
+            </a:pPr>
+            <a:r>
+              <a:t>이번 단계: 파일의 전체 내용을 중간 생략 없이 작성합니다. 아래 줄 범위를 끝까지 입력하세요.</a:t>
+            </a:r>
+          </a:p>
+        </p:txBody>
+      </p:sp>
+      <p:sp>
+        <p:nvSpPr>
+          <p:cNvPr id="8" name="Rectangle 7"/>
           <p:cNvSpPr/>
           <p:nvPr/>
         </p:nvSpPr>
         <p:spPr>
           <a:xfrm>
-            <a:off x="658368" y="1700784"/>
-            <a:ext cx="10972800" cy="3182112"/>
-          </a:xfrm>
-          <a:prstGeom prst="roundRect">
+            <a:off x="658368" y="1956816"/>
+            <a:ext cx="10972800" cy="603504"/>
+          </a:xfrm>
+          <a:prstGeom prst="rect">
+            <a:avLst/>
+          </a:prstGeom>
+          <a:solidFill>
+            <a:srgbClr val="F4F7FB"/>
+          </a:solidFill>
+          <a:ln>
+            <a:solidFill>
+              <a:srgbClr val="F4F7FB"/>
+            </a:solidFill>
+          </a:ln>
+        </p:spPr>
+        <p:style>
+          <a:lnRef idx="1">
+            <a:schemeClr val="accent1"/>
+          </a:lnRef>
+          <a:fillRef idx="3">
+            <a:schemeClr val="accent1"/>
+          </a:fillRef>
+          <a:effectRef idx="2">
+            <a:schemeClr val="accent1"/>
+          </a:effectRef>
+          <a:fontRef idx="minor">
+            <a:schemeClr val="lt1"/>
+          </a:fontRef>
+        </p:style>
+        <p:txBody>
+          <a:bodyPr rtlCol="0" anchor="ctr" wrap="square" lIns="73152" rIns="73152" tIns="36576" bIns="36576"/>
+          <a:lstStyle/>
+          <a:p>
+            <a:pPr algn="l">
+              <a:spcAft>
+                <a:spcPts val="0"/>
+              </a:spcAft>
+              <a:defRPr sz="1400" b="0">
+                <a:solidFill>
+                  <a:srgbClr val="122C4E"/>
+                </a:solidFill>
+                <a:latin typeface="DejaVu Sans Mono"/>
+              </a:defRPr>
+            </a:pPr>
+            <a:r>
+              <a:t>파일 생성: mkdir -p ~/ros2_curri/agv_ws/src/agv_control/agv_control</a:t>
+            </a:r>
+            <a:br/>
+            <a:r>
+              <a:t>파일 열기: nano ~/ros2_curri/agv_ws/src/agv_control/agv_control/cmd_test_node.py</a:t>
+            </a:r>
+          </a:p>
+        </p:txBody>
+      </p:sp>
+      <p:sp>
+        <p:nvSpPr>
+          <p:cNvPr id="9" name="Rectangle 8"/>
+          <p:cNvSpPr/>
+          <p:nvPr/>
+        </p:nvSpPr>
+        <p:spPr>
+          <a:xfrm>
+            <a:off x="658368" y="2706624"/>
+            <a:ext cx="10972800" cy="3364992"/>
+          </a:xfrm>
+          <a:prstGeom prst="rect">
             <a:avLst/>
           </a:prstGeom>
           <a:solidFill>
@@ -21149,40 +21344,77 @@
           </a:fontRef>
         </p:style>
         <p:txBody>
-          <a:bodyPr rtlCol="0" anchor="ctr" wrap="square" lIns="73152" rIns="73152" tIns="36576" bIns="36576"/>
-          <a:lstStyle/>
-          <a:p>
-            <a:pPr algn="l">
-              <a:spcAft>
-                <a:spcPts val="0"/>
-              </a:spcAft>
-              <a:defRPr sz="1600" b="0">
+          <a:bodyPr rtlCol="0" anchor="ctr" wrap="square" lIns="164592" rIns="164592" tIns="109728" bIns="36576"/>
+          <a:lstStyle/>
+          <a:p>
+            <a:pPr algn="l">
+              <a:spcAft>
+                <a:spcPts val="0"/>
+              </a:spcAft>
+              <a:defRPr sz="1400" b="0">
                 <a:solidFill>
                   <a:srgbClr val="FFFFFF"/>
                 </a:solidFill>
                 <a:latin typeface="DejaVu Sans Mono"/>
               </a:defRPr>
             </a:pPr>
-            <a:r>
-              <a:t>ros2 launch agv_gazebo gazebo.launch.py</a:t>
-            </a:r>
-            <a:br/>
-            <a:r>
-              <a:t># 새 터미널: ros2 run agv_control cmd_test_node</a:t>
-            </a:r>
-          </a:p>
-        </p:txBody>
-      </p:sp>
-      <p:sp>
-        <p:nvSpPr>
-          <p:cNvPr id="8" name="TextBox 7"/>
+            <a:br/>
+            <a:r>
+              <a:t>def main():</a:t>
+            </a:r>
+            <a:br/>
+            <a:r>
+              <a:t>    rclpy.init()</a:t>
+            </a:r>
+            <a:br/>
+            <a:r>
+              <a:t>    node = CmdTestNode()</a:t>
+            </a:r>
+            <a:br/>
+            <a:r>
+              <a:t>    try:</a:t>
+            </a:r>
+            <a:br/>
+            <a:r>
+              <a:t>        rclpy.spin(node)</a:t>
+            </a:r>
+            <a:br/>
+            <a:r>
+              <a:t>    except KeyboardInterrupt:</a:t>
+            </a:r>
+            <a:br/>
+            <a:r>
+              <a:t>        pass</a:t>
+            </a:r>
+            <a:br/>
+            <a:r>
+              <a:t>    finally:</a:t>
+            </a:r>
+            <a:br/>
+            <a:r>
+              <a:t>        node.destroy_node()</a:t>
+            </a:r>
+            <a:br/>
+            <a:r>
+              <a:t>        if rclpy.ok():</a:t>
+            </a:r>
+            <a:br/>
+            <a:r>
+              <a:t>            rclpy.shutdown()</a:t>
+            </a:r>
+          </a:p>
+        </p:txBody>
+      </p:sp>
+      <p:sp>
+        <p:nvSpPr>
+          <p:cNvPr id="10" name="TextBox 9"/>
           <p:cNvSpPr txBox="1"/>
           <p:nvPr/>
         </p:nvSpPr>
         <p:spPr>
           <a:xfrm>
-            <a:off x="786384" y="5239512"/>
-            <a:ext cx="1261872" cy="237744"/>
+            <a:off x="749808" y="6181344"/>
+            <a:ext cx="10789920" cy="201168"/>
           </a:xfrm>
           <a:prstGeom prst="rect">
             <a:avLst/>
@@ -21199,54 +21431,15 @@
               <a:spcAft>
                 <a:spcPts val="0"/>
               </a:spcAft>
-              <a:defRPr sz="1800" b="1">
-                <a:solidFill>
-                  <a:srgbClr val="2A8B5A"/>
-                </a:solidFill>
-                <a:latin typeface="Noto Sans CJK KR"/>
-              </a:defRPr>
-            </a:pPr>
-            <a:r>
-              <a:t>확인 기준</a:t>
-            </a:r>
-          </a:p>
-        </p:txBody>
-      </p:sp>
-      <p:sp>
-        <p:nvSpPr>
-          <p:cNvPr id="9" name="TextBox 8"/>
-          <p:cNvSpPr txBox="1"/>
-          <p:nvPr/>
-        </p:nvSpPr>
-        <p:spPr>
-          <a:xfrm>
-            <a:off x="786384" y="5532120"/>
-            <a:ext cx="10469880" cy="420624"/>
-          </a:xfrm>
-          <a:prstGeom prst="rect">
-            <a:avLst/>
-          </a:prstGeom>
-          <a:noFill/>
-        </p:spPr>
-        <p:txBody>
-          <a:bodyPr wrap="square" lIns="73152" rIns="73152" tIns="36576" bIns="36576">
-            <a:spAutoFit/>
-          </a:bodyPr>
-          <a:lstStyle/>
-          <a:p>
-            <a:pPr algn="l">
-              <a:spcAft>
-                <a:spcPts val="0"/>
-              </a:spcAft>
-              <a:defRPr sz="1800" b="0">
-                <a:solidFill>
-                  <a:srgbClr val="122C4E"/>
-                </a:solidFill>
-                <a:latin typeface="Noto Sans CJK KR"/>
-              </a:defRPr>
-            </a:pPr>
-            <a:r>
-              <a:t>/cmd_vel에서 odom과 바퀴 구동 topic으로 이어지는 경로를 확인한다.</a:t>
+              <a:defRPr sz="1000" b="0">
+                <a:solidFill>
+                  <a:srgbClr val="5C6672"/>
+                </a:solidFill>
+                <a:latin typeface="Noto Sans CJK KR"/>
+              </a:defRPr>
+            </a:pPr>
+            <a:r>
+              <a:t>파일 전체 3/3 · 이 슬라이드 다음에 같은 파일의 나머지 줄이 이어집니다.</a:t>
             </a:r>
           </a:p>
         </p:txBody>
@@ -21303,7 +21496,7 @@
               </a:defRPr>
             </a:pPr>
             <a:r>
-              <a:t>정상 결과: 실제 환경에서 확인한 출력</a:t>
+              <a:t>build → source → run 순서로 실행한다</a:t>
             </a:r>
           </a:p>
         </p:txBody>
@@ -21342,7 +21535,7 @@
               </a:defRPr>
             </a:pPr>
             <a:r>
-              <a:t>실제 ROS 2 환경의 파일·패키지·구성 검증 로그</a:t>
+              <a:t>새 파일 또는 수정 파일은 build와 source 뒤에만 실행 이름·설정에 반영됩니다.</a:t>
             </a:r>
           </a:p>
         </p:txBody>
@@ -21425,40 +21618,136 @@
           </a:p>
         </p:txBody>
       </p:sp>
-      <p:pic>
-        <p:nvPicPr>
-          <p:cNvPr id="6" name="Picture 5" descr="validation_terminal.png"/>
-          <p:cNvPicPr>
-            <a:picLocks noChangeAspect="1"/>
-          </p:cNvPicPr>
-          <p:nvPr/>
-        </p:nvPicPr>
-        <p:blipFill>
-          <a:blip r:embed="rId2"/>
-          <a:stretch>
-            <a:fillRect/>
-          </a:stretch>
-        </p:blipFill>
-        <p:spPr>
-          <a:xfrm>
-            <a:off x="790956" y="1884338"/>
-            <a:ext cx="10607040" cy="3738546"/>
-          </a:xfrm>
-          <a:prstGeom prst="rect">
-            <a:avLst/>
-          </a:prstGeom>
-        </p:spPr>
-      </p:pic>
-      <p:sp>
-        <p:nvSpPr>
-          <p:cNvPr id="7" name="TextBox 6"/>
+      <p:sp>
+        <p:nvSpPr>
+          <p:cNvPr id="6" name="Rectangle 5"/>
+          <p:cNvSpPr/>
+          <p:nvPr/>
+        </p:nvSpPr>
+        <p:spPr>
+          <a:xfrm>
+            <a:off x="566928" y="1188720"/>
+            <a:ext cx="11064240" cy="347472"/>
+          </a:xfrm>
+          <a:prstGeom prst="rect">
+            <a:avLst/>
+          </a:prstGeom>
+          <a:solidFill>
+            <a:srgbClr val="F4F7FB"/>
+          </a:solidFill>
+          <a:ln>
+            <a:solidFill>
+              <a:srgbClr val="F4F7FB"/>
+            </a:solidFill>
+          </a:ln>
+        </p:spPr>
+        <p:style>
+          <a:lnRef idx="1">
+            <a:schemeClr val="accent1"/>
+          </a:lnRef>
+          <a:fillRef idx="3">
+            <a:schemeClr val="accent1"/>
+          </a:fillRef>
+          <a:effectRef idx="2">
+            <a:schemeClr val="accent1"/>
+          </a:effectRef>
+          <a:fontRef idx="minor">
+            <a:schemeClr val="lt1"/>
+          </a:fontRef>
+        </p:style>
+        <p:txBody>
+          <a:bodyPr rtlCol="0" anchor="ctr" wrap="square" lIns="73152" rIns="73152" tIns="36576" bIns="36576"/>
+          <a:lstStyle/>
+          <a:p>
+            <a:pPr algn="l">
+              <a:spcAft>
+                <a:spcPts val="0"/>
+              </a:spcAft>
+              <a:defRPr sz="1300" b="1">
+                <a:solidFill>
+                  <a:srgbClr val="122C4E"/>
+                </a:solidFill>
+                <a:latin typeface="Noto Sans CJK KR"/>
+              </a:defRPr>
+            </a:pPr>
+            <a:r>
+              <a:t>현재 단계 실행    |    현재 폴더 ~/ros2_curri/agv_ws    |    현재 터미널</a:t>
+            </a:r>
+          </a:p>
+        </p:txBody>
+      </p:sp>
+      <p:sp>
+        <p:nvSpPr>
+          <p:cNvPr id="7" name="Rounded Rectangle 6"/>
+          <p:cNvSpPr/>
+          <p:nvPr/>
+        </p:nvSpPr>
+        <p:spPr>
+          <a:xfrm>
+            <a:off x="658368" y="1700784"/>
+            <a:ext cx="10972800" cy="3182112"/>
+          </a:xfrm>
+          <a:prstGeom prst="roundRect">
+            <a:avLst/>
+          </a:prstGeom>
+          <a:solidFill>
+            <a:srgbClr val="1D232D"/>
+          </a:solidFill>
+          <a:ln>
+            <a:solidFill>
+              <a:srgbClr val="1D232D"/>
+            </a:solidFill>
+          </a:ln>
+        </p:spPr>
+        <p:style>
+          <a:lnRef idx="1">
+            <a:schemeClr val="accent1"/>
+          </a:lnRef>
+          <a:fillRef idx="3">
+            <a:schemeClr val="accent1"/>
+          </a:fillRef>
+          <a:effectRef idx="2">
+            <a:schemeClr val="accent1"/>
+          </a:effectRef>
+          <a:fontRef idx="minor">
+            <a:schemeClr val="lt1"/>
+          </a:fontRef>
+        </p:style>
+        <p:txBody>
+          <a:bodyPr rtlCol="0" anchor="ctr" wrap="square" lIns="73152" rIns="73152" tIns="36576" bIns="36576"/>
+          <a:lstStyle/>
+          <a:p>
+            <a:pPr algn="l">
+              <a:spcAft>
+                <a:spcPts val="0"/>
+              </a:spcAft>
+              <a:defRPr sz="1600" b="0">
+                <a:solidFill>
+                  <a:srgbClr val="FFFFFF"/>
+                </a:solidFill>
+                <a:latin typeface="DejaVu Sans Mono"/>
+              </a:defRPr>
+            </a:pPr>
+            <a:r>
+              <a:t>ros2 launch agv_gazebo gazebo.launch.py</a:t>
+            </a:r>
+            <a:br/>
+            <a:r>
+              <a:t># 새 터미널: ros2 run agv_control cmd_test_node</a:t>
+            </a:r>
+          </a:p>
+        </p:txBody>
+      </p:sp>
+      <p:sp>
+        <p:nvSpPr>
+          <p:cNvPr id="8" name="TextBox 7"/>
           <p:cNvSpPr txBox="1"/>
           <p:nvPr/>
         </p:nvSpPr>
         <p:spPr>
           <a:xfrm>
-            <a:off x="777240" y="6217920"/>
-            <a:ext cx="10607040" cy="182880"/>
+            <a:off x="786384" y="5239512"/>
+            <a:ext cx="1261872" cy="237744"/>
           </a:xfrm>
           <a:prstGeom prst="rect">
             <a:avLst/>
@@ -21471,11 +21760,11 @@
           </a:bodyPr>
           <a:lstStyle/>
           <a:p>
-            <a:pPr algn="ctr">
-              <a:spcAft>
-                <a:spcPts val="0"/>
-              </a:spcAft>
-              <a:defRPr sz="1100" b="1">
+            <a:pPr algn="l">
+              <a:spcAft>
+                <a:spcPts val="0"/>
+              </a:spcAft>
+              <a:defRPr sz="1800" b="1">
                 <a:solidFill>
                   <a:srgbClr val="2A8B5A"/>
                 </a:solidFill>
@@ -21483,7 +21772,46 @@
               </a:defRPr>
             </a:pPr>
             <a:r>
-              <a:t>① 명령/설정  ② 정상 출력 또는 화면  ③ 다음 검증 명령으로 재확인</a:t>
+              <a:t>확인 기준</a:t>
+            </a:r>
+          </a:p>
+        </p:txBody>
+      </p:sp>
+      <p:sp>
+        <p:nvSpPr>
+          <p:cNvPr id="9" name="TextBox 8"/>
+          <p:cNvSpPr txBox="1"/>
+          <p:nvPr/>
+        </p:nvSpPr>
+        <p:spPr>
+          <a:xfrm>
+            <a:off x="786384" y="5532120"/>
+            <a:ext cx="10469880" cy="420624"/>
+          </a:xfrm>
+          <a:prstGeom prst="rect">
+            <a:avLst/>
+          </a:prstGeom>
+          <a:noFill/>
+        </p:spPr>
+        <p:txBody>
+          <a:bodyPr wrap="square" lIns="73152" rIns="73152" tIns="36576" bIns="36576">
+            <a:spAutoFit/>
+          </a:bodyPr>
+          <a:lstStyle/>
+          <a:p>
+            <a:pPr algn="l">
+              <a:spcAft>
+                <a:spcPts val="0"/>
+              </a:spcAft>
+              <a:defRPr sz="1800" b="0">
+                <a:solidFill>
+                  <a:srgbClr val="122C4E"/>
+                </a:solidFill>
+                <a:latin typeface="Noto Sans CJK KR"/>
+              </a:defRPr>
+            </a:pPr>
+            <a:r>
+              <a:t>/cmd_vel에서 odom과 바퀴 구동 topic으로 이어지는 경로를 확인한다.</a:t>
             </a:r>
           </a:p>
         </p:txBody>
@@ -21579,7 +21907,7 @@
               </a:defRPr>
             </a:pPr>
             <a:r>
-              <a:t>실제 Gazebo Sim: World 안의 AGV와 장애물·목표물 배치</a:t>
+              <a:t>실제 ROS 2 환경의 파일·패키지·구성 검증 로그</a:t>
             </a:r>
           </a:p>
         </p:txBody>
@@ -21664,7 +21992,7 @@
       </p:sp>
       <p:pic>
         <p:nvPicPr>
-          <p:cNvPr id="6" name="Picture 5" descr="01_gazebo_drive_actual.png"/>
+          <p:cNvPr id="6" name="Picture 5" descr="validation_terminal.png"/>
           <p:cNvPicPr>
             <a:picLocks noChangeAspect="1"/>
           </p:cNvPicPr>
@@ -21678,8 +22006,8 @@
         </p:blipFill>
         <p:spPr>
           <a:xfrm>
-            <a:off x="3253884" y="1353312"/>
-            <a:ext cx="5681183" cy="4800600"/>
+            <a:off x="790956" y="1884338"/>
+            <a:ext cx="10607040" cy="3738546"/>
           </a:xfrm>
           <a:prstGeom prst="rect">
             <a:avLst/>
@@ -21694,8 +22022,8 @@
         </p:nvSpPr>
         <p:spPr>
           <a:xfrm>
-            <a:off x="777240" y="6217920"/>
-            <a:ext cx="10607040" cy="182880"/>
+            <a:off x="777240" y="6144768"/>
+            <a:ext cx="10607040" cy="310896"/>
           </a:xfrm>
           <a:prstGeom prst="rect">
             <a:avLst/>
@@ -21720,7 +22048,7 @@
               </a:defRPr>
             </a:pPr>
             <a:r>
-              <a:t>① 명령/설정  ② 정상 출력 또는 화면  ③ 다음 검증 명령으로 재확인</a:t>
+              <a:t>화면에서 확인: ① 명령/설정  ② 정상 출력 또는 화면  ③ 다음 검증 명령으로 재확인</a:t>
             </a:r>
           </a:p>
         </p:txBody>
@@ -21777,7 +22105,7 @@
               </a:defRPr>
             </a:pPr>
             <a:r>
-              <a:t>객관적 검증 명령으로 완료를 확인한다</a:t>
+              <a:t>정상 결과: 실제 환경에서 확인한 출력</a:t>
             </a:r>
           </a:p>
         </p:txBody>
@@ -21816,7 +22144,7 @@
               </a:defRPr>
             </a:pPr>
             <a:r>
-              <a:t>화면만 보지 말고 topic·frame·파일·parameter를 다시 확인합니다.</a:t>
+              <a:t>실제 Gazebo Sim: World 안의 AGV와 장애물·목표물 배치</a:t>
             </a:r>
           </a:p>
         </p:txBody>
@@ -21899,206 +22227,40 @@
           </a:p>
         </p:txBody>
       </p:sp>
-      <p:sp>
-        <p:nvSpPr>
-          <p:cNvPr id="6" name="Rectangle 5"/>
-          <p:cNvSpPr/>
-          <p:nvPr/>
-        </p:nvSpPr>
-        <p:spPr>
-          <a:xfrm>
-            <a:off x="566928" y="1188720"/>
-            <a:ext cx="11064240" cy="347472"/>
-          </a:xfrm>
-          <a:prstGeom prst="rect">
-            <a:avLst/>
-          </a:prstGeom>
-          <a:solidFill>
-            <a:srgbClr val="F4F7FB"/>
-          </a:solidFill>
-          <a:ln>
-            <a:solidFill>
-              <a:srgbClr val="F4F7FB"/>
-            </a:solidFill>
-          </a:ln>
-        </p:spPr>
-        <p:style>
-          <a:lnRef idx="1">
-            <a:schemeClr val="accent1"/>
-          </a:lnRef>
-          <a:fillRef idx="3">
-            <a:schemeClr val="accent1"/>
-          </a:fillRef>
-          <a:effectRef idx="2">
-            <a:schemeClr val="accent1"/>
-          </a:effectRef>
-          <a:fontRef idx="minor">
-            <a:schemeClr val="lt1"/>
-          </a:fontRef>
-        </p:style>
-        <p:txBody>
-          <a:bodyPr rtlCol="0" anchor="ctr" wrap="square" lIns="73152" rIns="73152" tIns="36576" bIns="36576"/>
-          <a:lstStyle/>
-          <a:p>
-            <a:pPr algn="l">
-              <a:spcAft>
-                <a:spcPts val="0"/>
-              </a:spcAft>
-              <a:defRPr sz="1300" b="1">
-                <a:solidFill>
-                  <a:srgbClr val="122C4E"/>
-                </a:solidFill>
-                <a:latin typeface="Noto Sans CJK KR"/>
-              </a:defRPr>
-            </a:pPr>
-            <a:r>
-              <a:t>현재 단계 검증    |    현재 폴더 ~/ros2_curri/agv_ws    |    현재 터미널</a:t>
-            </a:r>
-          </a:p>
-        </p:txBody>
-      </p:sp>
-      <p:sp>
-        <p:nvSpPr>
-          <p:cNvPr id="7" name="Rounded Rectangle 6"/>
-          <p:cNvSpPr/>
-          <p:nvPr/>
-        </p:nvSpPr>
-        <p:spPr>
-          <a:xfrm>
-            <a:off x="658368" y="1755648"/>
-            <a:ext cx="10972800" cy="2148840"/>
-          </a:xfrm>
-          <a:prstGeom prst="roundRect">
-            <a:avLst/>
-          </a:prstGeom>
-          <a:solidFill>
-            <a:srgbClr val="1D232D"/>
-          </a:solidFill>
-          <a:ln>
-            <a:solidFill>
-              <a:srgbClr val="1D232D"/>
-            </a:solidFill>
-          </a:ln>
-        </p:spPr>
-        <p:style>
-          <a:lnRef idx="1">
-            <a:schemeClr val="accent1"/>
-          </a:lnRef>
-          <a:fillRef idx="3">
-            <a:schemeClr val="accent1"/>
-          </a:fillRef>
-          <a:effectRef idx="2">
-            <a:schemeClr val="accent1"/>
-          </a:effectRef>
-          <a:fontRef idx="minor">
-            <a:schemeClr val="lt1"/>
-          </a:fontRef>
-        </p:style>
-        <p:txBody>
-          <a:bodyPr rtlCol="0" anchor="ctr" wrap="square" lIns="73152" rIns="73152" tIns="36576" bIns="36576"/>
-          <a:lstStyle/>
-          <a:p>
-            <a:pPr algn="l">
-              <a:spcAft>
-                <a:spcPts val="0"/>
-              </a:spcAft>
-              <a:defRPr sz="1600" b="0">
-                <a:solidFill>
-                  <a:srgbClr val="FFFFFF"/>
-                </a:solidFill>
-                <a:latin typeface="DejaVu Sans Mono"/>
-              </a:defRPr>
-            </a:pPr>
-            <a:r>
-              <a:t>ros2 topic info /cmd_vel</a:t>
-            </a:r>
-            <a:br/>
-            <a:r>
-              <a:t>ros2 topic echo /odom --once</a:t>
-            </a:r>
-          </a:p>
-        </p:txBody>
-      </p:sp>
-      <p:sp>
-        <p:nvSpPr>
-          <p:cNvPr id="8" name="Rounded Rectangle 7"/>
-          <p:cNvSpPr/>
-          <p:nvPr/>
-        </p:nvSpPr>
-        <p:spPr>
-          <a:xfrm>
-            <a:off x="658368" y="4206240"/>
-            <a:ext cx="10972800" cy="1554480"/>
-          </a:xfrm>
-          <a:prstGeom prst="roundRect">
-            <a:avLst/>
-          </a:prstGeom>
-          <a:solidFill>
-            <a:srgbClr val="F4F7FB"/>
-          </a:solidFill>
-          <a:ln>
-            <a:solidFill>
-              <a:srgbClr val="D1DFD5"/>
-            </a:solidFill>
-          </a:ln>
-        </p:spPr>
-        <p:style>
-          <a:lnRef idx="1">
-            <a:schemeClr val="accent1"/>
-          </a:lnRef>
-          <a:fillRef idx="3">
-            <a:schemeClr val="accent1"/>
-          </a:fillRef>
-          <a:effectRef idx="2">
-            <a:schemeClr val="accent1"/>
-          </a:effectRef>
-          <a:fontRef idx="minor">
-            <a:schemeClr val="lt1"/>
-          </a:fontRef>
-        </p:style>
-        <p:txBody>
-          <a:bodyPr rtlCol="0" anchor="ctr" wrap="square" lIns="73152" rIns="73152" tIns="36576" bIns="36576"/>
-          <a:lstStyle/>
-          <a:p>
-            <a:pPr algn="l">
-              <a:spcAft>
-                <a:spcPts val="0"/>
-              </a:spcAft>
-              <a:defRPr sz="1800" b="1">
-                <a:solidFill>
-                  <a:srgbClr val="2A8B5A"/>
-                </a:solidFill>
-                <a:latin typeface="Noto Sans CJK KR"/>
-              </a:defRPr>
-            </a:pPr>
-            <a:r>
-              <a:t>완료 체크</a:t>
-            </a:r>
-            <a:br/>
-            <a:r>
-              <a:t>□ 명령이 오류 없이 실행된다.</a:t>
-            </a:r>
-            <a:br/>
-            <a:r>
-              <a:t>□ 기대한 파일·topic·frame·parameter 이름이 보인다.</a:t>
-            </a:r>
-            <a:br/>
-            <a:r>
-              <a:t>□ 값의 단위와 방향을 한 문장으로 설명할 수 있다.</a:t>
-            </a:r>
-          </a:p>
-        </p:txBody>
-      </p:sp>
-      <p:sp>
-        <p:nvSpPr>
-          <p:cNvPr id="9" name="TextBox 8"/>
+      <p:pic>
+        <p:nvPicPr>
+          <p:cNvPr id="6" name="Picture 5" descr="01_gazebo_drive_actual.png"/>
+          <p:cNvPicPr>
+            <a:picLocks noChangeAspect="1"/>
+          </p:cNvPicPr>
+          <p:nvPr/>
+        </p:nvPicPr>
+        <p:blipFill>
+          <a:blip r:embed="rId2"/>
+          <a:stretch>
+            <a:fillRect/>
+          </a:stretch>
+        </p:blipFill>
+        <p:spPr>
+          <a:xfrm>
+            <a:off x="3253884" y="1353312"/>
+            <a:ext cx="5681183" cy="4800600"/>
+          </a:xfrm>
+          <a:prstGeom prst="rect">
+            <a:avLst/>
+          </a:prstGeom>
+        </p:spPr>
+      </p:pic>
+      <p:sp>
+        <p:nvSpPr>
+          <p:cNvPr id="7" name="TextBox 6"/>
           <p:cNvSpPr txBox="1"/>
           <p:nvPr/>
         </p:nvSpPr>
         <p:spPr>
           <a:xfrm>
-            <a:off x="731520" y="5989320"/>
-            <a:ext cx="10789920" cy="237744"/>
+            <a:off x="777240" y="6144768"/>
+            <a:ext cx="10607040" cy="310896"/>
           </a:xfrm>
           <a:prstGeom prst="rect">
             <a:avLst/>
@@ -22111,19 +22273,19 @@
           </a:bodyPr>
           <a:lstStyle/>
           <a:p>
-            <a:pPr algn="l">
-              <a:spcAft>
-                <a:spcPts val="0"/>
-              </a:spcAft>
-              <a:defRPr sz="1500" b="1">
-                <a:solidFill>
-                  <a:srgbClr val="122C4E"/>
-                </a:solidFill>
-                <a:latin typeface="Noto Sans CJK KR"/>
-              </a:defRPr>
-            </a:pPr>
-            <a:r>
-              <a:t>완료 조건: /cmd_vel에서 odom과 바퀴 구동 topic으로 이어지는 경로를 확인한다.</a:t>
+            <a:pPr algn="ctr">
+              <a:spcAft>
+                <a:spcPts val="0"/>
+              </a:spcAft>
+              <a:defRPr sz="1100" b="1">
+                <a:solidFill>
+                  <a:srgbClr val="2A8B5A"/>
+                </a:solidFill>
+                <a:latin typeface="Noto Sans CJK KR"/>
+              </a:defRPr>
+            </a:pPr>
+            <a:r>
+              <a:t>화면에서 확인: 명령·설정과 화면의 topic·frame·결과 이름을 대조합니다.</a:t>
             </a:r>
           </a:p>
         </p:txBody>
@@ -22513,7 +22675,7 @@
               </a:defRPr>
             </a:pPr>
             <a:r>
-              <a:t>막히면: 증상 → 우선 확인 → 재검증</a:t>
+              <a:t>객관적 검증 명령으로 완료를 확인한다</a:t>
             </a:r>
           </a:p>
         </p:txBody>
@@ -22552,7 +22714,7 @@
               </a:defRPr>
             </a:pPr>
             <a:r>
-              <a:t>오류 메시지를 숨기지 않고 같은 순서로 점검합니다.</a:t>
+              <a:t>화면만 보지 말고 topic·frame·파일·parameter를 다시 확인합니다.</a:t>
             </a:r>
           </a:p>
         </p:txBody>
@@ -22688,7 +22850,7 @@
               </a:defRPr>
             </a:pPr>
             <a:r>
-              <a:t>현재 단계 오류 대응    |    현재 폴더 ~/ros2_curri/agv_ws    |    현재 터미널</a:t>
+              <a:t>현재 단계 검증    |    현재 폴더 ~/ros2_curri/agv_ws    |    현재 터미널</a:t>
             </a:r>
           </a:p>
         </p:txBody>
@@ -22701,18 +22863,18 @@
         </p:nvSpPr>
         <p:spPr>
           <a:xfrm>
-            <a:off x="694944" y="1755648"/>
-            <a:ext cx="10972800" cy="1115568"/>
+            <a:off x="658368" y="1755648"/>
+            <a:ext cx="10972800" cy="2148840"/>
           </a:xfrm>
           <a:prstGeom prst="roundRect">
             <a:avLst/>
           </a:prstGeom>
           <a:solidFill>
-            <a:srgbClr val="FFF7F4"/>
+            <a:srgbClr val="1D232D"/>
           </a:solidFill>
           <a:ln>
             <a:solidFill>
-              <a:srgbClr val="EDBEB4"/>
+              <a:srgbClr val="1D232D"/>
             </a:solidFill>
           </a:ln>
         </p:spPr>
@@ -22731,72 +22893,7 @@
           </a:fontRef>
         </p:style>
         <p:txBody>
-          <a:bodyPr rtlCol="0" anchor="ctr"/>
-          <a:lstStyle/>
-          <a:p>
-            <a:pPr algn="ctr"/>
-          </a:p>
-        </p:txBody>
-      </p:sp>
-      <p:sp>
-        <p:nvSpPr>
-          <p:cNvPr id="8" name="TextBox 7"/>
-          <p:cNvSpPr txBox="1"/>
-          <p:nvPr/>
-        </p:nvSpPr>
-        <p:spPr>
-          <a:xfrm>
-            <a:off x="896112" y="1901952"/>
-            <a:ext cx="2926080" cy="274320"/>
-          </a:xfrm>
-          <a:prstGeom prst="rect">
-            <a:avLst/>
-          </a:prstGeom>
-          <a:noFill/>
-        </p:spPr>
-        <p:txBody>
-          <a:bodyPr wrap="square" lIns="73152" rIns="73152" tIns="36576" bIns="36576">
-            <a:spAutoFit/>
-          </a:bodyPr>
-          <a:lstStyle/>
-          <a:p>
-            <a:pPr algn="l">
-              <a:spcAft>
-                <a:spcPts val="0"/>
-              </a:spcAft>
-              <a:defRPr sz="1800" b="1">
-                <a:solidFill>
-                  <a:srgbClr val="BE3B3B"/>
-                </a:solidFill>
-                <a:latin typeface="Noto Sans CJK KR"/>
-              </a:defRPr>
-            </a:pPr>
-            <a:r>
-              <a:t>증상 1: 바퀴는 도는데 이동 안 함</a:t>
-            </a:r>
-          </a:p>
-        </p:txBody>
-      </p:sp>
-      <p:sp>
-        <p:nvSpPr>
-          <p:cNvPr id="9" name="TextBox 8"/>
-          <p:cNvSpPr txBox="1"/>
-          <p:nvPr/>
-        </p:nvSpPr>
-        <p:spPr>
-          <a:xfrm>
-            <a:off x="3794760" y="1883664"/>
-            <a:ext cx="7543800" cy="621792"/>
-          </a:xfrm>
-          <a:prstGeom prst="rect">
-            <a:avLst/>
-          </a:prstGeom>
-          <a:noFill/>
-        </p:spPr>
-        <p:txBody>
-          <a:bodyPr wrap="square" lIns="73152" rIns="73152" tIns="36576" bIns="36576">
-            <a:spAutoFit/>
-          </a:bodyPr>
+          <a:bodyPr rtlCol="0" anchor="ctr" wrap="square" lIns="73152" rIns="73152" tIns="36576" bIns="36576"/>
           <a:lstStyle/>
           <a:p>
             <a:pPr algn="l">
@@ -22805,41 +22902,41 @@
               </a:spcAft>
               <a:defRPr sz="1600" b="0">
                 <a:solidFill>
-                  <a:srgbClr val="122C4E"/>
-                </a:solidFill>
-                <a:latin typeface="Noto Sans CJK KR"/>
-              </a:defRPr>
-            </a:pPr>
-            <a:r>
-              <a:t>우선 확인: joint axis·friction·contact·wheel radius를 확인한다.</a:t>
-            </a:r>
-            <a:br/>
-            <a:r>
-              <a:t>수정 후: ros2 topic info /cmd_vel</a:t>
-            </a:r>
-          </a:p>
-        </p:txBody>
-      </p:sp>
-      <p:sp>
-        <p:nvSpPr>
-          <p:cNvPr id="10" name="Rounded Rectangle 9"/>
+                  <a:srgbClr val="FFFFFF"/>
+                </a:solidFill>
+                <a:latin typeface="DejaVu Sans Mono"/>
+              </a:defRPr>
+            </a:pPr>
+            <a:r>
+              <a:t>ros2 topic info /cmd_vel</a:t>
+            </a:r>
+            <a:br/>
+            <a:r>
+              <a:t>ros2 topic echo /odom --once</a:t>
+            </a:r>
+          </a:p>
+        </p:txBody>
+      </p:sp>
+      <p:sp>
+        <p:nvSpPr>
+          <p:cNvPr id="8" name="Rounded Rectangle 7"/>
           <p:cNvSpPr/>
           <p:nvPr/>
         </p:nvSpPr>
         <p:spPr>
           <a:xfrm>
-            <a:off x="694944" y="3172968"/>
-            <a:ext cx="10972800" cy="1115568"/>
+            <a:off x="658368" y="4206240"/>
+            <a:ext cx="10972800" cy="1554480"/>
           </a:xfrm>
           <a:prstGeom prst="roundRect">
             <a:avLst/>
           </a:prstGeom>
           <a:solidFill>
-            <a:srgbClr val="FFF7F4"/>
+            <a:srgbClr val="F4F7FB"/>
           </a:solidFill>
           <a:ln>
             <a:solidFill>
-              <a:srgbClr val="EDBEB4"/>
+              <a:srgbClr val="D1DFD5"/>
             </a:solidFill>
           </a:ln>
         </p:spPr>
@@ -22858,23 +22955,48 @@
           </a:fontRef>
         </p:style>
         <p:txBody>
-          <a:bodyPr rtlCol="0" anchor="ctr"/>
-          <a:lstStyle/>
-          <a:p>
-            <a:pPr algn="ctr"/>
-          </a:p>
-        </p:txBody>
-      </p:sp>
-      <p:sp>
-        <p:nvSpPr>
-          <p:cNvPr id="11" name="TextBox 10"/>
+          <a:bodyPr rtlCol="0" anchor="ctr" wrap="square" lIns="73152" rIns="73152" tIns="36576" bIns="36576"/>
+          <a:lstStyle/>
+          <a:p>
+            <a:pPr algn="l">
+              <a:spcAft>
+                <a:spcPts val="0"/>
+              </a:spcAft>
+              <a:defRPr sz="1800" b="1">
+                <a:solidFill>
+                  <a:srgbClr val="2A8B5A"/>
+                </a:solidFill>
+                <a:latin typeface="Noto Sans CJK KR"/>
+              </a:defRPr>
+            </a:pPr>
+            <a:r>
+              <a:t>완료 체크</a:t>
+            </a:r>
+            <a:br/>
+            <a:r>
+              <a:t>□ 명령이 오류 없이 실행된다.</a:t>
+            </a:r>
+            <a:br/>
+            <a:r>
+              <a:t>□ 기대한 파일·topic·frame·parameter 이름이 보인다.</a:t>
+            </a:r>
+            <a:br/>
+            <a:r>
+              <a:t>□ 값의 단위와 방향을 한 문장으로 설명할 수 있다.</a:t>
+            </a:r>
+          </a:p>
+        </p:txBody>
+      </p:sp>
+      <p:sp>
+        <p:nvSpPr>
+          <p:cNvPr id="9" name="TextBox 8"/>
           <p:cNvSpPr txBox="1"/>
           <p:nvPr/>
         </p:nvSpPr>
         <p:spPr>
           <a:xfrm>
-            <a:off x="896112" y="3319272"/>
-            <a:ext cx="2926080" cy="274320"/>
+            <a:off x="731520" y="5989320"/>
+            <a:ext cx="10789920" cy="237744"/>
           </a:xfrm>
           <a:prstGeom prst="rect">
             <a:avLst/>
@@ -22891,46 +23013,7 @@
               <a:spcAft>
                 <a:spcPts val="0"/>
               </a:spcAft>
-              <a:defRPr sz="1800" b="1">
-                <a:solidFill>
-                  <a:srgbClr val="BE3B3B"/>
-                </a:solidFill>
-                <a:latin typeface="Noto Sans CJK KR"/>
-              </a:defRPr>
-            </a:pPr>
-            <a:r>
-              <a:t>증상 2: 회전 방향이 반대</a:t>
-            </a:r>
-          </a:p>
-        </p:txBody>
-      </p:sp>
-      <p:sp>
-        <p:nvSpPr>
-          <p:cNvPr id="12" name="TextBox 11"/>
-          <p:cNvSpPr txBox="1"/>
-          <p:nvPr/>
-        </p:nvSpPr>
-        <p:spPr>
-          <a:xfrm>
-            <a:off x="3794760" y="3300984"/>
-            <a:ext cx="7543800" cy="621792"/>
-          </a:xfrm>
-          <a:prstGeom prst="rect">
-            <a:avLst/>
-          </a:prstGeom>
-          <a:noFill/>
-        </p:spPr>
-        <p:txBody>
-          <a:bodyPr wrap="square" lIns="73152" rIns="73152" tIns="36576" bIns="36576">
-            <a:spAutoFit/>
-          </a:bodyPr>
-          <a:lstStyle/>
-          <a:p>
-            <a:pPr algn="l">
-              <a:spcAft>
-                <a:spcPts val="0"/>
-              </a:spcAft>
-              <a:defRPr sz="1600" b="0">
+              <a:defRPr sz="1500" b="1">
                 <a:solidFill>
                   <a:srgbClr val="122C4E"/>
                 </a:solidFill>
@@ -22938,50 +23021,7 @@
               </a:defRPr>
             </a:pPr>
             <a:r>
-              <a:t>우선 확인: left/right joint와 angular.z 부호를 확인한다.</a:t>
-            </a:r>
-            <a:br/>
-            <a:r>
-              <a:t>수정 후: ros2 topic info /cmd_vel</a:t>
-            </a:r>
-          </a:p>
-        </p:txBody>
-      </p:sp>
-      <p:sp>
-        <p:nvSpPr>
-          <p:cNvPr id="13" name="TextBox 12"/>
-          <p:cNvSpPr txBox="1"/>
-          <p:nvPr/>
-        </p:nvSpPr>
-        <p:spPr>
-          <a:xfrm>
-            <a:off x="822960" y="5102352"/>
-            <a:ext cx="10607040" cy="402336"/>
-          </a:xfrm>
-          <a:prstGeom prst="rect">
-            <a:avLst/>
-          </a:prstGeom>
-          <a:noFill/>
-        </p:spPr>
-        <p:txBody>
-          <a:bodyPr wrap="square" lIns="73152" rIns="73152" tIns="36576" bIns="36576">
-            <a:spAutoFit/>
-          </a:bodyPr>
-          <a:lstStyle/>
-          <a:p>
-            <a:pPr algn="ctr">
-              <a:spcAft>
-                <a:spcPts val="0"/>
-              </a:spcAft>
-              <a:defRPr sz="1800" b="1">
-                <a:solidFill>
-                  <a:srgbClr val="DB7E22"/>
-                </a:solidFill>
-                <a:latin typeface="Noto Sans CJK KR"/>
-              </a:defRPr>
-            </a:pPr>
-            <a:r>
-              <a:t>공통 순서: ① 현재 폴더 ② source ③ 파일 경로 ④ 이름/타입/단위 ⑤ build·source 후 재실행</a:t>
+              <a:t>완료 조건: /cmd_vel에서 odom과 바퀴 구동 topic으로 이어지는 경로를 확인한다.</a:t>
             </a:r>
           </a:p>
         </p:txBody>
@@ -23038,7 +23078,7 @@
               </a:defRPr>
             </a:pPr>
             <a:r>
-              <a:t>미니 실습: 값 하나를 바꾸고 결과를 비교한다</a:t>
+              <a:t>막히면: 증상 → 우선 확인 → 재검증</a:t>
             </a:r>
           </a:p>
         </p:txBody>
@@ -23077,7 +23117,7 @@
               </a:defRPr>
             </a:pPr>
             <a:r>
-              <a:t>정상 결과를 만든 뒤에는 한 번에 하나의 값만 바꿉니다.</a:t>
+              <a:t>오류 메시지를 숨기지 않고 같은 순서로 점검합니다.</a:t>
             </a:r>
           </a:p>
         </p:txBody>
@@ -23213,7 +23253,7 @@
               </a:defRPr>
             </a:pPr>
             <a:r>
-              <a:t>현재 단계 미니 실습    |    현재 폴더 ~/ros2_curri/agv_ws    |    현재 터미널</a:t>
+              <a:t>현재 단계 오류 대응    |    현재 폴더 ~/ros2_curri/agv_ws    |    현재 터미널</a:t>
             </a:r>
           </a:p>
         </p:txBody>
@@ -23226,18 +23266,18 @@
         </p:nvSpPr>
         <p:spPr>
           <a:xfrm>
-            <a:off x="749808" y="1874519"/>
-            <a:ext cx="10652760" cy="1993392"/>
+            <a:off x="694944" y="1755648"/>
+            <a:ext cx="10972800" cy="1115568"/>
           </a:xfrm>
           <a:prstGeom prst="roundRect">
             <a:avLst/>
           </a:prstGeom>
           <a:solidFill>
-            <a:srgbClr val="FFF8EB"/>
+            <a:srgbClr val="FFF7F4"/>
           </a:solidFill>
           <a:ln>
             <a:solidFill>
-              <a:srgbClr val="ECC680"/>
+              <a:srgbClr val="EDBEB4"/>
             </a:solidFill>
           </a:ln>
         </p:spPr>
@@ -23256,23 +23296,10 @@
           </a:fontRef>
         </p:style>
         <p:txBody>
-          <a:bodyPr rtlCol="0" anchor="ctr" wrap="square" lIns="73152" rIns="73152" tIns="36576" bIns="36576"/>
-          <a:lstStyle/>
-          <a:p>
-            <a:pPr algn="ctr">
-              <a:spcAft>
-                <a:spcPts val="0"/>
-              </a:spcAft>
-              <a:defRPr sz="2300" b="1">
-                <a:solidFill>
-                  <a:srgbClr val="122C4E"/>
-                </a:solidFill>
-                <a:latin typeface="Noto Sans CJK KR"/>
-              </a:defRPr>
-            </a:pPr>
-            <a:r>
-              <a:t>0.15 m/s 직진, 0.4 rad/s 회전, 둘 다 비영 값인 곡선을 각각 2초씩 시험해 경로를 비교한다.</a:t>
-            </a:r>
+          <a:bodyPr rtlCol="0" anchor="ctr"/>
+          <a:lstStyle/>
+          <a:p>
+            <a:pPr algn="ctr"/>
           </a:p>
         </p:txBody>
       </p:sp>
@@ -23284,8 +23311,8 @@
         </p:nvSpPr>
         <p:spPr>
           <a:xfrm>
-            <a:off x="877824" y="4590288"/>
-            <a:ext cx="10241280" cy="594360"/>
+            <a:off x="896112" y="1901952"/>
+            <a:ext cx="2926080" cy="274320"/>
           </a:xfrm>
           <a:prstGeom prst="rect">
             <a:avLst/>
@@ -23298,11 +23325,220 @@
           </a:bodyPr>
           <a:lstStyle/>
           <a:p>
+            <a:pPr algn="l">
+              <a:spcAft>
+                <a:spcPts val="0"/>
+              </a:spcAft>
+              <a:defRPr sz="1800" b="1">
+                <a:solidFill>
+                  <a:srgbClr val="BE3B3B"/>
+                </a:solidFill>
+                <a:latin typeface="Noto Sans CJK KR"/>
+              </a:defRPr>
+            </a:pPr>
+            <a:r>
+              <a:t>증상 1: 바퀴는 도는데 이동 안 함</a:t>
+            </a:r>
+          </a:p>
+        </p:txBody>
+      </p:sp>
+      <p:sp>
+        <p:nvSpPr>
+          <p:cNvPr id="9" name="TextBox 8"/>
+          <p:cNvSpPr txBox="1"/>
+          <p:nvPr/>
+        </p:nvSpPr>
+        <p:spPr>
+          <a:xfrm>
+            <a:off x="3794760" y="1883664"/>
+            <a:ext cx="7543800" cy="621792"/>
+          </a:xfrm>
+          <a:prstGeom prst="rect">
+            <a:avLst/>
+          </a:prstGeom>
+          <a:noFill/>
+        </p:spPr>
+        <p:txBody>
+          <a:bodyPr wrap="square" lIns="73152" rIns="73152" tIns="36576" bIns="36576">
+            <a:spAutoFit/>
+          </a:bodyPr>
+          <a:lstStyle/>
+          <a:p>
+            <a:pPr algn="l">
+              <a:spcAft>
+                <a:spcPts val="0"/>
+              </a:spcAft>
+              <a:defRPr sz="1600" b="0">
+                <a:solidFill>
+                  <a:srgbClr val="122C4E"/>
+                </a:solidFill>
+                <a:latin typeface="Noto Sans CJK KR"/>
+              </a:defRPr>
+            </a:pPr>
+            <a:r>
+              <a:t>우선 확인: joint axis·friction·contact·wheel radius를 확인한다.</a:t>
+            </a:r>
+            <a:br/>
+            <a:r>
+              <a:t>수정 후: ros2 topic info /cmd_vel</a:t>
+            </a:r>
+          </a:p>
+        </p:txBody>
+      </p:sp>
+      <p:sp>
+        <p:nvSpPr>
+          <p:cNvPr id="10" name="Rounded Rectangle 9"/>
+          <p:cNvSpPr/>
+          <p:nvPr/>
+        </p:nvSpPr>
+        <p:spPr>
+          <a:xfrm>
+            <a:off x="694944" y="3172968"/>
+            <a:ext cx="10972800" cy="1115568"/>
+          </a:xfrm>
+          <a:prstGeom prst="roundRect">
+            <a:avLst/>
+          </a:prstGeom>
+          <a:solidFill>
+            <a:srgbClr val="FFF7F4"/>
+          </a:solidFill>
+          <a:ln>
+            <a:solidFill>
+              <a:srgbClr val="EDBEB4"/>
+            </a:solidFill>
+          </a:ln>
+        </p:spPr>
+        <p:style>
+          <a:lnRef idx="1">
+            <a:schemeClr val="accent1"/>
+          </a:lnRef>
+          <a:fillRef idx="3">
+            <a:schemeClr val="accent1"/>
+          </a:fillRef>
+          <a:effectRef idx="2">
+            <a:schemeClr val="accent1"/>
+          </a:effectRef>
+          <a:fontRef idx="minor">
+            <a:schemeClr val="lt1"/>
+          </a:fontRef>
+        </p:style>
+        <p:txBody>
+          <a:bodyPr rtlCol="0" anchor="ctr"/>
+          <a:lstStyle/>
+          <a:p>
+            <a:pPr algn="ctr"/>
+          </a:p>
+        </p:txBody>
+      </p:sp>
+      <p:sp>
+        <p:nvSpPr>
+          <p:cNvPr id="11" name="TextBox 10"/>
+          <p:cNvSpPr txBox="1"/>
+          <p:nvPr/>
+        </p:nvSpPr>
+        <p:spPr>
+          <a:xfrm>
+            <a:off x="896112" y="3319272"/>
+            <a:ext cx="2926080" cy="274320"/>
+          </a:xfrm>
+          <a:prstGeom prst="rect">
+            <a:avLst/>
+          </a:prstGeom>
+          <a:noFill/>
+        </p:spPr>
+        <p:txBody>
+          <a:bodyPr wrap="square" lIns="73152" rIns="73152" tIns="36576" bIns="36576">
+            <a:spAutoFit/>
+          </a:bodyPr>
+          <a:lstStyle/>
+          <a:p>
+            <a:pPr algn="l">
+              <a:spcAft>
+                <a:spcPts val="0"/>
+              </a:spcAft>
+              <a:defRPr sz="1800" b="1">
+                <a:solidFill>
+                  <a:srgbClr val="BE3B3B"/>
+                </a:solidFill>
+                <a:latin typeface="Noto Sans CJK KR"/>
+              </a:defRPr>
+            </a:pPr>
+            <a:r>
+              <a:t>증상 2: 회전 방향이 반대</a:t>
+            </a:r>
+          </a:p>
+        </p:txBody>
+      </p:sp>
+      <p:sp>
+        <p:nvSpPr>
+          <p:cNvPr id="12" name="TextBox 11"/>
+          <p:cNvSpPr txBox="1"/>
+          <p:nvPr/>
+        </p:nvSpPr>
+        <p:spPr>
+          <a:xfrm>
+            <a:off x="3794760" y="3300984"/>
+            <a:ext cx="7543800" cy="621792"/>
+          </a:xfrm>
+          <a:prstGeom prst="rect">
+            <a:avLst/>
+          </a:prstGeom>
+          <a:noFill/>
+        </p:spPr>
+        <p:txBody>
+          <a:bodyPr wrap="square" lIns="73152" rIns="73152" tIns="36576" bIns="36576">
+            <a:spAutoFit/>
+          </a:bodyPr>
+          <a:lstStyle/>
+          <a:p>
+            <a:pPr algn="l">
+              <a:spcAft>
+                <a:spcPts val="0"/>
+              </a:spcAft>
+              <a:defRPr sz="1600" b="0">
+                <a:solidFill>
+                  <a:srgbClr val="122C4E"/>
+                </a:solidFill>
+                <a:latin typeface="Noto Sans CJK KR"/>
+              </a:defRPr>
+            </a:pPr>
+            <a:r>
+              <a:t>우선 확인: left/right joint와 angular.z 부호를 확인한다.</a:t>
+            </a:r>
+            <a:br/>
+            <a:r>
+              <a:t>수정 후: ros2 topic info /cmd_vel</a:t>
+            </a:r>
+          </a:p>
+        </p:txBody>
+      </p:sp>
+      <p:sp>
+        <p:nvSpPr>
+          <p:cNvPr id="13" name="TextBox 12"/>
+          <p:cNvSpPr txBox="1"/>
+          <p:nvPr/>
+        </p:nvSpPr>
+        <p:spPr>
+          <a:xfrm>
+            <a:off x="822960" y="5102352"/>
+            <a:ext cx="10607040" cy="402336"/>
+          </a:xfrm>
+          <a:prstGeom prst="rect">
+            <a:avLst/>
+          </a:prstGeom>
+          <a:noFill/>
+        </p:spPr>
+        <p:txBody>
+          <a:bodyPr wrap="square" lIns="73152" rIns="73152" tIns="36576" bIns="36576">
+            <a:spAutoFit/>
+          </a:bodyPr>
+          <a:lstStyle/>
+          <a:p>
             <a:pPr algn="ctr">
               <a:spcAft>
                 <a:spcPts val="0"/>
               </a:spcAft>
-              <a:defRPr sz="1900" b="1">
+              <a:defRPr sz="1800" b="1">
                 <a:solidFill>
                   <a:srgbClr val="DB7E22"/>
                 </a:solidFill>
@@ -23310,7 +23546,7 @@
               </a:defRPr>
             </a:pPr>
             <a:r>
-              <a:t>기록할 것: 바꾼 값(단위) · 기대한 변화 · 실제 출력/화면 · 원래 값으로 되돌린 결과</a:t>
+              <a:t>공통 순서: ① 현재 폴더 ② source ③ 파일 경로 ④ 이름/타입/단위 ⑤ build·source 후 재실행</a:t>
             </a:r>
           </a:p>
         </p:txBody>
@@ -23367,7 +23603,7 @@
               </a:defRPr>
             </a:pPr>
             <a:r>
-              <a:t>체크포인트를 저장하고 다음 모듈로 넘긴다</a:t>
+              <a:t>미니 실습: 값 하나를 바꾸고 결과를 비교한다</a:t>
             </a:r>
           </a:p>
         </p:txBody>
@@ -23406,7 +23642,7 @@
               </a:defRPr>
             </a:pPr>
             <a:r>
-              <a:t>현재 Complete는 다음 Starter의 기준선입니다.</a:t>
+              <a:t>정상 결과를 만든 뒤에는 한 번에 하나의 값만 바꿉니다.</a:t>
             </a:r>
           </a:p>
         </p:txBody>
@@ -23542,7 +23778,7 @@
               </a:defRPr>
             </a:pPr>
             <a:r>
-              <a:t>현재 단계 체크포인트    |    현재 폴더 ~/ros2_curri/agv_ws    |    현재 터미널</a:t>
+              <a:t>현재 단계 미니 실습    |    현재 폴더 ~/ros2_curri/agv_ws    |    현재 터미널</a:t>
             </a:r>
           </a:p>
         </p:txBody>
@@ -23555,18 +23791,18 @@
         </p:nvSpPr>
         <p:spPr>
           <a:xfrm>
-            <a:off x="685800" y="1737360"/>
-            <a:ext cx="10972800" cy="3611880"/>
+            <a:off x="749808" y="1874519"/>
+            <a:ext cx="10652760" cy="1993392"/>
           </a:xfrm>
           <a:prstGeom prst="roundRect">
             <a:avLst/>
           </a:prstGeom>
           <a:solidFill>
-            <a:srgbClr val="F4F7FB"/>
+            <a:srgbClr val="FFF8EB"/>
           </a:solidFill>
           <a:ln>
             <a:solidFill>
-              <a:srgbClr val="D2DCE8"/>
+              <a:srgbClr val="ECC680"/>
             </a:solidFill>
           </a:ln>
         </p:spPr>
@@ -23585,10 +23821,23 @@
           </a:fontRef>
         </p:style>
         <p:txBody>
-          <a:bodyPr rtlCol="0" anchor="ctr"/>
-          <a:lstStyle/>
-          <a:p>
-            <a:pPr algn="ctr"/>
+          <a:bodyPr rtlCol="0" anchor="ctr" wrap="square" lIns="73152" rIns="73152" tIns="36576" bIns="36576"/>
+          <a:lstStyle/>
+          <a:p>
+            <a:pPr algn="ctr">
+              <a:spcAft>
+                <a:spcPts val="0"/>
+              </a:spcAft>
+              <a:defRPr sz="2300" b="1">
+                <a:solidFill>
+                  <a:srgbClr val="122C4E"/>
+                </a:solidFill>
+                <a:latin typeface="Noto Sans CJK KR"/>
+              </a:defRPr>
+            </a:pPr>
+            <a:r>
+              <a:t>0.15 m/s 직진, 0.4 rad/s 회전, 둘 다 비영 값인 곡선을 각각 2초씩 시험해 경로를 비교한다.</a:t>
+            </a:r>
           </a:p>
         </p:txBody>
       </p:sp>
@@ -23600,111 +23849,8 @@
         </p:nvSpPr>
         <p:spPr>
           <a:xfrm>
-            <a:off x="896112" y="1993392"/>
-            <a:ext cx="10332720" cy="2971800"/>
-          </a:xfrm>
-          <a:prstGeom prst="rect">
-            <a:avLst/>
-          </a:prstGeom>
-          <a:noFill/>
-        </p:spPr>
-        <p:txBody>
-          <a:bodyPr wrap="square" lIns="109728" rIns="109728">
-            <a:spAutoFit/>
-          </a:bodyPr>
-          <a:lstStyle/>
-          <a:p>
-            <a:pPr>
-              <a:spcAft>
-                <a:spcPts val="800"/>
-              </a:spcAft>
-              <a:defRPr sz="1800">
-                <a:solidFill>
-                  <a:srgbClr val="122C4E"/>
-                </a:solidFill>
-                <a:latin typeface="Noto Sans CJK KR"/>
-              </a:defRPr>
-            </a:pPr>
-            <a:r>
-              <a:t>• □ 완료 화면: /cmd_vel에서 odom과 바퀴 구동 topic으로 이어지는 경로를 확인한다.</a:t>
-            </a:r>
-          </a:p>
-          <a:p>
-            <a:pPr>
-              <a:spcAft>
-                <a:spcPts val="800"/>
-              </a:spcAft>
-              <a:defRPr sz="1800">
-                <a:solidFill>
-                  <a:srgbClr val="122C4E"/>
-                </a:solidFill>
-                <a:latin typeface="Noto Sans CJK KR"/>
-              </a:defRPr>
-            </a:pPr>
-            <a:r>
-              <a:t>• □ Complete 파일: blocks/C_drive_visualization/M09_differential_drive/complete/</a:t>
-            </a:r>
-          </a:p>
-          <a:p>
-            <a:pPr>
-              <a:spcAft>
-                <a:spcPts val="800"/>
-              </a:spcAft>
-              <a:defRPr sz="1800">
-                <a:solidFill>
-                  <a:srgbClr val="122C4E"/>
-                </a:solidFill>
-                <a:latin typeface="Noto Sans CJK KR"/>
-              </a:defRPr>
-            </a:pPr>
-            <a:r>
-              <a:t>• □ 정상 로그·캡처: logs/validation.log, screenshots/validation_terminal.png</a:t>
-            </a:r>
-          </a:p>
-          <a:p>
-            <a:pPr>
-              <a:spcAft>
-                <a:spcPts val="800"/>
-              </a:spcAft>
-              <a:defRPr sz="1800">
-                <a:solidFill>
-                  <a:srgbClr val="122C4E"/>
-                </a:solidFill>
-                <a:latin typeface="Noto Sans CJK KR"/>
-              </a:defRPr>
-            </a:pPr>
-            <a:r>
-              <a:t>• □ 버전 식별: CHECKSUM_or_TAG.txt의 SHA-256 manifest</a:t>
-            </a:r>
-          </a:p>
-          <a:p>
-            <a:pPr>
-              <a:spcAft>
-                <a:spcPts val="800"/>
-              </a:spcAft>
-              <a:defRPr sz="1800">
-                <a:solidFill>
-                  <a:srgbClr val="122C4E"/>
-                </a:solidFill>
-                <a:latin typeface="Noto Sans CJK KR"/>
-              </a:defRPr>
-            </a:pPr>
-            <a:r>
-              <a:t>• □ 다음 시작 조건: M10 ros_gz_bridge</a:t>
-            </a:r>
-          </a:p>
-        </p:txBody>
-      </p:sp>
-      <p:sp>
-        <p:nvSpPr>
-          <p:cNvPr id="9" name="TextBox 8"/>
-          <p:cNvSpPr txBox="1"/>
-          <p:nvPr/>
-        </p:nvSpPr>
-        <p:spPr>
-          <a:xfrm>
-            <a:off x="868680" y="5596128"/>
-            <a:ext cx="10515600" cy="338328"/>
+            <a:off x="877824" y="4590288"/>
+            <a:ext cx="10241280" cy="594360"/>
           </a:xfrm>
           <a:prstGeom prst="rect">
             <a:avLst/>
@@ -23721,15 +23867,15 @@
               <a:spcAft>
                 <a:spcPts val="0"/>
               </a:spcAft>
-              <a:defRPr sz="1700" b="1">
-                <a:solidFill>
-                  <a:srgbClr val="2A8B5A"/>
-                </a:solidFill>
-                <a:latin typeface="Noto Sans CJK KR"/>
-              </a:defRPr>
-            </a:pPr>
-            <a:r>
-              <a:t>다음 모듈을 시작하기 전, 이 슬라이드의 Complete와 다음 모듈의 Starter를 비교합니다.</a:t>
+              <a:defRPr sz="1900" b="1">
+                <a:solidFill>
+                  <a:srgbClr val="DB7E22"/>
+                </a:solidFill>
+                <a:latin typeface="Noto Sans CJK KR"/>
+              </a:defRPr>
+            </a:pPr>
+            <a:r>
+              <a:t>기록할 것: 바꾼 값(단위) · 기대한 변화 · 실제 출력/화면 · 원래 값으로 되돌린 결과</a:t>
             </a:r>
           </a:p>
         </p:txBody>
@@ -23786,6 +23932,425 @@
               </a:defRPr>
             </a:pPr>
             <a:r>
+              <a:t>체크포인트를 저장하고 다음 모듈로 넘긴다</a:t>
+            </a:r>
+          </a:p>
+        </p:txBody>
+      </p:sp>
+      <p:sp>
+        <p:nvSpPr>
+          <p:cNvPr id="3" name="TextBox 2"/>
+          <p:cNvSpPr txBox="1"/>
+          <p:nvPr/>
+        </p:nvSpPr>
+        <p:spPr>
+          <a:xfrm>
+            <a:off x="603504" y="859536"/>
+            <a:ext cx="10698480" cy="292608"/>
+          </a:xfrm>
+          <a:prstGeom prst="rect">
+            <a:avLst/>
+          </a:prstGeom>
+          <a:noFill/>
+        </p:spPr>
+        <p:txBody>
+          <a:bodyPr wrap="square" lIns="73152" rIns="73152" tIns="36576" bIns="36576">
+            <a:spAutoFit/>
+          </a:bodyPr>
+          <a:lstStyle/>
+          <a:p>
+            <a:pPr algn="l">
+              <a:spcAft>
+                <a:spcPts val="0"/>
+              </a:spcAft>
+              <a:defRPr sz="1700" b="0">
+                <a:solidFill>
+                  <a:srgbClr val="5C6672"/>
+                </a:solidFill>
+                <a:latin typeface="Noto Sans CJK KR"/>
+              </a:defRPr>
+            </a:pPr>
+            <a:r>
+              <a:t>현재 Complete는 다음 Starter의 기준선입니다.</a:t>
+            </a:r>
+          </a:p>
+        </p:txBody>
+      </p:sp>
+      <p:sp>
+        <p:nvSpPr>
+          <p:cNvPr id="4" name="TextBox 3"/>
+          <p:cNvSpPr txBox="1"/>
+          <p:nvPr/>
+        </p:nvSpPr>
+        <p:spPr>
+          <a:xfrm>
+            <a:off x="530352" y="6510528"/>
+            <a:ext cx="7772400" cy="201168"/>
+          </a:xfrm>
+          <a:prstGeom prst="rect">
+            <a:avLst/>
+          </a:prstGeom>
+          <a:noFill/>
+        </p:spPr>
+        <p:txBody>
+          <a:bodyPr wrap="square" lIns="73152" rIns="73152" tIns="36576" bIns="36576">
+            <a:spAutoFit/>
+          </a:bodyPr>
+          <a:lstStyle/>
+          <a:p>
+            <a:pPr algn="l">
+              <a:spcAft>
+                <a:spcPts val="0"/>
+              </a:spcAft>
+              <a:defRPr sz="1000" b="0">
+                <a:solidFill>
+                  <a:srgbClr val="5C6672"/>
+                </a:solidFill>
+                <a:latin typeface="Noto Sans CJK KR"/>
+              </a:defRPr>
+            </a:pPr>
+            <a:r>
+              <a:t>ROS 2 Jazzy · Gazebo Harmonic · M09 · 따라 하기형 AGV 실습</a:t>
+            </a:r>
+          </a:p>
+        </p:txBody>
+      </p:sp>
+      <p:sp>
+        <p:nvSpPr>
+          <p:cNvPr id="5" name="TextBox 4"/>
+          <p:cNvSpPr txBox="1"/>
+          <p:nvPr/>
+        </p:nvSpPr>
+        <p:spPr>
+          <a:xfrm>
+            <a:off x="9144000" y="6510528"/>
+            <a:ext cx="2468880" cy="201168"/>
+          </a:xfrm>
+          <a:prstGeom prst="rect">
+            <a:avLst/>
+          </a:prstGeom>
+          <a:noFill/>
+        </p:spPr>
+        <p:txBody>
+          <a:bodyPr wrap="square" lIns="73152" rIns="73152" tIns="36576" bIns="36576">
+            <a:spAutoFit/>
+          </a:bodyPr>
+          <a:lstStyle/>
+          <a:p>
+            <a:pPr algn="r">
+              <a:spcAft>
+                <a:spcPts val="0"/>
+              </a:spcAft>
+              <a:defRPr sz="1000" b="0">
+                <a:solidFill>
+                  <a:srgbClr val="5C6672"/>
+                </a:solidFill>
+                <a:latin typeface="Noto Sans CJK KR"/>
+              </a:defRPr>
+            </a:pPr>
+            <a:r>
+              <a:t>명령·파일 경로는 슬라이드에서 복사 가능</a:t>
+            </a:r>
+          </a:p>
+        </p:txBody>
+      </p:sp>
+      <p:sp>
+        <p:nvSpPr>
+          <p:cNvPr id="6" name="Rectangle 5"/>
+          <p:cNvSpPr/>
+          <p:nvPr/>
+        </p:nvSpPr>
+        <p:spPr>
+          <a:xfrm>
+            <a:off x="566928" y="1188720"/>
+            <a:ext cx="11064240" cy="347472"/>
+          </a:xfrm>
+          <a:prstGeom prst="rect">
+            <a:avLst/>
+          </a:prstGeom>
+          <a:solidFill>
+            <a:srgbClr val="F4F7FB"/>
+          </a:solidFill>
+          <a:ln>
+            <a:solidFill>
+              <a:srgbClr val="F4F7FB"/>
+            </a:solidFill>
+          </a:ln>
+        </p:spPr>
+        <p:style>
+          <a:lnRef idx="1">
+            <a:schemeClr val="accent1"/>
+          </a:lnRef>
+          <a:fillRef idx="3">
+            <a:schemeClr val="accent1"/>
+          </a:fillRef>
+          <a:effectRef idx="2">
+            <a:schemeClr val="accent1"/>
+          </a:effectRef>
+          <a:fontRef idx="minor">
+            <a:schemeClr val="lt1"/>
+          </a:fontRef>
+        </p:style>
+        <p:txBody>
+          <a:bodyPr rtlCol="0" anchor="ctr" wrap="square" lIns="73152" rIns="73152" tIns="36576" bIns="36576"/>
+          <a:lstStyle/>
+          <a:p>
+            <a:pPr algn="l">
+              <a:spcAft>
+                <a:spcPts val="0"/>
+              </a:spcAft>
+              <a:defRPr sz="1300" b="1">
+                <a:solidFill>
+                  <a:srgbClr val="122C4E"/>
+                </a:solidFill>
+                <a:latin typeface="Noto Sans CJK KR"/>
+              </a:defRPr>
+            </a:pPr>
+            <a:r>
+              <a:t>현재 단계 체크포인트    |    현재 폴더 ~/ros2_curri/agv_ws    |    현재 터미널</a:t>
+            </a:r>
+          </a:p>
+        </p:txBody>
+      </p:sp>
+      <p:sp>
+        <p:nvSpPr>
+          <p:cNvPr id="7" name="Rounded Rectangle 6"/>
+          <p:cNvSpPr/>
+          <p:nvPr/>
+        </p:nvSpPr>
+        <p:spPr>
+          <a:xfrm>
+            <a:off x="685800" y="1737360"/>
+            <a:ext cx="10972800" cy="3611880"/>
+          </a:xfrm>
+          <a:prstGeom prst="roundRect">
+            <a:avLst/>
+          </a:prstGeom>
+          <a:solidFill>
+            <a:srgbClr val="F4F7FB"/>
+          </a:solidFill>
+          <a:ln>
+            <a:solidFill>
+              <a:srgbClr val="D2DCE8"/>
+            </a:solidFill>
+          </a:ln>
+        </p:spPr>
+        <p:style>
+          <a:lnRef idx="1">
+            <a:schemeClr val="accent1"/>
+          </a:lnRef>
+          <a:fillRef idx="3">
+            <a:schemeClr val="accent1"/>
+          </a:fillRef>
+          <a:effectRef idx="2">
+            <a:schemeClr val="accent1"/>
+          </a:effectRef>
+          <a:fontRef idx="minor">
+            <a:schemeClr val="lt1"/>
+          </a:fontRef>
+        </p:style>
+        <p:txBody>
+          <a:bodyPr rtlCol="0" anchor="ctr"/>
+          <a:lstStyle/>
+          <a:p>
+            <a:pPr algn="ctr"/>
+          </a:p>
+        </p:txBody>
+      </p:sp>
+      <p:sp>
+        <p:nvSpPr>
+          <p:cNvPr id="8" name="TextBox 7"/>
+          <p:cNvSpPr txBox="1"/>
+          <p:nvPr/>
+        </p:nvSpPr>
+        <p:spPr>
+          <a:xfrm>
+            <a:off x="896112" y="1993392"/>
+            <a:ext cx="10332720" cy="2971800"/>
+          </a:xfrm>
+          <a:prstGeom prst="rect">
+            <a:avLst/>
+          </a:prstGeom>
+          <a:noFill/>
+        </p:spPr>
+        <p:txBody>
+          <a:bodyPr wrap="square" lIns="109728" rIns="109728">
+            <a:spAutoFit/>
+          </a:bodyPr>
+          <a:lstStyle/>
+          <a:p>
+            <a:pPr>
+              <a:spcAft>
+                <a:spcPts val="800"/>
+              </a:spcAft>
+              <a:defRPr sz="1800">
+                <a:solidFill>
+                  <a:srgbClr val="122C4E"/>
+                </a:solidFill>
+                <a:latin typeface="Noto Sans CJK KR"/>
+              </a:defRPr>
+            </a:pPr>
+            <a:r>
+              <a:t>• □ 완료 화면: /cmd_vel에서 odom과 바퀴 구동 topic으로 이어지는 경로를 확인한다.</a:t>
+            </a:r>
+          </a:p>
+          <a:p>
+            <a:pPr>
+              <a:spcAft>
+                <a:spcPts val="800"/>
+              </a:spcAft>
+              <a:defRPr sz="1800">
+                <a:solidFill>
+                  <a:srgbClr val="122C4E"/>
+                </a:solidFill>
+                <a:latin typeface="Noto Sans CJK KR"/>
+              </a:defRPr>
+            </a:pPr>
+            <a:r>
+              <a:t>• □ Complete 파일: blocks/C_drive_visualization/M09_differential_drive/complete/</a:t>
+            </a:r>
+          </a:p>
+          <a:p>
+            <a:pPr>
+              <a:spcAft>
+                <a:spcPts val="800"/>
+              </a:spcAft>
+              <a:defRPr sz="1800">
+                <a:solidFill>
+                  <a:srgbClr val="122C4E"/>
+                </a:solidFill>
+                <a:latin typeface="Noto Sans CJK KR"/>
+              </a:defRPr>
+            </a:pPr>
+            <a:r>
+              <a:t>• □ 정상 로그·캡처: logs/validation.log, screenshots/validation_terminal.png</a:t>
+            </a:r>
+          </a:p>
+          <a:p>
+            <a:pPr>
+              <a:spcAft>
+                <a:spcPts val="800"/>
+              </a:spcAft>
+              <a:defRPr sz="1800">
+                <a:solidFill>
+                  <a:srgbClr val="122C4E"/>
+                </a:solidFill>
+                <a:latin typeface="Noto Sans CJK KR"/>
+              </a:defRPr>
+            </a:pPr>
+            <a:r>
+              <a:t>• □ 버전 식별: CHECKSUM_or_TAG.txt의 SHA-256 manifest</a:t>
+            </a:r>
+          </a:p>
+          <a:p>
+            <a:pPr>
+              <a:spcAft>
+                <a:spcPts val="800"/>
+              </a:spcAft>
+              <a:defRPr sz="1800">
+                <a:solidFill>
+                  <a:srgbClr val="122C4E"/>
+                </a:solidFill>
+                <a:latin typeface="Noto Sans CJK KR"/>
+              </a:defRPr>
+            </a:pPr>
+            <a:r>
+              <a:t>• □ 다음 시작 조건: M10 ros_gz_bridge</a:t>
+            </a:r>
+          </a:p>
+        </p:txBody>
+      </p:sp>
+      <p:sp>
+        <p:nvSpPr>
+          <p:cNvPr id="9" name="TextBox 8"/>
+          <p:cNvSpPr txBox="1"/>
+          <p:nvPr/>
+        </p:nvSpPr>
+        <p:spPr>
+          <a:xfrm>
+            <a:off x="868680" y="5596128"/>
+            <a:ext cx="10515600" cy="338328"/>
+          </a:xfrm>
+          <a:prstGeom prst="rect">
+            <a:avLst/>
+          </a:prstGeom>
+          <a:noFill/>
+        </p:spPr>
+        <p:txBody>
+          <a:bodyPr wrap="square" lIns="73152" rIns="73152" tIns="36576" bIns="36576">
+            <a:spAutoFit/>
+          </a:bodyPr>
+          <a:lstStyle/>
+          <a:p>
+            <a:pPr algn="ctr">
+              <a:spcAft>
+                <a:spcPts val="0"/>
+              </a:spcAft>
+              <a:defRPr sz="1700" b="1">
+                <a:solidFill>
+                  <a:srgbClr val="2A8B5A"/>
+                </a:solidFill>
+                <a:latin typeface="Noto Sans CJK KR"/>
+              </a:defRPr>
+            </a:pPr>
+            <a:r>
+              <a:t>다음 모듈을 시작하기 전, 이 슬라이드의 Complete와 다음 모듈의 Starter를 비교합니다.</a:t>
+            </a:r>
+          </a:p>
+        </p:txBody>
+      </p:sp>
+    </p:spTree>
+  </p:cSld>
+  <p:clrMapOvr>
+    <a:masterClrMapping/>
+  </p:clrMapOvr>
+</p:sld>
+</file>
+
+<file path=ppt/slides/slide44.xml><?xml version="1.0" encoding="utf-8"?>
+<p:sld xmlns:a="http://schemas.openxmlformats.org/drawingml/2006/main" xmlns:p="http://schemas.openxmlformats.org/presentationml/2006/main" xmlns:r="http://schemas.openxmlformats.org/officeDocument/2006/relationships">
+  <p:cSld>
+    <p:spTree>
+      <p:nvGrpSpPr>
+        <p:cNvPr id="1" name=""/>
+        <p:cNvGrpSpPr/>
+        <p:nvPr/>
+      </p:nvGrpSpPr>
+      <p:grpSpPr/>
+      <p:sp>
+        <p:nvSpPr>
+          <p:cNvPr id="2" name="TextBox 1"/>
+          <p:cNvSpPr txBox="1"/>
+          <p:nvPr/>
+        </p:nvSpPr>
+        <p:spPr>
+          <a:xfrm>
+            <a:off x="566928" y="347472"/>
+            <a:ext cx="10881360" cy="438912"/>
+          </a:xfrm>
+          <a:prstGeom prst="rect">
+            <a:avLst/>
+          </a:prstGeom>
+          <a:noFill/>
+        </p:spPr>
+        <p:txBody>
+          <a:bodyPr wrap="square" lIns="73152" rIns="73152" tIns="36576" bIns="36576">
+            <a:spAutoFit/>
+          </a:bodyPr>
+          <a:lstStyle/>
+          <a:p>
+            <a:pPr algn="l">
+              <a:spcAft>
+                <a:spcPts val="0"/>
+              </a:spcAft>
+              <a:defRPr sz="3200" b="1">
+                <a:solidFill>
+                  <a:srgbClr val="122C4E"/>
+                </a:solidFill>
+                <a:latin typeface="Noto Sans CJK KR"/>
+              </a:defRPr>
+            </a:pPr>
+            <a:r>
               <a:t>공식 참고 자료</a:t>
             </a:r>
           </a:p>
@@ -25154,7 +25719,7 @@
               </a:defRPr>
             </a:pPr>
             <a:r>
-              <a:t>직진 명령을 보낸다</a:t>
+              <a:t>코드/설정이 실제로 만드는 것 (1/1)</a:t>
             </a:r>
           </a:p>
         </p:txBody>
@@ -25193,7 +25758,7 @@
               </a:defRPr>
             </a:pPr>
             <a:r>
-              <a:t>한 장에는 한 행동만 수행합니다.</a:t>
+              <a:t>파일을 입력하기 전에 ‘무엇을 만들고 어디서 볼지’를 먼저 연결합니다.</a:t>
             </a:r>
           </a:p>
         </p:txBody>
@@ -25329,109 +25894,31 @@
               </a:defRPr>
             </a:pPr>
             <a:r>
-              <a:t>현재 단계 1/2    |    현재 폴더 ~/ros2_curri/agv_ws    |    현재 터미널</a:t>
-            </a:r>
-          </a:p>
-        </p:txBody>
-      </p:sp>
-      <p:sp>
-        <p:nvSpPr>
-          <p:cNvPr id="7" name="TextBox 6"/>
-          <p:cNvSpPr txBox="1"/>
-          <p:nvPr/>
-        </p:nvSpPr>
-        <p:spPr>
-          <a:xfrm>
-            <a:off x="676656" y="1764792"/>
-            <a:ext cx="1828800" cy="347472"/>
-          </a:xfrm>
-          <a:prstGeom prst="rect">
-            <a:avLst/>
-          </a:prstGeom>
-          <a:noFill/>
-        </p:spPr>
-        <p:txBody>
-          <a:bodyPr wrap="square" lIns="73152" rIns="73152" tIns="36576" bIns="36576">
-            <a:spAutoFit/>
-          </a:bodyPr>
-          <a:lstStyle/>
-          <a:p>
-            <a:pPr algn="l">
-              <a:spcAft>
-                <a:spcPts val="0"/>
-              </a:spcAft>
-              <a:defRPr sz="1800" b="1">
-                <a:solidFill>
-                  <a:srgbClr val="225B9B"/>
-                </a:solidFill>
-                <a:latin typeface="Noto Sans CJK KR"/>
-              </a:defRPr>
-            </a:pPr>
-            <a:r>
-              <a:t>왜 하는가</a:t>
-            </a:r>
-          </a:p>
-        </p:txBody>
-      </p:sp>
-      <p:sp>
-        <p:nvSpPr>
-          <p:cNvPr id="8" name="TextBox 7"/>
-          <p:cNvSpPr txBox="1"/>
-          <p:nvPr/>
-        </p:nvSpPr>
-        <p:spPr>
-          <a:xfrm>
-            <a:off x="676656" y="2103120"/>
-            <a:ext cx="10789920" cy="512064"/>
-          </a:xfrm>
-          <a:prstGeom prst="rect">
-            <a:avLst/>
-          </a:prstGeom>
-          <a:noFill/>
-        </p:spPr>
-        <p:txBody>
-          <a:bodyPr wrap="square" lIns="73152" rIns="73152" tIns="36576" bIns="36576">
-            <a:spAutoFit/>
-          </a:bodyPr>
-          <a:lstStyle/>
-          <a:p>
-            <a:pPr algn="l">
-              <a:spcAft>
-                <a:spcPts val="0"/>
-              </a:spcAft>
-              <a:defRPr sz="2000" b="0">
-                <a:solidFill>
-                  <a:srgbClr val="122C4E"/>
-                </a:solidFill>
-                <a:latin typeface="Noto Sans CJK KR"/>
-              </a:defRPr>
-            </a:pPr>
-            <a:r>
-              <a:t>linear.x는 m/s이고 angular.z는 rad/s다.</a:t>
-            </a:r>
-          </a:p>
-        </p:txBody>
-      </p:sp>
-      <p:sp>
-        <p:nvSpPr>
-          <p:cNvPr id="9" name="Rounded Rectangle 8"/>
+              <a:t>현재 단계 파일 역할    |    현재 폴더 ~/ros2_curri/agv_ws    |    현재 터미널</a:t>
+            </a:r>
+          </a:p>
+        </p:txBody>
+      </p:sp>
+      <p:sp>
+        <p:nvSpPr>
+          <p:cNvPr id="7" name="Rounded Rectangle 6"/>
           <p:cNvSpPr/>
           <p:nvPr/>
         </p:nvSpPr>
         <p:spPr>
           <a:xfrm>
-            <a:off x="676656" y="2871216"/>
-            <a:ext cx="10835640" cy="2331720"/>
+            <a:off x="640080" y="1627632"/>
+            <a:ext cx="10972800" cy="2048256"/>
           </a:xfrm>
           <a:prstGeom prst="roundRect">
             <a:avLst/>
           </a:prstGeom>
           <a:solidFill>
-            <a:srgbClr val="1D232D"/>
+            <a:srgbClr val="F4F7FB"/>
           </a:solidFill>
           <a:ln>
             <a:solidFill>
-              <a:srgbClr val="1D232D"/>
+              <a:srgbClr val="CCDBEB"/>
             </a:solidFill>
           </a:ln>
         </p:spPr>
@@ -25450,26 +25937,87 @@
           </a:fontRef>
         </p:style>
         <p:txBody>
-          <a:bodyPr rtlCol="0" anchor="ctr" wrap="square" lIns="73152" rIns="73152" tIns="36576" bIns="36576"/>
-          <a:lstStyle/>
-          <a:p>
-            <a:pPr algn="l">
-              <a:spcAft>
-                <a:spcPts val="0"/>
-              </a:spcAft>
-              <a:defRPr sz="1600" b="0">
-                <a:solidFill>
-                  <a:srgbClr val="FFFFFF"/>
+          <a:bodyPr rtlCol="0" anchor="ctr"/>
+          <a:lstStyle/>
+          <a:p>
+            <a:pPr algn="ctr"/>
+          </a:p>
+        </p:txBody>
+      </p:sp>
+      <p:sp>
+        <p:nvSpPr>
+          <p:cNvPr id="8" name="TextBox 7"/>
+          <p:cNvSpPr txBox="1"/>
+          <p:nvPr/>
+        </p:nvSpPr>
+        <p:spPr>
+          <a:xfrm>
+            <a:off x="850392" y="1764792"/>
+            <a:ext cx="10424160" cy="256032"/>
+          </a:xfrm>
+          <a:prstGeom prst="rect">
+            <a:avLst/>
+          </a:prstGeom>
+          <a:noFill/>
+        </p:spPr>
+        <p:txBody>
+          <a:bodyPr wrap="square" lIns="73152" rIns="73152" tIns="36576" bIns="36576">
+            <a:spAutoFit/>
+          </a:bodyPr>
+          <a:lstStyle/>
+          <a:p>
+            <a:pPr algn="l">
+              <a:spcAft>
+                <a:spcPts val="0"/>
+              </a:spcAft>
+              <a:defRPr sz="1300" b="1">
+                <a:solidFill>
+                  <a:srgbClr val="225B9B"/>
                 </a:solidFill>
                 <a:latin typeface="DejaVu Sans Mono"/>
               </a:defRPr>
             </a:pPr>
             <a:r>
-              <a:t>ros2 topic pub --rate 10 /cmd_vel geometry_msgs/msg/Twist \</a:t>
-            </a:r>
-            <a:br/>
-            <a:r>
-              <a:t>  "{linear: {x: 0.15}, angular: {z: 0.0}}"</a:t>
+              <a:t>~/ros2_curri/agv_ws/src/agv_gazebo/models/agv/model.sdf</a:t>
+            </a:r>
+          </a:p>
+        </p:txBody>
+      </p:sp>
+      <p:sp>
+        <p:nvSpPr>
+          <p:cNvPr id="9" name="TextBox 8"/>
+          <p:cNvSpPr txBox="1"/>
+          <p:nvPr/>
+        </p:nvSpPr>
+        <p:spPr>
+          <a:xfrm>
+            <a:off x="868680" y="2130552"/>
+            <a:ext cx="1234440" cy="228600"/>
+          </a:xfrm>
+          <a:prstGeom prst="rect">
+            <a:avLst/>
+          </a:prstGeom>
+          <a:noFill/>
+        </p:spPr>
+        <p:txBody>
+          <a:bodyPr wrap="square" lIns="73152" rIns="73152" tIns="36576" bIns="36576">
+            <a:spAutoFit/>
+          </a:bodyPr>
+          <a:lstStyle/>
+          <a:p>
+            <a:pPr algn="l">
+              <a:spcAft>
+                <a:spcPts val="0"/>
+              </a:spcAft>
+              <a:defRPr sz="1500" b="1">
+                <a:solidFill>
+                  <a:srgbClr val="2A8B5A"/>
+                </a:solidFill>
+                <a:latin typeface="Noto Sans CJK KR"/>
+              </a:defRPr>
+            </a:pPr>
+            <a:r>
+              <a:t>만드는 것</a:t>
             </a:r>
           </a:p>
         </p:txBody>
@@ -25482,8 +26030,8 @@
         </p:nvSpPr>
         <p:spPr>
           <a:xfrm>
-            <a:off x="768096" y="5468112"/>
-            <a:ext cx="1143000" cy="256032"/>
+            <a:off x="1975104" y="2112264"/>
+            <a:ext cx="9189720" cy="274320"/>
           </a:xfrm>
           <a:prstGeom prst="rect">
             <a:avLst/>
@@ -25500,15 +26048,15 @@
               <a:spcAft>
                 <a:spcPts val="0"/>
               </a:spcAft>
-              <a:defRPr sz="1800" b="1">
-                <a:solidFill>
-                  <a:srgbClr val="2A8B5A"/>
-                </a:solidFill>
-                <a:latin typeface="Noto Sans CJK KR"/>
-              </a:defRPr>
-            </a:pPr>
-            <a:r>
-              <a:t>확인</a:t>
+              <a:defRPr sz="1500" b="0">
+                <a:solidFill>
+                  <a:srgbClr val="122C4E"/>
+                </a:solidFill>
+                <a:latin typeface="Noto Sans CJK KR"/>
+              </a:defRPr>
+            </a:pPr>
+            <a:r>
+              <a:t>구동·카메라·LiDAR·IMU를 포함해 Gazebo가 시뮬레이션할 완성 AGV</a:t>
             </a:r>
           </a:p>
         </p:txBody>
@@ -25521,8 +26069,8 @@
         </p:nvSpPr>
         <p:spPr>
           <a:xfrm>
-            <a:off x="768096" y="5742432"/>
-            <a:ext cx="10561320" cy="347472"/>
+            <a:off x="868680" y="2505456"/>
+            <a:ext cx="1234440" cy="228600"/>
           </a:xfrm>
           <a:prstGeom prst="rect">
             <a:avLst/>
@@ -25539,7 +26087,46 @@
               <a:spcAft>
                 <a:spcPts val="0"/>
               </a:spcAft>
-              <a:defRPr sz="1800" b="0">
+              <a:defRPr sz="1500" b="1">
+                <a:solidFill>
+                  <a:srgbClr val="DB7E22"/>
+                </a:solidFill>
+                <a:latin typeface="Noto Sans CJK KR"/>
+              </a:defRPr>
+            </a:pPr>
+            <a:r>
+              <a:t>코드 읽기</a:t>
+            </a:r>
+          </a:p>
+        </p:txBody>
+      </p:sp>
+      <p:sp>
+        <p:nvSpPr>
+          <p:cNvPr id="12" name="TextBox 11"/>
+          <p:cNvSpPr txBox="1"/>
+          <p:nvPr/>
+        </p:nvSpPr>
+        <p:spPr>
+          <a:xfrm>
+            <a:off x="1975104" y="2487168"/>
+            <a:ext cx="9189720" cy="301752"/>
+          </a:xfrm>
+          <a:prstGeom prst="rect">
+            <a:avLst/>
+          </a:prstGeom>
+          <a:noFill/>
+        </p:spPr>
+        <p:txBody>
+          <a:bodyPr wrap="square" lIns="73152" rIns="73152" tIns="36576" bIns="36576">
+            <a:spAutoFit/>
+          </a:bodyPr>
+          <a:lstStyle/>
+          <a:p>
+            <a:pPr algn="l">
+              <a:spcAft>
+                <a:spcPts val="0"/>
+              </a:spcAft>
+              <a:defRPr sz="1400" b="0">
                 <a:solidFill>
                   <a:srgbClr val="122C4E"/>
                 </a:solidFill>
@@ -25547,7 +26134,411 @@
               </a:defRPr>
             </a:pPr>
             <a:r>
-              <a:t>명령의 출력에서 topic·frame·파일 이름 또는 성공 메시지를 찾으면 이 단계가 완료됩니다.</a:t>
+              <a:t>link/joint 다음에 sensor와 DiffDrive plugin을 찾고, topic 이름을 bridge와 비교한다.</a:t>
+            </a:r>
+          </a:p>
+        </p:txBody>
+      </p:sp>
+      <p:sp>
+        <p:nvSpPr>
+          <p:cNvPr id="13" name="TextBox 12"/>
+          <p:cNvSpPr txBox="1"/>
+          <p:nvPr/>
+        </p:nvSpPr>
+        <p:spPr>
+          <a:xfrm>
+            <a:off x="868680" y="2889504"/>
+            <a:ext cx="1234440" cy="228600"/>
+          </a:xfrm>
+          <a:prstGeom prst="rect">
+            <a:avLst/>
+          </a:prstGeom>
+          <a:noFill/>
+        </p:spPr>
+        <p:txBody>
+          <a:bodyPr wrap="square" lIns="73152" rIns="73152" tIns="36576" bIns="36576">
+            <a:spAutoFit/>
+          </a:bodyPr>
+          <a:lstStyle/>
+          <a:p>
+            <a:pPr algn="l">
+              <a:spcAft>
+                <a:spcPts val="0"/>
+              </a:spcAft>
+              <a:defRPr sz="1500" b="1">
+                <a:solidFill>
+                  <a:srgbClr val="225B9B"/>
+                </a:solidFill>
+                <a:latin typeface="Noto Sans CJK KR"/>
+              </a:defRPr>
+            </a:pPr>
+            <a:r>
+              <a:t>사용/확인</a:t>
+            </a:r>
+          </a:p>
+        </p:txBody>
+      </p:sp>
+      <p:sp>
+        <p:nvSpPr>
+          <p:cNvPr id="14" name="TextBox 13"/>
+          <p:cNvSpPr txBox="1"/>
+          <p:nvPr/>
+        </p:nvSpPr>
+        <p:spPr>
+          <a:xfrm>
+            <a:off x="1975104" y="2871216"/>
+            <a:ext cx="9189720" cy="512064"/>
+          </a:xfrm>
+          <a:prstGeom prst="rect">
+            <a:avLst/>
+          </a:prstGeom>
+          <a:noFill/>
+        </p:spPr>
+        <p:txBody>
+          <a:bodyPr wrap="square" lIns="73152" rIns="73152" tIns="36576" bIns="36576">
+            <a:spAutoFit/>
+          </a:bodyPr>
+          <a:lstStyle/>
+          <a:p>
+            <a:pPr algn="l">
+              <a:spcAft>
+                <a:spcPts val="0"/>
+              </a:spcAft>
+              <a:defRPr sz="1300" b="0">
+                <a:solidFill>
+                  <a:srgbClr val="122C4E"/>
+                </a:solidFill>
+                <a:latin typeface="Noto Sans CJK KR"/>
+              </a:defRPr>
+            </a:pPr>
+            <a:r>
+              <a:t>사용: Gazebo launch 뒤 각 ROS topic을 확인한다.</a:t>
+            </a:r>
+            <a:br/>
+            <a:r>
+              <a:t>화면/출력: Gazebo의 AGV, /camera/image_raw, /scan, /imu/data</a:t>
+            </a:r>
+          </a:p>
+        </p:txBody>
+      </p:sp>
+      <p:sp>
+        <p:nvSpPr>
+          <p:cNvPr id="15" name="Rounded Rectangle 14"/>
+          <p:cNvSpPr/>
+          <p:nvPr/>
+        </p:nvSpPr>
+        <p:spPr>
+          <a:xfrm>
+            <a:off x="640080" y="3941063"/>
+            <a:ext cx="10972800" cy="2048256"/>
+          </a:xfrm>
+          <a:prstGeom prst="roundRect">
+            <a:avLst/>
+          </a:prstGeom>
+          <a:solidFill>
+            <a:srgbClr val="F4F7FB"/>
+          </a:solidFill>
+          <a:ln>
+            <a:solidFill>
+              <a:srgbClr val="CCDBEB"/>
+            </a:solidFill>
+          </a:ln>
+        </p:spPr>
+        <p:style>
+          <a:lnRef idx="1">
+            <a:schemeClr val="accent1"/>
+          </a:lnRef>
+          <a:fillRef idx="3">
+            <a:schemeClr val="accent1"/>
+          </a:fillRef>
+          <a:effectRef idx="2">
+            <a:schemeClr val="accent1"/>
+          </a:effectRef>
+          <a:fontRef idx="minor">
+            <a:schemeClr val="lt1"/>
+          </a:fontRef>
+        </p:style>
+        <p:txBody>
+          <a:bodyPr rtlCol="0" anchor="ctr"/>
+          <a:lstStyle/>
+          <a:p>
+            <a:pPr algn="ctr"/>
+          </a:p>
+        </p:txBody>
+      </p:sp>
+      <p:sp>
+        <p:nvSpPr>
+          <p:cNvPr id="16" name="TextBox 15"/>
+          <p:cNvSpPr txBox="1"/>
+          <p:nvPr/>
+        </p:nvSpPr>
+        <p:spPr>
+          <a:xfrm>
+            <a:off x="850392" y="4078224"/>
+            <a:ext cx="10424160" cy="256032"/>
+          </a:xfrm>
+          <a:prstGeom prst="rect">
+            <a:avLst/>
+          </a:prstGeom>
+          <a:noFill/>
+        </p:spPr>
+        <p:txBody>
+          <a:bodyPr wrap="square" lIns="73152" rIns="73152" tIns="36576" bIns="36576">
+            <a:spAutoFit/>
+          </a:bodyPr>
+          <a:lstStyle/>
+          <a:p>
+            <a:pPr algn="l">
+              <a:spcAft>
+                <a:spcPts val="0"/>
+              </a:spcAft>
+              <a:defRPr sz="1300" b="1">
+                <a:solidFill>
+                  <a:srgbClr val="225B9B"/>
+                </a:solidFill>
+                <a:latin typeface="DejaVu Sans Mono"/>
+              </a:defRPr>
+            </a:pPr>
+            <a:r>
+              <a:t>~/ros2_curri/agv_ws/src/agv_control/agv_control/cmd_test_node.py</a:t>
+            </a:r>
+          </a:p>
+        </p:txBody>
+      </p:sp>
+      <p:sp>
+        <p:nvSpPr>
+          <p:cNvPr id="17" name="TextBox 16"/>
+          <p:cNvSpPr txBox="1"/>
+          <p:nvPr/>
+        </p:nvSpPr>
+        <p:spPr>
+          <a:xfrm>
+            <a:off x="868680" y="4443983"/>
+            <a:ext cx="1234440" cy="228600"/>
+          </a:xfrm>
+          <a:prstGeom prst="rect">
+            <a:avLst/>
+          </a:prstGeom>
+          <a:noFill/>
+        </p:spPr>
+        <p:txBody>
+          <a:bodyPr wrap="square" lIns="73152" rIns="73152" tIns="36576" bIns="36576">
+            <a:spAutoFit/>
+          </a:bodyPr>
+          <a:lstStyle/>
+          <a:p>
+            <a:pPr algn="l">
+              <a:spcAft>
+                <a:spcPts val="0"/>
+              </a:spcAft>
+              <a:defRPr sz="1500" b="1">
+                <a:solidFill>
+                  <a:srgbClr val="2A8B5A"/>
+                </a:solidFill>
+                <a:latin typeface="Noto Sans CJK KR"/>
+              </a:defRPr>
+            </a:pPr>
+            <a:r>
+              <a:t>만드는 것</a:t>
+            </a:r>
+          </a:p>
+        </p:txBody>
+      </p:sp>
+      <p:sp>
+        <p:nvSpPr>
+          <p:cNvPr id="18" name="TextBox 17"/>
+          <p:cNvSpPr txBox="1"/>
+          <p:nvPr/>
+        </p:nvSpPr>
+        <p:spPr>
+          <a:xfrm>
+            <a:off x="1975104" y="4425696"/>
+            <a:ext cx="9189720" cy="274320"/>
+          </a:xfrm>
+          <a:prstGeom prst="rect">
+            <a:avLst/>
+          </a:prstGeom>
+          <a:noFill/>
+        </p:spPr>
+        <p:txBody>
+          <a:bodyPr wrap="square" lIns="73152" rIns="73152" tIns="36576" bIns="36576">
+            <a:spAutoFit/>
+          </a:bodyPr>
+          <a:lstStyle/>
+          <a:p>
+            <a:pPr algn="l">
+              <a:spcAft>
+                <a:spcPts val="0"/>
+              </a:spcAft>
+              <a:defRPr sz="1500" b="0">
+                <a:solidFill>
+                  <a:srgbClr val="122C4E"/>
+                </a:solidFill>
+                <a:latin typeface="Noto Sans CJK KR"/>
+              </a:defRPr>
+            </a:pPr>
+            <a:r>
+              <a:t>ROS 2 node 또는 실행 보조 로직</a:t>
+            </a:r>
+          </a:p>
+        </p:txBody>
+      </p:sp>
+      <p:sp>
+        <p:nvSpPr>
+          <p:cNvPr id="19" name="TextBox 18"/>
+          <p:cNvSpPr txBox="1"/>
+          <p:nvPr/>
+        </p:nvSpPr>
+        <p:spPr>
+          <a:xfrm>
+            <a:off x="868680" y="4818888"/>
+            <a:ext cx="1234440" cy="228600"/>
+          </a:xfrm>
+          <a:prstGeom prst="rect">
+            <a:avLst/>
+          </a:prstGeom>
+          <a:noFill/>
+        </p:spPr>
+        <p:txBody>
+          <a:bodyPr wrap="square" lIns="73152" rIns="73152" tIns="36576" bIns="36576">
+            <a:spAutoFit/>
+          </a:bodyPr>
+          <a:lstStyle/>
+          <a:p>
+            <a:pPr algn="l">
+              <a:spcAft>
+                <a:spcPts val="0"/>
+              </a:spcAft>
+              <a:defRPr sz="1500" b="1">
+                <a:solidFill>
+                  <a:srgbClr val="DB7E22"/>
+                </a:solidFill>
+                <a:latin typeface="Noto Sans CJK KR"/>
+              </a:defRPr>
+            </a:pPr>
+            <a:r>
+              <a:t>코드 읽기</a:t>
+            </a:r>
+          </a:p>
+        </p:txBody>
+      </p:sp>
+      <p:sp>
+        <p:nvSpPr>
+          <p:cNvPr id="20" name="TextBox 19"/>
+          <p:cNvSpPr txBox="1"/>
+          <p:nvPr/>
+        </p:nvSpPr>
+        <p:spPr>
+          <a:xfrm>
+            <a:off x="1975104" y="4800600"/>
+            <a:ext cx="9189720" cy="301752"/>
+          </a:xfrm>
+          <a:prstGeom prst="rect">
+            <a:avLst/>
+          </a:prstGeom>
+          <a:noFill/>
+        </p:spPr>
+        <p:txBody>
+          <a:bodyPr wrap="square" lIns="73152" rIns="73152" tIns="36576" bIns="36576">
+            <a:spAutoFit/>
+          </a:bodyPr>
+          <a:lstStyle/>
+          <a:p>
+            <a:pPr algn="l">
+              <a:spcAft>
+                <a:spcPts val="0"/>
+              </a:spcAft>
+              <a:defRPr sz="1400" b="0">
+                <a:solidFill>
+                  <a:srgbClr val="122C4E"/>
+                </a:solidFill>
+                <a:latin typeface="Noto Sans CJK KR"/>
+              </a:defRPr>
+            </a:pPr>
+            <a:r>
+              <a:t>import → Node 생성 → publisher/subscription → callback/main 순서로 읽는다.</a:t>
+            </a:r>
+          </a:p>
+        </p:txBody>
+      </p:sp>
+      <p:sp>
+        <p:nvSpPr>
+          <p:cNvPr id="21" name="TextBox 20"/>
+          <p:cNvSpPr txBox="1"/>
+          <p:nvPr/>
+        </p:nvSpPr>
+        <p:spPr>
+          <a:xfrm>
+            <a:off x="868680" y="5202936"/>
+            <a:ext cx="1234440" cy="228600"/>
+          </a:xfrm>
+          <a:prstGeom prst="rect">
+            <a:avLst/>
+          </a:prstGeom>
+          <a:noFill/>
+        </p:spPr>
+        <p:txBody>
+          <a:bodyPr wrap="square" lIns="73152" rIns="73152" tIns="36576" bIns="36576">
+            <a:spAutoFit/>
+          </a:bodyPr>
+          <a:lstStyle/>
+          <a:p>
+            <a:pPr algn="l">
+              <a:spcAft>
+                <a:spcPts val="0"/>
+              </a:spcAft>
+              <a:defRPr sz="1500" b="1">
+                <a:solidFill>
+                  <a:srgbClr val="225B9B"/>
+                </a:solidFill>
+                <a:latin typeface="Noto Sans CJK KR"/>
+              </a:defRPr>
+            </a:pPr>
+            <a:r>
+              <a:t>사용/확인</a:t>
+            </a:r>
+          </a:p>
+        </p:txBody>
+      </p:sp>
+      <p:sp>
+        <p:nvSpPr>
+          <p:cNvPr id="22" name="TextBox 21"/>
+          <p:cNvSpPr txBox="1"/>
+          <p:nvPr/>
+        </p:nvSpPr>
+        <p:spPr>
+          <a:xfrm>
+            <a:off x="1975104" y="5184648"/>
+            <a:ext cx="9189720" cy="512064"/>
+          </a:xfrm>
+          <a:prstGeom prst="rect">
+            <a:avLst/>
+          </a:prstGeom>
+          <a:noFill/>
+        </p:spPr>
+        <p:txBody>
+          <a:bodyPr wrap="square" lIns="73152" rIns="73152" tIns="36576" bIns="36576">
+            <a:spAutoFit/>
+          </a:bodyPr>
+          <a:lstStyle/>
+          <a:p>
+            <a:pPr algn="l">
+              <a:spcAft>
+                <a:spcPts val="0"/>
+              </a:spcAft>
+              <a:defRPr sz="1300" b="0">
+                <a:solidFill>
+                  <a:srgbClr val="122C4E"/>
+                </a:solidFill>
+                <a:latin typeface="Noto Sans CJK KR"/>
+              </a:defRPr>
+            </a:pPr>
+            <a:r>
+              <a:t>사용: package를 build·source한 뒤 ros2 run 또는 launch에서 실행한다.</a:t>
+            </a:r>
+            <a:br/>
+            <a:r>
+              <a:t>화면/출력: terminal의 node/topic/log 출력</a:t>
             </a:r>
           </a:p>
         </p:txBody>
@@ -25604,7 +26595,7 @@
               </a:defRPr>
             </a:pPr>
             <a:r>
-              <a:t>회전과 odom을 확인한다</a:t>
+              <a:t>직진 명령을 보낸다</a:t>
             </a:r>
           </a:p>
         </p:txBody>
@@ -25779,7 +26770,7 @@
               </a:defRPr>
             </a:pPr>
             <a:r>
-              <a:t>현재 단계 2/2    |    현재 폴더 ~/ros2_curri/agv_ws    |    현재 터미널</a:t>
+              <a:t>현재 단계 1/2    |    현재 폴더 ~/ros2_curri/agv_ws    |    현재 터미널</a:t>
             </a:r>
           </a:p>
         </p:txBody>
@@ -25857,7 +26848,7 @@
               </a:defRPr>
             </a:pPr>
             <a:r>
-              <a:t>제자리 회전은 linear.x=0, angular.z만 양수/음수로 바꾼다.</a:t>
+              <a:t>linear.x는 m/s이고 angular.z는 rad/s다.</a:t>
             </a:r>
           </a:p>
         </p:txBody>
@@ -25919,11 +26910,7 @@
             </a:r>
             <a:br/>
             <a:r>
-              <a:t>  "{linear: {x: 0.0}, angular: {z: 0.4}}"</a:t>
-            </a:r>
-            <a:br/>
-            <a:r>
-              <a:t>ros2 topic echo /odom --once</a:t>
+              <a:t>  "{linear: {x: 0.15}, angular: {z: 0.0}}"</a:t>
             </a:r>
           </a:p>
         </p:txBody>
@@ -26058,7 +27045,7 @@
               </a:defRPr>
             </a:pPr>
             <a:r>
-              <a:t>파일을 새로 만들고 저장한다 (1/24)</a:t>
+              <a:t>회전과 odom을 확인한다</a:t>
             </a:r>
           </a:p>
         </p:txBody>
@@ -26097,7 +27084,7 @@
               </a:defRPr>
             </a:pPr>
             <a:r>
-              <a:t>~/ros2_curri/agv_ws/src/agv_gazebo/models/agv/model.sdf</a:t>
+              <a:t>한 장에는 한 행동만 수행합니다.</a:t>
             </a:r>
           </a:p>
         </p:txBody>
@@ -26233,7 +27220,7 @@
               </a:defRPr>
             </a:pPr>
             <a:r>
-              <a:t>현재 단계 3/27    |    현재 폴더 ~/ros2_curri/agv_ws    |    현재 터미널</a:t>
+              <a:t>현재 단계 2/2    |    현재 폴더 ~/ros2_curri/agv_ws    |    현재 터미널</a:t>
             </a:r>
           </a:p>
         </p:txBody>
@@ -26246,8 +27233,8 @@
         </p:nvSpPr>
         <p:spPr>
           <a:xfrm>
-            <a:off x="658368" y="1627632"/>
-            <a:ext cx="10972800" cy="256032"/>
+            <a:off x="676656" y="1764792"/>
+            <a:ext cx="1828800" cy="347472"/>
           </a:xfrm>
           <a:prstGeom prst="rect">
             <a:avLst/>
@@ -26264,7 +27251,46 @@
               <a:spcAft>
                 <a:spcPts val="0"/>
               </a:spcAft>
-              <a:defRPr sz="1500" b="1">
+              <a:defRPr sz="1800" b="1">
+                <a:solidFill>
+                  <a:srgbClr val="225B9B"/>
+                </a:solidFill>
+                <a:latin typeface="Noto Sans CJK KR"/>
+              </a:defRPr>
+            </a:pPr>
+            <a:r>
+              <a:t>왜 하는가</a:t>
+            </a:r>
+          </a:p>
+        </p:txBody>
+      </p:sp>
+      <p:sp>
+        <p:nvSpPr>
+          <p:cNvPr id="8" name="TextBox 7"/>
+          <p:cNvSpPr txBox="1"/>
+          <p:nvPr/>
+        </p:nvSpPr>
+        <p:spPr>
+          <a:xfrm>
+            <a:off x="676656" y="2103120"/>
+            <a:ext cx="10789920" cy="512064"/>
+          </a:xfrm>
+          <a:prstGeom prst="rect">
+            <a:avLst/>
+          </a:prstGeom>
+          <a:noFill/>
+        </p:spPr>
+        <p:txBody>
+          <a:bodyPr wrap="square" lIns="73152" rIns="73152" tIns="36576" bIns="36576">
+            <a:spAutoFit/>
+          </a:bodyPr>
+          <a:lstStyle/>
+          <a:p>
+            <a:pPr algn="l">
+              <a:spcAft>
+                <a:spcPts val="0"/>
+              </a:spcAft>
+              <a:defRPr sz="2000" b="0">
                 <a:solidFill>
                   <a:srgbClr val="122C4E"/>
                 </a:solidFill>
@@ -26272,85 +27298,23 @@
               </a:defRPr>
             </a:pPr>
             <a:r>
-              <a:t>이번 단계: 파일의 전체 내용을 중간 생략 없이 작성합니다. 아래 줄 범위를 끝까지 입력하세요.</a:t>
-            </a:r>
-          </a:p>
-        </p:txBody>
-      </p:sp>
-      <p:sp>
-        <p:nvSpPr>
-          <p:cNvPr id="8" name="Rectangle 7"/>
+              <a:t>제자리 회전은 linear.x=0, angular.z만 양수/음수로 바꾼다.</a:t>
+            </a:r>
+          </a:p>
+        </p:txBody>
+      </p:sp>
+      <p:sp>
+        <p:nvSpPr>
+          <p:cNvPr id="9" name="Rounded Rectangle 8"/>
           <p:cNvSpPr/>
           <p:nvPr/>
         </p:nvSpPr>
         <p:spPr>
           <a:xfrm>
-            <a:off x="658368" y="1956816"/>
-            <a:ext cx="10972800" cy="603504"/>
-          </a:xfrm>
-          <a:prstGeom prst="rect">
-            <a:avLst/>
-          </a:prstGeom>
-          <a:solidFill>
-            <a:srgbClr val="F4F7FB"/>
-          </a:solidFill>
-          <a:ln>
-            <a:solidFill>
-              <a:srgbClr val="F4F7FB"/>
-            </a:solidFill>
-          </a:ln>
-        </p:spPr>
-        <p:style>
-          <a:lnRef idx="1">
-            <a:schemeClr val="accent1"/>
-          </a:lnRef>
-          <a:fillRef idx="3">
-            <a:schemeClr val="accent1"/>
-          </a:fillRef>
-          <a:effectRef idx="2">
-            <a:schemeClr val="accent1"/>
-          </a:effectRef>
-          <a:fontRef idx="minor">
-            <a:schemeClr val="lt1"/>
-          </a:fontRef>
-        </p:style>
-        <p:txBody>
-          <a:bodyPr rtlCol="0" anchor="ctr" wrap="square" lIns="73152" rIns="73152" tIns="36576" bIns="36576"/>
-          <a:lstStyle/>
-          <a:p>
-            <a:pPr algn="l">
-              <a:spcAft>
-                <a:spcPts val="0"/>
-              </a:spcAft>
-              <a:defRPr sz="1400" b="0">
-                <a:solidFill>
-                  <a:srgbClr val="122C4E"/>
-                </a:solidFill>
-                <a:latin typeface="DejaVu Sans Mono"/>
-              </a:defRPr>
-            </a:pPr>
-            <a:r>
-              <a:t>파일 생성: mkdir -p ~/ros2_curri/agv_ws/src/agv_gazebo/models/agv</a:t>
-            </a:r>
-            <a:br/>
-            <a:r>
-              <a:t>파일 열기: nano ~/ros2_curri/agv_ws/src/agv_gazebo/models/agv/model.sdf</a:t>
-            </a:r>
-          </a:p>
-        </p:txBody>
-      </p:sp>
-      <p:sp>
-        <p:nvSpPr>
-          <p:cNvPr id="9" name="Rectangle 8"/>
-          <p:cNvSpPr/>
-          <p:nvPr/>
-        </p:nvSpPr>
-        <p:spPr>
-          <a:xfrm>
-            <a:off x="658368" y="2706624"/>
-            <a:ext cx="10972800" cy="3364992"/>
-          </a:xfrm>
-          <a:prstGeom prst="rect">
+            <a:off x="676656" y="2871216"/>
+            <a:ext cx="10835640" cy="2331720"/>
+          </a:xfrm>
+          <a:prstGeom prst="roundRect">
             <a:avLst/>
           </a:prstGeom>
           <a:solidFill>
@@ -26377,14 +27341,14 @@
           </a:fontRef>
         </p:style>
         <p:txBody>
-          <a:bodyPr rtlCol="0" anchor="ctr" wrap="square" lIns="164592" rIns="164592" tIns="109728" bIns="36576"/>
-          <a:lstStyle/>
-          <a:p>
-            <a:pPr algn="l">
-              <a:spcAft>
-                <a:spcPts val="0"/>
-              </a:spcAft>
-              <a:defRPr sz="1400" b="0">
+          <a:bodyPr rtlCol="0" anchor="ctr" wrap="square" lIns="73152" rIns="73152" tIns="36576" bIns="36576"/>
+          <a:lstStyle/>
+          <a:p>
+            <a:pPr algn="l">
+              <a:spcAft>
+                <a:spcPts val="0"/>
+              </a:spcAft>
+              <a:defRPr sz="1600" b="0">
                 <a:solidFill>
                   <a:srgbClr val="FFFFFF"/>
                 </a:solidFill>
@@ -26392,51 +27356,15 @@
               </a:defRPr>
             </a:pPr>
             <a:r>
-              <a:t>&lt;?xml version="1.0" ?&gt;</a:t>
-            </a:r>
-            <a:br/>
-            <a:r>
-              <a:t>&lt;sdf version="1.10"&gt;</a:t>
-            </a:r>
-            <a:br/>
-            <a:r>
-              <a:t>  </a:t>
-            </a:r>
-            <a:br/>
-            <a:r>
-              <a:t>  </a:t>
-            </a:r>
-            <a:br/>
-            <a:r>
-              <a:t>  &lt;model name="agv"&gt;</a:t>
-            </a:r>
-            <a:br/>
-            <a:r>
-              <a:t>    </a:t>
-            </a:r>
-            <a:br/>
-            <a:r>
-              <a:t>    </a:t>
-            </a:r>
-            <a:br/>
-            <a:r>
-              <a:t>    &lt;link name="base_link"&gt;</a:t>
-            </a:r>
-            <a:br/>
-            <a:r>
-              <a:t>      </a:t>
-            </a:r>
-            <a:br/>
-            <a:r>
-              <a:t>      </a:t>
-            </a:r>
-            <a:br/>
-            <a:r>
-              <a:t>      &lt;pose&gt;0 0 0.16 0 0 0&lt;/pose&gt;</a:t>
-            </a:r>
-            <a:br/>
-            <a:r>
-              <a:t>      </a:t>
+              <a:t>ros2 topic pub --rate 10 /cmd_vel geometry_msgs/msg/Twist \</a:t>
+            </a:r>
+            <a:br/>
+            <a:r>
+              <a:t>  "{linear: {x: 0.0}, angular: {z: 0.4}}"</a:t>
+            </a:r>
+            <a:br/>
+            <a:r>
+              <a:t>ros2 topic echo /odom --once</a:t>
             </a:r>
           </a:p>
         </p:txBody>
@@ -26449,8 +27377,8 @@
         </p:nvSpPr>
         <p:spPr>
           <a:xfrm>
-            <a:off x="749808" y="6181344"/>
-            <a:ext cx="10789920" cy="201168"/>
+            <a:off x="768096" y="5468112"/>
+            <a:ext cx="1143000" cy="256032"/>
           </a:xfrm>
           <a:prstGeom prst="rect">
             <a:avLst/>
@@ -26467,15 +27395,54 @@
               <a:spcAft>
                 <a:spcPts val="0"/>
               </a:spcAft>
-              <a:defRPr sz="1000" b="0">
-                <a:solidFill>
-                  <a:srgbClr val="5C6672"/>
-                </a:solidFill>
-                <a:latin typeface="Noto Sans CJK KR"/>
-              </a:defRPr>
-            </a:pPr>
-            <a:r>
-              <a:t>파일 전체 1/24 · 이 슬라이드 다음에 같은 파일의 나머지 줄이 이어집니다.</a:t>
+              <a:defRPr sz="1800" b="1">
+                <a:solidFill>
+                  <a:srgbClr val="2A8B5A"/>
+                </a:solidFill>
+                <a:latin typeface="Noto Sans CJK KR"/>
+              </a:defRPr>
+            </a:pPr>
+            <a:r>
+              <a:t>확인</a:t>
+            </a:r>
+          </a:p>
+        </p:txBody>
+      </p:sp>
+      <p:sp>
+        <p:nvSpPr>
+          <p:cNvPr id="11" name="TextBox 10"/>
+          <p:cNvSpPr txBox="1"/>
+          <p:nvPr/>
+        </p:nvSpPr>
+        <p:spPr>
+          <a:xfrm>
+            <a:off x="768096" y="5742432"/>
+            <a:ext cx="10561320" cy="347472"/>
+          </a:xfrm>
+          <a:prstGeom prst="rect">
+            <a:avLst/>
+          </a:prstGeom>
+          <a:noFill/>
+        </p:spPr>
+        <p:txBody>
+          <a:bodyPr wrap="square" lIns="73152" rIns="73152" tIns="36576" bIns="36576">
+            <a:spAutoFit/>
+          </a:bodyPr>
+          <a:lstStyle/>
+          <a:p>
+            <a:pPr algn="l">
+              <a:spcAft>
+                <a:spcPts val="0"/>
+              </a:spcAft>
+              <a:defRPr sz="1800" b="0">
+                <a:solidFill>
+                  <a:srgbClr val="122C4E"/>
+                </a:solidFill>
+                <a:latin typeface="Noto Sans CJK KR"/>
+              </a:defRPr>
+            </a:pPr>
+            <a:r>
+              <a:t>명령의 출력에서 topic·frame·파일 이름 또는 성공 메시지를 찾으면 이 단계가 완료됩니다.</a:t>
             </a:r>
           </a:p>
         </p:txBody>

--- a/blocks/C_drive_visualization/M09_differential_drive/M09_Differential_Drive_구동.pptx
+++ b/blocks/C_drive_visualization/M09_differential_drive/M09_Differential_Drive_구동.pptx
@@ -10018,7 +10018,7 @@
               <a:spcAft>
                 <a:spcPts val="0"/>
               </a:spcAft>
-              <a:defRPr sz="1800" b="1">
+              <a:defRPr sz="1400" b="1">
                 <a:solidFill>
                   <a:srgbClr val="FFFFFF"/>
                 </a:solidFill>
@@ -10026,7 +10026,7 @@
               </a:defRPr>
             </a:pPr>
             <a:r>
-              <a:t>M09 · Block C · ROS 2 + Gazebo Sim AGV</a:t>
+              <a:t>ROS 2 기반 AGV End-to-End 개발 커리큘럼 · M09 · Block C</a:t>
             </a:r>
           </a:p>
         </p:txBody>
@@ -10236,7 +10236,7 @@
               <a:spcAft>
                 <a:spcPts val="0"/>
               </a:spcAft>
-              <a:defRPr sz="1000" b="0">
+              <a:defRPr sz="900" b="0">
                 <a:solidFill>
                   <a:srgbClr val="5C6672"/>
                 </a:solidFill>
@@ -10244,7 +10244,7 @@
               </a:defRPr>
             </a:pPr>
             <a:r>
-              <a:t>ROS 2 Jazzy · Gazebo Harmonic · M09 · 따라 하기형 AGV 실습</a:t>
+              <a:t>ROS 2 기반 AGV End-to-End 개발 커리큘럼 · M09 · Block C</a:t>
             </a:r>
           </a:p>
         </p:txBody>
@@ -10410,7 +10410,7 @@
               <a:spcAft>
                 <a:spcPts val="0"/>
               </a:spcAft>
-              <a:defRPr sz="1000" b="0">
+              <a:defRPr sz="900" b="0">
                 <a:solidFill>
                   <a:srgbClr val="5C6672"/>
                 </a:solidFill>
@@ -10418,7 +10418,7 @@
               </a:defRPr>
             </a:pPr>
             <a:r>
-              <a:t>ROS 2 Jazzy · Gazebo Harmonic · M09 · 따라 하기형 AGV 실습</a:t>
+              <a:t>ROS 2 기반 AGV End-to-End 개발 커리큘럼 · M09 · Block C</a:t>
             </a:r>
           </a:p>
         </p:txBody>
@@ -11286,7 +11286,7 @@
               <a:spcAft>
                 <a:spcPts val="0"/>
               </a:spcAft>
-              <a:defRPr sz="1000" b="0">
+              <a:defRPr sz="900" b="0">
                 <a:solidFill>
                   <a:srgbClr val="5C6672"/>
                 </a:solidFill>
@@ -11294,7 +11294,7 @@
               </a:defRPr>
             </a:pPr>
             <a:r>
-              <a:t>ROS 2 Jazzy · Gazebo Harmonic · M09 · 따라 하기형 AGV 실습</a:t>
+              <a:t>ROS 2 기반 AGV End-to-End 개발 커리큘럼 · M09 · Block C</a:t>
             </a:r>
           </a:p>
         </p:txBody>
@@ -11701,7 +11701,7 @@
               <a:spcAft>
                 <a:spcPts val="0"/>
               </a:spcAft>
-              <a:defRPr sz="1000" b="0">
+              <a:defRPr sz="900" b="0">
                 <a:solidFill>
                   <a:srgbClr val="5C6672"/>
                 </a:solidFill>
@@ -11709,7 +11709,7 @@
               </a:defRPr>
             </a:pPr>
             <a:r>
-              <a:t>ROS 2 Jazzy · Gazebo Harmonic · M09 · 따라 하기형 AGV 실습</a:t>
+              <a:t>ROS 2 기반 AGV End-to-End 개발 커리큘럼 · M09 · Block C</a:t>
             </a:r>
           </a:p>
         </p:txBody>
@@ -12229,7 +12229,7 @@
               <a:spcAft>
                 <a:spcPts val="0"/>
               </a:spcAft>
-              <a:defRPr sz="1000" b="0">
+              <a:defRPr sz="900" b="0">
                 <a:solidFill>
                   <a:srgbClr val="5C6672"/>
                 </a:solidFill>
@@ -12237,7 +12237,7 @@
               </a:defRPr>
             </a:pPr>
             <a:r>
-              <a:t>ROS 2 Jazzy · Gazebo Harmonic · M09 · 따라 하기형 AGV 실습</a:t>
+              <a:t>ROS 2 기반 AGV End-to-End 개발 커리큘럼 · M09 · Block C</a:t>
             </a:r>
           </a:p>
         </p:txBody>
@@ -13018,7 +13018,7 @@
               <a:spcAft>
                 <a:spcPts val="0"/>
               </a:spcAft>
-              <a:defRPr sz="1000" b="0">
+              <a:defRPr sz="900" b="0">
                 <a:solidFill>
                   <a:srgbClr val="5C6672"/>
                 </a:solidFill>
@@ -13026,7 +13026,7 @@
               </a:defRPr>
             </a:pPr>
             <a:r>
-              <a:t>ROS 2 Jazzy · Gazebo Harmonic · M09 · 따라 하기형 AGV 실습</a:t>
+              <a:t>ROS 2 기반 AGV End-to-End 개발 커리큘럼 · M09 · Block C</a:t>
             </a:r>
           </a:p>
         </p:txBody>
@@ -13587,7 +13587,7 @@
               <a:spcAft>
                 <a:spcPts val="0"/>
               </a:spcAft>
-              <a:defRPr sz="1000" b="0">
+              <a:defRPr sz="900" b="0">
                 <a:solidFill>
                   <a:srgbClr val="5C6672"/>
                 </a:solidFill>
@@ -13595,7 +13595,7 @@
               </a:defRPr>
             </a:pPr>
             <a:r>
-              <a:t>ROS 2 Jazzy · Gazebo Harmonic · M09 · 따라 하기형 AGV 실습</a:t>
+              <a:t>ROS 2 기반 AGV End-to-End 개발 커리큘럼 · M09 · Block C</a:t>
             </a:r>
           </a:p>
         </p:txBody>
@@ -14061,7 +14061,7 @@
               <a:spcAft>
                 <a:spcPts val="0"/>
               </a:spcAft>
-              <a:defRPr sz="1000" b="0">
+              <a:defRPr sz="900" b="0">
                 <a:solidFill>
                   <a:srgbClr val="5C6672"/>
                 </a:solidFill>
@@ -14069,7 +14069,7 @@
               </a:defRPr>
             </a:pPr>
             <a:r>
-              <a:t>ROS 2 Jazzy · Gazebo Harmonic · M09 · 따라 하기형 AGV 실습</a:t>
+              <a:t>ROS 2 기반 AGV End-to-End 개발 커리큘럼 · M09 · Block C</a:t>
             </a:r>
           </a:p>
         </p:txBody>
@@ -14535,7 +14535,7 @@
               <a:spcAft>
                 <a:spcPts val="0"/>
               </a:spcAft>
-              <a:defRPr sz="1000" b="0">
+              <a:defRPr sz="900" b="0">
                 <a:solidFill>
                   <a:srgbClr val="5C6672"/>
                 </a:solidFill>
@@ -14543,7 +14543,7 @@
               </a:defRPr>
             </a:pPr>
             <a:r>
-              <a:t>ROS 2 Jazzy · Gazebo Harmonic · M09 · 따라 하기형 AGV 실습</a:t>
+              <a:t>ROS 2 기반 AGV End-to-End 개발 커리큘럼 · M09 · Block C</a:t>
             </a:r>
           </a:p>
         </p:txBody>
@@ -14998,7 +14998,7 @@
               <a:spcAft>
                 <a:spcPts val="0"/>
               </a:spcAft>
-              <a:defRPr sz="1000" b="0">
+              <a:defRPr sz="900" b="0">
                 <a:solidFill>
                   <a:srgbClr val="5C6672"/>
                 </a:solidFill>
@@ -15006,7 +15006,7 @@
               </a:defRPr>
             </a:pPr>
             <a:r>
-              <a:t>ROS 2 Jazzy · Gazebo Harmonic · M09 · 따라 하기형 AGV 실습</a:t>
+              <a:t>ROS 2 기반 AGV End-to-End 개발 커리큘럼 · M09 · Block C</a:t>
             </a:r>
           </a:p>
         </p:txBody>
@@ -15526,7 +15526,7 @@
               <a:spcAft>
                 <a:spcPts val="0"/>
               </a:spcAft>
-              <a:defRPr sz="1000" b="0">
+              <a:defRPr sz="900" b="0">
                 <a:solidFill>
                   <a:srgbClr val="5C6672"/>
                 </a:solidFill>
@@ -15534,7 +15534,7 @@
               </a:defRPr>
             </a:pPr>
             <a:r>
-              <a:t>ROS 2 Jazzy · Gazebo Harmonic · M09 · 따라 하기형 AGV 실습</a:t>
+              <a:t>ROS 2 기반 AGV End-to-End 개발 커리큘럼 · M09 · Block C</a:t>
             </a:r>
           </a:p>
         </p:txBody>
@@ -16319,7 +16319,7 @@
               <a:spcAft>
                 <a:spcPts val="0"/>
               </a:spcAft>
-              <a:defRPr sz="1000" b="0">
+              <a:defRPr sz="900" b="0">
                 <a:solidFill>
                   <a:srgbClr val="5C6672"/>
                 </a:solidFill>
@@ -16327,7 +16327,7 @@
               </a:defRPr>
             </a:pPr>
             <a:r>
-              <a:t>ROS 2 Jazzy · Gazebo Harmonic · M09 · 따라 하기형 AGV 실습</a:t>
+              <a:t>ROS 2 기반 AGV End-to-End 개발 커리큘럼 · M09 · Block C</a:t>
             </a:r>
           </a:p>
         </p:txBody>
@@ -16780,7 +16780,7 @@
               <a:spcAft>
                 <a:spcPts val="0"/>
               </a:spcAft>
-              <a:defRPr sz="1000" b="0">
+              <a:defRPr sz="900" b="0">
                 <a:solidFill>
                   <a:srgbClr val="5C6672"/>
                 </a:solidFill>
@@ -16788,7 +16788,7 @@
               </a:defRPr>
             </a:pPr>
             <a:r>
-              <a:t>ROS 2 Jazzy · Gazebo Harmonic · M09 · 따라 하기형 AGV 실습</a:t>
+              <a:t>ROS 2 기반 AGV End-to-End 개발 커리큘럼 · M09 · Block C</a:t>
             </a:r>
           </a:p>
         </p:txBody>
@@ -17349,7 +17349,7 @@
               <a:spcAft>
                 <a:spcPts val="0"/>
               </a:spcAft>
-              <a:defRPr sz="1000" b="0">
+              <a:defRPr sz="900" b="0">
                 <a:solidFill>
                   <a:srgbClr val="5C6672"/>
                 </a:solidFill>
@@ -17357,7 +17357,7 @@
               </a:defRPr>
             </a:pPr>
             <a:r>
-              <a:t>ROS 2 Jazzy · Gazebo Harmonic · M09 · 따라 하기형 AGV 실습</a:t>
+              <a:t>ROS 2 기반 AGV End-to-End 개발 커리큘럼 · M09 · Block C</a:t>
             </a:r>
           </a:p>
         </p:txBody>
@@ -17823,7 +17823,7 @@
               <a:spcAft>
                 <a:spcPts val="0"/>
               </a:spcAft>
-              <a:defRPr sz="1000" b="0">
+              <a:defRPr sz="900" b="0">
                 <a:solidFill>
                   <a:srgbClr val="5C6672"/>
                 </a:solidFill>
@@ -17831,7 +17831,7 @@
               </a:defRPr>
             </a:pPr>
             <a:r>
-              <a:t>ROS 2 Jazzy · Gazebo Harmonic · M09 · 따라 하기형 AGV 실습</a:t>
+              <a:t>ROS 2 기반 AGV End-to-End 개발 커리큘럼 · M09 · Block C</a:t>
             </a:r>
           </a:p>
         </p:txBody>
@@ -18253,7 +18253,7 @@
               <a:spcAft>
                 <a:spcPts val="0"/>
               </a:spcAft>
-              <a:defRPr sz="1000" b="0">
+              <a:defRPr sz="900" b="0">
                 <a:solidFill>
                   <a:srgbClr val="5C6672"/>
                 </a:solidFill>
@@ -18261,7 +18261,7 @@
               </a:defRPr>
             </a:pPr>
             <a:r>
-              <a:t>ROS 2 Jazzy · Gazebo Harmonic · M09 · 따라 하기형 AGV 실습</a:t>
+              <a:t>ROS 2 기반 AGV End-to-End 개발 커리큘럼 · M09 · Block C</a:t>
             </a:r>
           </a:p>
         </p:txBody>
@@ -18781,7 +18781,7 @@
               <a:spcAft>
                 <a:spcPts val="0"/>
               </a:spcAft>
-              <a:defRPr sz="1000" b="0">
+              <a:defRPr sz="900" b="0">
                 <a:solidFill>
                   <a:srgbClr val="5C6672"/>
                 </a:solidFill>
@@ -18789,7 +18789,7 @@
               </a:defRPr>
             </a:pPr>
             <a:r>
-              <a:t>ROS 2 Jazzy · Gazebo Harmonic · M09 · 따라 하기형 AGV 실습</a:t>
+              <a:t>ROS 2 기반 AGV End-to-End 개발 커리큘럼 · M09 · Block C</a:t>
             </a:r>
           </a:p>
         </p:txBody>
@@ -19570,7 +19570,7 @@
               <a:spcAft>
                 <a:spcPts val="0"/>
               </a:spcAft>
-              <a:defRPr sz="1000" b="0">
+              <a:defRPr sz="900" b="0">
                 <a:solidFill>
                   <a:srgbClr val="5C6672"/>
                 </a:solidFill>
@@ -19578,7 +19578,7 @@
               </a:defRPr>
             </a:pPr>
             <a:r>
-              <a:t>ROS 2 Jazzy · Gazebo Harmonic · M09 · 따라 하기형 AGV 실습</a:t>
+              <a:t>ROS 2 기반 AGV End-to-End 개발 커리큘럼 · M09 · Block C</a:t>
             </a:r>
           </a:p>
         </p:txBody>
@@ -20359,7 +20359,7 @@
               <a:spcAft>
                 <a:spcPts val="0"/>
               </a:spcAft>
-              <a:defRPr sz="1000" b="0">
+              <a:defRPr sz="900" b="0">
                 <a:solidFill>
                   <a:srgbClr val="5C6672"/>
                 </a:solidFill>
@@ -20367,7 +20367,7 @@
               </a:defRPr>
             </a:pPr>
             <a:r>
-              <a:t>ROS 2 Jazzy · Gazebo Harmonic · M09 · 따라 하기형 AGV 실습</a:t>
+              <a:t>ROS 2 기반 AGV End-to-End 개발 커리큘럼 · M09 · Block C</a:t>
             </a:r>
           </a:p>
         </p:txBody>
@@ -21148,7 +21148,7 @@
               <a:spcAft>
                 <a:spcPts val="0"/>
               </a:spcAft>
-              <a:defRPr sz="1000" b="0">
+              <a:defRPr sz="900" b="0">
                 <a:solidFill>
                   <a:srgbClr val="5C6672"/>
                 </a:solidFill>
@@ -21156,7 +21156,7 @@
               </a:defRPr>
             </a:pPr>
             <a:r>
-              <a:t>ROS 2 Jazzy · Gazebo Harmonic · M09 · 따라 하기형 AGV 실습</a:t>
+              <a:t>ROS 2 기반 AGV End-to-End 개발 커리큘럼 · M09 · Block C</a:t>
             </a:r>
           </a:p>
         </p:txBody>
@@ -21937,7 +21937,7 @@
               <a:spcAft>
                 <a:spcPts val="0"/>
               </a:spcAft>
-              <a:defRPr sz="1000" b="0">
+              <a:defRPr sz="900" b="0">
                 <a:solidFill>
                   <a:srgbClr val="5C6672"/>
                 </a:solidFill>
@@ -21945,7 +21945,7 @@
               </a:defRPr>
             </a:pPr>
             <a:r>
-              <a:t>ROS 2 Jazzy · Gazebo Harmonic · M09 · 따라 하기형 AGV 실습</a:t>
+              <a:t>ROS 2 기반 AGV End-to-End 개발 커리큘럼 · M09 · Block C</a:t>
             </a:r>
           </a:p>
         </p:txBody>
@@ -22506,7 +22506,7 @@
               <a:spcAft>
                 <a:spcPts val="0"/>
               </a:spcAft>
-              <a:defRPr sz="1000" b="0">
+              <a:defRPr sz="900" b="0">
                 <a:solidFill>
                   <a:srgbClr val="5C6672"/>
                 </a:solidFill>
@@ -22514,7 +22514,7 @@
               </a:defRPr>
             </a:pPr>
             <a:r>
-              <a:t>ROS 2 Jazzy · Gazebo Harmonic · M09 · 따라 하기형 AGV 실습</a:t>
+              <a:t>ROS 2 기반 AGV End-to-End 개발 커리큘럼 · M09 · Block C</a:t>
             </a:r>
           </a:p>
         </p:txBody>
@@ -22980,7 +22980,7 @@
               <a:spcAft>
                 <a:spcPts val="0"/>
               </a:spcAft>
-              <a:defRPr sz="1000" b="0">
+              <a:defRPr sz="900" b="0">
                 <a:solidFill>
                   <a:srgbClr val="5C6672"/>
                 </a:solidFill>
@@ -22988,7 +22988,7 @@
               </a:defRPr>
             </a:pPr>
             <a:r>
-              <a:t>ROS 2 Jazzy · Gazebo Harmonic · M09 · 따라 하기형 AGV 실습</a:t>
+              <a:t>ROS 2 기반 AGV End-to-End 개발 커리큘럼 · M09 · Block C</a:t>
             </a:r>
           </a:p>
         </p:txBody>
@@ -23399,7 +23399,7 @@
               <a:spcAft>
                 <a:spcPts val="0"/>
               </a:spcAft>
-              <a:defRPr sz="1000" b="0">
+              <a:defRPr sz="900" b="0">
                 <a:solidFill>
                   <a:srgbClr val="5C6672"/>
                 </a:solidFill>
@@ -23407,7 +23407,7 @@
               </a:defRPr>
             </a:pPr>
             <a:r>
-              <a:t>ROS 2 Jazzy · Gazebo Harmonic · M09 · 따라 하기형 AGV 실습</a:t>
+              <a:t>ROS 2 기반 AGV End-to-End 개발 커리큘럼 · M09 · Block C</a:t>
             </a:r>
           </a:p>
         </p:txBody>
@@ -23873,7 +23873,7 @@
               <a:spcAft>
                 <a:spcPts val="0"/>
               </a:spcAft>
-              <a:defRPr sz="1000" b="0">
+              <a:defRPr sz="900" b="0">
                 <a:solidFill>
                   <a:srgbClr val="5C6672"/>
                 </a:solidFill>
@@ -23881,7 +23881,7 @@
               </a:defRPr>
             </a:pPr>
             <a:r>
-              <a:t>ROS 2 Jazzy · Gazebo Harmonic · M09 · 따라 하기형 AGV 실습</a:t>
+              <a:t>ROS 2 기반 AGV End-to-End 개발 커리큘럼 · M09 · Block C</a:t>
             </a:r>
           </a:p>
         </p:txBody>
@@ -24347,7 +24347,7 @@
               <a:spcAft>
                 <a:spcPts val="0"/>
               </a:spcAft>
-              <a:defRPr sz="1000" b="0">
+              <a:defRPr sz="900" b="0">
                 <a:solidFill>
                   <a:srgbClr val="5C6672"/>
                 </a:solidFill>
@@ -24355,7 +24355,7 @@
               </a:defRPr>
             </a:pPr>
             <a:r>
-              <a:t>ROS 2 Jazzy · Gazebo Harmonic · M09 · 따라 하기형 AGV 실습</a:t>
+              <a:t>ROS 2 기반 AGV End-to-End 개발 커리큘럼 · M09 · Block C</a:t>
             </a:r>
           </a:p>
         </p:txBody>
@@ -24821,7 +24821,7 @@
               <a:spcAft>
                 <a:spcPts val="0"/>
               </a:spcAft>
-              <a:defRPr sz="1000" b="0">
+              <a:defRPr sz="900" b="0">
                 <a:solidFill>
                   <a:srgbClr val="5C6672"/>
                 </a:solidFill>
@@ -24829,7 +24829,7 @@
               </a:defRPr>
             </a:pPr>
             <a:r>
-              <a:t>ROS 2 Jazzy · Gazebo Harmonic · M09 · 따라 하기형 AGV 실습</a:t>
+              <a:t>ROS 2 기반 AGV End-to-End 개발 커리큘럼 · M09 · Block C</a:t>
             </a:r>
           </a:p>
         </p:txBody>
@@ -25295,7 +25295,7 @@
               <a:spcAft>
                 <a:spcPts val="0"/>
               </a:spcAft>
-              <a:defRPr sz="1000" b="0">
+              <a:defRPr sz="900" b="0">
                 <a:solidFill>
                   <a:srgbClr val="5C6672"/>
                 </a:solidFill>
@@ -25303,7 +25303,7 @@
               </a:defRPr>
             </a:pPr>
             <a:r>
-              <a:t>ROS 2 Jazzy · Gazebo Harmonic · M09 · 따라 하기형 AGV 실습</a:t>
+              <a:t>ROS 2 기반 AGV End-to-End 개발 커리큘럼 · M09 · Block C</a:t>
             </a:r>
           </a:p>
         </p:txBody>
@@ -25769,7 +25769,7 @@
               <a:spcAft>
                 <a:spcPts val="0"/>
               </a:spcAft>
-              <a:defRPr sz="1000" b="0">
+              <a:defRPr sz="900" b="0">
                 <a:solidFill>
                   <a:srgbClr val="5C6672"/>
                 </a:solidFill>
@@ -25777,7 +25777,7 @@
               </a:defRPr>
             </a:pPr>
             <a:r>
-              <a:t>ROS 2 Jazzy · Gazebo Harmonic · M09 · 따라 하기형 AGV 실습</a:t>
+              <a:t>ROS 2 기반 AGV End-to-End 개발 커리큘럼 · M09 · Block C</a:t>
             </a:r>
           </a:p>
         </p:txBody>
@@ -26243,7 +26243,7 @@
               <a:spcAft>
                 <a:spcPts val="0"/>
               </a:spcAft>
-              <a:defRPr sz="1000" b="0">
+              <a:defRPr sz="900" b="0">
                 <a:solidFill>
                   <a:srgbClr val="5C6672"/>
                 </a:solidFill>
@@ -26251,7 +26251,7 @@
               </a:defRPr>
             </a:pPr>
             <a:r>
-              <a:t>ROS 2 Jazzy · Gazebo Harmonic · M09 · 따라 하기형 AGV 실습</a:t>
+              <a:t>ROS 2 기반 AGV End-to-End 개발 커리큘럼 · M09 · Block C</a:t>
             </a:r>
           </a:p>
         </p:txBody>
@@ -26717,7 +26717,7 @@
               <a:spcAft>
                 <a:spcPts val="0"/>
               </a:spcAft>
-              <a:defRPr sz="1000" b="0">
+              <a:defRPr sz="900" b="0">
                 <a:solidFill>
                   <a:srgbClr val="5C6672"/>
                 </a:solidFill>
@@ -26725,7 +26725,7 @@
               </a:defRPr>
             </a:pPr>
             <a:r>
-              <a:t>ROS 2 Jazzy · Gazebo Harmonic · M09 · 따라 하기형 AGV 실습</a:t>
+              <a:t>ROS 2 기반 AGV End-to-End 개발 커리큘럼 · M09 · Block C</a:t>
             </a:r>
           </a:p>
         </p:txBody>
@@ -27191,7 +27191,7 @@
               <a:spcAft>
                 <a:spcPts val="0"/>
               </a:spcAft>
-              <a:defRPr sz="1000" b="0">
+              <a:defRPr sz="900" b="0">
                 <a:solidFill>
                   <a:srgbClr val="5C6672"/>
                 </a:solidFill>
@@ -27199,7 +27199,7 @@
               </a:defRPr>
             </a:pPr>
             <a:r>
-              <a:t>ROS 2 Jazzy · Gazebo Harmonic · M09 · 따라 하기형 AGV 실습</a:t>
+              <a:t>ROS 2 기반 AGV End-to-End 개발 커리큘럼 · M09 · Block C</a:t>
             </a:r>
           </a:p>
         </p:txBody>
@@ -27665,7 +27665,7 @@
               <a:spcAft>
                 <a:spcPts val="0"/>
               </a:spcAft>
-              <a:defRPr sz="1000" b="0">
+              <a:defRPr sz="900" b="0">
                 <a:solidFill>
                   <a:srgbClr val="5C6672"/>
                 </a:solidFill>
@@ -27673,7 +27673,7 @@
               </a:defRPr>
             </a:pPr>
             <a:r>
-              <a:t>ROS 2 Jazzy · Gazebo Harmonic · M09 · 따라 하기형 AGV 실습</a:t>
+              <a:t>ROS 2 기반 AGV End-to-End 개발 커리큘럼 · M09 · Block C</a:t>
             </a:r>
           </a:p>
         </p:txBody>
@@ -28139,7 +28139,7 @@
               <a:spcAft>
                 <a:spcPts val="0"/>
               </a:spcAft>
-              <a:defRPr sz="1000" b="0">
+              <a:defRPr sz="900" b="0">
                 <a:solidFill>
                   <a:srgbClr val="5C6672"/>
                 </a:solidFill>
@@ -28147,7 +28147,7 @@
               </a:defRPr>
             </a:pPr>
             <a:r>
-              <a:t>ROS 2 Jazzy · Gazebo Harmonic · M09 · 따라 하기형 AGV 실습</a:t>
+              <a:t>ROS 2 기반 AGV End-to-End 개발 커리큘럼 · M09 · Block C</a:t>
             </a:r>
           </a:p>
         </p:txBody>
@@ -28472,7 +28472,7 @@
               <a:spcAft>
                 <a:spcPts val="0"/>
               </a:spcAft>
-              <a:defRPr sz="1000" b="0">
+              <a:defRPr sz="900" b="0">
                 <a:solidFill>
                   <a:srgbClr val="5C6672"/>
                 </a:solidFill>
@@ -28480,7 +28480,7 @@
               </a:defRPr>
             </a:pPr>
             <a:r>
-              <a:t>ROS 2 Jazzy · Gazebo Harmonic · M09 · 따라 하기형 AGV 실습</a:t>
+              <a:t>ROS 2 기반 AGV End-to-End 개발 커리큘럼 · M09 · Block C</a:t>
             </a:r>
           </a:p>
         </p:txBody>
@@ -28946,7 +28946,7 @@
               <a:spcAft>
                 <a:spcPts val="0"/>
               </a:spcAft>
-              <a:defRPr sz="1000" b="0">
+              <a:defRPr sz="900" b="0">
                 <a:solidFill>
                   <a:srgbClr val="5C6672"/>
                 </a:solidFill>
@@ -28954,7 +28954,7 @@
               </a:defRPr>
             </a:pPr>
             <a:r>
-              <a:t>ROS 2 Jazzy · Gazebo Harmonic · M09 · 따라 하기형 AGV 실습</a:t>
+              <a:t>ROS 2 기반 AGV End-to-End 개발 커리큘럼 · M09 · Block C</a:t>
             </a:r>
           </a:p>
         </p:txBody>
@@ -29420,7 +29420,7 @@
               <a:spcAft>
                 <a:spcPts val="0"/>
               </a:spcAft>
-              <a:defRPr sz="1000" b="0">
+              <a:defRPr sz="900" b="0">
                 <a:solidFill>
                   <a:srgbClr val="5C6672"/>
                 </a:solidFill>
@@ -29428,7 +29428,7 @@
               </a:defRPr>
             </a:pPr>
             <a:r>
-              <a:t>ROS 2 Jazzy · Gazebo Harmonic · M09 · 따라 하기형 AGV 실습</a:t>
+              <a:t>ROS 2 기반 AGV End-to-End 개발 커리큘럼 · M09 · Block C</a:t>
             </a:r>
           </a:p>
         </p:txBody>
@@ -29894,7 +29894,7 @@
               <a:spcAft>
                 <a:spcPts val="0"/>
               </a:spcAft>
-              <a:defRPr sz="1000" b="0">
+              <a:defRPr sz="900" b="0">
                 <a:solidFill>
                   <a:srgbClr val="5C6672"/>
                 </a:solidFill>
@@ -29902,7 +29902,7 @@
               </a:defRPr>
             </a:pPr>
             <a:r>
-              <a:t>ROS 2 Jazzy · Gazebo Harmonic · M09 · 따라 하기형 AGV 실습</a:t>
+              <a:t>ROS 2 기반 AGV End-to-End 개발 커리큘럼 · M09 · Block C</a:t>
             </a:r>
           </a:p>
         </p:txBody>
@@ -30368,7 +30368,7 @@
               <a:spcAft>
                 <a:spcPts val="0"/>
               </a:spcAft>
-              <a:defRPr sz="1000" b="0">
+              <a:defRPr sz="900" b="0">
                 <a:solidFill>
                   <a:srgbClr val="5C6672"/>
                 </a:solidFill>
@@ -30376,7 +30376,7 @@
               </a:defRPr>
             </a:pPr>
             <a:r>
-              <a:t>ROS 2 Jazzy · Gazebo Harmonic · M09 · 따라 하기형 AGV 실습</a:t>
+              <a:t>ROS 2 기반 AGV End-to-End 개발 커리큘럼 · M09 · Block C</a:t>
             </a:r>
           </a:p>
         </p:txBody>
@@ -30842,7 +30842,7 @@
               <a:spcAft>
                 <a:spcPts val="0"/>
               </a:spcAft>
-              <a:defRPr sz="1000" b="0">
+              <a:defRPr sz="900" b="0">
                 <a:solidFill>
                   <a:srgbClr val="5C6672"/>
                 </a:solidFill>
@@ -30850,7 +30850,7 @@
               </a:defRPr>
             </a:pPr>
             <a:r>
-              <a:t>ROS 2 Jazzy · Gazebo Harmonic · M09 · 따라 하기형 AGV 실습</a:t>
+              <a:t>ROS 2 기반 AGV End-to-End 개발 커리큘럼 · M09 · Block C</a:t>
             </a:r>
           </a:p>
         </p:txBody>
@@ -31316,7 +31316,7 @@
               <a:spcAft>
                 <a:spcPts val="0"/>
               </a:spcAft>
-              <a:defRPr sz="1000" b="0">
+              <a:defRPr sz="900" b="0">
                 <a:solidFill>
                   <a:srgbClr val="5C6672"/>
                 </a:solidFill>
@@ -31324,7 +31324,7 @@
               </a:defRPr>
             </a:pPr>
             <a:r>
-              <a:t>ROS 2 Jazzy · Gazebo Harmonic · M09 · 따라 하기형 AGV 실습</a:t>
+              <a:t>ROS 2 기반 AGV End-to-End 개발 커리큘럼 · M09 · Block C</a:t>
             </a:r>
           </a:p>
         </p:txBody>
@@ -31790,7 +31790,7 @@
               <a:spcAft>
                 <a:spcPts val="0"/>
               </a:spcAft>
-              <a:defRPr sz="1000" b="0">
+              <a:defRPr sz="900" b="0">
                 <a:solidFill>
                   <a:srgbClr val="5C6672"/>
                 </a:solidFill>
@@ -31798,7 +31798,7 @@
               </a:defRPr>
             </a:pPr>
             <a:r>
-              <a:t>ROS 2 Jazzy · Gazebo Harmonic · M09 · 따라 하기형 AGV 실습</a:t>
+              <a:t>ROS 2 기반 AGV End-to-End 개발 커리큘럼 · M09 · Block C</a:t>
             </a:r>
           </a:p>
         </p:txBody>
@@ -32264,7 +32264,7 @@
               <a:spcAft>
                 <a:spcPts val="0"/>
               </a:spcAft>
-              <a:defRPr sz="1000" b="0">
+              <a:defRPr sz="900" b="0">
                 <a:solidFill>
                   <a:srgbClr val="5C6672"/>
                 </a:solidFill>
@@ -32272,7 +32272,7 @@
               </a:defRPr>
             </a:pPr>
             <a:r>
-              <a:t>ROS 2 Jazzy · Gazebo Harmonic · M09 · 따라 하기형 AGV 실습</a:t>
+              <a:t>ROS 2 기반 AGV End-to-End 개발 커리큘럼 · M09 · Block C</a:t>
             </a:r>
           </a:p>
         </p:txBody>
@@ -32738,7 +32738,7 @@
               <a:spcAft>
                 <a:spcPts val="0"/>
               </a:spcAft>
-              <a:defRPr sz="1000" b="0">
+              <a:defRPr sz="900" b="0">
                 <a:solidFill>
                   <a:srgbClr val="5C6672"/>
                 </a:solidFill>
@@ -32746,7 +32746,7 @@
               </a:defRPr>
             </a:pPr>
             <a:r>
-              <a:t>ROS 2 Jazzy · Gazebo Harmonic · M09 · 따라 하기형 AGV 실습</a:t>
+              <a:t>ROS 2 기반 AGV End-to-End 개발 커리큘럼 · M09 · Block C</a:t>
             </a:r>
           </a:p>
         </p:txBody>
@@ -33212,7 +33212,7 @@
               <a:spcAft>
                 <a:spcPts val="0"/>
               </a:spcAft>
-              <a:defRPr sz="1000" b="0">
+              <a:defRPr sz="900" b="0">
                 <a:solidFill>
                   <a:srgbClr val="5C6672"/>
                 </a:solidFill>
@@ -33220,7 +33220,7 @@
               </a:defRPr>
             </a:pPr>
             <a:r>
-              <a:t>ROS 2 Jazzy · Gazebo Harmonic · M09 · 따라 하기형 AGV 실습</a:t>
+              <a:t>ROS 2 기반 AGV End-to-End 개발 커리큘럼 · M09 · Block C</a:t>
             </a:r>
           </a:p>
         </p:txBody>
@@ -33852,7 +33852,7 @@
               <a:spcAft>
                 <a:spcPts val="0"/>
               </a:spcAft>
-              <a:defRPr sz="1000" b="0">
+              <a:defRPr sz="900" b="0">
                 <a:solidFill>
                   <a:srgbClr val="5C6672"/>
                 </a:solidFill>
@@ -33860,7 +33860,7 @@
               </a:defRPr>
             </a:pPr>
             <a:r>
-              <a:t>ROS 2 Jazzy · Gazebo Harmonic · M09 · 따라 하기형 AGV 실습</a:t>
+              <a:t>ROS 2 기반 AGV End-to-End 개발 커리큘럼 · M09 · Block C</a:t>
             </a:r>
           </a:p>
         </p:txBody>
@@ -34326,7 +34326,7 @@
               <a:spcAft>
                 <a:spcPts val="0"/>
               </a:spcAft>
-              <a:defRPr sz="1000" b="0">
+              <a:defRPr sz="900" b="0">
                 <a:solidFill>
                   <a:srgbClr val="5C6672"/>
                 </a:solidFill>
@@ -34334,7 +34334,7 @@
               </a:defRPr>
             </a:pPr>
             <a:r>
-              <a:t>ROS 2 Jazzy · Gazebo Harmonic · M09 · 따라 하기형 AGV 실습</a:t>
+              <a:t>ROS 2 기반 AGV End-to-End 개발 커리큘럼 · M09 · Block C</a:t>
             </a:r>
           </a:p>
         </p:txBody>
@@ -34800,7 +34800,7 @@
               <a:spcAft>
                 <a:spcPts val="0"/>
               </a:spcAft>
-              <a:defRPr sz="1000" b="0">
+              <a:defRPr sz="900" b="0">
                 <a:solidFill>
                   <a:srgbClr val="5C6672"/>
                 </a:solidFill>
@@ -34808,7 +34808,7 @@
               </a:defRPr>
             </a:pPr>
             <a:r>
-              <a:t>ROS 2 Jazzy · Gazebo Harmonic · M09 · 따라 하기형 AGV 실습</a:t>
+              <a:t>ROS 2 기반 AGV End-to-End 개발 커리큘럼 · M09 · Block C</a:t>
             </a:r>
           </a:p>
         </p:txBody>
@@ -35271,7 +35271,7 @@
               <a:spcAft>
                 <a:spcPts val="0"/>
               </a:spcAft>
-              <a:defRPr sz="1000" b="0">
+              <a:defRPr sz="900" b="0">
                 <a:solidFill>
                   <a:srgbClr val="5C6672"/>
                 </a:solidFill>
@@ -35279,7 +35279,7 @@
               </a:defRPr>
             </a:pPr>
             <a:r>
-              <a:t>ROS 2 Jazzy · Gazebo Harmonic · M09 · 따라 하기형 AGV 실습</a:t>
+              <a:t>ROS 2 기반 AGV End-to-End 개발 커리큘럼 · M09 · Block C</a:t>
             </a:r>
           </a:p>
         </p:txBody>
@@ -35799,7 +35799,7 @@
               <a:spcAft>
                 <a:spcPts val="0"/>
               </a:spcAft>
-              <a:defRPr sz="1000" b="0">
+              <a:defRPr sz="900" b="0">
                 <a:solidFill>
                   <a:srgbClr val="5C6672"/>
                 </a:solidFill>
@@ -35807,7 +35807,7 @@
               </a:defRPr>
             </a:pPr>
             <a:r>
-              <a:t>ROS 2 Jazzy · Gazebo Harmonic · M09 · 따라 하기형 AGV 실습</a:t>
+              <a:t>ROS 2 기반 AGV End-to-End 개발 커리큘럼 · M09 · Block C</a:t>
             </a:r>
           </a:p>
         </p:txBody>
@@ -36588,7 +36588,7 @@
               <a:spcAft>
                 <a:spcPts val="0"/>
               </a:spcAft>
-              <a:defRPr sz="1000" b="0">
+              <a:defRPr sz="900" b="0">
                 <a:solidFill>
                   <a:srgbClr val="5C6672"/>
                 </a:solidFill>
@@ -36596,7 +36596,7 @@
               </a:defRPr>
             </a:pPr>
             <a:r>
-              <a:t>ROS 2 Jazzy · Gazebo Harmonic · M09 · 따라 하기형 AGV 실습</a:t>
+              <a:t>ROS 2 기반 AGV End-to-End 개발 커리큘럼 · M09 · Block C</a:t>
             </a:r>
           </a:p>
         </p:txBody>
@@ -37377,7 +37377,7 @@
               <a:spcAft>
                 <a:spcPts val="0"/>
               </a:spcAft>
-              <a:defRPr sz="1000" b="0">
+              <a:defRPr sz="900" b="0">
                 <a:solidFill>
                   <a:srgbClr val="5C6672"/>
                 </a:solidFill>
@@ -37385,7 +37385,7 @@
               </a:defRPr>
             </a:pPr>
             <a:r>
-              <a:t>ROS 2 Jazzy · Gazebo Harmonic · M09 · 따라 하기형 AGV 실습</a:t>
+              <a:t>ROS 2 기반 AGV End-to-End 개발 커리큘럼 · M09 · Block C</a:t>
             </a:r>
           </a:p>
         </p:txBody>
@@ -38170,7 +38170,7 @@
               <a:spcAft>
                 <a:spcPts val="0"/>
               </a:spcAft>
-              <a:defRPr sz="1000" b="0">
+              <a:defRPr sz="900" b="0">
                 <a:solidFill>
                   <a:srgbClr val="5C6672"/>
                 </a:solidFill>
@@ -38178,7 +38178,7 @@
               </a:defRPr>
             </a:pPr>
             <a:r>
-              <a:t>ROS 2 Jazzy · Gazebo Harmonic · M09 · 따라 하기형 AGV 실습</a:t>
+              <a:t>ROS 2 기반 AGV End-to-End 개발 커리큘럼 · M09 · Block C</a:t>
             </a:r>
           </a:p>
         </p:txBody>
@@ -38963,7 +38963,7 @@
               <a:spcAft>
                 <a:spcPts val="0"/>
               </a:spcAft>
-              <a:defRPr sz="1000" b="0">
+              <a:defRPr sz="900" b="0">
                 <a:solidFill>
                   <a:srgbClr val="5C6672"/>
                 </a:solidFill>
@@ -38971,7 +38971,7 @@
               </a:defRPr>
             </a:pPr>
             <a:r>
-              <a:t>ROS 2 Jazzy · Gazebo Harmonic · M09 · 따라 하기형 AGV 실습</a:t>
+              <a:t>ROS 2 기반 AGV End-to-End 개발 커리큘럼 · M09 · Block C</a:t>
             </a:r>
           </a:p>
         </p:txBody>
@@ -39532,7 +39532,7 @@
               <a:spcAft>
                 <a:spcPts val="0"/>
               </a:spcAft>
-              <a:defRPr sz="1000" b="0">
+              <a:defRPr sz="900" b="0">
                 <a:solidFill>
                   <a:srgbClr val="5C6672"/>
                 </a:solidFill>
@@ -39540,7 +39540,7 @@
               </a:defRPr>
             </a:pPr>
             <a:r>
-              <a:t>ROS 2 Jazzy · Gazebo Harmonic · M09 · 따라 하기형 AGV 실습</a:t>
+              <a:t>ROS 2 기반 AGV End-to-End 개발 커리큘럼 · M09 · Block C</a:t>
             </a:r>
           </a:p>
         </p:txBody>
@@ -40000,7 +40000,7 @@
               <a:spcAft>
                 <a:spcPts val="0"/>
               </a:spcAft>
-              <a:defRPr sz="1000" b="0">
+              <a:defRPr sz="900" b="0">
                 <a:solidFill>
                   <a:srgbClr val="5C6672"/>
                 </a:solidFill>
@@ -40008,7 +40008,7 @@
               </a:defRPr>
             </a:pPr>
             <a:r>
-              <a:t>ROS 2 Jazzy · Gazebo Harmonic · M09 · 따라 하기형 AGV 실습</a:t>
+              <a:t>ROS 2 기반 AGV End-to-End 개발 커리큘럼 · M09 · Block C</a:t>
             </a:r>
           </a:p>
         </p:txBody>
@@ -40237,7 +40237,7 @@
               <a:spcAft>
                 <a:spcPts val="0"/>
               </a:spcAft>
-              <a:defRPr sz="1000" b="0">
+              <a:defRPr sz="900" b="0">
                 <a:solidFill>
                   <a:srgbClr val="5C6672"/>
                 </a:solidFill>
@@ -40245,7 +40245,7 @@
               </a:defRPr>
             </a:pPr>
             <a:r>
-              <a:t>ROS 2 Jazzy · Gazebo Harmonic · M09 · 따라 하기형 AGV 실습</a:t>
+              <a:t>ROS 2 기반 AGV End-to-End 개발 커리큘럼 · M09 · Block C</a:t>
             </a:r>
           </a:p>
         </p:txBody>
@@ -40708,7 +40708,7 @@
               <a:spcAft>
                 <a:spcPts val="0"/>
               </a:spcAft>
-              <a:defRPr sz="1000" b="0">
+              <a:defRPr sz="900" b="0">
                 <a:solidFill>
                   <a:srgbClr val="5C6672"/>
                 </a:solidFill>
@@ -40716,7 +40716,7 @@
               </a:defRPr>
             </a:pPr>
             <a:r>
-              <a:t>ROS 2 Jazzy · Gazebo Harmonic · M09 · 따라 하기형 AGV 실습</a:t>
+              <a:t>ROS 2 기반 AGV End-to-End 개발 커리큘럼 · M09 · Block C</a:t>
             </a:r>
           </a:p>
         </p:txBody>
@@ -41179,7 +41179,7 @@
               <a:spcAft>
                 <a:spcPts val="0"/>
               </a:spcAft>
-              <a:defRPr sz="1000" b="0">
+              <a:defRPr sz="900" b="0">
                 <a:solidFill>
                   <a:srgbClr val="5C6672"/>
                 </a:solidFill>
@@ -41187,7 +41187,7 @@
               </a:defRPr>
             </a:pPr>
             <a:r>
-              <a:t>ROS 2 Jazzy · Gazebo Harmonic · M09 · 따라 하기형 AGV 실습</a:t>
+              <a:t>ROS 2 기반 AGV End-to-End 개발 커리큘럼 · M09 · Block C</a:t>
             </a:r>
           </a:p>
         </p:txBody>
@@ -41629,7 +41629,7 @@
               <a:spcAft>
                 <a:spcPts val="0"/>
               </a:spcAft>
-              <a:defRPr sz="1000" b="0">
+              <a:defRPr sz="900" b="0">
                 <a:solidFill>
                   <a:srgbClr val="5C6672"/>
                 </a:solidFill>
@@ -41637,7 +41637,7 @@
               </a:defRPr>
             </a:pPr>
             <a:r>
-              <a:t>ROS 2 Jazzy · Gazebo Harmonic · M09 · 따라 하기형 AGV 실습</a:t>
+              <a:t>ROS 2 기반 AGV End-to-End 개발 커리큘럼 · M09 · Block C</a:t>
             </a:r>
           </a:p>
         </p:txBody>
@@ -42083,7 +42083,7 @@
               <a:spcAft>
                 <a:spcPts val="0"/>
               </a:spcAft>
-              <a:defRPr sz="1000" b="0">
+              <a:defRPr sz="900" b="0">
                 <a:solidFill>
                   <a:srgbClr val="5C6672"/>
                 </a:solidFill>
@@ -42091,7 +42091,7 @@
               </a:defRPr>
             </a:pPr>
             <a:r>
-              <a:t>ROS 2 Jazzy · Gazebo Harmonic · M09 · 따라 하기형 AGV 실습</a:t>
+              <a:t>ROS 2 기반 AGV End-to-End 개발 커리큘럼 · M09 · Block C</a:t>
             </a:r>
           </a:p>
         </p:txBody>
@@ -42455,7 +42455,7 @@
               <a:spcAft>
                 <a:spcPts val="0"/>
               </a:spcAft>
-              <a:defRPr sz="1000" b="0">
+              <a:defRPr sz="900" b="0">
                 <a:solidFill>
                   <a:srgbClr val="5C6672"/>
                 </a:solidFill>
@@ -42463,7 +42463,7 @@
               </a:defRPr>
             </a:pPr>
             <a:r>
-              <a:t>ROS 2 Jazzy · Gazebo Harmonic · M09 · 따라 하기형 AGV 실습</a:t>
+              <a:t>ROS 2 기반 AGV End-to-End 개발 커리큘럼 · M09 · Block C</a:t>
             </a:r>
           </a:p>
         </p:txBody>
@@ -42692,7 +42692,7 @@
               <a:spcAft>
                 <a:spcPts val="0"/>
               </a:spcAft>
-              <a:defRPr sz="1000" b="0">
+              <a:defRPr sz="900" b="0">
                 <a:solidFill>
                   <a:srgbClr val="5C6672"/>
                 </a:solidFill>
@@ -42700,7 +42700,7 @@
               </a:defRPr>
             </a:pPr>
             <a:r>
-              <a:t>ROS 2 Jazzy · Gazebo Harmonic · M09 · 따라 하기형 AGV 실습</a:t>
+              <a:t>ROS 2 기반 AGV End-to-End 개발 커리큘럼 · M09 · Block C</a:t>
             </a:r>
           </a:p>
         </p:txBody>
@@ -43095,7 +43095,7 @@
               <a:spcAft>
                 <a:spcPts val="0"/>
               </a:spcAft>
-              <a:defRPr sz="1000" b="0">
+              <a:defRPr sz="900" b="0">
                 <a:solidFill>
                   <a:srgbClr val="5C6672"/>
                 </a:solidFill>
@@ -43103,7 +43103,7 @@
               </a:defRPr>
             </a:pPr>
             <a:r>
-              <a:t>ROS 2 Jazzy · Gazebo Harmonic · M09 · 따라 하기형 AGV 실습</a:t>
+              <a:t>ROS 2 기반 AGV End-to-End 개발 커리큘럼 · M09 · Block C</a:t>
             </a:r>
           </a:p>
         </p:txBody>
@@ -43620,7 +43620,7 @@
               <a:spcAft>
                 <a:spcPts val="0"/>
               </a:spcAft>
-              <a:defRPr sz="1000" b="0">
+              <a:defRPr sz="900" b="0">
                 <a:solidFill>
                   <a:srgbClr val="5C6672"/>
                 </a:solidFill>
@@ -43628,7 +43628,7 @@
               </a:defRPr>
             </a:pPr>
             <a:r>
-              <a:t>ROS 2 Jazzy · Gazebo Harmonic · M09 · 따라 하기형 AGV 실습</a:t>
+              <a:t>ROS 2 기반 AGV End-to-End 개발 커리큘럼 · M09 · Block C</a:t>
             </a:r>
           </a:p>
         </p:txBody>
@@ -44004,7 +44004,7 @@
               <a:spcAft>
                 <a:spcPts val="0"/>
               </a:spcAft>
-              <a:defRPr sz="1000" b="0">
+              <a:defRPr sz="900" b="0">
                 <a:solidFill>
                   <a:srgbClr val="5C6672"/>
                 </a:solidFill>
@@ -44012,7 +44012,7 @@
               </a:defRPr>
             </a:pPr>
             <a:r>
-              <a:t>ROS 2 Jazzy · Gazebo Harmonic · M09 · 따라 하기형 AGV 실습</a:t>
+              <a:t>ROS 2 기반 AGV End-to-End 개발 커리큘럼 · M09 · Block C</a:t>
             </a:r>
           </a:p>
         </p:txBody>
@@ -44333,7 +44333,7 @@
               <a:spcAft>
                 <a:spcPts val="0"/>
               </a:spcAft>
-              <a:defRPr sz="1000" b="0">
+              <a:defRPr sz="900" b="0">
                 <a:solidFill>
                   <a:srgbClr val="5C6672"/>
                 </a:solidFill>
@@ -44341,7 +44341,7 @@
               </a:defRPr>
             </a:pPr>
             <a:r>
-              <a:t>ROS 2 Jazzy · Gazebo Harmonic · M09 · 따라 하기형 AGV 실습</a:t>
+              <a:t>ROS 2 기반 AGV End-to-End 개발 커리큘럼 · M09 · Block C</a:t>
             </a:r>
           </a:p>
         </p:txBody>
@@ -44891,7 +44891,7 @@
               <a:spcAft>
                 <a:spcPts val="0"/>
               </a:spcAft>
-              <a:defRPr sz="1000" b="0">
+              <a:defRPr sz="900" b="0">
                 <a:solidFill>
                   <a:srgbClr val="5C6672"/>
                 </a:solidFill>
@@ -44899,7 +44899,7 @@
               </a:defRPr>
             </a:pPr>
             <a:r>
-              <a:t>ROS 2 Jazzy · Gazebo Harmonic · M09 · 따라 하기형 AGV 실습</a:t>
+              <a:t>ROS 2 기반 AGV End-to-End 개발 커리큘럼 · M09 · Block C</a:t>
             </a:r>
           </a:p>
         </p:txBody>
@@ -45310,7 +45310,7 @@
               <a:spcAft>
                 <a:spcPts val="0"/>
               </a:spcAft>
-              <a:defRPr sz="1000" b="0">
+              <a:defRPr sz="900" b="0">
                 <a:solidFill>
                   <a:srgbClr val="5C6672"/>
                 </a:solidFill>
@@ -45318,7 +45318,7 @@
               </a:defRPr>
             </a:pPr>
             <a:r>
-              <a:t>ROS 2 Jazzy · Gazebo Harmonic · M09 · 따라 하기형 AGV 실습</a:t>
+              <a:t>ROS 2 기반 AGV End-to-End 개발 커리큘럼 · M09 · Block C</a:t>
             </a:r>
           </a:p>
         </p:txBody>
@@ -45841,7 +45841,7 @@
               <a:spcAft>
                 <a:spcPts val="0"/>
               </a:spcAft>
-              <a:defRPr sz="1000" b="0">
+              <a:defRPr sz="900" b="0">
                 <a:solidFill>
                   <a:srgbClr val="5C6672"/>
                 </a:solidFill>
@@ -45849,7 +45849,7 @@
               </a:defRPr>
             </a:pPr>
             <a:r>
-              <a:t>ROS 2 Jazzy · Gazebo Harmonic · M09 · 따라 하기형 AGV 실습</a:t>
+              <a:t>ROS 2 기반 AGV End-to-End 개발 커리큘럼 · M09 · Block C</a:t>
             </a:r>
           </a:p>
         </p:txBody>
@@ -46128,7 +46128,7 @@
               <a:spcAft>
                 <a:spcPts val="0"/>
               </a:spcAft>
-              <a:defRPr sz="1000" b="0">
+              <a:defRPr sz="900" b="0">
                 <a:solidFill>
                   <a:srgbClr val="5C6672"/>
                 </a:solidFill>
@@ -46136,7 +46136,7 @@
               </a:defRPr>
             </a:pPr>
             <a:r>
-              <a:t>ROS 2 Jazzy · Gazebo Harmonic · M09 · 따라 하기형 AGV 실습</a:t>
+              <a:t>ROS 2 기반 AGV End-to-End 개발 커리큘럼 · M09 · Block C</a:t>
             </a:r>
           </a:p>
         </p:txBody>

--- a/blocks/C_drive_visualization/M09_differential_drive/M09_Differential_Drive_구동.pptx
+++ b/blocks/C_drive_visualization/M09_differential_drive/M09_Differential_Drive_구동.pptx
@@ -76,6 +76,7 @@
     <p:sldId id="324" r:id="rId76"/>
     <p:sldId id="325" r:id="rId77"/>
     <p:sldId id="326" r:id="rId78"/>
+    <p:sldId id="327" r:id="rId79"/>
   </p:sldIdLst>
   <p:sldSz cx="12191999" cy="6858000" type="screen4x3"/>
   <p:notesSz cx="6858000" cy="9144000"/>
@@ -5562,7 +5563,7 @@
           </a:p>
           <a:p>
             <a:r>
-              <a:t>[확인] 명령·설정과 화면의 topic·frame·결과 이름을 대조합니다.</a:t>
+              <a:t>[확인] 파란 base와 두 검은 바퀴를 먼저 찾고, 다음 명령에서 /cmd_vel이 이 model의 DiffDrive plugin으로 들어간다고 연결합니다.</a:t>
             </a:r>
           </a:p>
           <a:p>
@@ -6022,12 +6023,43 @@
           </a:p>
           <a:p>
             <a:r>
-              <a:t>[실행] ros2 launch agv_gazebo gazebo.launch.py</a:t>
-            </a:r>
-          </a:p>
-          <a:p>
-            <a:r>
-              <a:t># 새 터미널: ros2 run agv_control cmd_test_node</a:t>
+              <a:t>[실행] # 터미널 1</a:t>
+            </a:r>
+          </a:p>
+          <a:p>
+            <a:r>
+              <a:t>source /opt/ros/jazzy/setup.bash</a:t>
+            </a:r>
+          </a:p>
+          <a:p>
+            <a:r>
+              <a:t>source ~/ros2_curri/my_agv_ws/install/setup.bash</a:t>
+            </a:r>
+          </a:p>
+          <a:p>
+            <a:r>
+              <a:t>ros2 launch agv_gazebo gazebo.launch.py</a:t>
+            </a:r>
+          </a:p>
+          <a:p/>
+          <a:p>
+            <a:r>
+              <a:t># 터미널 2</a:t>
+            </a:r>
+          </a:p>
+          <a:p>
+            <a:r>
+              <a:t>source /opt/ros/jazzy/setup.bash</a:t>
+            </a:r>
+          </a:p>
+          <a:p>
+            <a:r>
+              <a:t>source ~/ros2_curri/my_agv_ws/install/setup.bash</a:t>
+            </a:r>
+          </a:p>
+          <a:p>
+            <a:r>
+              <a:t>ros2 run agv_control cmd_test_node</a:t>
             </a:r>
           </a:p>
           <a:p>
@@ -6122,7 +6154,7 @@
           </a:p>
           <a:p>
             <a:r>
-              <a:t>[확인] ① 명령/설정  ② 정상 출력 또는 화면  ③ 다음 검증 명령으로 재확인</a:t>
+              <a:t>[확인] 파란 base와 두 검은 바퀴를 먼저 찾고, 다음 명령에서 /cmd_vel이 이 model의 DiffDrive plugin으로 들어간다고 연결합니다.</a:t>
             </a:r>
           </a:p>
           <a:p>
@@ -6202,22 +6234,17 @@
           <a:lstStyle/>
           <a:p>
             <a:r>
-              <a:t>[설명] 검증 명령은 GUI 결과와 별도로 실행해 재현 가능한 완료 기준을 만든다.</a:t>
-            </a:r>
-          </a:p>
-          <a:p>
-            <a:r>
-              <a:t>[실행] ros2 topic info /cmd_vel</a:t>
-            </a:r>
-          </a:p>
-          <a:p>
-            <a:r>
-              <a:t>ros2 topic echo /odom --once</a:t>
-            </a:r>
-          </a:p>
-          <a:p>
-            <a:r>
-              <a:t>[확인] /cmd_vel에서 odom과 바퀴 구동 topic으로 이어지는 경로를 확인한다.</a:t>
+              <a:t>[설명] 실제 Ubuntu/ROS 2 환경에서 생성한 검증 화면이다.</a:t>
+            </a:r>
+          </a:p>
+          <a:p>
+            <a:r>
+              <a:t>[실행] 슬라이드의 명령 또는 파일 작성 단계를 진행한다.</a:t>
+            </a:r>
+          </a:p>
+          <a:p>
+            <a:r>
+              <a:t>[확인] ① 명령/설정  ② 정상 출력 또는 화면  ③ 다음 검증 명령으로 재확인</a:t>
             </a:r>
           </a:p>
           <a:p>
@@ -6297,17 +6324,22 @@
           <a:lstStyle/>
           <a:p>
             <a:r>
-              <a:t>[설명] 오류를 대신 해결하지 말고 증상부터 우선 확인 순서대로 교육생이 실행하게 한다.</a:t>
-            </a:r>
-          </a:p>
-          <a:p>
-            <a:r>
-              <a:t>[실행] 슬라이드의 명령 또는 파일 작성 단계를 진행한다.</a:t>
-            </a:r>
-          </a:p>
-          <a:p>
-            <a:r>
-              <a:t>[확인] 수정 뒤 첫 검증 명령을 다시 실행한다.</a:t>
+              <a:t>[설명] 검증 명령은 GUI 결과와 별도로 실행해 재현 가능한 완료 기준을 만든다.</a:t>
+            </a:r>
+          </a:p>
+          <a:p>
+            <a:r>
+              <a:t>[실행] ros2 topic info /cmd_vel</a:t>
+            </a:r>
+          </a:p>
+          <a:p>
+            <a:r>
+              <a:t>ros2 topic echo /odom --once</a:t>
+            </a:r>
+          </a:p>
+          <a:p>
+            <a:r>
+              <a:t>[확인] /cmd_vel에서 odom과 바퀴 구동 topic으로 이어지는 경로를 확인한다.</a:t>
             </a:r>
           </a:p>
           <a:p>
@@ -6317,7 +6349,7 @@
           </a:p>
           <a:p>
             <a:r>
-              <a:t>[오류] 슬라이드의 두 대표 오류를 먼저 사용한다.</a:t>
+              <a:t>[오류] 오류가 나면 현재 폴더, source, 파일 경로를 먼저 확인한다.</a:t>
             </a:r>
           </a:p>
         </p:txBody>
@@ -6387,37 +6419,17 @@
           <a:lstStyle/>
           <a:p>
             <a:r>
-              <a:t>[설명] Complete는 정답 복사본이 아니라 막혔을 때 비교·복구하는 안전망이다.</a:t>
-            </a:r>
-          </a:p>
-          <a:p>
-            <a:r>
-              <a:t>[실행] cd ~/ros2_curri</a:t>
-            </a:r>
-          </a:p>
-          <a:p>
-            <a:r>
-              <a:t>diff -ru my_agv_ws/src blocks/C_drive_visualization/M09_differential_drive/complete/agv_ws/src || true</a:t>
-            </a:r>
-          </a:p>
-          <a:p>
-            <a:r>
-              <a:t>cp -a my_agv_ws/src my_agv_ws/src_before_M09</a:t>
-            </a:r>
-          </a:p>
-          <a:p>
-            <a:r>
-              <a:t>cp -a blocks/C_drive_visualization/M09_differential_drive/complete/agv_ws/src/. my_agv_ws/src/</a:t>
-            </a:r>
-          </a:p>
-          <a:p>
-            <a:r>
-              <a:t>cd my_agv_ws &amp;&amp; colcon build --symlink-install &amp;&amp; source install/setup.bash</a:t>
-            </a:r>
-          </a:p>
-          <a:p>
-            <a:r>
-              <a:t>[확인] diff에서 내 파일과 Complete의 차이를 설명할 수 있다.</a:t>
+              <a:t>[설명] 오류를 대신 해결하지 말고 증상부터 우선 확인 순서대로 교육생이 실행하게 한다.</a:t>
+            </a:r>
+          </a:p>
+          <a:p>
+            <a:r>
+              <a:t>[실행] 슬라이드의 명령 또는 파일 작성 단계를 진행한다.</a:t>
+            </a:r>
+          </a:p>
+          <a:p>
+            <a:r>
+              <a:t>[확인] 수정 뒤 첫 검증 명령을 다시 실행한다.</a:t>
             </a:r>
           </a:p>
           <a:p>
@@ -6427,7 +6439,7 @@
           </a:p>
           <a:p>
             <a:r>
-              <a:t>[오류] 오류가 나면 현재 폴더, source, 파일 경로를 먼저 확인한다.</a:t>
+              <a:t>[오류] 슬라이드의 두 대표 오류를 먼저 사용한다.</a:t>
             </a:r>
           </a:p>
         </p:txBody>
@@ -6497,17 +6509,37 @@
           <a:lstStyle/>
           <a:p>
             <a:r>
-              <a:t>[설명] 교육생이 직접 한 값만 바꿔 원인과 결과를 연결하게 한다.</a:t>
-            </a:r>
-          </a:p>
-          <a:p>
-            <a:r>
-              <a:t>[실행] 슬라이드의 명령 또는 파일 작성 단계를 진행한다.</a:t>
-            </a:r>
-          </a:p>
-          <a:p>
-            <a:r>
-              <a:t>[확인] 원래 값과 변경 값을 모두 기록한다.</a:t>
+              <a:t>[설명] Complete는 정답 복사본이 아니라 막혔을 때 비교·복구하는 안전망이다.</a:t>
+            </a:r>
+          </a:p>
+          <a:p>
+            <a:r>
+              <a:t>[실행] cd ~/ros2_curri</a:t>
+            </a:r>
+          </a:p>
+          <a:p>
+            <a:r>
+              <a:t>diff -ru my_agv_ws/src blocks/C_drive_visualization/M09_differential_drive/complete/agv_ws/src || true</a:t>
+            </a:r>
+          </a:p>
+          <a:p>
+            <a:r>
+              <a:t>cp -a my_agv_ws/src my_agv_ws/src_before_M09</a:t>
+            </a:r>
+          </a:p>
+          <a:p>
+            <a:r>
+              <a:t>cp -a blocks/C_drive_visualization/M09_differential_drive/complete/agv_ws/src/. my_agv_ws/src/</a:t>
+            </a:r>
+          </a:p>
+          <a:p>
+            <a:r>
+              <a:t>cd my_agv_ws &amp;&amp; colcon build --symlink-install &amp;&amp; source install/setup.bash</a:t>
+            </a:r>
+          </a:p>
+          <a:p>
+            <a:r>
+              <a:t>[확인] diff에서 내 파일과 Complete의 차이를 설명할 수 있다.</a:t>
             </a:r>
           </a:p>
           <a:p>
@@ -6677,7 +6709,7 @@
           <a:lstStyle/>
           <a:p>
             <a:r>
-              <a:t>[설명] 교육생이 자신의 workspace·캡처·로그를 저장했는지 확인하고 다음 모듈의 시작 상태를 읽는다.</a:t>
+              <a:t>[설명] 교육생이 직접 한 값만 바꿔 원인과 결과를 연결하게 한다.</a:t>
             </a:r>
           </a:p>
           <a:p>
@@ -6687,7 +6719,7 @@
           </a:p>
           <a:p>
             <a:r>
-              <a:t>[확인] M10 ros_gz_bridge 시작 조건을 말할 수 있다.</a:t>
+              <a:t>[확인] 원래 값과 변경 값을 모두 기록한다.</a:t>
             </a:r>
           </a:p>
           <a:p>
@@ -6723,6 +6755,96 @@
 </file>
 
 <file path=ppt/notesSlides/notesSlide71.xml><?xml version="1.0" encoding="utf-8"?>
+<p:notes xmlns:a="http://schemas.openxmlformats.org/drawingml/2006/main" xmlns:p="http://schemas.openxmlformats.org/presentationml/2006/main" xmlns:r="http://schemas.openxmlformats.org/officeDocument/2006/relationships">
+  <p:cSld>
+    <p:spTree>
+      <p:nvGrpSpPr>
+        <p:cNvPr id="1" name=""/>
+        <p:cNvGrpSpPr/>
+        <p:nvPr/>
+      </p:nvGrpSpPr>
+      <p:grpSpPr>
+        <a:xfrm>
+          <a:off x="0" y="0"/>
+          <a:ext cx="0" cy="0"/>
+          <a:chOff x="0" y="0"/>
+          <a:chExt cx="0" cy="0"/>
+        </a:xfrm>
+      </p:grpSpPr>
+      <p:sp>
+        <p:nvSpPr>
+          <p:cNvPr id="2" name="Slide Image Placeholder 1"/>
+          <p:cNvSpPr>
+            <a:spLocks noGrp="1"/>
+          </p:cNvSpPr>
+          <p:nvPr>
+            <p:ph type="sldImg" idx="2"/>
+          </p:nvPr>
+        </p:nvSpPr>
+        <p:spPr/>
+      </p:sp>
+      <p:sp>
+        <p:nvSpPr>
+          <p:cNvPr id="3" name="Notes Placeholder 2"/>
+          <p:cNvSpPr>
+            <a:spLocks noGrp="1"/>
+          </p:cNvSpPr>
+          <p:nvPr>
+            <p:ph type="body" idx="3" sz="quarter"/>
+          </p:nvPr>
+        </p:nvSpPr>
+        <p:spPr/>
+        <p:txBody>
+          <a:bodyPr/>
+          <a:lstStyle/>
+          <a:p>
+            <a:r>
+              <a:t>[설명] 교육생이 자신의 workspace·캡처·로그를 저장했는지 확인하고 다음 모듈의 시작 상태를 읽는다.</a:t>
+            </a:r>
+          </a:p>
+          <a:p>
+            <a:r>
+              <a:t>[실행] 슬라이드의 명령 또는 파일 작성 단계를 진행한다.</a:t>
+            </a:r>
+          </a:p>
+          <a:p>
+            <a:r>
+              <a:t>[확인] M10 ros_gz_bridge 시작 조건을 말할 수 있다.</a:t>
+            </a:r>
+          </a:p>
+          <a:p>
+            <a:r>
+              <a:t>[멈춤] 교육생이 현재 체크포인트를 통과할 때까지 기다린다.</a:t>
+            </a:r>
+          </a:p>
+          <a:p>
+            <a:r>
+              <a:t>[오류] 오류가 나면 현재 폴더, source, 파일 경로를 먼저 확인한다.</a:t>
+            </a:r>
+          </a:p>
+        </p:txBody>
+      </p:sp>
+      <p:sp>
+        <p:nvSpPr>
+          <p:cNvPr id="4" name="Slide Number Placeholder 3"/>
+          <p:cNvSpPr>
+            <a:spLocks noGrp="1"/>
+          </p:cNvSpPr>
+          <p:nvPr>
+            <p:ph type="sldNum" idx="5" sz="quarter"/>
+          </p:nvPr>
+        </p:nvSpPr>
+        <p:spPr/>
+      </p:sp>
+    </p:spTree>
+  </p:cSld>
+  <p:clrMapOvr>
+    <a:masterClrMapping/>
+  </p:clrMapOvr>
+</p:notes>
+</file>
+
+<file path=ppt/notesSlides/notesSlide72.xml><?xml version="1.0" encoding="utf-8"?>
 <p:notes xmlns:a="http://schemas.openxmlformats.org/drawingml/2006/main" xmlns:p="http://schemas.openxmlformats.org/presentationml/2006/main" xmlns:r="http://schemas.openxmlformats.org/officeDocument/2006/relationships">
   <p:cSld>
     <p:spTree>
@@ -11473,7 +11595,7 @@
           </a:fontRef>
         </p:style>
         <p:txBody>
-          <a:bodyPr rtlCol="0" anchor="ctr" wrap="square" lIns="73152" rIns="73152" tIns="36576" bIns="36576"/>
+          <a:bodyPr rtlCol="0" anchor="ctr" wrap="square" lIns="109728" rIns="109728" tIns="73152" bIns="73152"/>
           <a:lstStyle/>
           <a:p>
             <a:pPr algn="l">
@@ -11490,11 +11612,35 @@
             <a:r>
               <a:t>cd ~/ros2_curri/my_agv_ws/src</a:t>
             </a:r>
-            <a:br/>
+          </a:p>
+          <a:p>
+            <a:pPr algn="l">
+              <a:spcAft>
+                <a:spcPts val="0"/>
+              </a:spcAft>
+              <a:defRPr sz="1500" b="0">
+                <a:solidFill>
+                  <a:srgbClr val="FFFFFF"/>
+                </a:solidFill>
+                <a:latin typeface="DejaVu Sans Mono"/>
+              </a:defRPr>
+            </a:pPr>
             <a:r>
               <a:t>ros2 pkg create --build-type ament_python agv_gazebo</a:t>
             </a:r>
-            <a:br/>
+          </a:p>
+          <a:p>
+            <a:pPr algn="l">
+              <a:spcAft>
+                <a:spcPts val="0"/>
+              </a:spcAft>
+              <a:defRPr sz="1500" b="0">
+                <a:solidFill>
+                  <a:srgbClr val="FFFFFF"/>
+                </a:solidFill>
+                <a:latin typeface="DejaVu Sans Mono"/>
+              </a:defRPr>
+            </a:pPr>
             <a:r>
               <a:t>mkdir -p agv_gazebo/models/agv agv_gazebo/worlds agv_gazebo/config agv_gazebo/launch</a:t>
             </a:r>
@@ -12005,7 +12151,7 @@
           </a:fontRef>
         </p:style>
         <p:txBody>
-          <a:bodyPr rtlCol="0" anchor="ctr" wrap="square" lIns="73152" rIns="73152" tIns="36576" bIns="36576"/>
+          <a:bodyPr rtlCol="0" anchor="ctr" wrap="square" lIns="109728" rIns="109728" tIns="73152" bIns="73152"/>
           <a:lstStyle/>
           <a:p>
             <a:pPr algn="l">
@@ -12022,7 +12168,19 @@
             <a:r>
               <a:t>mkdir -p ~/ros2_curri/my_agv_ws/src/agv_gazebo</a:t>
             </a:r>
-            <a:br/>
+          </a:p>
+          <a:p>
+            <a:pPr algn="l">
+              <a:spcAft>
+                <a:spcPts val="0"/>
+              </a:spcAft>
+              <a:defRPr sz="1600" b="0">
+                <a:solidFill>
+                  <a:srgbClr val="FFFFFF"/>
+                </a:solidFill>
+                <a:latin typeface="DejaVu Sans Mono"/>
+              </a:defRPr>
+            </a:pPr>
             <a:r>
               <a:t>nano ~/ros2_curri/my_agv_ws/src/agv_gazebo/package.xml</a:t>
             </a:r>
@@ -13836,7 +13994,7 @@
           </a:fontRef>
         </p:style>
         <p:txBody>
-          <a:bodyPr rtlCol="0" anchor="ctr" wrap="square" lIns="164592" rIns="164592" tIns="109728" bIns="36576"/>
+          <a:bodyPr rtlCol="0" anchor="ctr" wrap="square" lIns="164592" rIns="164592" tIns="109728" bIns="73152"/>
           <a:lstStyle/>
           <a:p>
             <a:pPr algn="l">
@@ -13853,47 +14011,179 @@
             <a:r>
               <a:t>&lt;?xml version="1.0" ?&gt;</a:t>
             </a:r>
-            <a:br/>
+          </a:p>
+          <a:p>
+            <a:pPr algn="l">
+              <a:spcAft>
+                <a:spcPts val="0"/>
+              </a:spcAft>
+              <a:defRPr sz="1400" b="0">
+                <a:solidFill>
+                  <a:srgbClr val="FFFFFF"/>
+                </a:solidFill>
+                <a:latin typeface="DejaVu Sans Mono"/>
+              </a:defRPr>
+            </a:pPr>
             <a:r>
               <a:t>&lt;package format="3"&gt;</a:t>
             </a:r>
-            <a:br/>
+          </a:p>
+          <a:p>
+            <a:pPr algn="l">
+              <a:spcAft>
+                <a:spcPts val="0"/>
+              </a:spcAft>
+              <a:defRPr sz="1400" b="0">
+                <a:solidFill>
+                  <a:srgbClr val="FFFFFF"/>
+                </a:solidFill>
+                <a:latin typeface="DejaVu Sans Mono"/>
+              </a:defRPr>
+            </a:pPr>
             <a:r>
               <a:t>  &lt;name&gt;agv_gazebo&lt;/name&gt;</a:t>
             </a:r>
-            <a:br/>
+          </a:p>
+          <a:p>
+            <a:pPr algn="l">
+              <a:spcAft>
+                <a:spcPts val="0"/>
+              </a:spcAft>
+              <a:defRPr sz="1400" b="0">
+                <a:solidFill>
+                  <a:srgbClr val="FFFFFF"/>
+                </a:solidFill>
+                <a:latin typeface="DejaVu Sans Mono"/>
+              </a:defRPr>
+            </a:pPr>
             <a:r>
               <a:t>  &lt;version&gt;0.1.0&lt;/version&gt;</a:t>
             </a:r>
-            <a:br/>
+          </a:p>
+          <a:p>
+            <a:pPr algn="l">
+              <a:spcAft>
+                <a:spcPts val="0"/>
+              </a:spcAft>
+              <a:defRPr sz="1400" b="0">
+                <a:solidFill>
+                  <a:srgbClr val="FFFFFF"/>
+                </a:solidFill>
+                <a:latin typeface="DejaVu Sans Mono"/>
+              </a:defRPr>
+            </a:pPr>
             <a:r>
               <a:t>  </a:t>
             </a:r>
-            <a:br/>
+          </a:p>
+          <a:p>
+            <a:pPr algn="l">
+              <a:spcAft>
+                <a:spcPts val="0"/>
+              </a:spcAft>
+              <a:defRPr sz="1400" b="0">
+                <a:solidFill>
+                  <a:srgbClr val="FFFFFF"/>
+                </a:solidFill>
+                <a:latin typeface="DejaVu Sans Mono"/>
+              </a:defRPr>
+            </a:pPr>
             <a:r>
               <a:t>  </a:t>
             </a:r>
-            <a:br/>
+          </a:p>
+          <a:p>
+            <a:pPr algn="l">
+              <a:spcAft>
+                <a:spcPts val="0"/>
+              </a:spcAft>
+              <a:defRPr sz="1400" b="0">
+                <a:solidFill>
+                  <a:srgbClr val="FFFFFF"/>
+                </a:solidFill>
+                <a:latin typeface="DejaVu Sans Mono"/>
+              </a:defRPr>
+            </a:pPr>
             <a:r>
               <a:t>  &lt;description&gt;Gazebo Harmonic world, model and ROS-Gazebo bridge</a:t>
             </a:r>
-            <a:br/>
+          </a:p>
+          <a:p>
+            <a:pPr algn="l">
+              <a:spcAft>
+                <a:spcPts val="0"/>
+              </a:spcAft>
+              <a:defRPr sz="1400" b="0">
+                <a:solidFill>
+                  <a:srgbClr val="FFFFFF"/>
+                </a:solidFill>
+                <a:latin typeface="DejaVu Sans Mono"/>
+              </a:defRPr>
+            </a:pPr>
             <a:r>
               <a:t>    configuration.&lt;/description&gt;</a:t>
             </a:r>
-            <a:br/>
+          </a:p>
+          <a:p>
+            <a:pPr algn="l">
+              <a:spcAft>
+                <a:spcPts val="0"/>
+              </a:spcAft>
+              <a:defRPr sz="1400" b="0">
+                <a:solidFill>
+                  <a:srgbClr val="FFFFFF"/>
+                </a:solidFill>
+                <a:latin typeface="DejaVu Sans Mono"/>
+              </a:defRPr>
+            </a:pPr>
             <a:r>
               <a:t>  </a:t>
             </a:r>
-            <a:br/>
+          </a:p>
+          <a:p>
+            <a:pPr algn="l">
+              <a:spcAft>
+                <a:spcPts val="0"/>
+              </a:spcAft>
+              <a:defRPr sz="1400" b="0">
+                <a:solidFill>
+                  <a:srgbClr val="FFFFFF"/>
+                </a:solidFill>
+                <a:latin typeface="DejaVu Sans Mono"/>
+              </a:defRPr>
+            </a:pPr>
             <a:r>
               <a:t>  </a:t>
             </a:r>
-            <a:br/>
+          </a:p>
+          <a:p>
+            <a:pPr algn="l">
+              <a:spcAft>
+                <a:spcPts val="0"/>
+              </a:spcAft>
+              <a:defRPr sz="1400" b="0">
+                <a:solidFill>
+                  <a:srgbClr val="FFFFFF"/>
+                </a:solidFill>
+                <a:latin typeface="DejaVu Sans Mono"/>
+              </a:defRPr>
+            </a:pPr>
             <a:r>
               <a:t>  &lt;maintainer email="student@example.com"&gt;AGV student&lt;/maintainer&gt;</a:t>
             </a:r>
-            <a:br/>
+          </a:p>
+          <a:p>
+            <a:pPr algn="l">
+              <a:spcAft>
+                <a:spcPts val="0"/>
+              </a:spcAft>
+              <a:defRPr sz="1400" b="0">
+                <a:solidFill>
+                  <a:srgbClr val="FFFFFF"/>
+                </a:solidFill>
+                <a:latin typeface="DejaVu Sans Mono"/>
+              </a:defRPr>
+            </a:pPr>
             <a:r>
               <a:t>  &lt;license&gt;Apache-2.0&lt;/license&gt;</a:t>
             </a:r>
@@ -14310,7 +14600,7 @@
           </a:fontRef>
         </p:style>
         <p:txBody>
-          <a:bodyPr rtlCol="0" anchor="ctr" wrap="square" lIns="164592" rIns="164592" tIns="109728" bIns="36576"/>
+          <a:bodyPr rtlCol="0" anchor="ctr" wrap="square" lIns="164592" rIns="164592" tIns="109728" bIns="73152"/>
           <a:lstStyle/>
           <a:p>
             <a:pPr algn="l">
@@ -14327,47 +14617,179 @@
             <a:r>
               <a:t>  </a:t>
             </a:r>
-            <a:br/>
+          </a:p>
+          <a:p>
+            <a:pPr algn="l">
+              <a:spcAft>
+                <a:spcPts val="0"/>
+              </a:spcAft>
+              <a:defRPr sz="1400" b="0">
+                <a:solidFill>
+                  <a:srgbClr val="FFFFFF"/>
+                </a:solidFill>
+                <a:latin typeface="DejaVu Sans Mono"/>
+              </a:defRPr>
+            </a:pPr>
             <a:r>
               <a:t>  </a:t>
             </a:r>
-            <a:br/>
+          </a:p>
+          <a:p>
+            <a:pPr algn="l">
+              <a:spcAft>
+                <a:spcPts val="0"/>
+              </a:spcAft>
+              <a:defRPr sz="1400" b="0">
+                <a:solidFill>
+                  <a:srgbClr val="FFFFFF"/>
+                </a:solidFill>
+                <a:latin typeface="DejaVu Sans Mono"/>
+              </a:defRPr>
+            </a:pPr>
             <a:r>
               <a:t>  &lt;buildtool_depend&gt;ament_python&lt;/buildtool_depend&gt;</a:t>
             </a:r>
-            <a:br/>
+          </a:p>
+          <a:p>
+            <a:pPr algn="l">
+              <a:spcAft>
+                <a:spcPts val="0"/>
+              </a:spcAft>
+              <a:defRPr sz="1400" b="0">
+                <a:solidFill>
+                  <a:srgbClr val="FFFFFF"/>
+                </a:solidFill>
+                <a:latin typeface="DejaVu Sans Mono"/>
+              </a:defRPr>
+            </a:pPr>
             <a:r>
               <a:t>  &lt;exec_depend&gt;launch&lt;/exec_depend&gt;</a:t>
             </a:r>
-            <a:br/>
+          </a:p>
+          <a:p>
+            <a:pPr algn="l">
+              <a:spcAft>
+                <a:spcPts val="0"/>
+              </a:spcAft>
+              <a:defRPr sz="1400" b="0">
+                <a:solidFill>
+                  <a:srgbClr val="FFFFFF"/>
+                </a:solidFill>
+                <a:latin typeface="DejaVu Sans Mono"/>
+              </a:defRPr>
+            </a:pPr>
             <a:r>
               <a:t>  &lt;exec_depend&gt;launch_ros&lt;/exec_depend&gt;</a:t>
             </a:r>
-            <a:br/>
+          </a:p>
+          <a:p>
+            <a:pPr algn="l">
+              <a:spcAft>
+                <a:spcPts val="0"/>
+              </a:spcAft>
+              <a:defRPr sz="1400" b="0">
+                <a:solidFill>
+                  <a:srgbClr val="FFFFFF"/>
+                </a:solidFill>
+                <a:latin typeface="DejaVu Sans Mono"/>
+              </a:defRPr>
+            </a:pPr>
             <a:r>
               <a:t>  </a:t>
             </a:r>
-            <a:br/>
+          </a:p>
+          <a:p>
+            <a:pPr algn="l">
+              <a:spcAft>
+                <a:spcPts val="0"/>
+              </a:spcAft>
+              <a:defRPr sz="1400" b="0">
+                <a:solidFill>
+                  <a:srgbClr val="FFFFFF"/>
+                </a:solidFill>
+                <a:latin typeface="DejaVu Sans Mono"/>
+              </a:defRPr>
+            </a:pPr>
             <a:r>
               <a:t>  </a:t>
             </a:r>
-            <a:br/>
+          </a:p>
+          <a:p>
+            <a:pPr algn="l">
+              <a:spcAft>
+                <a:spcPts val="0"/>
+              </a:spcAft>
+              <a:defRPr sz="1400" b="0">
+                <a:solidFill>
+                  <a:srgbClr val="FFFFFF"/>
+                </a:solidFill>
+                <a:latin typeface="DejaVu Sans Mono"/>
+              </a:defRPr>
+            </a:pPr>
             <a:r>
               <a:t>  &lt;exec_depend&gt;ros_gz_sim&lt;/exec_depend&gt;</a:t>
             </a:r>
-            <a:br/>
+          </a:p>
+          <a:p>
+            <a:pPr algn="l">
+              <a:spcAft>
+                <a:spcPts val="0"/>
+              </a:spcAft>
+              <a:defRPr sz="1400" b="0">
+                <a:solidFill>
+                  <a:srgbClr val="FFFFFF"/>
+                </a:solidFill>
+                <a:latin typeface="DejaVu Sans Mono"/>
+              </a:defRPr>
+            </a:pPr>
             <a:r>
               <a:t>  &lt;exec_depend&gt;ros_gz_bridge&lt;/exec_depend&gt;</a:t>
             </a:r>
-            <a:br/>
+          </a:p>
+          <a:p>
+            <a:pPr algn="l">
+              <a:spcAft>
+                <a:spcPts val="0"/>
+              </a:spcAft>
+              <a:defRPr sz="1400" b="0">
+                <a:solidFill>
+                  <a:srgbClr val="FFFFFF"/>
+                </a:solidFill>
+                <a:latin typeface="DejaVu Sans Mono"/>
+              </a:defRPr>
+            </a:pPr>
             <a:r>
               <a:t>  &lt;exec_depend&gt;gz_ros2_control&lt;/exec_depend&gt;</a:t>
             </a:r>
-            <a:br/>
+          </a:p>
+          <a:p>
+            <a:pPr algn="l">
+              <a:spcAft>
+                <a:spcPts val="0"/>
+              </a:spcAft>
+              <a:defRPr sz="1400" b="0">
+                <a:solidFill>
+                  <a:srgbClr val="FFFFFF"/>
+                </a:solidFill>
+                <a:latin typeface="DejaVu Sans Mono"/>
+              </a:defRPr>
+            </a:pPr>
             <a:r>
               <a:t>  &lt;exec_depend&gt;controller_manager&lt;/exec_depend&gt;</a:t>
             </a:r>
-            <a:br/>
+          </a:p>
+          <a:p>
+            <a:pPr algn="l">
+              <a:spcAft>
+                <a:spcPts val="0"/>
+              </a:spcAft>
+              <a:defRPr sz="1400" b="0">
+                <a:solidFill>
+                  <a:srgbClr val="FFFFFF"/>
+                </a:solidFill>
+                <a:latin typeface="DejaVu Sans Mono"/>
+              </a:defRPr>
+            </a:pPr>
             <a:r>
               <a:t>  &lt;exec_depend&gt;robot_state_publisher&lt;/exec_depend&gt;</a:t>
             </a:r>
@@ -14784,7 +15206,7 @@
           </a:fontRef>
         </p:style>
         <p:txBody>
-          <a:bodyPr rtlCol="0" anchor="ctr" wrap="square" lIns="164592" rIns="164592" tIns="109728" bIns="36576"/>
+          <a:bodyPr rtlCol="0" anchor="ctr" wrap="square" lIns="164592" rIns="164592" tIns="109728" bIns="73152"/>
           <a:lstStyle/>
           <a:p>
             <a:pPr algn="l">
@@ -14801,36 +15223,144 @@
             <a:r>
               <a:t>  &lt;exec_depend&gt;agv_control&lt;/exec_depend&gt;</a:t>
             </a:r>
-            <a:br/>
+          </a:p>
+          <a:p>
+            <a:pPr algn="l">
+              <a:spcAft>
+                <a:spcPts val="0"/>
+              </a:spcAft>
+              <a:defRPr sz="1400" b="0">
+                <a:solidFill>
+                  <a:srgbClr val="FFFFFF"/>
+                </a:solidFill>
+                <a:latin typeface="DejaVu Sans Mono"/>
+              </a:defRPr>
+            </a:pPr>
             <a:r>
               <a:t>  &lt;exec_depend&gt;agv_description&lt;/exec_depend&gt;</a:t>
             </a:r>
-            <a:br/>
+          </a:p>
+          <a:p>
+            <a:pPr algn="l">
+              <a:spcAft>
+                <a:spcPts val="0"/>
+              </a:spcAft>
+              <a:defRPr sz="1400" b="0">
+                <a:solidFill>
+                  <a:srgbClr val="FFFFFF"/>
+                </a:solidFill>
+                <a:latin typeface="DejaVu Sans Mono"/>
+              </a:defRPr>
+            </a:pPr>
             <a:r>
               <a:t>  </a:t>
             </a:r>
-            <a:br/>
+          </a:p>
+          <a:p>
+            <a:pPr algn="l">
+              <a:spcAft>
+                <a:spcPts val="0"/>
+              </a:spcAft>
+              <a:defRPr sz="1400" b="0">
+                <a:solidFill>
+                  <a:srgbClr val="FFFFFF"/>
+                </a:solidFill>
+                <a:latin typeface="DejaVu Sans Mono"/>
+              </a:defRPr>
+            </a:pPr>
             <a:r>
               <a:t>  </a:t>
             </a:r>
-            <a:br/>
+          </a:p>
+          <a:p>
+            <a:pPr algn="l">
+              <a:spcAft>
+                <a:spcPts val="0"/>
+              </a:spcAft>
+              <a:defRPr sz="1400" b="0">
+                <a:solidFill>
+                  <a:srgbClr val="FFFFFF"/>
+                </a:solidFill>
+                <a:latin typeface="DejaVu Sans Mono"/>
+              </a:defRPr>
+            </a:pPr>
             <a:r>
               <a:t>  &lt;export&gt;</a:t>
             </a:r>
-            <a:br/>
+          </a:p>
+          <a:p>
+            <a:pPr algn="l">
+              <a:spcAft>
+                <a:spcPts val="0"/>
+              </a:spcAft>
+              <a:defRPr sz="1400" b="0">
+                <a:solidFill>
+                  <a:srgbClr val="FFFFFF"/>
+                </a:solidFill>
+                <a:latin typeface="DejaVu Sans Mono"/>
+              </a:defRPr>
+            </a:pPr>
             <a:r>
               <a:t>    &lt;build_type&gt;ament_python&lt;/build_type&gt;</a:t>
             </a:r>
-            <a:br/>
+          </a:p>
+          <a:p>
+            <a:pPr algn="l">
+              <a:spcAft>
+                <a:spcPts val="0"/>
+              </a:spcAft>
+              <a:defRPr sz="1400" b="0">
+                <a:solidFill>
+                  <a:srgbClr val="FFFFFF"/>
+                </a:solidFill>
+                <a:latin typeface="DejaVu Sans Mono"/>
+              </a:defRPr>
+            </a:pPr>
             <a:r>
               <a:t>  &lt;/export&gt;</a:t>
             </a:r>
-            <a:br/>
+          </a:p>
+          <a:p>
+            <a:pPr algn="l">
+              <a:spcAft>
+                <a:spcPts val="0"/>
+              </a:spcAft>
+              <a:defRPr sz="1400" b="0">
+                <a:solidFill>
+                  <a:srgbClr val="FFFFFF"/>
+                </a:solidFill>
+                <a:latin typeface="DejaVu Sans Mono"/>
+              </a:defRPr>
+            </a:pPr>
             <a:r>
               <a:t>  </a:t>
             </a:r>
-            <a:br/>
-            <a:br/>
+          </a:p>
+          <a:p>
+            <a:pPr algn="l">
+              <a:spcAft>
+                <a:spcPts val="0"/>
+              </a:spcAft>
+              <a:defRPr sz="1400" b="0">
+                <a:solidFill>
+                  <a:srgbClr val="FFFFFF"/>
+                </a:solidFill>
+                <a:latin typeface="DejaVu Sans Mono"/>
+              </a:defRPr>
+            </a:pPr>
+          </a:p>
+          <a:p>
+            <a:pPr algn="l">
+              <a:spcAft>
+                <a:spcPts val="0"/>
+              </a:spcAft>
+              <a:defRPr sz="1400" b="0">
+                <a:solidFill>
+                  <a:srgbClr val="FFFFFF"/>
+                </a:solidFill>
+                <a:latin typeface="DejaVu Sans Mono"/>
+              </a:defRPr>
+            </a:pPr>
             <a:r>
               <a:t>&lt;/package&gt;</a:t>
             </a:r>
@@ -15302,7 +15832,7 @@
           </a:fontRef>
         </p:style>
         <p:txBody>
-          <a:bodyPr rtlCol="0" anchor="ctr" wrap="square" lIns="73152" rIns="73152" tIns="36576" bIns="36576"/>
+          <a:bodyPr rtlCol="0" anchor="ctr" wrap="square" lIns="109728" rIns="109728" tIns="73152" bIns="73152"/>
           <a:lstStyle/>
           <a:p>
             <a:pPr algn="l">
@@ -15319,7 +15849,19 @@
             <a:r>
               <a:t>mkdir -p ~/ros2_curri/my_agv_ws/src/agv_gazebo</a:t>
             </a:r>
-            <a:br/>
+          </a:p>
+          <a:p>
+            <a:pPr algn="l">
+              <a:spcAft>
+                <a:spcPts val="0"/>
+              </a:spcAft>
+              <a:defRPr sz="1600" b="0">
+                <a:solidFill>
+                  <a:srgbClr val="FFFFFF"/>
+                </a:solidFill>
+                <a:latin typeface="DejaVu Sans Mono"/>
+              </a:defRPr>
+            </a:pPr>
             <a:r>
               <a:t>nano ~/ros2_curri/my_agv_ws/src/agv_gazebo/setup.py</a:t>
             </a:r>
@@ -17598,7 +18140,7 @@
           </a:fontRef>
         </p:style>
         <p:txBody>
-          <a:bodyPr rtlCol="0" anchor="ctr" wrap="square" lIns="164592" rIns="164592" tIns="109728" bIns="36576"/>
+          <a:bodyPr rtlCol="0" anchor="ctr" wrap="square" lIns="164592" rIns="164592" tIns="109728" bIns="73152"/>
           <a:lstStyle/>
           <a:p>
             <a:pPr algn="l">
@@ -17615,47 +18157,179 @@
             <a:r>
               <a:t>from glob import glob</a:t>
             </a:r>
-            <a:br/>
+          </a:p>
+          <a:p>
+            <a:pPr algn="l">
+              <a:spcAft>
+                <a:spcPts val="0"/>
+              </a:spcAft>
+              <a:defRPr sz="1400" b="0">
+                <a:solidFill>
+                  <a:srgbClr val="FFFFFF"/>
+                </a:solidFill>
+                <a:latin typeface="DejaVu Sans Mono"/>
+              </a:defRPr>
+            </a:pPr>
             <a:r>
               <a:t>from setuptools import find_packages, setup</a:t>
             </a:r>
-            <a:br/>
+          </a:p>
+          <a:p>
+            <a:pPr algn="l">
+              <a:spcAft>
+                <a:spcPts val="0"/>
+              </a:spcAft>
+              <a:defRPr sz="1400" b="0">
+                <a:solidFill>
+                  <a:srgbClr val="FFFFFF"/>
+                </a:solidFill>
+                <a:latin typeface="DejaVu Sans Mono"/>
+              </a:defRPr>
+            </a:pPr>
             <a:r>
               <a:t>package_name = 'agv_gazebo'</a:t>
             </a:r>
-            <a:br/>
+          </a:p>
+          <a:p>
+            <a:pPr algn="l">
+              <a:spcAft>
+                <a:spcPts val="0"/>
+              </a:spcAft>
+              <a:defRPr sz="1400" b="0">
+                <a:solidFill>
+                  <a:srgbClr val="FFFFFF"/>
+                </a:solidFill>
+                <a:latin typeface="DejaVu Sans Mono"/>
+              </a:defRPr>
+            </a:pPr>
             <a:r>
               <a:t>setup(name=package_name, version='0.1.0', packages=find_packages(exclude=['test']),</a:t>
             </a:r>
-            <a:br/>
+          </a:p>
+          <a:p>
+            <a:pPr algn="l">
+              <a:spcAft>
+                <a:spcPts val="0"/>
+              </a:spcAft>
+              <a:defRPr sz="1400" b="0">
+                <a:solidFill>
+                  <a:srgbClr val="FFFFFF"/>
+                </a:solidFill>
+                <a:latin typeface="DejaVu Sans Mono"/>
+              </a:defRPr>
+            </a:pPr>
             <a:r>
               <a:t>    data_files=[('share/ament_index/resource_index/packages',</a:t>
             </a:r>
-            <a:br/>
+          </a:p>
+          <a:p>
+            <a:pPr algn="l">
+              <a:spcAft>
+                <a:spcPts val="0"/>
+              </a:spcAft>
+              <a:defRPr sz="1400" b="0">
+                <a:solidFill>
+                  <a:srgbClr val="FFFFFF"/>
+                </a:solidFill>
+                <a:latin typeface="DejaVu Sans Mono"/>
+              </a:defRPr>
+            </a:pPr>
             <a:r>
               <a:t>    ['resource/' + package_name]), ('share/' + package_name, ['package.xml']),</a:t>
             </a:r>
-            <a:br/>
+          </a:p>
+          <a:p>
+            <a:pPr algn="l">
+              <a:spcAft>
+                <a:spcPts val="0"/>
+              </a:spcAft>
+              <a:defRPr sz="1400" b="0">
+                <a:solidFill>
+                  <a:srgbClr val="FFFFFF"/>
+                </a:solidFill>
+                <a:latin typeface="DejaVu Sans Mono"/>
+              </a:defRPr>
+            </a:pPr>
             <a:r>
               <a:t>    ('share/' + package_name + '/launch', glob('launch/*.launch.py')),</a:t>
             </a:r>
-            <a:br/>
+          </a:p>
+          <a:p>
+            <a:pPr algn="l">
+              <a:spcAft>
+                <a:spcPts val="0"/>
+              </a:spcAft>
+              <a:defRPr sz="1400" b="0">
+                <a:solidFill>
+                  <a:srgbClr val="FFFFFF"/>
+                </a:solidFill>
+                <a:latin typeface="DejaVu Sans Mono"/>
+              </a:defRPr>
+            </a:pPr>
             <a:r>
               <a:t>    ('share/' + package_name + '/worlds', glob('worlds/*.sdf')),</a:t>
             </a:r>
-            <a:br/>
+          </a:p>
+          <a:p>
+            <a:pPr algn="l">
+              <a:spcAft>
+                <a:spcPts val="0"/>
+              </a:spcAft>
+              <a:defRPr sz="1400" b="0">
+                <a:solidFill>
+                  <a:srgbClr val="FFFFFF"/>
+                </a:solidFill>
+                <a:latin typeface="DejaVu Sans Mono"/>
+              </a:defRPr>
+            </a:pPr>
             <a:r>
               <a:t>    ('share/' + package_name + '/config', glob('config/*.yaml')),</a:t>
             </a:r>
-            <a:br/>
+          </a:p>
+          <a:p>
+            <a:pPr algn="l">
+              <a:spcAft>
+                <a:spcPts val="0"/>
+              </a:spcAft>
+              <a:defRPr sz="1400" b="0">
+                <a:solidFill>
+                  <a:srgbClr val="FFFFFF"/>
+                </a:solidFill>
+                <a:latin typeface="DejaVu Sans Mono"/>
+              </a:defRPr>
+            </a:pPr>
             <a:r>
               <a:t>    ('share/' + package_name + '/models/agv', glob('models/agv/*')),</a:t>
             </a:r>
-            <a:br/>
+          </a:p>
+          <a:p>
+            <a:pPr algn="l">
+              <a:spcAft>
+                <a:spcPts val="0"/>
+              </a:spcAft>
+              <a:defRPr sz="1400" b="0">
+                <a:solidFill>
+                  <a:srgbClr val="FFFFFF"/>
+                </a:solidFill>
+                <a:latin typeface="DejaVu Sans Mono"/>
+              </a:defRPr>
+            </a:pPr>
             <a:r>
               <a:t>    ('share/' + package_name + '/models/agv_ros2_control',</a:t>
             </a:r>
-            <a:br/>
+          </a:p>
+          <a:p>
+            <a:pPr algn="l">
+              <a:spcAft>
+                <a:spcPts val="0"/>
+              </a:spcAft>
+              <a:defRPr sz="1400" b="0">
+                <a:solidFill>
+                  <a:srgbClr val="FFFFFF"/>
+                </a:solidFill>
+                <a:latin typeface="DejaVu Sans Mono"/>
+              </a:defRPr>
+            </a:pPr>
             <a:r>
               <a:t>    glob('models/agv_ros2_control/*'))], install_requires=['setuptools'], zip_safe=True,</a:t>
             </a:r>
@@ -18072,7 +18746,7 @@
           </a:fontRef>
         </p:style>
         <p:txBody>
-          <a:bodyPr rtlCol="0" anchor="ctr" wrap="square" lIns="164592" rIns="164592" tIns="109728" bIns="36576"/>
+          <a:bodyPr rtlCol="0" anchor="ctr" wrap="square" lIns="164592" rIns="164592" tIns="109728" bIns="73152"/>
           <a:lstStyle/>
           <a:p>
             <a:pPr algn="l">
@@ -18557,7 +19231,7 @@
           </a:fontRef>
         </p:style>
         <p:txBody>
-          <a:bodyPr rtlCol="0" anchor="ctr" wrap="square" lIns="73152" rIns="73152" tIns="36576" bIns="36576"/>
+          <a:bodyPr rtlCol="0" anchor="ctr" wrap="square" lIns="109728" rIns="109728" tIns="73152" bIns="73152"/>
           <a:lstStyle/>
           <a:p>
             <a:pPr algn="l">
@@ -18574,7 +19248,19 @@
             <a:r>
               <a:t>mkdir -p ~/ros2_curri/my_agv_ws/src/agv_gazebo/models/agv</a:t>
             </a:r>
-            <a:br/>
+          </a:p>
+          <a:p>
+            <a:pPr algn="l">
+              <a:spcAft>
+                <a:spcPts val="0"/>
+              </a:spcAft>
+              <a:defRPr sz="1600" b="0">
+                <a:solidFill>
+                  <a:srgbClr val="FFFFFF"/>
+                </a:solidFill>
+                <a:latin typeface="DejaVu Sans Mono"/>
+              </a:defRPr>
+            </a:pPr>
             <a:r>
               <a:t>nano ~/ros2_curri/my_agv_ws/src/agv_gazebo/models/agv/model.sdf</a:t>
             </a:r>
@@ -22755,7 +23441,7 @@
           </a:fontRef>
         </p:style>
         <p:txBody>
-          <a:bodyPr rtlCol="0" anchor="ctr" wrap="square" lIns="164592" rIns="164592" tIns="109728" bIns="36576"/>
+          <a:bodyPr rtlCol="0" anchor="ctr" wrap="square" lIns="164592" rIns="164592" tIns="109728" bIns="73152"/>
           <a:lstStyle/>
           <a:p>
             <a:pPr algn="l">
@@ -22772,47 +23458,179 @@
             <a:r>
               <a:t>&lt;?xml version="1.0" ?&gt;</a:t>
             </a:r>
-            <a:br/>
+          </a:p>
+          <a:p>
+            <a:pPr algn="l">
+              <a:spcAft>
+                <a:spcPts val="0"/>
+              </a:spcAft>
+              <a:defRPr sz="1400" b="0">
+                <a:solidFill>
+                  <a:srgbClr val="FFFFFF"/>
+                </a:solidFill>
+                <a:latin typeface="DejaVu Sans Mono"/>
+              </a:defRPr>
+            </a:pPr>
             <a:r>
               <a:t>&lt;sdf version="1.10"&gt;</a:t>
             </a:r>
-            <a:br/>
+          </a:p>
+          <a:p>
+            <a:pPr algn="l">
+              <a:spcAft>
+                <a:spcPts val="0"/>
+              </a:spcAft>
+              <a:defRPr sz="1400" b="0">
+                <a:solidFill>
+                  <a:srgbClr val="FFFFFF"/>
+                </a:solidFill>
+                <a:latin typeface="DejaVu Sans Mono"/>
+              </a:defRPr>
+            </a:pPr>
             <a:r>
               <a:t>  </a:t>
             </a:r>
-            <a:br/>
+          </a:p>
+          <a:p>
+            <a:pPr algn="l">
+              <a:spcAft>
+                <a:spcPts val="0"/>
+              </a:spcAft>
+              <a:defRPr sz="1400" b="0">
+                <a:solidFill>
+                  <a:srgbClr val="FFFFFF"/>
+                </a:solidFill>
+                <a:latin typeface="DejaVu Sans Mono"/>
+              </a:defRPr>
+            </a:pPr>
             <a:r>
               <a:t>  </a:t>
             </a:r>
-            <a:br/>
+          </a:p>
+          <a:p>
+            <a:pPr algn="l">
+              <a:spcAft>
+                <a:spcPts val="0"/>
+              </a:spcAft>
+              <a:defRPr sz="1400" b="0">
+                <a:solidFill>
+                  <a:srgbClr val="FFFFFF"/>
+                </a:solidFill>
+                <a:latin typeface="DejaVu Sans Mono"/>
+              </a:defRPr>
+            </a:pPr>
             <a:r>
               <a:t>  &lt;model name="agv"&gt;</a:t>
             </a:r>
-            <a:br/>
+          </a:p>
+          <a:p>
+            <a:pPr algn="l">
+              <a:spcAft>
+                <a:spcPts val="0"/>
+              </a:spcAft>
+              <a:defRPr sz="1400" b="0">
+                <a:solidFill>
+                  <a:srgbClr val="FFFFFF"/>
+                </a:solidFill>
+                <a:latin typeface="DejaVu Sans Mono"/>
+              </a:defRPr>
+            </a:pPr>
             <a:r>
               <a:t>    </a:t>
             </a:r>
-            <a:br/>
+          </a:p>
+          <a:p>
+            <a:pPr algn="l">
+              <a:spcAft>
+                <a:spcPts val="0"/>
+              </a:spcAft>
+              <a:defRPr sz="1400" b="0">
+                <a:solidFill>
+                  <a:srgbClr val="FFFFFF"/>
+                </a:solidFill>
+                <a:latin typeface="DejaVu Sans Mono"/>
+              </a:defRPr>
+            </a:pPr>
             <a:r>
               <a:t>    </a:t>
             </a:r>
-            <a:br/>
+          </a:p>
+          <a:p>
+            <a:pPr algn="l">
+              <a:spcAft>
+                <a:spcPts val="0"/>
+              </a:spcAft>
+              <a:defRPr sz="1400" b="0">
+                <a:solidFill>
+                  <a:srgbClr val="FFFFFF"/>
+                </a:solidFill>
+                <a:latin typeface="DejaVu Sans Mono"/>
+              </a:defRPr>
+            </a:pPr>
             <a:r>
               <a:t>    &lt;link name="base_link"&gt;</a:t>
             </a:r>
-            <a:br/>
+          </a:p>
+          <a:p>
+            <a:pPr algn="l">
+              <a:spcAft>
+                <a:spcPts val="0"/>
+              </a:spcAft>
+              <a:defRPr sz="1400" b="0">
+                <a:solidFill>
+                  <a:srgbClr val="FFFFFF"/>
+                </a:solidFill>
+                <a:latin typeface="DejaVu Sans Mono"/>
+              </a:defRPr>
+            </a:pPr>
             <a:r>
               <a:t>      </a:t>
             </a:r>
-            <a:br/>
+          </a:p>
+          <a:p>
+            <a:pPr algn="l">
+              <a:spcAft>
+                <a:spcPts val="0"/>
+              </a:spcAft>
+              <a:defRPr sz="1400" b="0">
+                <a:solidFill>
+                  <a:srgbClr val="FFFFFF"/>
+                </a:solidFill>
+                <a:latin typeface="DejaVu Sans Mono"/>
+              </a:defRPr>
+            </a:pPr>
             <a:r>
               <a:t>      </a:t>
             </a:r>
-            <a:br/>
+          </a:p>
+          <a:p>
+            <a:pPr algn="l">
+              <a:spcAft>
+                <a:spcPts val="0"/>
+              </a:spcAft>
+              <a:defRPr sz="1400" b="0">
+                <a:solidFill>
+                  <a:srgbClr val="FFFFFF"/>
+                </a:solidFill>
+                <a:latin typeface="DejaVu Sans Mono"/>
+              </a:defRPr>
+            </a:pPr>
             <a:r>
               <a:t>      &lt;pose&gt;0 0 0.16 0 0 0&lt;/pose&gt;</a:t>
             </a:r>
-            <a:br/>
+          </a:p>
+          <a:p>
+            <a:pPr algn="l">
+              <a:spcAft>
+                <a:spcPts val="0"/>
+              </a:spcAft>
+              <a:defRPr sz="1400" b="0">
+                <a:solidFill>
+                  <a:srgbClr val="FFFFFF"/>
+                </a:solidFill>
+                <a:latin typeface="DejaVu Sans Mono"/>
+              </a:defRPr>
+            </a:pPr>
             <a:r>
               <a:t>      </a:t>
             </a:r>
@@ -23648,7 +24466,7 @@
           </a:fontRef>
         </p:style>
         <p:txBody>
-          <a:bodyPr rtlCol="0" anchor="ctr" wrap="square" lIns="164592" rIns="164592" tIns="109728" bIns="36576"/>
+          <a:bodyPr rtlCol="0" anchor="ctr" wrap="square" lIns="164592" rIns="164592" tIns="109728" bIns="73152"/>
           <a:lstStyle/>
           <a:p>
             <a:pPr algn="l">
@@ -23665,47 +24483,179 @@
             <a:r>
               <a:t>      </a:t>
             </a:r>
-            <a:br/>
+          </a:p>
+          <a:p>
+            <a:pPr algn="l">
+              <a:spcAft>
+                <a:spcPts val="0"/>
+              </a:spcAft>
+              <a:defRPr sz="1400" b="0">
+                <a:solidFill>
+                  <a:srgbClr val="FFFFFF"/>
+                </a:solidFill>
+                <a:latin typeface="DejaVu Sans Mono"/>
+              </a:defRPr>
+            </a:pPr>
             <a:r>
               <a:t>      &lt;inertial&gt;</a:t>
             </a:r>
-            <a:br/>
+          </a:p>
+          <a:p>
+            <a:pPr algn="l">
+              <a:spcAft>
+                <a:spcPts val="0"/>
+              </a:spcAft>
+              <a:defRPr sz="1400" b="0">
+                <a:solidFill>
+                  <a:srgbClr val="FFFFFF"/>
+                </a:solidFill>
+                <a:latin typeface="DejaVu Sans Mono"/>
+              </a:defRPr>
+            </a:pPr>
             <a:r>
               <a:t>        &lt;mass&gt;12.0&lt;/mass&gt;</a:t>
             </a:r>
-            <a:br/>
+          </a:p>
+          <a:p>
+            <a:pPr algn="l">
+              <a:spcAft>
+                <a:spcPts val="0"/>
+              </a:spcAft>
+              <a:defRPr sz="1400" b="0">
+                <a:solidFill>
+                  <a:srgbClr val="FFFFFF"/>
+                </a:solidFill>
+                <a:latin typeface="DejaVu Sans Mono"/>
+              </a:defRPr>
+            </a:pPr>
             <a:r>
               <a:t>        &lt;inertia&gt;</a:t>
             </a:r>
-            <a:br/>
+          </a:p>
+          <a:p>
+            <a:pPr algn="l">
+              <a:spcAft>
+                <a:spcPts val="0"/>
+              </a:spcAft>
+              <a:defRPr sz="1400" b="0">
+                <a:solidFill>
+                  <a:srgbClr val="FFFFFF"/>
+                </a:solidFill>
+                <a:latin typeface="DejaVu Sans Mono"/>
+              </a:defRPr>
+            </a:pPr>
             <a:r>
               <a:t>          &lt;ixx&gt;0.20&lt;/ixx&gt;</a:t>
             </a:r>
-            <a:br/>
+          </a:p>
+          <a:p>
+            <a:pPr algn="l">
+              <a:spcAft>
+                <a:spcPts val="0"/>
+              </a:spcAft>
+              <a:defRPr sz="1400" b="0">
+                <a:solidFill>
+                  <a:srgbClr val="FFFFFF"/>
+                </a:solidFill>
+                <a:latin typeface="DejaVu Sans Mono"/>
+              </a:defRPr>
+            </a:pPr>
             <a:r>
               <a:t>          &lt;iyy&gt;0.40&lt;/iyy&gt;</a:t>
             </a:r>
-            <a:br/>
+          </a:p>
+          <a:p>
+            <a:pPr algn="l">
+              <a:spcAft>
+                <a:spcPts val="0"/>
+              </a:spcAft>
+              <a:defRPr sz="1400" b="0">
+                <a:solidFill>
+                  <a:srgbClr val="FFFFFF"/>
+                </a:solidFill>
+                <a:latin typeface="DejaVu Sans Mono"/>
+              </a:defRPr>
+            </a:pPr>
             <a:r>
               <a:t>          &lt;izz&gt;0.50&lt;/izz&gt;</a:t>
             </a:r>
-            <a:br/>
+          </a:p>
+          <a:p>
+            <a:pPr algn="l">
+              <a:spcAft>
+                <a:spcPts val="0"/>
+              </a:spcAft>
+              <a:defRPr sz="1400" b="0">
+                <a:solidFill>
+                  <a:srgbClr val="FFFFFF"/>
+                </a:solidFill>
+                <a:latin typeface="DejaVu Sans Mono"/>
+              </a:defRPr>
+            </a:pPr>
             <a:r>
               <a:t>        &lt;/inertia&gt;</a:t>
             </a:r>
-            <a:br/>
+          </a:p>
+          <a:p>
+            <a:pPr algn="l">
+              <a:spcAft>
+                <a:spcPts val="0"/>
+              </a:spcAft>
+              <a:defRPr sz="1400" b="0">
+                <a:solidFill>
+                  <a:srgbClr val="FFFFFF"/>
+                </a:solidFill>
+                <a:latin typeface="DejaVu Sans Mono"/>
+              </a:defRPr>
+            </a:pPr>
             <a:r>
               <a:t>      &lt;/inertial&gt;</a:t>
             </a:r>
-            <a:br/>
+          </a:p>
+          <a:p>
+            <a:pPr algn="l">
+              <a:spcAft>
+                <a:spcPts val="0"/>
+              </a:spcAft>
+              <a:defRPr sz="1400" b="0">
+                <a:solidFill>
+                  <a:srgbClr val="FFFFFF"/>
+                </a:solidFill>
+                <a:latin typeface="DejaVu Sans Mono"/>
+              </a:defRPr>
+            </a:pPr>
             <a:r>
               <a:t>      </a:t>
             </a:r>
-            <a:br/>
+          </a:p>
+          <a:p>
+            <a:pPr algn="l">
+              <a:spcAft>
+                <a:spcPts val="0"/>
+              </a:spcAft>
+              <a:defRPr sz="1400" b="0">
+                <a:solidFill>
+                  <a:srgbClr val="FFFFFF"/>
+                </a:solidFill>
+                <a:latin typeface="DejaVu Sans Mono"/>
+              </a:defRPr>
+            </a:pPr>
             <a:r>
               <a:t>      </a:t>
             </a:r>
-            <a:br/>
+          </a:p>
+          <a:p>
+            <a:pPr algn="l">
+              <a:spcAft>
+                <a:spcPts val="0"/>
+              </a:spcAft>
+              <a:defRPr sz="1400" b="0">
+                <a:solidFill>
+                  <a:srgbClr val="FFFFFF"/>
+                </a:solidFill>
+                <a:latin typeface="DejaVu Sans Mono"/>
+              </a:defRPr>
+            </a:pPr>
             <a:r>
               <a:t>      &lt;visual name="body"&gt;</a:t>
             </a:r>
@@ -24122,7 +25072,7 @@
           </a:fontRef>
         </p:style>
         <p:txBody>
-          <a:bodyPr rtlCol="0" anchor="ctr" wrap="square" lIns="164592" rIns="164592" tIns="109728" bIns="36576"/>
+          <a:bodyPr rtlCol="0" anchor="ctr" wrap="square" lIns="164592" rIns="164592" tIns="109728" bIns="73152"/>
           <a:lstStyle/>
           <a:p>
             <a:pPr algn="l">
@@ -24139,47 +25089,179 @@
             <a:r>
               <a:t>        &lt;geometry&gt;</a:t>
             </a:r>
-            <a:br/>
+          </a:p>
+          <a:p>
+            <a:pPr algn="l">
+              <a:spcAft>
+                <a:spcPts val="0"/>
+              </a:spcAft>
+              <a:defRPr sz="1400" b="0">
+                <a:solidFill>
+                  <a:srgbClr val="FFFFFF"/>
+                </a:solidFill>
+                <a:latin typeface="DejaVu Sans Mono"/>
+              </a:defRPr>
+            </a:pPr>
             <a:r>
               <a:t>          &lt;box&gt;</a:t>
             </a:r>
-            <a:br/>
+          </a:p>
+          <a:p>
+            <a:pPr algn="l">
+              <a:spcAft>
+                <a:spcPts val="0"/>
+              </a:spcAft>
+              <a:defRPr sz="1400" b="0">
+                <a:solidFill>
+                  <a:srgbClr val="FFFFFF"/>
+                </a:solidFill>
+                <a:latin typeface="DejaVu Sans Mono"/>
+              </a:defRPr>
+            </a:pPr>
             <a:r>
               <a:t>            &lt;size&gt;0.60 0.42 0.16&lt;/size&gt;</a:t>
             </a:r>
-            <a:br/>
+          </a:p>
+          <a:p>
+            <a:pPr algn="l">
+              <a:spcAft>
+                <a:spcPts val="0"/>
+              </a:spcAft>
+              <a:defRPr sz="1400" b="0">
+                <a:solidFill>
+                  <a:srgbClr val="FFFFFF"/>
+                </a:solidFill>
+                <a:latin typeface="DejaVu Sans Mono"/>
+              </a:defRPr>
+            </a:pPr>
             <a:r>
               <a:t>          &lt;/box&gt;</a:t>
             </a:r>
-            <a:br/>
+          </a:p>
+          <a:p>
+            <a:pPr algn="l">
+              <a:spcAft>
+                <a:spcPts val="0"/>
+              </a:spcAft>
+              <a:defRPr sz="1400" b="0">
+                <a:solidFill>
+                  <a:srgbClr val="FFFFFF"/>
+                </a:solidFill>
+                <a:latin typeface="DejaVu Sans Mono"/>
+              </a:defRPr>
+            </a:pPr>
             <a:r>
               <a:t>        &lt;/geometry&gt;</a:t>
             </a:r>
-            <a:br/>
+          </a:p>
+          <a:p>
+            <a:pPr algn="l">
+              <a:spcAft>
+                <a:spcPts val="0"/>
+              </a:spcAft>
+              <a:defRPr sz="1400" b="0">
+                <a:solidFill>
+                  <a:srgbClr val="FFFFFF"/>
+                </a:solidFill>
+                <a:latin typeface="DejaVu Sans Mono"/>
+              </a:defRPr>
+            </a:pPr>
             <a:r>
               <a:t>        &lt;material&gt;</a:t>
             </a:r>
-            <a:br/>
+          </a:p>
+          <a:p>
+            <a:pPr algn="l">
+              <a:spcAft>
+                <a:spcPts val="0"/>
+              </a:spcAft>
+              <a:defRPr sz="1400" b="0">
+                <a:solidFill>
+                  <a:srgbClr val="FFFFFF"/>
+                </a:solidFill>
+                <a:latin typeface="DejaVu Sans Mono"/>
+              </a:defRPr>
+            </a:pPr>
             <a:r>
               <a:t>          &lt;diffuse&gt;0.1 0.35 0.8 1&lt;/diffuse&gt;</a:t>
             </a:r>
-            <a:br/>
+          </a:p>
+          <a:p>
+            <a:pPr algn="l">
+              <a:spcAft>
+                <a:spcPts val="0"/>
+              </a:spcAft>
+              <a:defRPr sz="1400" b="0">
+                <a:solidFill>
+                  <a:srgbClr val="FFFFFF"/>
+                </a:solidFill>
+                <a:latin typeface="DejaVu Sans Mono"/>
+              </a:defRPr>
+            </a:pPr>
             <a:r>
               <a:t>        &lt;/material&gt;</a:t>
             </a:r>
-            <a:br/>
+          </a:p>
+          <a:p>
+            <a:pPr algn="l">
+              <a:spcAft>
+                <a:spcPts val="0"/>
+              </a:spcAft>
+              <a:defRPr sz="1400" b="0">
+                <a:solidFill>
+                  <a:srgbClr val="FFFFFF"/>
+                </a:solidFill>
+                <a:latin typeface="DejaVu Sans Mono"/>
+              </a:defRPr>
+            </a:pPr>
             <a:r>
               <a:t>      &lt;/visual&gt;</a:t>
             </a:r>
-            <a:br/>
+          </a:p>
+          <a:p>
+            <a:pPr algn="l">
+              <a:spcAft>
+                <a:spcPts val="0"/>
+              </a:spcAft>
+              <a:defRPr sz="1400" b="0">
+                <a:solidFill>
+                  <a:srgbClr val="FFFFFF"/>
+                </a:solidFill>
+                <a:latin typeface="DejaVu Sans Mono"/>
+              </a:defRPr>
+            </a:pPr>
             <a:r>
               <a:t>      </a:t>
             </a:r>
-            <a:br/>
+          </a:p>
+          <a:p>
+            <a:pPr algn="l">
+              <a:spcAft>
+                <a:spcPts val="0"/>
+              </a:spcAft>
+              <a:defRPr sz="1400" b="0">
+                <a:solidFill>
+                  <a:srgbClr val="FFFFFF"/>
+                </a:solidFill>
+                <a:latin typeface="DejaVu Sans Mono"/>
+              </a:defRPr>
+            </a:pPr>
             <a:r>
               <a:t>      </a:t>
             </a:r>
-            <a:br/>
+          </a:p>
+          <a:p>
+            <a:pPr algn="l">
+              <a:spcAft>
+                <a:spcPts val="0"/>
+              </a:spcAft>
+              <a:defRPr sz="1400" b="0">
+                <a:solidFill>
+                  <a:srgbClr val="FFFFFF"/>
+                </a:solidFill>
+                <a:latin typeface="DejaVu Sans Mono"/>
+              </a:defRPr>
+            </a:pPr>
             <a:r>
               <a:t>      &lt;collision name="body_collision"&gt;</a:t>
             </a:r>
@@ -24596,7 +25678,7 @@
           </a:fontRef>
         </p:style>
         <p:txBody>
-          <a:bodyPr rtlCol="0" anchor="ctr" wrap="square" lIns="164592" rIns="164592" tIns="109728" bIns="36576"/>
+          <a:bodyPr rtlCol="0" anchor="ctr" wrap="square" lIns="164592" rIns="164592" tIns="109728" bIns="73152"/>
           <a:lstStyle/>
           <a:p>
             <a:pPr algn="l">
@@ -24613,47 +25695,179 @@
             <a:r>
               <a:t>        &lt;geometry&gt;</a:t>
             </a:r>
-            <a:br/>
+          </a:p>
+          <a:p>
+            <a:pPr algn="l">
+              <a:spcAft>
+                <a:spcPts val="0"/>
+              </a:spcAft>
+              <a:defRPr sz="1400" b="0">
+                <a:solidFill>
+                  <a:srgbClr val="FFFFFF"/>
+                </a:solidFill>
+                <a:latin typeface="DejaVu Sans Mono"/>
+              </a:defRPr>
+            </a:pPr>
             <a:r>
               <a:t>          &lt;box&gt;</a:t>
             </a:r>
-            <a:br/>
+          </a:p>
+          <a:p>
+            <a:pPr algn="l">
+              <a:spcAft>
+                <a:spcPts val="0"/>
+              </a:spcAft>
+              <a:defRPr sz="1400" b="0">
+                <a:solidFill>
+                  <a:srgbClr val="FFFFFF"/>
+                </a:solidFill>
+                <a:latin typeface="DejaVu Sans Mono"/>
+              </a:defRPr>
+            </a:pPr>
             <a:r>
               <a:t>            &lt;size&gt;0.60 0.42 0.16&lt;/size&gt;</a:t>
             </a:r>
-            <a:br/>
+          </a:p>
+          <a:p>
+            <a:pPr algn="l">
+              <a:spcAft>
+                <a:spcPts val="0"/>
+              </a:spcAft>
+              <a:defRPr sz="1400" b="0">
+                <a:solidFill>
+                  <a:srgbClr val="FFFFFF"/>
+                </a:solidFill>
+                <a:latin typeface="DejaVu Sans Mono"/>
+              </a:defRPr>
+            </a:pPr>
             <a:r>
               <a:t>          &lt;/box&gt;</a:t>
             </a:r>
-            <a:br/>
+          </a:p>
+          <a:p>
+            <a:pPr algn="l">
+              <a:spcAft>
+                <a:spcPts val="0"/>
+              </a:spcAft>
+              <a:defRPr sz="1400" b="0">
+                <a:solidFill>
+                  <a:srgbClr val="FFFFFF"/>
+                </a:solidFill>
+                <a:latin typeface="DejaVu Sans Mono"/>
+              </a:defRPr>
+            </a:pPr>
             <a:r>
               <a:t>        &lt;/geometry&gt;</a:t>
             </a:r>
-            <a:br/>
+          </a:p>
+          <a:p>
+            <a:pPr algn="l">
+              <a:spcAft>
+                <a:spcPts val="0"/>
+              </a:spcAft>
+              <a:defRPr sz="1400" b="0">
+                <a:solidFill>
+                  <a:srgbClr val="FFFFFF"/>
+                </a:solidFill>
+                <a:latin typeface="DejaVu Sans Mono"/>
+              </a:defRPr>
+            </a:pPr>
             <a:r>
               <a:t>      &lt;/collision&gt;</a:t>
             </a:r>
-            <a:br/>
+          </a:p>
+          <a:p>
+            <a:pPr algn="l">
+              <a:spcAft>
+                <a:spcPts val="0"/>
+              </a:spcAft>
+              <a:defRPr sz="1400" b="0">
+                <a:solidFill>
+                  <a:srgbClr val="FFFFFF"/>
+                </a:solidFill>
+                <a:latin typeface="DejaVu Sans Mono"/>
+              </a:defRPr>
+            </a:pPr>
             <a:r>
               <a:t>      </a:t>
             </a:r>
-            <a:br/>
+          </a:p>
+          <a:p>
+            <a:pPr algn="l">
+              <a:spcAft>
+                <a:spcPts val="0"/>
+              </a:spcAft>
+              <a:defRPr sz="1400" b="0">
+                <a:solidFill>
+                  <a:srgbClr val="FFFFFF"/>
+                </a:solidFill>
+                <a:latin typeface="DejaVu Sans Mono"/>
+              </a:defRPr>
+            </a:pPr>
             <a:r>
               <a:t>      </a:t>
             </a:r>
-            <a:br/>
+          </a:p>
+          <a:p>
+            <a:pPr algn="l">
+              <a:spcAft>
+                <a:spcPts val="0"/>
+              </a:spcAft>
+              <a:defRPr sz="1400" b="0">
+                <a:solidFill>
+                  <a:srgbClr val="FFFFFF"/>
+                </a:solidFill>
+                <a:latin typeface="DejaVu Sans Mono"/>
+              </a:defRPr>
+            </a:pPr>
             <a:r>
               <a:t>      &lt;sensor name="imu" type="imu"&gt;</a:t>
             </a:r>
-            <a:br/>
+          </a:p>
+          <a:p>
+            <a:pPr algn="l">
+              <a:spcAft>
+                <a:spcPts val="0"/>
+              </a:spcAft>
+              <a:defRPr sz="1400" b="0">
+                <a:solidFill>
+                  <a:srgbClr val="FFFFFF"/>
+                </a:solidFill>
+                <a:latin typeface="DejaVu Sans Mono"/>
+              </a:defRPr>
+            </a:pPr>
             <a:r>
               <a:t>        &lt;topic&gt;/imu/data&lt;/topic&gt;</a:t>
             </a:r>
-            <a:br/>
+          </a:p>
+          <a:p>
+            <a:pPr algn="l">
+              <a:spcAft>
+                <a:spcPts val="0"/>
+              </a:spcAft>
+              <a:defRPr sz="1400" b="0">
+                <a:solidFill>
+                  <a:srgbClr val="FFFFFF"/>
+                </a:solidFill>
+                <a:latin typeface="DejaVu Sans Mono"/>
+              </a:defRPr>
+            </a:pPr>
             <a:r>
               <a:t>        &lt;always_on&gt;true&lt;/always_on&gt;</a:t>
             </a:r>
-            <a:br/>
+          </a:p>
+          <a:p>
+            <a:pPr algn="l">
+              <a:spcAft>
+                <a:spcPts val="0"/>
+              </a:spcAft>
+              <a:defRPr sz="1400" b="0">
+                <a:solidFill>
+                  <a:srgbClr val="FFFFFF"/>
+                </a:solidFill>
+                <a:latin typeface="DejaVu Sans Mono"/>
+              </a:defRPr>
+            </a:pPr>
             <a:r>
               <a:t>        &lt;update_rate&gt;100&lt;/update_rate&gt;</a:t>
             </a:r>
@@ -25070,7 +26284,7 @@
           </a:fontRef>
         </p:style>
         <p:txBody>
-          <a:bodyPr rtlCol="0" anchor="ctr" wrap="square" lIns="164592" rIns="164592" tIns="109728" bIns="36576"/>
+          <a:bodyPr rtlCol="0" anchor="ctr" wrap="square" lIns="164592" rIns="164592" tIns="109728" bIns="73152"/>
           <a:lstStyle/>
           <a:p>
             <a:pPr algn="l">
@@ -25087,47 +26301,179 @@
             <a:r>
               <a:t>        &lt;imu&gt;</a:t>
             </a:r>
-            <a:br/>
+          </a:p>
+          <a:p>
+            <a:pPr algn="l">
+              <a:spcAft>
+                <a:spcPts val="0"/>
+              </a:spcAft>
+              <a:defRPr sz="1400" b="0">
+                <a:solidFill>
+                  <a:srgbClr val="FFFFFF"/>
+                </a:solidFill>
+                <a:latin typeface="DejaVu Sans Mono"/>
+              </a:defRPr>
+            </a:pPr>
             <a:r>
               <a:t>          &lt;angular_velocity&gt;</a:t>
             </a:r>
-            <a:br/>
+          </a:p>
+          <a:p>
+            <a:pPr algn="l">
+              <a:spcAft>
+                <a:spcPts val="0"/>
+              </a:spcAft>
+              <a:defRPr sz="1400" b="0">
+                <a:solidFill>
+                  <a:srgbClr val="FFFFFF"/>
+                </a:solidFill>
+                <a:latin typeface="DejaVu Sans Mono"/>
+              </a:defRPr>
+            </a:pPr>
             <a:r>
               <a:t>            &lt;x&gt;</a:t>
             </a:r>
-            <a:br/>
+          </a:p>
+          <a:p>
+            <a:pPr algn="l">
+              <a:spcAft>
+                <a:spcPts val="0"/>
+              </a:spcAft>
+              <a:defRPr sz="1400" b="0">
+                <a:solidFill>
+                  <a:srgbClr val="FFFFFF"/>
+                </a:solidFill>
+                <a:latin typeface="DejaVu Sans Mono"/>
+              </a:defRPr>
+            </a:pPr>
             <a:r>
               <a:t>              &lt;noise type="gaussian"&gt;</a:t>
             </a:r>
-            <a:br/>
+          </a:p>
+          <a:p>
+            <a:pPr algn="l">
+              <a:spcAft>
+                <a:spcPts val="0"/>
+              </a:spcAft>
+              <a:defRPr sz="1400" b="0">
+                <a:solidFill>
+                  <a:srgbClr val="FFFFFF"/>
+                </a:solidFill>
+                <a:latin typeface="DejaVu Sans Mono"/>
+              </a:defRPr>
+            </a:pPr>
             <a:r>
               <a:t>                &lt;mean&gt;0&lt;/mean&gt;</a:t>
             </a:r>
-            <a:br/>
+          </a:p>
+          <a:p>
+            <a:pPr algn="l">
+              <a:spcAft>
+                <a:spcPts val="0"/>
+              </a:spcAft>
+              <a:defRPr sz="1400" b="0">
+                <a:solidFill>
+                  <a:srgbClr val="FFFFFF"/>
+                </a:solidFill>
+                <a:latin typeface="DejaVu Sans Mono"/>
+              </a:defRPr>
+            </a:pPr>
             <a:r>
               <a:t>                &lt;stddev&gt;0.001&lt;/stddev&gt;</a:t>
             </a:r>
-            <a:br/>
+          </a:p>
+          <a:p>
+            <a:pPr algn="l">
+              <a:spcAft>
+                <a:spcPts val="0"/>
+              </a:spcAft>
+              <a:defRPr sz="1400" b="0">
+                <a:solidFill>
+                  <a:srgbClr val="FFFFFF"/>
+                </a:solidFill>
+                <a:latin typeface="DejaVu Sans Mono"/>
+              </a:defRPr>
+            </a:pPr>
             <a:r>
               <a:t>              &lt;/noise&gt;</a:t>
             </a:r>
-            <a:br/>
+          </a:p>
+          <a:p>
+            <a:pPr algn="l">
+              <a:spcAft>
+                <a:spcPts val="0"/>
+              </a:spcAft>
+              <a:defRPr sz="1400" b="0">
+                <a:solidFill>
+                  <a:srgbClr val="FFFFFF"/>
+                </a:solidFill>
+                <a:latin typeface="DejaVu Sans Mono"/>
+              </a:defRPr>
+            </a:pPr>
             <a:r>
               <a:t>            &lt;/x&gt;</a:t>
             </a:r>
-            <a:br/>
+          </a:p>
+          <a:p>
+            <a:pPr algn="l">
+              <a:spcAft>
+                <a:spcPts val="0"/>
+              </a:spcAft>
+              <a:defRPr sz="1400" b="0">
+                <a:solidFill>
+                  <a:srgbClr val="FFFFFF"/>
+                </a:solidFill>
+                <a:latin typeface="DejaVu Sans Mono"/>
+              </a:defRPr>
+            </a:pPr>
             <a:r>
               <a:t>          &lt;/angular_velocity&gt;</a:t>
             </a:r>
-            <a:br/>
+          </a:p>
+          <a:p>
+            <a:pPr algn="l">
+              <a:spcAft>
+                <a:spcPts val="0"/>
+              </a:spcAft>
+              <a:defRPr sz="1400" b="0">
+                <a:solidFill>
+                  <a:srgbClr val="FFFFFF"/>
+                </a:solidFill>
+                <a:latin typeface="DejaVu Sans Mono"/>
+              </a:defRPr>
+            </a:pPr>
             <a:r>
               <a:t>        &lt;/imu&gt;</a:t>
             </a:r>
-            <a:br/>
+          </a:p>
+          <a:p>
+            <a:pPr algn="l">
+              <a:spcAft>
+                <a:spcPts val="0"/>
+              </a:spcAft>
+              <a:defRPr sz="1400" b="0">
+                <a:solidFill>
+                  <a:srgbClr val="FFFFFF"/>
+                </a:solidFill>
+                <a:latin typeface="DejaVu Sans Mono"/>
+              </a:defRPr>
+            </a:pPr>
             <a:r>
               <a:t>      &lt;/sensor&gt;</a:t>
             </a:r>
-            <a:br/>
+          </a:p>
+          <a:p>
+            <a:pPr algn="l">
+              <a:spcAft>
+                <a:spcPts val="0"/>
+              </a:spcAft>
+              <a:defRPr sz="1400" b="0">
+                <a:solidFill>
+                  <a:srgbClr val="FFFFFF"/>
+                </a:solidFill>
+                <a:latin typeface="DejaVu Sans Mono"/>
+              </a:defRPr>
+            </a:pPr>
             <a:r>
               <a:t>      </a:t>
             </a:r>
@@ -25544,7 +26890,7 @@
           </a:fontRef>
         </p:style>
         <p:txBody>
-          <a:bodyPr rtlCol="0" anchor="ctr" wrap="square" lIns="164592" rIns="164592" tIns="109728" bIns="36576"/>
+          <a:bodyPr rtlCol="0" anchor="ctr" wrap="square" lIns="164592" rIns="164592" tIns="109728" bIns="73152"/>
           <a:lstStyle/>
           <a:p>
             <a:pPr algn="l">
@@ -25561,47 +26907,179 @@
             <a:r>
               <a:t>    </a:t>
             </a:r>
-            <a:br/>
+          </a:p>
+          <a:p>
+            <a:pPr algn="l">
+              <a:spcAft>
+                <a:spcPts val="0"/>
+              </a:spcAft>
+              <a:defRPr sz="1400" b="0">
+                <a:solidFill>
+                  <a:srgbClr val="FFFFFF"/>
+                </a:solidFill>
+                <a:latin typeface="DejaVu Sans Mono"/>
+              </a:defRPr>
+            </a:pPr>
             <a:r>
               <a:t>    &lt;/link&gt;</a:t>
             </a:r>
-            <a:br/>
+          </a:p>
+          <a:p>
+            <a:pPr algn="l">
+              <a:spcAft>
+                <a:spcPts val="0"/>
+              </a:spcAft>
+              <a:defRPr sz="1400" b="0">
+                <a:solidFill>
+                  <a:srgbClr val="FFFFFF"/>
+                </a:solidFill>
+                <a:latin typeface="DejaVu Sans Mono"/>
+              </a:defRPr>
+            </a:pPr>
             <a:r>
               <a:t>    </a:t>
             </a:r>
-            <a:br/>
+          </a:p>
+          <a:p>
+            <a:pPr algn="l">
+              <a:spcAft>
+                <a:spcPts val="0"/>
+              </a:spcAft>
+              <a:defRPr sz="1400" b="0">
+                <a:solidFill>
+                  <a:srgbClr val="FFFFFF"/>
+                </a:solidFill>
+                <a:latin typeface="DejaVu Sans Mono"/>
+              </a:defRPr>
+            </a:pPr>
             <a:r>
               <a:t>    </a:t>
             </a:r>
-            <a:br/>
+          </a:p>
+          <a:p>
+            <a:pPr algn="l">
+              <a:spcAft>
+                <a:spcPts val="0"/>
+              </a:spcAft>
+              <a:defRPr sz="1400" b="0">
+                <a:solidFill>
+                  <a:srgbClr val="FFFFFF"/>
+                </a:solidFill>
+                <a:latin typeface="DejaVu Sans Mono"/>
+              </a:defRPr>
+            </a:pPr>
             <a:r>
               <a:t>    &lt;link name="left_wheel_link"&gt;</a:t>
             </a:r>
-            <a:br/>
+          </a:p>
+          <a:p>
+            <a:pPr algn="l">
+              <a:spcAft>
+                <a:spcPts val="0"/>
+              </a:spcAft>
+              <a:defRPr sz="1400" b="0">
+                <a:solidFill>
+                  <a:srgbClr val="FFFFFF"/>
+                </a:solidFill>
+                <a:latin typeface="DejaVu Sans Mono"/>
+              </a:defRPr>
+            </a:pPr>
             <a:r>
               <a:t>      &lt;pose relative_to="base_link"&gt;0 0.19 -0.08 1.5708 0 0&lt;/pose&gt;</a:t>
             </a:r>
-            <a:br/>
+          </a:p>
+          <a:p>
+            <a:pPr algn="l">
+              <a:spcAft>
+                <a:spcPts val="0"/>
+              </a:spcAft>
+              <a:defRPr sz="1400" b="0">
+                <a:solidFill>
+                  <a:srgbClr val="FFFFFF"/>
+                </a:solidFill>
+                <a:latin typeface="DejaVu Sans Mono"/>
+              </a:defRPr>
+            </a:pPr>
             <a:r>
               <a:t>      &lt;inertial&gt;</a:t>
             </a:r>
-            <a:br/>
+          </a:p>
+          <a:p>
+            <a:pPr algn="l">
+              <a:spcAft>
+                <a:spcPts val="0"/>
+              </a:spcAft>
+              <a:defRPr sz="1400" b="0">
+                <a:solidFill>
+                  <a:srgbClr val="FFFFFF"/>
+                </a:solidFill>
+                <a:latin typeface="DejaVu Sans Mono"/>
+              </a:defRPr>
+            </a:pPr>
             <a:r>
               <a:t>        &lt;mass&gt;0.6&lt;/mass&gt;</a:t>
             </a:r>
-            <a:br/>
+          </a:p>
+          <a:p>
+            <a:pPr algn="l">
+              <a:spcAft>
+                <a:spcPts val="0"/>
+              </a:spcAft>
+              <a:defRPr sz="1400" b="0">
+                <a:solidFill>
+                  <a:srgbClr val="FFFFFF"/>
+                </a:solidFill>
+                <a:latin typeface="DejaVu Sans Mono"/>
+              </a:defRPr>
+            </a:pPr>
             <a:r>
               <a:t>        &lt;inertia&gt;</a:t>
             </a:r>
-            <a:br/>
+          </a:p>
+          <a:p>
+            <a:pPr algn="l">
+              <a:spcAft>
+                <a:spcPts val="0"/>
+              </a:spcAft>
+              <a:defRPr sz="1400" b="0">
+                <a:solidFill>
+                  <a:srgbClr val="FFFFFF"/>
+                </a:solidFill>
+                <a:latin typeface="DejaVu Sans Mono"/>
+              </a:defRPr>
+            </a:pPr>
             <a:r>
               <a:t>          &lt;ixx&gt;0.002&lt;/ixx&gt;</a:t>
             </a:r>
-            <a:br/>
+          </a:p>
+          <a:p>
+            <a:pPr algn="l">
+              <a:spcAft>
+                <a:spcPts val="0"/>
+              </a:spcAft>
+              <a:defRPr sz="1400" b="0">
+                <a:solidFill>
+                  <a:srgbClr val="FFFFFF"/>
+                </a:solidFill>
+                <a:latin typeface="DejaVu Sans Mono"/>
+              </a:defRPr>
+            </a:pPr>
             <a:r>
               <a:t>          &lt;iyy&gt;0.002&lt;/iyy&gt;</a:t>
             </a:r>
-            <a:br/>
+          </a:p>
+          <a:p>
+            <a:pPr algn="l">
+              <a:spcAft>
+                <a:spcPts val="0"/>
+              </a:spcAft>
+              <a:defRPr sz="1400" b="0">
+                <a:solidFill>
+                  <a:srgbClr val="FFFFFF"/>
+                </a:solidFill>
+                <a:latin typeface="DejaVu Sans Mono"/>
+              </a:defRPr>
+            </a:pPr>
             <a:r>
               <a:t>          &lt;izz&gt;0.001&lt;/izz&gt;</a:t>
             </a:r>
@@ -26018,7 +27496,7 @@
           </a:fontRef>
         </p:style>
         <p:txBody>
-          <a:bodyPr rtlCol="0" anchor="ctr" wrap="square" lIns="164592" rIns="164592" tIns="109728" bIns="36576"/>
+          <a:bodyPr rtlCol="0" anchor="ctr" wrap="square" lIns="164592" rIns="164592" tIns="109728" bIns="73152"/>
           <a:lstStyle/>
           <a:p>
             <a:pPr algn="l">
@@ -26035,47 +27513,179 @@
             <a:r>
               <a:t>        &lt;/inertia&gt;</a:t>
             </a:r>
-            <a:br/>
+          </a:p>
+          <a:p>
+            <a:pPr algn="l">
+              <a:spcAft>
+                <a:spcPts val="0"/>
+              </a:spcAft>
+              <a:defRPr sz="1400" b="0">
+                <a:solidFill>
+                  <a:srgbClr val="FFFFFF"/>
+                </a:solidFill>
+                <a:latin typeface="DejaVu Sans Mono"/>
+              </a:defRPr>
+            </a:pPr>
             <a:r>
               <a:t>      &lt;/inertial&gt;</a:t>
             </a:r>
-            <a:br/>
+          </a:p>
+          <a:p>
+            <a:pPr algn="l">
+              <a:spcAft>
+                <a:spcPts val="0"/>
+              </a:spcAft>
+              <a:defRPr sz="1400" b="0">
+                <a:solidFill>
+                  <a:srgbClr val="FFFFFF"/>
+                </a:solidFill>
+                <a:latin typeface="DejaVu Sans Mono"/>
+              </a:defRPr>
+            </a:pPr>
             <a:r>
               <a:t>      &lt;visual name="wheel"&gt;</a:t>
             </a:r>
-            <a:br/>
+          </a:p>
+          <a:p>
+            <a:pPr algn="l">
+              <a:spcAft>
+                <a:spcPts val="0"/>
+              </a:spcAft>
+              <a:defRPr sz="1400" b="0">
+                <a:solidFill>
+                  <a:srgbClr val="FFFFFF"/>
+                </a:solidFill>
+                <a:latin typeface="DejaVu Sans Mono"/>
+              </a:defRPr>
+            </a:pPr>
             <a:r>
               <a:t>        &lt;geometry&gt;</a:t>
             </a:r>
-            <a:br/>
+          </a:p>
+          <a:p>
+            <a:pPr algn="l">
+              <a:spcAft>
+                <a:spcPts val="0"/>
+              </a:spcAft>
+              <a:defRPr sz="1400" b="0">
+                <a:solidFill>
+                  <a:srgbClr val="FFFFFF"/>
+                </a:solidFill>
+                <a:latin typeface="DejaVu Sans Mono"/>
+              </a:defRPr>
+            </a:pPr>
             <a:r>
               <a:t>          &lt;cylinder&gt;</a:t>
             </a:r>
-            <a:br/>
+          </a:p>
+          <a:p>
+            <a:pPr algn="l">
+              <a:spcAft>
+                <a:spcPts val="0"/>
+              </a:spcAft>
+              <a:defRPr sz="1400" b="0">
+                <a:solidFill>
+                  <a:srgbClr val="FFFFFF"/>
+                </a:solidFill>
+                <a:latin typeface="DejaVu Sans Mono"/>
+              </a:defRPr>
+            </a:pPr>
             <a:r>
               <a:t>            &lt;radius&gt;0.08&lt;/radius&gt;</a:t>
             </a:r>
-            <a:br/>
+          </a:p>
+          <a:p>
+            <a:pPr algn="l">
+              <a:spcAft>
+                <a:spcPts val="0"/>
+              </a:spcAft>
+              <a:defRPr sz="1400" b="0">
+                <a:solidFill>
+                  <a:srgbClr val="FFFFFF"/>
+                </a:solidFill>
+                <a:latin typeface="DejaVu Sans Mono"/>
+              </a:defRPr>
+            </a:pPr>
             <a:r>
               <a:t>            &lt;length&gt;0.05&lt;/length&gt;</a:t>
             </a:r>
-            <a:br/>
+          </a:p>
+          <a:p>
+            <a:pPr algn="l">
+              <a:spcAft>
+                <a:spcPts val="0"/>
+              </a:spcAft>
+              <a:defRPr sz="1400" b="0">
+                <a:solidFill>
+                  <a:srgbClr val="FFFFFF"/>
+                </a:solidFill>
+                <a:latin typeface="DejaVu Sans Mono"/>
+              </a:defRPr>
+            </a:pPr>
             <a:r>
               <a:t>          &lt;/cylinder&gt;</a:t>
             </a:r>
-            <a:br/>
+          </a:p>
+          <a:p>
+            <a:pPr algn="l">
+              <a:spcAft>
+                <a:spcPts val="0"/>
+              </a:spcAft>
+              <a:defRPr sz="1400" b="0">
+                <a:solidFill>
+                  <a:srgbClr val="FFFFFF"/>
+                </a:solidFill>
+                <a:latin typeface="DejaVu Sans Mono"/>
+              </a:defRPr>
+            </a:pPr>
             <a:r>
               <a:t>        &lt;/geometry&gt;</a:t>
             </a:r>
-            <a:br/>
+          </a:p>
+          <a:p>
+            <a:pPr algn="l">
+              <a:spcAft>
+                <a:spcPts val="0"/>
+              </a:spcAft>
+              <a:defRPr sz="1400" b="0">
+                <a:solidFill>
+                  <a:srgbClr val="FFFFFF"/>
+                </a:solidFill>
+                <a:latin typeface="DejaVu Sans Mono"/>
+              </a:defRPr>
+            </a:pPr>
             <a:r>
               <a:t>      &lt;/visual&gt;</a:t>
             </a:r>
-            <a:br/>
+          </a:p>
+          <a:p>
+            <a:pPr algn="l">
+              <a:spcAft>
+                <a:spcPts val="0"/>
+              </a:spcAft>
+              <a:defRPr sz="1400" b="0">
+                <a:solidFill>
+                  <a:srgbClr val="FFFFFF"/>
+                </a:solidFill>
+                <a:latin typeface="DejaVu Sans Mono"/>
+              </a:defRPr>
+            </a:pPr>
             <a:r>
               <a:t>      &lt;collision name="wheel_collision"&gt;</a:t>
             </a:r>
-            <a:br/>
+          </a:p>
+          <a:p>
+            <a:pPr algn="l">
+              <a:spcAft>
+                <a:spcPts val="0"/>
+              </a:spcAft>
+              <a:defRPr sz="1400" b="0">
+                <a:solidFill>
+                  <a:srgbClr val="FFFFFF"/>
+                </a:solidFill>
+                <a:latin typeface="DejaVu Sans Mono"/>
+              </a:defRPr>
+            </a:pPr>
             <a:r>
               <a:t>        &lt;geometry&gt;</a:t>
             </a:r>
@@ -26492,7 +28102,7 @@
           </a:fontRef>
         </p:style>
         <p:txBody>
-          <a:bodyPr rtlCol="0" anchor="ctr" wrap="square" lIns="164592" rIns="164592" tIns="109728" bIns="36576"/>
+          <a:bodyPr rtlCol="0" anchor="ctr" wrap="square" lIns="164592" rIns="164592" tIns="109728" bIns="73152"/>
           <a:lstStyle/>
           <a:p>
             <a:pPr algn="l">
@@ -26509,47 +28119,179 @@
             <a:r>
               <a:t>          &lt;cylinder&gt;</a:t>
             </a:r>
-            <a:br/>
+          </a:p>
+          <a:p>
+            <a:pPr algn="l">
+              <a:spcAft>
+                <a:spcPts val="0"/>
+              </a:spcAft>
+              <a:defRPr sz="1400" b="0">
+                <a:solidFill>
+                  <a:srgbClr val="FFFFFF"/>
+                </a:solidFill>
+                <a:latin typeface="DejaVu Sans Mono"/>
+              </a:defRPr>
+            </a:pPr>
             <a:r>
               <a:t>            &lt;radius&gt;0.08&lt;/radius&gt;</a:t>
             </a:r>
-            <a:br/>
+          </a:p>
+          <a:p>
+            <a:pPr algn="l">
+              <a:spcAft>
+                <a:spcPts val="0"/>
+              </a:spcAft>
+              <a:defRPr sz="1400" b="0">
+                <a:solidFill>
+                  <a:srgbClr val="FFFFFF"/>
+                </a:solidFill>
+                <a:latin typeface="DejaVu Sans Mono"/>
+              </a:defRPr>
+            </a:pPr>
             <a:r>
               <a:t>            &lt;length&gt;0.05&lt;/length&gt;</a:t>
             </a:r>
-            <a:br/>
+          </a:p>
+          <a:p>
+            <a:pPr algn="l">
+              <a:spcAft>
+                <a:spcPts val="0"/>
+              </a:spcAft>
+              <a:defRPr sz="1400" b="0">
+                <a:solidFill>
+                  <a:srgbClr val="FFFFFF"/>
+                </a:solidFill>
+                <a:latin typeface="DejaVu Sans Mono"/>
+              </a:defRPr>
+            </a:pPr>
             <a:r>
               <a:t>          &lt;/cylinder&gt;</a:t>
             </a:r>
-            <a:br/>
+          </a:p>
+          <a:p>
+            <a:pPr algn="l">
+              <a:spcAft>
+                <a:spcPts val="0"/>
+              </a:spcAft>
+              <a:defRPr sz="1400" b="0">
+                <a:solidFill>
+                  <a:srgbClr val="FFFFFF"/>
+                </a:solidFill>
+                <a:latin typeface="DejaVu Sans Mono"/>
+              </a:defRPr>
+            </a:pPr>
             <a:r>
               <a:t>        &lt;/geometry&gt;</a:t>
             </a:r>
-            <a:br/>
+          </a:p>
+          <a:p>
+            <a:pPr algn="l">
+              <a:spcAft>
+                <a:spcPts val="0"/>
+              </a:spcAft>
+              <a:defRPr sz="1400" b="0">
+                <a:solidFill>
+                  <a:srgbClr val="FFFFFF"/>
+                </a:solidFill>
+                <a:latin typeface="DejaVu Sans Mono"/>
+              </a:defRPr>
+            </a:pPr>
             <a:r>
               <a:t>        &lt;surface&gt;</a:t>
             </a:r>
-            <a:br/>
+          </a:p>
+          <a:p>
+            <a:pPr algn="l">
+              <a:spcAft>
+                <a:spcPts val="0"/>
+              </a:spcAft>
+              <a:defRPr sz="1400" b="0">
+                <a:solidFill>
+                  <a:srgbClr val="FFFFFF"/>
+                </a:solidFill>
+                <a:latin typeface="DejaVu Sans Mono"/>
+              </a:defRPr>
+            </a:pPr>
             <a:r>
               <a:t>          &lt;friction&gt;</a:t>
             </a:r>
-            <a:br/>
+          </a:p>
+          <a:p>
+            <a:pPr algn="l">
+              <a:spcAft>
+                <a:spcPts val="0"/>
+              </a:spcAft>
+              <a:defRPr sz="1400" b="0">
+                <a:solidFill>
+                  <a:srgbClr val="FFFFFF"/>
+                </a:solidFill>
+                <a:latin typeface="DejaVu Sans Mono"/>
+              </a:defRPr>
+            </a:pPr>
             <a:r>
               <a:t>            &lt;ode&gt;</a:t>
             </a:r>
-            <a:br/>
+          </a:p>
+          <a:p>
+            <a:pPr algn="l">
+              <a:spcAft>
+                <a:spcPts val="0"/>
+              </a:spcAft>
+              <a:defRPr sz="1400" b="0">
+                <a:solidFill>
+                  <a:srgbClr val="FFFFFF"/>
+                </a:solidFill>
+                <a:latin typeface="DejaVu Sans Mono"/>
+              </a:defRPr>
+            </a:pPr>
             <a:r>
               <a:t>              &lt;mu&gt;1.0&lt;/mu&gt;</a:t>
             </a:r>
-            <a:br/>
+          </a:p>
+          <a:p>
+            <a:pPr algn="l">
+              <a:spcAft>
+                <a:spcPts val="0"/>
+              </a:spcAft>
+              <a:defRPr sz="1400" b="0">
+                <a:solidFill>
+                  <a:srgbClr val="FFFFFF"/>
+                </a:solidFill>
+                <a:latin typeface="DejaVu Sans Mono"/>
+              </a:defRPr>
+            </a:pPr>
             <a:r>
               <a:t>              &lt;mu2&gt;1.0&lt;/mu2&gt;</a:t>
             </a:r>
-            <a:br/>
+          </a:p>
+          <a:p>
+            <a:pPr algn="l">
+              <a:spcAft>
+                <a:spcPts val="0"/>
+              </a:spcAft>
+              <a:defRPr sz="1400" b="0">
+                <a:solidFill>
+                  <a:srgbClr val="FFFFFF"/>
+                </a:solidFill>
+                <a:latin typeface="DejaVu Sans Mono"/>
+              </a:defRPr>
+            </a:pPr>
             <a:r>
               <a:t>            &lt;/ode&gt;</a:t>
             </a:r>
-            <a:br/>
+          </a:p>
+          <a:p>
+            <a:pPr algn="l">
+              <a:spcAft>
+                <a:spcPts val="0"/>
+              </a:spcAft>
+              <a:defRPr sz="1400" b="0">
+                <a:solidFill>
+                  <a:srgbClr val="FFFFFF"/>
+                </a:solidFill>
+                <a:latin typeface="DejaVu Sans Mono"/>
+              </a:defRPr>
+            </a:pPr>
             <a:r>
               <a:t>          &lt;/friction&gt;</a:t>
             </a:r>
@@ -26966,7 +28708,7 @@
           </a:fontRef>
         </p:style>
         <p:txBody>
-          <a:bodyPr rtlCol="0" anchor="ctr" wrap="square" lIns="164592" rIns="164592" tIns="109728" bIns="36576"/>
+          <a:bodyPr rtlCol="0" anchor="ctr" wrap="square" lIns="164592" rIns="164592" tIns="109728" bIns="73152"/>
           <a:lstStyle/>
           <a:p>
             <a:pPr algn="l">
@@ -26983,47 +28725,179 @@
             <a:r>
               <a:t>        &lt;/surface&gt;</a:t>
             </a:r>
-            <a:br/>
+          </a:p>
+          <a:p>
+            <a:pPr algn="l">
+              <a:spcAft>
+                <a:spcPts val="0"/>
+              </a:spcAft>
+              <a:defRPr sz="1400" b="0">
+                <a:solidFill>
+                  <a:srgbClr val="FFFFFF"/>
+                </a:solidFill>
+                <a:latin typeface="DejaVu Sans Mono"/>
+              </a:defRPr>
+            </a:pPr>
             <a:r>
               <a:t>      &lt;/collision&gt;</a:t>
             </a:r>
-            <a:br/>
+          </a:p>
+          <a:p>
+            <a:pPr algn="l">
+              <a:spcAft>
+                <a:spcPts val="0"/>
+              </a:spcAft>
+              <a:defRPr sz="1400" b="0">
+                <a:solidFill>
+                  <a:srgbClr val="FFFFFF"/>
+                </a:solidFill>
+                <a:latin typeface="DejaVu Sans Mono"/>
+              </a:defRPr>
+            </a:pPr>
             <a:r>
               <a:t>    &lt;/link&gt;</a:t>
             </a:r>
-            <a:br/>
+          </a:p>
+          <a:p>
+            <a:pPr algn="l">
+              <a:spcAft>
+                <a:spcPts val="0"/>
+              </a:spcAft>
+              <a:defRPr sz="1400" b="0">
+                <a:solidFill>
+                  <a:srgbClr val="FFFFFF"/>
+                </a:solidFill>
+                <a:latin typeface="DejaVu Sans Mono"/>
+              </a:defRPr>
+            </a:pPr>
             <a:r>
               <a:t>    </a:t>
             </a:r>
-            <a:br/>
+          </a:p>
+          <a:p>
+            <a:pPr algn="l">
+              <a:spcAft>
+                <a:spcPts val="0"/>
+              </a:spcAft>
+              <a:defRPr sz="1400" b="0">
+                <a:solidFill>
+                  <a:srgbClr val="FFFFFF"/>
+                </a:solidFill>
+                <a:latin typeface="DejaVu Sans Mono"/>
+              </a:defRPr>
+            </a:pPr>
             <a:r>
               <a:t>    </a:t>
             </a:r>
-            <a:br/>
+          </a:p>
+          <a:p>
+            <a:pPr algn="l">
+              <a:spcAft>
+                <a:spcPts val="0"/>
+              </a:spcAft>
+              <a:defRPr sz="1400" b="0">
+                <a:solidFill>
+                  <a:srgbClr val="FFFFFF"/>
+                </a:solidFill>
+                <a:latin typeface="DejaVu Sans Mono"/>
+              </a:defRPr>
+            </a:pPr>
             <a:r>
               <a:t>    &lt;link name="right_wheel_link"&gt;</a:t>
             </a:r>
-            <a:br/>
+          </a:p>
+          <a:p>
+            <a:pPr algn="l">
+              <a:spcAft>
+                <a:spcPts val="0"/>
+              </a:spcAft>
+              <a:defRPr sz="1400" b="0">
+                <a:solidFill>
+                  <a:srgbClr val="FFFFFF"/>
+                </a:solidFill>
+                <a:latin typeface="DejaVu Sans Mono"/>
+              </a:defRPr>
+            </a:pPr>
             <a:r>
               <a:t>      &lt;pose relative_to="base_link"&gt;0 -0.19 -0.08 1.5708 0 0&lt;/pose&gt;</a:t>
             </a:r>
-            <a:br/>
+          </a:p>
+          <a:p>
+            <a:pPr algn="l">
+              <a:spcAft>
+                <a:spcPts val="0"/>
+              </a:spcAft>
+              <a:defRPr sz="1400" b="0">
+                <a:solidFill>
+                  <a:srgbClr val="FFFFFF"/>
+                </a:solidFill>
+                <a:latin typeface="DejaVu Sans Mono"/>
+              </a:defRPr>
+            </a:pPr>
             <a:r>
               <a:t>      &lt;inertial&gt;</a:t>
             </a:r>
-            <a:br/>
+          </a:p>
+          <a:p>
+            <a:pPr algn="l">
+              <a:spcAft>
+                <a:spcPts val="0"/>
+              </a:spcAft>
+              <a:defRPr sz="1400" b="0">
+                <a:solidFill>
+                  <a:srgbClr val="FFFFFF"/>
+                </a:solidFill>
+                <a:latin typeface="DejaVu Sans Mono"/>
+              </a:defRPr>
+            </a:pPr>
             <a:r>
               <a:t>        &lt;mass&gt;0.6&lt;/mass&gt;</a:t>
             </a:r>
-            <a:br/>
+          </a:p>
+          <a:p>
+            <a:pPr algn="l">
+              <a:spcAft>
+                <a:spcPts val="0"/>
+              </a:spcAft>
+              <a:defRPr sz="1400" b="0">
+                <a:solidFill>
+                  <a:srgbClr val="FFFFFF"/>
+                </a:solidFill>
+                <a:latin typeface="DejaVu Sans Mono"/>
+              </a:defRPr>
+            </a:pPr>
             <a:r>
               <a:t>        &lt;inertia&gt;</a:t>
             </a:r>
-            <a:br/>
+          </a:p>
+          <a:p>
+            <a:pPr algn="l">
+              <a:spcAft>
+                <a:spcPts val="0"/>
+              </a:spcAft>
+              <a:defRPr sz="1400" b="0">
+                <a:solidFill>
+                  <a:srgbClr val="FFFFFF"/>
+                </a:solidFill>
+                <a:latin typeface="DejaVu Sans Mono"/>
+              </a:defRPr>
+            </a:pPr>
             <a:r>
               <a:t>          &lt;ixx&gt;0.002&lt;/ixx&gt;</a:t>
             </a:r>
-            <a:br/>
+          </a:p>
+          <a:p>
+            <a:pPr algn="l">
+              <a:spcAft>
+                <a:spcPts val="0"/>
+              </a:spcAft>
+              <a:defRPr sz="1400" b="0">
+                <a:solidFill>
+                  <a:srgbClr val="FFFFFF"/>
+                </a:solidFill>
+                <a:latin typeface="DejaVu Sans Mono"/>
+              </a:defRPr>
+            </a:pPr>
             <a:r>
               <a:t>          &lt;iyy&gt;0.002&lt;/iyy&gt;</a:t>
             </a:r>
@@ -27440,7 +29314,7 @@
           </a:fontRef>
         </p:style>
         <p:txBody>
-          <a:bodyPr rtlCol="0" anchor="ctr" wrap="square" lIns="164592" rIns="164592" tIns="109728" bIns="36576"/>
+          <a:bodyPr rtlCol="0" anchor="ctr" wrap="square" lIns="164592" rIns="164592" tIns="109728" bIns="73152"/>
           <a:lstStyle/>
           <a:p>
             <a:pPr algn="l">
@@ -27457,47 +29331,179 @@
             <a:r>
               <a:t>          &lt;izz&gt;0.001&lt;/izz&gt;</a:t>
             </a:r>
-            <a:br/>
+          </a:p>
+          <a:p>
+            <a:pPr algn="l">
+              <a:spcAft>
+                <a:spcPts val="0"/>
+              </a:spcAft>
+              <a:defRPr sz="1400" b="0">
+                <a:solidFill>
+                  <a:srgbClr val="FFFFFF"/>
+                </a:solidFill>
+                <a:latin typeface="DejaVu Sans Mono"/>
+              </a:defRPr>
+            </a:pPr>
             <a:r>
               <a:t>        &lt;/inertia&gt;</a:t>
             </a:r>
-            <a:br/>
+          </a:p>
+          <a:p>
+            <a:pPr algn="l">
+              <a:spcAft>
+                <a:spcPts val="0"/>
+              </a:spcAft>
+              <a:defRPr sz="1400" b="0">
+                <a:solidFill>
+                  <a:srgbClr val="FFFFFF"/>
+                </a:solidFill>
+                <a:latin typeface="DejaVu Sans Mono"/>
+              </a:defRPr>
+            </a:pPr>
             <a:r>
               <a:t>      &lt;/inertial&gt;</a:t>
             </a:r>
-            <a:br/>
+          </a:p>
+          <a:p>
+            <a:pPr algn="l">
+              <a:spcAft>
+                <a:spcPts val="0"/>
+              </a:spcAft>
+              <a:defRPr sz="1400" b="0">
+                <a:solidFill>
+                  <a:srgbClr val="FFFFFF"/>
+                </a:solidFill>
+                <a:latin typeface="DejaVu Sans Mono"/>
+              </a:defRPr>
+            </a:pPr>
             <a:r>
               <a:t>      &lt;visual name="wheel"&gt;</a:t>
             </a:r>
-            <a:br/>
+          </a:p>
+          <a:p>
+            <a:pPr algn="l">
+              <a:spcAft>
+                <a:spcPts val="0"/>
+              </a:spcAft>
+              <a:defRPr sz="1400" b="0">
+                <a:solidFill>
+                  <a:srgbClr val="FFFFFF"/>
+                </a:solidFill>
+                <a:latin typeface="DejaVu Sans Mono"/>
+              </a:defRPr>
+            </a:pPr>
             <a:r>
               <a:t>        &lt;geometry&gt;</a:t>
             </a:r>
-            <a:br/>
+          </a:p>
+          <a:p>
+            <a:pPr algn="l">
+              <a:spcAft>
+                <a:spcPts val="0"/>
+              </a:spcAft>
+              <a:defRPr sz="1400" b="0">
+                <a:solidFill>
+                  <a:srgbClr val="FFFFFF"/>
+                </a:solidFill>
+                <a:latin typeface="DejaVu Sans Mono"/>
+              </a:defRPr>
+            </a:pPr>
             <a:r>
               <a:t>          &lt;cylinder&gt;</a:t>
             </a:r>
-            <a:br/>
+          </a:p>
+          <a:p>
+            <a:pPr algn="l">
+              <a:spcAft>
+                <a:spcPts val="0"/>
+              </a:spcAft>
+              <a:defRPr sz="1400" b="0">
+                <a:solidFill>
+                  <a:srgbClr val="FFFFFF"/>
+                </a:solidFill>
+                <a:latin typeface="DejaVu Sans Mono"/>
+              </a:defRPr>
+            </a:pPr>
             <a:r>
               <a:t>            &lt;radius&gt;0.08&lt;/radius&gt;</a:t>
             </a:r>
-            <a:br/>
+          </a:p>
+          <a:p>
+            <a:pPr algn="l">
+              <a:spcAft>
+                <a:spcPts val="0"/>
+              </a:spcAft>
+              <a:defRPr sz="1400" b="0">
+                <a:solidFill>
+                  <a:srgbClr val="FFFFFF"/>
+                </a:solidFill>
+                <a:latin typeface="DejaVu Sans Mono"/>
+              </a:defRPr>
+            </a:pPr>
             <a:r>
               <a:t>            &lt;length&gt;0.05&lt;/length&gt;</a:t>
             </a:r>
-            <a:br/>
+          </a:p>
+          <a:p>
+            <a:pPr algn="l">
+              <a:spcAft>
+                <a:spcPts val="0"/>
+              </a:spcAft>
+              <a:defRPr sz="1400" b="0">
+                <a:solidFill>
+                  <a:srgbClr val="FFFFFF"/>
+                </a:solidFill>
+                <a:latin typeface="DejaVu Sans Mono"/>
+              </a:defRPr>
+            </a:pPr>
             <a:r>
               <a:t>          &lt;/cylinder&gt;</a:t>
             </a:r>
-            <a:br/>
+          </a:p>
+          <a:p>
+            <a:pPr algn="l">
+              <a:spcAft>
+                <a:spcPts val="0"/>
+              </a:spcAft>
+              <a:defRPr sz="1400" b="0">
+                <a:solidFill>
+                  <a:srgbClr val="FFFFFF"/>
+                </a:solidFill>
+                <a:latin typeface="DejaVu Sans Mono"/>
+              </a:defRPr>
+            </a:pPr>
             <a:r>
               <a:t>        &lt;/geometry&gt;</a:t>
             </a:r>
-            <a:br/>
+          </a:p>
+          <a:p>
+            <a:pPr algn="l">
+              <a:spcAft>
+                <a:spcPts val="0"/>
+              </a:spcAft>
+              <a:defRPr sz="1400" b="0">
+                <a:solidFill>
+                  <a:srgbClr val="FFFFFF"/>
+                </a:solidFill>
+                <a:latin typeface="DejaVu Sans Mono"/>
+              </a:defRPr>
+            </a:pPr>
             <a:r>
               <a:t>      &lt;/visual&gt;</a:t>
             </a:r>
-            <a:br/>
+          </a:p>
+          <a:p>
+            <a:pPr algn="l">
+              <a:spcAft>
+                <a:spcPts val="0"/>
+              </a:spcAft>
+              <a:defRPr sz="1400" b="0">
+                <a:solidFill>
+                  <a:srgbClr val="FFFFFF"/>
+                </a:solidFill>
+                <a:latin typeface="DejaVu Sans Mono"/>
+              </a:defRPr>
+            </a:pPr>
             <a:r>
               <a:t>      &lt;collision name="wheel_collision"&gt;</a:t>
             </a:r>
@@ -27914,7 +29920,7 @@
           </a:fontRef>
         </p:style>
         <p:txBody>
-          <a:bodyPr rtlCol="0" anchor="ctr" wrap="square" lIns="164592" rIns="164592" tIns="109728" bIns="36576"/>
+          <a:bodyPr rtlCol="0" anchor="ctr" wrap="square" lIns="164592" rIns="164592" tIns="109728" bIns="73152"/>
           <a:lstStyle/>
           <a:p>
             <a:pPr algn="l">
@@ -27931,47 +29937,179 @@
             <a:r>
               <a:t>        &lt;geometry&gt;</a:t>
             </a:r>
-            <a:br/>
+          </a:p>
+          <a:p>
+            <a:pPr algn="l">
+              <a:spcAft>
+                <a:spcPts val="0"/>
+              </a:spcAft>
+              <a:defRPr sz="1400" b="0">
+                <a:solidFill>
+                  <a:srgbClr val="FFFFFF"/>
+                </a:solidFill>
+                <a:latin typeface="DejaVu Sans Mono"/>
+              </a:defRPr>
+            </a:pPr>
             <a:r>
               <a:t>          &lt;cylinder&gt;</a:t>
             </a:r>
-            <a:br/>
+          </a:p>
+          <a:p>
+            <a:pPr algn="l">
+              <a:spcAft>
+                <a:spcPts val="0"/>
+              </a:spcAft>
+              <a:defRPr sz="1400" b="0">
+                <a:solidFill>
+                  <a:srgbClr val="FFFFFF"/>
+                </a:solidFill>
+                <a:latin typeface="DejaVu Sans Mono"/>
+              </a:defRPr>
+            </a:pPr>
             <a:r>
               <a:t>            &lt;radius&gt;0.08&lt;/radius&gt;</a:t>
             </a:r>
-            <a:br/>
+          </a:p>
+          <a:p>
+            <a:pPr algn="l">
+              <a:spcAft>
+                <a:spcPts val="0"/>
+              </a:spcAft>
+              <a:defRPr sz="1400" b="0">
+                <a:solidFill>
+                  <a:srgbClr val="FFFFFF"/>
+                </a:solidFill>
+                <a:latin typeface="DejaVu Sans Mono"/>
+              </a:defRPr>
+            </a:pPr>
             <a:r>
               <a:t>            &lt;length&gt;0.05&lt;/length&gt;</a:t>
             </a:r>
-            <a:br/>
+          </a:p>
+          <a:p>
+            <a:pPr algn="l">
+              <a:spcAft>
+                <a:spcPts val="0"/>
+              </a:spcAft>
+              <a:defRPr sz="1400" b="0">
+                <a:solidFill>
+                  <a:srgbClr val="FFFFFF"/>
+                </a:solidFill>
+                <a:latin typeface="DejaVu Sans Mono"/>
+              </a:defRPr>
+            </a:pPr>
             <a:r>
               <a:t>          &lt;/cylinder&gt;</a:t>
             </a:r>
-            <a:br/>
+          </a:p>
+          <a:p>
+            <a:pPr algn="l">
+              <a:spcAft>
+                <a:spcPts val="0"/>
+              </a:spcAft>
+              <a:defRPr sz="1400" b="0">
+                <a:solidFill>
+                  <a:srgbClr val="FFFFFF"/>
+                </a:solidFill>
+                <a:latin typeface="DejaVu Sans Mono"/>
+              </a:defRPr>
+            </a:pPr>
             <a:r>
               <a:t>        &lt;/geometry&gt;</a:t>
             </a:r>
-            <a:br/>
+          </a:p>
+          <a:p>
+            <a:pPr algn="l">
+              <a:spcAft>
+                <a:spcPts val="0"/>
+              </a:spcAft>
+              <a:defRPr sz="1400" b="0">
+                <a:solidFill>
+                  <a:srgbClr val="FFFFFF"/>
+                </a:solidFill>
+                <a:latin typeface="DejaVu Sans Mono"/>
+              </a:defRPr>
+            </a:pPr>
             <a:r>
               <a:t>        &lt;surface&gt;</a:t>
             </a:r>
-            <a:br/>
+          </a:p>
+          <a:p>
+            <a:pPr algn="l">
+              <a:spcAft>
+                <a:spcPts val="0"/>
+              </a:spcAft>
+              <a:defRPr sz="1400" b="0">
+                <a:solidFill>
+                  <a:srgbClr val="FFFFFF"/>
+                </a:solidFill>
+                <a:latin typeface="DejaVu Sans Mono"/>
+              </a:defRPr>
+            </a:pPr>
             <a:r>
               <a:t>          &lt;friction&gt;</a:t>
             </a:r>
-            <a:br/>
+          </a:p>
+          <a:p>
+            <a:pPr algn="l">
+              <a:spcAft>
+                <a:spcPts val="0"/>
+              </a:spcAft>
+              <a:defRPr sz="1400" b="0">
+                <a:solidFill>
+                  <a:srgbClr val="FFFFFF"/>
+                </a:solidFill>
+                <a:latin typeface="DejaVu Sans Mono"/>
+              </a:defRPr>
+            </a:pPr>
             <a:r>
               <a:t>            &lt;ode&gt;</a:t>
             </a:r>
-            <a:br/>
+          </a:p>
+          <a:p>
+            <a:pPr algn="l">
+              <a:spcAft>
+                <a:spcPts val="0"/>
+              </a:spcAft>
+              <a:defRPr sz="1400" b="0">
+                <a:solidFill>
+                  <a:srgbClr val="FFFFFF"/>
+                </a:solidFill>
+                <a:latin typeface="DejaVu Sans Mono"/>
+              </a:defRPr>
+            </a:pPr>
             <a:r>
               <a:t>              &lt;mu&gt;1.0&lt;/mu&gt;</a:t>
             </a:r>
-            <a:br/>
+          </a:p>
+          <a:p>
+            <a:pPr algn="l">
+              <a:spcAft>
+                <a:spcPts val="0"/>
+              </a:spcAft>
+              <a:defRPr sz="1400" b="0">
+                <a:solidFill>
+                  <a:srgbClr val="FFFFFF"/>
+                </a:solidFill>
+                <a:latin typeface="DejaVu Sans Mono"/>
+              </a:defRPr>
+            </a:pPr>
             <a:r>
               <a:t>              &lt;mu2&gt;1.0&lt;/mu2&gt;</a:t>
             </a:r>
-            <a:br/>
+          </a:p>
+          <a:p>
+            <a:pPr algn="l">
+              <a:spcAft>
+                <a:spcPts val="0"/>
+              </a:spcAft>
+              <a:defRPr sz="1400" b="0">
+                <a:solidFill>
+                  <a:srgbClr val="FFFFFF"/>
+                </a:solidFill>
+                <a:latin typeface="DejaVu Sans Mono"/>
+              </a:defRPr>
+            </a:pPr>
             <a:r>
               <a:t>            &lt;/ode&gt;</a:t>
             </a:r>
@@ -28721,7 +30859,7 @@
           </a:fontRef>
         </p:style>
         <p:txBody>
-          <a:bodyPr rtlCol="0" anchor="ctr" wrap="square" lIns="164592" rIns="164592" tIns="109728" bIns="36576"/>
+          <a:bodyPr rtlCol="0" anchor="ctr" wrap="square" lIns="164592" rIns="164592" tIns="109728" bIns="73152"/>
           <a:lstStyle/>
           <a:p>
             <a:pPr algn="l">
@@ -28738,47 +30876,179 @@
             <a:r>
               <a:t>          &lt;/friction&gt;</a:t>
             </a:r>
-            <a:br/>
+          </a:p>
+          <a:p>
+            <a:pPr algn="l">
+              <a:spcAft>
+                <a:spcPts val="0"/>
+              </a:spcAft>
+              <a:defRPr sz="1400" b="0">
+                <a:solidFill>
+                  <a:srgbClr val="FFFFFF"/>
+                </a:solidFill>
+                <a:latin typeface="DejaVu Sans Mono"/>
+              </a:defRPr>
+            </a:pPr>
             <a:r>
               <a:t>        &lt;/surface&gt;</a:t>
             </a:r>
-            <a:br/>
+          </a:p>
+          <a:p>
+            <a:pPr algn="l">
+              <a:spcAft>
+                <a:spcPts val="0"/>
+              </a:spcAft>
+              <a:defRPr sz="1400" b="0">
+                <a:solidFill>
+                  <a:srgbClr val="FFFFFF"/>
+                </a:solidFill>
+                <a:latin typeface="DejaVu Sans Mono"/>
+              </a:defRPr>
+            </a:pPr>
             <a:r>
               <a:t>      &lt;/collision&gt;</a:t>
             </a:r>
-            <a:br/>
+          </a:p>
+          <a:p>
+            <a:pPr algn="l">
+              <a:spcAft>
+                <a:spcPts val="0"/>
+              </a:spcAft>
+              <a:defRPr sz="1400" b="0">
+                <a:solidFill>
+                  <a:srgbClr val="FFFFFF"/>
+                </a:solidFill>
+                <a:latin typeface="DejaVu Sans Mono"/>
+              </a:defRPr>
+            </a:pPr>
             <a:r>
               <a:t>    &lt;/link&gt;</a:t>
             </a:r>
-            <a:br/>
+          </a:p>
+          <a:p>
+            <a:pPr algn="l">
+              <a:spcAft>
+                <a:spcPts val="0"/>
+              </a:spcAft>
+              <a:defRPr sz="1400" b="0">
+                <a:solidFill>
+                  <a:srgbClr val="FFFFFF"/>
+                </a:solidFill>
+                <a:latin typeface="DejaVu Sans Mono"/>
+              </a:defRPr>
+            </a:pPr>
             <a:r>
               <a:t>    </a:t>
             </a:r>
-            <a:br/>
+          </a:p>
+          <a:p>
+            <a:pPr algn="l">
+              <a:spcAft>
+                <a:spcPts val="0"/>
+              </a:spcAft>
+              <a:defRPr sz="1400" b="0">
+                <a:solidFill>
+                  <a:srgbClr val="FFFFFF"/>
+                </a:solidFill>
+                <a:latin typeface="DejaVu Sans Mono"/>
+              </a:defRPr>
+            </a:pPr>
             <a:r>
               <a:t>    </a:t>
             </a:r>
-            <a:br/>
+          </a:p>
+          <a:p>
+            <a:pPr algn="l">
+              <a:spcAft>
+                <a:spcPts val="0"/>
+              </a:spcAft>
+              <a:defRPr sz="1400" b="0">
+                <a:solidFill>
+                  <a:srgbClr val="FFFFFF"/>
+                </a:solidFill>
+                <a:latin typeface="DejaVu Sans Mono"/>
+              </a:defRPr>
+            </a:pPr>
             <a:r>
               <a:t>    &lt;joint name="left_wheel_joint" type="revolute"&gt;</a:t>
             </a:r>
-            <a:br/>
+          </a:p>
+          <a:p>
+            <a:pPr algn="l">
+              <a:spcAft>
+                <a:spcPts val="0"/>
+              </a:spcAft>
+              <a:defRPr sz="1400" b="0">
+                <a:solidFill>
+                  <a:srgbClr val="FFFFFF"/>
+                </a:solidFill>
+                <a:latin typeface="DejaVu Sans Mono"/>
+              </a:defRPr>
+            </a:pPr>
             <a:r>
               <a:t>      &lt;parent&gt;base_link&lt;/parent&gt;</a:t>
             </a:r>
-            <a:br/>
+          </a:p>
+          <a:p>
+            <a:pPr algn="l">
+              <a:spcAft>
+                <a:spcPts val="0"/>
+              </a:spcAft>
+              <a:defRPr sz="1400" b="0">
+                <a:solidFill>
+                  <a:srgbClr val="FFFFFF"/>
+                </a:solidFill>
+                <a:latin typeface="DejaVu Sans Mono"/>
+              </a:defRPr>
+            </a:pPr>
             <a:r>
               <a:t>      &lt;child&gt;left_wheel_link&lt;/child&gt;</a:t>
             </a:r>
-            <a:br/>
+          </a:p>
+          <a:p>
+            <a:pPr algn="l">
+              <a:spcAft>
+                <a:spcPts val="0"/>
+              </a:spcAft>
+              <a:defRPr sz="1400" b="0">
+                <a:solidFill>
+                  <a:srgbClr val="FFFFFF"/>
+                </a:solidFill>
+                <a:latin typeface="DejaVu Sans Mono"/>
+              </a:defRPr>
+            </a:pPr>
             <a:r>
               <a:t>      &lt;axis&gt;</a:t>
             </a:r>
-            <a:br/>
+          </a:p>
+          <a:p>
+            <a:pPr algn="l">
+              <a:spcAft>
+                <a:spcPts val="0"/>
+              </a:spcAft>
+              <a:defRPr sz="1400" b="0">
+                <a:solidFill>
+                  <a:srgbClr val="FFFFFF"/>
+                </a:solidFill>
+                <a:latin typeface="DejaVu Sans Mono"/>
+              </a:defRPr>
+            </a:pPr>
             <a:r>
               <a:t>        &lt;xyz&gt;0 1 0&lt;/xyz&gt;</a:t>
             </a:r>
-            <a:br/>
+          </a:p>
+          <a:p>
+            <a:pPr algn="l">
+              <a:spcAft>
+                <a:spcPts val="0"/>
+              </a:spcAft>
+              <a:defRPr sz="1400" b="0">
+                <a:solidFill>
+                  <a:srgbClr val="FFFFFF"/>
+                </a:solidFill>
+                <a:latin typeface="DejaVu Sans Mono"/>
+              </a:defRPr>
+            </a:pPr>
             <a:r>
               <a:t>        &lt;limit&gt;</a:t>
             </a:r>
@@ -29195,7 +31465,7 @@
           </a:fontRef>
         </p:style>
         <p:txBody>
-          <a:bodyPr rtlCol="0" anchor="ctr" wrap="square" lIns="164592" rIns="164592" tIns="109728" bIns="36576"/>
+          <a:bodyPr rtlCol="0" anchor="ctr" wrap="square" lIns="164592" rIns="164592" tIns="109728" bIns="73152"/>
           <a:lstStyle/>
           <a:p>
             <a:pPr algn="l">
@@ -29212,47 +31482,179 @@
             <a:r>
               <a:t>          &lt;lower&gt;-1e16&lt;/lower&gt;</a:t>
             </a:r>
-            <a:br/>
+          </a:p>
+          <a:p>
+            <a:pPr algn="l">
+              <a:spcAft>
+                <a:spcPts val="0"/>
+              </a:spcAft>
+              <a:defRPr sz="1400" b="0">
+                <a:solidFill>
+                  <a:srgbClr val="FFFFFF"/>
+                </a:solidFill>
+                <a:latin typeface="DejaVu Sans Mono"/>
+              </a:defRPr>
+            </a:pPr>
             <a:r>
               <a:t>          &lt;upper&gt;1e16&lt;/upper&gt;</a:t>
             </a:r>
-            <a:br/>
+          </a:p>
+          <a:p>
+            <a:pPr algn="l">
+              <a:spcAft>
+                <a:spcPts val="0"/>
+              </a:spcAft>
+              <a:defRPr sz="1400" b="0">
+                <a:solidFill>
+                  <a:srgbClr val="FFFFFF"/>
+                </a:solidFill>
+                <a:latin typeface="DejaVu Sans Mono"/>
+              </a:defRPr>
+            </a:pPr>
             <a:r>
               <a:t>        &lt;/limit&gt;</a:t>
             </a:r>
-            <a:br/>
+          </a:p>
+          <a:p>
+            <a:pPr algn="l">
+              <a:spcAft>
+                <a:spcPts val="0"/>
+              </a:spcAft>
+              <a:defRPr sz="1400" b="0">
+                <a:solidFill>
+                  <a:srgbClr val="FFFFFF"/>
+                </a:solidFill>
+                <a:latin typeface="DejaVu Sans Mono"/>
+              </a:defRPr>
+            </a:pPr>
             <a:r>
               <a:t>      &lt;/axis&gt;</a:t>
             </a:r>
-            <a:br/>
+          </a:p>
+          <a:p>
+            <a:pPr algn="l">
+              <a:spcAft>
+                <a:spcPts val="0"/>
+              </a:spcAft>
+              <a:defRPr sz="1400" b="0">
+                <a:solidFill>
+                  <a:srgbClr val="FFFFFF"/>
+                </a:solidFill>
+                <a:latin typeface="DejaVu Sans Mono"/>
+              </a:defRPr>
+            </a:pPr>
             <a:r>
               <a:t>    &lt;/joint&gt;</a:t>
             </a:r>
-            <a:br/>
+          </a:p>
+          <a:p>
+            <a:pPr algn="l">
+              <a:spcAft>
+                <a:spcPts val="0"/>
+              </a:spcAft>
+              <a:defRPr sz="1400" b="0">
+                <a:solidFill>
+                  <a:srgbClr val="FFFFFF"/>
+                </a:solidFill>
+                <a:latin typeface="DejaVu Sans Mono"/>
+              </a:defRPr>
+            </a:pPr>
             <a:r>
               <a:t>    </a:t>
             </a:r>
-            <a:br/>
+          </a:p>
+          <a:p>
+            <a:pPr algn="l">
+              <a:spcAft>
+                <a:spcPts val="0"/>
+              </a:spcAft>
+              <a:defRPr sz="1400" b="0">
+                <a:solidFill>
+                  <a:srgbClr val="FFFFFF"/>
+                </a:solidFill>
+                <a:latin typeface="DejaVu Sans Mono"/>
+              </a:defRPr>
+            </a:pPr>
             <a:r>
               <a:t>    </a:t>
             </a:r>
-            <a:br/>
+          </a:p>
+          <a:p>
+            <a:pPr algn="l">
+              <a:spcAft>
+                <a:spcPts val="0"/>
+              </a:spcAft>
+              <a:defRPr sz="1400" b="0">
+                <a:solidFill>
+                  <a:srgbClr val="FFFFFF"/>
+                </a:solidFill>
+                <a:latin typeface="DejaVu Sans Mono"/>
+              </a:defRPr>
+            </a:pPr>
             <a:r>
               <a:t>    &lt;joint name="right_wheel_joint" type="revolute"&gt;</a:t>
             </a:r>
-            <a:br/>
+          </a:p>
+          <a:p>
+            <a:pPr algn="l">
+              <a:spcAft>
+                <a:spcPts val="0"/>
+              </a:spcAft>
+              <a:defRPr sz="1400" b="0">
+                <a:solidFill>
+                  <a:srgbClr val="FFFFFF"/>
+                </a:solidFill>
+                <a:latin typeface="DejaVu Sans Mono"/>
+              </a:defRPr>
+            </a:pPr>
             <a:r>
               <a:t>      &lt;parent&gt;base_link&lt;/parent&gt;</a:t>
             </a:r>
-            <a:br/>
+          </a:p>
+          <a:p>
+            <a:pPr algn="l">
+              <a:spcAft>
+                <a:spcPts val="0"/>
+              </a:spcAft>
+              <a:defRPr sz="1400" b="0">
+                <a:solidFill>
+                  <a:srgbClr val="FFFFFF"/>
+                </a:solidFill>
+                <a:latin typeface="DejaVu Sans Mono"/>
+              </a:defRPr>
+            </a:pPr>
             <a:r>
               <a:t>      &lt;child&gt;right_wheel_link&lt;/child&gt;</a:t>
             </a:r>
-            <a:br/>
+          </a:p>
+          <a:p>
+            <a:pPr algn="l">
+              <a:spcAft>
+                <a:spcPts val="0"/>
+              </a:spcAft>
+              <a:defRPr sz="1400" b="0">
+                <a:solidFill>
+                  <a:srgbClr val="FFFFFF"/>
+                </a:solidFill>
+                <a:latin typeface="DejaVu Sans Mono"/>
+              </a:defRPr>
+            </a:pPr>
             <a:r>
               <a:t>      &lt;axis&gt;</a:t>
             </a:r>
-            <a:br/>
+          </a:p>
+          <a:p>
+            <a:pPr algn="l">
+              <a:spcAft>
+                <a:spcPts val="0"/>
+              </a:spcAft>
+              <a:defRPr sz="1400" b="0">
+                <a:solidFill>
+                  <a:srgbClr val="FFFFFF"/>
+                </a:solidFill>
+                <a:latin typeface="DejaVu Sans Mono"/>
+              </a:defRPr>
+            </a:pPr>
             <a:r>
               <a:t>        &lt;xyz&gt;0 1 0&lt;/xyz&gt;</a:t>
             </a:r>
@@ -29669,7 +32071,7 @@
           </a:fontRef>
         </p:style>
         <p:txBody>
-          <a:bodyPr rtlCol="0" anchor="ctr" wrap="square" lIns="164592" rIns="164592" tIns="109728" bIns="36576"/>
+          <a:bodyPr rtlCol="0" anchor="ctr" wrap="square" lIns="164592" rIns="164592" tIns="109728" bIns="73152"/>
           <a:lstStyle/>
           <a:p>
             <a:pPr algn="l">
@@ -29686,47 +32088,179 @@
             <a:r>
               <a:t>        &lt;limit&gt;</a:t>
             </a:r>
-            <a:br/>
+          </a:p>
+          <a:p>
+            <a:pPr algn="l">
+              <a:spcAft>
+                <a:spcPts val="0"/>
+              </a:spcAft>
+              <a:defRPr sz="1400" b="0">
+                <a:solidFill>
+                  <a:srgbClr val="FFFFFF"/>
+                </a:solidFill>
+                <a:latin typeface="DejaVu Sans Mono"/>
+              </a:defRPr>
+            </a:pPr>
             <a:r>
               <a:t>          &lt;lower&gt;-1e16&lt;/lower&gt;</a:t>
             </a:r>
-            <a:br/>
+          </a:p>
+          <a:p>
+            <a:pPr algn="l">
+              <a:spcAft>
+                <a:spcPts val="0"/>
+              </a:spcAft>
+              <a:defRPr sz="1400" b="0">
+                <a:solidFill>
+                  <a:srgbClr val="FFFFFF"/>
+                </a:solidFill>
+                <a:latin typeface="DejaVu Sans Mono"/>
+              </a:defRPr>
+            </a:pPr>
             <a:r>
               <a:t>          &lt;upper&gt;1e16&lt;/upper&gt;</a:t>
             </a:r>
-            <a:br/>
+          </a:p>
+          <a:p>
+            <a:pPr algn="l">
+              <a:spcAft>
+                <a:spcPts val="0"/>
+              </a:spcAft>
+              <a:defRPr sz="1400" b="0">
+                <a:solidFill>
+                  <a:srgbClr val="FFFFFF"/>
+                </a:solidFill>
+                <a:latin typeface="DejaVu Sans Mono"/>
+              </a:defRPr>
+            </a:pPr>
             <a:r>
               <a:t>        &lt;/limit&gt;</a:t>
             </a:r>
-            <a:br/>
+          </a:p>
+          <a:p>
+            <a:pPr algn="l">
+              <a:spcAft>
+                <a:spcPts val="0"/>
+              </a:spcAft>
+              <a:defRPr sz="1400" b="0">
+                <a:solidFill>
+                  <a:srgbClr val="FFFFFF"/>
+                </a:solidFill>
+                <a:latin typeface="DejaVu Sans Mono"/>
+              </a:defRPr>
+            </a:pPr>
             <a:r>
               <a:t>      &lt;/axis&gt;</a:t>
             </a:r>
-            <a:br/>
+          </a:p>
+          <a:p>
+            <a:pPr algn="l">
+              <a:spcAft>
+                <a:spcPts val="0"/>
+              </a:spcAft>
+              <a:defRPr sz="1400" b="0">
+                <a:solidFill>
+                  <a:srgbClr val="FFFFFF"/>
+                </a:solidFill>
+                <a:latin typeface="DejaVu Sans Mono"/>
+              </a:defRPr>
+            </a:pPr>
             <a:r>
               <a:t>    &lt;/joint&gt;</a:t>
             </a:r>
-            <a:br/>
+          </a:p>
+          <a:p>
+            <a:pPr algn="l">
+              <a:spcAft>
+                <a:spcPts val="0"/>
+              </a:spcAft>
+              <a:defRPr sz="1400" b="0">
+                <a:solidFill>
+                  <a:srgbClr val="FFFFFF"/>
+                </a:solidFill>
+                <a:latin typeface="DejaVu Sans Mono"/>
+              </a:defRPr>
+            </a:pPr>
             <a:r>
               <a:t>    </a:t>
             </a:r>
-            <a:br/>
+          </a:p>
+          <a:p>
+            <a:pPr algn="l">
+              <a:spcAft>
+                <a:spcPts val="0"/>
+              </a:spcAft>
+              <a:defRPr sz="1400" b="0">
+                <a:solidFill>
+                  <a:srgbClr val="FFFFFF"/>
+                </a:solidFill>
+                <a:latin typeface="DejaVu Sans Mono"/>
+              </a:defRPr>
+            </a:pPr>
             <a:r>
               <a:t>    </a:t>
             </a:r>
-            <a:br/>
+          </a:p>
+          <a:p>
+            <a:pPr algn="l">
+              <a:spcAft>
+                <a:spcPts val="0"/>
+              </a:spcAft>
+              <a:defRPr sz="1400" b="0">
+                <a:solidFill>
+                  <a:srgbClr val="FFFFFF"/>
+                </a:solidFill>
+                <a:latin typeface="DejaVu Sans Mono"/>
+              </a:defRPr>
+            </a:pPr>
             <a:r>
               <a:t>    &lt;link name="caster_link"&gt;</a:t>
             </a:r>
-            <a:br/>
+          </a:p>
+          <a:p>
+            <a:pPr algn="l">
+              <a:spcAft>
+                <a:spcPts val="0"/>
+              </a:spcAft>
+              <a:defRPr sz="1400" b="0">
+                <a:solidFill>
+                  <a:srgbClr val="FFFFFF"/>
+                </a:solidFill>
+                <a:latin typeface="DejaVu Sans Mono"/>
+              </a:defRPr>
+            </a:pPr>
             <a:r>
               <a:t>      &lt;pose relative_to="base_link"&gt;-0.24 0 -0.12 0 0 0&lt;/pose&gt;</a:t>
             </a:r>
-            <a:br/>
+          </a:p>
+          <a:p>
+            <a:pPr algn="l">
+              <a:spcAft>
+                <a:spcPts val="0"/>
+              </a:spcAft>
+              <a:defRPr sz="1400" b="0">
+                <a:solidFill>
+                  <a:srgbClr val="FFFFFF"/>
+                </a:solidFill>
+                <a:latin typeface="DejaVu Sans Mono"/>
+              </a:defRPr>
+            </a:pPr>
             <a:r>
               <a:t>      &lt;inertial&gt;</a:t>
             </a:r>
-            <a:br/>
+          </a:p>
+          <a:p>
+            <a:pPr algn="l">
+              <a:spcAft>
+                <a:spcPts val="0"/>
+              </a:spcAft>
+              <a:defRPr sz="1400" b="0">
+                <a:solidFill>
+                  <a:srgbClr val="FFFFFF"/>
+                </a:solidFill>
+                <a:latin typeface="DejaVu Sans Mono"/>
+              </a:defRPr>
+            </a:pPr>
             <a:r>
               <a:t>        &lt;mass&gt;0.15&lt;/mass&gt;</a:t>
             </a:r>
@@ -30143,7 +32677,7 @@
           </a:fontRef>
         </p:style>
         <p:txBody>
-          <a:bodyPr rtlCol="0" anchor="ctr" wrap="square" lIns="164592" rIns="164592" tIns="109728" bIns="36576"/>
+          <a:bodyPr rtlCol="0" anchor="ctr" wrap="square" lIns="164592" rIns="164592" tIns="109728" bIns="73152"/>
           <a:lstStyle/>
           <a:p>
             <a:pPr algn="l">
@@ -30160,47 +32694,179 @@
             <a:r>
               <a:t>        &lt;inertia&gt;</a:t>
             </a:r>
-            <a:br/>
+          </a:p>
+          <a:p>
+            <a:pPr algn="l">
+              <a:spcAft>
+                <a:spcPts val="0"/>
+              </a:spcAft>
+              <a:defRPr sz="1400" b="0">
+                <a:solidFill>
+                  <a:srgbClr val="FFFFFF"/>
+                </a:solidFill>
+                <a:latin typeface="DejaVu Sans Mono"/>
+              </a:defRPr>
+            </a:pPr>
             <a:r>
               <a:t>          &lt;ixx&gt;0.0001&lt;/ixx&gt;</a:t>
             </a:r>
-            <a:br/>
+          </a:p>
+          <a:p>
+            <a:pPr algn="l">
+              <a:spcAft>
+                <a:spcPts val="0"/>
+              </a:spcAft>
+              <a:defRPr sz="1400" b="0">
+                <a:solidFill>
+                  <a:srgbClr val="FFFFFF"/>
+                </a:solidFill>
+                <a:latin typeface="DejaVu Sans Mono"/>
+              </a:defRPr>
+            </a:pPr>
             <a:r>
               <a:t>          &lt;iyy&gt;0.0001&lt;/iyy&gt;</a:t>
             </a:r>
-            <a:br/>
+          </a:p>
+          <a:p>
+            <a:pPr algn="l">
+              <a:spcAft>
+                <a:spcPts val="0"/>
+              </a:spcAft>
+              <a:defRPr sz="1400" b="0">
+                <a:solidFill>
+                  <a:srgbClr val="FFFFFF"/>
+                </a:solidFill>
+                <a:latin typeface="DejaVu Sans Mono"/>
+              </a:defRPr>
+            </a:pPr>
             <a:r>
               <a:t>          &lt;izz&gt;0.0001&lt;/izz&gt;</a:t>
             </a:r>
-            <a:br/>
+          </a:p>
+          <a:p>
+            <a:pPr algn="l">
+              <a:spcAft>
+                <a:spcPts val="0"/>
+              </a:spcAft>
+              <a:defRPr sz="1400" b="0">
+                <a:solidFill>
+                  <a:srgbClr val="FFFFFF"/>
+                </a:solidFill>
+                <a:latin typeface="DejaVu Sans Mono"/>
+              </a:defRPr>
+            </a:pPr>
             <a:r>
               <a:t>        &lt;/inertia&gt;</a:t>
             </a:r>
-            <a:br/>
+          </a:p>
+          <a:p>
+            <a:pPr algn="l">
+              <a:spcAft>
+                <a:spcPts val="0"/>
+              </a:spcAft>
+              <a:defRPr sz="1400" b="0">
+                <a:solidFill>
+                  <a:srgbClr val="FFFFFF"/>
+                </a:solidFill>
+                <a:latin typeface="DejaVu Sans Mono"/>
+              </a:defRPr>
+            </a:pPr>
             <a:r>
               <a:t>      &lt;/inertial&gt;</a:t>
             </a:r>
-            <a:br/>
+          </a:p>
+          <a:p>
+            <a:pPr algn="l">
+              <a:spcAft>
+                <a:spcPts val="0"/>
+              </a:spcAft>
+              <a:defRPr sz="1400" b="0">
+                <a:solidFill>
+                  <a:srgbClr val="FFFFFF"/>
+                </a:solidFill>
+                <a:latin typeface="DejaVu Sans Mono"/>
+              </a:defRPr>
+            </a:pPr>
             <a:r>
               <a:t>      &lt;visual name="caster"&gt;</a:t>
             </a:r>
-            <a:br/>
+          </a:p>
+          <a:p>
+            <a:pPr algn="l">
+              <a:spcAft>
+                <a:spcPts val="0"/>
+              </a:spcAft>
+              <a:defRPr sz="1400" b="0">
+                <a:solidFill>
+                  <a:srgbClr val="FFFFFF"/>
+                </a:solidFill>
+                <a:latin typeface="DejaVu Sans Mono"/>
+              </a:defRPr>
+            </a:pPr>
             <a:r>
               <a:t>        &lt;geometry&gt;</a:t>
             </a:r>
-            <a:br/>
+          </a:p>
+          <a:p>
+            <a:pPr algn="l">
+              <a:spcAft>
+                <a:spcPts val="0"/>
+              </a:spcAft>
+              <a:defRPr sz="1400" b="0">
+                <a:solidFill>
+                  <a:srgbClr val="FFFFFF"/>
+                </a:solidFill>
+                <a:latin typeface="DejaVu Sans Mono"/>
+              </a:defRPr>
+            </a:pPr>
             <a:r>
               <a:t>          &lt;sphere&gt;</a:t>
             </a:r>
-            <a:br/>
+          </a:p>
+          <a:p>
+            <a:pPr algn="l">
+              <a:spcAft>
+                <a:spcPts val="0"/>
+              </a:spcAft>
+              <a:defRPr sz="1400" b="0">
+                <a:solidFill>
+                  <a:srgbClr val="FFFFFF"/>
+                </a:solidFill>
+                <a:latin typeface="DejaVu Sans Mono"/>
+              </a:defRPr>
+            </a:pPr>
             <a:r>
               <a:t>            &lt;radius&gt;0.04&lt;/radius&gt;</a:t>
             </a:r>
-            <a:br/>
+          </a:p>
+          <a:p>
+            <a:pPr algn="l">
+              <a:spcAft>
+                <a:spcPts val="0"/>
+              </a:spcAft>
+              <a:defRPr sz="1400" b="0">
+                <a:solidFill>
+                  <a:srgbClr val="FFFFFF"/>
+                </a:solidFill>
+                <a:latin typeface="DejaVu Sans Mono"/>
+              </a:defRPr>
+            </a:pPr>
             <a:r>
               <a:t>          &lt;/sphere&gt;</a:t>
             </a:r>
-            <a:br/>
+          </a:p>
+          <a:p>
+            <a:pPr algn="l">
+              <a:spcAft>
+                <a:spcPts val="0"/>
+              </a:spcAft>
+              <a:defRPr sz="1400" b="0">
+                <a:solidFill>
+                  <a:srgbClr val="FFFFFF"/>
+                </a:solidFill>
+                <a:latin typeface="DejaVu Sans Mono"/>
+              </a:defRPr>
+            </a:pPr>
             <a:r>
               <a:t>        &lt;/geometry&gt;</a:t>
             </a:r>
@@ -30617,7 +33283,7 @@
           </a:fontRef>
         </p:style>
         <p:txBody>
-          <a:bodyPr rtlCol="0" anchor="ctr" wrap="square" lIns="164592" rIns="164592" tIns="109728" bIns="36576"/>
+          <a:bodyPr rtlCol="0" anchor="ctr" wrap="square" lIns="164592" rIns="164592" tIns="109728" bIns="73152"/>
           <a:lstStyle/>
           <a:p>
             <a:pPr algn="l">
@@ -30634,47 +33300,179 @@
             <a:r>
               <a:t>      &lt;/visual&gt;</a:t>
             </a:r>
-            <a:br/>
+          </a:p>
+          <a:p>
+            <a:pPr algn="l">
+              <a:spcAft>
+                <a:spcPts val="0"/>
+              </a:spcAft>
+              <a:defRPr sz="1400" b="0">
+                <a:solidFill>
+                  <a:srgbClr val="FFFFFF"/>
+                </a:solidFill>
+                <a:latin typeface="DejaVu Sans Mono"/>
+              </a:defRPr>
+            </a:pPr>
             <a:r>
               <a:t>      &lt;collision name="caster_collision"&gt;</a:t>
             </a:r>
-            <a:br/>
+          </a:p>
+          <a:p>
+            <a:pPr algn="l">
+              <a:spcAft>
+                <a:spcPts val="0"/>
+              </a:spcAft>
+              <a:defRPr sz="1400" b="0">
+                <a:solidFill>
+                  <a:srgbClr val="FFFFFF"/>
+                </a:solidFill>
+                <a:latin typeface="DejaVu Sans Mono"/>
+              </a:defRPr>
+            </a:pPr>
             <a:r>
               <a:t>        &lt;geometry&gt;</a:t>
             </a:r>
-            <a:br/>
+          </a:p>
+          <a:p>
+            <a:pPr algn="l">
+              <a:spcAft>
+                <a:spcPts val="0"/>
+              </a:spcAft>
+              <a:defRPr sz="1400" b="0">
+                <a:solidFill>
+                  <a:srgbClr val="FFFFFF"/>
+                </a:solidFill>
+                <a:latin typeface="DejaVu Sans Mono"/>
+              </a:defRPr>
+            </a:pPr>
             <a:r>
               <a:t>          &lt;sphere&gt;</a:t>
             </a:r>
-            <a:br/>
+          </a:p>
+          <a:p>
+            <a:pPr algn="l">
+              <a:spcAft>
+                <a:spcPts val="0"/>
+              </a:spcAft>
+              <a:defRPr sz="1400" b="0">
+                <a:solidFill>
+                  <a:srgbClr val="FFFFFF"/>
+                </a:solidFill>
+                <a:latin typeface="DejaVu Sans Mono"/>
+              </a:defRPr>
+            </a:pPr>
             <a:r>
               <a:t>            &lt;radius&gt;0.04&lt;/radius&gt;</a:t>
             </a:r>
-            <a:br/>
+          </a:p>
+          <a:p>
+            <a:pPr algn="l">
+              <a:spcAft>
+                <a:spcPts val="0"/>
+              </a:spcAft>
+              <a:defRPr sz="1400" b="0">
+                <a:solidFill>
+                  <a:srgbClr val="FFFFFF"/>
+                </a:solidFill>
+                <a:latin typeface="DejaVu Sans Mono"/>
+              </a:defRPr>
+            </a:pPr>
             <a:r>
               <a:t>          &lt;/sphere&gt;</a:t>
             </a:r>
-            <a:br/>
+          </a:p>
+          <a:p>
+            <a:pPr algn="l">
+              <a:spcAft>
+                <a:spcPts val="0"/>
+              </a:spcAft>
+              <a:defRPr sz="1400" b="0">
+                <a:solidFill>
+                  <a:srgbClr val="FFFFFF"/>
+                </a:solidFill>
+                <a:latin typeface="DejaVu Sans Mono"/>
+              </a:defRPr>
+            </a:pPr>
             <a:r>
               <a:t>        &lt;/geometry&gt;</a:t>
             </a:r>
-            <a:br/>
+          </a:p>
+          <a:p>
+            <a:pPr algn="l">
+              <a:spcAft>
+                <a:spcPts val="0"/>
+              </a:spcAft>
+              <a:defRPr sz="1400" b="0">
+                <a:solidFill>
+                  <a:srgbClr val="FFFFFF"/>
+                </a:solidFill>
+                <a:latin typeface="DejaVu Sans Mono"/>
+              </a:defRPr>
+            </a:pPr>
             <a:r>
               <a:t>      &lt;/collision&gt;</a:t>
             </a:r>
-            <a:br/>
+          </a:p>
+          <a:p>
+            <a:pPr algn="l">
+              <a:spcAft>
+                <a:spcPts val="0"/>
+              </a:spcAft>
+              <a:defRPr sz="1400" b="0">
+                <a:solidFill>
+                  <a:srgbClr val="FFFFFF"/>
+                </a:solidFill>
+                <a:latin typeface="DejaVu Sans Mono"/>
+              </a:defRPr>
+            </a:pPr>
             <a:r>
               <a:t>    &lt;/link&gt;</a:t>
             </a:r>
-            <a:br/>
+          </a:p>
+          <a:p>
+            <a:pPr algn="l">
+              <a:spcAft>
+                <a:spcPts val="0"/>
+              </a:spcAft>
+              <a:defRPr sz="1400" b="0">
+                <a:solidFill>
+                  <a:srgbClr val="FFFFFF"/>
+                </a:solidFill>
+                <a:latin typeface="DejaVu Sans Mono"/>
+              </a:defRPr>
+            </a:pPr>
             <a:r>
               <a:t>    </a:t>
             </a:r>
-            <a:br/>
+          </a:p>
+          <a:p>
+            <a:pPr algn="l">
+              <a:spcAft>
+                <a:spcPts val="0"/>
+              </a:spcAft>
+              <a:defRPr sz="1400" b="0">
+                <a:solidFill>
+                  <a:srgbClr val="FFFFFF"/>
+                </a:solidFill>
+                <a:latin typeface="DejaVu Sans Mono"/>
+              </a:defRPr>
+            </a:pPr>
             <a:r>
               <a:t>    </a:t>
             </a:r>
-            <a:br/>
+          </a:p>
+          <a:p>
+            <a:pPr algn="l">
+              <a:spcAft>
+                <a:spcPts val="0"/>
+              </a:spcAft>
+              <a:defRPr sz="1400" b="0">
+                <a:solidFill>
+                  <a:srgbClr val="FFFFFF"/>
+                </a:solidFill>
+                <a:latin typeface="DejaVu Sans Mono"/>
+              </a:defRPr>
+            </a:pPr>
             <a:r>
               <a:t>    &lt;joint name="caster_joint" type="fixed"&gt;</a:t>
             </a:r>
@@ -31091,7 +33889,7 @@
           </a:fontRef>
         </p:style>
         <p:txBody>
-          <a:bodyPr rtlCol="0" anchor="ctr" wrap="square" lIns="164592" rIns="164592" tIns="109728" bIns="36576"/>
+          <a:bodyPr rtlCol="0" anchor="ctr" wrap="square" lIns="164592" rIns="164592" tIns="109728" bIns="73152"/>
           <a:lstStyle/>
           <a:p>
             <a:pPr algn="l">
@@ -31108,47 +33906,179 @@
             <a:r>
               <a:t>      &lt;parent&gt;base_link&lt;/parent&gt;</a:t>
             </a:r>
-            <a:br/>
+          </a:p>
+          <a:p>
+            <a:pPr algn="l">
+              <a:spcAft>
+                <a:spcPts val="0"/>
+              </a:spcAft>
+              <a:defRPr sz="1400" b="0">
+                <a:solidFill>
+                  <a:srgbClr val="FFFFFF"/>
+                </a:solidFill>
+                <a:latin typeface="DejaVu Sans Mono"/>
+              </a:defRPr>
+            </a:pPr>
             <a:r>
               <a:t>      &lt;child&gt;caster_link&lt;/child&gt;</a:t>
             </a:r>
-            <a:br/>
+          </a:p>
+          <a:p>
+            <a:pPr algn="l">
+              <a:spcAft>
+                <a:spcPts val="0"/>
+              </a:spcAft>
+              <a:defRPr sz="1400" b="0">
+                <a:solidFill>
+                  <a:srgbClr val="FFFFFF"/>
+                </a:solidFill>
+                <a:latin typeface="DejaVu Sans Mono"/>
+              </a:defRPr>
+            </a:pPr>
             <a:r>
               <a:t>    &lt;/joint&gt;</a:t>
             </a:r>
-            <a:br/>
+          </a:p>
+          <a:p>
+            <a:pPr algn="l">
+              <a:spcAft>
+                <a:spcPts val="0"/>
+              </a:spcAft>
+              <a:defRPr sz="1400" b="0">
+                <a:solidFill>
+                  <a:srgbClr val="FFFFFF"/>
+                </a:solidFill>
+                <a:latin typeface="DejaVu Sans Mono"/>
+              </a:defRPr>
+            </a:pPr>
             <a:r>
               <a:t>    </a:t>
             </a:r>
-            <a:br/>
+          </a:p>
+          <a:p>
+            <a:pPr algn="l">
+              <a:spcAft>
+                <a:spcPts val="0"/>
+              </a:spcAft>
+              <a:defRPr sz="1400" b="0">
+                <a:solidFill>
+                  <a:srgbClr val="FFFFFF"/>
+                </a:solidFill>
+                <a:latin typeface="DejaVu Sans Mono"/>
+              </a:defRPr>
+            </a:pPr>
             <a:r>
               <a:t>    </a:t>
             </a:r>
-            <a:br/>
+          </a:p>
+          <a:p>
+            <a:pPr algn="l">
+              <a:spcAft>
+                <a:spcPts val="0"/>
+              </a:spcAft>
+              <a:defRPr sz="1400" b="0">
+                <a:solidFill>
+                  <a:srgbClr val="FFFFFF"/>
+                </a:solidFill>
+                <a:latin typeface="DejaVu Sans Mono"/>
+              </a:defRPr>
+            </a:pPr>
             <a:r>
               <a:t>    &lt;link name="lidar_link"&gt;</a:t>
             </a:r>
-            <a:br/>
+          </a:p>
+          <a:p>
+            <a:pPr algn="l">
+              <a:spcAft>
+                <a:spcPts val="0"/>
+              </a:spcAft>
+              <a:defRPr sz="1400" b="0">
+                <a:solidFill>
+                  <a:srgbClr val="FFFFFF"/>
+                </a:solidFill>
+                <a:latin typeface="DejaVu Sans Mono"/>
+              </a:defRPr>
+            </a:pPr>
             <a:r>
               <a:t>      &lt;pose relative_to="base_link"&gt;0.12 0 0.13 0 0 0&lt;/pose&gt;</a:t>
             </a:r>
-            <a:br/>
+          </a:p>
+          <a:p>
+            <a:pPr algn="l">
+              <a:spcAft>
+                <a:spcPts val="0"/>
+              </a:spcAft>
+              <a:defRPr sz="1400" b="0">
+                <a:solidFill>
+                  <a:srgbClr val="FFFFFF"/>
+                </a:solidFill>
+                <a:latin typeface="DejaVu Sans Mono"/>
+              </a:defRPr>
+            </a:pPr>
             <a:r>
               <a:t>      &lt;visual name="housing"&gt;</a:t>
             </a:r>
-            <a:br/>
+          </a:p>
+          <a:p>
+            <a:pPr algn="l">
+              <a:spcAft>
+                <a:spcPts val="0"/>
+              </a:spcAft>
+              <a:defRPr sz="1400" b="0">
+                <a:solidFill>
+                  <a:srgbClr val="FFFFFF"/>
+                </a:solidFill>
+                <a:latin typeface="DejaVu Sans Mono"/>
+              </a:defRPr>
+            </a:pPr>
             <a:r>
               <a:t>        &lt;geometry&gt;</a:t>
             </a:r>
-            <a:br/>
+          </a:p>
+          <a:p>
+            <a:pPr algn="l">
+              <a:spcAft>
+                <a:spcPts val="0"/>
+              </a:spcAft>
+              <a:defRPr sz="1400" b="0">
+                <a:solidFill>
+                  <a:srgbClr val="FFFFFF"/>
+                </a:solidFill>
+                <a:latin typeface="DejaVu Sans Mono"/>
+              </a:defRPr>
+            </a:pPr>
             <a:r>
               <a:t>          &lt;cylinder&gt;</a:t>
             </a:r>
-            <a:br/>
+          </a:p>
+          <a:p>
+            <a:pPr algn="l">
+              <a:spcAft>
+                <a:spcPts val="0"/>
+              </a:spcAft>
+              <a:defRPr sz="1400" b="0">
+                <a:solidFill>
+                  <a:srgbClr val="FFFFFF"/>
+                </a:solidFill>
+                <a:latin typeface="DejaVu Sans Mono"/>
+              </a:defRPr>
+            </a:pPr>
             <a:r>
               <a:t>            &lt;radius&gt;0.045&lt;/radius&gt;</a:t>
             </a:r>
-            <a:br/>
+          </a:p>
+          <a:p>
+            <a:pPr algn="l">
+              <a:spcAft>
+                <a:spcPts val="0"/>
+              </a:spcAft>
+              <a:defRPr sz="1400" b="0">
+                <a:solidFill>
+                  <a:srgbClr val="FFFFFF"/>
+                </a:solidFill>
+                <a:latin typeface="DejaVu Sans Mono"/>
+              </a:defRPr>
+            </a:pPr>
             <a:r>
               <a:t>            &lt;length&gt;0.05&lt;/length&gt;</a:t>
             </a:r>
@@ -31565,7 +34495,7 @@
           </a:fontRef>
         </p:style>
         <p:txBody>
-          <a:bodyPr rtlCol="0" anchor="ctr" wrap="square" lIns="164592" rIns="164592" tIns="109728" bIns="36576"/>
+          <a:bodyPr rtlCol="0" anchor="ctr" wrap="square" lIns="164592" rIns="164592" tIns="109728" bIns="73152"/>
           <a:lstStyle/>
           <a:p>
             <a:pPr algn="l">
@@ -31582,47 +34512,179 @@
             <a:r>
               <a:t>          &lt;/cylinder&gt;</a:t>
             </a:r>
-            <a:br/>
+          </a:p>
+          <a:p>
+            <a:pPr algn="l">
+              <a:spcAft>
+                <a:spcPts val="0"/>
+              </a:spcAft>
+              <a:defRPr sz="1400" b="0">
+                <a:solidFill>
+                  <a:srgbClr val="FFFFFF"/>
+                </a:solidFill>
+                <a:latin typeface="DejaVu Sans Mono"/>
+              </a:defRPr>
+            </a:pPr>
             <a:r>
               <a:t>        &lt;/geometry&gt;</a:t>
             </a:r>
-            <a:br/>
+          </a:p>
+          <a:p>
+            <a:pPr algn="l">
+              <a:spcAft>
+                <a:spcPts val="0"/>
+              </a:spcAft>
+              <a:defRPr sz="1400" b="0">
+                <a:solidFill>
+                  <a:srgbClr val="FFFFFF"/>
+                </a:solidFill>
+                <a:latin typeface="DejaVu Sans Mono"/>
+              </a:defRPr>
+            </a:pPr>
             <a:r>
               <a:t>      &lt;/visual&gt;</a:t>
             </a:r>
-            <a:br/>
+          </a:p>
+          <a:p>
+            <a:pPr algn="l">
+              <a:spcAft>
+                <a:spcPts val="0"/>
+              </a:spcAft>
+              <a:defRPr sz="1400" b="0">
+                <a:solidFill>
+                  <a:srgbClr val="FFFFFF"/>
+                </a:solidFill>
+                <a:latin typeface="DejaVu Sans Mono"/>
+              </a:defRPr>
+            </a:pPr>
             <a:r>
               <a:t>      &lt;sensor name="lidar" type="gpu_lidar"&gt;</a:t>
             </a:r>
-            <a:br/>
+          </a:p>
+          <a:p>
+            <a:pPr algn="l">
+              <a:spcAft>
+                <a:spcPts val="0"/>
+              </a:spcAft>
+              <a:defRPr sz="1400" b="0">
+                <a:solidFill>
+                  <a:srgbClr val="FFFFFF"/>
+                </a:solidFill>
+                <a:latin typeface="DejaVu Sans Mono"/>
+              </a:defRPr>
+            </a:pPr>
             <a:r>
               <a:t>        &lt;topic&gt;/scan&lt;/topic&gt;</a:t>
             </a:r>
-            <a:br/>
+          </a:p>
+          <a:p>
+            <a:pPr algn="l">
+              <a:spcAft>
+                <a:spcPts val="0"/>
+              </a:spcAft>
+              <a:defRPr sz="1400" b="0">
+                <a:solidFill>
+                  <a:srgbClr val="FFFFFF"/>
+                </a:solidFill>
+                <a:latin typeface="DejaVu Sans Mono"/>
+              </a:defRPr>
+            </a:pPr>
             <a:r>
               <a:t>        &lt;always_on&gt;true&lt;/always_on&gt;</a:t>
             </a:r>
-            <a:br/>
+          </a:p>
+          <a:p>
+            <a:pPr algn="l">
+              <a:spcAft>
+                <a:spcPts val="0"/>
+              </a:spcAft>
+              <a:defRPr sz="1400" b="0">
+                <a:solidFill>
+                  <a:srgbClr val="FFFFFF"/>
+                </a:solidFill>
+                <a:latin typeface="DejaVu Sans Mono"/>
+              </a:defRPr>
+            </a:pPr>
             <a:r>
               <a:t>        &lt;update_rate&gt;10&lt;/update_rate&gt;</a:t>
             </a:r>
-            <a:br/>
+          </a:p>
+          <a:p>
+            <a:pPr algn="l">
+              <a:spcAft>
+                <a:spcPts val="0"/>
+              </a:spcAft>
+              <a:defRPr sz="1400" b="0">
+                <a:solidFill>
+                  <a:srgbClr val="FFFFFF"/>
+                </a:solidFill>
+                <a:latin typeface="DejaVu Sans Mono"/>
+              </a:defRPr>
+            </a:pPr>
             <a:r>
               <a:t>        &lt;visualize&gt;false&lt;/visualize&gt;</a:t>
             </a:r>
-            <a:br/>
+          </a:p>
+          <a:p>
+            <a:pPr algn="l">
+              <a:spcAft>
+                <a:spcPts val="0"/>
+              </a:spcAft>
+              <a:defRPr sz="1400" b="0">
+                <a:solidFill>
+                  <a:srgbClr val="FFFFFF"/>
+                </a:solidFill>
+                <a:latin typeface="DejaVu Sans Mono"/>
+              </a:defRPr>
+            </a:pPr>
             <a:r>
               <a:t>        &lt;lidar&gt;</a:t>
             </a:r>
-            <a:br/>
+          </a:p>
+          <a:p>
+            <a:pPr algn="l">
+              <a:spcAft>
+                <a:spcPts val="0"/>
+              </a:spcAft>
+              <a:defRPr sz="1400" b="0">
+                <a:solidFill>
+                  <a:srgbClr val="FFFFFF"/>
+                </a:solidFill>
+                <a:latin typeface="DejaVu Sans Mono"/>
+              </a:defRPr>
+            </a:pPr>
             <a:r>
               <a:t>          &lt;scan&gt;</a:t>
             </a:r>
-            <a:br/>
+          </a:p>
+          <a:p>
+            <a:pPr algn="l">
+              <a:spcAft>
+                <a:spcPts val="0"/>
+              </a:spcAft>
+              <a:defRPr sz="1400" b="0">
+                <a:solidFill>
+                  <a:srgbClr val="FFFFFF"/>
+                </a:solidFill>
+                <a:latin typeface="DejaVu Sans Mono"/>
+              </a:defRPr>
+            </a:pPr>
             <a:r>
               <a:t>            &lt;horizontal&gt;</a:t>
             </a:r>
-            <a:br/>
+          </a:p>
+          <a:p>
+            <a:pPr algn="l">
+              <a:spcAft>
+                <a:spcPts val="0"/>
+              </a:spcAft>
+              <a:defRPr sz="1400" b="0">
+                <a:solidFill>
+                  <a:srgbClr val="FFFFFF"/>
+                </a:solidFill>
+                <a:latin typeface="DejaVu Sans Mono"/>
+              </a:defRPr>
+            </a:pPr>
             <a:r>
               <a:t>              &lt;samples&gt;720&lt;/samples&gt;</a:t>
             </a:r>
@@ -32039,7 +35101,7 @@
           </a:fontRef>
         </p:style>
         <p:txBody>
-          <a:bodyPr rtlCol="0" anchor="ctr" wrap="square" lIns="164592" rIns="164592" tIns="109728" bIns="36576"/>
+          <a:bodyPr rtlCol="0" anchor="ctr" wrap="square" lIns="164592" rIns="164592" tIns="109728" bIns="73152"/>
           <a:lstStyle/>
           <a:p>
             <a:pPr algn="l">
@@ -32056,47 +35118,179 @@
             <a:r>
               <a:t>              &lt;resolution&gt;1&lt;/resolution&gt;</a:t>
             </a:r>
-            <a:br/>
+          </a:p>
+          <a:p>
+            <a:pPr algn="l">
+              <a:spcAft>
+                <a:spcPts val="0"/>
+              </a:spcAft>
+              <a:defRPr sz="1400" b="0">
+                <a:solidFill>
+                  <a:srgbClr val="FFFFFF"/>
+                </a:solidFill>
+                <a:latin typeface="DejaVu Sans Mono"/>
+              </a:defRPr>
+            </a:pPr>
             <a:r>
               <a:t>              &lt;min_angle&gt;-3.14159&lt;/min_angle&gt;</a:t>
             </a:r>
-            <a:br/>
+          </a:p>
+          <a:p>
+            <a:pPr algn="l">
+              <a:spcAft>
+                <a:spcPts val="0"/>
+              </a:spcAft>
+              <a:defRPr sz="1400" b="0">
+                <a:solidFill>
+                  <a:srgbClr val="FFFFFF"/>
+                </a:solidFill>
+                <a:latin typeface="DejaVu Sans Mono"/>
+              </a:defRPr>
+            </a:pPr>
             <a:r>
               <a:t>              &lt;max_angle&gt;3.14159&lt;/max_angle&gt;</a:t>
             </a:r>
-            <a:br/>
+          </a:p>
+          <a:p>
+            <a:pPr algn="l">
+              <a:spcAft>
+                <a:spcPts val="0"/>
+              </a:spcAft>
+              <a:defRPr sz="1400" b="0">
+                <a:solidFill>
+                  <a:srgbClr val="FFFFFF"/>
+                </a:solidFill>
+                <a:latin typeface="DejaVu Sans Mono"/>
+              </a:defRPr>
+            </a:pPr>
             <a:r>
               <a:t>            &lt;/horizontal&gt;</a:t>
             </a:r>
-            <a:br/>
+          </a:p>
+          <a:p>
+            <a:pPr algn="l">
+              <a:spcAft>
+                <a:spcPts val="0"/>
+              </a:spcAft>
+              <a:defRPr sz="1400" b="0">
+                <a:solidFill>
+                  <a:srgbClr val="FFFFFF"/>
+                </a:solidFill>
+                <a:latin typeface="DejaVu Sans Mono"/>
+              </a:defRPr>
+            </a:pPr>
             <a:r>
               <a:t>          &lt;/scan&gt;</a:t>
             </a:r>
-            <a:br/>
+          </a:p>
+          <a:p>
+            <a:pPr algn="l">
+              <a:spcAft>
+                <a:spcPts val="0"/>
+              </a:spcAft>
+              <a:defRPr sz="1400" b="0">
+                <a:solidFill>
+                  <a:srgbClr val="FFFFFF"/>
+                </a:solidFill>
+                <a:latin typeface="DejaVu Sans Mono"/>
+              </a:defRPr>
+            </a:pPr>
             <a:r>
               <a:t>          &lt;range&gt;</a:t>
             </a:r>
-            <a:br/>
+          </a:p>
+          <a:p>
+            <a:pPr algn="l">
+              <a:spcAft>
+                <a:spcPts val="0"/>
+              </a:spcAft>
+              <a:defRPr sz="1400" b="0">
+                <a:solidFill>
+                  <a:srgbClr val="FFFFFF"/>
+                </a:solidFill>
+                <a:latin typeface="DejaVu Sans Mono"/>
+              </a:defRPr>
+            </a:pPr>
             <a:r>
               <a:t>            &lt;min&gt;0.12&lt;/min&gt;</a:t>
             </a:r>
-            <a:br/>
+          </a:p>
+          <a:p>
+            <a:pPr algn="l">
+              <a:spcAft>
+                <a:spcPts val="0"/>
+              </a:spcAft>
+              <a:defRPr sz="1400" b="0">
+                <a:solidFill>
+                  <a:srgbClr val="FFFFFF"/>
+                </a:solidFill>
+                <a:latin typeface="DejaVu Sans Mono"/>
+              </a:defRPr>
+            </a:pPr>
             <a:r>
               <a:t>            &lt;max&gt;12.0&lt;/max&gt;</a:t>
             </a:r>
-            <a:br/>
+          </a:p>
+          <a:p>
+            <a:pPr algn="l">
+              <a:spcAft>
+                <a:spcPts val="0"/>
+              </a:spcAft>
+              <a:defRPr sz="1400" b="0">
+                <a:solidFill>
+                  <a:srgbClr val="FFFFFF"/>
+                </a:solidFill>
+                <a:latin typeface="DejaVu Sans Mono"/>
+              </a:defRPr>
+            </a:pPr>
             <a:r>
               <a:t>            &lt;resolution&gt;0.01&lt;/resolution&gt;</a:t>
             </a:r>
-            <a:br/>
+          </a:p>
+          <a:p>
+            <a:pPr algn="l">
+              <a:spcAft>
+                <a:spcPts val="0"/>
+              </a:spcAft>
+              <a:defRPr sz="1400" b="0">
+                <a:solidFill>
+                  <a:srgbClr val="FFFFFF"/>
+                </a:solidFill>
+                <a:latin typeface="DejaVu Sans Mono"/>
+              </a:defRPr>
+            </a:pPr>
             <a:r>
               <a:t>          &lt;/range&gt;</a:t>
             </a:r>
-            <a:br/>
+          </a:p>
+          <a:p>
+            <a:pPr algn="l">
+              <a:spcAft>
+                <a:spcPts val="0"/>
+              </a:spcAft>
+              <a:defRPr sz="1400" b="0">
+                <a:solidFill>
+                  <a:srgbClr val="FFFFFF"/>
+                </a:solidFill>
+                <a:latin typeface="DejaVu Sans Mono"/>
+              </a:defRPr>
+            </a:pPr>
             <a:r>
               <a:t>        &lt;/lidar&gt;</a:t>
             </a:r>
-            <a:br/>
+          </a:p>
+          <a:p>
+            <a:pPr algn="l">
+              <a:spcAft>
+                <a:spcPts val="0"/>
+              </a:spcAft>
+              <a:defRPr sz="1400" b="0">
+                <a:solidFill>
+                  <a:srgbClr val="FFFFFF"/>
+                </a:solidFill>
+                <a:latin typeface="DejaVu Sans Mono"/>
+              </a:defRPr>
+            </a:pPr>
             <a:r>
               <a:t>      &lt;/sensor&gt;</a:t>
             </a:r>
@@ -32513,7 +35707,7 @@
           </a:fontRef>
         </p:style>
         <p:txBody>
-          <a:bodyPr rtlCol="0" anchor="ctr" wrap="square" lIns="164592" rIns="164592" tIns="109728" bIns="36576"/>
+          <a:bodyPr rtlCol="0" anchor="ctr" wrap="square" lIns="164592" rIns="164592" tIns="109728" bIns="73152"/>
           <a:lstStyle/>
           <a:p>
             <a:pPr algn="l">
@@ -32530,47 +35724,179 @@
             <a:r>
               <a:t>    &lt;/link&gt;</a:t>
             </a:r>
-            <a:br/>
+          </a:p>
+          <a:p>
+            <a:pPr algn="l">
+              <a:spcAft>
+                <a:spcPts val="0"/>
+              </a:spcAft>
+              <a:defRPr sz="1400" b="0">
+                <a:solidFill>
+                  <a:srgbClr val="FFFFFF"/>
+                </a:solidFill>
+                <a:latin typeface="DejaVu Sans Mono"/>
+              </a:defRPr>
+            </a:pPr>
             <a:r>
               <a:t>    </a:t>
             </a:r>
-            <a:br/>
+          </a:p>
+          <a:p>
+            <a:pPr algn="l">
+              <a:spcAft>
+                <a:spcPts val="0"/>
+              </a:spcAft>
+              <a:defRPr sz="1400" b="0">
+                <a:solidFill>
+                  <a:srgbClr val="FFFFFF"/>
+                </a:solidFill>
+                <a:latin typeface="DejaVu Sans Mono"/>
+              </a:defRPr>
+            </a:pPr>
             <a:r>
               <a:t>    </a:t>
             </a:r>
-            <a:br/>
+          </a:p>
+          <a:p>
+            <a:pPr algn="l">
+              <a:spcAft>
+                <a:spcPts val="0"/>
+              </a:spcAft>
+              <a:defRPr sz="1400" b="0">
+                <a:solidFill>
+                  <a:srgbClr val="FFFFFF"/>
+                </a:solidFill>
+                <a:latin typeface="DejaVu Sans Mono"/>
+              </a:defRPr>
+            </a:pPr>
             <a:r>
               <a:t>    &lt;joint name="lidar_joint" type="fixed"&gt;</a:t>
             </a:r>
-            <a:br/>
+          </a:p>
+          <a:p>
+            <a:pPr algn="l">
+              <a:spcAft>
+                <a:spcPts val="0"/>
+              </a:spcAft>
+              <a:defRPr sz="1400" b="0">
+                <a:solidFill>
+                  <a:srgbClr val="FFFFFF"/>
+                </a:solidFill>
+                <a:latin typeface="DejaVu Sans Mono"/>
+              </a:defRPr>
+            </a:pPr>
             <a:r>
               <a:t>      &lt;parent&gt;base_link&lt;/parent&gt;</a:t>
             </a:r>
-            <a:br/>
+          </a:p>
+          <a:p>
+            <a:pPr algn="l">
+              <a:spcAft>
+                <a:spcPts val="0"/>
+              </a:spcAft>
+              <a:defRPr sz="1400" b="0">
+                <a:solidFill>
+                  <a:srgbClr val="FFFFFF"/>
+                </a:solidFill>
+                <a:latin typeface="DejaVu Sans Mono"/>
+              </a:defRPr>
+            </a:pPr>
             <a:r>
               <a:t>      &lt;child&gt;lidar_link&lt;/child&gt;</a:t>
             </a:r>
-            <a:br/>
+          </a:p>
+          <a:p>
+            <a:pPr algn="l">
+              <a:spcAft>
+                <a:spcPts val="0"/>
+              </a:spcAft>
+              <a:defRPr sz="1400" b="0">
+                <a:solidFill>
+                  <a:srgbClr val="FFFFFF"/>
+                </a:solidFill>
+                <a:latin typeface="DejaVu Sans Mono"/>
+              </a:defRPr>
+            </a:pPr>
             <a:r>
               <a:t>    &lt;/joint&gt;</a:t>
             </a:r>
-            <a:br/>
+          </a:p>
+          <a:p>
+            <a:pPr algn="l">
+              <a:spcAft>
+                <a:spcPts val="0"/>
+              </a:spcAft>
+              <a:defRPr sz="1400" b="0">
+                <a:solidFill>
+                  <a:srgbClr val="FFFFFF"/>
+                </a:solidFill>
+                <a:latin typeface="DejaVu Sans Mono"/>
+              </a:defRPr>
+            </a:pPr>
             <a:r>
               <a:t>    </a:t>
             </a:r>
-            <a:br/>
+          </a:p>
+          <a:p>
+            <a:pPr algn="l">
+              <a:spcAft>
+                <a:spcPts val="0"/>
+              </a:spcAft>
+              <a:defRPr sz="1400" b="0">
+                <a:solidFill>
+                  <a:srgbClr val="FFFFFF"/>
+                </a:solidFill>
+                <a:latin typeface="DejaVu Sans Mono"/>
+              </a:defRPr>
+            </a:pPr>
             <a:r>
               <a:t>    </a:t>
             </a:r>
-            <a:br/>
+          </a:p>
+          <a:p>
+            <a:pPr algn="l">
+              <a:spcAft>
+                <a:spcPts val="0"/>
+              </a:spcAft>
+              <a:defRPr sz="1400" b="0">
+                <a:solidFill>
+                  <a:srgbClr val="FFFFFF"/>
+                </a:solidFill>
+                <a:latin typeface="DejaVu Sans Mono"/>
+              </a:defRPr>
+            </a:pPr>
             <a:r>
               <a:t>    &lt;link name="camera_link"&gt;</a:t>
             </a:r>
-            <a:br/>
+          </a:p>
+          <a:p>
+            <a:pPr algn="l">
+              <a:spcAft>
+                <a:spcPts val="0"/>
+              </a:spcAft>
+              <a:defRPr sz="1400" b="0">
+                <a:solidFill>
+                  <a:srgbClr val="FFFFFF"/>
+                </a:solidFill>
+                <a:latin typeface="DejaVu Sans Mono"/>
+              </a:defRPr>
+            </a:pPr>
             <a:r>
               <a:t>      &lt;pose relative_to="base_link"&gt;0.30 0 0.10 0 0 0&lt;/pose&gt;</a:t>
             </a:r>
-            <a:br/>
+          </a:p>
+          <a:p>
+            <a:pPr algn="l">
+              <a:spcAft>
+                <a:spcPts val="0"/>
+              </a:spcAft>
+              <a:defRPr sz="1400" b="0">
+                <a:solidFill>
+                  <a:srgbClr val="FFFFFF"/>
+                </a:solidFill>
+                <a:latin typeface="DejaVu Sans Mono"/>
+              </a:defRPr>
+            </a:pPr>
             <a:r>
               <a:t>      &lt;visual name="housing"&gt;</a:t>
             </a:r>
@@ -32987,7 +36313,7 @@
           </a:fontRef>
         </p:style>
         <p:txBody>
-          <a:bodyPr rtlCol="0" anchor="ctr" wrap="square" lIns="164592" rIns="164592" tIns="109728" bIns="36576"/>
+          <a:bodyPr rtlCol="0" anchor="ctr" wrap="square" lIns="164592" rIns="164592" tIns="109728" bIns="73152"/>
           <a:lstStyle/>
           <a:p>
             <a:pPr algn="l">
@@ -33004,47 +36330,179 @@
             <a:r>
               <a:t>        &lt;geometry&gt;</a:t>
             </a:r>
-            <a:br/>
+          </a:p>
+          <a:p>
+            <a:pPr algn="l">
+              <a:spcAft>
+                <a:spcPts val="0"/>
+              </a:spcAft>
+              <a:defRPr sz="1400" b="0">
+                <a:solidFill>
+                  <a:srgbClr val="FFFFFF"/>
+                </a:solidFill>
+                <a:latin typeface="DejaVu Sans Mono"/>
+              </a:defRPr>
+            </a:pPr>
             <a:r>
               <a:t>          &lt;box&gt;</a:t>
             </a:r>
-            <a:br/>
+          </a:p>
+          <a:p>
+            <a:pPr algn="l">
+              <a:spcAft>
+                <a:spcPts val="0"/>
+              </a:spcAft>
+              <a:defRPr sz="1400" b="0">
+                <a:solidFill>
+                  <a:srgbClr val="FFFFFF"/>
+                </a:solidFill>
+                <a:latin typeface="DejaVu Sans Mono"/>
+              </a:defRPr>
+            </a:pPr>
             <a:r>
               <a:t>            &lt;size&gt;0.05 0.08 0.05&lt;/size&gt;</a:t>
             </a:r>
-            <a:br/>
+          </a:p>
+          <a:p>
+            <a:pPr algn="l">
+              <a:spcAft>
+                <a:spcPts val="0"/>
+              </a:spcAft>
+              <a:defRPr sz="1400" b="0">
+                <a:solidFill>
+                  <a:srgbClr val="FFFFFF"/>
+                </a:solidFill>
+                <a:latin typeface="DejaVu Sans Mono"/>
+              </a:defRPr>
+            </a:pPr>
             <a:r>
               <a:t>          &lt;/box&gt;</a:t>
             </a:r>
-            <a:br/>
+          </a:p>
+          <a:p>
+            <a:pPr algn="l">
+              <a:spcAft>
+                <a:spcPts val="0"/>
+              </a:spcAft>
+              <a:defRPr sz="1400" b="0">
+                <a:solidFill>
+                  <a:srgbClr val="FFFFFF"/>
+                </a:solidFill>
+                <a:latin typeface="DejaVu Sans Mono"/>
+              </a:defRPr>
+            </a:pPr>
             <a:r>
               <a:t>        &lt;/geometry&gt;</a:t>
             </a:r>
-            <a:br/>
+          </a:p>
+          <a:p>
+            <a:pPr algn="l">
+              <a:spcAft>
+                <a:spcPts val="0"/>
+              </a:spcAft>
+              <a:defRPr sz="1400" b="0">
+                <a:solidFill>
+                  <a:srgbClr val="FFFFFF"/>
+                </a:solidFill>
+                <a:latin typeface="DejaVu Sans Mono"/>
+              </a:defRPr>
+            </a:pPr>
             <a:r>
               <a:t>      &lt;/visual&gt;</a:t>
             </a:r>
-            <a:br/>
+          </a:p>
+          <a:p>
+            <a:pPr algn="l">
+              <a:spcAft>
+                <a:spcPts val="0"/>
+              </a:spcAft>
+              <a:defRPr sz="1400" b="0">
+                <a:solidFill>
+                  <a:srgbClr val="FFFFFF"/>
+                </a:solidFill>
+                <a:latin typeface="DejaVu Sans Mono"/>
+              </a:defRPr>
+            </a:pPr>
             <a:r>
               <a:t>      &lt;sensor name="camera" type="camera"&gt;</a:t>
             </a:r>
-            <a:br/>
+          </a:p>
+          <a:p>
+            <a:pPr algn="l">
+              <a:spcAft>
+                <a:spcPts val="0"/>
+              </a:spcAft>
+              <a:defRPr sz="1400" b="0">
+                <a:solidFill>
+                  <a:srgbClr val="FFFFFF"/>
+                </a:solidFill>
+                <a:latin typeface="DejaVu Sans Mono"/>
+              </a:defRPr>
+            </a:pPr>
             <a:r>
               <a:t>        &lt;topic&gt;/camera/image_raw&lt;/topic&gt;</a:t>
             </a:r>
-            <a:br/>
+          </a:p>
+          <a:p>
+            <a:pPr algn="l">
+              <a:spcAft>
+                <a:spcPts val="0"/>
+              </a:spcAft>
+              <a:defRPr sz="1400" b="0">
+                <a:solidFill>
+                  <a:srgbClr val="FFFFFF"/>
+                </a:solidFill>
+                <a:latin typeface="DejaVu Sans Mono"/>
+              </a:defRPr>
+            </a:pPr>
             <a:r>
               <a:t>        &lt;always_on&gt;true&lt;/always_on&gt;</a:t>
             </a:r>
-            <a:br/>
+          </a:p>
+          <a:p>
+            <a:pPr algn="l">
+              <a:spcAft>
+                <a:spcPts val="0"/>
+              </a:spcAft>
+              <a:defRPr sz="1400" b="0">
+                <a:solidFill>
+                  <a:srgbClr val="FFFFFF"/>
+                </a:solidFill>
+                <a:latin typeface="DejaVu Sans Mono"/>
+              </a:defRPr>
+            </a:pPr>
             <a:r>
               <a:t>        &lt;update_rate&gt;15&lt;/update_rate&gt;</a:t>
             </a:r>
-            <a:br/>
+          </a:p>
+          <a:p>
+            <a:pPr algn="l">
+              <a:spcAft>
+                <a:spcPts val="0"/>
+              </a:spcAft>
+              <a:defRPr sz="1400" b="0">
+                <a:solidFill>
+                  <a:srgbClr val="FFFFFF"/>
+                </a:solidFill>
+                <a:latin typeface="DejaVu Sans Mono"/>
+              </a:defRPr>
+            </a:pPr>
             <a:r>
               <a:t>        &lt;camera&gt;</a:t>
             </a:r>
-            <a:br/>
+          </a:p>
+          <a:p>
+            <a:pPr algn="l">
+              <a:spcAft>
+                <a:spcPts val="0"/>
+              </a:spcAft>
+              <a:defRPr sz="1400" b="0">
+                <a:solidFill>
+                  <a:srgbClr val="FFFFFF"/>
+                </a:solidFill>
+                <a:latin typeface="DejaVu Sans Mono"/>
+              </a:defRPr>
+            </a:pPr>
             <a:r>
               <a:t>          &lt;horizontal_fov&gt;1.047&lt;/horizontal_fov&gt;</a:t>
             </a:r>
@@ -34101,7 +37559,7 @@
           </a:fontRef>
         </p:style>
         <p:txBody>
-          <a:bodyPr rtlCol="0" anchor="ctr" wrap="square" lIns="164592" rIns="164592" tIns="109728" bIns="36576"/>
+          <a:bodyPr rtlCol="0" anchor="ctr" wrap="square" lIns="164592" rIns="164592" tIns="109728" bIns="73152"/>
           <a:lstStyle/>
           <a:p>
             <a:pPr algn="l">
@@ -34118,47 +37576,179 @@
             <a:r>
               <a:t>          &lt;image&gt;</a:t>
             </a:r>
-            <a:br/>
+          </a:p>
+          <a:p>
+            <a:pPr algn="l">
+              <a:spcAft>
+                <a:spcPts val="0"/>
+              </a:spcAft>
+              <a:defRPr sz="1400" b="0">
+                <a:solidFill>
+                  <a:srgbClr val="FFFFFF"/>
+                </a:solidFill>
+                <a:latin typeface="DejaVu Sans Mono"/>
+              </a:defRPr>
+            </a:pPr>
             <a:r>
               <a:t>            &lt;width&gt;640&lt;/width&gt;</a:t>
             </a:r>
-            <a:br/>
+          </a:p>
+          <a:p>
+            <a:pPr algn="l">
+              <a:spcAft>
+                <a:spcPts val="0"/>
+              </a:spcAft>
+              <a:defRPr sz="1400" b="0">
+                <a:solidFill>
+                  <a:srgbClr val="FFFFFF"/>
+                </a:solidFill>
+                <a:latin typeface="DejaVu Sans Mono"/>
+              </a:defRPr>
+            </a:pPr>
             <a:r>
               <a:t>            &lt;height&gt;480&lt;/height&gt;</a:t>
             </a:r>
-            <a:br/>
+          </a:p>
+          <a:p>
+            <a:pPr algn="l">
+              <a:spcAft>
+                <a:spcPts val="0"/>
+              </a:spcAft>
+              <a:defRPr sz="1400" b="0">
+                <a:solidFill>
+                  <a:srgbClr val="FFFFFF"/>
+                </a:solidFill>
+                <a:latin typeface="DejaVu Sans Mono"/>
+              </a:defRPr>
+            </a:pPr>
             <a:r>
               <a:t>            &lt;format&gt;R8G8B8&lt;/format&gt;</a:t>
             </a:r>
-            <a:br/>
+          </a:p>
+          <a:p>
+            <a:pPr algn="l">
+              <a:spcAft>
+                <a:spcPts val="0"/>
+              </a:spcAft>
+              <a:defRPr sz="1400" b="0">
+                <a:solidFill>
+                  <a:srgbClr val="FFFFFF"/>
+                </a:solidFill>
+                <a:latin typeface="DejaVu Sans Mono"/>
+              </a:defRPr>
+            </a:pPr>
             <a:r>
               <a:t>          &lt;/image&gt;</a:t>
             </a:r>
-            <a:br/>
+          </a:p>
+          <a:p>
+            <a:pPr algn="l">
+              <a:spcAft>
+                <a:spcPts val="0"/>
+              </a:spcAft>
+              <a:defRPr sz="1400" b="0">
+                <a:solidFill>
+                  <a:srgbClr val="FFFFFF"/>
+                </a:solidFill>
+                <a:latin typeface="DejaVu Sans Mono"/>
+              </a:defRPr>
+            </a:pPr>
             <a:r>
               <a:t>          &lt;clip&gt;</a:t>
             </a:r>
-            <a:br/>
+          </a:p>
+          <a:p>
+            <a:pPr algn="l">
+              <a:spcAft>
+                <a:spcPts val="0"/>
+              </a:spcAft>
+              <a:defRPr sz="1400" b="0">
+                <a:solidFill>
+                  <a:srgbClr val="FFFFFF"/>
+                </a:solidFill>
+                <a:latin typeface="DejaVu Sans Mono"/>
+              </a:defRPr>
+            </a:pPr>
             <a:r>
               <a:t>            &lt;near&gt;0.1&lt;/near&gt;</a:t>
             </a:r>
-            <a:br/>
+          </a:p>
+          <a:p>
+            <a:pPr algn="l">
+              <a:spcAft>
+                <a:spcPts val="0"/>
+              </a:spcAft>
+              <a:defRPr sz="1400" b="0">
+                <a:solidFill>
+                  <a:srgbClr val="FFFFFF"/>
+                </a:solidFill>
+                <a:latin typeface="DejaVu Sans Mono"/>
+              </a:defRPr>
+            </a:pPr>
             <a:r>
               <a:t>            &lt;far&gt;20&lt;/far&gt;</a:t>
             </a:r>
-            <a:br/>
+          </a:p>
+          <a:p>
+            <a:pPr algn="l">
+              <a:spcAft>
+                <a:spcPts val="0"/>
+              </a:spcAft>
+              <a:defRPr sz="1400" b="0">
+                <a:solidFill>
+                  <a:srgbClr val="FFFFFF"/>
+                </a:solidFill>
+                <a:latin typeface="DejaVu Sans Mono"/>
+              </a:defRPr>
+            </a:pPr>
             <a:r>
               <a:t>          &lt;/clip&gt;</a:t>
             </a:r>
-            <a:br/>
+          </a:p>
+          <a:p>
+            <a:pPr algn="l">
+              <a:spcAft>
+                <a:spcPts val="0"/>
+              </a:spcAft>
+              <a:defRPr sz="1400" b="0">
+                <a:solidFill>
+                  <a:srgbClr val="FFFFFF"/>
+                </a:solidFill>
+                <a:latin typeface="DejaVu Sans Mono"/>
+              </a:defRPr>
+            </a:pPr>
             <a:r>
               <a:t>        &lt;/camera&gt;</a:t>
             </a:r>
-            <a:br/>
+          </a:p>
+          <a:p>
+            <a:pPr algn="l">
+              <a:spcAft>
+                <a:spcPts val="0"/>
+              </a:spcAft>
+              <a:defRPr sz="1400" b="0">
+                <a:solidFill>
+                  <a:srgbClr val="FFFFFF"/>
+                </a:solidFill>
+                <a:latin typeface="DejaVu Sans Mono"/>
+              </a:defRPr>
+            </a:pPr>
             <a:r>
               <a:t>      &lt;/sensor&gt;</a:t>
             </a:r>
-            <a:br/>
+          </a:p>
+          <a:p>
+            <a:pPr algn="l">
+              <a:spcAft>
+                <a:spcPts val="0"/>
+              </a:spcAft>
+              <a:defRPr sz="1400" b="0">
+                <a:solidFill>
+                  <a:srgbClr val="FFFFFF"/>
+                </a:solidFill>
+                <a:latin typeface="DejaVu Sans Mono"/>
+              </a:defRPr>
+            </a:pPr>
             <a:r>
               <a:t>    &lt;/link&gt;</a:t>
             </a:r>
@@ -34575,7 +38165,7 @@
           </a:fontRef>
         </p:style>
         <p:txBody>
-          <a:bodyPr rtlCol="0" anchor="ctr" wrap="square" lIns="164592" rIns="164592" tIns="109728" bIns="36576"/>
+          <a:bodyPr rtlCol="0" anchor="ctr" wrap="square" lIns="164592" rIns="164592" tIns="109728" bIns="73152"/>
           <a:lstStyle/>
           <a:p>
             <a:pPr algn="l">
@@ -34592,47 +38182,179 @@
             <a:r>
               <a:t>    </a:t>
             </a:r>
-            <a:br/>
+          </a:p>
+          <a:p>
+            <a:pPr algn="l">
+              <a:spcAft>
+                <a:spcPts val="0"/>
+              </a:spcAft>
+              <a:defRPr sz="1400" b="0">
+                <a:solidFill>
+                  <a:srgbClr val="FFFFFF"/>
+                </a:solidFill>
+                <a:latin typeface="DejaVu Sans Mono"/>
+              </a:defRPr>
+            </a:pPr>
             <a:r>
               <a:t>    </a:t>
             </a:r>
-            <a:br/>
+          </a:p>
+          <a:p>
+            <a:pPr algn="l">
+              <a:spcAft>
+                <a:spcPts val="0"/>
+              </a:spcAft>
+              <a:defRPr sz="1400" b="0">
+                <a:solidFill>
+                  <a:srgbClr val="FFFFFF"/>
+                </a:solidFill>
+                <a:latin typeface="DejaVu Sans Mono"/>
+              </a:defRPr>
+            </a:pPr>
             <a:r>
               <a:t>    &lt;joint name="camera_joint" type="fixed"&gt;</a:t>
             </a:r>
-            <a:br/>
+          </a:p>
+          <a:p>
+            <a:pPr algn="l">
+              <a:spcAft>
+                <a:spcPts val="0"/>
+              </a:spcAft>
+              <a:defRPr sz="1400" b="0">
+                <a:solidFill>
+                  <a:srgbClr val="FFFFFF"/>
+                </a:solidFill>
+                <a:latin typeface="DejaVu Sans Mono"/>
+              </a:defRPr>
+            </a:pPr>
             <a:r>
               <a:t>      &lt;parent&gt;base_link&lt;/parent&gt;</a:t>
             </a:r>
-            <a:br/>
+          </a:p>
+          <a:p>
+            <a:pPr algn="l">
+              <a:spcAft>
+                <a:spcPts val="0"/>
+              </a:spcAft>
+              <a:defRPr sz="1400" b="0">
+                <a:solidFill>
+                  <a:srgbClr val="FFFFFF"/>
+                </a:solidFill>
+                <a:latin typeface="DejaVu Sans Mono"/>
+              </a:defRPr>
+            </a:pPr>
             <a:r>
               <a:t>      &lt;child&gt;camera_link&lt;/child&gt;</a:t>
             </a:r>
-            <a:br/>
+          </a:p>
+          <a:p>
+            <a:pPr algn="l">
+              <a:spcAft>
+                <a:spcPts val="0"/>
+              </a:spcAft>
+              <a:defRPr sz="1400" b="0">
+                <a:solidFill>
+                  <a:srgbClr val="FFFFFF"/>
+                </a:solidFill>
+                <a:latin typeface="DejaVu Sans Mono"/>
+              </a:defRPr>
+            </a:pPr>
             <a:r>
               <a:t>    &lt;/joint&gt;</a:t>
             </a:r>
-            <a:br/>
+          </a:p>
+          <a:p>
+            <a:pPr algn="l">
+              <a:spcAft>
+                <a:spcPts val="0"/>
+              </a:spcAft>
+              <a:defRPr sz="1400" b="0">
+                <a:solidFill>
+                  <a:srgbClr val="FFFFFF"/>
+                </a:solidFill>
+                <a:latin typeface="DejaVu Sans Mono"/>
+              </a:defRPr>
+            </a:pPr>
             <a:r>
               <a:t>    </a:t>
             </a:r>
-            <a:br/>
+          </a:p>
+          <a:p>
+            <a:pPr algn="l">
+              <a:spcAft>
+                <a:spcPts val="0"/>
+              </a:spcAft>
+              <a:defRPr sz="1400" b="0">
+                <a:solidFill>
+                  <a:srgbClr val="FFFFFF"/>
+                </a:solidFill>
+                <a:latin typeface="DejaVu Sans Mono"/>
+              </a:defRPr>
+            </a:pPr>
             <a:r>
               <a:t>    </a:t>
             </a:r>
-            <a:br/>
+          </a:p>
+          <a:p>
+            <a:pPr algn="l">
+              <a:spcAft>
+                <a:spcPts val="0"/>
+              </a:spcAft>
+              <a:defRPr sz="1400" b="0">
+                <a:solidFill>
+                  <a:srgbClr val="FFFFFF"/>
+                </a:solidFill>
+                <a:latin typeface="DejaVu Sans Mono"/>
+              </a:defRPr>
+            </a:pPr>
             <a:r>
               <a:t>    &lt;plugin filename="gz-sim-diff-drive-system" name="gz::sim::systems::DiffDrive"&gt;</a:t>
             </a:r>
-            <a:br/>
+          </a:p>
+          <a:p>
+            <a:pPr algn="l">
+              <a:spcAft>
+                <a:spcPts val="0"/>
+              </a:spcAft>
+              <a:defRPr sz="1400" b="0">
+                <a:solidFill>
+                  <a:srgbClr val="FFFFFF"/>
+                </a:solidFill>
+                <a:latin typeface="DejaVu Sans Mono"/>
+              </a:defRPr>
+            </a:pPr>
             <a:r>
               <a:t>      &lt;left_joint&gt;left_wheel_joint&lt;/left_joint&gt;</a:t>
             </a:r>
-            <a:br/>
+          </a:p>
+          <a:p>
+            <a:pPr algn="l">
+              <a:spcAft>
+                <a:spcPts val="0"/>
+              </a:spcAft>
+              <a:defRPr sz="1400" b="0">
+                <a:solidFill>
+                  <a:srgbClr val="FFFFFF"/>
+                </a:solidFill>
+                <a:latin typeface="DejaVu Sans Mono"/>
+              </a:defRPr>
+            </a:pPr>
             <a:r>
               <a:t>      &lt;right_joint&gt;right_wheel_joint&lt;/right_joint&gt;</a:t>
             </a:r>
-            <a:br/>
+          </a:p>
+          <a:p>
+            <a:pPr algn="l">
+              <a:spcAft>
+                <a:spcPts val="0"/>
+              </a:spcAft>
+              <a:defRPr sz="1400" b="0">
+                <a:solidFill>
+                  <a:srgbClr val="FFFFFF"/>
+                </a:solidFill>
+                <a:latin typeface="DejaVu Sans Mono"/>
+              </a:defRPr>
+            </a:pPr>
             <a:r>
               <a:t>      &lt;wheel_separation&gt;0.38&lt;/wheel_separation&gt;</a:t>
             </a:r>
@@ -35049,7 +38771,7 @@
           </a:fontRef>
         </p:style>
         <p:txBody>
-          <a:bodyPr rtlCol="0" anchor="ctr" wrap="square" lIns="164592" rIns="164592" tIns="109728" bIns="36576"/>
+          <a:bodyPr rtlCol="0" anchor="ctr" wrap="square" lIns="164592" rIns="164592" tIns="109728" bIns="73152"/>
           <a:lstStyle/>
           <a:p>
             <a:pPr algn="l">
@@ -35066,44 +38788,176 @@
             <a:r>
               <a:t>      &lt;wheel_radius&gt;0.08&lt;/wheel_radius&gt;</a:t>
             </a:r>
-            <a:br/>
+          </a:p>
+          <a:p>
+            <a:pPr algn="l">
+              <a:spcAft>
+                <a:spcPts val="0"/>
+              </a:spcAft>
+              <a:defRPr sz="1400" b="0">
+                <a:solidFill>
+                  <a:srgbClr val="FFFFFF"/>
+                </a:solidFill>
+                <a:latin typeface="DejaVu Sans Mono"/>
+              </a:defRPr>
+            </a:pPr>
             <a:r>
               <a:t>      &lt;topic&gt;/cmd_vel&lt;/topic&gt;</a:t>
             </a:r>
-            <a:br/>
+          </a:p>
+          <a:p>
+            <a:pPr algn="l">
+              <a:spcAft>
+                <a:spcPts val="0"/>
+              </a:spcAft>
+              <a:defRPr sz="1400" b="0">
+                <a:solidFill>
+                  <a:srgbClr val="FFFFFF"/>
+                </a:solidFill>
+                <a:latin typeface="DejaVu Sans Mono"/>
+              </a:defRPr>
+            </a:pPr>
             <a:r>
               <a:t>      &lt;odom_topic&gt;/odom&lt;/odom_topic&gt;</a:t>
             </a:r>
-            <a:br/>
+          </a:p>
+          <a:p>
+            <a:pPr algn="l">
+              <a:spcAft>
+                <a:spcPts val="0"/>
+              </a:spcAft>
+              <a:defRPr sz="1400" b="0">
+                <a:solidFill>
+                  <a:srgbClr val="FFFFFF"/>
+                </a:solidFill>
+                <a:latin typeface="DejaVu Sans Mono"/>
+              </a:defRPr>
+            </a:pPr>
             <a:r>
               <a:t>      &lt;frame_id&gt;odom&lt;/frame_id&gt;</a:t>
             </a:r>
-            <a:br/>
+          </a:p>
+          <a:p>
+            <a:pPr algn="l">
+              <a:spcAft>
+                <a:spcPts val="0"/>
+              </a:spcAft>
+              <a:defRPr sz="1400" b="0">
+                <a:solidFill>
+                  <a:srgbClr val="FFFFFF"/>
+                </a:solidFill>
+                <a:latin typeface="DejaVu Sans Mono"/>
+              </a:defRPr>
+            </a:pPr>
             <a:r>
               <a:t>      &lt;child_frame_id&gt;base_link&lt;/child_frame_id&gt;</a:t>
             </a:r>
-            <a:br/>
+          </a:p>
+          <a:p>
+            <a:pPr algn="l">
+              <a:spcAft>
+                <a:spcPts val="0"/>
+              </a:spcAft>
+              <a:defRPr sz="1400" b="0">
+                <a:solidFill>
+                  <a:srgbClr val="FFFFFF"/>
+                </a:solidFill>
+                <a:latin typeface="DejaVu Sans Mono"/>
+              </a:defRPr>
+            </a:pPr>
             <a:r>
               <a:t>    &lt;/plugin&gt;</a:t>
             </a:r>
-            <a:br/>
+          </a:p>
+          <a:p>
+            <a:pPr algn="l">
+              <a:spcAft>
+                <a:spcPts val="0"/>
+              </a:spcAft>
+              <a:defRPr sz="1400" b="0">
+                <a:solidFill>
+                  <a:srgbClr val="FFFFFF"/>
+                </a:solidFill>
+                <a:latin typeface="DejaVu Sans Mono"/>
+              </a:defRPr>
+            </a:pPr>
             <a:r>
               <a:t>    </a:t>
             </a:r>
-            <a:br/>
+          </a:p>
+          <a:p>
+            <a:pPr algn="l">
+              <a:spcAft>
+                <a:spcPts val="0"/>
+              </a:spcAft>
+              <a:defRPr sz="1400" b="0">
+                <a:solidFill>
+                  <a:srgbClr val="FFFFFF"/>
+                </a:solidFill>
+                <a:latin typeface="DejaVu Sans Mono"/>
+              </a:defRPr>
+            </a:pPr>
             <a:r>
               <a:t>  </a:t>
             </a:r>
-            <a:br/>
+          </a:p>
+          <a:p>
+            <a:pPr algn="l">
+              <a:spcAft>
+                <a:spcPts val="0"/>
+              </a:spcAft>
+              <a:defRPr sz="1400" b="0">
+                <a:solidFill>
+                  <a:srgbClr val="FFFFFF"/>
+                </a:solidFill>
+                <a:latin typeface="DejaVu Sans Mono"/>
+              </a:defRPr>
+            </a:pPr>
             <a:r>
               <a:t>  &lt;/model&gt;</a:t>
             </a:r>
-            <a:br/>
+          </a:p>
+          <a:p>
+            <a:pPr algn="l">
+              <a:spcAft>
+                <a:spcPts val="0"/>
+              </a:spcAft>
+              <a:defRPr sz="1400" b="0">
+                <a:solidFill>
+                  <a:srgbClr val="FFFFFF"/>
+                </a:solidFill>
+                <a:latin typeface="DejaVu Sans Mono"/>
+              </a:defRPr>
+            </a:pPr>
             <a:r>
               <a:t>  </a:t>
             </a:r>
-            <a:br/>
-            <a:br/>
+          </a:p>
+          <a:p>
+            <a:pPr algn="l">
+              <a:spcAft>
+                <a:spcPts val="0"/>
+              </a:spcAft>
+              <a:defRPr sz="1400" b="0">
+                <a:solidFill>
+                  <a:srgbClr val="FFFFFF"/>
+                </a:solidFill>
+                <a:latin typeface="DejaVu Sans Mono"/>
+              </a:defRPr>
+            </a:pPr>
+          </a:p>
+          <a:p>
+            <a:pPr algn="l">
+              <a:spcAft>
+                <a:spcPts val="0"/>
+              </a:spcAft>
+              <a:defRPr sz="1400" b="0">
+                <a:solidFill>
+                  <a:srgbClr val="FFFFFF"/>
+                </a:solidFill>
+                <a:latin typeface="DejaVu Sans Mono"/>
+              </a:defRPr>
+            </a:pPr>
             <a:r>
               <a:t>&lt;/sdf&gt;</a:t>
             </a:r>
@@ -35575,7 +39429,7 @@
           </a:fontRef>
         </p:style>
         <p:txBody>
-          <a:bodyPr rtlCol="0" anchor="ctr" wrap="square" lIns="73152" rIns="73152" tIns="36576" bIns="36576"/>
+          <a:bodyPr rtlCol="0" anchor="ctr" wrap="square" lIns="109728" rIns="109728" tIns="73152" bIns="73152"/>
           <a:lstStyle/>
           <a:p>
             <a:pPr algn="l">
@@ -35592,7 +39446,19 @@
             <a:r>
               <a:t>mkdir -p ~/ros2_curri/my_agv_ws/src/agv_control/agv_control</a:t>
             </a:r>
-            <a:br/>
+          </a:p>
+          <a:p>
+            <a:pPr algn="l">
+              <a:spcAft>
+                <a:spcPts val="0"/>
+              </a:spcAft>
+              <a:defRPr sz="1600" b="0">
+                <a:solidFill>
+                  <a:srgbClr val="FFFFFF"/>
+                </a:solidFill>
+                <a:latin typeface="DejaVu Sans Mono"/>
+              </a:defRPr>
+            </a:pPr>
             <a:r>
               <a:t>nano ~/ros2_curri/my_agv_ws/src/agv_control/agv_control/cmd_test_node.py</a:t>
             </a:r>
@@ -39781,7 +43647,7 @@
           </a:fontRef>
         </p:style>
         <p:txBody>
-          <a:bodyPr rtlCol="0" anchor="ctr" wrap="square" lIns="164592" rIns="164592" tIns="109728" bIns="36576"/>
+          <a:bodyPr rtlCol="0" anchor="ctr" wrap="square" lIns="164592" rIns="164592" tIns="109728" bIns="73152"/>
           <a:lstStyle/>
           <a:p>
             <a:pPr algn="l">
@@ -39798,41 +43664,173 @@
             <a:r>
               <a:t>import rclpy</a:t>
             </a:r>
-            <a:br/>
+          </a:p>
+          <a:p>
+            <a:pPr algn="l">
+              <a:spcAft>
+                <a:spcPts val="0"/>
+              </a:spcAft>
+              <a:defRPr sz="1400" b="0">
+                <a:solidFill>
+                  <a:srgbClr val="FFFFFF"/>
+                </a:solidFill>
+                <a:latin typeface="DejaVu Sans Mono"/>
+              </a:defRPr>
+            </a:pPr>
             <a:r>
               <a:t>from rclpy.node import Node</a:t>
             </a:r>
-            <a:br/>
+          </a:p>
+          <a:p>
+            <a:pPr algn="l">
+              <a:spcAft>
+                <a:spcPts val="0"/>
+              </a:spcAft>
+              <a:defRPr sz="1400" b="0">
+                <a:solidFill>
+                  <a:srgbClr val="FFFFFF"/>
+                </a:solidFill>
+                <a:latin typeface="DejaVu Sans Mono"/>
+              </a:defRPr>
+            </a:pPr>
             <a:r>
               <a:t>from geometry_msgs.msg import Twist</a:t>
             </a:r>
-            <a:br/>
-            <a:br/>
+          </a:p>
+          <a:p>
+            <a:pPr algn="l">
+              <a:spcAft>
+                <a:spcPts val="0"/>
+              </a:spcAft>
+              <a:defRPr sz="1400" b="0">
+                <a:solidFill>
+                  <a:srgbClr val="FFFFFF"/>
+                </a:solidFill>
+                <a:latin typeface="DejaVu Sans Mono"/>
+              </a:defRPr>
+            </a:pPr>
+          </a:p>
+          <a:p>
+            <a:pPr algn="l">
+              <a:spcAft>
+                <a:spcPts val="0"/>
+              </a:spcAft>
+              <a:defRPr sz="1400" b="0">
+                <a:solidFill>
+                  <a:srgbClr val="FFFFFF"/>
+                </a:solidFill>
+                <a:latin typeface="DejaVu Sans Mono"/>
+              </a:defRPr>
+            </a:pPr>
             <a:r>
               <a:t>class CmdTestNode(Node):</a:t>
             </a:r>
-            <a:br/>
-            <a:br/>
+          </a:p>
+          <a:p>
+            <a:pPr algn="l">
+              <a:spcAft>
+                <a:spcPts val="0"/>
+              </a:spcAft>
+              <a:defRPr sz="1400" b="0">
+                <a:solidFill>
+                  <a:srgbClr val="FFFFFF"/>
+                </a:solidFill>
+                <a:latin typeface="DejaVu Sans Mono"/>
+              </a:defRPr>
+            </a:pPr>
+          </a:p>
+          <a:p>
+            <a:pPr algn="l">
+              <a:spcAft>
+                <a:spcPts val="0"/>
+              </a:spcAft>
+              <a:defRPr sz="1400" b="0">
+                <a:solidFill>
+                  <a:srgbClr val="FFFFFF"/>
+                </a:solidFill>
+                <a:latin typeface="DejaVu Sans Mono"/>
+              </a:defRPr>
+            </a:pPr>
             <a:r>
               <a:t>    def __init__(self):</a:t>
             </a:r>
-            <a:br/>
+          </a:p>
+          <a:p>
+            <a:pPr algn="l">
+              <a:spcAft>
+                <a:spcPts val="0"/>
+              </a:spcAft>
+              <a:defRPr sz="1400" b="0">
+                <a:solidFill>
+                  <a:srgbClr val="FFFFFF"/>
+                </a:solidFill>
+                <a:latin typeface="DejaVu Sans Mono"/>
+              </a:defRPr>
+            </a:pPr>
             <a:r>
               <a:t>        super().__init__('cmd_test_node')</a:t>
             </a:r>
-            <a:br/>
+          </a:p>
+          <a:p>
+            <a:pPr algn="l">
+              <a:spcAft>
+                <a:spcPts val="0"/>
+              </a:spcAft>
+              <a:defRPr sz="1400" b="0">
+                <a:solidFill>
+                  <a:srgbClr val="FFFFFF"/>
+                </a:solidFill>
+                <a:latin typeface="DejaVu Sans Mono"/>
+              </a:defRPr>
+            </a:pPr>
             <a:r>
               <a:t>        self.declare_parameter('linear_speed', 0.15)</a:t>
             </a:r>
-            <a:br/>
+          </a:p>
+          <a:p>
+            <a:pPr algn="l">
+              <a:spcAft>
+                <a:spcPts val="0"/>
+              </a:spcAft>
+              <a:defRPr sz="1400" b="0">
+                <a:solidFill>
+                  <a:srgbClr val="FFFFFF"/>
+                </a:solidFill>
+                <a:latin typeface="DejaVu Sans Mono"/>
+              </a:defRPr>
+            </a:pPr>
             <a:r>
               <a:t>        self.declare_parameter('angular_speed', 0.0)</a:t>
             </a:r>
-            <a:br/>
+          </a:p>
+          <a:p>
+            <a:pPr algn="l">
+              <a:spcAft>
+                <a:spcPts val="0"/>
+              </a:spcAft>
+              <a:defRPr sz="1400" b="0">
+                <a:solidFill>
+                  <a:srgbClr val="FFFFFF"/>
+                </a:solidFill>
+                <a:latin typeface="DejaVu Sans Mono"/>
+              </a:defRPr>
+            </a:pPr>
             <a:r>
               <a:t>        self.publisher = self.create_publisher(Twist, '/cmd_vel', 10)</a:t>
             </a:r>
-            <a:br/>
+          </a:p>
+          <a:p>
+            <a:pPr algn="l">
+              <a:spcAft>
+                <a:spcPts val="0"/>
+              </a:spcAft>
+              <a:defRPr sz="1400" b="0">
+                <a:solidFill>
+                  <a:srgbClr val="FFFFFF"/>
+                </a:solidFill>
+                <a:latin typeface="DejaVu Sans Mono"/>
+              </a:defRPr>
+            </a:pPr>
             <a:r>
               <a:t>        self.remaining = 30</a:t>
             </a:r>
@@ -40054,7 +44052,7 @@
       </p:sp>
       <p:pic>
         <p:nvPicPr>
-          <p:cNvPr id="6" name="Picture 5" descr="01_gazebo_drive_actual.png"/>
+          <p:cNvPr id="6" name="Picture 5" descr="gazebo_agv_actual.png"/>
           <p:cNvPicPr>
             <a:picLocks noChangeAspect="1"/>
           </p:cNvPicPr>
@@ -40068,8 +44066,8 @@
         </p:blipFill>
         <p:spPr>
           <a:xfrm>
-            <a:off x="3335044" y="1389888"/>
-            <a:ext cx="5518863" cy="4663440"/>
+            <a:off x="3463292" y="1389888"/>
+            <a:ext cx="5262366" cy="4663440"/>
           </a:xfrm>
           <a:prstGeom prst="rect">
             <a:avLst/>
@@ -40110,7 +44108,7 @@
               </a:defRPr>
             </a:pPr>
             <a:r>
-              <a:t>목표 화면: 실제 Gazebo Sim: World 안의 AGV와 장애물·목표물 배치  |  나중에 확인할 것: 명령·설정과 화면의 topic·frame·결과 이름을 대조합니다.</a:t>
+              <a:t>목표 화면: 실제 Gazebo Sim: Differential Drive의 대상이 되는 AGV 모델·바퀴·World  |  나중에 확인할 것: 파란 base와 두 검은 바퀴를 먼저 찾고, 다음 명령에서 /cmd_vel이 이 model의 DiffDrive plugin으로 들어간다고 연결합니다.</a:t>
             </a:r>
           </a:p>
         </p:txBody>
@@ -40486,7 +44484,7 @@
           </a:fontRef>
         </p:style>
         <p:txBody>
-          <a:bodyPr rtlCol="0" anchor="ctr" wrap="square" lIns="164592" rIns="164592" tIns="109728" bIns="36576"/>
+          <a:bodyPr rtlCol="0" anchor="ctr" wrap="square" lIns="164592" rIns="164592" tIns="109728" bIns="73152"/>
           <a:lstStyle/>
           <a:p>
             <a:pPr algn="l">
@@ -40503,44 +44501,176 @@
             <a:r>
               <a:t>        self.create_timer(0.1, self.publish_once)</a:t>
             </a:r>
-            <a:br/>
-            <a:br/>
+          </a:p>
+          <a:p>
+            <a:pPr algn="l">
+              <a:spcAft>
+                <a:spcPts val="0"/>
+              </a:spcAft>
+              <a:defRPr sz="1400" b="0">
+                <a:solidFill>
+                  <a:srgbClr val="FFFFFF"/>
+                </a:solidFill>
+                <a:latin typeface="DejaVu Sans Mono"/>
+              </a:defRPr>
+            </a:pPr>
+          </a:p>
+          <a:p>
+            <a:pPr algn="l">
+              <a:spcAft>
+                <a:spcPts val="0"/>
+              </a:spcAft>
+              <a:defRPr sz="1400" b="0">
+                <a:solidFill>
+                  <a:srgbClr val="FFFFFF"/>
+                </a:solidFill>
+                <a:latin typeface="DejaVu Sans Mono"/>
+              </a:defRPr>
+            </a:pPr>
             <a:r>
               <a:t>    def publish_once(self):</a:t>
             </a:r>
-            <a:br/>
+          </a:p>
+          <a:p>
+            <a:pPr algn="l">
+              <a:spcAft>
+                <a:spcPts val="0"/>
+              </a:spcAft>
+              <a:defRPr sz="1400" b="0">
+                <a:solidFill>
+                  <a:srgbClr val="FFFFFF"/>
+                </a:solidFill>
+                <a:latin typeface="DejaVu Sans Mono"/>
+              </a:defRPr>
+            </a:pPr>
             <a:r>
               <a:t>        command = Twist()</a:t>
             </a:r>
-            <a:br/>
+          </a:p>
+          <a:p>
+            <a:pPr algn="l">
+              <a:spcAft>
+                <a:spcPts val="0"/>
+              </a:spcAft>
+              <a:defRPr sz="1400" b="0">
+                <a:solidFill>
+                  <a:srgbClr val="FFFFFF"/>
+                </a:solidFill>
+                <a:latin typeface="DejaVu Sans Mono"/>
+              </a:defRPr>
+            </a:pPr>
             <a:r>
               <a:t>        if self.remaining &gt; 0:</a:t>
             </a:r>
-            <a:br/>
+          </a:p>
+          <a:p>
+            <a:pPr algn="l">
+              <a:spcAft>
+                <a:spcPts val="0"/>
+              </a:spcAft>
+              <a:defRPr sz="1400" b="0">
+                <a:solidFill>
+                  <a:srgbClr val="FFFFFF"/>
+                </a:solidFill>
+                <a:latin typeface="DejaVu Sans Mono"/>
+              </a:defRPr>
+            </a:pPr>
             <a:r>
               <a:t>            command.linear.x = self.get_parameter('linear_speed').value</a:t>
             </a:r>
-            <a:br/>
+          </a:p>
+          <a:p>
+            <a:pPr algn="l">
+              <a:spcAft>
+                <a:spcPts val="0"/>
+              </a:spcAft>
+              <a:defRPr sz="1400" b="0">
+                <a:solidFill>
+                  <a:srgbClr val="FFFFFF"/>
+                </a:solidFill>
+                <a:latin typeface="DejaVu Sans Mono"/>
+              </a:defRPr>
+            </a:pPr>
             <a:r>
               <a:t>            command.angular.z = self.get_parameter('angular_speed').value</a:t>
             </a:r>
-            <a:br/>
+          </a:p>
+          <a:p>
+            <a:pPr algn="l">
+              <a:spcAft>
+                <a:spcPts val="0"/>
+              </a:spcAft>
+              <a:defRPr sz="1400" b="0">
+                <a:solidFill>
+                  <a:srgbClr val="FFFFFF"/>
+                </a:solidFill>
+                <a:latin typeface="DejaVu Sans Mono"/>
+              </a:defRPr>
+            </a:pPr>
             <a:r>
               <a:t>            self.remaining -= 1</a:t>
             </a:r>
-            <a:br/>
+          </a:p>
+          <a:p>
+            <a:pPr algn="l">
+              <a:spcAft>
+                <a:spcPts val="0"/>
+              </a:spcAft>
+              <a:defRPr sz="1400" b="0">
+                <a:solidFill>
+                  <a:srgbClr val="FFFFFF"/>
+                </a:solidFill>
+                <a:latin typeface="DejaVu Sans Mono"/>
+              </a:defRPr>
+            </a:pPr>
             <a:r>
               <a:t>        self.publisher.publish(command)</a:t>
             </a:r>
-            <a:br/>
+          </a:p>
+          <a:p>
+            <a:pPr algn="l">
+              <a:spcAft>
+                <a:spcPts val="0"/>
+              </a:spcAft>
+              <a:defRPr sz="1400" b="0">
+                <a:solidFill>
+                  <a:srgbClr val="FFFFFF"/>
+                </a:solidFill>
+                <a:latin typeface="DejaVu Sans Mono"/>
+              </a:defRPr>
+            </a:pPr>
             <a:r>
               <a:t>        if self.remaining == 0:</a:t>
             </a:r>
-            <a:br/>
+          </a:p>
+          <a:p>
+            <a:pPr algn="l">
+              <a:spcAft>
+                <a:spcPts val="0"/>
+              </a:spcAft>
+              <a:defRPr sz="1400" b="0">
+                <a:solidFill>
+                  <a:srgbClr val="FFFFFF"/>
+                </a:solidFill>
+                <a:latin typeface="DejaVu Sans Mono"/>
+              </a:defRPr>
+            </a:pPr>
             <a:r>
               <a:t>            self.get_logger().info('test command finished; publishing zero Twist')</a:t>
             </a:r>
-            <a:br/>
+          </a:p>
+          <a:p>
+            <a:pPr algn="l">
+              <a:spcAft>
+                <a:spcPts val="0"/>
+              </a:spcAft>
+              <a:defRPr sz="1400" b="0">
+                <a:solidFill>
+                  <a:srgbClr val="FFFFFF"/>
+                </a:solidFill>
+                <a:latin typeface="DejaVu Sans Mono"/>
+              </a:defRPr>
+            </a:pPr>
             <a:r>
               <a:t>            self.remaining = -1</a:t>
             </a:r>
@@ -40957,7 +45087,7 @@
           </a:fontRef>
         </p:style>
         <p:txBody>
-          <a:bodyPr rtlCol="0" anchor="ctr" wrap="square" lIns="164592" rIns="164592" tIns="109728" bIns="36576"/>
+          <a:bodyPr rtlCol="0" anchor="ctr" wrap="square" lIns="164592" rIns="164592" tIns="109728" bIns="73152"/>
           <a:lstStyle/>
           <a:p>
             <a:pPr algn="l">
@@ -40971,47 +45101,179 @@
                 <a:latin typeface="DejaVu Sans Mono"/>
               </a:defRPr>
             </a:pPr>
-            <a:br/>
+          </a:p>
+          <a:p>
+            <a:pPr algn="l">
+              <a:spcAft>
+                <a:spcPts val="0"/>
+              </a:spcAft>
+              <a:defRPr sz="1400" b="0">
+                <a:solidFill>
+                  <a:srgbClr val="FFFFFF"/>
+                </a:solidFill>
+                <a:latin typeface="DejaVu Sans Mono"/>
+              </a:defRPr>
+            </a:pPr>
             <a:r>
               <a:t>def main():</a:t>
             </a:r>
-            <a:br/>
+          </a:p>
+          <a:p>
+            <a:pPr algn="l">
+              <a:spcAft>
+                <a:spcPts val="0"/>
+              </a:spcAft>
+              <a:defRPr sz="1400" b="0">
+                <a:solidFill>
+                  <a:srgbClr val="FFFFFF"/>
+                </a:solidFill>
+                <a:latin typeface="DejaVu Sans Mono"/>
+              </a:defRPr>
+            </a:pPr>
             <a:r>
               <a:t>    rclpy.init()</a:t>
             </a:r>
-            <a:br/>
+          </a:p>
+          <a:p>
+            <a:pPr algn="l">
+              <a:spcAft>
+                <a:spcPts val="0"/>
+              </a:spcAft>
+              <a:defRPr sz="1400" b="0">
+                <a:solidFill>
+                  <a:srgbClr val="FFFFFF"/>
+                </a:solidFill>
+                <a:latin typeface="DejaVu Sans Mono"/>
+              </a:defRPr>
+            </a:pPr>
             <a:r>
               <a:t>    node = CmdTestNode()</a:t>
             </a:r>
-            <a:br/>
+          </a:p>
+          <a:p>
+            <a:pPr algn="l">
+              <a:spcAft>
+                <a:spcPts val="0"/>
+              </a:spcAft>
+              <a:defRPr sz="1400" b="0">
+                <a:solidFill>
+                  <a:srgbClr val="FFFFFF"/>
+                </a:solidFill>
+                <a:latin typeface="DejaVu Sans Mono"/>
+              </a:defRPr>
+            </a:pPr>
             <a:r>
               <a:t>    try:</a:t>
             </a:r>
-            <a:br/>
+          </a:p>
+          <a:p>
+            <a:pPr algn="l">
+              <a:spcAft>
+                <a:spcPts val="0"/>
+              </a:spcAft>
+              <a:defRPr sz="1400" b="0">
+                <a:solidFill>
+                  <a:srgbClr val="FFFFFF"/>
+                </a:solidFill>
+                <a:latin typeface="DejaVu Sans Mono"/>
+              </a:defRPr>
+            </a:pPr>
             <a:r>
               <a:t>        rclpy.spin(node)</a:t>
             </a:r>
-            <a:br/>
+          </a:p>
+          <a:p>
+            <a:pPr algn="l">
+              <a:spcAft>
+                <a:spcPts val="0"/>
+              </a:spcAft>
+              <a:defRPr sz="1400" b="0">
+                <a:solidFill>
+                  <a:srgbClr val="FFFFFF"/>
+                </a:solidFill>
+                <a:latin typeface="DejaVu Sans Mono"/>
+              </a:defRPr>
+            </a:pPr>
             <a:r>
               <a:t>    except KeyboardInterrupt:</a:t>
             </a:r>
-            <a:br/>
+          </a:p>
+          <a:p>
+            <a:pPr algn="l">
+              <a:spcAft>
+                <a:spcPts val="0"/>
+              </a:spcAft>
+              <a:defRPr sz="1400" b="0">
+                <a:solidFill>
+                  <a:srgbClr val="FFFFFF"/>
+                </a:solidFill>
+                <a:latin typeface="DejaVu Sans Mono"/>
+              </a:defRPr>
+            </a:pPr>
             <a:r>
               <a:t>        pass</a:t>
             </a:r>
-            <a:br/>
+          </a:p>
+          <a:p>
+            <a:pPr algn="l">
+              <a:spcAft>
+                <a:spcPts val="0"/>
+              </a:spcAft>
+              <a:defRPr sz="1400" b="0">
+                <a:solidFill>
+                  <a:srgbClr val="FFFFFF"/>
+                </a:solidFill>
+                <a:latin typeface="DejaVu Sans Mono"/>
+              </a:defRPr>
+            </a:pPr>
             <a:r>
               <a:t>    finally:</a:t>
             </a:r>
-            <a:br/>
+          </a:p>
+          <a:p>
+            <a:pPr algn="l">
+              <a:spcAft>
+                <a:spcPts val="0"/>
+              </a:spcAft>
+              <a:defRPr sz="1400" b="0">
+                <a:solidFill>
+                  <a:srgbClr val="FFFFFF"/>
+                </a:solidFill>
+                <a:latin typeface="DejaVu Sans Mono"/>
+              </a:defRPr>
+            </a:pPr>
             <a:r>
               <a:t>        node.destroy_node()</a:t>
             </a:r>
-            <a:br/>
+          </a:p>
+          <a:p>
+            <a:pPr algn="l">
+              <a:spcAft>
+                <a:spcPts val="0"/>
+              </a:spcAft>
+              <a:defRPr sz="1400" b="0">
+                <a:solidFill>
+                  <a:srgbClr val="FFFFFF"/>
+                </a:solidFill>
+                <a:latin typeface="DejaVu Sans Mono"/>
+              </a:defRPr>
+            </a:pPr>
             <a:r>
               <a:t>        if rclpy.ok():</a:t>
             </a:r>
-            <a:br/>
+          </a:p>
+          <a:p>
+            <a:pPr algn="l">
+              <a:spcAft>
+                <a:spcPts val="0"/>
+              </a:spcAft>
+              <a:defRPr sz="1400" b="0">
+                <a:solidFill>
+                  <a:srgbClr val="FFFFFF"/>
+                </a:solidFill>
+                <a:latin typeface="DejaVu Sans Mono"/>
+              </a:defRPr>
+            </a:pPr>
             <a:r>
               <a:t>            rclpy.shutdown()</a:t>
             </a:r>
@@ -41284,7 +45546,7 @@
               </a:defRPr>
             </a:pPr>
             <a:r>
-              <a:t>현재 단계 실행 1/2    |    현재 폴더 ~/ros2_curri/my_agv_ws    |    현재 터미널</a:t>
+              <a:t>현재 단계 실행 1/2    |    현재 폴더 ~/ros2_curri/my_agv_ws    |    터미널 1</a:t>
             </a:r>
           </a:p>
         </p:txBody>
@@ -41297,25 +45559,25 @@
         </p:nvSpPr>
         <p:spPr>
           <a:xfrm>
-            <a:off x="676656" y="1764792"/>
-            <a:ext cx="1828800" cy="347472"/>
-          </a:xfrm>
-          <a:prstGeom prst="rect">
-            <a:avLst/>
-          </a:prstGeom>
-          <a:noFill/>
-        </p:spPr>
-        <p:txBody>
-          <a:bodyPr wrap="square" lIns="73152" rIns="73152" tIns="36576" bIns="36576">
-            <a:spAutoFit/>
-          </a:bodyPr>
-          <a:lstStyle/>
-          <a:p>
-            <a:pPr algn="l">
-              <a:spcAft>
-                <a:spcPts val="0"/>
-              </a:spcAft>
-              <a:defRPr sz="1800" b="1">
+            <a:off x="676656" y="1719072"/>
+            <a:ext cx="1691640" cy="274320"/>
+          </a:xfrm>
+          <a:prstGeom prst="rect">
+            <a:avLst/>
+          </a:prstGeom>
+          <a:noFill/>
+        </p:spPr>
+        <p:txBody>
+          <a:bodyPr wrap="square" lIns="73152" rIns="73152" tIns="36576" bIns="36576">
+            <a:spAutoFit/>
+          </a:bodyPr>
+          <a:lstStyle/>
+          <a:p>
+            <a:pPr algn="l">
+              <a:spcAft>
+                <a:spcPts val="0"/>
+              </a:spcAft>
+              <a:defRPr sz="1700" b="1">
                 <a:solidFill>
                   <a:srgbClr val="225B9B"/>
                 </a:solidFill>
@@ -41323,7 +45585,7 @@
               </a:defRPr>
             </a:pPr>
             <a:r>
-              <a:t>왜 하는가</a:t>
+              <a:t>명령의 목적</a:t>
             </a:r>
           </a:p>
         </p:txBody>
@@ -41336,7 +45598,7 @@
         </p:nvSpPr>
         <p:spPr>
           <a:xfrm>
-            <a:off x="676656" y="2103120"/>
+            <a:off x="676656" y="2002536"/>
             <a:ext cx="10789920" cy="512064"/>
           </a:xfrm>
           <a:prstGeom prst="rect">
@@ -41354,7 +45616,7 @@
               <a:spcAft>
                 <a:spcPts val="0"/>
               </a:spcAft>
-              <a:defRPr sz="2000" b="0">
+              <a:defRPr sz="1800" b="0">
                 <a:solidFill>
                   <a:srgbClr val="122C4E"/>
                 </a:solidFill>
@@ -41369,14 +45631,53 @@
       </p:sp>
       <p:sp>
         <p:nvSpPr>
-          <p:cNvPr id="9" name="Rounded Rectangle 8"/>
+          <p:cNvPr id="9" name="TextBox 8"/>
+          <p:cNvSpPr txBox="1"/>
+          <p:nvPr/>
+        </p:nvSpPr>
+        <p:spPr>
+          <a:xfrm>
+            <a:off x="676656" y="2816352"/>
+            <a:ext cx="10835640" cy="256032"/>
+          </a:xfrm>
+          <a:prstGeom prst="rect">
+            <a:avLst/>
+          </a:prstGeom>
+          <a:noFill/>
+        </p:spPr>
+        <p:txBody>
+          <a:bodyPr wrap="square" lIns="73152" rIns="73152" tIns="36576" bIns="36576">
+            <a:spAutoFit/>
+          </a:bodyPr>
+          <a:lstStyle/>
+          <a:p>
+            <a:pPr algn="ctr">
+              <a:spcAft>
+                <a:spcPts val="0"/>
+              </a:spcAft>
+              <a:defRPr sz="1600" b="1">
+                <a:solidFill>
+                  <a:srgbClr val="225B9B"/>
+                </a:solidFill>
+                <a:latin typeface="Noto Sans CJK KR"/>
+              </a:defRPr>
+            </a:pPr>
+            <a:r>
+              <a:t>터미널 1 — 아래 검은 블록은 명령만 복사합니다.</a:t>
+            </a:r>
+          </a:p>
+        </p:txBody>
+      </p:sp>
+      <p:sp>
+        <p:nvSpPr>
+          <p:cNvPr id="10" name="Rounded Rectangle 9"/>
           <p:cNvSpPr/>
           <p:nvPr/>
         </p:nvSpPr>
         <p:spPr>
           <a:xfrm>
-            <a:off x="676656" y="2871216"/>
-            <a:ext cx="10835640" cy="2331720"/>
+            <a:off x="676656" y="3154680"/>
+            <a:ext cx="10835640" cy="1938528"/>
           </a:xfrm>
           <a:prstGeom prst="roundRect">
             <a:avLst/>
@@ -41405,7 +45706,7 @@
           </a:fontRef>
         </p:style>
         <p:txBody>
-          <a:bodyPr rtlCol="0" anchor="ctr" wrap="square" lIns="73152" rIns="73152" tIns="36576" bIns="36576"/>
+          <a:bodyPr rtlCol="0" anchor="ctr" wrap="square" lIns="109728" rIns="109728" tIns="73152" bIns="73152"/>
           <a:lstStyle/>
           <a:p>
             <a:pPr algn="l">
@@ -41422,7 +45723,19 @@
             <a:r>
               <a:t>ros2 topic pub --rate 10 /cmd_vel geometry_msgs/msg/Twist \</a:t>
             </a:r>
-            <a:br/>
+          </a:p>
+          <a:p>
+            <a:pPr algn="l">
+              <a:spcAft>
+                <a:spcPts val="0"/>
+              </a:spcAft>
+              <a:defRPr sz="1600" b="0">
+                <a:solidFill>
+                  <a:srgbClr val="FFFFFF"/>
+                </a:solidFill>
+                <a:latin typeface="DejaVu Sans Mono"/>
+              </a:defRPr>
+            </a:pPr>
             <a:r>
               <a:t>  "{linear: {x: 0.15}, angular: {z: 0.0}}"</a:t>
             </a:r>
@@ -41431,31 +45744,31 @@
       </p:sp>
       <p:sp>
         <p:nvSpPr>
-          <p:cNvPr id="10" name="TextBox 9"/>
-          <p:cNvSpPr txBox="1"/>
-          <p:nvPr/>
-        </p:nvSpPr>
-        <p:spPr>
-          <a:xfrm>
-            <a:off x="768096" y="5468112"/>
-            <a:ext cx="1143000" cy="256032"/>
-          </a:xfrm>
-          <a:prstGeom prst="rect">
-            <a:avLst/>
-          </a:prstGeom>
-          <a:noFill/>
-        </p:spPr>
-        <p:txBody>
-          <a:bodyPr wrap="square" lIns="73152" rIns="73152" tIns="36576" bIns="36576">
-            <a:spAutoFit/>
-          </a:bodyPr>
-          <a:lstStyle/>
-          <a:p>
-            <a:pPr algn="l">
-              <a:spcAft>
-                <a:spcPts val="0"/>
-              </a:spcAft>
-              <a:defRPr sz="1800" b="1">
+          <p:cNvPr id="11" name="TextBox 10"/>
+          <p:cNvSpPr txBox="1"/>
+          <p:nvPr/>
+        </p:nvSpPr>
+        <p:spPr>
+          <a:xfrm>
+            <a:off x="768096" y="5276088"/>
+            <a:ext cx="10561320" cy="384048"/>
+          </a:xfrm>
+          <a:prstGeom prst="rect">
+            <a:avLst/>
+          </a:prstGeom>
+          <a:noFill/>
+        </p:spPr>
+        <p:txBody>
+          <a:bodyPr wrap="square" lIns="73152" rIns="73152" tIns="36576" bIns="36576">
+            <a:spAutoFit/>
+          </a:bodyPr>
+          <a:lstStyle/>
+          <a:p>
+            <a:pPr algn="ctr">
+              <a:spcAft>
+                <a:spcPts val="0"/>
+              </a:spcAft>
+              <a:defRPr sz="1500" b="1">
                 <a:solidFill>
                   <a:srgbClr val="2A8B5A"/>
                 </a:solidFill>
@@ -41463,38 +45776,38 @@
               </a:defRPr>
             </a:pPr>
             <a:r>
-              <a:t>확인</a:t>
-            </a:r>
-          </a:p>
-        </p:txBody>
-      </p:sp>
-      <p:sp>
-        <p:nvSpPr>
-          <p:cNvPr id="11" name="TextBox 10"/>
-          <p:cNvSpPr txBox="1"/>
-          <p:nvPr/>
-        </p:nvSpPr>
-        <p:spPr>
-          <a:xfrm>
-            <a:off x="768096" y="5742432"/>
-            <a:ext cx="10561320" cy="347472"/>
-          </a:xfrm>
-          <a:prstGeom prst="rect">
-            <a:avLst/>
-          </a:prstGeom>
-          <a:noFill/>
-        </p:spPr>
-        <p:txBody>
-          <a:bodyPr wrap="square" lIns="73152" rIns="73152" tIns="36576" bIns="36576">
-            <a:spAutoFit/>
-          </a:bodyPr>
-          <a:lstStyle/>
-          <a:p>
-            <a:pPr algn="l">
-              <a:spcAft>
-                <a:spcPts val="0"/>
-              </a:spcAft>
-              <a:defRPr sz="1800" b="0">
+              <a:t>터미널 1 역할: 터미널 1에서 이 명령만 그대로 복사해 실행합니다.</a:t>
+            </a:r>
+          </a:p>
+        </p:txBody>
+      </p:sp>
+      <p:sp>
+        <p:nvSpPr>
+          <p:cNvPr id="12" name="TextBox 11"/>
+          <p:cNvSpPr txBox="1"/>
+          <p:nvPr/>
+        </p:nvSpPr>
+        <p:spPr>
+          <a:xfrm>
+            <a:off x="768096" y="5916168"/>
+            <a:ext cx="10561320" cy="292608"/>
+          </a:xfrm>
+          <a:prstGeom prst="rect">
+            <a:avLst/>
+          </a:prstGeom>
+          <a:noFill/>
+        </p:spPr>
+        <p:txBody>
+          <a:bodyPr wrap="square" lIns="73152" rIns="73152" tIns="36576" bIns="36576">
+            <a:spAutoFit/>
+          </a:bodyPr>
+          <a:lstStyle/>
+          <a:p>
+            <a:pPr algn="ctr">
+              <a:spcAft>
+                <a:spcPts val="0"/>
+              </a:spcAft>
+              <a:defRPr sz="1500" b="1">
                 <a:solidFill>
                   <a:srgbClr val="122C4E"/>
                 </a:solidFill>
@@ -41502,7 +45815,7 @@
               </a:defRPr>
             </a:pPr>
             <a:r>
-              <a:t>출력에서 topic·frame·파일 이름 또는 성공 메시지를 찾고, 맞지 않으면 다음 파일로 가지 않습니다.</a:t>
+              <a:t>확인: 출력에서 topic·frame·파일 이름 또는 성공 메시지를 찾고, 맞지 않으면 다음 파일로 가지 않습니다.</a:t>
             </a:r>
           </a:p>
         </p:txBody>
@@ -41734,7 +46047,7 @@
               </a:defRPr>
             </a:pPr>
             <a:r>
-              <a:t>현재 단계 실행 2/2    |    현재 폴더 ~/ros2_curri/my_agv_ws    |    현재 터미널</a:t>
+              <a:t>현재 단계 실행 2/2    |    현재 폴더 ~/ros2_curri/my_agv_ws    |    터미널 1</a:t>
             </a:r>
           </a:p>
         </p:txBody>
@@ -41747,25 +46060,25 @@
         </p:nvSpPr>
         <p:spPr>
           <a:xfrm>
-            <a:off x="676656" y="1764792"/>
-            <a:ext cx="1828800" cy="347472"/>
-          </a:xfrm>
-          <a:prstGeom prst="rect">
-            <a:avLst/>
-          </a:prstGeom>
-          <a:noFill/>
-        </p:spPr>
-        <p:txBody>
-          <a:bodyPr wrap="square" lIns="73152" rIns="73152" tIns="36576" bIns="36576">
-            <a:spAutoFit/>
-          </a:bodyPr>
-          <a:lstStyle/>
-          <a:p>
-            <a:pPr algn="l">
-              <a:spcAft>
-                <a:spcPts val="0"/>
-              </a:spcAft>
-              <a:defRPr sz="1800" b="1">
+            <a:off x="676656" y="1719072"/>
+            <a:ext cx="1691640" cy="274320"/>
+          </a:xfrm>
+          <a:prstGeom prst="rect">
+            <a:avLst/>
+          </a:prstGeom>
+          <a:noFill/>
+        </p:spPr>
+        <p:txBody>
+          <a:bodyPr wrap="square" lIns="73152" rIns="73152" tIns="36576" bIns="36576">
+            <a:spAutoFit/>
+          </a:bodyPr>
+          <a:lstStyle/>
+          <a:p>
+            <a:pPr algn="l">
+              <a:spcAft>
+                <a:spcPts val="0"/>
+              </a:spcAft>
+              <a:defRPr sz="1700" b="1">
                 <a:solidFill>
                   <a:srgbClr val="225B9B"/>
                 </a:solidFill>
@@ -41773,7 +46086,7 @@
               </a:defRPr>
             </a:pPr>
             <a:r>
-              <a:t>왜 하는가</a:t>
+              <a:t>명령의 목적</a:t>
             </a:r>
           </a:p>
         </p:txBody>
@@ -41786,7 +46099,7 @@
         </p:nvSpPr>
         <p:spPr>
           <a:xfrm>
-            <a:off x="676656" y="2103120"/>
+            <a:off x="676656" y="2002536"/>
             <a:ext cx="10789920" cy="512064"/>
           </a:xfrm>
           <a:prstGeom prst="rect">
@@ -41804,7 +46117,7 @@
               <a:spcAft>
                 <a:spcPts val="0"/>
               </a:spcAft>
-              <a:defRPr sz="2000" b="0">
+              <a:defRPr sz="1800" b="0">
                 <a:solidFill>
                   <a:srgbClr val="122C4E"/>
                 </a:solidFill>
@@ -41819,14 +46132,53 @@
       </p:sp>
       <p:sp>
         <p:nvSpPr>
-          <p:cNvPr id="9" name="Rounded Rectangle 8"/>
+          <p:cNvPr id="9" name="TextBox 8"/>
+          <p:cNvSpPr txBox="1"/>
+          <p:nvPr/>
+        </p:nvSpPr>
+        <p:spPr>
+          <a:xfrm>
+            <a:off x="676656" y="2816352"/>
+            <a:ext cx="10835640" cy="256032"/>
+          </a:xfrm>
+          <a:prstGeom prst="rect">
+            <a:avLst/>
+          </a:prstGeom>
+          <a:noFill/>
+        </p:spPr>
+        <p:txBody>
+          <a:bodyPr wrap="square" lIns="73152" rIns="73152" tIns="36576" bIns="36576">
+            <a:spAutoFit/>
+          </a:bodyPr>
+          <a:lstStyle/>
+          <a:p>
+            <a:pPr algn="ctr">
+              <a:spcAft>
+                <a:spcPts val="0"/>
+              </a:spcAft>
+              <a:defRPr sz="1600" b="1">
+                <a:solidFill>
+                  <a:srgbClr val="225B9B"/>
+                </a:solidFill>
+                <a:latin typeface="Noto Sans CJK KR"/>
+              </a:defRPr>
+            </a:pPr>
+            <a:r>
+              <a:t>터미널 1 — 아래 검은 블록은 명령만 복사합니다.</a:t>
+            </a:r>
+          </a:p>
+        </p:txBody>
+      </p:sp>
+      <p:sp>
+        <p:nvSpPr>
+          <p:cNvPr id="10" name="Rounded Rectangle 9"/>
           <p:cNvSpPr/>
           <p:nvPr/>
         </p:nvSpPr>
         <p:spPr>
           <a:xfrm>
-            <a:off x="676656" y="2871216"/>
-            <a:ext cx="10835640" cy="2331720"/>
+            <a:off x="676656" y="3154680"/>
+            <a:ext cx="10835640" cy="1938528"/>
           </a:xfrm>
           <a:prstGeom prst="roundRect">
             <a:avLst/>
@@ -41855,7 +46207,7 @@
           </a:fontRef>
         </p:style>
         <p:txBody>
-          <a:bodyPr rtlCol="0" anchor="ctr" wrap="square" lIns="73152" rIns="73152" tIns="36576" bIns="36576"/>
+          <a:bodyPr rtlCol="0" anchor="ctr" wrap="square" lIns="109728" rIns="109728" tIns="73152" bIns="73152"/>
           <a:lstStyle/>
           <a:p>
             <a:pPr algn="l">
@@ -41872,11 +46224,35 @@
             <a:r>
               <a:t>ros2 topic pub --rate 10 /cmd_vel geometry_msgs/msg/Twist \</a:t>
             </a:r>
-            <a:br/>
+          </a:p>
+          <a:p>
+            <a:pPr algn="l">
+              <a:spcAft>
+                <a:spcPts val="0"/>
+              </a:spcAft>
+              <a:defRPr sz="1600" b="0">
+                <a:solidFill>
+                  <a:srgbClr val="FFFFFF"/>
+                </a:solidFill>
+                <a:latin typeface="DejaVu Sans Mono"/>
+              </a:defRPr>
+            </a:pPr>
             <a:r>
               <a:t>  "{linear: {x: 0.0}, angular: {z: 0.4}}"</a:t>
             </a:r>
-            <a:br/>
+          </a:p>
+          <a:p>
+            <a:pPr algn="l">
+              <a:spcAft>
+                <a:spcPts val="0"/>
+              </a:spcAft>
+              <a:defRPr sz="1600" b="0">
+                <a:solidFill>
+                  <a:srgbClr val="FFFFFF"/>
+                </a:solidFill>
+                <a:latin typeface="DejaVu Sans Mono"/>
+              </a:defRPr>
+            </a:pPr>
             <a:r>
               <a:t>ros2 topic echo /odom --once</a:t>
             </a:r>
@@ -41885,31 +46261,31 @@
       </p:sp>
       <p:sp>
         <p:nvSpPr>
-          <p:cNvPr id="10" name="TextBox 9"/>
-          <p:cNvSpPr txBox="1"/>
-          <p:nvPr/>
-        </p:nvSpPr>
-        <p:spPr>
-          <a:xfrm>
-            <a:off x="768096" y="5468112"/>
-            <a:ext cx="1143000" cy="256032"/>
-          </a:xfrm>
-          <a:prstGeom prst="rect">
-            <a:avLst/>
-          </a:prstGeom>
-          <a:noFill/>
-        </p:spPr>
-        <p:txBody>
-          <a:bodyPr wrap="square" lIns="73152" rIns="73152" tIns="36576" bIns="36576">
-            <a:spAutoFit/>
-          </a:bodyPr>
-          <a:lstStyle/>
-          <a:p>
-            <a:pPr algn="l">
-              <a:spcAft>
-                <a:spcPts val="0"/>
-              </a:spcAft>
-              <a:defRPr sz="1800" b="1">
+          <p:cNvPr id="11" name="TextBox 10"/>
+          <p:cNvSpPr txBox="1"/>
+          <p:nvPr/>
+        </p:nvSpPr>
+        <p:spPr>
+          <a:xfrm>
+            <a:off x="768096" y="5276088"/>
+            <a:ext cx="10561320" cy="384048"/>
+          </a:xfrm>
+          <a:prstGeom prst="rect">
+            <a:avLst/>
+          </a:prstGeom>
+          <a:noFill/>
+        </p:spPr>
+        <p:txBody>
+          <a:bodyPr wrap="square" lIns="73152" rIns="73152" tIns="36576" bIns="36576">
+            <a:spAutoFit/>
+          </a:bodyPr>
+          <a:lstStyle/>
+          <a:p>
+            <a:pPr algn="ctr">
+              <a:spcAft>
+                <a:spcPts val="0"/>
+              </a:spcAft>
+              <a:defRPr sz="1500" b="1">
                 <a:solidFill>
                   <a:srgbClr val="2A8B5A"/>
                 </a:solidFill>
@@ -41917,38 +46293,38 @@
               </a:defRPr>
             </a:pPr>
             <a:r>
-              <a:t>확인</a:t>
-            </a:r>
-          </a:p>
-        </p:txBody>
-      </p:sp>
-      <p:sp>
-        <p:nvSpPr>
-          <p:cNvPr id="11" name="TextBox 10"/>
-          <p:cNvSpPr txBox="1"/>
-          <p:nvPr/>
-        </p:nvSpPr>
-        <p:spPr>
-          <a:xfrm>
-            <a:off x="768096" y="5742432"/>
-            <a:ext cx="10561320" cy="347472"/>
-          </a:xfrm>
-          <a:prstGeom prst="rect">
-            <a:avLst/>
-          </a:prstGeom>
-          <a:noFill/>
-        </p:spPr>
-        <p:txBody>
-          <a:bodyPr wrap="square" lIns="73152" rIns="73152" tIns="36576" bIns="36576">
-            <a:spAutoFit/>
-          </a:bodyPr>
-          <a:lstStyle/>
-          <a:p>
-            <a:pPr algn="l">
-              <a:spcAft>
-                <a:spcPts val="0"/>
-              </a:spcAft>
-              <a:defRPr sz="1800" b="0">
+              <a:t>터미널 1 역할: 다른 터미널의 실행 결과를 이 창에서 관찰·검증합니다.</a:t>
+            </a:r>
+          </a:p>
+        </p:txBody>
+      </p:sp>
+      <p:sp>
+        <p:nvSpPr>
+          <p:cNvPr id="12" name="TextBox 11"/>
+          <p:cNvSpPr txBox="1"/>
+          <p:nvPr/>
+        </p:nvSpPr>
+        <p:spPr>
+          <a:xfrm>
+            <a:off x="768096" y="5916168"/>
+            <a:ext cx="10561320" cy="292608"/>
+          </a:xfrm>
+          <a:prstGeom prst="rect">
+            <a:avLst/>
+          </a:prstGeom>
+          <a:noFill/>
+        </p:spPr>
+        <p:txBody>
+          <a:bodyPr wrap="square" lIns="73152" rIns="73152" tIns="36576" bIns="36576">
+            <a:spAutoFit/>
+          </a:bodyPr>
+          <a:lstStyle/>
+          <a:p>
+            <a:pPr algn="ctr">
+              <a:spcAft>
+                <a:spcPts val="0"/>
+              </a:spcAft>
+              <a:defRPr sz="1500" b="1">
                 <a:solidFill>
                   <a:srgbClr val="122C4E"/>
                 </a:solidFill>
@@ -41956,7 +46332,7 @@
               </a:defRPr>
             </a:pPr>
             <a:r>
-              <a:t>출력에서 topic·frame·파일 이름 또는 성공 메시지를 찾고, 맞지 않으면 다음 파일로 가지 않습니다.</a:t>
+              <a:t>확인: 출력에서 topic·frame·파일 이름 또는 성공 메시지를 찾고, 맞지 않으면 다음 파일로 가지 않습니다.</a:t>
             </a:r>
           </a:p>
         </p:txBody>
@@ -42188,21 +46564,177 @@
               </a:defRPr>
             </a:pPr>
             <a:r>
-              <a:t>현재 단계 실행    |    현재 폴더 ~/ros2_curri/my_agv_ws    |    현재 터미널</a:t>
-            </a:r>
-          </a:p>
-        </p:txBody>
-      </p:sp>
-      <p:sp>
-        <p:nvSpPr>
-          <p:cNvPr id="7" name="Rounded Rectangle 6"/>
+              <a:t>현재 단계 실행    |    현재 폴더 ~/ros2_curri/my_agv_ws    |    터미널 1 + 2</a:t>
+            </a:r>
+          </a:p>
+        </p:txBody>
+      </p:sp>
+      <p:sp>
+        <p:nvSpPr>
+          <p:cNvPr id="7" name="TextBox 6"/>
+          <p:cNvSpPr txBox="1"/>
+          <p:nvPr/>
+        </p:nvSpPr>
+        <p:spPr>
+          <a:xfrm>
+            <a:off x="676656" y="1719072"/>
+            <a:ext cx="1691640" cy="274320"/>
+          </a:xfrm>
+          <a:prstGeom prst="rect">
+            <a:avLst/>
+          </a:prstGeom>
+          <a:noFill/>
+        </p:spPr>
+        <p:txBody>
+          <a:bodyPr wrap="square" lIns="73152" rIns="73152" tIns="36576" bIns="36576">
+            <a:spAutoFit/>
+          </a:bodyPr>
+          <a:lstStyle/>
+          <a:p>
+            <a:pPr algn="l">
+              <a:spcAft>
+                <a:spcPts val="0"/>
+              </a:spcAft>
+              <a:defRPr sz="1700" b="1">
+                <a:solidFill>
+                  <a:srgbClr val="225B9B"/>
+                </a:solidFill>
+                <a:latin typeface="Noto Sans CJK KR"/>
+              </a:defRPr>
+            </a:pPr>
+            <a:r>
+              <a:t>명령의 목적</a:t>
+            </a:r>
+          </a:p>
+        </p:txBody>
+      </p:sp>
+      <p:sp>
+        <p:nvSpPr>
+          <p:cNvPr id="8" name="TextBox 7"/>
+          <p:cNvSpPr txBox="1"/>
+          <p:nvPr/>
+        </p:nvSpPr>
+        <p:spPr>
+          <a:xfrm>
+            <a:off x="676656" y="2002536"/>
+            <a:ext cx="10789920" cy="512064"/>
+          </a:xfrm>
+          <a:prstGeom prst="rect">
+            <a:avLst/>
+          </a:prstGeom>
+          <a:noFill/>
+        </p:spPr>
+        <p:txBody>
+          <a:bodyPr wrap="square" lIns="73152" rIns="73152" tIns="36576" bIns="36576">
+            <a:spAutoFit/>
+          </a:bodyPr>
+          <a:lstStyle/>
+          <a:p>
+            <a:pPr algn="l">
+              <a:spcAft>
+                <a:spcPts val="0"/>
+              </a:spcAft>
+              <a:defRPr sz="1800" b="0">
+                <a:solidFill>
+                  <a:srgbClr val="122C4E"/>
+                </a:solidFill>
+                <a:latin typeface="Noto Sans CJK KR"/>
+              </a:defRPr>
+            </a:pPr>
+            <a:r>
+              <a:t>명령 순서를 바꾸지 않습니다. build가 끝난 뒤 source하고, 마지막 명령으로 node·Gazebo·RViz를 실행합니다.</a:t>
+            </a:r>
+          </a:p>
+        </p:txBody>
+      </p:sp>
+      <p:sp>
+        <p:nvSpPr>
+          <p:cNvPr id="9" name="TextBox 8"/>
+          <p:cNvSpPr txBox="1"/>
+          <p:nvPr/>
+        </p:nvSpPr>
+        <p:spPr>
+          <a:xfrm>
+            <a:off x="676656" y="2679192"/>
+            <a:ext cx="10789920" cy="237744"/>
+          </a:xfrm>
+          <a:prstGeom prst="rect">
+            <a:avLst/>
+          </a:prstGeom>
+          <a:noFill/>
+        </p:spPr>
+        <p:txBody>
+          <a:bodyPr wrap="square" lIns="73152" rIns="73152" tIns="36576" bIns="36576">
+            <a:spAutoFit/>
+          </a:bodyPr>
+          <a:lstStyle/>
+          <a:p>
+            <a:pPr algn="ctr">
+              <a:spcAft>
+                <a:spcPts val="0"/>
+              </a:spcAft>
+              <a:defRPr sz="1400" b="1">
+                <a:solidFill>
+                  <a:srgbClr val="DB7E22"/>
+                </a:solidFill>
+                <a:latin typeface="Noto Sans CJK KR"/>
+              </a:defRPr>
+            </a:pPr>
+            <a:r>
+              <a:t>두 터미널은 동시에 필요합니다. 각 검은 블록에는 그대로 복사할 명령만 들어 있습니다.</a:t>
+            </a:r>
+          </a:p>
+        </p:txBody>
+      </p:sp>
+      <p:sp>
+        <p:nvSpPr>
+          <p:cNvPr id="10" name="TextBox 9"/>
+          <p:cNvSpPr txBox="1"/>
+          <p:nvPr/>
+        </p:nvSpPr>
+        <p:spPr>
+          <a:xfrm>
+            <a:off x="676656" y="3017520"/>
+            <a:ext cx="5138928" cy="256032"/>
+          </a:xfrm>
+          <a:prstGeom prst="rect">
+            <a:avLst/>
+          </a:prstGeom>
+          <a:noFill/>
+        </p:spPr>
+        <p:txBody>
+          <a:bodyPr wrap="square" lIns="73152" rIns="73152" tIns="36576" bIns="36576">
+            <a:spAutoFit/>
+          </a:bodyPr>
+          <a:lstStyle/>
+          <a:p>
+            <a:pPr algn="ctr">
+              <a:spcAft>
+                <a:spcPts val="0"/>
+              </a:spcAft>
+              <a:defRPr sz="1600" b="1">
+                <a:solidFill>
+                  <a:srgbClr val="225B9B"/>
+                </a:solidFill>
+                <a:latin typeface="Noto Sans CJK KR"/>
+              </a:defRPr>
+            </a:pPr>
+            <a:r>
+              <a:t>터미널 1 — 명령만 복사</a:t>
+            </a:r>
+          </a:p>
+        </p:txBody>
+      </p:sp>
+      <p:sp>
+        <p:nvSpPr>
+          <p:cNvPr id="11" name="Rounded Rectangle 10"/>
           <p:cNvSpPr/>
           <p:nvPr/>
         </p:nvSpPr>
         <p:spPr>
           <a:xfrm>
-            <a:off x="658368" y="1700784"/>
-            <a:ext cx="10972800" cy="3182112"/>
+            <a:off x="676656" y="3328416"/>
+            <a:ext cx="5138928" cy="1700784"/>
           </a:xfrm>
           <a:prstGeom prst="roundRect">
             <a:avLst/>
@@ -42231,14 +46763,14 @@
           </a:fontRef>
         </p:style>
         <p:txBody>
-          <a:bodyPr rtlCol="0" anchor="ctr" wrap="square" lIns="73152" rIns="73152" tIns="36576" bIns="36576"/>
-          <a:lstStyle/>
-          <a:p>
-            <a:pPr algn="l">
-              <a:spcAft>
-                <a:spcPts val="0"/>
-              </a:spcAft>
-              <a:defRPr sz="1600" b="0">
+          <a:bodyPr rtlCol="0" anchor="ctr" wrap="square" lIns="109728" rIns="109728" tIns="73152" bIns="73152"/>
+          <a:lstStyle/>
+          <a:p>
+            <a:pPr algn="l">
+              <a:spcAft>
+                <a:spcPts val="0"/>
+              </a:spcAft>
+              <a:defRPr sz="1400" b="0">
                 <a:solidFill>
                   <a:srgbClr val="FFFFFF"/>
                 </a:solidFill>
@@ -42246,42 +46778,70 @@
               </a:defRPr>
             </a:pPr>
             <a:r>
+              <a:t>source /opt/ros/jazzy/setup.bash</a:t>
+            </a:r>
+          </a:p>
+          <a:p>
+            <a:pPr algn="l">
+              <a:spcAft>
+                <a:spcPts val="0"/>
+              </a:spcAft>
+              <a:defRPr sz="1400" b="0">
+                <a:solidFill>
+                  <a:srgbClr val="FFFFFF"/>
+                </a:solidFill>
+                <a:latin typeface="DejaVu Sans Mono"/>
+              </a:defRPr>
+            </a:pPr>
+            <a:r>
+              <a:t>source ~/ros2_curri/my_agv_ws/install/setup.bash</a:t>
+            </a:r>
+          </a:p>
+          <a:p>
+            <a:pPr algn="l">
+              <a:spcAft>
+                <a:spcPts val="0"/>
+              </a:spcAft>
+              <a:defRPr sz="1400" b="0">
+                <a:solidFill>
+                  <a:srgbClr val="FFFFFF"/>
+                </a:solidFill>
+                <a:latin typeface="DejaVu Sans Mono"/>
+              </a:defRPr>
+            </a:pPr>
+            <a:r>
               <a:t>ros2 launch agv_gazebo gazebo.launch.py</a:t>
             </a:r>
-            <a:br/>
-            <a:r>
-              <a:t># 새 터미널: ros2 run agv_control cmd_test_node</a:t>
-            </a:r>
-          </a:p>
-        </p:txBody>
-      </p:sp>
-      <p:sp>
-        <p:nvSpPr>
-          <p:cNvPr id="8" name="TextBox 7"/>
-          <p:cNvSpPr txBox="1"/>
-          <p:nvPr/>
-        </p:nvSpPr>
-        <p:spPr>
-          <a:xfrm>
-            <a:off x="786384" y="5239512"/>
-            <a:ext cx="1261872" cy="237744"/>
-          </a:xfrm>
-          <a:prstGeom prst="rect">
-            <a:avLst/>
-          </a:prstGeom>
-          <a:noFill/>
-        </p:spPr>
-        <p:txBody>
-          <a:bodyPr wrap="square" lIns="73152" rIns="73152" tIns="36576" bIns="36576">
-            <a:spAutoFit/>
-          </a:bodyPr>
-          <a:lstStyle/>
-          <a:p>
-            <a:pPr algn="l">
-              <a:spcAft>
-                <a:spcPts val="0"/>
-              </a:spcAft>
-              <a:defRPr sz="1800" b="1">
+          </a:p>
+        </p:txBody>
+      </p:sp>
+      <p:sp>
+        <p:nvSpPr>
+          <p:cNvPr id="12" name="TextBox 11"/>
+          <p:cNvSpPr txBox="1"/>
+          <p:nvPr/>
+        </p:nvSpPr>
+        <p:spPr>
+          <a:xfrm>
+            <a:off x="749808" y="5166360"/>
+            <a:ext cx="4992624" cy="438912"/>
+          </a:xfrm>
+          <a:prstGeom prst="rect">
+            <a:avLst/>
+          </a:prstGeom>
+          <a:noFill/>
+        </p:spPr>
+        <p:txBody>
+          <a:bodyPr wrap="square" lIns="73152" rIns="73152" tIns="36576" bIns="36576">
+            <a:spAutoFit/>
+          </a:bodyPr>
+          <a:lstStyle/>
+          <a:p>
+            <a:pPr algn="ctr">
+              <a:spcAft>
+                <a:spcPts val="0"/>
+              </a:spcAft>
+              <a:defRPr sz="1300" b="1">
                 <a:solidFill>
                   <a:srgbClr val="2A8B5A"/>
                 </a:solidFill>
@@ -42289,38 +46849,206 @@
               </a:defRPr>
             </a:pPr>
             <a:r>
-              <a:t>확인 기준</a:t>
-            </a:r>
-          </a:p>
-        </p:txBody>
-      </p:sp>
-      <p:sp>
-        <p:nvSpPr>
-          <p:cNvPr id="9" name="TextBox 8"/>
-          <p:cNvSpPr txBox="1"/>
-          <p:nvPr/>
-        </p:nvSpPr>
-        <p:spPr>
-          <a:xfrm>
-            <a:off x="786384" y="5532120"/>
-            <a:ext cx="10469880" cy="420624"/>
-          </a:xfrm>
-          <a:prstGeom prst="rect">
-            <a:avLst/>
-          </a:prstGeom>
-          <a:noFill/>
-        </p:spPr>
-        <p:txBody>
-          <a:bodyPr wrap="square" lIns="73152" rIns="73152" tIns="36576" bIns="36576">
-            <a:spAutoFit/>
-          </a:bodyPr>
-          <a:lstStyle/>
-          <a:p>
-            <a:pPr algn="l">
-              <a:spcAft>
-                <a:spcPts val="0"/>
-              </a:spcAft>
-              <a:defRPr sz="1800" b="0">
+              <a:t>터미널 1 역할: 시뮬레이터·bridge·node를 먼저 시작한 뒤 이 창은 종료하지 않고 둡니다.</a:t>
+            </a:r>
+          </a:p>
+        </p:txBody>
+      </p:sp>
+      <p:sp>
+        <p:nvSpPr>
+          <p:cNvPr id="13" name="TextBox 12"/>
+          <p:cNvSpPr txBox="1"/>
+          <p:nvPr/>
+        </p:nvSpPr>
+        <p:spPr>
+          <a:xfrm>
+            <a:off x="6190488" y="3017520"/>
+            <a:ext cx="5138928" cy="256032"/>
+          </a:xfrm>
+          <a:prstGeom prst="rect">
+            <a:avLst/>
+          </a:prstGeom>
+          <a:noFill/>
+        </p:spPr>
+        <p:txBody>
+          <a:bodyPr wrap="square" lIns="73152" rIns="73152" tIns="36576" bIns="36576">
+            <a:spAutoFit/>
+          </a:bodyPr>
+          <a:lstStyle/>
+          <a:p>
+            <a:pPr algn="ctr">
+              <a:spcAft>
+                <a:spcPts val="0"/>
+              </a:spcAft>
+              <a:defRPr sz="1600" b="1">
+                <a:solidFill>
+                  <a:srgbClr val="225B9B"/>
+                </a:solidFill>
+                <a:latin typeface="Noto Sans CJK KR"/>
+              </a:defRPr>
+            </a:pPr>
+            <a:r>
+              <a:t>터미널 2 — 명령만 복사</a:t>
+            </a:r>
+          </a:p>
+        </p:txBody>
+      </p:sp>
+      <p:sp>
+        <p:nvSpPr>
+          <p:cNvPr id="14" name="Rounded Rectangle 13"/>
+          <p:cNvSpPr/>
+          <p:nvPr/>
+        </p:nvSpPr>
+        <p:spPr>
+          <a:xfrm>
+            <a:off x="6190488" y="3328416"/>
+            <a:ext cx="5138928" cy="1700784"/>
+          </a:xfrm>
+          <a:prstGeom prst="roundRect">
+            <a:avLst/>
+          </a:prstGeom>
+          <a:solidFill>
+            <a:srgbClr val="1D232D"/>
+          </a:solidFill>
+          <a:ln>
+            <a:solidFill>
+              <a:srgbClr val="1D232D"/>
+            </a:solidFill>
+          </a:ln>
+        </p:spPr>
+        <p:style>
+          <a:lnRef idx="1">
+            <a:schemeClr val="accent1"/>
+          </a:lnRef>
+          <a:fillRef idx="3">
+            <a:schemeClr val="accent1"/>
+          </a:fillRef>
+          <a:effectRef idx="2">
+            <a:schemeClr val="accent1"/>
+          </a:effectRef>
+          <a:fontRef idx="minor">
+            <a:schemeClr val="lt1"/>
+          </a:fontRef>
+        </p:style>
+        <p:txBody>
+          <a:bodyPr rtlCol="0" anchor="ctr" wrap="square" lIns="109728" rIns="109728" tIns="73152" bIns="73152"/>
+          <a:lstStyle/>
+          <a:p>
+            <a:pPr algn="l">
+              <a:spcAft>
+                <a:spcPts val="0"/>
+              </a:spcAft>
+              <a:defRPr sz="1400" b="0">
+                <a:solidFill>
+                  <a:srgbClr val="FFFFFF"/>
+                </a:solidFill>
+                <a:latin typeface="DejaVu Sans Mono"/>
+              </a:defRPr>
+            </a:pPr>
+            <a:r>
+              <a:t>source /opt/ros/jazzy/setup.bash</a:t>
+            </a:r>
+          </a:p>
+          <a:p>
+            <a:pPr algn="l">
+              <a:spcAft>
+                <a:spcPts val="0"/>
+              </a:spcAft>
+              <a:defRPr sz="1400" b="0">
+                <a:solidFill>
+                  <a:srgbClr val="FFFFFF"/>
+                </a:solidFill>
+                <a:latin typeface="DejaVu Sans Mono"/>
+              </a:defRPr>
+            </a:pPr>
+            <a:r>
+              <a:t>source ~/ros2_curri/my_agv_ws/install/setup.bash</a:t>
+            </a:r>
+          </a:p>
+          <a:p>
+            <a:pPr algn="l">
+              <a:spcAft>
+                <a:spcPts val="0"/>
+              </a:spcAft>
+              <a:defRPr sz="1400" b="0">
+                <a:solidFill>
+                  <a:srgbClr val="FFFFFF"/>
+                </a:solidFill>
+                <a:latin typeface="DejaVu Sans Mono"/>
+              </a:defRPr>
+            </a:pPr>
+            <a:r>
+              <a:t>ros2 run agv_control cmd_test_node</a:t>
+            </a:r>
+          </a:p>
+        </p:txBody>
+      </p:sp>
+      <p:sp>
+        <p:nvSpPr>
+          <p:cNvPr id="15" name="TextBox 14"/>
+          <p:cNvSpPr txBox="1"/>
+          <p:nvPr/>
+        </p:nvSpPr>
+        <p:spPr>
+          <a:xfrm>
+            <a:off x="6263640" y="5166360"/>
+            <a:ext cx="4992624" cy="438912"/>
+          </a:xfrm>
+          <a:prstGeom prst="rect">
+            <a:avLst/>
+          </a:prstGeom>
+          <a:noFill/>
+        </p:spPr>
+        <p:txBody>
+          <a:bodyPr wrap="square" lIns="73152" rIns="73152" tIns="36576" bIns="36576">
+            <a:spAutoFit/>
+          </a:bodyPr>
+          <a:lstStyle/>
+          <a:p>
+            <a:pPr algn="ctr">
+              <a:spcAft>
+                <a:spcPts val="0"/>
+              </a:spcAft>
+              <a:defRPr sz="1300" b="1">
+                <a:solidFill>
+                  <a:srgbClr val="2A8B5A"/>
+                </a:solidFill>
+                <a:latin typeface="Noto Sans CJK KR"/>
+              </a:defRPr>
+            </a:pPr>
+            <a:r>
+              <a:t>터미널 2 역할: 이 node를 실행합니다. 출력이 계속 나오는 동안 Ctrl+C로 종료하지 않습니다.</a:t>
+            </a:r>
+          </a:p>
+        </p:txBody>
+      </p:sp>
+      <p:sp>
+        <p:nvSpPr>
+          <p:cNvPr id="16" name="TextBox 15"/>
+          <p:cNvSpPr txBox="1"/>
+          <p:nvPr/>
+        </p:nvSpPr>
+        <p:spPr>
+          <a:xfrm>
+            <a:off x="768096" y="5916168"/>
+            <a:ext cx="10561320" cy="292608"/>
+          </a:xfrm>
+          <a:prstGeom prst="rect">
+            <a:avLst/>
+          </a:prstGeom>
+          <a:noFill/>
+        </p:spPr>
+        <p:txBody>
+          <a:bodyPr wrap="square" lIns="73152" rIns="73152" tIns="36576" bIns="36576">
+            <a:spAutoFit/>
+          </a:bodyPr>
+          <a:lstStyle/>
+          <a:p>
+            <a:pPr algn="ctr">
+              <a:spcAft>
+                <a:spcPts val="0"/>
+              </a:spcAft>
+              <a:defRPr sz="1500" b="1">
                 <a:solidFill>
                   <a:srgbClr val="122C4E"/>
                 </a:solidFill>
@@ -42328,7 +47056,7 @@
               </a:defRPr>
             </a:pPr>
             <a:r>
-              <a:t>/cmd_vel에서 odom과 바퀴 구동 topic으로 이어지는 경로를 확인한다.</a:t>
+              <a:t>확인: /cmd_vel에서 odom과 바퀴 구동 topic으로 이어지는 경로를 확인한다.</a:t>
             </a:r>
           </a:p>
         </p:txBody>
@@ -42424,7 +47152,7 @@
               </a:defRPr>
             </a:pPr>
             <a:r>
-              <a:t>실제 ROS 2 환경의 파일·패키지·구성 검증 로그</a:t>
+              <a:t>실제 Gazebo Sim: Differential Drive의 대상이 되는 AGV 모델·바퀴·World</a:t>
             </a:r>
           </a:p>
         </p:txBody>
@@ -42509,7 +47237,7 @@
       </p:sp>
       <p:pic>
         <p:nvPicPr>
-          <p:cNvPr id="6" name="Picture 5" descr="validation_terminal.png"/>
+          <p:cNvPr id="6" name="Picture 5" descr="gazebo_agv_actual.png"/>
           <p:cNvPicPr>
             <a:picLocks noChangeAspect="1"/>
           </p:cNvPicPr>
@@ -42523,8 +47251,8 @@
         </p:blipFill>
         <p:spPr>
           <a:xfrm>
-            <a:off x="790956" y="1884338"/>
-            <a:ext cx="10607040" cy="3738546"/>
+            <a:off x="3385904" y="1353312"/>
+            <a:ext cx="5417142" cy="4800600"/>
           </a:xfrm>
           <a:prstGeom prst="rect">
             <a:avLst/>
@@ -42565,7 +47293,7 @@
               </a:defRPr>
             </a:pPr>
             <a:r>
-              <a:t>화면에서 확인: ① 명령/설정  ② 정상 출력 또는 화면  ③ 다음 검증 명령으로 재확인</a:t>
+              <a:t>화면에서 확인: 파란 base와 두 검은 바퀴를 먼저 찾고, 다음 명령에서 /cmd_vel이 이 model의 DiffDrive plugin으로 들어간다고 연결합니다.</a:t>
             </a:r>
           </a:p>
         </p:txBody>
@@ -42622,7 +47350,7 @@
               </a:defRPr>
             </a:pPr>
             <a:r>
-              <a:t>객관적 검증 명령으로 완료를 확인한다</a:t>
+              <a:t>정상 결과: 실제 환경에서 확인한 출력</a:t>
             </a:r>
           </a:p>
         </p:txBody>
@@ -42661,7 +47389,7 @@
               </a:defRPr>
             </a:pPr>
             <a:r>
-              <a:t>화면만 보지 말고 topic·frame·파일·parameter를 다시 확인합니다.</a:t>
+              <a:t>실제 ROS 2 환경의 파일·패키지·구성 검증 로그</a:t>
             </a:r>
           </a:p>
         </p:txBody>
@@ -42744,172 +47472,57 @@
           </a:p>
         </p:txBody>
       </p:sp>
-      <p:sp>
-        <p:nvSpPr>
-          <p:cNvPr id="6" name="Rectangle 5"/>
-          <p:cNvSpPr/>
-          <p:nvPr/>
-        </p:nvSpPr>
-        <p:spPr>
-          <a:xfrm>
-            <a:off x="566928" y="1188720"/>
-            <a:ext cx="11064240" cy="347472"/>
-          </a:xfrm>
-          <a:prstGeom prst="rect">
-            <a:avLst/>
-          </a:prstGeom>
-          <a:solidFill>
-            <a:srgbClr val="F4F7FB"/>
-          </a:solidFill>
-          <a:ln>
-            <a:solidFill>
-              <a:srgbClr val="F4F7FB"/>
-            </a:solidFill>
-          </a:ln>
-        </p:spPr>
-        <p:style>
-          <a:lnRef idx="1">
-            <a:schemeClr val="accent1"/>
-          </a:lnRef>
-          <a:fillRef idx="3">
-            <a:schemeClr val="accent1"/>
-          </a:fillRef>
-          <a:effectRef idx="2">
-            <a:schemeClr val="accent1"/>
-          </a:effectRef>
-          <a:fontRef idx="minor">
-            <a:schemeClr val="lt1"/>
-          </a:fontRef>
-        </p:style>
-        <p:txBody>
-          <a:bodyPr rtlCol="0" anchor="ctr" wrap="square" lIns="73152" rIns="73152" tIns="36576" bIns="36576"/>
-          <a:lstStyle/>
-          <a:p>
-            <a:pPr algn="l">
-              <a:spcAft>
-                <a:spcPts val="0"/>
-              </a:spcAft>
-              <a:defRPr sz="1300" b="1">
-                <a:solidFill>
-                  <a:srgbClr val="122C4E"/>
-                </a:solidFill>
-                <a:latin typeface="Noto Sans CJK KR"/>
-              </a:defRPr>
-            </a:pPr>
-            <a:r>
-              <a:t>현재 단계 검증    |    현재 폴더 ~/ros2_curri/my_agv_ws    |    현재 터미널</a:t>
-            </a:r>
-          </a:p>
-        </p:txBody>
-      </p:sp>
-      <p:sp>
-        <p:nvSpPr>
-          <p:cNvPr id="7" name="Rounded Rectangle 6"/>
-          <p:cNvSpPr/>
-          <p:nvPr/>
-        </p:nvSpPr>
-        <p:spPr>
-          <a:xfrm>
-            <a:off x="658368" y="1755648"/>
-            <a:ext cx="10972800" cy="2148840"/>
-          </a:xfrm>
-          <a:prstGeom prst="roundRect">
-            <a:avLst/>
-          </a:prstGeom>
-          <a:solidFill>
-            <a:srgbClr val="1D232D"/>
-          </a:solidFill>
-          <a:ln>
-            <a:solidFill>
-              <a:srgbClr val="1D232D"/>
-            </a:solidFill>
-          </a:ln>
-        </p:spPr>
-        <p:style>
-          <a:lnRef idx="1">
-            <a:schemeClr val="accent1"/>
-          </a:lnRef>
-          <a:fillRef idx="3">
-            <a:schemeClr val="accent1"/>
-          </a:fillRef>
-          <a:effectRef idx="2">
-            <a:schemeClr val="accent1"/>
-          </a:effectRef>
-          <a:fontRef idx="minor">
-            <a:schemeClr val="lt1"/>
-          </a:fontRef>
-        </p:style>
-        <p:txBody>
-          <a:bodyPr rtlCol="0" anchor="ctr" wrap="square" lIns="73152" rIns="73152" tIns="36576" bIns="36576"/>
-          <a:lstStyle/>
-          <a:p>
-            <a:pPr algn="l">
-              <a:spcAft>
-                <a:spcPts val="0"/>
-              </a:spcAft>
-              <a:defRPr sz="1600" b="0">
-                <a:solidFill>
-                  <a:srgbClr val="FFFFFF"/>
-                </a:solidFill>
-                <a:latin typeface="DejaVu Sans Mono"/>
-              </a:defRPr>
-            </a:pPr>
-            <a:r>
-              <a:t>ros2 topic info /cmd_vel</a:t>
-            </a:r>
-            <a:br/>
-            <a:r>
-              <a:t>ros2 topic echo /odom --once</a:t>
-            </a:r>
-          </a:p>
-        </p:txBody>
-      </p:sp>
-      <p:sp>
-        <p:nvSpPr>
-          <p:cNvPr id="8" name="Rounded Rectangle 7"/>
-          <p:cNvSpPr/>
-          <p:nvPr/>
-        </p:nvSpPr>
-        <p:spPr>
-          <a:xfrm>
-            <a:off x="658368" y="4206240"/>
-            <a:ext cx="10972800" cy="1554480"/>
-          </a:xfrm>
-          <a:prstGeom prst="roundRect">
-            <a:avLst/>
-          </a:prstGeom>
-          <a:solidFill>
-            <a:srgbClr val="F4F7FB"/>
-          </a:solidFill>
-          <a:ln>
-            <a:solidFill>
-              <a:srgbClr val="D1DFD5"/>
-            </a:solidFill>
-          </a:ln>
-        </p:spPr>
-        <p:style>
-          <a:lnRef idx="1">
-            <a:schemeClr val="accent1"/>
-          </a:lnRef>
-          <a:fillRef idx="3">
-            <a:schemeClr val="accent1"/>
-          </a:fillRef>
-          <a:effectRef idx="2">
-            <a:schemeClr val="accent1"/>
-          </a:effectRef>
-          <a:fontRef idx="minor">
-            <a:schemeClr val="lt1"/>
-          </a:fontRef>
-        </p:style>
-        <p:txBody>
-          <a:bodyPr rtlCol="0" anchor="ctr" wrap="square" lIns="73152" rIns="73152" tIns="36576" bIns="36576"/>
-          <a:lstStyle/>
-          <a:p>
-            <a:pPr algn="l">
-              <a:spcAft>
-                <a:spcPts val="0"/>
-              </a:spcAft>
-              <a:defRPr sz="1800" b="1">
+      <p:pic>
+        <p:nvPicPr>
+          <p:cNvPr id="6" name="Picture 5" descr="validation_terminal.png"/>
+          <p:cNvPicPr>
+            <a:picLocks noChangeAspect="1"/>
+          </p:cNvPicPr>
+          <p:nvPr/>
+        </p:nvPicPr>
+        <p:blipFill>
+          <a:blip r:embed="rId2"/>
+          <a:stretch>
+            <a:fillRect/>
+          </a:stretch>
+        </p:blipFill>
+        <p:spPr>
+          <a:xfrm>
+            <a:off x="790956" y="1884338"/>
+            <a:ext cx="10607040" cy="3738546"/>
+          </a:xfrm>
+          <a:prstGeom prst="rect">
+            <a:avLst/>
+          </a:prstGeom>
+        </p:spPr>
+      </p:pic>
+      <p:sp>
+        <p:nvSpPr>
+          <p:cNvPr id="7" name="TextBox 6"/>
+          <p:cNvSpPr txBox="1"/>
+          <p:nvPr/>
+        </p:nvSpPr>
+        <p:spPr>
+          <a:xfrm>
+            <a:off x="777240" y="6144768"/>
+            <a:ext cx="10607040" cy="310896"/>
+          </a:xfrm>
+          <a:prstGeom prst="rect">
+            <a:avLst/>
+          </a:prstGeom>
+          <a:noFill/>
+        </p:spPr>
+        <p:txBody>
+          <a:bodyPr wrap="square" lIns="73152" rIns="73152" tIns="36576" bIns="36576">
+            <a:spAutoFit/>
+          </a:bodyPr>
+          <a:lstStyle/>
+          <a:p>
+            <a:pPr algn="ctr">
+              <a:spcAft>
+                <a:spcPts val="0"/>
+              </a:spcAft>
+              <a:defRPr sz="1100" b="1">
                 <a:solidFill>
                   <a:srgbClr val="2A8B5A"/>
                 </a:solidFill>
@@ -42917,58 +47530,7 @@
               </a:defRPr>
             </a:pPr>
             <a:r>
-              <a:t>완료 체크</a:t>
-            </a:r>
-            <a:br/>
-            <a:r>
-              <a:t>□ 명령이 오류 없이 실행된다.</a:t>
-            </a:r>
-            <a:br/>
-            <a:r>
-              <a:t>□ 기대한 파일·topic·frame·parameter 이름이 보인다.</a:t>
-            </a:r>
-            <a:br/>
-            <a:r>
-              <a:t>□ 값의 단위와 방향을 한 문장으로 설명할 수 있다.</a:t>
-            </a:r>
-          </a:p>
-        </p:txBody>
-      </p:sp>
-      <p:sp>
-        <p:nvSpPr>
-          <p:cNvPr id="9" name="TextBox 8"/>
-          <p:cNvSpPr txBox="1"/>
-          <p:nvPr/>
-        </p:nvSpPr>
-        <p:spPr>
-          <a:xfrm>
-            <a:off x="731520" y="5989320"/>
-            <a:ext cx="10789920" cy="237744"/>
-          </a:xfrm>
-          <a:prstGeom prst="rect">
-            <a:avLst/>
-          </a:prstGeom>
-          <a:noFill/>
-        </p:spPr>
-        <p:txBody>
-          <a:bodyPr wrap="square" lIns="73152" rIns="73152" tIns="36576" bIns="36576">
-            <a:spAutoFit/>
-          </a:bodyPr>
-          <a:lstStyle/>
-          <a:p>
-            <a:pPr algn="l">
-              <a:spcAft>
-                <a:spcPts val="0"/>
-              </a:spcAft>
-              <a:defRPr sz="1500" b="1">
-                <a:solidFill>
-                  <a:srgbClr val="122C4E"/>
-                </a:solidFill>
-                <a:latin typeface="Noto Sans CJK KR"/>
-              </a:defRPr>
-            </a:pPr>
-            <a:r>
-              <a:t>완료 조건: /cmd_vel에서 odom과 바퀴 구동 topic으로 이어지는 경로를 확인한다.</a:t>
+              <a:t>화면에서 확인: ① 명령/설정  ② 정상 출력 또는 화면  ③ 다음 검증 명령으로 재확인</a:t>
             </a:r>
           </a:p>
         </p:txBody>
@@ -43025,7 +47587,7 @@
               </a:defRPr>
             </a:pPr>
             <a:r>
-              <a:t>막히면: 증상 → 우선 확인 → 재검증</a:t>
+              <a:t>객관적 검증 명령으로 완료를 확인한다</a:t>
             </a:r>
           </a:p>
         </p:txBody>
@@ -43064,7 +47626,7 @@
               </a:defRPr>
             </a:pPr>
             <a:r>
-              <a:t>오류 메시지를 숨기지 않고 같은 순서로 점검합니다.</a:t>
+              <a:t>화면만 보지 말고 topic·frame·파일·parameter를 다시 확인합니다.</a:t>
             </a:r>
           </a:p>
         </p:txBody>
@@ -43200,7 +47762,7 @@
               </a:defRPr>
             </a:pPr>
             <a:r>
-              <a:t>현재 단계 오류 대응    |    현재 폴더 ~/ros2_curri/my_agv_ws    |    현재 터미널</a:t>
+              <a:t>현재 단계 검증    |    현재 폴더 ~/ros2_curri/my_agv_ws    |    현재 터미널</a:t>
             </a:r>
           </a:p>
         </p:txBody>
@@ -43213,18 +47775,18 @@
         </p:nvSpPr>
         <p:spPr>
           <a:xfrm>
-            <a:off x="694944" y="1755648"/>
-            <a:ext cx="10972800" cy="1115568"/>
+            <a:off x="658368" y="1755648"/>
+            <a:ext cx="10972800" cy="2148840"/>
           </a:xfrm>
           <a:prstGeom prst="roundRect">
             <a:avLst/>
           </a:prstGeom>
           <a:solidFill>
-            <a:srgbClr val="FFF7F4"/>
+            <a:srgbClr val="1D232D"/>
           </a:solidFill>
           <a:ln>
             <a:solidFill>
-              <a:srgbClr val="EDBEB4"/>
+              <a:srgbClr val="1D232D"/>
             </a:solidFill>
           </a:ln>
         </p:spPr>
@@ -43243,72 +47805,7 @@
           </a:fontRef>
         </p:style>
         <p:txBody>
-          <a:bodyPr rtlCol="0" anchor="ctr"/>
-          <a:lstStyle/>
-          <a:p>
-            <a:pPr algn="ctr"/>
-          </a:p>
-        </p:txBody>
-      </p:sp>
-      <p:sp>
-        <p:nvSpPr>
-          <p:cNvPr id="8" name="TextBox 7"/>
-          <p:cNvSpPr txBox="1"/>
-          <p:nvPr/>
-        </p:nvSpPr>
-        <p:spPr>
-          <a:xfrm>
-            <a:off x="896112" y="1901952"/>
-            <a:ext cx="2926080" cy="274320"/>
-          </a:xfrm>
-          <a:prstGeom prst="rect">
-            <a:avLst/>
-          </a:prstGeom>
-          <a:noFill/>
-        </p:spPr>
-        <p:txBody>
-          <a:bodyPr wrap="square" lIns="73152" rIns="73152" tIns="36576" bIns="36576">
-            <a:spAutoFit/>
-          </a:bodyPr>
-          <a:lstStyle/>
-          <a:p>
-            <a:pPr algn="l">
-              <a:spcAft>
-                <a:spcPts val="0"/>
-              </a:spcAft>
-              <a:defRPr sz="1800" b="1">
-                <a:solidFill>
-                  <a:srgbClr val="BE3B3B"/>
-                </a:solidFill>
-                <a:latin typeface="Noto Sans CJK KR"/>
-              </a:defRPr>
-            </a:pPr>
-            <a:r>
-              <a:t>증상 1: 바퀴는 도는데 이동 안 함</a:t>
-            </a:r>
-          </a:p>
-        </p:txBody>
-      </p:sp>
-      <p:sp>
-        <p:nvSpPr>
-          <p:cNvPr id="9" name="TextBox 8"/>
-          <p:cNvSpPr txBox="1"/>
-          <p:nvPr/>
-        </p:nvSpPr>
-        <p:spPr>
-          <a:xfrm>
-            <a:off x="3794760" y="1883664"/>
-            <a:ext cx="7543800" cy="621792"/>
-          </a:xfrm>
-          <a:prstGeom prst="rect">
-            <a:avLst/>
-          </a:prstGeom>
-          <a:noFill/>
-        </p:spPr>
-        <p:txBody>
-          <a:bodyPr wrap="square" lIns="73152" rIns="73152" tIns="36576" bIns="36576">
-            <a:spAutoFit/>
-          </a:bodyPr>
+          <a:bodyPr rtlCol="0" anchor="ctr" wrap="square" lIns="109728" rIns="109728" tIns="73152" bIns="73152"/>
           <a:lstStyle/>
           <a:p>
             <a:pPr algn="l">
@@ -43317,41 +47814,53 @@
               </a:spcAft>
               <a:defRPr sz="1600" b="0">
                 <a:solidFill>
-                  <a:srgbClr val="122C4E"/>
-                </a:solidFill>
-                <a:latin typeface="Noto Sans CJK KR"/>
-              </a:defRPr>
-            </a:pPr>
-            <a:r>
-              <a:t>우선 확인: joint axis·friction·contact·wheel radius를 확인한다.</a:t>
-            </a:r>
-            <a:br/>
-            <a:r>
-              <a:t>수정 후: ros2 topic info /cmd_vel</a:t>
-            </a:r>
-          </a:p>
-        </p:txBody>
-      </p:sp>
-      <p:sp>
-        <p:nvSpPr>
-          <p:cNvPr id="10" name="Rounded Rectangle 9"/>
+                  <a:srgbClr val="FFFFFF"/>
+                </a:solidFill>
+                <a:latin typeface="DejaVu Sans Mono"/>
+              </a:defRPr>
+            </a:pPr>
+            <a:r>
+              <a:t>ros2 topic info /cmd_vel</a:t>
+            </a:r>
+          </a:p>
+          <a:p>
+            <a:pPr algn="l">
+              <a:spcAft>
+                <a:spcPts val="0"/>
+              </a:spcAft>
+              <a:defRPr sz="1600" b="0">
+                <a:solidFill>
+                  <a:srgbClr val="FFFFFF"/>
+                </a:solidFill>
+                <a:latin typeface="DejaVu Sans Mono"/>
+              </a:defRPr>
+            </a:pPr>
+            <a:r>
+              <a:t>ros2 topic echo /odom --once</a:t>
+            </a:r>
+          </a:p>
+        </p:txBody>
+      </p:sp>
+      <p:sp>
+        <p:nvSpPr>
+          <p:cNvPr id="8" name="Rounded Rectangle 7"/>
           <p:cNvSpPr/>
           <p:nvPr/>
         </p:nvSpPr>
         <p:spPr>
           <a:xfrm>
-            <a:off x="694944" y="3172968"/>
-            <a:ext cx="10972800" cy="1115568"/>
+            <a:off x="658368" y="4206240"/>
+            <a:ext cx="10972800" cy="1554480"/>
           </a:xfrm>
           <a:prstGeom prst="roundRect">
             <a:avLst/>
           </a:prstGeom>
           <a:solidFill>
-            <a:srgbClr val="FFF7F4"/>
+            <a:srgbClr val="F4F7FB"/>
           </a:solidFill>
           <a:ln>
             <a:solidFill>
-              <a:srgbClr val="EDBEB4"/>
+              <a:srgbClr val="D1DFD5"/>
             </a:solidFill>
           </a:ln>
         </p:spPr>
@@ -43370,33 +47879,7 @@
           </a:fontRef>
         </p:style>
         <p:txBody>
-          <a:bodyPr rtlCol="0" anchor="ctr"/>
-          <a:lstStyle/>
-          <a:p>
-            <a:pPr algn="ctr"/>
-          </a:p>
-        </p:txBody>
-      </p:sp>
-      <p:sp>
-        <p:nvSpPr>
-          <p:cNvPr id="11" name="TextBox 10"/>
-          <p:cNvSpPr txBox="1"/>
-          <p:nvPr/>
-        </p:nvSpPr>
-        <p:spPr>
-          <a:xfrm>
-            <a:off x="896112" y="3319272"/>
-            <a:ext cx="2926080" cy="274320"/>
-          </a:xfrm>
-          <a:prstGeom prst="rect">
-            <a:avLst/>
-          </a:prstGeom>
-          <a:noFill/>
-        </p:spPr>
-        <p:txBody>
-          <a:bodyPr wrap="square" lIns="73152" rIns="73152" tIns="36576" bIns="36576">
-            <a:spAutoFit/>
-          </a:bodyPr>
+          <a:bodyPr rtlCol="0" anchor="ctr" wrap="square" lIns="73152" rIns="73152" tIns="36576" bIns="36576"/>
           <a:lstStyle/>
           <a:p>
             <a:pPr algn="l">
@@ -43405,44 +47888,56 @@
               </a:spcAft>
               <a:defRPr sz="1800" b="1">
                 <a:solidFill>
-                  <a:srgbClr val="BE3B3B"/>
-                </a:solidFill>
-                <a:latin typeface="Noto Sans CJK KR"/>
-              </a:defRPr>
-            </a:pPr>
-            <a:r>
-              <a:t>증상 2: 회전 방향이 반대</a:t>
-            </a:r>
-          </a:p>
-        </p:txBody>
-      </p:sp>
-      <p:sp>
-        <p:nvSpPr>
-          <p:cNvPr id="12" name="TextBox 11"/>
-          <p:cNvSpPr txBox="1"/>
-          <p:nvPr/>
-        </p:nvSpPr>
-        <p:spPr>
-          <a:xfrm>
-            <a:off x="3794760" y="3300984"/>
-            <a:ext cx="7543800" cy="621792"/>
-          </a:xfrm>
-          <a:prstGeom prst="rect">
-            <a:avLst/>
-          </a:prstGeom>
-          <a:noFill/>
-        </p:spPr>
-        <p:txBody>
-          <a:bodyPr wrap="square" lIns="73152" rIns="73152" tIns="36576" bIns="36576">
-            <a:spAutoFit/>
-          </a:bodyPr>
-          <a:lstStyle/>
-          <a:p>
-            <a:pPr algn="l">
-              <a:spcAft>
-                <a:spcPts val="0"/>
-              </a:spcAft>
-              <a:defRPr sz="1600" b="0">
+                  <a:srgbClr val="2A8B5A"/>
+                </a:solidFill>
+                <a:latin typeface="Noto Sans CJK KR"/>
+              </a:defRPr>
+            </a:pPr>
+            <a:r>
+              <a:t>완료 체크</a:t>
+            </a:r>
+            <a:br/>
+            <a:r>
+              <a:t>□ 명령이 오류 없이 실행된다.</a:t>
+            </a:r>
+            <a:br/>
+            <a:r>
+              <a:t>□ 기대한 파일·topic·frame·parameter 이름이 보인다.</a:t>
+            </a:r>
+            <a:br/>
+            <a:r>
+              <a:t>□ 값의 단위와 방향을 한 문장으로 설명할 수 있다.</a:t>
+            </a:r>
+          </a:p>
+        </p:txBody>
+      </p:sp>
+      <p:sp>
+        <p:nvSpPr>
+          <p:cNvPr id="9" name="TextBox 8"/>
+          <p:cNvSpPr txBox="1"/>
+          <p:nvPr/>
+        </p:nvSpPr>
+        <p:spPr>
+          <a:xfrm>
+            <a:off x="731520" y="5989320"/>
+            <a:ext cx="10789920" cy="237744"/>
+          </a:xfrm>
+          <a:prstGeom prst="rect">
+            <a:avLst/>
+          </a:prstGeom>
+          <a:noFill/>
+        </p:spPr>
+        <p:txBody>
+          <a:bodyPr wrap="square" lIns="73152" rIns="73152" tIns="36576" bIns="36576">
+            <a:spAutoFit/>
+          </a:bodyPr>
+          <a:lstStyle/>
+          <a:p>
+            <a:pPr algn="l">
+              <a:spcAft>
+                <a:spcPts val="0"/>
+              </a:spcAft>
+              <a:defRPr sz="1500" b="1">
                 <a:solidFill>
                   <a:srgbClr val="122C4E"/>
                 </a:solidFill>
@@ -43450,50 +47945,7 @@
               </a:defRPr>
             </a:pPr>
             <a:r>
-              <a:t>우선 확인: left/right joint와 angular.z 부호를 확인한다.</a:t>
-            </a:r>
-            <a:br/>
-            <a:r>
-              <a:t>수정 후: ros2 topic info /cmd_vel</a:t>
-            </a:r>
-          </a:p>
-        </p:txBody>
-      </p:sp>
-      <p:sp>
-        <p:nvSpPr>
-          <p:cNvPr id="13" name="TextBox 12"/>
-          <p:cNvSpPr txBox="1"/>
-          <p:nvPr/>
-        </p:nvSpPr>
-        <p:spPr>
-          <a:xfrm>
-            <a:off x="822960" y="5102352"/>
-            <a:ext cx="10607040" cy="402336"/>
-          </a:xfrm>
-          <a:prstGeom prst="rect">
-            <a:avLst/>
-          </a:prstGeom>
-          <a:noFill/>
-        </p:spPr>
-        <p:txBody>
-          <a:bodyPr wrap="square" lIns="73152" rIns="73152" tIns="36576" bIns="36576">
-            <a:spAutoFit/>
-          </a:bodyPr>
-          <a:lstStyle/>
-          <a:p>
-            <a:pPr algn="ctr">
-              <a:spcAft>
-                <a:spcPts val="0"/>
-              </a:spcAft>
-              <a:defRPr sz="1800" b="1">
-                <a:solidFill>
-                  <a:srgbClr val="DB7E22"/>
-                </a:solidFill>
-                <a:latin typeface="Noto Sans CJK KR"/>
-              </a:defRPr>
-            </a:pPr>
-            <a:r>
-              <a:t>공통 순서: ① 현재 폴더 ② source ③ 파일 경로 ④ 이름/타입/단위 ⑤ build·source 후 재실행</a:t>
+              <a:t>완료 조건: /cmd_vel에서 odom과 바퀴 구동 topic으로 이어지는 경로를 확인한다.</a:t>
             </a:r>
           </a:p>
         </p:txBody>
@@ -43550,7 +48002,7 @@
               </a:defRPr>
             </a:pPr>
             <a:r>
-              <a:t>막혔을 때만: Complete를 복구용으로 사용한다</a:t>
+              <a:t>막히면: 증상 → 우선 확인 → 재검증</a:t>
             </a:r>
           </a:p>
         </p:txBody>
@@ -43589,7 +48041,7 @@
               </a:defRPr>
             </a:pPr>
             <a:r>
-              <a:t>이 슬라이드가 먼저가 아닙니다. 직접 입력·실행을 시도한 뒤에만 내 파일과 Complete를 비교합니다.</a:t>
+              <a:t>오류 메시지를 숨기지 않고 같은 순서로 점검합니다.</a:t>
             </a:r>
           </a:p>
         </p:txBody>
@@ -43725,70 +48177,31 @@
               </a:defRPr>
             </a:pPr>
             <a:r>
-              <a:t>현재 단계 복구용 Complete    |    현재 폴더 ~/ros2_curri    |    현재 터미널</a:t>
-            </a:r>
-          </a:p>
-        </p:txBody>
-      </p:sp>
-      <p:sp>
-        <p:nvSpPr>
-          <p:cNvPr id="7" name="TextBox 6"/>
-          <p:cNvSpPr txBox="1"/>
-          <p:nvPr/>
-        </p:nvSpPr>
-        <p:spPr>
-          <a:xfrm>
-            <a:off x="713232" y="1664208"/>
-            <a:ext cx="10698480" cy="402336"/>
-          </a:xfrm>
-          <a:prstGeom prst="rect">
-            <a:avLst/>
-          </a:prstGeom>
-          <a:noFill/>
-        </p:spPr>
-        <p:txBody>
-          <a:bodyPr wrap="square" lIns="73152" rIns="73152" tIns="36576" bIns="36576">
-            <a:spAutoFit/>
-          </a:bodyPr>
-          <a:lstStyle/>
-          <a:p>
-            <a:pPr algn="ctr">
-              <a:spcAft>
-                <a:spcPts val="0"/>
-              </a:spcAft>
-              <a:defRPr sz="1800" b="1">
-                <a:solidFill>
-                  <a:srgbClr val="DB7E22"/>
-                </a:solidFill>
-                <a:latin typeface="Noto Sans CJK KR"/>
-              </a:defRPr>
-            </a:pPr>
-            <a:r>
-              <a:t>권장 순서: ① 내 오류를 확인  ② Complete와 diff  ③ 꼭 필요할 때만 backup 후 복사</a:t>
-            </a:r>
-          </a:p>
-        </p:txBody>
-      </p:sp>
-      <p:sp>
-        <p:nvSpPr>
-          <p:cNvPr id="8" name="Rounded Rectangle 7"/>
+              <a:t>현재 단계 오류 대응    |    현재 폴더 ~/ros2_curri/my_agv_ws    |    현재 터미널</a:t>
+            </a:r>
+          </a:p>
+        </p:txBody>
+      </p:sp>
+      <p:sp>
+        <p:nvSpPr>
+          <p:cNvPr id="7" name="Rounded Rectangle 6"/>
           <p:cNvSpPr/>
           <p:nvPr/>
         </p:nvSpPr>
         <p:spPr>
           <a:xfrm>
-            <a:off x="676656" y="2423160"/>
-            <a:ext cx="10881360" cy="2606040"/>
+            <a:off x="694944" y="1755648"/>
+            <a:ext cx="10972800" cy="1115568"/>
           </a:xfrm>
           <a:prstGeom prst="roundRect">
             <a:avLst/>
           </a:prstGeom>
           <a:solidFill>
-            <a:srgbClr val="1D232D"/>
+            <a:srgbClr val="FFF7F4"/>
           </a:solidFill>
           <a:ln>
             <a:solidFill>
-              <a:srgbClr val="1D232D"/>
+              <a:srgbClr val="EDBEB4"/>
             </a:solidFill>
           </a:ln>
         </p:spPr>
@@ -43807,52 +48220,232 @@
           </a:fontRef>
         </p:style>
         <p:txBody>
-          <a:bodyPr rtlCol="0" anchor="ctr" wrap="square" lIns="73152" rIns="73152" tIns="36576" bIns="36576"/>
-          <a:lstStyle/>
-          <a:p>
-            <a:pPr algn="l">
-              <a:spcAft>
-                <a:spcPts val="0"/>
-              </a:spcAft>
-              <a:defRPr sz="1400" b="0">
-                <a:solidFill>
-                  <a:srgbClr val="FFFFFF"/>
-                </a:solidFill>
-                <a:latin typeface="DejaVu Sans Mono"/>
-              </a:defRPr>
-            </a:pPr>
-            <a:r>
-              <a:t>cd ~/ros2_curri</a:t>
+          <a:bodyPr rtlCol="0" anchor="ctr"/>
+          <a:lstStyle/>
+          <a:p>
+            <a:pPr algn="ctr"/>
+          </a:p>
+        </p:txBody>
+      </p:sp>
+      <p:sp>
+        <p:nvSpPr>
+          <p:cNvPr id="8" name="TextBox 7"/>
+          <p:cNvSpPr txBox="1"/>
+          <p:nvPr/>
+        </p:nvSpPr>
+        <p:spPr>
+          <a:xfrm>
+            <a:off x="896112" y="1901952"/>
+            <a:ext cx="2926080" cy="274320"/>
+          </a:xfrm>
+          <a:prstGeom prst="rect">
+            <a:avLst/>
+          </a:prstGeom>
+          <a:noFill/>
+        </p:spPr>
+        <p:txBody>
+          <a:bodyPr wrap="square" lIns="73152" rIns="73152" tIns="36576" bIns="36576">
+            <a:spAutoFit/>
+          </a:bodyPr>
+          <a:lstStyle/>
+          <a:p>
+            <a:pPr algn="l">
+              <a:spcAft>
+                <a:spcPts val="0"/>
+              </a:spcAft>
+              <a:defRPr sz="1800" b="1">
+                <a:solidFill>
+                  <a:srgbClr val="BE3B3B"/>
+                </a:solidFill>
+                <a:latin typeface="Noto Sans CJK KR"/>
+              </a:defRPr>
+            </a:pPr>
+            <a:r>
+              <a:t>증상 1: 바퀴는 도는데 이동 안 함</a:t>
+            </a:r>
+          </a:p>
+        </p:txBody>
+      </p:sp>
+      <p:sp>
+        <p:nvSpPr>
+          <p:cNvPr id="9" name="TextBox 8"/>
+          <p:cNvSpPr txBox="1"/>
+          <p:nvPr/>
+        </p:nvSpPr>
+        <p:spPr>
+          <a:xfrm>
+            <a:off x="3794760" y="1883664"/>
+            <a:ext cx="7543800" cy="621792"/>
+          </a:xfrm>
+          <a:prstGeom prst="rect">
+            <a:avLst/>
+          </a:prstGeom>
+          <a:noFill/>
+        </p:spPr>
+        <p:txBody>
+          <a:bodyPr wrap="square" lIns="73152" rIns="73152" tIns="36576" bIns="36576">
+            <a:spAutoFit/>
+          </a:bodyPr>
+          <a:lstStyle/>
+          <a:p>
+            <a:pPr algn="l">
+              <a:spcAft>
+                <a:spcPts val="0"/>
+              </a:spcAft>
+              <a:defRPr sz="1600" b="0">
+                <a:solidFill>
+                  <a:srgbClr val="122C4E"/>
+                </a:solidFill>
+                <a:latin typeface="Noto Sans CJK KR"/>
+              </a:defRPr>
+            </a:pPr>
+            <a:r>
+              <a:t>우선 확인: joint axis·friction·contact·wheel radius를 확인한다.</a:t>
             </a:r>
             <a:br/>
             <a:r>
-              <a:t>diff -ru my_agv_ws/src blocks/C_drive_visualization/M09_differential_drive/complete/agv_ws/src || true</a:t>
+              <a:t>수정 후: ros2 topic info /cmd_vel</a:t>
+            </a:r>
+          </a:p>
+        </p:txBody>
+      </p:sp>
+      <p:sp>
+        <p:nvSpPr>
+          <p:cNvPr id="10" name="Rounded Rectangle 9"/>
+          <p:cNvSpPr/>
+          <p:nvPr/>
+        </p:nvSpPr>
+        <p:spPr>
+          <a:xfrm>
+            <a:off x="694944" y="3172968"/>
+            <a:ext cx="10972800" cy="1115568"/>
+          </a:xfrm>
+          <a:prstGeom prst="roundRect">
+            <a:avLst/>
+          </a:prstGeom>
+          <a:solidFill>
+            <a:srgbClr val="FFF7F4"/>
+          </a:solidFill>
+          <a:ln>
+            <a:solidFill>
+              <a:srgbClr val="EDBEB4"/>
+            </a:solidFill>
+          </a:ln>
+        </p:spPr>
+        <p:style>
+          <a:lnRef idx="1">
+            <a:schemeClr val="accent1"/>
+          </a:lnRef>
+          <a:fillRef idx="3">
+            <a:schemeClr val="accent1"/>
+          </a:fillRef>
+          <a:effectRef idx="2">
+            <a:schemeClr val="accent1"/>
+          </a:effectRef>
+          <a:fontRef idx="minor">
+            <a:schemeClr val="lt1"/>
+          </a:fontRef>
+        </p:style>
+        <p:txBody>
+          <a:bodyPr rtlCol="0" anchor="ctr"/>
+          <a:lstStyle/>
+          <a:p>
+            <a:pPr algn="ctr"/>
+          </a:p>
+        </p:txBody>
+      </p:sp>
+      <p:sp>
+        <p:nvSpPr>
+          <p:cNvPr id="11" name="TextBox 10"/>
+          <p:cNvSpPr txBox="1"/>
+          <p:nvPr/>
+        </p:nvSpPr>
+        <p:spPr>
+          <a:xfrm>
+            <a:off x="896112" y="3319272"/>
+            <a:ext cx="2926080" cy="274320"/>
+          </a:xfrm>
+          <a:prstGeom prst="rect">
+            <a:avLst/>
+          </a:prstGeom>
+          <a:noFill/>
+        </p:spPr>
+        <p:txBody>
+          <a:bodyPr wrap="square" lIns="73152" rIns="73152" tIns="36576" bIns="36576">
+            <a:spAutoFit/>
+          </a:bodyPr>
+          <a:lstStyle/>
+          <a:p>
+            <a:pPr algn="l">
+              <a:spcAft>
+                <a:spcPts val="0"/>
+              </a:spcAft>
+              <a:defRPr sz="1800" b="1">
+                <a:solidFill>
+                  <a:srgbClr val="BE3B3B"/>
+                </a:solidFill>
+                <a:latin typeface="Noto Sans CJK KR"/>
+              </a:defRPr>
+            </a:pPr>
+            <a:r>
+              <a:t>증상 2: 회전 방향이 반대</a:t>
+            </a:r>
+          </a:p>
+        </p:txBody>
+      </p:sp>
+      <p:sp>
+        <p:nvSpPr>
+          <p:cNvPr id="12" name="TextBox 11"/>
+          <p:cNvSpPr txBox="1"/>
+          <p:nvPr/>
+        </p:nvSpPr>
+        <p:spPr>
+          <a:xfrm>
+            <a:off x="3794760" y="3300984"/>
+            <a:ext cx="7543800" cy="621792"/>
+          </a:xfrm>
+          <a:prstGeom prst="rect">
+            <a:avLst/>
+          </a:prstGeom>
+          <a:noFill/>
+        </p:spPr>
+        <p:txBody>
+          <a:bodyPr wrap="square" lIns="73152" rIns="73152" tIns="36576" bIns="36576">
+            <a:spAutoFit/>
+          </a:bodyPr>
+          <a:lstStyle/>
+          <a:p>
+            <a:pPr algn="l">
+              <a:spcAft>
+                <a:spcPts val="0"/>
+              </a:spcAft>
+              <a:defRPr sz="1600" b="0">
+                <a:solidFill>
+                  <a:srgbClr val="122C4E"/>
+                </a:solidFill>
+                <a:latin typeface="Noto Sans CJK KR"/>
+              </a:defRPr>
+            </a:pPr>
+            <a:r>
+              <a:t>우선 확인: left/right joint와 angular.z 부호를 확인한다.</a:t>
             </a:r>
             <a:br/>
             <a:r>
-              <a:t>cp -a my_agv_ws/src my_agv_ws/src_before_M09</a:t>
-            </a:r>
-            <a:br/>
-            <a:r>
-              <a:t>cp -a blocks/C_drive_visualization/M09_differential_drive/complete/agv_ws/src/. my_agv_ws/src/</a:t>
-            </a:r>
-            <a:br/>
-            <a:r>
-              <a:t>cd my_agv_ws &amp;&amp; colcon build --symlink-install &amp;&amp; source install/setup.bash</a:t>
-            </a:r>
-          </a:p>
-        </p:txBody>
-      </p:sp>
-      <p:sp>
-        <p:nvSpPr>
-          <p:cNvPr id="9" name="TextBox 8"/>
-          <p:cNvSpPr txBox="1"/>
-          <p:nvPr/>
-        </p:nvSpPr>
-        <p:spPr>
-          <a:xfrm>
-            <a:off x="786384" y="5413248"/>
-            <a:ext cx="10424160" cy="429768"/>
+              <a:t>수정 후: ros2 topic info /cmd_vel</a:t>
+            </a:r>
+          </a:p>
+        </p:txBody>
+      </p:sp>
+      <p:sp>
+        <p:nvSpPr>
+          <p:cNvPr id="13" name="TextBox 12"/>
+          <p:cNvSpPr txBox="1"/>
+          <p:nvPr/>
+        </p:nvSpPr>
+        <p:spPr>
+          <a:xfrm>
+            <a:off x="822960" y="5102352"/>
+            <a:ext cx="10607040" cy="402336"/>
           </a:xfrm>
           <a:prstGeom prst="rect">
             <a:avLst/>
@@ -43869,15 +48462,15 @@
               <a:spcAft>
                 <a:spcPts val="0"/>
               </a:spcAft>
-              <a:defRPr sz="1700" b="1">
-                <a:solidFill>
-                  <a:srgbClr val="2A8B5A"/>
-                </a:solidFill>
-                <a:latin typeface="Noto Sans CJK KR"/>
-              </a:defRPr>
-            </a:pPr>
-            <a:r>
-              <a:t>복구 뒤에는 끝내지 말고, 내 파일과 Complete의 차이를 한 줄씩 설명한 뒤 다시 직접 입력해 봅니다.</a:t>
+              <a:defRPr sz="1800" b="1">
+                <a:solidFill>
+                  <a:srgbClr val="DB7E22"/>
+                </a:solidFill>
+                <a:latin typeface="Noto Sans CJK KR"/>
+              </a:defRPr>
+            </a:pPr>
+            <a:r>
+              <a:t>공통 순서: ① 현재 폴더 ② source ③ 파일 경로 ④ 이름/타입/단위 ⑤ build·source 후 재실행</a:t>
             </a:r>
           </a:p>
         </p:txBody>
@@ -43934,7 +48527,7 @@
               </a:defRPr>
             </a:pPr>
             <a:r>
-              <a:t>미니 실습: 값 하나를 바꾸고 결과를 비교한다</a:t>
+              <a:t>막혔을 때만: Complete를 복구용으로 사용한다</a:t>
             </a:r>
           </a:p>
         </p:txBody>
@@ -43973,7 +48566,7 @@
               </a:defRPr>
             </a:pPr>
             <a:r>
-              <a:t>정상 결과를 만든 뒤에는 한 번에 하나의 값만 바꿉니다.</a:t>
+              <a:t>이 슬라이드가 먼저가 아닙니다. 직접 입력·실행을 시도한 뒤에만 내 파일과 Complete를 비교합니다.</a:t>
             </a:r>
           </a:p>
         </p:txBody>
@@ -44109,31 +48702,70 @@
               </a:defRPr>
             </a:pPr>
             <a:r>
-              <a:t>현재 단계 미니 실습    |    현재 폴더 ~/ros2_curri/my_agv_ws    |    현재 터미널</a:t>
-            </a:r>
-          </a:p>
-        </p:txBody>
-      </p:sp>
-      <p:sp>
-        <p:nvSpPr>
-          <p:cNvPr id="7" name="Rounded Rectangle 6"/>
+              <a:t>현재 단계 복구용 Complete    |    현재 폴더 ~/ros2_curri    |    현재 터미널</a:t>
+            </a:r>
+          </a:p>
+        </p:txBody>
+      </p:sp>
+      <p:sp>
+        <p:nvSpPr>
+          <p:cNvPr id="7" name="TextBox 6"/>
+          <p:cNvSpPr txBox="1"/>
+          <p:nvPr/>
+        </p:nvSpPr>
+        <p:spPr>
+          <a:xfrm>
+            <a:off x="713232" y="1664208"/>
+            <a:ext cx="10698480" cy="402336"/>
+          </a:xfrm>
+          <a:prstGeom prst="rect">
+            <a:avLst/>
+          </a:prstGeom>
+          <a:noFill/>
+        </p:spPr>
+        <p:txBody>
+          <a:bodyPr wrap="square" lIns="73152" rIns="73152" tIns="36576" bIns="36576">
+            <a:spAutoFit/>
+          </a:bodyPr>
+          <a:lstStyle/>
+          <a:p>
+            <a:pPr algn="ctr">
+              <a:spcAft>
+                <a:spcPts val="0"/>
+              </a:spcAft>
+              <a:defRPr sz="1800" b="1">
+                <a:solidFill>
+                  <a:srgbClr val="DB7E22"/>
+                </a:solidFill>
+                <a:latin typeface="Noto Sans CJK KR"/>
+              </a:defRPr>
+            </a:pPr>
+            <a:r>
+              <a:t>권장 순서: ① 내 오류를 확인  ② Complete와 diff  ③ 꼭 필요할 때만 backup 후 복사</a:t>
+            </a:r>
+          </a:p>
+        </p:txBody>
+      </p:sp>
+      <p:sp>
+        <p:nvSpPr>
+          <p:cNvPr id="8" name="Rounded Rectangle 7"/>
           <p:cNvSpPr/>
           <p:nvPr/>
         </p:nvSpPr>
         <p:spPr>
           <a:xfrm>
-            <a:off x="749808" y="1874519"/>
-            <a:ext cx="10652760" cy="1993392"/>
+            <a:off x="676656" y="2423160"/>
+            <a:ext cx="10881360" cy="2606040"/>
           </a:xfrm>
           <a:prstGeom prst="roundRect">
             <a:avLst/>
           </a:prstGeom>
           <a:solidFill>
-            <a:srgbClr val="FFF8EB"/>
+            <a:srgbClr val="1D232D"/>
           </a:solidFill>
           <a:ln>
             <a:solidFill>
-              <a:srgbClr val="ECC680"/>
+              <a:srgbClr val="1D232D"/>
             </a:solidFill>
           </a:ln>
         </p:spPr>
@@ -44152,61 +48784,125 @@
           </a:fontRef>
         </p:style>
         <p:txBody>
-          <a:bodyPr rtlCol="0" anchor="ctr" wrap="square" lIns="73152" rIns="73152" tIns="36576" bIns="36576"/>
+          <a:bodyPr rtlCol="0" anchor="ctr" wrap="square" lIns="109728" rIns="109728" tIns="73152" bIns="73152"/>
+          <a:lstStyle/>
+          <a:p>
+            <a:pPr algn="l">
+              <a:spcAft>
+                <a:spcPts val="0"/>
+              </a:spcAft>
+              <a:defRPr sz="1400" b="0">
+                <a:solidFill>
+                  <a:srgbClr val="FFFFFF"/>
+                </a:solidFill>
+                <a:latin typeface="DejaVu Sans Mono"/>
+              </a:defRPr>
+            </a:pPr>
+            <a:r>
+              <a:t>cd ~/ros2_curri</a:t>
+            </a:r>
+          </a:p>
+          <a:p>
+            <a:pPr algn="l">
+              <a:spcAft>
+                <a:spcPts val="0"/>
+              </a:spcAft>
+              <a:defRPr sz="1400" b="0">
+                <a:solidFill>
+                  <a:srgbClr val="FFFFFF"/>
+                </a:solidFill>
+                <a:latin typeface="DejaVu Sans Mono"/>
+              </a:defRPr>
+            </a:pPr>
+            <a:r>
+              <a:t>diff -ru my_agv_ws/src blocks/C_drive_visualization/M09_differential_drive/complete/agv_ws/src || true</a:t>
+            </a:r>
+          </a:p>
+          <a:p>
+            <a:pPr algn="l">
+              <a:spcAft>
+                <a:spcPts val="0"/>
+              </a:spcAft>
+              <a:defRPr sz="1400" b="0">
+                <a:solidFill>
+                  <a:srgbClr val="FFFFFF"/>
+                </a:solidFill>
+                <a:latin typeface="DejaVu Sans Mono"/>
+              </a:defRPr>
+            </a:pPr>
+            <a:r>
+              <a:t>cp -a my_agv_ws/src my_agv_ws/src_before_M09</a:t>
+            </a:r>
+          </a:p>
+          <a:p>
+            <a:pPr algn="l">
+              <a:spcAft>
+                <a:spcPts val="0"/>
+              </a:spcAft>
+              <a:defRPr sz="1400" b="0">
+                <a:solidFill>
+                  <a:srgbClr val="FFFFFF"/>
+                </a:solidFill>
+                <a:latin typeface="DejaVu Sans Mono"/>
+              </a:defRPr>
+            </a:pPr>
+            <a:r>
+              <a:t>cp -a blocks/C_drive_visualization/M09_differential_drive/complete/agv_ws/src/. my_agv_ws/src/</a:t>
+            </a:r>
+          </a:p>
+          <a:p>
+            <a:pPr algn="l">
+              <a:spcAft>
+                <a:spcPts val="0"/>
+              </a:spcAft>
+              <a:defRPr sz="1400" b="0">
+                <a:solidFill>
+                  <a:srgbClr val="FFFFFF"/>
+                </a:solidFill>
+                <a:latin typeface="DejaVu Sans Mono"/>
+              </a:defRPr>
+            </a:pPr>
+            <a:r>
+              <a:t>cd my_agv_ws &amp;&amp; colcon build --symlink-install &amp;&amp; source install/setup.bash</a:t>
+            </a:r>
+          </a:p>
+        </p:txBody>
+      </p:sp>
+      <p:sp>
+        <p:nvSpPr>
+          <p:cNvPr id="9" name="TextBox 8"/>
+          <p:cNvSpPr txBox="1"/>
+          <p:nvPr/>
+        </p:nvSpPr>
+        <p:spPr>
+          <a:xfrm>
+            <a:off x="786384" y="5413248"/>
+            <a:ext cx="10424160" cy="429768"/>
+          </a:xfrm>
+          <a:prstGeom prst="rect">
+            <a:avLst/>
+          </a:prstGeom>
+          <a:noFill/>
+        </p:spPr>
+        <p:txBody>
+          <a:bodyPr wrap="square" lIns="73152" rIns="73152" tIns="36576" bIns="36576">
+            <a:spAutoFit/>
+          </a:bodyPr>
           <a:lstStyle/>
           <a:p>
             <a:pPr algn="ctr">
               <a:spcAft>
                 <a:spcPts val="0"/>
               </a:spcAft>
-              <a:defRPr sz="2300" b="1">
-                <a:solidFill>
-                  <a:srgbClr val="122C4E"/>
-                </a:solidFill>
-                <a:latin typeface="Noto Sans CJK KR"/>
-              </a:defRPr>
-            </a:pPr>
-            <a:r>
-              <a:t>0.15 m/s 직진, 0.4 rad/s 회전, 둘 다 비영 값인 곡선을 각각 2초씩 시험해 경로를 비교한다.</a:t>
-            </a:r>
-          </a:p>
-        </p:txBody>
-      </p:sp>
-      <p:sp>
-        <p:nvSpPr>
-          <p:cNvPr id="8" name="TextBox 7"/>
-          <p:cNvSpPr txBox="1"/>
-          <p:nvPr/>
-        </p:nvSpPr>
-        <p:spPr>
-          <a:xfrm>
-            <a:off x="877824" y="4590288"/>
-            <a:ext cx="10241280" cy="594360"/>
-          </a:xfrm>
-          <a:prstGeom prst="rect">
-            <a:avLst/>
-          </a:prstGeom>
-          <a:noFill/>
-        </p:spPr>
-        <p:txBody>
-          <a:bodyPr wrap="square" lIns="73152" rIns="73152" tIns="36576" bIns="36576">
-            <a:spAutoFit/>
-          </a:bodyPr>
-          <a:lstStyle/>
-          <a:p>
-            <a:pPr algn="ctr">
-              <a:spcAft>
-                <a:spcPts val="0"/>
-              </a:spcAft>
-              <a:defRPr sz="1900" b="1">
-                <a:solidFill>
-                  <a:srgbClr val="DB7E22"/>
-                </a:solidFill>
-                <a:latin typeface="Noto Sans CJK KR"/>
-              </a:defRPr>
-            </a:pPr>
-            <a:r>
-              <a:t>기록할 것: 바꾼 값(단위) · 기대한 변화 · 실제 출력/화면 · 원래 값으로 되돌린 결과</a:t>
+              <a:defRPr sz="1700" b="1">
+                <a:solidFill>
+                  <a:srgbClr val="2A8B5A"/>
+                </a:solidFill>
+                <a:latin typeface="Noto Sans CJK KR"/>
+              </a:defRPr>
+            </a:pPr>
+            <a:r>
+              <a:t>복구 뒤에는 끝내지 말고, 내 파일과 Complete의 차이를 한 줄씩 설명한 뒤 다시 직접 입력해 봅니다.</a:t>
             </a:r>
           </a:p>
         </p:txBody>
@@ -44821,7 +49517,7 @@
               </a:defRPr>
             </a:pPr>
             <a:r>
-              <a:t>내 프로젝트 체크포인트를 저장하고 다음 모듈로 넘긴다</a:t>
+              <a:t>미니 실습: 값 하나를 바꾸고 결과를 비교한다</a:t>
             </a:r>
           </a:p>
         </p:txBody>
@@ -44860,7 +49556,7 @@
               </a:defRPr>
             </a:pPr>
             <a:r>
-              <a:t>Complete는 복구용 비교 기준이고, 다음 단계는 내가 직접 만든 workspace에서 계속합니다.</a:t>
+              <a:t>정상 결과를 만든 뒤에는 한 번에 하나의 값만 바꿉니다.</a:t>
             </a:r>
           </a:p>
         </p:txBody>
@@ -44996,7 +49692,7 @@
               </a:defRPr>
             </a:pPr>
             <a:r>
-              <a:t>현재 단계 체크포인트    |    현재 폴더 ~/ros2_curri/my_agv_ws    |    현재 터미널</a:t>
+              <a:t>현재 단계 미니 실습    |    현재 폴더 ~/ros2_curri/my_agv_ws    |    현재 터미널</a:t>
             </a:r>
           </a:p>
         </p:txBody>
@@ -45009,18 +49705,18 @@
         </p:nvSpPr>
         <p:spPr>
           <a:xfrm>
-            <a:off x="685800" y="1737360"/>
-            <a:ext cx="10972800" cy="3611880"/>
+            <a:off x="749808" y="1874519"/>
+            <a:ext cx="10652760" cy="1993392"/>
           </a:xfrm>
           <a:prstGeom prst="roundRect">
             <a:avLst/>
           </a:prstGeom>
           <a:solidFill>
-            <a:srgbClr val="F4F7FB"/>
+            <a:srgbClr val="FFF8EB"/>
           </a:solidFill>
           <a:ln>
             <a:solidFill>
-              <a:srgbClr val="D2DCE8"/>
+              <a:srgbClr val="ECC680"/>
             </a:solidFill>
           </a:ln>
         </p:spPr>
@@ -45039,10 +49735,23 @@
           </a:fontRef>
         </p:style>
         <p:txBody>
-          <a:bodyPr rtlCol="0" anchor="ctr"/>
-          <a:lstStyle/>
-          <a:p>
-            <a:pPr algn="ctr"/>
+          <a:bodyPr rtlCol="0" anchor="ctr" wrap="square" lIns="73152" rIns="73152" tIns="36576" bIns="36576"/>
+          <a:lstStyle/>
+          <a:p>
+            <a:pPr algn="ctr">
+              <a:spcAft>
+                <a:spcPts val="0"/>
+              </a:spcAft>
+              <a:defRPr sz="2300" b="1">
+                <a:solidFill>
+                  <a:srgbClr val="122C4E"/>
+                </a:solidFill>
+                <a:latin typeface="Noto Sans CJK KR"/>
+              </a:defRPr>
+            </a:pPr>
+            <a:r>
+              <a:t>0.15 m/s 직진, 0.4 rad/s 회전, 둘 다 비영 값인 곡선을 각각 2초씩 시험해 경로를 비교한다.</a:t>
+            </a:r>
           </a:p>
         </p:txBody>
       </p:sp>
@@ -45054,111 +49763,8 @@
         </p:nvSpPr>
         <p:spPr>
           <a:xfrm>
-            <a:off x="896112" y="1993392"/>
-            <a:ext cx="10332720" cy="2971800"/>
-          </a:xfrm>
-          <a:prstGeom prst="rect">
-            <a:avLst/>
-          </a:prstGeom>
-          <a:noFill/>
-        </p:spPr>
-        <p:txBody>
-          <a:bodyPr wrap="square" lIns="109728" rIns="109728">
-            <a:spAutoFit/>
-          </a:bodyPr>
-          <a:lstStyle/>
-          <a:p>
-            <a:pPr>
-              <a:spcAft>
-                <a:spcPts val="800"/>
-              </a:spcAft>
-              <a:defRPr sz="1800">
-                <a:solidFill>
-                  <a:srgbClr val="122C4E"/>
-                </a:solidFill>
-                <a:latin typeface="Noto Sans CJK KR"/>
-              </a:defRPr>
-            </a:pPr>
-            <a:r>
-              <a:t>• □ 완료 화면: /cmd_vel에서 odom과 바퀴 구동 topic으로 이어지는 경로를 확인한다.</a:t>
-            </a:r>
-          </a:p>
-          <a:p>
-            <a:pPr>
-              <a:spcAft>
-                <a:spcPts val="800"/>
-              </a:spcAft>
-              <a:defRPr sz="1800">
-                <a:solidFill>
-                  <a:srgbClr val="122C4E"/>
-                </a:solidFill>
-                <a:latin typeface="Noto Sans CJK KR"/>
-              </a:defRPr>
-            </a:pPr>
-            <a:r>
-              <a:t>• □ 막혔을 때 비교할 Complete: blocks/C_drive_visualization/M09_differential_drive/complete/</a:t>
-            </a:r>
-          </a:p>
-          <a:p>
-            <a:pPr>
-              <a:spcAft>
-                <a:spcPts val="800"/>
-              </a:spcAft>
-              <a:defRPr sz="1800">
-                <a:solidFill>
-                  <a:srgbClr val="122C4E"/>
-                </a:solidFill>
-                <a:latin typeface="Noto Sans CJK KR"/>
-              </a:defRPr>
-            </a:pPr>
-            <a:r>
-              <a:t>• □ 정상 로그·캡처: logs/validation.log, screenshots/validation_terminal.png</a:t>
-            </a:r>
-          </a:p>
-          <a:p>
-            <a:pPr>
-              <a:spcAft>
-                <a:spcPts val="800"/>
-              </a:spcAft>
-              <a:defRPr sz="1800">
-                <a:solidFill>
-                  <a:srgbClr val="122C4E"/>
-                </a:solidFill>
-                <a:latin typeface="Noto Sans CJK KR"/>
-              </a:defRPr>
-            </a:pPr>
-            <a:r>
-              <a:t>• □ 버전 식별: CHECKSUM_or_TAG.txt의 SHA-256 manifest</a:t>
-            </a:r>
-          </a:p>
-          <a:p>
-            <a:pPr>
-              <a:spcAft>
-                <a:spcPts val="800"/>
-              </a:spcAft>
-              <a:defRPr sz="1800">
-                <a:solidFill>
-                  <a:srgbClr val="122C4E"/>
-                </a:solidFill>
-                <a:latin typeface="Noto Sans CJK KR"/>
-              </a:defRPr>
-            </a:pPr>
-            <a:r>
-              <a:t>• □ 다음 시작 조건: M10 ros_gz_bridge</a:t>
-            </a:r>
-          </a:p>
-        </p:txBody>
-      </p:sp>
-      <p:sp>
-        <p:nvSpPr>
-          <p:cNvPr id="9" name="TextBox 8"/>
-          <p:cNvSpPr txBox="1"/>
-          <p:nvPr/>
-        </p:nvSpPr>
-        <p:spPr>
-          <a:xfrm>
-            <a:off x="868680" y="5596128"/>
-            <a:ext cx="10515600" cy="338328"/>
+            <a:off x="877824" y="4590288"/>
+            <a:ext cx="10241280" cy="594360"/>
           </a:xfrm>
           <a:prstGeom prst="rect">
             <a:avLst/>
@@ -45175,15 +49781,15 @@
               <a:spcAft>
                 <a:spcPts val="0"/>
               </a:spcAft>
-              <a:defRPr sz="1700" b="1">
-                <a:solidFill>
-                  <a:srgbClr val="2A8B5A"/>
-                </a:solidFill>
-                <a:latin typeface="Noto Sans CJK KR"/>
-              </a:defRPr>
-            </a:pPr>
-            <a:r>
-              <a:t>다음 모듈을 시작하기 전, 내 src의 변경사항을 저장하고 현재 완료 조건을 다시 확인합니다.</a:t>
+              <a:defRPr sz="1900" b="1">
+                <a:solidFill>
+                  <a:srgbClr val="DB7E22"/>
+                </a:solidFill>
+                <a:latin typeface="Noto Sans CJK KR"/>
+              </a:defRPr>
+            </a:pPr>
+            <a:r>
+              <a:t>기록할 것: 바꾼 값(단위) · 기대한 변화 · 실제 출력/화면 · 원래 값으로 되돌린 결과</a:t>
             </a:r>
           </a:p>
         </p:txBody>
@@ -45197,6 +49803,425 @@
 </file>
 
 <file path=ppt/slides/slide71.xml><?xml version="1.0" encoding="utf-8"?>
+<p:sld xmlns:a="http://schemas.openxmlformats.org/drawingml/2006/main" xmlns:p="http://schemas.openxmlformats.org/presentationml/2006/main" xmlns:r="http://schemas.openxmlformats.org/officeDocument/2006/relationships">
+  <p:cSld>
+    <p:spTree>
+      <p:nvGrpSpPr>
+        <p:cNvPr id="1" name=""/>
+        <p:cNvGrpSpPr/>
+        <p:nvPr/>
+      </p:nvGrpSpPr>
+      <p:grpSpPr/>
+      <p:sp>
+        <p:nvSpPr>
+          <p:cNvPr id="2" name="TextBox 1"/>
+          <p:cNvSpPr txBox="1"/>
+          <p:nvPr/>
+        </p:nvSpPr>
+        <p:spPr>
+          <a:xfrm>
+            <a:off x="566928" y="347472"/>
+            <a:ext cx="10881360" cy="438912"/>
+          </a:xfrm>
+          <a:prstGeom prst="rect">
+            <a:avLst/>
+          </a:prstGeom>
+          <a:noFill/>
+        </p:spPr>
+        <p:txBody>
+          <a:bodyPr wrap="square" lIns="73152" rIns="73152" tIns="36576" bIns="36576">
+            <a:spAutoFit/>
+          </a:bodyPr>
+          <a:lstStyle/>
+          <a:p>
+            <a:pPr algn="l">
+              <a:spcAft>
+                <a:spcPts val="0"/>
+              </a:spcAft>
+              <a:defRPr sz="3200" b="1">
+                <a:solidFill>
+                  <a:srgbClr val="122C4E"/>
+                </a:solidFill>
+                <a:latin typeface="Noto Sans CJK KR"/>
+              </a:defRPr>
+            </a:pPr>
+            <a:r>
+              <a:t>내 프로젝트 체크포인트를 저장하고 다음 모듈로 넘긴다</a:t>
+            </a:r>
+          </a:p>
+        </p:txBody>
+      </p:sp>
+      <p:sp>
+        <p:nvSpPr>
+          <p:cNvPr id="3" name="TextBox 2"/>
+          <p:cNvSpPr txBox="1"/>
+          <p:nvPr/>
+        </p:nvSpPr>
+        <p:spPr>
+          <a:xfrm>
+            <a:off x="603504" y="859536"/>
+            <a:ext cx="10698480" cy="292608"/>
+          </a:xfrm>
+          <a:prstGeom prst="rect">
+            <a:avLst/>
+          </a:prstGeom>
+          <a:noFill/>
+        </p:spPr>
+        <p:txBody>
+          <a:bodyPr wrap="square" lIns="73152" rIns="73152" tIns="36576" bIns="36576">
+            <a:spAutoFit/>
+          </a:bodyPr>
+          <a:lstStyle/>
+          <a:p>
+            <a:pPr algn="l">
+              <a:spcAft>
+                <a:spcPts val="0"/>
+              </a:spcAft>
+              <a:defRPr sz="1700" b="0">
+                <a:solidFill>
+                  <a:srgbClr val="5C6672"/>
+                </a:solidFill>
+                <a:latin typeface="Noto Sans CJK KR"/>
+              </a:defRPr>
+            </a:pPr>
+            <a:r>
+              <a:t>Complete는 복구용 비교 기준이고, 다음 단계는 내가 직접 만든 workspace에서 계속합니다.</a:t>
+            </a:r>
+          </a:p>
+        </p:txBody>
+      </p:sp>
+      <p:sp>
+        <p:nvSpPr>
+          <p:cNvPr id="4" name="TextBox 3"/>
+          <p:cNvSpPr txBox="1"/>
+          <p:nvPr/>
+        </p:nvSpPr>
+        <p:spPr>
+          <a:xfrm>
+            <a:off x="530352" y="6510528"/>
+            <a:ext cx="7772400" cy="201168"/>
+          </a:xfrm>
+          <a:prstGeom prst="rect">
+            <a:avLst/>
+          </a:prstGeom>
+          <a:noFill/>
+        </p:spPr>
+        <p:txBody>
+          <a:bodyPr wrap="square" lIns="73152" rIns="73152" tIns="36576" bIns="36576">
+            <a:spAutoFit/>
+          </a:bodyPr>
+          <a:lstStyle/>
+          <a:p>
+            <a:pPr algn="l">
+              <a:spcAft>
+                <a:spcPts val="0"/>
+              </a:spcAft>
+              <a:defRPr sz="900" b="0">
+                <a:solidFill>
+                  <a:srgbClr val="5C6672"/>
+                </a:solidFill>
+                <a:latin typeface="Noto Sans CJK KR"/>
+              </a:defRPr>
+            </a:pPr>
+            <a:r>
+              <a:t>ROS 2 기반 AGV End-to-End 개발 커리큘럼 · M09 · Block C</a:t>
+            </a:r>
+          </a:p>
+        </p:txBody>
+      </p:sp>
+      <p:sp>
+        <p:nvSpPr>
+          <p:cNvPr id="5" name="TextBox 4"/>
+          <p:cNvSpPr txBox="1"/>
+          <p:nvPr/>
+        </p:nvSpPr>
+        <p:spPr>
+          <a:xfrm>
+            <a:off x="9144000" y="6510528"/>
+            <a:ext cx="2468880" cy="201168"/>
+          </a:xfrm>
+          <a:prstGeom prst="rect">
+            <a:avLst/>
+          </a:prstGeom>
+          <a:noFill/>
+        </p:spPr>
+        <p:txBody>
+          <a:bodyPr wrap="square" lIns="73152" rIns="73152" tIns="36576" bIns="36576">
+            <a:spAutoFit/>
+          </a:bodyPr>
+          <a:lstStyle/>
+          <a:p>
+            <a:pPr algn="r">
+              <a:spcAft>
+                <a:spcPts val="0"/>
+              </a:spcAft>
+              <a:defRPr sz="1000" b="0">
+                <a:solidFill>
+                  <a:srgbClr val="5C6672"/>
+                </a:solidFill>
+                <a:latin typeface="Noto Sans CJK KR"/>
+              </a:defRPr>
+            </a:pPr>
+            <a:r>
+              <a:t>명령·파일 경로는 슬라이드에서 복사 가능</a:t>
+            </a:r>
+          </a:p>
+        </p:txBody>
+      </p:sp>
+      <p:sp>
+        <p:nvSpPr>
+          <p:cNvPr id="6" name="Rectangle 5"/>
+          <p:cNvSpPr/>
+          <p:nvPr/>
+        </p:nvSpPr>
+        <p:spPr>
+          <a:xfrm>
+            <a:off x="566928" y="1188720"/>
+            <a:ext cx="11064240" cy="347472"/>
+          </a:xfrm>
+          <a:prstGeom prst="rect">
+            <a:avLst/>
+          </a:prstGeom>
+          <a:solidFill>
+            <a:srgbClr val="F4F7FB"/>
+          </a:solidFill>
+          <a:ln>
+            <a:solidFill>
+              <a:srgbClr val="F4F7FB"/>
+            </a:solidFill>
+          </a:ln>
+        </p:spPr>
+        <p:style>
+          <a:lnRef idx="1">
+            <a:schemeClr val="accent1"/>
+          </a:lnRef>
+          <a:fillRef idx="3">
+            <a:schemeClr val="accent1"/>
+          </a:fillRef>
+          <a:effectRef idx="2">
+            <a:schemeClr val="accent1"/>
+          </a:effectRef>
+          <a:fontRef idx="minor">
+            <a:schemeClr val="lt1"/>
+          </a:fontRef>
+        </p:style>
+        <p:txBody>
+          <a:bodyPr rtlCol="0" anchor="ctr" wrap="square" lIns="73152" rIns="73152" tIns="36576" bIns="36576"/>
+          <a:lstStyle/>
+          <a:p>
+            <a:pPr algn="l">
+              <a:spcAft>
+                <a:spcPts val="0"/>
+              </a:spcAft>
+              <a:defRPr sz="1300" b="1">
+                <a:solidFill>
+                  <a:srgbClr val="122C4E"/>
+                </a:solidFill>
+                <a:latin typeface="Noto Sans CJK KR"/>
+              </a:defRPr>
+            </a:pPr>
+            <a:r>
+              <a:t>현재 단계 체크포인트    |    현재 폴더 ~/ros2_curri/my_agv_ws    |    현재 터미널</a:t>
+            </a:r>
+          </a:p>
+        </p:txBody>
+      </p:sp>
+      <p:sp>
+        <p:nvSpPr>
+          <p:cNvPr id="7" name="Rounded Rectangle 6"/>
+          <p:cNvSpPr/>
+          <p:nvPr/>
+        </p:nvSpPr>
+        <p:spPr>
+          <a:xfrm>
+            <a:off x="685800" y="1737360"/>
+            <a:ext cx="10972800" cy="3611880"/>
+          </a:xfrm>
+          <a:prstGeom prst="roundRect">
+            <a:avLst/>
+          </a:prstGeom>
+          <a:solidFill>
+            <a:srgbClr val="F4F7FB"/>
+          </a:solidFill>
+          <a:ln>
+            <a:solidFill>
+              <a:srgbClr val="D2DCE8"/>
+            </a:solidFill>
+          </a:ln>
+        </p:spPr>
+        <p:style>
+          <a:lnRef idx="1">
+            <a:schemeClr val="accent1"/>
+          </a:lnRef>
+          <a:fillRef idx="3">
+            <a:schemeClr val="accent1"/>
+          </a:fillRef>
+          <a:effectRef idx="2">
+            <a:schemeClr val="accent1"/>
+          </a:effectRef>
+          <a:fontRef idx="minor">
+            <a:schemeClr val="lt1"/>
+          </a:fontRef>
+        </p:style>
+        <p:txBody>
+          <a:bodyPr rtlCol="0" anchor="ctr"/>
+          <a:lstStyle/>
+          <a:p>
+            <a:pPr algn="ctr"/>
+          </a:p>
+        </p:txBody>
+      </p:sp>
+      <p:sp>
+        <p:nvSpPr>
+          <p:cNvPr id="8" name="TextBox 7"/>
+          <p:cNvSpPr txBox="1"/>
+          <p:nvPr/>
+        </p:nvSpPr>
+        <p:spPr>
+          <a:xfrm>
+            <a:off x="896112" y="1993392"/>
+            <a:ext cx="10332720" cy="2971800"/>
+          </a:xfrm>
+          <a:prstGeom prst="rect">
+            <a:avLst/>
+          </a:prstGeom>
+          <a:noFill/>
+        </p:spPr>
+        <p:txBody>
+          <a:bodyPr wrap="square" lIns="109728" rIns="109728">
+            <a:spAutoFit/>
+          </a:bodyPr>
+          <a:lstStyle/>
+          <a:p>
+            <a:pPr>
+              <a:spcAft>
+                <a:spcPts val="800"/>
+              </a:spcAft>
+              <a:defRPr sz="1800">
+                <a:solidFill>
+                  <a:srgbClr val="122C4E"/>
+                </a:solidFill>
+                <a:latin typeface="Noto Sans CJK KR"/>
+              </a:defRPr>
+            </a:pPr>
+            <a:r>
+              <a:t>• □ 완료 화면: /cmd_vel에서 odom과 바퀴 구동 topic으로 이어지는 경로를 확인한다.</a:t>
+            </a:r>
+          </a:p>
+          <a:p>
+            <a:pPr>
+              <a:spcAft>
+                <a:spcPts val="800"/>
+              </a:spcAft>
+              <a:defRPr sz="1800">
+                <a:solidFill>
+                  <a:srgbClr val="122C4E"/>
+                </a:solidFill>
+                <a:latin typeface="Noto Sans CJK KR"/>
+              </a:defRPr>
+            </a:pPr>
+            <a:r>
+              <a:t>• □ 막혔을 때 비교할 Complete: blocks/C_drive_visualization/M09_differential_drive/complete/</a:t>
+            </a:r>
+          </a:p>
+          <a:p>
+            <a:pPr>
+              <a:spcAft>
+                <a:spcPts val="800"/>
+              </a:spcAft>
+              <a:defRPr sz="1800">
+                <a:solidFill>
+                  <a:srgbClr val="122C4E"/>
+                </a:solidFill>
+                <a:latin typeface="Noto Sans CJK KR"/>
+              </a:defRPr>
+            </a:pPr>
+            <a:r>
+              <a:t>• □ 정상 로그·캡처: logs/validation.log, screenshots/validation_terminal.png</a:t>
+            </a:r>
+          </a:p>
+          <a:p>
+            <a:pPr>
+              <a:spcAft>
+                <a:spcPts val="800"/>
+              </a:spcAft>
+              <a:defRPr sz="1800">
+                <a:solidFill>
+                  <a:srgbClr val="122C4E"/>
+                </a:solidFill>
+                <a:latin typeface="Noto Sans CJK KR"/>
+              </a:defRPr>
+            </a:pPr>
+            <a:r>
+              <a:t>• □ 버전 식별: CHECKSUM_or_TAG.txt의 SHA-256 manifest</a:t>
+            </a:r>
+          </a:p>
+          <a:p>
+            <a:pPr>
+              <a:spcAft>
+                <a:spcPts val="800"/>
+              </a:spcAft>
+              <a:defRPr sz="1800">
+                <a:solidFill>
+                  <a:srgbClr val="122C4E"/>
+                </a:solidFill>
+                <a:latin typeface="Noto Sans CJK KR"/>
+              </a:defRPr>
+            </a:pPr>
+            <a:r>
+              <a:t>• □ 다음 시작 조건: M10 ros_gz_bridge</a:t>
+            </a:r>
+          </a:p>
+        </p:txBody>
+      </p:sp>
+      <p:sp>
+        <p:nvSpPr>
+          <p:cNvPr id="9" name="TextBox 8"/>
+          <p:cNvSpPr txBox="1"/>
+          <p:nvPr/>
+        </p:nvSpPr>
+        <p:spPr>
+          <a:xfrm>
+            <a:off x="868680" y="5596128"/>
+            <a:ext cx="10515600" cy="338328"/>
+          </a:xfrm>
+          <a:prstGeom prst="rect">
+            <a:avLst/>
+          </a:prstGeom>
+          <a:noFill/>
+        </p:spPr>
+        <p:txBody>
+          <a:bodyPr wrap="square" lIns="73152" rIns="73152" tIns="36576" bIns="36576">
+            <a:spAutoFit/>
+          </a:bodyPr>
+          <a:lstStyle/>
+          <a:p>
+            <a:pPr algn="ctr">
+              <a:spcAft>
+                <a:spcPts val="0"/>
+              </a:spcAft>
+              <a:defRPr sz="1700" b="1">
+                <a:solidFill>
+                  <a:srgbClr val="2A8B5A"/>
+                </a:solidFill>
+                <a:latin typeface="Noto Sans CJK KR"/>
+              </a:defRPr>
+            </a:pPr>
+            <a:r>
+              <a:t>다음 모듈을 시작하기 전, 내 src의 변경사항을 저장하고 현재 완료 조건을 다시 확인합니다.</a:t>
+            </a:r>
+          </a:p>
+        </p:txBody>
+      </p:sp>
+    </p:spTree>
+  </p:cSld>
+  <p:clrMapOvr>
+    <a:masterClrMapping/>
+  </p:clrMapOvr>
+</p:sld>
+</file>
+
+<file path=ppt/slides/slide72.xml><?xml version="1.0" encoding="utf-8"?>
 <p:sld xmlns:a="http://schemas.openxmlformats.org/drawingml/2006/main" xmlns:p="http://schemas.openxmlformats.org/presentationml/2006/main" xmlns:r="http://schemas.openxmlformats.org/officeDocument/2006/relationships">
   <p:cSld>
     <p:spTree>
